--- a/2025/LEC/06-1 многомерные ВР.pptx
+++ b/2025/LEC/06-1 многомерные ВР.pptx
@@ -4,14 +4,21 @@
   <p:sldMasterIdLst>
     <p:sldMasterId id="2147483648" r:id="rId1"/>
   </p:sldMasterIdLst>
+  <p:notesMasterIdLst>
+    <p:notesMasterId r:id="rId13"/>
+  </p:notesMasterIdLst>
   <p:sldIdLst>
     <p:sldId id="256" r:id="rId2"/>
     <p:sldId id="258" r:id="rId3"/>
-    <p:sldId id="261" r:id="rId4"/>
-    <p:sldId id="260" r:id="rId5"/>
-    <p:sldId id="259" r:id="rId6"/>
-    <p:sldId id="262" r:id="rId7"/>
-    <p:sldId id="263" r:id="rId8"/>
+    <p:sldId id="260" r:id="rId4"/>
+    <p:sldId id="261" r:id="rId5"/>
+    <p:sldId id="265" r:id="rId6"/>
+    <p:sldId id="264" r:id="rId7"/>
+    <p:sldId id="266" r:id="rId8"/>
+    <p:sldId id="267" r:id="rId9"/>
+    <p:sldId id="262" r:id="rId10"/>
+    <p:sldId id="259" r:id="rId11"/>
+    <p:sldId id="263" r:id="rId12"/>
   </p:sldIdLst>
   <p:sldSz cx="12192000" cy="6858000"/>
   <p:notesSz cx="6858000" cy="9144000"/>
@@ -110,7 +117,492 @@
       </a:defRPr>
     </a:lvl9pPr>
   </p:defaultTextStyle>
+  <p:extLst>
+    <p:ext uri="{EFAFB233-063F-42B5-8137-9DF3F51BA10A}">
+      <p15:sldGuideLst xmlns:p15="http://schemas.microsoft.com/office/powerpoint/2012/main"/>
+    </p:ext>
+  </p:extLst>
 </p:presentation>
+</file>
+
+<file path=ppt/notesMasters/notesMaster1.xml><?xml version="1.0" encoding="utf-8"?>
+<p:notesMaster xmlns:a="http://schemas.openxmlformats.org/drawingml/2006/main" xmlns:r="http://schemas.openxmlformats.org/officeDocument/2006/relationships" xmlns:p="http://schemas.openxmlformats.org/presentationml/2006/main">
+  <p:cSld>
+    <p:bg>
+      <p:bgRef idx="1001">
+        <a:schemeClr val="bg1"/>
+      </p:bgRef>
+    </p:bg>
+    <p:spTree>
+      <p:nvGrpSpPr>
+        <p:cNvPr id="1" name=""/>
+        <p:cNvGrpSpPr/>
+        <p:nvPr/>
+      </p:nvGrpSpPr>
+      <p:grpSpPr>
+        <a:xfrm>
+          <a:off x="0" y="0"/>
+          <a:ext cx="0" cy="0"/>
+          <a:chOff x="0" y="0"/>
+          <a:chExt cx="0" cy="0"/>
+        </a:xfrm>
+      </p:grpSpPr>
+      <p:sp>
+        <p:nvSpPr>
+          <p:cNvPr id="2" name="Верхний колонтитул 1"/>
+          <p:cNvSpPr>
+            <a:spLocks noGrp="1"/>
+          </p:cNvSpPr>
+          <p:nvPr>
+            <p:ph type="hdr" sz="quarter"/>
+          </p:nvPr>
+        </p:nvSpPr>
+        <p:spPr>
+          <a:xfrm>
+            <a:off x="0" y="0"/>
+            <a:ext cx="2971800" cy="458788"/>
+          </a:xfrm>
+          <a:prstGeom prst="rect">
+            <a:avLst/>
+          </a:prstGeom>
+        </p:spPr>
+        <p:txBody>
+          <a:bodyPr vert="horz" lIns="91440" tIns="45720" rIns="91440" bIns="45720" rtlCol="0"/>
+          <a:lstStyle>
+            <a:lvl1pPr algn="l">
+              <a:defRPr sz="1200"/>
+            </a:lvl1pPr>
+          </a:lstStyle>
+          <a:p>
+            <a:endParaRPr lang="ru-RU"/>
+          </a:p>
+        </p:txBody>
+      </p:sp>
+      <p:sp>
+        <p:nvSpPr>
+          <p:cNvPr id="3" name="Дата 2"/>
+          <p:cNvSpPr>
+            <a:spLocks noGrp="1"/>
+          </p:cNvSpPr>
+          <p:nvPr>
+            <p:ph type="dt" idx="1"/>
+          </p:nvPr>
+        </p:nvSpPr>
+        <p:spPr>
+          <a:xfrm>
+            <a:off x="3884613" y="0"/>
+            <a:ext cx="2971800" cy="458788"/>
+          </a:xfrm>
+          <a:prstGeom prst="rect">
+            <a:avLst/>
+          </a:prstGeom>
+        </p:spPr>
+        <p:txBody>
+          <a:bodyPr vert="horz" lIns="91440" tIns="45720" rIns="91440" bIns="45720" rtlCol="0"/>
+          <a:lstStyle>
+            <a:lvl1pPr algn="r">
+              <a:defRPr sz="1200"/>
+            </a:lvl1pPr>
+          </a:lstStyle>
+          <a:p>
+            <a:fld id="{0170C974-C971-49AB-9DB3-26D8F572511A}" type="datetimeFigureOut">
+              <a:rPr lang="ru-RU" smtClean="0"/>
+              <a:t>07.08.2025</a:t>
+            </a:fld>
+            <a:endParaRPr lang="ru-RU"/>
+          </a:p>
+        </p:txBody>
+      </p:sp>
+      <p:sp>
+        <p:nvSpPr>
+          <p:cNvPr id="4" name="Образ слайда 3"/>
+          <p:cNvSpPr>
+            <a:spLocks noGrp="1" noRot="1" noChangeAspect="1"/>
+          </p:cNvSpPr>
+          <p:nvPr>
+            <p:ph type="sldImg" idx="2"/>
+          </p:nvPr>
+        </p:nvSpPr>
+        <p:spPr>
+          <a:xfrm>
+            <a:off x="685800" y="1143000"/>
+            <a:ext cx="5486400" cy="3086100"/>
+          </a:xfrm>
+          <a:prstGeom prst="rect">
+            <a:avLst/>
+          </a:prstGeom>
+          <a:noFill/>
+          <a:ln w="12700">
+            <a:solidFill>
+              <a:prstClr val="black"/>
+            </a:solidFill>
+          </a:ln>
+        </p:spPr>
+        <p:txBody>
+          <a:bodyPr vert="horz" lIns="91440" tIns="45720" rIns="91440" bIns="45720" rtlCol="0" anchor="ctr"/>
+          <a:lstStyle/>
+          <a:p>
+            <a:endParaRPr lang="ru-RU"/>
+          </a:p>
+        </p:txBody>
+      </p:sp>
+      <p:sp>
+        <p:nvSpPr>
+          <p:cNvPr id="5" name="Заметки 4"/>
+          <p:cNvSpPr>
+            <a:spLocks noGrp="1"/>
+          </p:cNvSpPr>
+          <p:nvPr>
+            <p:ph type="body" sz="quarter" idx="3"/>
+          </p:nvPr>
+        </p:nvSpPr>
+        <p:spPr>
+          <a:xfrm>
+            <a:off x="685800" y="4400550"/>
+            <a:ext cx="5486400" cy="3600450"/>
+          </a:xfrm>
+          <a:prstGeom prst="rect">
+            <a:avLst/>
+          </a:prstGeom>
+        </p:spPr>
+        <p:txBody>
+          <a:bodyPr vert="horz" lIns="91440" tIns="45720" rIns="91440" bIns="45720" rtlCol="0"/>
+          <a:lstStyle/>
+          <a:p>
+            <a:pPr lvl="0"/>
+            <a:r>
+              <a:rPr lang="ru-RU" smtClean="0"/>
+              <a:t>Образец текста</a:t>
+            </a:r>
+          </a:p>
+          <a:p>
+            <a:pPr lvl="1"/>
+            <a:r>
+              <a:rPr lang="ru-RU" smtClean="0"/>
+              <a:t>Второй уровень</a:t>
+            </a:r>
+          </a:p>
+          <a:p>
+            <a:pPr lvl="2"/>
+            <a:r>
+              <a:rPr lang="ru-RU" smtClean="0"/>
+              <a:t>Третий уровень</a:t>
+            </a:r>
+          </a:p>
+          <a:p>
+            <a:pPr lvl="3"/>
+            <a:r>
+              <a:rPr lang="ru-RU" smtClean="0"/>
+              <a:t>Четвертый уровень</a:t>
+            </a:r>
+          </a:p>
+          <a:p>
+            <a:pPr lvl="4"/>
+            <a:r>
+              <a:rPr lang="ru-RU" smtClean="0"/>
+              <a:t>Пятый уровень</a:t>
+            </a:r>
+            <a:endParaRPr lang="ru-RU"/>
+          </a:p>
+        </p:txBody>
+      </p:sp>
+      <p:sp>
+        <p:nvSpPr>
+          <p:cNvPr id="6" name="Нижний колонтитул 5"/>
+          <p:cNvSpPr>
+            <a:spLocks noGrp="1"/>
+          </p:cNvSpPr>
+          <p:nvPr>
+            <p:ph type="ftr" sz="quarter" idx="4"/>
+          </p:nvPr>
+        </p:nvSpPr>
+        <p:spPr>
+          <a:xfrm>
+            <a:off x="0" y="8685213"/>
+            <a:ext cx="2971800" cy="458787"/>
+          </a:xfrm>
+          <a:prstGeom prst="rect">
+            <a:avLst/>
+          </a:prstGeom>
+        </p:spPr>
+        <p:txBody>
+          <a:bodyPr vert="horz" lIns="91440" tIns="45720" rIns="91440" bIns="45720" rtlCol="0" anchor="b"/>
+          <a:lstStyle>
+            <a:lvl1pPr algn="l">
+              <a:defRPr sz="1200"/>
+            </a:lvl1pPr>
+          </a:lstStyle>
+          <a:p>
+            <a:endParaRPr lang="ru-RU"/>
+          </a:p>
+        </p:txBody>
+      </p:sp>
+      <p:sp>
+        <p:nvSpPr>
+          <p:cNvPr id="7" name="Номер слайда 6"/>
+          <p:cNvSpPr>
+            <a:spLocks noGrp="1"/>
+          </p:cNvSpPr>
+          <p:nvPr>
+            <p:ph type="sldNum" sz="quarter" idx="5"/>
+          </p:nvPr>
+        </p:nvSpPr>
+        <p:spPr>
+          <a:xfrm>
+            <a:off x="3884613" y="8685213"/>
+            <a:ext cx="2971800" cy="458787"/>
+          </a:xfrm>
+          <a:prstGeom prst="rect">
+            <a:avLst/>
+          </a:prstGeom>
+        </p:spPr>
+        <p:txBody>
+          <a:bodyPr vert="horz" lIns="91440" tIns="45720" rIns="91440" bIns="45720" rtlCol="0" anchor="b"/>
+          <a:lstStyle>
+            <a:lvl1pPr algn="r">
+              <a:defRPr sz="1200"/>
+            </a:lvl1pPr>
+          </a:lstStyle>
+          <a:p>
+            <a:fld id="{E5904A68-FE9C-41D3-96AD-A1A68ED6C497}" type="slidenum">
+              <a:rPr lang="ru-RU" smtClean="0"/>
+              <a:t>‹#›</a:t>
+            </a:fld>
+            <a:endParaRPr lang="ru-RU"/>
+          </a:p>
+        </p:txBody>
+      </p:sp>
+    </p:spTree>
+    <p:extLst>
+      <p:ext uri="{BB962C8B-B14F-4D97-AF65-F5344CB8AC3E}">
+        <p14:creationId xmlns:p14="http://schemas.microsoft.com/office/powerpoint/2010/main" val="2377778367"/>
+      </p:ext>
+    </p:extLst>
+  </p:cSld>
+  <p:clrMap bg1="lt1" tx1="dk1" bg2="lt2" tx2="dk2" accent1="accent1" accent2="accent2" accent3="accent3" accent4="accent4" accent5="accent5" accent6="accent6" hlink="hlink" folHlink="folHlink"/>
+  <p:notesStyle>
+    <a:lvl1pPr marL="0" algn="l" defTabSz="914400" rtl="0" eaLnBrk="1" latinLnBrk="0" hangingPunct="1">
+      <a:defRPr sz="1200" kern="1200">
+        <a:solidFill>
+          <a:schemeClr val="tx1"/>
+        </a:solidFill>
+        <a:latin typeface="+mn-lt"/>
+        <a:ea typeface="+mn-ea"/>
+        <a:cs typeface="+mn-cs"/>
+      </a:defRPr>
+    </a:lvl1pPr>
+    <a:lvl2pPr marL="457200" algn="l" defTabSz="914400" rtl="0" eaLnBrk="1" latinLnBrk="0" hangingPunct="1">
+      <a:defRPr sz="1200" kern="1200">
+        <a:solidFill>
+          <a:schemeClr val="tx1"/>
+        </a:solidFill>
+        <a:latin typeface="+mn-lt"/>
+        <a:ea typeface="+mn-ea"/>
+        <a:cs typeface="+mn-cs"/>
+      </a:defRPr>
+    </a:lvl2pPr>
+    <a:lvl3pPr marL="914400" algn="l" defTabSz="914400" rtl="0" eaLnBrk="1" latinLnBrk="0" hangingPunct="1">
+      <a:defRPr sz="1200" kern="1200">
+        <a:solidFill>
+          <a:schemeClr val="tx1"/>
+        </a:solidFill>
+        <a:latin typeface="+mn-lt"/>
+        <a:ea typeface="+mn-ea"/>
+        <a:cs typeface="+mn-cs"/>
+      </a:defRPr>
+    </a:lvl3pPr>
+    <a:lvl4pPr marL="1371600" algn="l" defTabSz="914400" rtl="0" eaLnBrk="1" latinLnBrk="0" hangingPunct="1">
+      <a:defRPr sz="1200" kern="1200">
+        <a:solidFill>
+          <a:schemeClr val="tx1"/>
+        </a:solidFill>
+        <a:latin typeface="+mn-lt"/>
+        <a:ea typeface="+mn-ea"/>
+        <a:cs typeface="+mn-cs"/>
+      </a:defRPr>
+    </a:lvl4pPr>
+    <a:lvl5pPr marL="1828800" algn="l" defTabSz="914400" rtl="0" eaLnBrk="1" latinLnBrk="0" hangingPunct="1">
+      <a:defRPr sz="1200" kern="1200">
+        <a:solidFill>
+          <a:schemeClr val="tx1"/>
+        </a:solidFill>
+        <a:latin typeface="+mn-lt"/>
+        <a:ea typeface="+mn-ea"/>
+        <a:cs typeface="+mn-cs"/>
+      </a:defRPr>
+    </a:lvl5pPr>
+    <a:lvl6pPr marL="2286000" algn="l" defTabSz="914400" rtl="0" eaLnBrk="1" latinLnBrk="0" hangingPunct="1">
+      <a:defRPr sz="1200" kern="1200">
+        <a:solidFill>
+          <a:schemeClr val="tx1"/>
+        </a:solidFill>
+        <a:latin typeface="+mn-lt"/>
+        <a:ea typeface="+mn-ea"/>
+        <a:cs typeface="+mn-cs"/>
+      </a:defRPr>
+    </a:lvl6pPr>
+    <a:lvl7pPr marL="2743200" algn="l" defTabSz="914400" rtl="0" eaLnBrk="1" latinLnBrk="0" hangingPunct="1">
+      <a:defRPr sz="1200" kern="1200">
+        <a:solidFill>
+          <a:schemeClr val="tx1"/>
+        </a:solidFill>
+        <a:latin typeface="+mn-lt"/>
+        <a:ea typeface="+mn-ea"/>
+        <a:cs typeface="+mn-cs"/>
+      </a:defRPr>
+    </a:lvl7pPr>
+    <a:lvl8pPr marL="3200400" algn="l" defTabSz="914400" rtl="0" eaLnBrk="1" latinLnBrk="0" hangingPunct="1">
+      <a:defRPr sz="1200" kern="1200">
+        <a:solidFill>
+          <a:schemeClr val="tx1"/>
+        </a:solidFill>
+        <a:latin typeface="+mn-lt"/>
+        <a:ea typeface="+mn-ea"/>
+        <a:cs typeface="+mn-cs"/>
+      </a:defRPr>
+    </a:lvl8pPr>
+    <a:lvl9pPr marL="3657600" algn="l" defTabSz="914400" rtl="0" eaLnBrk="1" latinLnBrk="0" hangingPunct="1">
+      <a:defRPr sz="1200" kern="1200">
+        <a:solidFill>
+          <a:schemeClr val="tx1"/>
+        </a:solidFill>
+        <a:latin typeface="+mn-lt"/>
+        <a:ea typeface="+mn-ea"/>
+        <a:cs typeface="+mn-cs"/>
+      </a:defRPr>
+    </a:lvl9pPr>
+  </p:notesStyle>
+</p:notesMaster>
+</file>
+
+<file path=ppt/notesSlides/notesSlide1.xml><?xml version="1.0" encoding="utf-8"?>
+<p:notes xmlns:a="http://schemas.openxmlformats.org/drawingml/2006/main" xmlns:r="http://schemas.openxmlformats.org/officeDocument/2006/relationships" xmlns:p="http://schemas.openxmlformats.org/presentationml/2006/main">
+  <p:cSld>
+    <p:spTree>
+      <p:nvGrpSpPr>
+        <p:cNvPr id="1" name=""/>
+        <p:cNvGrpSpPr/>
+        <p:nvPr/>
+      </p:nvGrpSpPr>
+      <p:grpSpPr>
+        <a:xfrm>
+          <a:off x="0" y="0"/>
+          <a:ext cx="0" cy="0"/>
+          <a:chOff x="0" y="0"/>
+          <a:chExt cx="0" cy="0"/>
+        </a:xfrm>
+      </p:grpSpPr>
+      <p:sp>
+        <p:nvSpPr>
+          <p:cNvPr id="2" name="Образ слайда 1"/>
+          <p:cNvSpPr>
+            <a:spLocks noGrp="1" noRot="1" noChangeAspect="1"/>
+          </p:cNvSpPr>
+          <p:nvPr>
+            <p:ph type="sldImg"/>
+          </p:nvPr>
+        </p:nvSpPr>
+        <p:spPr/>
+      </p:sp>
+      <p:sp>
+        <p:nvSpPr>
+          <p:cNvPr id="3" name="Заметки 2"/>
+          <p:cNvSpPr>
+            <a:spLocks noGrp="1"/>
+          </p:cNvSpPr>
+          <p:nvPr>
+            <p:ph type="body" idx="1"/>
+          </p:nvPr>
+        </p:nvSpPr>
+        <p:spPr/>
+        <p:txBody>
+          <a:bodyPr/>
+          <a:lstStyle/>
+          <a:p>
+            <a:r>
+              <a:rPr lang="ru-RU" sz="1200" b="0" i="0" kern="1200" dirty="0" smtClean="0">
+                <a:solidFill>
+                  <a:schemeClr val="tx1"/>
+                </a:solidFill>
+                <a:effectLst/>
+                <a:latin typeface="+mn-lt"/>
+                <a:ea typeface="+mn-ea"/>
+                <a:cs typeface="+mn-cs"/>
+              </a:rPr>
+              <a:t>Brent−0.8⋅Бензин−0.7⋅Дизель∼</a:t>
+            </a:r>
+            <a:r>
+              <a:rPr lang="ru-RU" sz="1200" b="0" i="1" kern="1200" dirty="0" smtClean="0">
+                <a:solidFill>
+                  <a:schemeClr val="tx1"/>
+                </a:solidFill>
+                <a:effectLst/>
+                <a:latin typeface="+mn-lt"/>
+                <a:ea typeface="+mn-ea"/>
+                <a:cs typeface="+mn-cs"/>
+              </a:rPr>
+              <a:t>I</a:t>
+            </a:r>
+            <a:r>
+              <a:rPr lang="ru-RU" sz="1200" b="0" i="0" kern="1200" dirty="0" smtClean="0">
+                <a:solidFill>
+                  <a:schemeClr val="tx1"/>
+                </a:solidFill>
+                <a:effectLst/>
+                <a:latin typeface="+mn-lt"/>
+                <a:ea typeface="+mn-ea"/>
+                <a:cs typeface="+mn-cs"/>
+              </a:rPr>
+              <a:t>(0)</a:t>
+            </a:r>
+          </a:p>
+          <a:p>
+            <a:r>
+              <a:rPr lang="ru-RU" b="0" dirty="0" smtClean="0">
+                <a:effectLst/>
+              </a:rPr>
+              <a:t>Это означает: маржа между нефтью и продуктами стабильна — возможен арбитраж. </a:t>
+            </a:r>
+          </a:p>
+          <a:p>
+            <a:endParaRPr lang="ru-RU" dirty="0"/>
+          </a:p>
+        </p:txBody>
+      </p:sp>
+      <p:sp>
+        <p:nvSpPr>
+          <p:cNvPr id="4" name="Номер слайда 3"/>
+          <p:cNvSpPr>
+            <a:spLocks noGrp="1"/>
+          </p:cNvSpPr>
+          <p:nvPr>
+            <p:ph type="sldNum" sz="quarter" idx="10"/>
+          </p:nvPr>
+        </p:nvSpPr>
+        <p:spPr/>
+        <p:txBody>
+          <a:bodyPr/>
+          <a:lstStyle/>
+          <a:p>
+            <a:fld id="{E5904A68-FE9C-41D3-96AD-A1A68ED6C497}" type="slidenum">
+              <a:rPr lang="ru-RU" smtClean="0"/>
+              <a:t>7</a:t>
+            </a:fld>
+            <a:endParaRPr lang="ru-RU"/>
+          </a:p>
+        </p:txBody>
+      </p:sp>
+    </p:spTree>
+    <p:extLst>
+      <p:ext uri="{BB962C8B-B14F-4D97-AF65-F5344CB8AC3E}">
+        <p14:creationId xmlns:p14="http://schemas.microsoft.com/office/powerpoint/2010/main" val="3920822745"/>
+      </p:ext>
+    </p:extLst>
+  </p:cSld>
+  <p:clrMapOvr>
+    <a:masterClrMapping/>
+  </p:clrMapOvr>
+</p:notes>
 </file>
 
 <file path=ppt/slideLayouts/slideLayout1.xml><?xml version="1.0" encoding="utf-8"?>
@@ -244,7 +736,7 @@
           <a:p>
             <a:fld id="{E36C04D8-B49B-4D86-A6B2-820C9FC8BA05}" type="datetimeFigureOut">
               <a:rPr lang="ru-RU" smtClean="0"/>
-              <a:t>05.08.2025</a:t>
+              <a:t>07.08.2025</a:t>
             </a:fld>
             <a:endParaRPr lang="ru-RU"/>
           </a:p>
@@ -414,7 +906,7 @@
           <a:p>
             <a:fld id="{E36C04D8-B49B-4D86-A6B2-820C9FC8BA05}" type="datetimeFigureOut">
               <a:rPr lang="ru-RU" smtClean="0"/>
-              <a:t>05.08.2025</a:t>
+              <a:t>07.08.2025</a:t>
             </a:fld>
             <a:endParaRPr lang="ru-RU"/>
           </a:p>
@@ -594,7 +1086,7 @@
           <a:p>
             <a:fld id="{E36C04D8-B49B-4D86-A6B2-820C9FC8BA05}" type="datetimeFigureOut">
               <a:rPr lang="ru-RU" smtClean="0"/>
-              <a:t>05.08.2025</a:t>
+              <a:t>07.08.2025</a:t>
             </a:fld>
             <a:endParaRPr lang="ru-RU"/>
           </a:p>
@@ -764,7 +1256,7 @@
           <a:p>
             <a:fld id="{E36C04D8-B49B-4D86-A6B2-820C9FC8BA05}" type="datetimeFigureOut">
               <a:rPr lang="ru-RU" smtClean="0"/>
-              <a:t>05.08.2025</a:t>
+              <a:t>07.08.2025</a:t>
             </a:fld>
             <a:endParaRPr lang="ru-RU"/>
           </a:p>
@@ -1010,7 +1502,7 @@
           <a:p>
             <a:fld id="{E36C04D8-B49B-4D86-A6B2-820C9FC8BA05}" type="datetimeFigureOut">
               <a:rPr lang="ru-RU" smtClean="0"/>
-              <a:t>05.08.2025</a:t>
+              <a:t>07.08.2025</a:t>
             </a:fld>
             <a:endParaRPr lang="ru-RU"/>
           </a:p>
@@ -1242,7 +1734,7 @@
           <a:p>
             <a:fld id="{E36C04D8-B49B-4D86-A6B2-820C9FC8BA05}" type="datetimeFigureOut">
               <a:rPr lang="ru-RU" smtClean="0"/>
-              <a:t>05.08.2025</a:t>
+              <a:t>07.08.2025</a:t>
             </a:fld>
             <a:endParaRPr lang="ru-RU"/>
           </a:p>
@@ -1609,7 +2101,7 @@
           <a:p>
             <a:fld id="{E36C04D8-B49B-4D86-A6B2-820C9FC8BA05}" type="datetimeFigureOut">
               <a:rPr lang="ru-RU" smtClean="0"/>
-              <a:t>05.08.2025</a:t>
+              <a:t>07.08.2025</a:t>
             </a:fld>
             <a:endParaRPr lang="ru-RU"/>
           </a:p>
@@ -1727,7 +2219,7 @@
           <a:p>
             <a:fld id="{E36C04D8-B49B-4D86-A6B2-820C9FC8BA05}" type="datetimeFigureOut">
               <a:rPr lang="ru-RU" smtClean="0"/>
-              <a:t>05.08.2025</a:t>
+              <a:t>07.08.2025</a:t>
             </a:fld>
             <a:endParaRPr lang="ru-RU"/>
           </a:p>
@@ -1822,7 +2314,7 @@
           <a:p>
             <a:fld id="{E36C04D8-B49B-4D86-A6B2-820C9FC8BA05}" type="datetimeFigureOut">
               <a:rPr lang="ru-RU" smtClean="0"/>
-              <a:t>05.08.2025</a:t>
+              <a:t>07.08.2025</a:t>
             </a:fld>
             <a:endParaRPr lang="ru-RU"/>
           </a:p>
@@ -2099,7 +2591,7 @@
           <a:p>
             <a:fld id="{E36C04D8-B49B-4D86-A6B2-820C9FC8BA05}" type="datetimeFigureOut">
               <a:rPr lang="ru-RU" smtClean="0"/>
-              <a:t>05.08.2025</a:t>
+              <a:t>07.08.2025</a:t>
             </a:fld>
             <a:endParaRPr lang="ru-RU"/>
           </a:p>
@@ -2352,7 +2844,7 @@
           <a:p>
             <a:fld id="{E36C04D8-B49B-4D86-A6B2-820C9FC8BA05}" type="datetimeFigureOut">
               <a:rPr lang="ru-RU" smtClean="0"/>
-              <a:t>05.08.2025</a:t>
+              <a:t>07.08.2025</a:t>
             </a:fld>
             <a:endParaRPr lang="ru-RU"/>
           </a:p>
@@ -2565,7 +3057,7 @@
           <a:p>
             <a:fld id="{E36C04D8-B49B-4D86-A6B2-820C9FC8BA05}" type="datetimeFigureOut">
               <a:rPr lang="ru-RU" smtClean="0"/>
-              <a:t>05.08.2025</a:t>
+              <a:t>07.08.2025</a:t>
             </a:fld>
             <a:endParaRPr lang="ru-RU"/>
           </a:p>
@@ -3032,6 +3524,288 @@
 </p:sld>
 </file>
 
+<file path=ppt/slides/slide10.xml><?xml version="1.0" encoding="utf-8"?>
+<p:sld xmlns:a="http://schemas.openxmlformats.org/drawingml/2006/main" xmlns:r="http://schemas.openxmlformats.org/officeDocument/2006/relationships" xmlns:p="http://schemas.openxmlformats.org/presentationml/2006/main" show="0">
+  <p:cSld>
+    <p:spTree>
+      <p:nvGrpSpPr>
+        <p:cNvPr id="1" name=""/>
+        <p:cNvGrpSpPr/>
+        <p:nvPr/>
+      </p:nvGrpSpPr>
+      <p:grpSpPr>
+        <a:xfrm>
+          <a:off x="0" y="0"/>
+          <a:ext cx="0" cy="0"/>
+          <a:chOff x="0" y="0"/>
+          <a:chExt cx="0" cy="0"/>
+        </a:xfrm>
+      </p:grpSpPr>
+      <p:sp>
+        <p:nvSpPr>
+          <p:cNvPr id="2" name="Заголовок 1"/>
+          <p:cNvSpPr>
+            <a:spLocks noGrp="1"/>
+          </p:cNvSpPr>
+          <p:nvPr>
+            <p:ph type="title"/>
+          </p:nvPr>
+        </p:nvSpPr>
+        <p:spPr/>
+        <p:txBody>
+          <a:bodyPr/>
+          <a:lstStyle/>
+          <a:p>
+            <a:endParaRPr lang="ru-RU"/>
+          </a:p>
+        </p:txBody>
+      </p:sp>
+      <p:sp>
+        <p:nvSpPr>
+          <p:cNvPr id="3" name="Объект 2"/>
+          <p:cNvSpPr>
+            <a:spLocks noGrp="1"/>
+          </p:cNvSpPr>
+          <p:nvPr>
+            <p:ph idx="1"/>
+          </p:nvPr>
+        </p:nvSpPr>
+        <p:spPr>
+          <a:xfrm>
+            <a:off x="276225" y="2016125"/>
+            <a:ext cx="7762875" cy="4351338"/>
+          </a:xfrm>
+        </p:spPr>
+        <p:txBody>
+          <a:bodyPr>
+            <a:normAutofit lnSpcReduction="10000"/>
+          </a:bodyPr>
+          <a:lstStyle/>
+          <a:p>
+            <a:pPr marL="0" indent="0">
+              <a:buNone/>
+            </a:pPr>
+            <a:r>
+              <a:rPr lang="ru-RU" b="1" dirty="0" smtClean="0"/>
+              <a:t>Преимущества МВР:</a:t>
+            </a:r>
+            <a:endParaRPr lang="ru-RU" dirty="0" smtClean="0"/>
+          </a:p>
+          <a:p>
+            <a:r>
+              <a:rPr lang="ru-RU" dirty="0" smtClean="0"/>
+              <a:t>Учет взаимосвязей между переменными </a:t>
+            </a:r>
+          </a:p>
+          <a:p>
+            <a:pPr lvl="1"/>
+            <a:r>
+              <a:rPr lang="ru-RU" dirty="0" smtClean="0"/>
+              <a:t>Анализ причинно-следственных связей</a:t>
+            </a:r>
+          </a:p>
+          <a:p>
+            <a:pPr lvl="1"/>
+            <a:r>
+              <a:rPr lang="ru-RU" dirty="0" smtClean="0"/>
+              <a:t>Обнаружение общих трендов и циклов</a:t>
+            </a:r>
+          </a:p>
+          <a:p>
+            <a:r>
+              <a:rPr lang="ru-RU" dirty="0" smtClean="0"/>
+              <a:t>Возможность создания глобальных моделей – одна модель для группы ВР</a:t>
+            </a:r>
+          </a:p>
+          <a:p>
+            <a:pPr marL="0" indent="0">
+              <a:buNone/>
+            </a:pPr>
+            <a:r>
+              <a:rPr lang="ru-RU" b="1" dirty="0" smtClean="0"/>
+              <a:t>Проблемы МВР:</a:t>
+            </a:r>
+            <a:endParaRPr lang="ru-RU" dirty="0" smtClean="0"/>
+          </a:p>
+          <a:p>
+            <a:r>
+              <a:rPr lang="ru-RU" dirty="0" smtClean="0"/>
+              <a:t>Усложнение интерпретации</a:t>
+            </a:r>
+          </a:p>
+          <a:p>
+            <a:r>
+              <a:rPr lang="ru-RU" dirty="0" smtClean="0"/>
+              <a:t>Усложнение подбора </a:t>
+            </a:r>
+            <a:r>
+              <a:rPr lang="ru-RU" dirty="0" err="1" smtClean="0"/>
+              <a:t>гиперпараметров</a:t>
+            </a:r>
+            <a:r>
+              <a:rPr lang="ru-RU" dirty="0" smtClean="0"/>
+              <a:t> глобальных моделей</a:t>
+            </a:r>
+          </a:p>
+          <a:p>
+            <a:endParaRPr lang="ru-RU" dirty="0"/>
+          </a:p>
+        </p:txBody>
+      </p:sp>
+    </p:spTree>
+    <p:extLst>
+      <p:ext uri="{BB962C8B-B14F-4D97-AF65-F5344CB8AC3E}">
+        <p14:creationId xmlns:p14="http://schemas.microsoft.com/office/powerpoint/2010/main" val="539953052"/>
+      </p:ext>
+    </p:extLst>
+  </p:cSld>
+  <p:clrMapOvr>
+    <a:masterClrMapping/>
+  </p:clrMapOvr>
+  <mc:AlternateContent xmlns:mc="http://schemas.openxmlformats.org/markup-compatibility/2006">
+    <mc:Choice xmlns:p14="http://schemas.microsoft.com/office/powerpoint/2010/main" Requires="p14">
+      <p:transition spd="slow" p14:dur="2000"/>
+    </mc:Choice>
+    <mc:Fallback>
+      <p:transition spd="slow"/>
+    </mc:Fallback>
+  </mc:AlternateContent>
+  <p:timing>
+    <p:tnLst>
+      <p:par>
+        <p:cTn id="1" dur="indefinite" restart="never" nodeType="tmRoot"/>
+      </p:par>
+    </p:tnLst>
+  </p:timing>
+</p:sld>
+</file>
+
+<file path=ppt/slides/slide11.xml><?xml version="1.0" encoding="utf-8"?>
+<p:sld xmlns:a="http://schemas.openxmlformats.org/drawingml/2006/main" xmlns:r="http://schemas.openxmlformats.org/officeDocument/2006/relationships" xmlns:p="http://schemas.openxmlformats.org/presentationml/2006/main" show="0">
+  <p:cSld>
+    <p:spTree>
+      <p:nvGrpSpPr>
+        <p:cNvPr id="1" name=""/>
+        <p:cNvGrpSpPr/>
+        <p:nvPr/>
+      </p:nvGrpSpPr>
+      <p:grpSpPr>
+        <a:xfrm>
+          <a:off x="0" y="0"/>
+          <a:ext cx="0" cy="0"/>
+          <a:chOff x="0" y="0"/>
+          <a:chExt cx="0" cy="0"/>
+        </a:xfrm>
+      </p:grpSpPr>
+      <p:sp>
+        <p:nvSpPr>
+          <p:cNvPr id="2" name="Заголовок 1"/>
+          <p:cNvSpPr>
+            <a:spLocks noGrp="1"/>
+          </p:cNvSpPr>
+          <p:nvPr>
+            <p:ph type="title"/>
+          </p:nvPr>
+        </p:nvSpPr>
+        <p:spPr>
+          <a:xfrm>
+            <a:off x="247650" y="365125"/>
+            <a:ext cx="11106150" cy="815975"/>
+          </a:xfrm>
+        </p:spPr>
+        <p:txBody>
+          <a:bodyPr/>
+          <a:lstStyle/>
+          <a:p>
+            <a:r>
+              <a:rPr lang="ru-RU" dirty="0" smtClean="0"/>
+              <a:t>Особенности предварительного анализа МВР</a:t>
+            </a:r>
+            <a:endParaRPr lang="ru-RU" dirty="0"/>
+          </a:p>
+        </p:txBody>
+      </p:sp>
+      <p:sp>
+        <p:nvSpPr>
+          <p:cNvPr id="3" name="Объект 2"/>
+          <p:cNvSpPr>
+            <a:spLocks noGrp="1"/>
+          </p:cNvSpPr>
+          <p:nvPr>
+            <p:ph idx="1"/>
+          </p:nvPr>
+        </p:nvSpPr>
+        <p:spPr>
+          <a:xfrm>
+            <a:off x="247649" y="1181100"/>
+            <a:ext cx="11553825" cy="5286375"/>
+          </a:xfrm>
+        </p:spPr>
+        <p:txBody>
+          <a:bodyPr/>
+          <a:lstStyle/>
+          <a:p>
+            <a:r>
+              <a:rPr lang="ru-RU" dirty="0" smtClean="0"/>
+              <a:t>При МВР важно чтобы каждый ряд </a:t>
+            </a:r>
+            <a:r>
+              <a:rPr lang="ru-RU" dirty="0" err="1" smtClean="0"/>
+              <a:t>небыл</a:t>
+            </a:r>
+            <a:r>
+              <a:rPr lang="ru-RU" dirty="0" smtClean="0"/>
+              <a:t> сдвинутой копией другого. </a:t>
+            </a:r>
+          </a:p>
+          <a:p>
+            <a:pPr lvl="1"/>
+            <a:r>
+              <a:rPr lang="ru-RU" smtClean="0"/>
+              <a:t>Все </a:t>
+            </a:r>
+            <a:r>
+              <a:rPr lang="ru-RU" dirty="0" smtClean="0"/>
+              <a:t>ВР должны быть </a:t>
+            </a:r>
+            <a:r>
+              <a:rPr lang="ru-RU" smtClean="0"/>
+              <a:t>независимы.</a:t>
+            </a:r>
+          </a:p>
+          <a:p>
+            <a:endParaRPr lang="ru-RU" dirty="0"/>
+          </a:p>
+        </p:txBody>
+      </p:sp>
+    </p:spTree>
+    <p:extLst>
+      <p:ext uri="{BB962C8B-B14F-4D97-AF65-F5344CB8AC3E}">
+        <p14:creationId xmlns:p14="http://schemas.microsoft.com/office/powerpoint/2010/main" val="4081172957"/>
+      </p:ext>
+    </p:extLst>
+  </p:cSld>
+  <p:clrMapOvr>
+    <a:masterClrMapping/>
+  </p:clrMapOvr>
+  <mc:AlternateContent xmlns:mc="http://schemas.openxmlformats.org/markup-compatibility/2006">
+    <mc:Choice xmlns:p14="http://schemas.microsoft.com/office/powerpoint/2010/main" Requires="p14">
+      <p:transition spd="slow" p14:dur="2000"/>
+    </mc:Choice>
+    <mc:Fallback>
+      <p:transition spd="slow"/>
+    </mc:Fallback>
+  </mc:AlternateContent>
+  <p:timing>
+    <p:tnLst>
+      <p:par>
+        <p:cTn id="1" dur="indefinite" restart="never" nodeType="tmRoot"/>
+      </p:par>
+    </p:tnLst>
+  </p:timing>
+</p:sld>
+</file>
+
 <file path=ppt/slides/slide2.xml><?xml version="1.0" encoding="utf-8"?>
 <p:sld xmlns:a="http://schemas.openxmlformats.org/drawingml/2006/main" xmlns:r="http://schemas.openxmlformats.org/officeDocument/2006/relationships" xmlns:p="http://schemas.openxmlformats.org/presentationml/2006/main">
   <p:cSld>
@@ -3332,6 +4106,98 @@
         </p:nvSpPr>
         <p:spPr>
           <a:xfrm>
+            <a:off x="123823" y="250826"/>
+            <a:ext cx="11153775" cy="768350"/>
+          </a:xfrm>
+        </p:spPr>
+        <p:txBody>
+          <a:bodyPr/>
+          <a:lstStyle/>
+          <a:p>
+            <a:pPr algn="ctr"/>
+            <a:r>
+              <a:rPr lang="ru-RU" dirty="0" smtClean="0"/>
+              <a:t>Типы ВР: Многомерные ВР</a:t>
+            </a:r>
+            <a:endParaRPr lang="ru-RU" dirty="0"/>
+          </a:p>
+        </p:txBody>
+      </p:sp>
+      <p:pic>
+        <p:nvPicPr>
+          <p:cNvPr id="6" name="Объект 5"/>
+          <p:cNvPicPr>
+            <a:picLocks noGrp="1" noChangeAspect="1"/>
+          </p:cNvPicPr>
+          <p:nvPr>
+            <p:ph idx="1"/>
+          </p:nvPr>
+        </p:nvPicPr>
+        <p:blipFill>
+          <a:blip r:embed="rId2"/>
+          <a:stretch>
+            <a:fillRect/>
+          </a:stretch>
+        </p:blipFill>
+        <p:spPr>
+          <a:xfrm>
+            <a:off x="438149" y="942976"/>
+            <a:ext cx="10372726" cy="5740758"/>
+          </a:xfrm>
+          <a:prstGeom prst="rect">
+            <a:avLst/>
+          </a:prstGeom>
+        </p:spPr>
+      </p:pic>
+    </p:spTree>
+    <p:extLst>
+      <p:ext uri="{BB962C8B-B14F-4D97-AF65-F5344CB8AC3E}">
+        <p14:creationId xmlns:p14="http://schemas.microsoft.com/office/powerpoint/2010/main" val="4183419773"/>
+      </p:ext>
+    </p:extLst>
+  </p:cSld>
+  <p:clrMapOvr>
+    <a:masterClrMapping/>
+  </p:clrMapOvr>
+  <p:timing>
+    <p:tnLst>
+      <p:par>
+        <p:cTn id="1" dur="indefinite" restart="never" nodeType="tmRoot"/>
+      </p:par>
+    </p:tnLst>
+  </p:timing>
+</p:sld>
+</file>
+
+<file path=ppt/slides/slide4.xml><?xml version="1.0" encoding="utf-8"?>
+<p:sld xmlns:a="http://schemas.openxmlformats.org/drawingml/2006/main" xmlns:r="http://schemas.openxmlformats.org/officeDocument/2006/relationships" xmlns:p="http://schemas.openxmlformats.org/presentationml/2006/main">
+  <p:cSld>
+    <p:spTree>
+      <p:nvGrpSpPr>
+        <p:cNvPr id="1" name=""/>
+        <p:cNvGrpSpPr/>
+        <p:nvPr/>
+      </p:nvGrpSpPr>
+      <p:grpSpPr>
+        <a:xfrm>
+          <a:off x="0" y="0"/>
+          <a:ext cx="0" cy="0"/>
+          <a:chOff x="0" y="0"/>
+          <a:chExt cx="0" cy="0"/>
+        </a:xfrm>
+      </p:grpSpPr>
+      <p:sp>
+        <p:nvSpPr>
+          <p:cNvPr id="2" name="Заголовок 1"/>
+          <p:cNvSpPr>
+            <a:spLocks noGrp="1"/>
+          </p:cNvSpPr>
+          <p:nvPr>
+            <p:ph type="title"/>
+          </p:nvPr>
+        </p:nvSpPr>
+        <p:spPr>
+          <a:xfrm>
             <a:off x="352425" y="365126"/>
             <a:ext cx="11001375" cy="539750"/>
           </a:xfrm>
@@ -3345,147 +4211,6 @@
             <a:r>
               <a:rPr lang="ru-RU" dirty="0" smtClean="0"/>
               <a:t>Определение многомерных ВР</a:t>
-            </a:r>
-            <a:endParaRPr lang="ru-RU" dirty="0"/>
-          </a:p>
-        </p:txBody>
-      </p:sp>
-      <p:sp>
-        <p:nvSpPr>
-          <p:cNvPr id="3" name="Объект 2"/>
-          <p:cNvSpPr>
-            <a:spLocks noGrp="1"/>
-          </p:cNvSpPr>
-          <p:nvPr>
-            <p:ph idx="1"/>
-          </p:nvPr>
-        </p:nvSpPr>
-        <p:spPr>
-          <a:xfrm>
-            <a:off x="276224" y="904876"/>
-            <a:ext cx="11534775" cy="2762249"/>
-          </a:xfrm>
-        </p:spPr>
-        <p:txBody>
-          <a:bodyPr/>
-          <a:lstStyle/>
-          <a:p>
-            <a:pPr marL="0" indent="0" eaLnBrk="0" fontAlgn="base" hangingPunct="0">
-              <a:lnSpc>
-                <a:spcPct val="100000"/>
-              </a:lnSpc>
-              <a:spcBef>
-                <a:spcPts val="300"/>
-              </a:spcBef>
-              <a:spcAft>
-                <a:spcPct val="0"/>
-              </a:spcAft>
-              <a:buNone/>
-            </a:pPr>
-            <a:r>
-              <a:rPr lang="ru-RU" sz="2400" b="1" dirty="0" smtClean="0"/>
-              <a:t>Многомерный временной ряд</a:t>
-            </a:r>
-            <a:r>
-              <a:rPr lang="en-US" sz="2400" b="1" dirty="0" smtClean="0"/>
-              <a:t> </a:t>
-            </a:r>
-            <a:r>
-              <a:rPr lang="ru-RU" sz="2400" b="1" dirty="0" smtClean="0"/>
-              <a:t>(МВР)</a:t>
-            </a:r>
-            <a:r>
-              <a:rPr lang="ru-RU" sz="2400" dirty="0" smtClean="0"/>
-              <a:t> - это набор из одномерных временных рядов, наблюдаемых одновременно</a:t>
-            </a:r>
-            <a:r>
-              <a:rPr lang="en-US" sz="2400" dirty="0" smtClean="0"/>
-              <a:t> </a:t>
-            </a:r>
-            <a:r>
-              <a:rPr lang="ru-RU" sz="2400" b="1" dirty="0" smtClean="0"/>
-              <a:t>и имеющих общую информацию</a:t>
-            </a:r>
-            <a:r>
-              <a:rPr lang="en-US" sz="2400" b="1" dirty="0" smtClean="0"/>
-              <a:t>!</a:t>
-            </a:r>
-            <a:endParaRPr lang="ru-RU" altLang="ru-RU" sz="2400" b="1" dirty="0" smtClean="0"/>
-          </a:p>
-          <a:p>
-            <a:pPr eaLnBrk="0" fontAlgn="base" hangingPunct="0">
-              <a:lnSpc>
-                <a:spcPct val="100000"/>
-              </a:lnSpc>
-              <a:spcBef>
-                <a:spcPts val="600"/>
-              </a:spcBef>
-              <a:spcAft>
-                <a:spcPct val="0"/>
-              </a:spcAft>
-            </a:pPr>
-            <a:r>
-              <a:rPr lang="ru-RU" altLang="ru-RU" sz="2400" dirty="0" smtClean="0"/>
-              <a:t>Экономические </a:t>
-            </a:r>
-            <a:r>
-              <a:rPr lang="ru-RU" altLang="ru-RU" sz="2400" dirty="0"/>
-              <a:t>показатели: ВВП, инфляция, безработица </a:t>
-            </a:r>
-          </a:p>
-          <a:p>
-            <a:pPr eaLnBrk="0" fontAlgn="base" hangingPunct="0">
-              <a:lnSpc>
-                <a:spcPct val="100000"/>
-              </a:lnSpc>
-              <a:spcBef>
-                <a:spcPts val="600"/>
-              </a:spcBef>
-              <a:spcAft>
-                <a:spcPct val="0"/>
-              </a:spcAft>
-            </a:pPr>
-            <a:r>
-              <a:rPr lang="ru-RU" altLang="ru-RU" sz="2400" dirty="0"/>
-              <a:t>Финансовые данные: курсы валют, цены акций, процентные ставки </a:t>
-            </a:r>
-          </a:p>
-          <a:p>
-            <a:pPr eaLnBrk="0" fontAlgn="base" hangingPunct="0">
-              <a:lnSpc>
-                <a:spcPct val="100000"/>
-              </a:lnSpc>
-              <a:spcBef>
-                <a:spcPts val="600"/>
-              </a:spcBef>
-              <a:spcAft>
-                <a:spcPct val="0"/>
-              </a:spcAft>
-            </a:pPr>
-            <a:r>
-              <a:rPr lang="ru-RU" altLang="ru-RU" sz="2400" dirty="0" err="1"/>
-              <a:t>IoT</a:t>
-            </a:r>
-            <a:r>
-              <a:rPr lang="ru-RU" altLang="ru-RU" sz="2400" dirty="0"/>
-              <a:t> сенсоры: температура, влажность, давление, освещенность </a:t>
-            </a:r>
-          </a:p>
-          <a:p>
-            <a:pPr eaLnBrk="0" fontAlgn="base" hangingPunct="0">
-              <a:lnSpc>
-                <a:spcPct val="100000"/>
-              </a:lnSpc>
-              <a:spcBef>
-                <a:spcPts val="600"/>
-              </a:spcBef>
-              <a:spcAft>
-                <a:spcPct val="0"/>
-              </a:spcAft>
-            </a:pPr>
-            <a:r>
-              <a:rPr lang="ru-RU" altLang="ru-RU" sz="2400" dirty="0"/>
-              <a:t>Веб-аналитика: посещения, конверсия, время на сайте </a:t>
             </a:r>
             <a:endParaRPr lang="ru-RU" dirty="0"/>
           </a:p>
@@ -3500,13 +4225,13 @@
           <p:nvPr>
             <p:extLst>
               <p:ext uri="{D42A27DB-BD31-4B8C-83A1-F6EECF244321}">
-                <p14:modId xmlns:p14="http://schemas.microsoft.com/office/powerpoint/2010/main" val="1446674870"/>
+                <p14:modId xmlns:p14="http://schemas.microsoft.com/office/powerpoint/2010/main" val="788697473"/>
               </p:ext>
             </p:extLst>
           </p:nvPr>
         </p:nvGraphicFramePr>
         <p:xfrm>
-          <a:off x="352425" y="3597275"/>
+          <a:off x="142875" y="987425"/>
           <a:ext cx="11553825" cy="3105150"/>
         </p:xfrm>
         <a:graphic>
@@ -3945,57 +4670,20 @@
           </a:graphicData>
         </a:graphic>
       </p:graphicFrame>
-    </p:spTree>
-    <p:extLst>
-      <p:ext uri="{BB962C8B-B14F-4D97-AF65-F5344CB8AC3E}">
-        <p14:creationId xmlns:p14="http://schemas.microsoft.com/office/powerpoint/2010/main" val="3980958957"/>
-      </p:ext>
-    </p:extLst>
-  </p:cSld>
-  <p:clrMapOvr>
-    <a:masterClrMapping/>
-  </p:clrMapOvr>
-  <p:timing>
-    <p:tnLst>
-      <p:par>
-        <p:cTn id="1" dur="indefinite" restart="never" nodeType="tmRoot"/>
-      </p:par>
-    </p:tnLst>
-  </p:timing>
-</p:sld>
-</file>
-
-<file path=ppt/slides/slide4.xml><?xml version="1.0" encoding="utf-8"?>
-<p:sld xmlns:a="http://schemas.openxmlformats.org/drawingml/2006/main" xmlns:r="http://schemas.openxmlformats.org/officeDocument/2006/relationships" xmlns:p="http://schemas.openxmlformats.org/presentationml/2006/main">
-  <p:cSld>
-    <p:spTree>
-      <p:nvGrpSpPr>
-        <p:cNvPr id="1" name=""/>
-        <p:cNvGrpSpPr/>
-        <p:nvPr/>
-      </p:nvGrpSpPr>
-      <p:grpSpPr>
-        <a:xfrm>
-          <a:off x="0" y="0"/>
-          <a:ext cx="0" cy="0"/>
-          <a:chOff x="0" y="0"/>
-          <a:chExt cx="0" cy="0"/>
-        </a:xfrm>
-      </p:grpSpPr>
       <p:sp>
         <p:nvSpPr>
-          <p:cNvPr id="2" name="Заголовок 1"/>
+          <p:cNvPr id="5" name="Объект 4"/>
           <p:cNvSpPr>
             <a:spLocks noGrp="1"/>
           </p:cNvSpPr>
           <p:nvPr>
-            <p:ph type="title"/>
+            <p:ph idx="1"/>
           </p:nvPr>
         </p:nvSpPr>
         <p:spPr>
           <a:xfrm>
-            <a:off x="200025" y="365126"/>
-            <a:ext cx="11153775" cy="768350"/>
+            <a:off x="352425" y="4267199"/>
+            <a:ext cx="11344275" cy="2295526"/>
           </a:xfrm>
         </p:spPr>
         <p:txBody>
@@ -4004,42 +4692,36 @@
           <a:p>
             <a:r>
               <a:rPr lang="ru-RU" dirty="0" smtClean="0"/>
-              <a:t>Типы ВР: Многомерные ВР</a:t>
+              <a:t>Если единичные ВР – это описание только соответствующей переменной,</a:t>
+            </a:r>
+          </a:p>
+          <a:p>
+            <a:pPr lvl="1"/>
+            <a:r>
+              <a:rPr lang="ru-RU" dirty="0" smtClean="0"/>
+              <a:t>ВР с экзогенными факторами – описание ВР и объясняющих его переменных</a:t>
+            </a:r>
+          </a:p>
+          <a:p>
+            <a:r>
+              <a:rPr lang="ru-RU" dirty="0" smtClean="0"/>
+              <a:t>То многомерные ВР (МВР) – это описание системы</a:t>
+            </a:r>
+          </a:p>
+          <a:p>
+            <a:pPr lvl="1"/>
+            <a:r>
+              <a:rPr lang="ru-RU" dirty="0" smtClean="0"/>
+              <a:t>Включает как ВР, так и их связи – более полное описание</a:t>
             </a:r>
             <a:endParaRPr lang="ru-RU" dirty="0"/>
           </a:p>
         </p:txBody>
       </p:sp>
-      <p:pic>
-        <p:nvPicPr>
-          <p:cNvPr id="6" name="Объект 5"/>
-          <p:cNvPicPr>
-            <a:picLocks noGrp="1" noChangeAspect="1"/>
-          </p:cNvPicPr>
-          <p:nvPr>
-            <p:ph idx="1"/>
-          </p:nvPr>
-        </p:nvPicPr>
-        <p:blipFill>
-          <a:blip r:embed="rId2"/>
-          <a:stretch>
-            <a:fillRect/>
-          </a:stretch>
-        </p:blipFill>
-        <p:spPr>
-          <a:xfrm>
-            <a:off x="800100" y="1133476"/>
-            <a:ext cx="9886950" cy="5471907"/>
-          </a:xfrm>
-          <a:prstGeom prst="rect">
-            <a:avLst/>
-          </a:prstGeom>
-        </p:spPr>
-      </p:pic>
     </p:spTree>
     <p:extLst>
       <p:ext uri="{BB962C8B-B14F-4D97-AF65-F5344CB8AC3E}">
-        <p14:creationId xmlns:p14="http://schemas.microsoft.com/office/powerpoint/2010/main" val="4183419773"/>
+        <p14:creationId xmlns:p14="http://schemas.microsoft.com/office/powerpoint/2010/main" val="3980958957"/>
       </p:ext>
     </p:extLst>
   </p:cSld>
@@ -4083,111 +4765,2124 @@
             <p:ph type="title"/>
           </p:nvPr>
         </p:nvSpPr>
-        <p:spPr/>
-        <p:txBody>
-          <a:bodyPr/>
-          <a:lstStyle/>
-          <a:p>
-            <a:endParaRPr lang="ru-RU"/>
-          </a:p>
-        </p:txBody>
-      </p:sp>
-      <p:sp>
-        <p:nvSpPr>
-          <p:cNvPr id="3" name="Объект 2"/>
-          <p:cNvSpPr>
-            <a:spLocks noGrp="1"/>
-          </p:cNvSpPr>
-          <p:nvPr>
-            <p:ph idx="1"/>
-          </p:nvPr>
-        </p:nvSpPr>
         <p:spPr>
           <a:xfrm>
-            <a:off x="276225" y="2016125"/>
-            <a:ext cx="7762875" cy="4351338"/>
+            <a:off x="257175" y="107951"/>
+            <a:ext cx="11068050" cy="596900"/>
           </a:xfrm>
         </p:spPr>
         <p:txBody>
           <a:bodyPr>
-            <a:normAutofit lnSpcReduction="10000"/>
+            <a:normAutofit fontScale="90000"/>
           </a:bodyPr>
           <a:lstStyle/>
           <a:p>
-            <a:pPr marL="0" indent="0">
-              <a:buNone/>
-            </a:pPr>
-            <a:r>
-              <a:rPr lang="ru-RU" b="1" dirty="0" smtClean="0"/>
-              <a:t>Преимущества МВР:</a:t>
-            </a:r>
-            <a:endParaRPr lang="ru-RU" dirty="0" smtClean="0"/>
-          </a:p>
-          <a:p>
+            <a:pPr algn="ctr"/>
             <a:r>
               <a:rPr lang="ru-RU" dirty="0" smtClean="0"/>
-              <a:t>Учет взаимосвязей между переменными </a:t>
-            </a:r>
-          </a:p>
-          <a:p>
-            <a:pPr lvl="1"/>
-            <a:r>
-              <a:rPr lang="ru-RU" dirty="0" smtClean="0"/>
-              <a:t>Анализ причинно-следственных связей</a:t>
-            </a:r>
-          </a:p>
-          <a:p>
-            <a:pPr lvl="1"/>
-            <a:r>
-              <a:rPr lang="ru-RU" dirty="0" smtClean="0"/>
-              <a:t>Обнаружение общих трендов и циклов</a:t>
-            </a:r>
-          </a:p>
-          <a:p>
-            <a:r>
-              <a:rPr lang="ru-RU" dirty="0" smtClean="0"/>
-              <a:t>Возможность создания глобальных моделей – одна модель для группы ВР</a:t>
-            </a:r>
-          </a:p>
-          <a:p>
-            <a:pPr marL="0" indent="0">
-              <a:buNone/>
-            </a:pPr>
-            <a:r>
-              <a:rPr lang="ru-RU" b="1" dirty="0" smtClean="0"/>
-              <a:t>Проблемы МВР:</a:t>
-            </a:r>
-            <a:endParaRPr lang="ru-RU" dirty="0" smtClean="0"/>
-          </a:p>
-          <a:p>
-            <a:r>
-              <a:rPr lang="ru-RU" dirty="0" smtClean="0"/>
-              <a:t>Усложнение интерпретации</a:t>
-            </a:r>
-          </a:p>
-          <a:p>
-            <a:r>
-              <a:rPr lang="ru-RU" dirty="0" smtClean="0"/>
-              <a:t>Усложнение подбора </a:t>
-            </a:r>
-            <a:r>
-              <a:rPr lang="ru-RU" dirty="0" err="1" smtClean="0"/>
-              <a:t>гиперпараметров</a:t>
-            </a:r>
-            <a:r>
-              <a:rPr lang="ru-RU" dirty="0" smtClean="0"/>
-              <a:t> глобальных моделей</a:t>
-            </a:r>
-          </a:p>
-          <a:p>
+              <a:t>Векторная авторегрессия</a:t>
+            </a:r>
             <a:endParaRPr lang="ru-RU" dirty="0"/>
           </a:p>
         </p:txBody>
       </p:sp>
+      <mc:AlternateContent xmlns:mc="http://schemas.openxmlformats.org/markup-compatibility/2006">
+        <mc:Choice xmlns:a14="http://schemas.microsoft.com/office/drawing/2010/main" Requires="a14">
+          <p:sp>
+            <p:nvSpPr>
+              <p:cNvPr id="3" name="Объект 2"/>
+              <p:cNvSpPr>
+                <a:spLocks noGrp="1"/>
+              </p:cNvSpPr>
+              <p:nvPr>
+                <p:ph idx="1"/>
+              </p:nvPr>
+            </p:nvSpPr>
+            <p:spPr>
+              <a:xfrm>
+                <a:off x="257175" y="704851"/>
+                <a:ext cx="11801475" cy="5876926"/>
+              </a:xfrm>
+            </p:spPr>
+            <p:txBody>
+              <a:bodyPr>
+                <a:normAutofit/>
+              </a:bodyPr>
+              <a:lstStyle/>
+              <a:p>
+                <a:pPr>
+                  <a:lnSpc>
+                    <a:spcPct val="100000"/>
+                  </a:lnSpc>
+                  <a:spcBef>
+                    <a:spcPts val="0"/>
+                  </a:spcBef>
+                </a:pPr>
+                <a:r>
+                  <a:rPr lang="ru-RU" sz="2400" dirty="0" smtClean="0"/>
+                  <a:t>Если все ВР в МВР стационарны</a:t>
+                </a:r>
+                <a:r>
+                  <a:rPr lang="en-US" sz="2400" dirty="0" smtClean="0"/>
+                  <a:t> </a:t>
+                </a:r>
+                <a:r>
+                  <a:rPr lang="ru-RU" sz="2400" dirty="0" smtClean="0"/>
+                  <a:t>и не коррелируют, то для каждого ВР можно ввести </a:t>
+                </a:r>
+              </a:p>
+              <a:p>
+                <a:pPr marL="0" indent="0">
+                  <a:lnSpc>
+                    <a:spcPct val="100000"/>
+                  </a:lnSpc>
+                  <a:spcBef>
+                    <a:spcPts val="0"/>
+                  </a:spcBef>
+                  <a:buNone/>
+                </a:pPr>
+                <a14:m>
+                  <m:oMathPara xmlns:m="http://schemas.openxmlformats.org/officeDocument/2006/math">
+                    <m:oMathParaPr>
+                      <m:jc m:val="centerGroup"/>
+                    </m:oMathParaPr>
+                    <m:oMath xmlns:m="http://schemas.openxmlformats.org/officeDocument/2006/math">
+                      <m:d>
+                        <m:dPr>
+                          <m:begChr m:val="{"/>
+                          <m:endChr m:val=""/>
+                          <m:ctrlPr>
+                            <a:rPr lang="ru-RU" sz="2400" i="1" smtClean="0">
+                              <a:latin typeface="Cambria Math" panose="02040503050406030204" pitchFamily="18" charset="0"/>
+                            </a:rPr>
+                          </m:ctrlPr>
+                        </m:dPr>
+                        <m:e>
+                          <m:eqArr>
+                            <m:eqArrPr>
+                              <m:ctrlPr>
+                                <a:rPr lang="ru-RU" sz="2400" i="1" smtClean="0">
+                                  <a:latin typeface="Cambria Math" panose="02040503050406030204" pitchFamily="18" charset="0"/>
+                                </a:rPr>
+                              </m:ctrlPr>
+                            </m:eqArrPr>
+                            <m:e>
+                              <m:sSub>
+                                <m:sSubPr>
+                                  <m:ctrlPr>
+                                    <a:rPr lang="en-US" sz="2400" i="1">
+                                      <a:latin typeface="Cambria Math" panose="02040503050406030204" pitchFamily="18" charset="0"/>
+                                    </a:rPr>
+                                  </m:ctrlPr>
+                                </m:sSubPr>
+                                <m:e>
+                                  <m:acc>
+                                    <m:accPr>
+                                      <m:chr m:val="̂"/>
+                                      <m:ctrlPr>
+                                        <a:rPr lang="en-US" sz="2400" i="1">
+                                          <a:latin typeface="Cambria Math" panose="02040503050406030204" pitchFamily="18" charset="0"/>
+                                        </a:rPr>
+                                      </m:ctrlPr>
+                                    </m:accPr>
+                                    <m:e>
+                                      <m:r>
+                                        <a:rPr lang="en-US" sz="2400" i="1">
+                                          <a:latin typeface="Cambria Math" panose="02040503050406030204" pitchFamily="18" charset="0"/>
+                                        </a:rPr>
+                                        <m:t>𝑦</m:t>
+                                      </m:r>
+                                    </m:e>
+                                  </m:acc>
+                                </m:e>
+                                <m:sub>
+                                  <m:r>
+                                    <a:rPr lang="en-US" sz="2400" i="1">
+                                      <a:latin typeface="Cambria Math" panose="02040503050406030204" pitchFamily="18" charset="0"/>
+                                    </a:rPr>
+                                    <m:t>𝑛</m:t>
+                                  </m:r>
+                                  <m:r>
+                                    <a:rPr lang="ru-RU" sz="2400" i="1">
+                                      <a:latin typeface="Cambria Math" panose="02040503050406030204" pitchFamily="18" charset="0"/>
+                                    </a:rPr>
+                                    <m:t>+1</m:t>
+                                  </m:r>
+                                  <m:r>
+                                    <a:rPr lang="en-US" sz="2400" b="0" i="1" smtClean="0">
+                                      <a:latin typeface="Cambria Math" panose="02040503050406030204" pitchFamily="18" charset="0"/>
+                                    </a:rPr>
+                                    <m:t>,1</m:t>
+                                  </m:r>
+                                </m:sub>
+                              </m:sSub>
+                              <m:r>
+                                <a:rPr lang="en-US" sz="2400" i="1">
+                                  <a:latin typeface="Cambria Math" panose="02040503050406030204" pitchFamily="18" charset="0"/>
+                                </a:rPr>
+                                <m:t>=</m:t>
+                              </m:r>
+                              <m:sSub>
+                                <m:sSubPr>
+                                  <m:ctrlPr>
+                                    <a:rPr lang="en-US" sz="2400" i="1">
+                                      <a:latin typeface="Cambria Math" panose="02040503050406030204" pitchFamily="18" charset="0"/>
+                                    </a:rPr>
+                                  </m:ctrlPr>
+                                </m:sSubPr>
+                                <m:e>
+                                  <m:r>
+                                    <a:rPr lang="en-US" sz="2400" i="1">
+                                      <a:latin typeface="Cambria Math" panose="02040503050406030204" pitchFamily="18" charset="0"/>
+                                    </a:rPr>
+                                    <m:t>𝛼</m:t>
+                                  </m:r>
+                                </m:e>
+                                <m:sub>
+                                  <m:r>
+                                    <a:rPr lang="ru-RU" sz="2400" i="1">
+                                      <a:latin typeface="Cambria Math" panose="02040503050406030204" pitchFamily="18" charset="0"/>
+                                    </a:rPr>
+                                    <m:t>0</m:t>
+                                  </m:r>
+                                  <m:r>
+                                    <a:rPr lang="en-US" sz="2400" b="0" i="1" smtClean="0">
+                                      <a:latin typeface="Cambria Math" panose="02040503050406030204" pitchFamily="18" charset="0"/>
+                                    </a:rPr>
+                                    <m:t>,1</m:t>
+                                  </m:r>
+                                </m:sub>
+                              </m:sSub>
+                              <m:sSub>
+                                <m:sSubPr>
+                                  <m:ctrlPr>
+                                    <a:rPr lang="en-US" sz="2400" i="1">
+                                      <a:latin typeface="Cambria Math" panose="02040503050406030204" pitchFamily="18" charset="0"/>
+                                    </a:rPr>
+                                  </m:ctrlPr>
+                                </m:sSubPr>
+                                <m:e>
+                                  <m:r>
+                                    <a:rPr lang="en-US" sz="2400" i="1">
+                                      <a:latin typeface="Cambria Math" panose="02040503050406030204" pitchFamily="18" charset="0"/>
+                                    </a:rPr>
+                                    <m:t>𝑦</m:t>
+                                  </m:r>
+                                </m:e>
+                                <m:sub>
+                                  <m:r>
+                                    <a:rPr lang="en-US" sz="2400" i="1">
+                                      <a:latin typeface="Cambria Math" panose="02040503050406030204" pitchFamily="18" charset="0"/>
+                                    </a:rPr>
+                                    <m:t>𝑛</m:t>
+                                  </m:r>
+                                  <m:r>
+                                    <a:rPr lang="en-US" sz="2400" b="0" i="1" smtClean="0">
+                                      <a:latin typeface="Cambria Math" panose="02040503050406030204" pitchFamily="18" charset="0"/>
+                                    </a:rPr>
+                                    <m:t>,1</m:t>
+                                  </m:r>
+                                </m:sub>
+                              </m:sSub>
+                              <m:r>
+                                <a:rPr lang="en-US" sz="2400" i="1">
+                                  <a:latin typeface="Cambria Math" panose="02040503050406030204" pitchFamily="18" charset="0"/>
+                                </a:rPr>
+                                <m:t>+</m:t>
+                              </m:r>
+                              <m:sSub>
+                                <m:sSubPr>
+                                  <m:ctrlPr>
+                                    <a:rPr lang="en-US" sz="2400" i="1">
+                                      <a:latin typeface="Cambria Math" panose="02040503050406030204" pitchFamily="18" charset="0"/>
+                                    </a:rPr>
+                                  </m:ctrlPr>
+                                </m:sSubPr>
+                                <m:e>
+                                  <m:r>
+                                    <a:rPr lang="en-US" sz="2400" i="1">
+                                      <a:latin typeface="Cambria Math" panose="02040503050406030204" pitchFamily="18" charset="0"/>
+                                    </a:rPr>
+                                    <m:t>𝛼</m:t>
+                                  </m:r>
+                                </m:e>
+                                <m:sub>
+                                  <m:r>
+                                    <a:rPr lang="en-US" sz="2400" i="1">
+                                      <a:latin typeface="Cambria Math" panose="02040503050406030204" pitchFamily="18" charset="0"/>
+                                    </a:rPr>
+                                    <m:t>1</m:t>
+                                  </m:r>
+                                  <m:r>
+                                    <a:rPr lang="en-US" sz="2400" b="0" i="1" smtClean="0">
+                                      <a:latin typeface="Cambria Math" panose="02040503050406030204" pitchFamily="18" charset="0"/>
+                                    </a:rPr>
+                                    <m:t>,1</m:t>
+                                  </m:r>
+                                </m:sub>
+                              </m:sSub>
+                              <m:sSub>
+                                <m:sSubPr>
+                                  <m:ctrlPr>
+                                    <a:rPr lang="en-US" sz="2400" i="1">
+                                      <a:latin typeface="Cambria Math" panose="02040503050406030204" pitchFamily="18" charset="0"/>
+                                    </a:rPr>
+                                  </m:ctrlPr>
+                                </m:sSubPr>
+                                <m:e>
+                                  <m:r>
+                                    <a:rPr lang="en-US" sz="2400" i="1">
+                                      <a:latin typeface="Cambria Math" panose="02040503050406030204" pitchFamily="18" charset="0"/>
+                                    </a:rPr>
+                                    <m:t>𝑦</m:t>
+                                  </m:r>
+                                </m:e>
+                                <m:sub>
+                                  <m:r>
+                                    <a:rPr lang="en-US" sz="2400" i="1">
+                                      <a:latin typeface="Cambria Math" panose="02040503050406030204" pitchFamily="18" charset="0"/>
+                                    </a:rPr>
+                                    <m:t>𝑛</m:t>
+                                  </m:r>
+                                  <m:r>
+                                    <a:rPr lang="en-US" sz="2400" i="1">
+                                      <a:latin typeface="Cambria Math" panose="02040503050406030204" pitchFamily="18" charset="0"/>
+                                    </a:rPr>
+                                    <m:t>−1,1</m:t>
+                                  </m:r>
+                                </m:sub>
+                              </m:sSub>
+                              <m:r>
+                                <a:rPr lang="en-US" sz="2400" i="1">
+                                  <a:latin typeface="Cambria Math" panose="02040503050406030204" pitchFamily="18" charset="0"/>
+                                </a:rPr>
+                                <m:t>+</m:t>
+                              </m:r>
+                              <m:sSub>
+                                <m:sSubPr>
+                                  <m:ctrlPr>
+                                    <a:rPr lang="en-US" sz="2400" i="1">
+                                      <a:latin typeface="Cambria Math" panose="02040503050406030204" pitchFamily="18" charset="0"/>
+                                    </a:rPr>
+                                  </m:ctrlPr>
+                                </m:sSubPr>
+                                <m:e>
+                                  <m:r>
+                                    <a:rPr lang="en-US" sz="2400" i="1">
+                                      <a:latin typeface="Cambria Math" panose="02040503050406030204" pitchFamily="18" charset="0"/>
+                                    </a:rPr>
+                                    <m:t>𝛼</m:t>
+                                  </m:r>
+                                </m:e>
+                                <m:sub>
+                                  <m:r>
+                                    <a:rPr lang="en-US" sz="2400" i="1">
+                                      <a:latin typeface="Cambria Math" panose="02040503050406030204" pitchFamily="18" charset="0"/>
+                                    </a:rPr>
+                                    <m:t>2</m:t>
+                                  </m:r>
+                                  <m:r>
+                                    <a:rPr lang="en-US" sz="2400" b="0" i="1" smtClean="0">
+                                      <a:latin typeface="Cambria Math" panose="02040503050406030204" pitchFamily="18" charset="0"/>
+                                    </a:rPr>
+                                    <m:t>,1</m:t>
+                                  </m:r>
+                                </m:sub>
+                              </m:sSub>
+                              <m:sSub>
+                                <m:sSubPr>
+                                  <m:ctrlPr>
+                                    <a:rPr lang="en-US" sz="2400" i="1">
+                                      <a:latin typeface="Cambria Math" panose="02040503050406030204" pitchFamily="18" charset="0"/>
+                                    </a:rPr>
+                                  </m:ctrlPr>
+                                </m:sSubPr>
+                                <m:e>
+                                  <m:r>
+                                    <a:rPr lang="en-US" sz="2400" i="1">
+                                      <a:latin typeface="Cambria Math" panose="02040503050406030204" pitchFamily="18" charset="0"/>
+                                    </a:rPr>
+                                    <m:t>𝑦</m:t>
+                                  </m:r>
+                                </m:e>
+                                <m:sub>
+                                  <m:r>
+                                    <a:rPr lang="en-US" sz="2400" i="1">
+                                      <a:latin typeface="Cambria Math" panose="02040503050406030204" pitchFamily="18" charset="0"/>
+                                    </a:rPr>
+                                    <m:t>𝑛</m:t>
+                                  </m:r>
+                                  <m:r>
+                                    <a:rPr lang="en-US" sz="2400" i="1">
+                                      <a:latin typeface="Cambria Math" panose="02040503050406030204" pitchFamily="18" charset="0"/>
+                                    </a:rPr>
+                                    <m:t>−2,1</m:t>
+                                  </m:r>
+                                </m:sub>
+                              </m:sSub>
+                            </m:e>
+                            <m:e>
+                              <m:sSub>
+                                <m:sSubPr>
+                                  <m:ctrlPr>
+                                    <a:rPr lang="en-US" sz="2400" i="1">
+                                      <a:latin typeface="Cambria Math" panose="02040503050406030204" pitchFamily="18" charset="0"/>
+                                    </a:rPr>
+                                  </m:ctrlPr>
+                                </m:sSubPr>
+                                <m:e>
+                                  <m:acc>
+                                    <m:accPr>
+                                      <m:chr m:val="̂"/>
+                                      <m:ctrlPr>
+                                        <a:rPr lang="en-US" sz="2400" i="1">
+                                          <a:latin typeface="Cambria Math" panose="02040503050406030204" pitchFamily="18" charset="0"/>
+                                        </a:rPr>
+                                      </m:ctrlPr>
+                                    </m:accPr>
+                                    <m:e>
+                                      <m:r>
+                                        <a:rPr lang="en-US" sz="2400" i="1">
+                                          <a:latin typeface="Cambria Math" panose="02040503050406030204" pitchFamily="18" charset="0"/>
+                                        </a:rPr>
+                                        <m:t>𝑦</m:t>
+                                      </m:r>
+                                    </m:e>
+                                  </m:acc>
+                                </m:e>
+                                <m:sub>
+                                  <m:r>
+                                    <a:rPr lang="en-US" sz="2400" i="1">
+                                      <a:latin typeface="Cambria Math" panose="02040503050406030204" pitchFamily="18" charset="0"/>
+                                    </a:rPr>
+                                    <m:t>𝑛</m:t>
+                                  </m:r>
+                                  <m:r>
+                                    <a:rPr lang="ru-RU" sz="2400" i="1">
+                                      <a:latin typeface="Cambria Math" panose="02040503050406030204" pitchFamily="18" charset="0"/>
+                                    </a:rPr>
+                                    <m:t>+1</m:t>
+                                  </m:r>
+                                  <m:r>
+                                    <a:rPr lang="en-US" sz="2400" i="1">
+                                      <a:latin typeface="Cambria Math" panose="02040503050406030204" pitchFamily="18" charset="0"/>
+                                    </a:rPr>
+                                    <m:t>,</m:t>
+                                  </m:r>
+                                  <m:r>
+                                    <a:rPr lang="en-US" sz="2400" b="0" i="1" smtClean="0">
+                                      <a:latin typeface="Cambria Math" panose="02040503050406030204" pitchFamily="18" charset="0"/>
+                                    </a:rPr>
+                                    <m:t>2</m:t>
+                                  </m:r>
+                                </m:sub>
+                              </m:sSub>
+                              <m:r>
+                                <a:rPr lang="en-US" sz="2400" i="1">
+                                  <a:latin typeface="Cambria Math" panose="02040503050406030204" pitchFamily="18" charset="0"/>
+                                </a:rPr>
+                                <m:t>=</m:t>
+                              </m:r>
+                              <m:sSub>
+                                <m:sSubPr>
+                                  <m:ctrlPr>
+                                    <a:rPr lang="en-US" sz="2400" i="1">
+                                      <a:latin typeface="Cambria Math" panose="02040503050406030204" pitchFamily="18" charset="0"/>
+                                    </a:rPr>
+                                  </m:ctrlPr>
+                                </m:sSubPr>
+                                <m:e>
+                                  <m:r>
+                                    <a:rPr lang="en-US" sz="2400" i="1">
+                                      <a:latin typeface="Cambria Math" panose="02040503050406030204" pitchFamily="18" charset="0"/>
+                                    </a:rPr>
+                                    <m:t>𝛼</m:t>
+                                  </m:r>
+                                </m:e>
+                                <m:sub>
+                                  <m:r>
+                                    <a:rPr lang="ru-RU" sz="2400" i="1">
+                                      <a:latin typeface="Cambria Math" panose="02040503050406030204" pitchFamily="18" charset="0"/>
+                                    </a:rPr>
+                                    <m:t>0</m:t>
+                                  </m:r>
+                                  <m:r>
+                                    <a:rPr lang="en-US" sz="2400" i="1">
+                                      <a:latin typeface="Cambria Math" panose="02040503050406030204" pitchFamily="18" charset="0"/>
+                                    </a:rPr>
+                                    <m:t>,</m:t>
+                                  </m:r>
+                                  <m:r>
+                                    <a:rPr lang="en-US" sz="2400" b="0" i="1" smtClean="0">
+                                      <a:latin typeface="Cambria Math" panose="02040503050406030204" pitchFamily="18" charset="0"/>
+                                    </a:rPr>
+                                    <m:t>2</m:t>
+                                  </m:r>
+                                </m:sub>
+                              </m:sSub>
+                              <m:sSub>
+                                <m:sSubPr>
+                                  <m:ctrlPr>
+                                    <a:rPr lang="en-US" sz="2400" i="1">
+                                      <a:latin typeface="Cambria Math" panose="02040503050406030204" pitchFamily="18" charset="0"/>
+                                    </a:rPr>
+                                  </m:ctrlPr>
+                                </m:sSubPr>
+                                <m:e>
+                                  <m:r>
+                                    <a:rPr lang="en-US" sz="2400" i="1">
+                                      <a:latin typeface="Cambria Math" panose="02040503050406030204" pitchFamily="18" charset="0"/>
+                                    </a:rPr>
+                                    <m:t>𝑦</m:t>
+                                  </m:r>
+                                </m:e>
+                                <m:sub>
+                                  <m:r>
+                                    <a:rPr lang="en-US" sz="2400" i="1">
+                                      <a:latin typeface="Cambria Math" panose="02040503050406030204" pitchFamily="18" charset="0"/>
+                                    </a:rPr>
+                                    <m:t>𝑛</m:t>
+                                  </m:r>
+                                  <m:r>
+                                    <a:rPr lang="en-US" sz="2400" i="1">
+                                      <a:latin typeface="Cambria Math" panose="02040503050406030204" pitchFamily="18" charset="0"/>
+                                    </a:rPr>
+                                    <m:t>,</m:t>
+                                  </m:r>
+                                  <m:r>
+                                    <a:rPr lang="en-US" sz="2400" b="0" i="1" smtClean="0">
+                                      <a:latin typeface="Cambria Math" panose="02040503050406030204" pitchFamily="18" charset="0"/>
+                                    </a:rPr>
+                                    <m:t>2</m:t>
+                                  </m:r>
+                                </m:sub>
+                              </m:sSub>
+                              <m:r>
+                                <a:rPr lang="en-US" sz="2400" i="1">
+                                  <a:latin typeface="Cambria Math" panose="02040503050406030204" pitchFamily="18" charset="0"/>
+                                </a:rPr>
+                                <m:t>+</m:t>
+                              </m:r>
+                              <m:sSub>
+                                <m:sSubPr>
+                                  <m:ctrlPr>
+                                    <a:rPr lang="en-US" sz="2400" i="1">
+                                      <a:latin typeface="Cambria Math" panose="02040503050406030204" pitchFamily="18" charset="0"/>
+                                    </a:rPr>
+                                  </m:ctrlPr>
+                                </m:sSubPr>
+                                <m:e>
+                                  <m:r>
+                                    <a:rPr lang="en-US" sz="2400" i="1">
+                                      <a:latin typeface="Cambria Math" panose="02040503050406030204" pitchFamily="18" charset="0"/>
+                                    </a:rPr>
+                                    <m:t>𝛼</m:t>
+                                  </m:r>
+                                </m:e>
+                                <m:sub>
+                                  <m:r>
+                                    <a:rPr lang="en-US" sz="2400" i="1">
+                                      <a:latin typeface="Cambria Math" panose="02040503050406030204" pitchFamily="18" charset="0"/>
+                                    </a:rPr>
+                                    <m:t>1</m:t>
+                                  </m:r>
+                                  <m:r>
+                                    <a:rPr lang="en-US" sz="2400" i="1">
+                                      <a:latin typeface="Cambria Math" panose="02040503050406030204" pitchFamily="18" charset="0"/>
+                                    </a:rPr>
+                                    <m:t>,</m:t>
+                                  </m:r>
+                                  <m:r>
+                                    <a:rPr lang="en-US" sz="2400" b="0" i="1" smtClean="0">
+                                      <a:latin typeface="Cambria Math" panose="02040503050406030204" pitchFamily="18" charset="0"/>
+                                    </a:rPr>
+                                    <m:t>2</m:t>
+                                  </m:r>
+                                </m:sub>
+                              </m:sSub>
+                              <m:sSub>
+                                <m:sSubPr>
+                                  <m:ctrlPr>
+                                    <a:rPr lang="en-US" sz="2400" i="1">
+                                      <a:latin typeface="Cambria Math" panose="02040503050406030204" pitchFamily="18" charset="0"/>
+                                    </a:rPr>
+                                  </m:ctrlPr>
+                                </m:sSubPr>
+                                <m:e>
+                                  <m:r>
+                                    <a:rPr lang="en-US" sz="2400" i="1">
+                                      <a:latin typeface="Cambria Math" panose="02040503050406030204" pitchFamily="18" charset="0"/>
+                                    </a:rPr>
+                                    <m:t>𝑦</m:t>
+                                  </m:r>
+                                </m:e>
+                                <m:sub>
+                                  <m:r>
+                                    <a:rPr lang="en-US" sz="2400" i="1">
+                                      <a:latin typeface="Cambria Math" panose="02040503050406030204" pitchFamily="18" charset="0"/>
+                                    </a:rPr>
+                                    <m:t>𝑛</m:t>
+                                  </m:r>
+                                  <m:r>
+                                    <a:rPr lang="en-US" sz="2400" i="1">
+                                      <a:latin typeface="Cambria Math" panose="02040503050406030204" pitchFamily="18" charset="0"/>
+                                    </a:rPr>
+                                    <m:t>−1,2</m:t>
+                                  </m:r>
+                                </m:sub>
+                              </m:sSub>
+                              <m:r>
+                                <a:rPr lang="en-US" sz="2400" i="1">
+                                  <a:latin typeface="Cambria Math" panose="02040503050406030204" pitchFamily="18" charset="0"/>
+                                </a:rPr>
+                                <m:t>+</m:t>
+                              </m:r>
+                              <m:sSub>
+                                <m:sSubPr>
+                                  <m:ctrlPr>
+                                    <a:rPr lang="en-US" sz="2400" i="1">
+                                      <a:latin typeface="Cambria Math" panose="02040503050406030204" pitchFamily="18" charset="0"/>
+                                    </a:rPr>
+                                  </m:ctrlPr>
+                                </m:sSubPr>
+                                <m:e>
+                                  <m:r>
+                                    <a:rPr lang="en-US" sz="2400" i="1">
+                                      <a:latin typeface="Cambria Math" panose="02040503050406030204" pitchFamily="18" charset="0"/>
+                                    </a:rPr>
+                                    <m:t>𝛼</m:t>
+                                  </m:r>
+                                </m:e>
+                                <m:sub>
+                                  <m:r>
+                                    <a:rPr lang="en-US" sz="2400" i="1">
+                                      <a:latin typeface="Cambria Math" panose="02040503050406030204" pitchFamily="18" charset="0"/>
+                                    </a:rPr>
+                                    <m:t>2</m:t>
+                                  </m:r>
+                                  <m:r>
+                                    <a:rPr lang="en-US" sz="2400" i="1">
+                                      <a:latin typeface="Cambria Math" panose="02040503050406030204" pitchFamily="18" charset="0"/>
+                                    </a:rPr>
+                                    <m:t>,</m:t>
+                                  </m:r>
+                                  <m:r>
+                                    <a:rPr lang="en-US" sz="2400" b="0" i="1" smtClean="0">
+                                      <a:latin typeface="Cambria Math" panose="02040503050406030204" pitchFamily="18" charset="0"/>
+                                    </a:rPr>
+                                    <m:t>2</m:t>
+                                  </m:r>
+                                </m:sub>
+                              </m:sSub>
+                              <m:sSub>
+                                <m:sSubPr>
+                                  <m:ctrlPr>
+                                    <a:rPr lang="en-US" sz="2400" i="1">
+                                      <a:latin typeface="Cambria Math" panose="02040503050406030204" pitchFamily="18" charset="0"/>
+                                    </a:rPr>
+                                  </m:ctrlPr>
+                                </m:sSubPr>
+                                <m:e>
+                                  <m:r>
+                                    <a:rPr lang="en-US" sz="2400" i="1">
+                                      <a:latin typeface="Cambria Math" panose="02040503050406030204" pitchFamily="18" charset="0"/>
+                                    </a:rPr>
+                                    <m:t>𝑦</m:t>
+                                  </m:r>
+                                </m:e>
+                                <m:sub>
+                                  <m:r>
+                                    <a:rPr lang="en-US" sz="2400" i="1">
+                                      <a:latin typeface="Cambria Math" panose="02040503050406030204" pitchFamily="18" charset="0"/>
+                                    </a:rPr>
+                                    <m:t>𝑛</m:t>
+                                  </m:r>
+                                  <m:r>
+                                    <a:rPr lang="en-US" sz="2400" i="1">
+                                      <a:latin typeface="Cambria Math" panose="02040503050406030204" pitchFamily="18" charset="0"/>
+                                    </a:rPr>
+                                    <m:t>−2,2</m:t>
+                                  </m:r>
+                                </m:sub>
+                              </m:sSub>
+                            </m:e>
+                            <m:e>
+                              <m:r>
+                                <a:rPr lang="en-US" sz="2400" b="0" i="1" smtClean="0">
+                                  <a:latin typeface="Cambria Math" panose="02040503050406030204" pitchFamily="18" charset="0"/>
+                                </a:rPr>
+                                <m:t>…</m:t>
+                              </m:r>
+                            </m:e>
+                            <m:e>
+                              <m:sSub>
+                                <m:sSubPr>
+                                  <m:ctrlPr>
+                                    <a:rPr lang="en-US" sz="2400" i="1">
+                                      <a:latin typeface="Cambria Math" panose="02040503050406030204" pitchFamily="18" charset="0"/>
+                                    </a:rPr>
+                                  </m:ctrlPr>
+                                </m:sSubPr>
+                                <m:e>
+                                  <m:acc>
+                                    <m:accPr>
+                                      <m:chr m:val="̂"/>
+                                      <m:ctrlPr>
+                                        <a:rPr lang="en-US" sz="2400" i="1">
+                                          <a:latin typeface="Cambria Math" panose="02040503050406030204" pitchFamily="18" charset="0"/>
+                                        </a:rPr>
+                                      </m:ctrlPr>
+                                    </m:accPr>
+                                    <m:e>
+                                      <m:r>
+                                        <a:rPr lang="en-US" sz="2400" i="1">
+                                          <a:latin typeface="Cambria Math" panose="02040503050406030204" pitchFamily="18" charset="0"/>
+                                        </a:rPr>
+                                        <m:t>𝑦</m:t>
+                                      </m:r>
+                                    </m:e>
+                                  </m:acc>
+                                </m:e>
+                                <m:sub>
+                                  <m:r>
+                                    <a:rPr lang="en-US" sz="2400" i="1">
+                                      <a:latin typeface="Cambria Math" panose="02040503050406030204" pitchFamily="18" charset="0"/>
+                                    </a:rPr>
+                                    <m:t>𝑛</m:t>
+                                  </m:r>
+                                  <m:r>
+                                    <a:rPr lang="ru-RU" sz="2400" i="1">
+                                      <a:latin typeface="Cambria Math" panose="02040503050406030204" pitchFamily="18" charset="0"/>
+                                    </a:rPr>
+                                    <m:t>+1</m:t>
+                                  </m:r>
+                                  <m:r>
+                                    <a:rPr lang="en-US" sz="2400" i="1">
+                                      <a:latin typeface="Cambria Math" panose="02040503050406030204" pitchFamily="18" charset="0"/>
+                                    </a:rPr>
+                                    <m:t>,</m:t>
+                                  </m:r>
+                                  <m:r>
+                                    <a:rPr lang="en-US" sz="2400" b="0" i="1" smtClean="0">
+                                      <a:latin typeface="Cambria Math" panose="02040503050406030204" pitchFamily="18" charset="0"/>
+                                    </a:rPr>
+                                    <m:t>𝑚</m:t>
+                                  </m:r>
+                                </m:sub>
+                              </m:sSub>
+                              <m:r>
+                                <a:rPr lang="en-US" sz="2400" i="1">
+                                  <a:latin typeface="Cambria Math" panose="02040503050406030204" pitchFamily="18" charset="0"/>
+                                </a:rPr>
+                                <m:t>=</m:t>
+                              </m:r>
+                              <m:sSub>
+                                <m:sSubPr>
+                                  <m:ctrlPr>
+                                    <a:rPr lang="en-US" sz="2400" i="1">
+                                      <a:latin typeface="Cambria Math" panose="02040503050406030204" pitchFamily="18" charset="0"/>
+                                    </a:rPr>
+                                  </m:ctrlPr>
+                                </m:sSubPr>
+                                <m:e>
+                                  <m:r>
+                                    <a:rPr lang="en-US" sz="2400" i="1">
+                                      <a:latin typeface="Cambria Math" panose="02040503050406030204" pitchFamily="18" charset="0"/>
+                                    </a:rPr>
+                                    <m:t>𝛼</m:t>
+                                  </m:r>
+                                </m:e>
+                                <m:sub>
+                                  <m:r>
+                                    <a:rPr lang="ru-RU" sz="2400" i="1">
+                                      <a:latin typeface="Cambria Math" panose="02040503050406030204" pitchFamily="18" charset="0"/>
+                                    </a:rPr>
+                                    <m:t>0</m:t>
+                                  </m:r>
+                                  <m:r>
+                                    <a:rPr lang="en-US" sz="2400" i="1">
+                                      <a:latin typeface="Cambria Math" panose="02040503050406030204" pitchFamily="18" charset="0"/>
+                                    </a:rPr>
+                                    <m:t>,</m:t>
+                                  </m:r>
+                                  <m:r>
+                                    <a:rPr lang="en-US" sz="2400" b="0" i="1" smtClean="0">
+                                      <a:latin typeface="Cambria Math" panose="02040503050406030204" pitchFamily="18" charset="0"/>
+                                    </a:rPr>
+                                    <m:t>𝑚</m:t>
+                                  </m:r>
+                                </m:sub>
+                              </m:sSub>
+                              <m:sSub>
+                                <m:sSubPr>
+                                  <m:ctrlPr>
+                                    <a:rPr lang="en-US" sz="2400" i="1">
+                                      <a:latin typeface="Cambria Math" panose="02040503050406030204" pitchFamily="18" charset="0"/>
+                                    </a:rPr>
+                                  </m:ctrlPr>
+                                </m:sSubPr>
+                                <m:e>
+                                  <m:r>
+                                    <a:rPr lang="en-US" sz="2400" i="1">
+                                      <a:latin typeface="Cambria Math" panose="02040503050406030204" pitchFamily="18" charset="0"/>
+                                    </a:rPr>
+                                    <m:t>𝑦</m:t>
+                                  </m:r>
+                                </m:e>
+                                <m:sub>
+                                  <m:r>
+                                    <a:rPr lang="en-US" sz="2400" i="1">
+                                      <a:latin typeface="Cambria Math" panose="02040503050406030204" pitchFamily="18" charset="0"/>
+                                    </a:rPr>
+                                    <m:t>𝑛</m:t>
+                                  </m:r>
+                                  <m:r>
+                                    <a:rPr lang="en-US" sz="2400" i="1">
+                                      <a:latin typeface="Cambria Math" panose="02040503050406030204" pitchFamily="18" charset="0"/>
+                                    </a:rPr>
+                                    <m:t>,</m:t>
+                                  </m:r>
+                                  <m:r>
+                                    <a:rPr lang="en-US" sz="2400" b="0" i="1" smtClean="0">
+                                      <a:latin typeface="Cambria Math" panose="02040503050406030204" pitchFamily="18" charset="0"/>
+                                    </a:rPr>
+                                    <m:t>𝑚</m:t>
+                                  </m:r>
+                                </m:sub>
+                              </m:sSub>
+                              <m:r>
+                                <a:rPr lang="en-US" sz="2400" i="1">
+                                  <a:latin typeface="Cambria Math" panose="02040503050406030204" pitchFamily="18" charset="0"/>
+                                </a:rPr>
+                                <m:t>+</m:t>
+                              </m:r>
+                              <m:sSub>
+                                <m:sSubPr>
+                                  <m:ctrlPr>
+                                    <a:rPr lang="en-US" sz="2400" i="1">
+                                      <a:latin typeface="Cambria Math" panose="02040503050406030204" pitchFamily="18" charset="0"/>
+                                    </a:rPr>
+                                  </m:ctrlPr>
+                                </m:sSubPr>
+                                <m:e>
+                                  <m:r>
+                                    <a:rPr lang="en-US" sz="2400" i="1">
+                                      <a:latin typeface="Cambria Math" panose="02040503050406030204" pitchFamily="18" charset="0"/>
+                                    </a:rPr>
+                                    <m:t>𝛼</m:t>
+                                  </m:r>
+                                </m:e>
+                                <m:sub>
+                                  <m:r>
+                                    <a:rPr lang="en-US" sz="2400" i="1">
+                                      <a:latin typeface="Cambria Math" panose="02040503050406030204" pitchFamily="18" charset="0"/>
+                                    </a:rPr>
+                                    <m:t>1</m:t>
+                                  </m:r>
+                                  <m:r>
+                                    <a:rPr lang="en-US" sz="2400" i="1">
+                                      <a:latin typeface="Cambria Math" panose="02040503050406030204" pitchFamily="18" charset="0"/>
+                                    </a:rPr>
+                                    <m:t>,</m:t>
+                                  </m:r>
+                                  <m:r>
+                                    <a:rPr lang="en-US" sz="2400" b="0" i="1" smtClean="0">
+                                      <a:latin typeface="Cambria Math" panose="02040503050406030204" pitchFamily="18" charset="0"/>
+                                    </a:rPr>
+                                    <m:t>𝑚</m:t>
+                                  </m:r>
+                                </m:sub>
+                              </m:sSub>
+                              <m:sSub>
+                                <m:sSubPr>
+                                  <m:ctrlPr>
+                                    <a:rPr lang="en-US" sz="2400" i="1">
+                                      <a:latin typeface="Cambria Math" panose="02040503050406030204" pitchFamily="18" charset="0"/>
+                                    </a:rPr>
+                                  </m:ctrlPr>
+                                </m:sSubPr>
+                                <m:e>
+                                  <m:r>
+                                    <a:rPr lang="en-US" sz="2400" i="1">
+                                      <a:latin typeface="Cambria Math" panose="02040503050406030204" pitchFamily="18" charset="0"/>
+                                    </a:rPr>
+                                    <m:t>𝑦</m:t>
+                                  </m:r>
+                                </m:e>
+                                <m:sub>
+                                  <m:r>
+                                    <a:rPr lang="en-US" sz="2400" i="1">
+                                      <a:latin typeface="Cambria Math" panose="02040503050406030204" pitchFamily="18" charset="0"/>
+                                    </a:rPr>
+                                    <m:t>𝑛</m:t>
+                                  </m:r>
+                                  <m:r>
+                                    <a:rPr lang="en-US" sz="2400" i="1">
+                                      <a:latin typeface="Cambria Math" panose="02040503050406030204" pitchFamily="18" charset="0"/>
+                                    </a:rPr>
+                                    <m:t>−1,</m:t>
+                                  </m:r>
+                                  <m:r>
+                                    <a:rPr lang="en-US" sz="2400" b="0" i="1" smtClean="0">
+                                      <a:latin typeface="Cambria Math" panose="02040503050406030204" pitchFamily="18" charset="0"/>
+                                    </a:rPr>
+                                    <m:t>𝑚</m:t>
+                                  </m:r>
+                                </m:sub>
+                              </m:sSub>
+                              <m:r>
+                                <a:rPr lang="en-US" sz="2400" i="1">
+                                  <a:latin typeface="Cambria Math" panose="02040503050406030204" pitchFamily="18" charset="0"/>
+                                </a:rPr>
+                                <m:t>+</m:t>
+                              </m:r>
+                              <m:sSub>
+                                <m:sSubPr>
+                                  <m:ctrlPr>
+                                    <a:rPr lang="en-US" sz="2400" i="1">
+                                      <a:latin typeface="Cambria Math" panose="02040503050406030204" pitchFamily="18" charset="0"/>
+                                    </a:rPr>
+                                  </m:ctrlPr>
+                                </m:sSubPr>
+                                <m:e>
+                                  <m:r>
+                                    <a:rPr lang="en-US" sz="2400" i="1">
+                                      <a:latin typeface="Cambria Math" panose="02040503050406030204" pitchFamily="18" charset="0"/>
+                                    </a:rPr>
+                                    <m:t>𝛼</m:t>
+                                  </m:r>
+                                </m:e>
+                                <m:sub>
+                                  <m:r>
+                                    <a:rPr lang="en-US" sz="2400" i="1">
+                                      <a:latin typeface="Cambria Math" panose="02040503050406030204" pitchFamily="18" charset="0"/>
+                                    </a:rPr>
+                                    <m:t>2</m:t>
+                                  </m:r>
+                                  <m:r>
+                                    <a:rPr lang="en-US" sz="2400" i="1">
+                                      <a:latin typeface="Cambria Math" panose="02040503050406030204" pitchFamily="18" charset="0"/>
+                                    </a:rPr>
+                                    <m:t>,</m:t>
+                                  </m:r>
+                                  <m:r>
+                                    <a:rPr lang="en-US" sz="2400" b="0" i="1" smtClean="0">
+                                      <a:latin typeface="Cambria Math" panose="02040503050406030204" pitchFamily="18" charset="0"/>
+                                    </a:rPr>
+                                    <m:t>𝑚</m:t>
+                                  </m:r>
+                                </m:sub>
+                              </m:sSub>
+                              <m:sSub>
+                                <m:sSubPr>
+                                  <m:ctrlPr>
+                                    <a:rPr lang="en-US" sz="2400" i="1">
+                                      <a:latin typeface="Cambria Math" panose="02040503050406030204" pitchFamily="18" charset="0"/>
+                                    </a:rPr>
+                                  </m:ctrlPr>
+                                </m:sSubPr>
+                                <m:e>
+                                  <m:r>
+                                    <a:rPr lang="en-US" sz="2400" i="1">
+                                      <a:latin typeface="Cambria Math" panose="02040503050406030204" pitchFamily="18" charset="0"/>
+                                    </a:rPr>
+                                    <m:t>𝑦</m:t>
+                                  </m:r>
+                                </m:e>
+                                <m:sub>
+                                  <m:r>
+                                    <a:rPr lang="en-US" sz="2400" i="1">
+                                      <a:latin typeface="Cambria Math" panose="02040503050406030204" pitchFamily="18" charset="0"/>
+                                    </a:rPr>
+                                    <m:t>𝑛</m:t>
+                                  </m:r>
+                                  <m:r>
+                                    <a:rPr lang="en-US" sz="2400" i="1">
+                                      <a:latin typeface="Cambria Math" panose="02040503050406030204" pitchFamily="18" charset="0"/>
+                                    </a:rPr>
+                                    <m:t>−2,</m:t>
+                                  </m:r>
+                                  <m:r>
+                                    <a:rPr lang="en-US" sz="2400" b="0" i="1" smtClean="0">
+                                      <a:latin typeface="Cambria Math" panose="02040503050406030204" pitchFamily="18" charset="0"/>
+                                    </a:rPr>
+                                    <m:t>𝑚</m:t>
+                                  </m:r>
+                                </m:sub>
+                              </m:sSub>
+                            </m:e>
+                          </m:eqArr>
+                        </m:e>
+                      </m:d>
+                    </m:oMath>
+                  </m:oMathPara>
+                </a14:m>
+                <a:endParaRPr lang="en-US" sz="2400" dirty="0" smtClean="0"/>
+              </a:p>
+              <a:p>
+                <a:pPr marL="0" indent="0">
+                  <a:lnSpc>
+                    <a:spcPct val="100000"/>
+                  </a:lnSpc>
+                  <a:spcBef>
+                    <a:spcPts val="0"/>
+                  </a:spcBef>
+                  <a:buNone/>
+                </a:pPr>
+                <a:r>
+                  <a:rPr lang="ru-RU" sz="2400" dirty="0" smtClean="0"/>
+                  <a:t>Где </a:t>
+                </a:r>
+                <a14:m>
+                  <m:oMath xmlns:m="http://schemas.openxmlformats.org/officeDocument/2006/math">
+                    <m:r>
+                      <a:rPr lang="en-US" sz="2400" i="1" dirty="0" smtClean="0">
+                        <a:latin typeface="Cambria Math" panose="02040503050406030204" pitchFamily="18" charset="0"/>
+                      </a:rPr>
+                      <m:t>𝑚</m:t>
+                    </m:r>
+                    <m:r>
+                      <a:rPr lang="en-US" sz="2400" b="0" i="1" dirty="0" smtClean="0">
+                        <a:latin typeface="Cambria Math" panose="02040503050406030204" pitchFamily="18" charset="0"/>
+                      </a:rPr>
+                      <m:t>−</m:t>
+                    </m:r>
+                  </m:oMath>
+                </a14:m>
+                <a:r>
+                  <a:rPr lang="ru-RU" sz="2400" b="0" i="0" dirty="0" smtClean="0">
+                    <a:latin typeface="+mj-lt"/>
+                  </a:rPr>
+                  <a:t>число ВР.</a:t>
+                </a:r>
+              </a:p>
+              <a:p>
+                <a:pPr marL="0" indent="0">
+                  <a:lnSpc>
+                    <a:spcPct val="100000"/>
+                  </a:lnSpc>
+                  <a:spcBef>
+                    <a:spcPts val="0"/>
+                  </a:spcBef>
+                  <a:buNone/>
+                </a:pPr>
+                <a:r>
+                  <a:rPr lang="ru-RU" sz="2400" dirty="0" smtClean="0">
+                    <a:latin typeface="+mj-lt"/>
+                  </a:rPr>
+                  <a:t>Или в матричной форме</a:t>
+                </a:r>
+              </a:p>
+              <a:p>
+                <a:pPr marL="0" indent="0">
+                  <a:lnSpc>
+                    <a:spcPct val="100000"/>
+                  </a:lnSpc>
+                  <a:spcBef>
+                    <a:spcPts val="0"/>
+                  </a:spcBef>
+                  <a:buNone/>
+                </a:pPr>
+                <a14:m>
+                  <m:oMathPara xmlns:m="http://schemas.openxmlformats.org/officeDocument/2006/math">
+                    <m:oMathParaPr>
+                      <m:jc m:val="centerGroup"/>
+                    </m:oMathParaPr>
+                    <m:oMath xmlns:m="http://schemas.openxmlformats.org/officeDocument/2006/math">
+                      <m:sSub>
+                        <m:sSubPr>
+                          <m:ctrlPr>
+                            <a:rPr lang="en-US" sz="2400" i="1">
+                              <a:latin typeface="Cambria Math" panose="02040503050406030204" pitchFamily="18" charset="0"/>
+                            </a:rPr>
+                          </m:ctrlPr>
+                        </m:sSubPr>
+                        <m:e>
+                          <m:acc>
+                            <m:accPr>
+                              <m:chr m:val="̂"/>
+                              <m:ctrlPr>
+                                <a:rPr lang="en-US" sz="2400" i="1">
+                                  <a:latin typeface="Cambria Math" panose="02040503050406030204" pitchFamily="18" charset="0"/>
+                                </a:rPr>
+                              </m:ctrlPr>
+                            </m:accPr>
+                            <m:e>
+                              <m:r>
+                                <a:rPr lang="en-US" sz="2400" b="0" i="1" smtClean="0">
+                                  <a:latin typeface="Cambria Math" panose="02040503050406030204" pitchFamily="18" charset="0"/>
+                                </a:rPr>
+                                <m:t>𝑌</m:t>
+                              </m:r>
+                            </m:e>
+                          </m:acc>
+                        </m:e>
+                        <m:sub>
+                          <m:r>
+                            <a:rPr lang="en-US" sz="2400" i="1">
+                              <a:latin typeface="Cambria Math" panose="02040503050406030204" pitchFamily="18" charset="0"/>
+                            </a:rPr>
+                            <m:t>𝑛</m:t>
+                          </m:r>
+                          <m:r>
+                            <a:rPr lang="ru-RU" sz="2400" i="1">
+                              <a:latin typeface="Cambria Math" panose="02040503050406030204" pitchFamily="18" charset="0"/>
+                            </a:rPr>
+                            <m:t>+1</m:t>
+                          </m:r>
+                        </m:sub>
+                      </m:sSub>
+                      <m:r>
+                        <a:rPr lang="en-US" sz="2400" i="1">
+                          <a:latin typeface="Cambria Math" panose="02040503050406030204" pitchFamily="18" charset="0"/>
+                        </a:rPr>
+                        <m:t>=</m:t>
+                      </m:r>
+                      <m:sSub>
+                        <m:sSubPr>
+                          <m:ctrlPr>
+                            <a:rPr lang="en-US" sz="2400" i="1">
+                              <a:latin typeface="Cambria Math" panose="02040503050406030204" pitchFamily="18" charset="0"/>
+                            </a:rPr>
+                          </m:ctrlPr>
+                        </m:sSubPr>
+                        <m:e>
+                          <m:r>
+                            <a:rPr lang="en-US" sz="2400" b="0" i="1" smtClean="0">
+                              <a:latin typeface="Cambria Math" panose="02040503050406030204" pitchFamily="18" charset="0"/>
+                            </a:rPr>
+                            <m:t>𝐴</m:t>
+                          </m:r>
+                        </m:e>
+                        <m:sub>
+                          <m:r>
+                            <a:rPr lang="ru-RU" sz="2400" i="1">
+                              <a:latin typeface="Cambria Math" panose="02040503050406030204" pitchFamily="18" charset="0"/>
+                            </a:rPr>
+                            <m:t>0</m:t>
+                          </m:r>
+                        </m:sub>
+                      </m:sSub>
+                      <m:sSub>
+                        <m:sSubPr>
+                          <m:ctrlPr>
+                            <a:rPr lang="en-US" sz="2400" i="1">
+                              <a:latin typeface="Cambria Math" panose="02040503050406030204" pitchFamily="18" charset="0"/>
+                            </a:rPr>
+                          </m:ctrlPr>
+                        </m:sSubPr>
+                        <m:e>
+                          <m:r>
+                            <a:rPr lang="en-US" sz="2400" b="0" i="1" smtClean="0">
+                              <a:latin typeface="Cambria Math" panose="02040503050406030204" pitchFamily="18" charset="0"/>
+                            </a:rPr>
+                            <m:t>𝑌</m:t>
+                          </m:r>
+                        </m:e>
+                        <m:sub>
+                          <m:r>
+                            <a:rPr lang="en-US" sz="2400" i="1">
+                              <a:latin typeface="Cambria Math" panose="02040503050406030204" pitchFamily="18" charset="0"/>
+                            </a:rPr>
+                            <m:t>𝑛</m:t>
+                          </m:r>
+                        </m:sub>
+                      </m:sSub>
+                      <m:r>
+                        <a:rPr lang="en-US" sz="2400" i="1">
+                          <a:latin typeface="Cambria Math" panose="02040503050406030204" pitchFamily="18" charset="0"/>
+                        </a:rPr>
+                        <m:t>+</m:t>
+                      </m:r>
+                      <m:sSub>
+                        <m:sSubPr>
+                          <m:ctrlPr>
+                            <a:rPr lang="en-US" sz="2400" i="1">
+                              <a:latin typeface="Cambria Math" panose="02040503050406030204" pitchFamily="18" charset="0"/>
+                            </a:rPr>
+                          </m:ctrlPr>
+                        </m:sSubPr>
+                        <m:e>
+                          <m:r>
+                            <a:rPr lang="en-US" sz="2400" b="0" i="1" smtClean="0">
+                              <a:latin typeface="Cambria Math" panose="02040503050406030204" pitchFamily="18" charset="0"/>
+                            </a:rPr>
+                            <m:t>𝐴</m:t>
+                          </m:r>
+                        </m:e>
+                        <m:sub>
+                          <m:r>
+                            <a:rPr lang="en-US" sz="2400" i="1">
+                              <a:latin typeface="Cambria Math" panose="02040503050406030204" pitchFamily="18" charset="0"/>
+                            </a:rPr>
+                            <m:t>1</m:t>
+                          </m:r>
+                        </m:sub>
+                      </m:sSub>
+                      <m:sSub>
+                        <m:sSubPr>
+                          <m:ctrlPr>
+                            <a:rPr lang="en-US" sz="2400" i="1">
+                              <a:latin typeface="Cambria Math" panose="02040503050406030204" pitchFamily="18" charset="0"/>
+                            </a:rPr>
+                          </m:ctrlPr>
+                        </m:sSubPr>
+                        <m:e>
+                          <m:r>
+                            <a:rPr lang="en-US" sz="2400" b="0" i="1" smtClean="0">
+                              <a:latin typeface="Cambria Math" panose="02040503050406030204" pitchFamily="18" charset="0"/>
+                            </a:rPr>
+                            <m:t>𝑌</m:t>
+                          </m:r>
+                        </m:e>
+                        <m:sub>
+                          <m:r>
+                            <a:rPr lang="en-US" sz="2400" i="1">
+                              <a:latin typeface="Cambria Math" panose="02040503050406030204" pitchFamily="18" charset="0"/>
+                            </a:rPr>
+                            <m:t>𝑛</m:t>
+                          </m:r>
+                          <m:r>
+                            <a:rPr lang="en-US" sz="2400" i="1">
+                              <a:latin typeface="Cambria Math" panose="02040503050406030204" pitchFamily="18" charset="0"/>
+                            </a:rPr>
+                            <m:t>−1</m:t>
+                          </m:r>
+                        </m:sub>
+                      </m:sSub>
+                      <m:r>
+                        <a:rPr lang="en-US" sz="2400" i="1">
+                          <a:latin typeface="Cambria Math" panose="02040503050406030204" pitchFamily="18" charset="0"/>
+                        </a:rPr>
+                        <m:t>+</m:t>
+                      </m:r>
+                      <m:sSub>
+                        <m:sSubPr>
+                          <m:ctrlPr>
+                            <a:rPr lang="en-US" sz="2400" i="1">
+                              <a:latin typeface="Cambria Math" panose="02040503050406030204" pitchFamily="18" charset="0"/>
+                            </a:rPr>
+                          </m:ctrlPr>
+                        </m:sSubPr>
+                        <m:e>
+                          <m:r>
+                            <a:rPr lang="en-US" sz="2400" b="0" i="1" smtClean="0">
+                              <a:latin typeface="Cambria Math" panose="02040503050406030204" pitchFamily="18" charset="0"/>
+                            </a:rPr>
+                            <m:t>𝐴</m:t>
+                          </m:r>
+                        </m:e>
+                        <m:sub>
+                          <m:r>
+                            <a:rPr lang="en-US" sz="2400" i="1">
+                              <a:latin typeface="Cambria Math" panose="02040503050406030204" pitchFamily="18" charset="0"/>
+                            </a:rPr>
+                            <m:t>2</m:t>
+                          </m:r>
+                        </m:sub>
+                      </m:sSub>
+                      <m:sSub>
+                        <m:sSubPr>
+                          <m:ctrlPr>
+                            <a:rPr lang="en-US" sz="2400" i="1">
+                              <a:latin typeface="Cambria Math" panose="02040503050406030204" pitchFamily="18" charset="0"/>
+                            </a:rPr>
+                          </m:ctrlPr>
+                        </m:sSubPr>
+                        <m:e>
+                          <m:r>
+                            <a:rPr lang="en-US" sz="2400" b="0" i="1" smtClean="0">
+                              <a:latin typeface="Cambria Math" panose="02040503050406030204" pitchFamily="18" charset="0"/>
+                            </a:rPr>
+                            <m:t>𝑌</m:t>
+                          </m:r>
+                        </m:e>
+                        <m:sub>
+                          <m:r>
+                            <a:rPr lang="en-US" sz="2400" i="1">
+                              <a:latin typeface="Cambria Math" panose="02040503050406030204" pitchFamily="18" charset="0"/>
+                            </a:rPr>
+                            <m:t>𝑛</m:t>
+                          </m:r>
+                          <m:r>
+                            <a:rPr lang="en-US" sz="2400" i="1">
+                              <a:latin typeface="Cambria Math" panose="02040503050406030204" pitchFamily="18" charset="0"/>
+                            </a:rPr>
+                            <m:t>−2</m:t>
+                          </m:r>
+                        </m:sub>
+                      </m:sSub>
+                      <m:r>
+                        <a:rPr lang="en-US" sz="2400" i="1">
+                          <a:latin typeface="Cambria Math" panose="02040503050406030204" pitchFamily="18" charset="0"/>
+                        </a:rPr>
+                        <m:t>+...=</m:t>
+                      </m:r>
+                      <m:nary>
+                        <m:naryPr>
+                          <m:chr m:val="∑"/>
+                          <m:limLoc m:val="undOvr"/>
+                          <m:ctrlPr>
+                            <a:rPr lang="en-US" sz="2400" i="1">
+                              <a:latin typeface="Cambria Math" panose="02040503050406030204" pitchFamily="18" charset="0"/>
+                            </a:rPr>
+                          </m:ctrlPr>
+                        </m:naryPr>
+                        <m:sub>
+                          <m:r>
+                            <a:rPr lang="en-US" sz="2400" i="1">
+                              <a:latin typeface="Cambria Math" panose="02040503050406030204" pitchFamily="18" charset="0"/>
+                            </a:rPr>
+                            <m:t>𝑖</m:t>
+                          </m:r>
+                          <m:r>
+                            <a:rPr lang="en-US" sz="2400" i="1">
+                              <a:latin typeface="Cambria Math" panose="02040503050406030204" pitchFamily="18" charset="0"/>
+                            </a:rPr>
+                            <m:t>=0</m:t>
+                          </m:r>
+                        </m:sub>
+                        <m:sup>
+                          <m:r>
+                            <a:rPr lang="en-US" sz="2400" i="1">
+                              <a:latin typeface="Cambria Math" panose="02040503050406030204" pitchFamily="18" charset="0"/>
+                            </a:rPr>
+                            <m:t>𝑃</m:t>
+                          </m:r>
+                        </m:sup>
+                        <m:e>
+                          <m:sSub>
+                            <m:sSubPr>
+                              <m:ctrlPr>
+                                <a:rPr lang="en-US" sz="2400" i="1">
+                                  <a:latin typeface="Cambria Math" panose="02040503050406030204" pitchFamily="18" charset="0"/>
+                                </a:rPr>
+                              </m:ctrlPr>
+                            </m:sSubPr>
+                            <m:e>
+                              <m:r>
+                                <a:rPr lang="en-US" sz="2400" b="0" i="1" smtClean="0">
+                                  <a:latin typeface="Cambria Math" panose="02040503050406030204" pitchFamily="18" charset="0"/>
+                                </a:rPr>
+                                <m:t>𝐴</m:t>
+                              </m:r>
+                            </m:e>
+                            <m:sub>
+                              <m:r>
+                                <a:rPr lang="en-US" sz="2400" i="1">
+                                  <a:latin typeface="Cambria Math" panose="02040503050406030204" pitchFamily="18" charset="0"/>
+                                </a:rPr>
+                                <m:t>𝑖</m:t>
+                              </m:r>
+                            </m:sub>
+                          </m:sSub>
+                        </m:e>
+                      </m:nary>
+                      <m:sSub>
+                        <m:sSubPr>
+                          <m:ctrlPr>
+                            <a:rPr lang="en-US" sz="2400" i="1">
+                              <a:latin typeface="Cambria Math" panose="02040503050406030204" pitchFamily="18" charset="0"/>
+                            </a:rPr>
+                          </m:ctrlPr>
+                        </m:sSubPr>
+                        <m:e>
+                          <m:r>
+                            <a:rPr lang="en-US" sz="2400" b="0" i="1" smtClean="0">
+                              <a:latin typeface="Cambria Math" panose="02040503050406030204" pitchFamily="18" charset="0"/>
+                            </a:rPr>
+                            <m:t>𝑌</m:t>
+                          </m:r>
+                        </m:e>
+                        <m:sub>
+                          <m:r>
+                            <a:rPr lang="en-US" sz="2400" i="1">
+                              <a:latin typeface="Cambria Math" panose="02040503050406030204" pitchFamily="18" charset="0"/>
+                            </a:rPr>
+                            <m:t>𝑛</m:t>
+                          </m:r>
+                          <m:r>
+                            <a:rPr lang="en-US" sz="2400" i="1">
+                              <a:latin typeface="Cambria Math" panose="02040503050406030204" pitchFamily="18" charset="0"/>
+                            </a:rPr>
+                            <m:t>−</m:t>
+                          </m:r>
+                          <m:r>
+                            <a:rPr lang="en-US" sz="2400" i="1">
+                              <a:latin typeface="Cambria Math" panose="02040503050406030204" pitchFamily="18" charset="0"/>
+                            </a:rPr>
+                            <m:t>𝑖</m:t>
+                          </m:r>
+                        </m:sub>
+                      </m:sSub>
+                      <m:r>
+                        <a:rPr lang="en-US" sz="2400" i="1">
+                          <a:latin typeface="Cambria Math" panose="02040503050406030204" pitchFamily="18" charset="0"/>
+                        </a:rPr>
+                        <m:t>.</m:t>
+                      </m:r>
+                    </m:oMath>
+                  </m:oMathPara>
+                </a14:m>
+                <a:endParaRPr lang="en-US" sz="2400" dirty="0" smtClean="0"/>
+              </a:p>
+              <a:p>
+                <a:pPr marL="0" indent="0">
+                  <a:lnSpc>
+                    <a:spcPct val="100000"/>
+                  </a:lnSpc>
+                  <a:spcBef>
+                    <a:spcPts val="0"/>
+                  </a:spcBef>
+                  <a:buNone/>
+                </a:pPr>
+                <a:r>
+                  <a:rPr lang="ru-RU" sz="2400" dirty="0" smtClean="0"/>
+                  <a:t>Где</a:t>
+                </a:r>
+                <a:r>
+                  <a:rPr lang="en-US" sz="2400" dirty="0" smtClean="0"/>
+                  <a:t> </a:t>
+                </a:r>
+                <a14:m>
+                  <m:oMath xmlns:m="http://schemas.openxmlformats.org/officeDocument/2006/math">
+                    <m:sSub>
+                      <m:sSubPr>
+                        <m:ctrlPr>
+                          <a:rPr lang="en-US" sz="2400" i="1">
+                            <a:latin typeface="Cambria Math" panose="02040503050406030204" pitchFamily="18" charset="0"/>
+                          </a:rPr>
+                        </m:ctrlPr>
+                      </m:sSubPr>
+                      <m:e>
+                        <m:r>
+                          <a:rPr lang="en-US" sz="2400" i="1">
+                            <a:latin typeface="Cambria Math" panose="02040503050406030204" pitchFamily="18" charset="0"/>
+                          </a:rPr>
+                          <m:t>𝑌</m:t>
+                        </m:r>
+                      </m:e>
+                      <m:sub>
+                        <m:r>
+                          <a:rPr lang="en-US" sz="2400" i="1">
+                            <a:latin typeface="Cambria Math" panose="02040503050406030204" pitchFamily="18" charset="0"/>
+                          </a:rPr>
+                          <m:t>𝑛</m:t>
+                        </m:r>
+                      </m:sub>
+                    </m:sSub>
+                    <m:r>
+                      <a:rPr lang="en-US" sz="2400" b="0" i="1" smtClean="0">
+                        <a:latin typeface="Cambria Math" panose="02040503050406030204" pitchFamily="18" charset="0"/>
+                      </a:rPr>
+                      <m:t>=</m:t>
+                    </m:r>
+                    <m:d>
+                      <m:dPr>
+                        <m:begChr m:val="{"/>
+                        <m:endChr m:val="}"/>
+                        <m:ctrlPr>
+                          <a:rPr lang="en-US" sz="2400" b="0" i="1" smtClean="0">
+                            <a:latin typeface="Cambria Math" panose="02040503050406030204" pitchFamily="18" charset="0"/>
+                          </a:rPr>
+                        </m:ctrlPr>
+                      </m:dPr>
+                      <m:e>
+                        <m:sSub>
+                          <m:sSubPr>
+                            <m:ctrlPr>
+                              <a:rPr lang="en-US" sz="2400" i="1">
+                                <a:latin typeface="Cambria Math" panose="02040503050406030204" pitchFamily="18" charset="0"/>
+                              </a:rPr>
+                            </m:ctrlPr>
+                          </m:sSubPr>
+                          <m:e>
+                            <m:r>
+                              <a:rPr lang="en-US" sz="2400" i="1">
+                                <a:latin typeface="Cambria Math" panose="02040503050406030204" pitchFamily="18" charset="0"/>
+                              </a:rPr>
+                              <m:t>𝑦</m:t>
+                            </m:r>
+                          </m:e>
+                          <m:sub>
+                            <m:r>
+                              <a:rPr lang="en-US" sz="2400" i="1">
+                                <a:latin typeface="Cambria Math" panose="02040503050406030204" pitchFamily="18" charset="0"/>
+                              </a:rPr>
+                              <m:t>𝑛</m:t>
+                            </m:r>
+                            <m:r>
+                              <a:rPr lang="en-US" sz="2400" i="1">
+                                <a:latin typeface="Cambria Math" panose="02040503050406030204" pitchFamily="18" charset="0"/>
+                              </a:rPr>
+                              <m:t>,1</m:t>
+                            </m:r>
+                          </m:sub>
+                        </m:sSub>
+                        <m:r>
+                          <a:rPr lang="en-US" sz="2400" b="0" i="1" smtClean="0">
+                            <a:latin typeface="Cambria Math" panose="02040503050406030204" pitchFamily="18" charset="0"/>
+                          </a:rPr>
+                          <m:t>, …,</m:t>
+                        </m:r>
+                        <m:sSub>
+                          <m:sSubPr>
+                            <m:ctrlPr>
+                              <a:rPr lang="en-US" sz="2400" i="1">
+                                <a:latin typeface="Cambria Math" panose="02040503050406030204" pitchFamily="18" charset="0"/>
+                              </a:rPr>
+                            </m:ctrlPr>
+                          </m:sSubPr>
+                          <m:e>
+                            <m:r>
+                              <a:rPr lang="en-US" sz="2400" i="1">
+                                <a:latin typeface="Cambria Math" panose="02040503050406030204" pitchFamily="18" charset="0"/>
+                              </a:rPr>
+                              <m:t>𝑦</m:t>
+                            </m:r>
+                          </m:e>
+                          <m:sub>
+                            <m:r>
+                              <a:rPr lang="en-US" sz="2400" i="1">
+                                <a:latin typeface="Cambria Math" panose="02040503050406030204" pitchFamily="18" charset="0"/>
+                              </a:rPr>
+                              <m:t>𝑛</m:t>
+                            </m:r>
+                            <m:r>
+                              <a:rPr lang="en-US" sz="2400" i="1">
+                                <a:latin typeface="Cambria Math" panose="02040503050406030204" pitchFamily="18" charset="0"/>
+                              </a:rPr>
+                              <m:t>,</m:t>
+                            </m:r>
+                            <m:r>
+                              <a:rPr lang="en-US" sz="2400" i="1">
+                                <a:latin typeface="Cambria Math" panose="02040503050406030204" pitchFamily="18" charset="0"/>
+                              </a:rPr>
+                              <m:t>𝑚</m:t>
+                            </m:r>
+                          </m:sub>
+                        </m:sSub>
+                      </m:e>
+                    </m:d>
+                    <m:r>
+                      <a:rPr lang="en-US" sz="2400" b="0" i="0" smtClean="0">
+                        <a:latin typeface="Cambria Math" panose="02040503050406030204" pitchFamily="18" charset="0"/>
+                      </a:rPr>
+                      <m:t> </m:t>
+                    </m:r>
+                  </m:oMath>
+                </a14:m>
+                <a:r>
+                  <a:rPr lang="en-US" sz="2400" b="0" i="0" dirty="0" smtClean="0">
+                    <a:latin typeface="+mj-lt"/>
+                  </a:rPr>
+                  <a:t>- </a:t>
+                </a:r>
+                <a:r>
+                  <a:rPr lang="ru-RU" sz="2400" b="0" i="0" dirty="0" smtClean="0">
+                    <a:latin typeface="+mj-lt"/>
+                  </a:rPr>
+                  <a:t>вектор наблюдений в момент </a:t>
+                </a:r>
+                <a:r>
+                  <a:rPr lang="en-US" sz="2400" b="0" i="0" dirty="0" smtClean="0">
+                    <a:latin typeface="+mj-lt"/>
+                  </a:rPr>
+                  <a:t>n;</a:t>
+                </a:r>
+                <a14:m>
+                  <m:oMath xmlns:m="http://schemas.openxmlformats.org/officeDocument/2006/math">
+                    <m:sSub>
+                      <m:sSubPr>
+                        <m:ctrlPr>
+                          <a:rPr lang="en-US" sz="2400" i="1">
+                            <a:latin typeface="Cambria Math" panose="02040503050406030204" pitchFamily="18" charset="0"/>
+                          </a:rPr>
+                        </m:ctrlPr>
+                      </m:sSubPr>
+                      <m:e>
+                        <m:acc>
+                          <m:accPr>
+                            <m:chr m:val="̂"/>
+                            <m:ctrlPr>
+                              <a:rPr lang="en-US" sz="2400" i="1">
+                                <a:latin typeface="Cambria Math" panose="02040503050406030204" pitchFamily="18" charset="0"/>
+                              </a:rPr>
+                            </m:ctrlPr>
+                          </m:accPr>
+                          <m:e>
+                            <m:r>
+                              <a:rPr lang="en-US" sz="2400" i="1">
+                                <a:latin typeface="Cambria Math" panose="02040503050406030204" pitchFamily="18" charset="0"/>
+                              </a:rPr>
+                              <m:t>𝑌</m:t>
+                            </m:r>
+                          </m:e>
+                        </m:acc>
+                      </m:e>
+                      <m:sub>
+                        <m:r>
+                          <a:rPr lang="en-US" sz="2400" i="1">
+                            <a:latin typeface="Cambria Math" panose="02040503050406030204" pitchFamily="18" charset="0"/>
+                          </a:rPr>
+                          <m:t>𝑛</m:t>
+                        </m:r>
+                        <m:r>
+                          <a:rPr lang="ru-RU" sz="2400" i="1">
+                            <a:latin typeface="Cambria Math" panose="02040503050406030204" pitchFamily="18" charset="0"/>
+                          </a:rPr>
+                          <m:t>+1</m:t>
+                        </m:r>
+                      </m:sub>
+                    </m:sSub>
+                    <m:r>
+                      <a:rPr lang="en-US" sz="2400" i="1">
+                        <a:latin typeface="Cambria Math" panose="02040503050406030204" pitchFamily="18" charset="0"/>
+                      </a:rPr>
+                      <m:t>=</m:t>
+                    </m:r>
+                    <m:d>
+                      <m:dPr>
+                        <m:begChr m:val="{"/>
+                        <m:endChr m:val="}"/>
+                        <m:ctrlPr>
+                          <a:rPr lang="en-US" sz="2400" i="1">
+                            <a:latin typeface="Cambria Math" panose="02040503050406030204" pitchFamily="18" charset="0"/>
+                          </a:rPr>
+                        </m:ctrlPr>
+                      </m:dPr>
+                      <m:e>
+                        <m:sSub>
+                          <m:sSubPr>
+                            <m:ctrlPr>
+                              <a:rPr lang="en-US" sz="2400" i="1">
+                                <a:latin typeface="Cambria Math" panose="02040503050406030204" pitchFamily="18" charset="0"/>
+                              </a:rPr>
+                            </m:ctrlPr>
+                          </m:sSubPr>
+                          <m:e>
+                            <m:acc>
+                              <m:accPr>
+                                <m:chr m:val="̂"/>
+                                <m:ctrlPr>
+                                  <a:rPr lang="en-US" sz="2400" i="1">
+                                    <a:latin typeface="Cambria Math" panose="02040503050406030204" pitchFamily="18" charset="0"/>
+                                  </a:rPr>
+                                </m:ctrlPr>
+                              </m:accPr>
+                              <m:e>
+                                <m:r>
+                                  <a:rPr lang="en-US" sz="2400" i="1">
+                                    <a:latin typeface="Cambria Math" panose="02040503050406030204" pitchFamily="18" charset="0"/>
+                                  </a:rPr>
+                                  <m:t>𝑦</m:t>
+                                </m:r>
+                              </m:e>
+                            </m:acc>
+                          </m:e>
+                          <m:sub>
+                            <m:r>
+                              <a:rPr lang="en-US" sz="2400" i="1">
+                                <a:latin typeface="Cambria Math" panose="02040503050406030204" pitchFamily="18" charset="0"/>
+                              </a:rPr>
+                              <m:t>𝑛</m:t>
+                            </m:r>
+                            <m:r>
+                              <a:rPr lang="ru-RU" sz="2400" i="1">
+                                <a:latin typeface="Cambria Math" panose="02040503050406030204" pitchFamily="18" charset="0"/>
+                              </a:rPr>
+                              <m:t>+1</m:t>
+                            </m:r>
+                            <m:r>
+                              <a:rPr lang="en-US" sz="2400" i="1">
+                                <a:latin typeface="Cambria Math" panose="02040503050406030204" pitchFamily="18" charset="0"/>
+                              </a:rPr>
+                              <m:t>,1</m:t>
+                            </m:r>
+                          </m:sub>
+                        </m:sSub>
+                        <m:r>
+                          <a:rPr lang="en-US" sz="2400" i="1">
+                            <a:latin typeface="Cambria Math" panose="02040503050406030204" pitchFamily="18" charset="0"/>
+                          </a:rPr>
+                          <m:t>, …,</m:t>
+                        </m:r>
+                        <m:sSub>
+                          <m:sSubPr>
+                            <m:ctrlPr>
+                              <a:rPr lang="en-US" sz="2400" i="1">
+                                <a:latin typeface="Cambria Math" panose="02040503050406030204" pitchFamily="18" charset="0"/>
+                              </a:rPr>
+                            </m:ctrlPr>
+                          </m:sSubPr>
+                          <m:e>
+                            <m:acc>
+                              <m:accPr>
+                                <m:chr m:val="̂"/>
+                                <m:ctrlPr>
+                                  <a:rPr lang="en-US" sz="2400" i="1">
+                                    <a:latin typeface="Cambria Math" panose="02040503050406030204" pitchFamily="18" charset="0"/>
+                                  </a:rPr>
+                                </m:ctrlPr>
+                              </m:accPr>
+                              <m:e>
+                                <m:r>
+                                  <a:rPr lang="en-US" sz="2400" i="1">
+                                    <a:latin typeface="Cambria Math" panose="02040503050406030204" pitchFamily="18" charset="0"/>
+                                  </a:rPr>
+                                  <m:t>𝑦</m:t>
+                                </m:r>
+                              </m:e>
+                            </m:acc>
+                          </m:e>
+                          <m:sub>
+                            <m:r>
+                              <a:rPr lang="en-US" sz="2400" i="1">
+                                <a:latin typeface="Cambria Math" panose="02040503050406030204" pitchFamily="18" charset="0"/>
+                              </a:rPr>
+                              <m:t>𝑛</m:t>
+                            </m:r>
+                            <m:r>
+                              <a:rPr lang="ru-RU" sz="2400" i="1">
+                                <a:latin typeface="Cambria Math" panose="02040503050406030204" pitchFamily="18" charset="0"/>
+                              </a:rPr>
+                              <m:t>+1</m:t>
+                            </m:r>
+                            <m:r>
+                              <a:rPr lang="en-US" sz="2400" i="1">
+                                <a:latin typeface="Cambria Math" panose="02040503050406030204" pitchFamily="18" charset="0"/>
+                              </a:rPr>
+                              <m:t>,</m:t>
+                            </m:r>
+                            <m:r>
+                              <a:rPr lang="en-US" sz="2400" i="1">
+                                <a:latin typeface="Cambria Math" panose="02040503050406030204" pitchFamily="18" charset="0"/>
+                              </a:rPr>
+                              <m:t>𝑚</m:t>
+                            </m:r>
+                          </m:sub>
+                        </m:sSub>
+                      </m:e>
+                    </m:d>
+                  </m:oMath>
+                </a14:m>
+                <a:r>
+                  <a:rPr lang="en-US" sz="2400" dirty="0" smtClean="0"/>
+                  <a:t> - </a:t>
+                </a:r>
+                <a:r>
+                  <a:rPr lang="ru-RU" sz="2400" dirty="0" smtClean="0"/>
+                  <a:t>вектор предсказаний в момент </a:t>
+                </a:r>
+                <a:r>
+                  <a:rPr lang="en-US" sz="2400" dirty="0" smtClean="0"/>
+                  <a:t>n+1, </a:t>
+                </a:r>
+                <a14:m>
+                  <m:oMath xmlns:m="http://schemas.openxmlformats.org/officeDocument/2006/math">
+                    <m:sSub>
+                      <m:sSubPr>
+                        <m:ctrlPr>
+                          <a:rPr lang="en-US" sz="2400" i="1">
+                            <a:latin typeface="Cambria Math" panose="02040503050406030204" pitchFamily="18" charset="0"/>
+                          </a:rPr>
+                        </m:ctrlPr>
+                      </m:sSubPr>
+                      <m:e>
+                        <m:r>
+                          <a:rPr lang="en-US" sz="2400" i="1">
+                            <a:latin typeface="Cambria Math" panose="02040503050406030204" pitchFamily="18" charset="0"/>
+                          </a:rPr>
+                          <m:t>𝐴</m:t>
+                        </m:r>
+                      </m:e>
+                      <m:sub>
+                        <m:r>
+                          <a:rPr lang="en-US" sz="2400" b="0" i="1" smtClean="0">
+                            <a:latin typeface="Cambria Math" panose="02040503050406030204" pitchFamily="18" charset="0"/>
+                          </a:rPr>
+                          <m:t>𝑖</m:t>
+                        </m:r>
+                      </m:sub>
+                    </m:sSub>
+                    <m:r>
+                      <a:rPr lang="en-US" sz="2400" b="0" i="1" smtClean="0">
+                        <a:latin typeface="Cambria Math" panose="02040503050406030204" pitchFamily="18" charset="0"/>
+                      </a:rPr>
+                      <m:t>=</m:t>
+                    </m:r>
+                    <m:r>
+                      <a:rPr lang="en-US" sz="2400" b="0" i="1" smtClean="0">
+                        <a:latin typeface="Cambria Math" panose="02040503050406030204" pitchFamily="18" charset="0"/>
+                      </a:rPr>
+                      <m:t>𝑑𝑖𝑎𝑔</m:t>
+                    </m:r>
+                    <m:d>
+                      <m:dPr>
+                        <m:begChr m:val="{"/>
+                        <m:endChr m:val="}"/>
+                        <m:ctrlPr>
+                          <a:rPr lang="en-US" sz="2400" b="0" i="1" smtClean="0">
+                            <a:latin typeface="Cambria Math" panose="02040503050406030204" pitchFamily="18" charset="0"/>
+                          </a:rPr>
+                        </m:ctrlPr>
+                      </m:dPr>
+                      <m:e>
+                        <m:sSub>
+                          <m:sSubPr>
+                            <m:ctrlPr>
+                              <a:rPr lang="en-US" sz="2400" i="1">
+                                <a:latin typeface="Cambria Math" panose="02040503050406030204" pitchFamily="18" charset="0"/>
+                              </a:rPr>
+                            </m:ctrlPr>
+                          </m:sSubPr>
+                          <m:e>
+                            <m:r>
+                              <a:rPr lang="en-US" sz="2400" i="1">
+                                <a:latin typeface="Cambria Math" panose="02040503050406030204" pitchFamily="18" charset="0"/>
+                              </a:rPr>
+                              <m:t>𝛼</m:t>
+                            </m:r>
+                          </m:e>
+                          <m:sub>
+                            <m:r>
+                              <a:rPr lang="en-US" sz="2400" b="0" i="1" smtClean="0">
+                                <a:latin typeface="Cambria Math" panose="02040503050406030204" pitchFamily="18" charset="0"/>
+                              </a:rPr>
+                              <m:t>𝑖</m:t>
+                            </m:r>
+                            <m:r>
+                              <a:rPr lang="en-US" sz="2400" i="1">
+                                <a:latin typeface="Cambria Math" panose="02040503050406030204" pitchFamily="18" charset="0"/>
+                              </a:rPr>
+                              <m:t>,1</m:t>
+                            </m:r>
+                          </m:sub>
+                        </m:sSub>
+                        <m:r>
+                          <a:rPr lang="en-US" sz="2400" b="0" i="1" smtClean="0">
+                            <a:latin typeface="Cambria Math" panose="02040503050406030204" pitchFamily="18" charset="0"/>
+                          </a:rPr>
+                          <m:t>,…,</m:t>
+                        </m:r>
+                        <m:sSub>
+                          <m:sSubPr>
+                            <m:ctrlPr>
+                              <a:rPr lang="en-US" sz="2400" i="1">
+                                <a:latin typeface="Cambria Math" panose="02040503050406030204" pitchFamily="18" charset="0"/>
+                              </a:rPr>
+                            </m:ctrlPr>
+                          </m:sSubPr>
+                          <m:e>
+                            <m:r>
+                              <a:rPr lang="en-US" sz="2400" i="1">
+                                <a:latin typeface="Cambria Math" panose="02040503050406030204" pitchFamily="18" charset="0"/>
+                              </a:rPr>
+                              <m:t>𝛼</m:t>
+                            </m:r>
+                          </m:e>
+                          <m:sub>
+                            <m:r>
+                              <a:rPr lang="en-US" sz="2400" b="0" i="1" smtClean="0">
+                                <a:latin typeface="Cambria Math" panose="02040503050406030204" pitchFamily="18" charset="0"/>
+                              </a:rPr>
+                              <m:t>𝑖</m:t>
+                            </m:r>
+                            <m:r>
+                              <a:rPr lang="en-US" sz="2400" i="1">
+                                <a:latin typeface="Cambria Math" panose="02040503050406030204" pitchFamily="18" charset="0"/>
+                              </a:rPr>
+                              <m:t>,</m:t>
+                            </m:r>
+                            <m:r>
+                              <a:rPr lang="en-US" sz="2400" b="0" i="1" smtClean="0">
+                                <a:latin typeface="Cambria Math" panose="02040503050406030204" pitchFamily="18" charset="0"/>
+                              </a:rPr>
+                              <m:t>𝑚</m:t>
+                            </m:r>
+                          </m:sub>
+                        </m:sSub>
+                      </m:e>
+                    </m:d>
+                  </m:oMath>
+                </a14:m>
+                <a:r>
+                  <a:rPr lang="en-US" sz="2400" dirty="0" smtClean="0"/>
+                  <a:t> - </a:t>
+                </a:r>
+                <a:r>
+                  <a:rPr lang="ru-RU" sz="2400" dirty="0" smtClean="0"/>
+                  <a:t>вектор коэффициент</a:t>
+                </a:r>
+                <a:r>
+                  <a:rPr lang="ru-RU" sz="2400" dirty="0"/>
+                  <a:t>ы</a:t>
+                </a:r>
+                <a:r>
+                  <a:rPr lang="ru-RU" sz="2400" dirty="0" smtClean="0"/>
+                  <a:t> авторегрессии </a:t>
+                </a:r>
+                <a14:m>
+                  <m:oMath xmlns:m="http://schemas.openxmlformats.org/officeDocument/2006/math">
+                    <m:r>
+                      <a:rPr lang="en-US" sz="2400" i="1" dirty="0" smtClean="0">
+                        <a:latin typeface="Cambria Math" panose="02040503050406030204" pitchFamily="18" charset="0"/>
+                      </a:rPr>
+                      <m:t>𝑖</m:t>
+                    </m:r>
+                    <m:r>
+                      <a:rPr lang="en-US" sz="2400" b="0" i="1" dirty="0" smtClean="0">
+                        <a:latin typeface="Cambria Math" panose="02040503050406030204" pitchFamily="18" charset="0"/>
+                      </a:rPr>
+                      <m:t>.</m:t>
+                    </m:r>
+                  </m:oMath>
+                </a14:m>
+                <a:endParaRPr lang="ru-RU" sz="2400" dirty="0"/>
+              </a:p>
+              <a:p>
+                <a:pPr marL="0" indent="0" algn="ctr">
+                  <a:lnSpc>
+                    <a:spcPct val="100000"/>
+                  </a:lnSpc>
+                  <a:spcBef>
+                    <a:spcPts val="0"/>
+                  </a:spcBef>
+                  <a:buNone/>
+                </a:pPr>
+                <a:r>
+                  <a:rPr lang="ru-RU" sz="2400" dirty="0" smtClean="0"/>
+                  <a:t>Модель </a:t>
+                </a:r>
+                <a14:m>
+                  <m:oMath xmlns:m="http://schemas.openxmlformats.org/officeDocument/2006/math">
+                    <m:sSub>
+                      <m:sSubPr>
+                        <m:ctrlPr>
+                          <a:rPr lang="en-US" sz="2400" i="1">
+                            <a:latin typeface="Cambria Math" panose="02040503050406030204" pitchFamily="18" charset="0"/>
+                          </a:rPr>
+                        </m:ctrlPr>
+                      </m:sSubPr>
+                      <m:e>
+                        <m:acc>
+                          <m:accPr>
+                            <m:chr m:val="̂"/>
+                            <m:ctrlPr>
+                              <a:rPr lang="en-US" sz="2400" i="1">
+                                <a:latin typeface="Cambria Math" panose="02040503050406030204" pitchFamily="18" charset="0"/>
+                              </a:rPr>
+                            </m:ctrlPr>
+                          </m:accPr>
+                          <m:e>
+                            <m:r>
+                              <a:rPr lang="en-US" sz="2400" i="1">
+                                <a:latin typeface="Cambria Math" panose="02040503050406030204" pitchFamily="18" charset="0"/>
+                              </a:rPr>
+                              <m:t>𝑌</m:t>
+                            </m:r>
+                          </m:e>
+                        </m:acc>
+                      </m:e>
+                      <m:sub>
+                        <m:r>
+                          <a:rPr lang="en-US" sz="2400" i="1">
+                            <a:latin typeface="Cambria Math" panose="02040503050406030204" pitchFamily="18" charset="0"/>
+                          </a:rPr>
+                          <m:t>𝑛</m:t>
+                        </m:r>
+                        <m:r>
+                          <a:rPr lang="ru-RU" sz="2400" i="1">
+                            <a:latin typeface="Cambria Math" panose="02040503050406030204" pitchFamily="18" charset="0"/>
+                          </a:rPr>
+                          <m:t>+1</m:t>
+                        </m:r>
+                      </m:sub>
+                    </m:sSub>
+                    <m:r>
+                      <a:rPr lang="en-US" sz="2400" i="1">
+                        <a:latin typeface="Cambria Math" panose="02040503050406030204" pitchFamily="18" charset="0"/>
+                      </a:rPr>
+                      <m:t>=</m:t>
+                    </m:r>
+                    <m:nary>
+                      <m:naryPr>
+                        <m:chr m:val="∑"/>
+                        <m:limLoc m:val="undOvr"/>
+                        <m:ctrlPr>
+                          <a:rPr lang="en-US" sz="2400" i="1">
+                            <a:latin typeface="Cambria Math" panose="02040503050406030204" pitchFamily="18" charset="0"/>
+                          </a:rPr>
+                        </m:ctrlPr>
+                      </m:naryPr>
+                      <m:sub>
+                        <m:r>
+                          <a:rPr lang="en-US" sz="2400" i="1">
+                            <a:latin typeface="Cambria Math" panose="02040503050406030204" pitchFamily="18" charset="0"/>
+                          </a:rPr>
+                          <m:t>𝑖</m:t>
+                        </m:r>
+                        <m:r>
+                          <a:rPr lang="en-US" sz="2400" i="1">
+                            <a:latin typeface="Cambria Math" panose="02040503050406030204" pitchFamily="18" charset="0"/>
+                          </a:rPr>
+                          <m:t>=0</m:t>
+                        </m:r>
+                      </m:sub>
+                      <m:sup>
+                        <m:r>
+                          <a:rPr lang="en-US" sz="2400" i="1">
+                            <a:latin typeface="Cambria Math" panose="02040503050406030204" pitchFamily="18" charset="0"/>
+                          </a:rPr>
+                          <m:t>𝑃</m:t>
+                        </m:r>
+                      </m:sup>
+                      <m:e>
+                        <m:sSub>
+                          <m:sSubPr>
+                            <m:ctrlPr>
+                              <a:rPr lang="en-US" sz="2400" i="1">
+                                <a:latin typeface="Cambria Math" panose="02040503050406030204" pitchFamily="18" charset="0"/>
+                              </a:rPr>
+                            </m:ctrlPr>
+                          </m:sSubPr>
+                          <m:e>
+                            <m:r>
+                              <a:rPr lang="en-US" sz="2400" i="1">
+                                <a:latin typeface="Cambria Math" panose="02040503050406030204" pitchFamily="18" charset="0"/>
+                              </a:rPr>
+                              <m:t>𝐴</m:t>
+                            </m:r>
+                          </m:e>
+                          <m:sub>
+                            <m:r>
+                              <a:rPr lang="en-US" sz="2400" i="1">
+                                <a:latin typeface="Cambria Math" panose="02040503050406030204" pitchFamily="18" charset="0"/>
+                              </a:rPr>
+                              <m:t>𝑖</m:t>
+                            </m:r>
+                          </m:sub>
+                        </m:sSub>
+                      </m:e>
+                    </m:nary>
+                    <m:sSub>
+                      <m:sSubPr>
+                        <m:ctrlPr>
+                          <a:rPr lang="en-US" sz="2400" i="1">
+                            <a:latin typeface="Cambria Math" panose="02040503050406030204" pitchFamily="18" charset="0"/>
+                          </a:rPr>
+                        </m:ctrlPr>
+                      </m:sSubPr>
+                      <m:e>
+                        <m:r>
+                          <a:rPr lang="en-US" sz="2400" i="1">
+                            <a:latin typeface="Cambria Math" panose="02040503050406030204" pitchFamily="18" charset="0"/>
+                          </a:rPr>
+                          <m:t>𝑌</m:t>
+                        </m:r>
+                      </m:e>
+                      <m:sub>
+                        <m:r>
+                          <a:rPr lang="en-US" sz="2400" i="1">
+                            <a:latin typeface="Cambria Math" panose="02040503050406030204" pitchFamily="18" charset="0"/>
+                          </a:rPr>
+                          <m:t>𝑛</m:t>
+                        </m:r>
+                        <m:r>
+                          <a:rPr lang="en-US" sz="2400" i="1">
+                            <a:latin typeface="Cambria Math" panose="02040503050406030204" pitchFamily="18" charset="0"/>
+                          </a:rPr>
+                          <m:t>−</m:t>
+                        </m:r>
+                        <m:r>
+                          <a:rPr lang="en-US" sz="2400" i="1">
+                            <a:latin typeface="Cambria Math" panose="02040503050406030204" pitchFamily="18" charset="0"/>
+                          </a:rPr>
+                          <m:t>𝑖</m:t>
+                        </m:r>
+                      </m:sub>
+                    </m:sSub>
+                  </m:oMath>
+                </a14:m>
+                <a:r>
+                  <a:rPr lang="ru-RU" sz="2400" dirty="0" smtClean="0"/>
+                  <a:t> - </a:t>
+                </a:r>
+                <a:r>
+                  <a:rPr lang="ru-RU" sz="2400" b="1" dirty="0" smtClean="0"/>
+                  <a:t>модель векторной авторегрессии - </a:t>
+                </a:r>
+                <a:r>
+                  <a:rPr lang="en-US" sz="2400" b="1" dirty="0" smtClean="0"/>
+                  <a:t>VAR</a:t>
+                </a:r>
+                <a:endParaRPr lang="en-US" sz="2400" b="1" dirty="0"/>
+              </a:p>
+              <a:p>
+                <a:pPr marL="0" indent="0">
+                  <a:lnSpc>
+                    <a:spcPct val="100000"/>
+                  </a:lnSpc>
+                  <a:spcBef>
+                    <a:spcPts val="0"/>
+                  </a:spcBef>
+                  <a:buNone/>
+                </a:pPr>
+                <a:r>
+                  <a:rPr lang="ru-RU" sz="2400" i="1" dirty="0" smtClean="0"/>
+                  <a:t>Иногда вводят и более полные модели </a:t>
+                </a:r>
+                <a:r>
+                  <a:rPr lang="en-US" sz="2400" i="1" dirty="0" smtClean="0"/>
+                  <a:t>VARIMA</a:t>
+                </a:r>
+                <a:endParaRPr lang="ru-RU" sz="2400" i="1" dirty="0"/>
+              </a:p>
+            </p:txBody>
+          </p:sp>
+        </mc:Choice>
+        <mc:Fallback>
+          <p:sp>
+            <p:nvSpPr>
+              <p:cNvPr id="3" name="Объект 2"/>
+              <p:cNvSpPr>
+                <a:spLocks noGrp="1" noRot="1" noChangeAspect="1" noMove="1" noResize="1" noEditPoints="1" noAdjustHandles="1" noChangeArrowheads="1" noChangeShapeType="1" noTextEdit="1"/>
+              </p:cNvSpPr>
+              <p:nvPr>
+                <p:ph idx="1"/>
+              </p:nvPr>
+            </p:nvSpPr>
+            <p:spPr>
+              <a:xfrm>
+                <a:off x="257175" y="704851"/>
+                <a:ext cx="11801475" cy="5876926"/>
+              </a:xfrm>
+              <a:blipFill>
+                <a:blip r:embed="rId2"/>
+                <a:stretch>
+                  <a:fillRect l="-775" t="-830" b="-1141"/>
+                </a:stretch>
+              </a:blipFill>
+            </p:spPr>
+            <p:txBody>
+              <a:bodyPr/>
+              <a:lstStyle/>
+              <a:p>
+                <a:r>
+                  <a:rPr lang="ru-RU">
+                    <a:noFill/>
+                  </a:rPr>
+                  <a:t> </a:t>
+                </a:r>
+              </a:p>
+            </p:txBody>
+          </p:sp>
+        </mc:Fallback>
+      </mc:AlternateContent>
     </p:spTree>
     <p:extLst>
       <p:ext uri="{BB962C8B-B14F-4D97-AF65-F5344CB8AC3E}">
-        <p14:creationId xmlns:p14="http://schemas.microsoft.com/office/powerpoint/2010/main" val="539953052"/>
+        <p14:creationId xmlns:p14="http://schemas.microsoft.com/office/powerpoint/2010/main" val="289289099"/>
       </p:ext>
     </p:extLst>
   </p:cSld>
@@ -4231,623 +6926,373 @@
             <p:ph type="title"/>
           </p:nvPr>
         </p:nvSpPr>
-        <p:spPr/>
+        <p:spPr>
+          <a:xfrm>
+            <a:off x="314325" y="136526"/>
+            <a:ext cx="11430000" cy="634999"/>
+          </a:xfrm>
+        </p:spPr>
         <p:txBody>
-          <a:bodyPr/>
+          <a:bodyPr>
+            <a:normAutofit fontScale="90000"/>
+          </a:bodyPr>
           <a:lstStyle/>
           <a:p>
-            <a:r>
-              <a:rPr lang="ru-RU" dirty="0" smtClean="0"/>
-              <a:t>Типы многомерных ВР</a:t>
-            </a:r>
-            <a:endParaRPr lang="ru-RU" dirty="0"/>
+            <a:pPr algn="ctr"/>
+            <a:r>
+              <a:rPr lang="ru-RU" b="1" dirty="0" smtClean="0"/>
+              <a:t>Типы связей в МВР</a:t>
+            </a:r>
+            <a:endParaRPr lang="ru-RU" b="1" dirty="0"/>
           </a:p>
         </p:txBody>
       </p:sp>
-      <p:graphicFrame>
-        <p:nvGraphicFramePr>
-          <p:cNvPr id="4" name="Объект 3"/>
-          <p:cNvGraphicFramePr>
-            <a:graphicFrameLocks noGrp="1"/>
-          </p:cNvGraphicFramePr>
-          <p:nvPr>
-            <p:ph idx="1"/>
-            <p:extLst>
-              <p:ext uri="{D42A27DB-BD31-4B8C-83A1-F6EECF244321}">
-                <p14:modId xmlns:p14="http://schemas.microsoft.com/office/powerpoint/2010/main" val="3814707823"/>
-              </p:ext>
-            </p:extLst>
-          </p:nvPr>
-        </p:nvGraphicFramePr>
-        <p:xfrm>
-          <a:off x="250824" y="1770856"/>
-          <a:ext cx="11198225" cy="3578291"/>
-        </p:xfrm>
-        <a:graphic>
-          <a:graphicData uri="http://schemas.openxmlformats.org/drawingml/2006/table">
-            <a:tbl>
-              <a:tblPr/>
-              <a:tblGrid>
-                <a:gridCol w="2463801">
-                  <a:extLst>
-                    <a:ext uri="{9D8B030D-6E8A-4147-A177-3AD203B41FA5}">
-                      <a16:colId xmlns:a16="http://schemas.microsoft.com/office/drawing/2014/main" val="1298172271"/>
-                    </a:ext>
-                  </a:extLst>
-                </a:gridCol>
-                <a:gridCol w="5010150">
-                  <a:extLst>
-                    <a:ext uri="{9D8B030D-6E8A-4147-A177-3AD203B41FA5}">
-                      <a16:colId xmlns:a16="http://schemas.microsoft.com/office/drawing/2014/main" val="2225433765"/>
-                    </a:ext>
-                  </a:extLst>
-                </a:gridCol>
-                <a:gridCol w="3724274">
-                  <a:extLst>
-                    <a:ext uri="{9D8B030D-6E8A-4147-A177-3AD203B41FA5}">
-                      <a16:colId xmlns:a16="http://schemas.microsoft.com/office/drawing/2014/main" val="3005667624"/>
-                    </a:ext>
-                  </a:extLst>
-                </a:gridCol>
-              </a:tblGrid>
-              <a:tr h="667852">
-                <a:tc>
-                  <a:txBody>
-                    <a:bodyPr/>
-                    <a:lstStyle/>
-                    <a:p>
-                      <a:pPr algn="l" fontAlgn="b"/>
-                      <a:r>
-                        <a:rPr lang="ru-RU" sz="2000" b="0" i="0" u="none" strike="noStrike">
-                          <a:solidFill>
-                            <a:srgbClr val="000000"/>
-                          </a:solidFill>
-                          <a:effectLst/>
-                          <a:latin typeface="Calibri" panose="020F0502020204030204" pitchFamily="34" charset="0"/>
-                        </a:rPr>
-                        <a:t>Тип</a:t>
-                      </a:r>
-                    </a:p>
-                  </a:txBody>
-                  <a:tcPr marL="9525" marR="9525" marT="9525" marB="0" anchor="b">
-                    <a:lnL>
-                      <a:noFill/>
-                    </a:lnL>
-                    <a:lnR>
-                      <a:noFill/>
-                    </a:lnR>
-                    <a:lnT>
-                      <a:noFill/>
-                    </a:lnT>
-                    <a:lnB>
-                      <a:noFill/>
-                    </a:lnB>
-                  </a:tcPr>
-                </a:tc>
-                <a:tc>
-                  <a:txBody>
-                    <a:bodyPr/>
-                    <a:lstStyle/>
-                    <a:p>
-                      <a:pPr algn="l" fontAlgn="b"/>
-                      <a:r>
-                        <a:rPr lang="ru-RU" sz="2000" b="0" i="0" u="none" strike="noStrike">
-                          <a:solidFill>
-                            <a:srgbClr val="000000"/>
-                          </a:solidFill>
-                          <a:effectLst/>
-                          <a:latin typeface="Calibri" panose="020F0502020204030204" pitchFamily="34" charset="0"/>
-                        </a:rPr>
-                        <a:t>Описание</a:t>
-                      </a:r>
-                    </a:p>
-                  </a:txBody>
-                  <a:tcPr marL="9525" marR="9525" marT="9525" marB="0" anchor="b">
-                    <a:lnL>
-                      <a:noFill/>
-                    </a:lnL>
-                    <a:lnR>
-                      <a:noFill/>
-                    </a:lnR>
-                    <a:lnT>
-                      <a:noFill/>
-                    </a:lnT>
-                    <a:lnB>
-                      <a:noFill/>
-                    </a:lnB>
-                  </a:tcPr>
-                </a:tc>
-                <a:tc>
-                  <a:txBody>
-                    <a:bodyPr/>
-                    <a:lstStyle/>
-                    <a:p>
-                      <a:pPr algn="l" fontAlgn="b"/>
-                      <a:r>
-                        <a:rPr lang="ru-RU" sz="2000" b="0" i="0" u="none" strike="noStrike">
-                          <a:solidFill>
-                            <a:srgbClr val="000000"/>
-                          </a:solidFill>
-                          <a:effectLst/>
-                          <a:latin typeface="Calibri" panose="020F0502020204030204" pitchFamily="34" charset="0"/>
-                        </a:rPr>
-                        <a:t>Пример</a:t>
-                      </a:r>
-                    </a:p>
-                  </a:txBody>
-                  <a:tcPr marL="9525" marR="9525" marT="9525" marB="0" anchor="b">
-                    <a:lnL>
-                      <a:noFill/>
-                    </a:lnL>
-                    <a:lnR>
-                      <a:noFill/>
-                    </a:lnR>
-                    <a:lnT>
-                      <a:noFill/>
-                    </a:lnT>
-                    <a:lnB>
-                      <a:noFill/>
-                    </a:lnB>
-                  </a:tcPr>
-                </a:tc>
-                <a:extLst>
-                  <a:ext uri="{0D108BD9-81ED-4DB2-BD59-A6C34878D82A}">
-                    <a16:rowId xmlns:a16="http://schemas.microsoft.com/office/drawing/2014/main" val="890436517"/>
-                  </a:ext>
-                </a:extLst>
-              </a:tr>
-              <a:tr h="699227">
-                <a:tc>
-                  <a:txBody>
-                    <a:bodyPr/>
-                    <a:lstStyle/>
-                    <a:p>
-                      <a:pPr algn="l" fontAlgn="b"/>
-                      <a:r>
-                        <a:rPr lang="ru-RU" sz="2000" b="0" i="0" u="none" strike="noStrike">
-                          <a:solidFill>
-                            <a:srgbClr val="000000"/>
-                          </a:solidFill>
-                          <a:effectLst/>
-                          <a:latin typeface="Calibri" panose="020F0502020204030204" pitchFamily="34" charset="0"/>
-                        </a:rPr>
-                        <a:t>Связанные ряды</a:t>
-                      </a:r>
-                    </a:p>
-                  </a:txBody>
-                  <a:tcPr marL="9525" marR="9525" marT="9525" marB="0" anchor="b">
-                    <a:lnL>
-                      <a:noFill/>
-                    </a:lnL>
-                    <a:lnR>
-                      <a:noFill/>
-                    </a:lnR>
-                    <a:lnT>
-                      <a:noFill/>
-                    </a:lnT>
-                    <a:lnB>
-                      <a:noFill/>
-                    </a:lnB>
-                  </a:tcPr>
-                </a:tc>
-                <a:tc>
-                  <a:txBody>
-                    <a:bodyPr/>
-                    <a:lstStyle/>
-                    <a:p>
-                      <a:pPr algn="l" fontAlgn="b"/>
-                      <a:r>
-                        <a:rPr lang="ru-RU" sz="2000" b="0" i="0" u="none" strike="noStrike">
-                          <a:solidFill>
-                            <a:srgbClr val="000000"/>
-                          </a:solidFill>
-                          <a:effectLst/>
-                          <a:latin typeface="Calibri" panose="020F0502020204030204" pitchFamily="34" charset="0"/>
-                        </a:rPr>
-                        <a:t>Переменные влияют друг на друга</a:t>
-                      </a:r>
-                    </a:p>
-                  </a:txBody>
-                  <a:tcPr marL="9525" marR="9525" marT="9525" marB="0" anchor="b">
-                    <a:lnL>
-                      <a:noFill/>
-                    </a:lnL>
-                    <a:lnR>
-                      <a:noFill/>
-                    </a:lnR>
-                    <a:lnT>
-                      <a:noFill/>
-                    </a:lnT>
-                    <a:lnB>
-                      <a:noFill/>
-                    </a:lnB>
-                  </a:tcPr>
-                </a:tc>
-                <a:tc>
-                  <a:txBody>
-                    <a:bodyPr/>
-                    <a:lstStyle/>
-                    <a:p>
-                      <a:pPr algn="l" fontAlgn="b"/>
-                      <a:r>
-                        <a:rPr lang="ru-RU" sz="2000" b="0" i="0" u="none" strike="noStrike">
-                          <a:solidFill>
-                            <a:srgbClr val="000000"/>
-                          </a:solidFill>
-                          <a:effectLst/>
-                          <a:latin typeface="Calibri" panose="020F0502020204030204" pitchFamily="34" charset="0"/>
-                        </a:rPr>
-                        <a:t>Температура и давление в реакторе</a:t>
-                      </a:r>
-                    </a:p>
-                  </a:txBody>
-                  <a:tcPr marL="9525" marR="9525" marT="9525" marB="0" anchor="b">
-                    <a:lnL>
-                      <a:noFill/>
-                    </a:lnL>
-                    <a:lnR>
-                      <a:noFill/>
-                    </a:lnR>
-                    <a:lnT>
-                      <a:noFill/>
-                    </a:lnT>
-                    <a:lnB>
-                      <a:noFill/>
-                    </a:lnB>
-                  </a:tcPr>
-                </a:tc>
-                <a:extLst>
-                  <a:ext uri="{0D108BD9-81ED-4DB2-BD59-A6C34878D82A}">
-                    <a16:rowId xmlns:a16="http://schemas.microsoft.com/office/drawing/2014/main" val="3894701474"/>
-                  </a:ext>
-                </a:extLst>
-              </a:tr>
-              <a:tr h="892860">
-                <a:tc>
-                  <a:txBody>
-                    <a:bodyPr/>
-                    <a:lstStyle/>
-                    <a:p>
-                      <a:pPr algn="l" fontAlgn="b"/>
-                      <a:r>
-                        <a:rPr lang="ru-RU" sz="2000" b="0" i="0" u="none" strike="noStrike">
-                          <a:solidFill>
-                            <a:srgbClr val="000000"/>
-                          </a:solidFill>
-                          <a:effectLst/>
-                          <a:latin typeface="Calibri" panose="020F0502020204030204" pitchFamily="34" charset="0"/>
-                        </a:rPr>
-                        <a:t>Многосерийные ряды</a:t>
-                      </a:r>
-                    </a:p>
-                  </a:txBody>
-                  <a:tcPr marL="9525" marR="9525" marT="9525" marB="0" anchor="b">
-                    <a:lnL>
-                      <a:noFill/>
-                    </a:lnL>
-                    <a:lnR>
-                      <a:noFill/>
-                    </a:lnR>
-                    <a:lnT>
-                      <a:noFill/>
-                    </a:lnT>
-                    <a:lnB>
-                      <a:noFill/>
-                    </a:lnB>
-                  </a:tcPr>
-                </a:tc>
-                <a:tc>
-                  <a:txBody>
-                    <a:bodyPr/>
-                    <a:lstStyle/>
-                    <a:p>
-                      <a:pPr algn="l" fontAlgn="b"/>
-                      <a:r>
-                        <a:rPr lang="ru-RU" sz="2000" b="0" i="0" u="none" strike="noStrike">
-                          <a:solidFill>
-                            <a:srgbClr val="000000"/>
-                          </a:solidFill>
-                          <a:effectLst/>
-                          <a:latin typeface="Calibri" panose="020F0502020204030204" pitchFamily="34" charset="0"/>
-                        </a:rPr>
-                        <a:t>Много независимых рядов (одномерных)</a:t>
-                      </a:r>
-                    </a:p>
-                  </a:txBody>
-                  <a:tcPr marL="9525" marR="9525" marT="9525" marB="0" anchor="b">
-                    <a:lnL>
-                      <a:noFill/>
-                    </a:lnL>
-                    <a:lnR>
-                      <a:noFill/>
-                    </a:lnR>
-                    <a:lnT>
-                      <a:noFill/>
-                    </a:lnT>
-                    <a:lnB>
-                      <a:noFill/>
-                    </a:lnB>
-                  </a:tcPr>
-                </a:tc>
-                <a:tc>
-                  <a:txBody>
-                    <a:bodyPr/>
-                    <a:lstStyle/>
-                    <a:p>
-                      <a:pPr algn="l" fontAlgn="b"/>
-                      <a:r>
-                        <a:rPr lang="ru-RU" sz="2000" b="0" i="0" u="none" strike="noStrike">
-                          <a:solidFill>
-                            <a:srgbClr val="000000"/>
-                          </a:solidFill>
-                          <a:effectLst/>
-                          <a:latin typeface="Calibri" panose="020F0502020204030204" pitchFamily="34" charset="0"/>
-                        </a:rPr>
-                        <a:t>Продажи по 100 магазинам</a:t>
-                      </a:r>
-                    </a:p>
-                  </a:txBody>
-                  <a:tcPr marL="9525" marR="9525" marT="9525" marB="0" anchor="b">
-                    <a:lnL>
-                      <a:noFill/>
-                    </a:lnL>
-                    <a:lnR>
-                      <a:noFill/>
-                    </a:lnR>
-                    <a:lnT>
-                      <a:noFill/>
-                    </a:lnT>
-                    <a:lnB>
-                      <a:noFill/>
-                    </a:lnB>
-                  </a:tcPr>
-                </a:tc>
-                <a:extLst>
-                  <a:ext uri="{0D108BD9-81ED-4DB2-BD59-A6C34878D82A}">
-                    <a16:rowId xmlns:a16="http://schemas.microsoft.com/office/drawing/2014/main" val="4181196808"/>
-                  </a:ext>
-                </a:extLst>
-              </a:tr>
-              <a:tr h="398330">
-                <a:tc>
-                  <a:txBody>
-                    <a:bodyPr/>
-                    <a:lstStyle/>
-                    <a:p>
-                      <a:pPr algn="l" fontAlgn="b"/>
-                      <a:r>
-                        <a:rPr lang="ru-RU" sz="2000" b="0" i="0" u="none" strike="noStrike">
-                          <a:solidFill>
-                            <a:srgbClr val="000000"/>
-                          </a:solidFill>
-                          <a:effectLst/>
-                          <a:latin typeface="Calibri" panose="020F0502020204030204" pitchFamily="34" charset="0"/>
-                        </a:rPr>
-                        <a:t>Пространственно-временные поля</a:t>
-                      </a:r>
-                    </a:p>
-                  </a:txBody>
-                  <a:tcPr marL="9525" marR="9525" marT="9525" marB="0" anchor="b">
-                    <a:lnL>
-                      <a:noFill/>
-                    </a:lnL>
-                    <a:lnR>
-                      <a:noFill/>
-                    </a:lnR>
-                    <a:lnT>
-                      <a:noFill/>
-                    </a:lnT>
-                    <a:lnB>
-                      <a:noFill/>
-                    </a:lnB>
-                  </a:tcPr>
-                </a:tc>
-                <a:tc>
-                  <a:txBody>
-                    <a:bodyPr/>
-                    <a:lstStyle/>
-                    <a:p>
-                      <a:pPr algn="l" fontAlgn="b"/>
-                      <a:r>
-                        <a:rPr lang="ru-RU" sz="2000" b="0" i="0" u="none" strike="noStrike" dirty="0">
-                          <a:solidFill>
-                            <a:srgbClr val="000000"/>
-                          </a:solidFill>
-                          <a:effectLst/>
-                          <a:latin typeface="Calibri" panose="020F0502020204030204" pitchFamily="34" charset="0"/>
-                        </a:rPr>
-                        <a:t>Данные на сетке (</a:t>
-                      </a:r>
-                      <a:r>
-                        <a:rPr lang="ru-RU" sz="2000" b="0" i="0" u="none" strike="noStrike" dirty="0" err="1">
-                          <a:solidFill>
-                            <a:srgbClr val="000000"/>
-                          </a:solidFill>
-                          <a:effectLst/>
-                          <a:latin typeface="Calibri" panose="020F0502020204030204" pitchFamily="34" charset="0"/>
-                        </a:rPr>
-                        <a:t>гео</a:t>
-                      </a:r>
-                      <a:r>
-                        <a:rPr lang="ru-RU" sz="2000" b="0" i="0" u="none" strike="noStrike" dirty="0">
-                          <a:solidFill>
-                            <a:srgbClr val="000000"/>
-                          </a:solidFill>
-                          <a:effectLst/>
-                          <a:latin typeface="Calibri" panose="020F0502020204030204" pitchFamily="34" charset="0"/>
-                        </a:rPr>
-                        <a:t>, датчики)</a:t>
-                      </a:r>
-                    </a:p>
-                  </a:txBody>
-                  <a:tcPr marL="9525" marR="9525" marT="9525" marB="0" anchor="b">
-                    <a:lnL>
-                      <a:noFill/>
-                    </a:lnL>
-                    <a:lnR>
-                      <a:noFill/>
-                    </a:lnR>
-                    <a:lnT>
-                      <a:noFill/>
-                    </a:lnT>
-                    <a:lnB>
-                      <a:noFill/>
-                    </a:lnB>
-                  </a:tcPr>
-                </a:tc>
-                <a:tc>
-                  <a:txBody>
-                    <a:bodyPr/>
-                    <a:lstStyle/>
-                    <a:p>
-                      <a:pPr algn="l" fontAlgn="b"/>
-                      <a:r>
-                        <a:rPr lang="ru-RU" sz="2000" b="0" i="0" u="none" strike="noStrike">
-                          <a:solidFill>
-                            <a:srgbClr val="000000"/>
-                          </a:solidFill>
-                          <a:effectLst/>
-                          <a:latin typeface="Calibri" panose="020F0502020204030204" pitchFamily="34" charset="0"/>
-                        </a:rPr>
-                        <a:t>Температура по датчикам в цеху</a:t>
-                      </a:r>
-                    </a:p>
-                  </a:txBody>
-                  <a:tcPr marL="9525" marR="9525" marT="9525" marB="0" anchor="b">
-                    <a:lnL>
-                      <a:noFill/>
-                    </a:lnL>
-                    <a:lnR>
-                      <a:noFill/>
-                    </a:lnR>
-                    <a:lnT>
-                      <a:noFill/>
-                    </a:lnT>
-                    <a:lnB>
-                      <a:noFill/>
-                    </a:lnB>
-                  </a:tcPr>
-                </a:tc>
-                <a:extLst>
-                  <a:ext uri="{0D108BD9-81ED-4DB2-BD59-A6C34878D82A}">
-                    <a16:rowId xmlns:a16="http://schemas.microsoft.com/office/drawing/2014/main" val="3793687255"/>
-                  </a:ext>
-                </a:extLst>
-              </a:tr>
-              <a:tr h="699227">
-                <a:tc>
-                  <a:txBody>
-                    <a:bodyPr/>
-                    <a:lstStyle/>
-                    <a:p>
-                      <a:pPr algn="l" fontAlgn="b"/>
-                      <a:r>
-                        <a:rPr lang="ru-RU" sz="2000" b="0" i="0" u="none" strike="noStrike">
-                          <a:solidFill>
-                            <a:srgbClr val="000000"/>
-                          </a:solidFill>
-                          <a:effectLst/>
-                          <a:latin typeface="Calibri" panose="020F0502020204030204" pitchFamily="34" charset="0"/>
-                        </a:rPr>
-                        <a:t>С иерархией</a:t>
-                      </a:r>
-                    </a:p>
-                  </a:txBody>
-                  <a:tcPr marL="9525" marR="9525" marT="9525" marB="0" anchor="b">
-                    <a:lnL>
-                      <a:noFill/>
-                    </a:lnL>
-                    <a:lnR>
-                      <a:noFill/>
-                    </a:lnR>
-                    <a:lnT>
-                      <a:noFill/>
-                    </a:lnT>
-                    <a:lnB>
-                      <a:noFill/>
-                    </a:lnB>
-                  </a:tcPr>
-                </a:tc>
-                <a:tc>
-                  <a:txBody>
-                    <a:bodyPr/>
-                    <a:lstStyle/>
-                    <a:p>
-                      <a:pPr algn="l" fontAlgn="b"/>
-                      <a:r>
-                        <a:rPr lang="ru-RU" sz="2000" b="0" i="0" u="none" strike="noStrike">
-                          <a:solidFill>
-                            <a:srgbClr val="000000"/>
-                          </a:solidFill>
-                          <a:effectLst/>
-                          <a:latin typeface="Calibri" panose="020F0502020204030204" pitchFamily="34" charset="0"/>
-                        </a:rPr>
-                        <a:t>Ряды связаны иерархически (регион → магазин)</a:t>
-                      </a:r>
-                    </a:p>
-                  </a:txBody>
-                  <a:tcPr marL="9525" marR="9525" marT="9525" marB="0" anchor="b">
-                    <a:lnL>
-                      <a:noFill/>
-                    </a:lnL>
-                    <a:lnR>
-                      <a:noFill/>
-                    </a:lnR>
-                    <a:lnT>
-                      <a:noFill/>
-                    </a:lnT>
-                    <a:lnB>
-                      <a:noFill/>
-                    </a:lnB>
-                  </a:tcPr>
-                </a:tc>
-                <a:tc>
-                  <a:txBody>
-                    <a:bodyPr/>
-                    <a:lstStyle/>
-                    <a:p>
-                      <a:pPr algn="l" fontAlgn="b"/>
-                      <a:r>
-                        <a:rPr lang="ru-RU" sz="2000" b="0" i="0" u="none" strike="noStrike" dirty="0">
-                          <a:solidFill>
-                            <a:srgbClr val="000000"/>
-                          </a:solidFill>
-                          <a:effectLst/>
-                          <a:latin typeface="Calibri" panose="020F0502020204030204" pitchFamily="34" charset="0"/>
-                        </a:rPr>
-                        <a:t>Общие продажи → по магазинам</a:t>
-                      </a:r>
-                    </a:p>
-                  </a:txBody>
-                  <a:tcPr marL="9525" marR="9525" marT="9525" marB="0" anchor="b">
-                    <a:lnL>
-                      <a:noFill/>
-                    </a:lnL>
-                    <a:lnR>
-                      <a:noFill/>
-                    </a:lnR>
-                    <a:lnT>
-                      <a:noFill/>
-                    </a:lnT>
-                    <a:lnB>
-                      <a:noFill/>
-                    </a:lnB>
-                  </a:tcPr>
-                </a:tc>
-                <a:extLst>
-                  <a:ext uri="{0D108BD9-81ED-4DB2-BD59-A6C34878D82A}">
-                    <a16:rowId xmlns:a16="http://schemas.microsoft.com/office/drawing/2014/main" val="314198523"/>
-                  </a:ext>
-                </a:extLst>
-              </a:tr>
-            </a:tbl>
-          </a:graphicData>
-        </a:graphic>
-      </p:graphicFrame>
+      <mc:AlternateContent xmlns:mc="http://schemas.openxmlformats.org/markup-compatibility/2006">
+        <mc:Choice xmlns:a14="http://schemas.microsoft.com/office/drawing/2010/main" Requires="a14">
+          <p:sp>
+            <p:nvSpPr>
+              <p:cNvPr id="3" name="Объект 2"/>
+              <p:cNvSpPr>
+                <a:spLocks noGrp="1"/>
+              </p:cNvSpPr>
+              <p:nvPr>
+                <p:ph idx="1"/>
+              </p:nvPr>
+            </p:nvSpPr>
+            <p:spPr>
+              <a:xfrm>
+                <a:off x="314325" y="638174"/>
+                <a:ext cx="11772900" cy="5895975"/>
+              </a:xfrm>
+            </p:spPr>
+            <p:txBody>
+              <a:bodyPr>
+                <a:normAutofit fontScale="92500" lnSpcReduction="20000"/>
+              </a:bodyPr>
+              <a:lstStyle/>
+              <a:p>
+                <a:pPr marL="0" indent="0">
+                  <a:lnSpc>
+                    <a:spcPct val="110000"/>
+                  </a:lnSpc>
+                  <a:buNone/>
+                </a:pPr>
+                <a:r>
+                  <a:rPr lang="ru-RU" sz="2200" b="1" dirty="0" smtClean="0"/>
+                  <a:t>В МВР – </a:t>
+                </a:r>
+                <a:r>
+                  <a:rPr lang="ru-RU" sz="2200" dirty="0" smtClean="0"/>
+                  <a:t>отдельные</a:t>
+                </a:r>
+                <a:r>
+                  <a:rPr lang="ru-RU" sz="2200" b="1" dirty="0" smtClean="0"/>
+                  <a:t> </a:t>
+                </a:r>
+                <a:r>
+                  <a:rPr lang="ru-RU" sz="2200" dirty="0" smtClean="0"/>
+                  <a:t>ВР могут показать зависимость своих значений от других ВР в системе. То есть ВР связаны.</a:t>
+                </a:r>
+              </a:p>
+              <a:p>
+                <a:pPr>
+                  <a:lnSpc>
+                    <a:spcPct val="110000"/>
+                  </a:lnSpc>
+                </a:pPr>
+                <a:r>
+                  <a:rPr lang="ru-RU" sz="2200" b="1" dirty="0" smtClean="0"/>
+                  <a:t>Корреляционная связь </a:t>
+                </a:r>
+                <a:r>
+                  <a:rPr lang="ru-RU" sz="2200" dirty="0" smtClean="0"/>
+                  <a:t>– ВР имеют линейную зависимость</a:t>
+                </a:r>
+              </a:p>
+              <a:p>
+                <a:pPr lvl="1">
+                  <a:lnSpc>
+                    <a:spcPct val="110000"/>
+                  </a:lnSpc>
+                </a:pPr>
+                <a:r>
+                  <a:rPr lang="ru-RU" sz="2200" dirty="0" smtClean="0"/>
+                  <a:t>Примеры: </a:t>
+                </a:r>
+                <a:r>
+                  <a:rPr lang="ru-RU" sz="2200" dirty="0"/>
+                  <a:t>Температура и </a:t>
+                </a:r>
+                <a:r>
+                  <a:rPr lang="ru-RU" sz="2200" dirty="0" smtClean="0"/>
+                  <a:t>давление </a:t>
+                </a:r>
+                <a:r>
+                  <a:rPr lang="ru-RU" sz="2200" dirty="0"/>
+                  <a:t>в </a:t>
+                </a:r>
+                <a:r>
+                  <a:rPr lang="ru-RU" sz="2200" dirty="0" smtClean="0"/>
+                  <a:t>баке.</a:t>
+                </a:r>
+              </a:p>
+              <a:p>
+                <a:pPr lvl="1">
+                  <a:lnSpc>
+                    <a:spcPct val="110000"/>
+                  </a:lnSpc>
+                </a:pPr>
+                <a:r>
+                  <a:rPr lang="ru-RU" sz="2000" b="1" dirty="0"/>
+                  <a:t>Сезонная корреляция </a:t>
+                </a:r>
+                <a:r>
+                  <a:rPr lang="ru-RU" sz="2000" dirty="0"/>
+                  <a:t>– корреляция с лагом в сезон, </a:t>
+                </a:r>
+                <a:r>
+                  <a:rPr lang="ru-RU" sz="2000" dirty="0" smtClean="0"/>
+                  <a:t/>
+                </a:r>
+                <a:br>
+                  <a:rPr lang="ru-RU" sz="2000" dirty="0" smtClean="0"/>
+                </a:br>
+                <a:r>
+                  <a:rPr lang="ru-RU" sz="2100" dirty="0"/>
+                  <a:t>например, закупка сырья</a:t>
+                </a:r>
+                <a:r>
+                  <a:rPr lang="ru-RU" sz="2100" dirty="0"/>
+                  <a:t> </a:t>
+                </a:r>
+                <a14:m>
+                  <m:oMath xmlns:m="http://schemas.openxmlformats.org/officeDocument/2006/math">
+                    <m:r>
+                      <a:rPr lang="ru-RU" sz="2100"/>
+                      <m:t>↔</m:t>
+                    </m:r>
+                  </m:oMath>
+                </a14:m>
+                <a:r>
+                  <a:rPr lang="ru-RU" sz="2100" dirty="0"/>
+                  <a:t> выпуск продукции, Летом выше температура и влажность (есть общий объясняющий фактор)</a:t>
+                </a:r>
+              </a:p>
+              <a:p>
+                <a:pPr>
+                  <a:lnSpc>
+                    <a:spcPct val="110000"/>
+                  </a:lnSpc>
+                </a:pPr>
+                <a:r>
+                  <a:rPr lang="ru-RU" sz="2200" b="1" dirty="0"/>
+                  <a:t>Казуальная связь </a:t>
+                </a:r>
+                <a:r>
+                  <a:rPr lang="ru-RU" sz="2200" dirty="0"/>
+                  <a:t>– один из ВР связан с последующими лагами другого ВР.</a:t>
+                </a:r>
+              </a:p>
+              <a:p>
+                <a:pPr lvl="1">
+                  <a:lnSpc>
+                    <a:spcPct val="110000"/>
+                  </a:lnSpc>
+                </a:pPr>
+                <a:r>
+                  <a:rPr lang="ru-RU" sz="2200" b="1" dirty="0"/>
+                  <a:t>Примеры: </a:t>
+                </a:r>
+                <a:r>
+                  <a:rPr lang="ru-RU" sz="2200" dirty="0"/>
+                  <a:t>Процентные ставки → </a:t>
+                </a:r>
+                <a:r>
+                  <a:rPr lang="ru-RU" sz="2200" dirty="0" smtClean="0"/>
+                  <a:t>инфляция, направление ветра → изменение в погоде </a:t>
+                </a:r>
+                <a:br>
+                  <a:rPr lang="ru-RU" sz="2200" dirty="0" smtClean="0"/>
+                </a:br>
+                <a:r>
+                  <a:rPr lang="ru-RU" sz="2200" b="1" dirty="0" smtClean="0"/>
+                  <a:t>(но не наоборот!)</a:t>
+                </a:r>
+              </a:p>
+              <a:p>
+                <a:pPr lvl="1">
+                  <a:lnSpc>
+                    <a:spcPct val="110000"/>
+                  </a:lnSpc>
+                </a:pPr>
+                <a:r>
+                  <a:rPr lang="ru-RU" sz="2200" dirty="0" smtClean="0"/>
+                  <a:t>В отличии от сезонной корреляции ВР в казуальности связь причинная (только опережающая), а не симметричная (характеристика динамики ВР). Например перед дождем падает давление (но нет связи наоборот).</a:t>
+                </a:r>
+                <a:endParaRPr lang="ru-RU" sz="2200" dirty="0"/>
+              </a:p>
+              <a:p>
+                <a:pPr algn="just">
+                  <a:lnSpc>
+                    <a:spcPct val="110000"/>
+                  </a:lnSpc>
+                </a:pPr>
+                <a:r>
+                  <a:rPr lang="ru-RU" sz="2200" b="1" dirty="0" err="1" smtClean="0"/>
+                  <a:t>Коинтеграционная</a:t>
+                </a:r>
+                <a:r>
+                  <a:rPr lang="ru-RU" sz="2200" b="1" dirty="0" smtClean="0"/>
+                  <a:t> связь </a:t>
+                </a:r>
+                <a:r>
+                  <a:rPr lang="ru-RU" sz="2200" dirty="0" smtClean="0"/>
+                  <a:t>– </a:t>
+                </a:r>
+                <a:r>
+                  <a:rPr lang="ru-RU" sz="2200" dirty="0"/>
+                  <a:t>Нестационарные ряды в долгосрочной перспективе "движутся вместе" — их линейная комбинация </a:t>
+                </a:r>
+                <a:r>
+                  <a:rPr lang="ru-RU" sz="2200" dirty="0" smtClean="0"/>
+                  <a:t>стационарна (</a:t>
+                </a:r>
+                <a:r>
+                  <a:rPr lang="ru-RU" sz="2200" dirty="0" err="1" smtClean="0"/>
+                  <a:t>коинтеграция</a:t>
+                </a:r>
+                <a:r>
+                  <a:rPr lang="ru-RU" sz="2200" dirty="0" smtClean="0"/>
+                  <a:t> 1го порядка).</a:t>
+                </a:r>
+              </a:p>
+              <a:p>
+                <a:pPr lvl="2">
+                  <a:lnSpc>
+                    <a:spcPct val="110000"/>
+                  </a:lnSpc>
+                </a:pPr>
+                <a:r>
+                  <a:rPr lang="ru-RU" sz="2200" dirty="0" smtClean="0"/>
+                  <a:t>система не стационарных ВР до порядка дифференцирования </a:t>
+                </a:r>
+                <a14:m>
+                  <m:oMath xmlns:m="http://schemas.openxmlformats.org/officeDocument/2006/math">
+                    <m:r>
+                      <a:rPr lang="en-US" sz="2200" i="1" dirty="0" smtClean="0">
+                        <a:latin typeface="Cambria Math" panose="02040503050406030204" pitchFamily="18" charset="0"/>
+                      </a:rPr>
+                      <m:t>𝑑</m:t>
+                    </m:r>
+                    <m:r>
+                      <a:rPr lang="en-US" sz="2200" b="0" i="1" dirty="0" smtClean="0">
+                        <a:latin typeface="Cambria Math" panose="02040503050406030204" pitchFamily="18" charset="0"/>
+                      </a:rPr>
+                      <m:t> </m:t>
+                    </m:r>
+                  </m:oMath>
+                </a14:m>
+                <a:r>
+                  <a:rPr lang="en-US" sz="2200" dirty="0" smtClean="0"/>
+                  <a:t> </a:t>
+                </a:r>
+                <a:r>
+                  <a:rPr lang="ru-RU" sz="2200" dirty="0" smtClean="0"/>
+                  <a:t>ВР составляет линейную комбинацию, имеющую не стационарность </a:t>
+                </a:r>
+                <a:r>
+                  <a:rPr lang="ru-RU" sz="2200" dirty="0"/>
+                  <a:t>ВР до порядка дифференцирования </a:t>
+                </a:r>
+                <a14:m>
+                  <m:oMath xmlns:m="http://schemas.openxmlformats.org/officeDocument/2006/math">
+                    <m:r>
+                      <a:rPr lang="en-US" sz="2200" dirty="0">
+                        <a:latin typeface="Cambria Math" panose="02040503050406030204" pitchFamily="18" charset="0"/>
+                      </a:rPr>
+                      <m:t>&lt;</m:t>
+                    </m:r>
+                    <m:r>
+                      <a:rPr lang="en-US" sz="2200" i="1" dirty="0">
+                        <a:latin typeface="Cambria Math" panose="02040503050406030204" pitchFamily="18" charset="0"/>
+                      </a:rPr>
+                      <m:t>𝑑</m:t>
+                    </m:r>
+                    <m:r>
+                      <a:rPr lang="en-US" sz="2200" i="1" dirty="0">
+                        <a:latin typeface="Cambria Math" panose="02040503050406030204" pitchFamily="18" charset="0"/>
+                      </a:rPr>
+                      <m:t> </m:t>
+                    </m:r>
+                  </m:oMath>
+                </a14:m>
+                <a:endParaRPr lang="en-US" sz="2200" dirty="0" smtClean="0"/>
+              </a:p>
+              <a:p>
+                <a:pPr lvl="2">
+                  <a:lnSpc>
+                    <a:spcPct val="110000"/>
+                  </a:lnSpc>
+                </a:pPr>
+                <a:r>
+                  <a:rPr lang="ru-RU" sz="2200" dirty="0" smtClean="0"/>
+                  <a:t>Пример: </a:t>
+                </a:r>
+                <a:r>
+                  <a:rPr lang="ru-RU" sz="2200" dirty="0"/>
+                  <a:t>Цены на сырую нефть и </a:t>
+                </a:r>
+                <a:r>
+                  <a:rPr lang="ru-RU" sz="2200" dirty="0" smtClean="0"/>
+                  <a:t>бензин (их разность (маржа) – стационарна)</a:t>
+                </a:r>
+                <a:endParaRPr lang="en-US" sz="2200" dirty="0" smtClean="0"/>
+              </a:p>
+            </p:txBody>
+          </p:sp>
+        </mc:Choice>
+        <mc:Fallback>
+          <p:sp>
+            <p:nvSpPr>
+              <p:cNvPr id="3" name="Объект 2"/>
+              <p:cNvSpPr>
+                <a:spLocks noGrp="1" noRot="1" noChangeAspect="1" noMove="1" noResize="1" noEditPoints="1" noAdjustHandles="1" noChangeArrowheads="1" noChangeShapeType="1" noTextEdit="1"/>
+              </p:cNvSpPr>
+              <p:nvPr>
+                <p:ph idx="1"/>
+              </p:nvPr>
+            </p:nvSpPr>
+            <p:spPr>
+              <a:xfrm>
+                <a:off x="314325" y="638174"/>
+                <a:ext cx="11772900" cy="5895975"/>
+              </a:xfrm>
+              <a:blipFill>
+                <a:blip r:embed="rId2"/>
+                <a:stretch>
+                  <a:fillRect l="-570" t="-1138" r="-518"/>
+                </a:stretch>
+              </a:blipFill>
+            </p:spPr>
+            <p:txBody>
+              <a:bodyPr/>
+              <a:lstStyle/>
+              <a:p>
+                <a:r>
+                  <a:rPr lang="ru-RU">
+                    <a:noFill/>
+                  </a:rPr>
+                  <a:t> </a:t>
+                </a:r>
+              </a:p>
+            </p:txBody>
+          </p:sp>
+        </mc:Fallback>
+      </mc:AlternateContent>
     </p:spTree>
     <p:extLst>
       <p:ext uri="{BB962C8B-B14F-4D97-AF65-F5344CB8AC3E}">
-        <p14:creationId xmlns:p14="http://schemas.microsoft.com/office/powerpoint/2010/main" val="1993176027"/>
+        <p14:creationId xmlns:p14="http://schemas.microsoft.com/office/powerpoint/2010/main" val="2779865956"/>
       </p:ext>
     </p:extLst>
   </p:cSld>
@@ -4893,17 +7338,19 @@
         </p:nvSpPr>
         <p:spPr>
           <a:xfrm>
-            <a:off x="247650" y="365125"/>
-            <a:ext cx="11106150" cy="815975"/>
+            <a:off x="838200" y="365126"/>
+            <a:ext cx="10515600" cy="621846"/>
           </a:xfrm>
         </p:spPr>
         <p:txBody>
-          <a:bodyPr/>
+          <a:bodyPr>
+            <a:normAutofit fontScale="90000"/>
+          </a:bodyPr>
           <a:lstStyle/>
           <a:p>
             <a:r>
-              <a:rPr lang="ru-RU" dirty="0" smtClean="0"/>
-              <a:t>Особенности предварительного анализа МВР</a:t>
+              <a:rPr lang="ru-RU" dirty="0" err="1" smtClean="0"/>
+              <a:t>Коинтегрированность</a:t>
             </a:r>
             <a:endParaRPr lang="ru-RU" dirty="0"/>
           </a:p>
@@ -4921,57 +7368,2513 @@
         </p:nvSpPr>
         <p:spPr>
           <a:xfrm>
-            <a:off x="247649" y="1181100"/>
-            <a:ext cx="11553825" cy="5286375"/>
+            <a:off x="295729" y="986972"/>
+            <a:ext cx="11600542" cy="4351338"/>
           </a:xfrm>
         </p:spPr>
         <p:txBody>
-          <a:bodyPr/>
+          <a:bodyPr>
+            <a:normAutofit/>
+          </a:bodyPr>
           <a:lstStyle/>
           <a:p>
-            <a:r>
-              <a:rPr lang="ru-RU" dirty="0" smtClean="0"/>
-              <a:t>При МВР важно чтобы каждый ряд </a:t>
-            </a:r>
-            <a:r>
-              <a:rPr lang="ru-RU" dirty="0" err="1" smtClean="0"/>
-              <a:t>небыл</a:t>
-            </a:r>
-            <a:r>
-              <a:rPr lang="ru-RU" dirty="0" smtClean="0"/>
-              <a:t> сдвинутой копией другого. </a:t>
-            </a:r>
-          </a:p>
-          <a:p>
-            <a:pPr lvl="1"/>
-            <a:r>
-              <a:rPr lang="ru-RU" smtClean="0"/>
-              <a:t>Все </a:t>
-            </a:r>
-            <a:r>
-              <a:rPr lang="ru-RU" dirty="0" smtClean="0"/>
-              <a:t>ВР должны быть </a:t>
-            </a:r>
-            <a:r>
-              <a:rPr lang="ru-RU" smtClean="0"/>
-              <a:t>независимы.</a:t>
-            </a:r>
-          </a:p>
-          <a:p>
-            <a:endParaRPr lang="ru-RU" dirty="0"/>
+            <a:pPr marL="0" indent="0">
+              <a:lnSpc>
+                <a:spcPct val="100000"/>
+              </a:lnSpc>
+              <a:spcBef>
+                <a:spcPts val="200"/>
+              </a:spcBef>
+              <a:buNone/>
+            </a:pPr>
+            <a:r>
+              <a:rPr lang="ru-RU" sz="2400" dirty="0" smtClean="0"/>
+              <a:t>Если два ВР X </a:t>
+            </a:r>
+            <a:r>
+              <a:rPr lang="ru-RU" sz="2400" dirty="0"/>
+              <a:t>и Y </a:t>
+            </a:r>
+            <a:r>
+              <a:rPr lang="ru-RU" sz="2400" dirty="0" smtClean="0"/>
+              <a:t>имеют стационарность разностей</a:t>
+            </a:r>
+            <a:r>
+              <a:rPr lang="en-US" sz="2400" dirty="0" smtClean="0"/>
+              <a:t> </a:t>
+            </a:r>
+            <a:r>
+              <a:rPr lang="ru-RU" sz="2400" dirty="0" smtClean="0"/>
+              <a:t> </a:t>
+            </a:r>
+            <a:r>
+              <a:rPr lang="ru-RU" sz="2400" dirty="0"/>
+              <a:t>I(1) и если существует θ , такое, что Y− </a:t>
+            </a:r>
+            <a:r>
+              <a:rPr lang="ru-RU" sz="2400" dirty="0" err="1"/>
+              <a:t>θX</a:t>
+            </a:r>
+            <a:r>
+              <a:rPr lang="ru-RU" sz="2400" dirty="0"/>
+              <a:t> равно I(0) , то X и Y </a:t>
+            </a:r>
+            <a:r>
+              <a:rPr lang="ru-RU" sz="2400" dirty="0" err="1" smtClean="0"/>
+              <a:t>коинтегрированы</a:t>
+            </a:r>
+            <a:r>
+              <a:rPr lang="ru-RU" sz="2400" dirty="0" smtClean="0"/>
+              <a:t>. </a:t>
+            </a:r>
+            <a:r>
+              <a:rPr lang="ru-RU" sz="2400" dirty="0"/>
+              <a:t>Иными словами, </a:t>
+            </a:r>
+            <a:r>
+              <a:rPr lang="ru-RU" sz="2400" dirty="0" smtClean="0"/>
+              <a:t>X </a:t>
+            </a:r>
+            <a:r>
+              <a:rPr lang="ru-RU" sz="2400" dirty="0"/>
+              <a:t>и Y имеют одинаковый или общий стохастический тренд </a:t>
+            </a:r>
+            <a:r>
+              <a:rPr lang="ru-RU" sz="2400" dirty="0" smtClean="0"/>
+              <a:t>этот </a:t>
+            </a:r>
+            <a:r>
+              <a:rPr lang="ru-RU" sz="2400" dirty="0"/>
+              <a:t>тренд можно устранить, взяв </a:t>
+            </a:r>
+            <a:r>
+              <a:rPr lang="ru-RU" sz="2400" dirty="0" smtClean="0"/>
+              <a:t>разницу ВР.</a:t>
+            </a:r>
+          </a:p>
+          <a:p>
+            <a:pPr>
+              <a:lnSpc>
+                <a:spcPct val="100000"/>
+              </a:lnSpc>
+              <a:spcBef>
+                <a:spcPts val="200"/>
+              </a:spcBef>
+            </a:pPr>
+            <a:r>
+              <a:rPr lang="ru-RU" sz="2400" dirty="0" smtClean="0"/>
+              <a:t>Технически </a:t>
+            </a:r>
+            <a:r>
+              <a:rPr lang="ru-RU" sz="2400" dirty="0" err="1" smtClean="0"/>
+              <a:t>коинтеграция</a:t>
+            </a:r>
+            <a:r>
+              <a:rPr lang="ru-RU" sz="2400" dirty="0" smtClean="0"/>
+              <a:t> может быть и выше 1 порядка. </a:t>
+            </a:r>
+          </a:p>
+          <a:p>
+            <a:pPr>
+              <a:lnSpc>
+                <a:spcPct val="100000"/>
+              </a:lnSpc>
+              <a:spcBef>
+                <a:spcPts val="200"/>
+              </a:spcBef>
+            </a:pPr>
+            <a:r>
+              <a:rPr lang="ru-RU" sz="2400" dirty="0" err="1" smtClean="0"/>
+              <a:t>Коинтеграция</a:t>
+            </a:r>
+            <a:r>
+              <a:rPr lang="ru-RU" sz="2400" dirty="0" smtClean="0"/>
+              <a:t> может быть для нескольких рядов, не только для двух.</a:t>
+            </a:r>
+          </a:p>
+          <a:p>
+            <a:pPr>
+              <a:lnSpc>
+                <a:spcPct val="100000"/>
+              </a:lnSpc>
+              <a:spcBef>
+                <a:spcPts val="200"/>
+              </a:spcBef>
+            </a:pPr>
+            <a:endParaRPr lang="ru-RU" sz="2400" dirty="0"/>
+          </a:p>
+        </p:txBody>
+      </p:sp>
+      <p:pic>
+        <p:nvPicPr>
+          <p:cNvPr id="1026" name="Picture 2" descr="https://www.econometrics-with-r.org/ITER_files/figure-html/unnamed-chunk-733-1.png"/>
+          <p:cNvPicPr>
+            <a:picLocks noChangeAspect="1" noChangeArrowheads="1"/>
+          </p:cNvPicPr>
+          <p:nvPr/>
+        </p:nvPicPr>
+        <p:blipFill>
+          <a:blip r:embed="rId3" cstate="print">
+            <a:extLst>
+              <a:ext uri="{28A0092B-C50C-407E-A947-70E740481C1C}">
+                <a14:useLocalDpi xmlns:a14="http://schemas.microsoft.com/office/drawing/2010/main" val="0"/>
+              </a:ext>
+            </a:extLst>
+          </a:blip>
+          <a:srcRect/>
+          <a:stretch>
+            <a:fillRect/>
+          </a:stretch>
+        </p:blipFill>
+        <p:spPr bwMode="auto">
+          <a:xfrm>
+            <a:off x="7283926" y="2876056"/>
+            <a:ext cx="4438195" cy="3170140"/>
+          </a:xfrm>
+          <a:prstGeom prst="rect">
+            <a:avLst/>
+          </a:prstGeom>
+          <a:noFill/>
+          <a:extLst>
+            <a:ext uri="{909E8E84-426E-40DD-AFC4-6F175D3DCCD1}">
+              <a14:hiddenFill xmlns:a14="http://schemas.microsoft.com/office/drawing/2010/main">
+                <a:solidFill>
+                  <a:srgbClr val="FFFFFF"/>
+                </a:solidFill>
+              </a14:hiddenFill>
+            </a:ext>
+          </a:extLst>
+        </p:spPr>
+      </p:pic>
+      <p:sp>
+        <p:nvSpPr>
+          <p:cNvPr id="4" name="Прямоугольник 3"/>
+          <p:cNvSpPr/>
+          <p:nvPr/>
+        </p:nvSpPr>
+        <p:spPr>
+          <a:xfrm>
+            <a:off x="0" y="6550223"/>
+            <a:ext cx="4069640" cy="276999"/>
+          </a:xfrm>
+          <a:prstGeom prst="rect">
+            <a:avLst/>
+          </a:prstGeom>
+        </p:spPr>
+        <p:txBody>
+          <a:bodyPr wrap="none">
+            <a:spAutoFit/>
+          </a:bodyPr>
+          <a:lstStyle/>
+          <a:p>
+            <a:r>
+              <a:rPr lang="ru-RU" sz="1200" dirty="0"/>
+              <a:t>https://www.econometrics-with-r.org/16.3-cointegration.html</a:t>
+            </a:r>
+          </a:p>
+        </p:txBody>
+      </p:sp>
+      <p:sp>
+        <p:nvSpPr>
+          <p:cNvPr id="6" name="TextBox 5"/>
+          <p:cNvSpPr txBox="1"/>
+          <p:nvPr/>
+        </p:nvSpPr>
+        <p:spPr>
+          <a:xfrm>
+            <a:off x="98652" y="5623003"/>
+            <a:ext cx="11994695" cy="707886"/>
+          </a:xfrm>
+          <a:prstGeom prst="rect">
+            <a:avLst/>
+          </a:prstGeom>
+          <a:noFill/>
+        </p:spPr>
+        <p:txBody>
+          <a:bodyPr wrap="square" rtlCol="0">
+            <a:spAutoFit/>
+          </a:bodyPr>
+          <a:lstStyle/>
+          <a:p>
+            <a:r>
+              <a:rPr lang="ru-RU" sz="2000" b="1" dirty="0" smtClean="0"/>
+              <a:t>Интуиция</a:t>
+            </a:r>
+            <a:r>
+              <a:rPr lang="ru-RU" sz="2000" dirty="0" smtClean="0"/>
+              <a:t>: если авторегрессия – это зависимость ВР </a:t>
+            </a:r>
+            <a:r>
+              <a:rPr lang="en-US" sz="2000" dirty="0" smtClean="0"/>
+              <a:t>Y</a:t>
+            </a:r>
+            <a:r>
+              <a:rPr lang="ru-RU" sz="2000" dirty="0" smtClean="0"/>
+              <a:t> от своих лагов, </a:t>
+            </a:r>
+            <a:br>
+              <a:rPr lang="ru-RU" sz="2000" dirty="0" smtClean="0"/>
+            </a:br>
+            <a:r>
+              <a:rPr lang="ru-RU" sz="2000" dirty="0" smtClean="0"/>
+              <a:t>то </a:t>
+            </a:r>
+            <a:r>
+              <a:rPr lang="ru-RU" sz="2000" dirty="0" err="1" smtClean="0"/>
+              <a:t>коинтеграция</a:t>
+            </a:r>
+            <a:r>
+              <a:rPr lang="ru-RU" sz="2000" dirty="0" smtClean="0"/>
+              <a:t> – зависимость от ВР </a:t>
+            </a:r>
+            <a:r>
+              <a:rPr lang="en-US" sz="2000" dirty="0" smtClean="0"/>
+              <a:t>Y </a:t>
+            </a:r>
+            <a:r>
+              <a:rPr lang="ru-RU" sz="2000" dirty="0" smtClean="0"/>
+              <a:t>от лагов другого ВР</a:t>
+            </a:r>
+            <a:r>
+              <a:rPr lang="en-US" sz="2000" dirty="0" smtClean="0"/>
+              <a:t> X</a:t>
+            </a:r>
+            <a:r>
+              <a:rPr lang="ru-RU" sz="2000" dirty="0" smtClean="0"/>
+              <a:t>.</a:t>
+            </a:r>
+            <a:r>
+              <a:rPr lang="en-US" sz="2000" dirty="0" smtClean="0"/>
+              <a:t> </a:t>
+            </a:r>
+            <a:r>
+              <a:rPr lang="ru-RU" sz="2000" dirty="0" smtClean="0"/>
+              <a:t> Например если </a:t>
+            </a:r>
+            <a:r>
+              <a:rPr lang="en-US" sz="2000" dirty="0" smtClean="0"/>
+              <a:t>e X </a:t>
+            </a:r>
+            <a:r>
+              <a:rPr lang="ru-RU" sz="2000" dirty="0" smtClean="0"/>
+              <a:t>и </a:t>
+            </a:r>
+            <a:r>
+              <a:rPr lang="en-US" sz="2000" dirty="0" smtClean="0"/>
+              <a:t>Y </a:t>
+            </a:r>
+            <a:r>
+              <a:rPr lang="ru-RU" sz="2000" dirty="0" smtClean="0"/>
+              <a:t>совместный тренд. </a:t>
+            </a:r>
+            <a:endParaRPr lang="ru-RU" sz="2000" dirty="0"/>
+          </a:p>
+        </p:txBody>
+      </p:sp>
+      <p:pic>
+        <p:nvPicPr>
+          <p:cNvPr id="7" name="Рисунок 6"/>
+          <p:cNvPicPr>
+            <a:picLocks noChangeAspect="1"/>
+          </p:cNvPicPr>
+          <p:nvPr/>
+        </p:nvPicPr>
+        <p:blipFill>
+          <a:blip r:embed="rId4"/>
+          <a:stretch>
+            <a:fillRect/>
+          </a:stretch>
+        </p:blipFill>
+        <p:spPr>
+          <a:xfrm>
+            <a:off x="838200" y="3071856"/>
+            <a:ext cx="3763247" cy="2441480"/>
+          </a:xfrm>
+          <a:prstGeom prst="rect">
+            <a:avLst/>
+          </a:prstGeom>
+        </p:spPr>
+      </p:pic>
+      <p:sp>
+        <p:nvSpPr>
+          <p:cNvPr id="10" name="Прямоугольник 9"/>
+          <p:cNvSpPr/>
+          <p:nvPr/>
+        </p:nvSpPr>
+        <p:spPr>
+          <a:xfrm>
+            <a:off x="476250" y="6265530"/>
+            <a:ext cx="11617097" cy="369332"/>
+          </a:xfrm>
+          <a:prstGeom prst="rect">
+            <a:avLst/>
+          </a:prstGeom>
+        </p:spPr>
+        <p:txBody>
+          <a:bodyPr wrap="square">
+            <a:spAutoFit/>
+          </a:bodyPr>
+          <a:lstStyle/>
+          <a:p>
+            <a:r>
+              <a:rPr lang="ru-RU" i="1" dirty="0" smtClean="0"/>
+              <a:t>Напр. Brent</a:t>
+            </a:r>
+            <a:r>
+              <a:rPr lang="ru-RU" i="1" dirty="0"/>
+              <a:t>−0.8⋅Бензин−0.7⋅Дизель∼</a:t>
+            </a:r>
+            <a:r>
+              <a:rPr lang="ru-RU" i="1" dirty="0" smtClean="0"/>
+              <a:t>I(0)</a:t>
+            </a:r>
+            <a:r>
+              <a:rPr lang="en-US" i="1" dirty="0" smtClean="0"/>
+              <a:t>-</a:t>
+            </a:r>
+            <a:r>
+              <a:rPr lang="ru-RU" i="1" dirty="0" smtClean="0"/>
+              <a:t> маржа </a:t>
+            </a:r>
+            <a:r>
+              <a:rPr lang="ru-RU" i="1" dirty="0"/>
+              <a:t>между нефтью и продуктами стабильна — возможен арбитраж. </a:t>
+            </a:r>
+          </a:p>
+        </p:txBody>
+      </p:sp>
+      <p:sp>
+        <p:nvSpPr>
+          <p:cNvPr id="5" name="Прямоугольник 4"/>
+          <p:cNvSpPr/>
+          <p:nvPr/>
+        </p:nvSpPr>
+        <p:spPr>
+          <a:xfrm>
+            <a:off x="4069640" y="3071856"/>
+            <a:ext cx="5081840" cy="338554"/>
+          </a:xfrm>
+          <a:prstGeom prst="rect">
+            <a:avLst/>
+          </a:prstGeom>
+        </p:spPr>
+        <p:txBody>
+          <a:bodyPr wrap="none">
+            <a:spAutoFit/>
+          </a:bodyPr>
+          <a:lstStyle/>
+          <a:p>
+            <a:r>
+              <a:rPr lang="en-US" sz="1600" dirty="0">
+                <a:solidFill>
+                  <a:srgbClr val="333333"/>
+                </a:solidFill>
+                <a:latin typeface="Source Sans Pro" panose="020B0503030403020204" pitchFamily="34" charset="0"/>
+              </a:rPr>
+              <a:t> U.S. 3-month treasury bills, U.S. 10-years treasury bonds </a:t>
+            </a:r>
+            <a:endParaRPr lang="ru-RU" sz="1600" dirty="0"/>
           </a:p>
         </p:txBody>
       </p:sp>
     </p:spTree>
     <p:extLst>
       <p:ext uri="{BB962C8B-B14F-4D97-AF65-F5344CB8AC3E}">
-        <p14:creationId xmlns:p14="http://schemas.microsoft.com/office/powerpoint/2010/main" val="4081172957"/>
+        <p14:creationId xmlns:p14="http://schemas.microsoft.com/office/powerpoint/2010/main" val="3999211994"/>
       </p:ext>
     </p:extLst>
   </p:cSld>
   <p:clrMapOvr>
     <a:masterClrMapping/>
   </p:clrMapOvr>
+  <p:timing>
+    <p:tnLst>
+      <p:par>
+        <p:cTn id="1" dur="indefinite" restart="never" nodeType="tmRoot"/>
+      </p:par>
+    </p:tnLst>
+  </p:timing>
+</p:sld>
+</file>
+
+<file path=ppt/slides/slide8.xml><?xml version="1.0" encoding="utf-8"?>
+<p:sld xmlns:a="http://schemas.openxmlformats.org/drawingml/2006/main" xmlns:r="http://schemas.openxmlformats.org/officeDocument/2006/relationships" xmlns:p="http://schemas.openxmlformats.org/presentationml/2006/main">
+  <p:cSld>
+    <p:spTree>
+      <p:nvGrpSpPr>
+        <p:cNvPr id="1" name=""/>
+        <p:cNvGrpSpPr/>
+        <p:nvPr/>
+      </p:nvGrpSpPr>
+      <p:grpSpPr>
+        <a:xfrm>
+          <a:off x="0" y="0"/>
+          <a:ext cx="0" cy="0"/>
+          <a:chOff x="0" y="0"/>
+          <a:chExt cx="0" cy="0"/>
+        </a:xfrm>
+      </p:grpSpPr>
+      <p:sp>
+        <p:nvSpPr>
+          <p:cNvPr id="2" name="Заголовок 1"/>
+          <p:cNvSpPr>
+            <a:spLocks noGrp="1"/>
+          </p:cNvSpPr>
+          <p:nvPr>
+            <p:ph type="title"/>
+          </p:nvPr>
+        </p:nvSpPr>
+        <p:spPr>
+          <a:xfrm>
+            <a:off x="838200" y="365126"/>
+            <a:ext cx="10515600" cy="621846"/>
+          </a:xfrm>
+        </p:spPr>
+        <p:txBody>
+          <a:bodyPr>
+            <a:normAutofit fontScale="90000"/>
+          </a:bodyPr>
+          <a:lstStyle/>
+          <a:p>
+            <a:r>
+              <a:rPr lang="ru-RU" dirty="0" err="1" smtClean="0"/>
+              <a:t>Коинтегрированность</a:t>
+            </a:r>
+            <a:endParaRPr lang="ru-RU" dirty="0"/>
+          </a:p>
+        </p:txBody>
+      </p:sp>
+      <mc:AlternateContent xmlns:mc="http://schemas.openxmlformats.org/markup-compatibility/2006">
+        <mc:Choice xmlns:a14="http://schemas.microsoft.com/office/drawing/2010/main" Requires="a14">
+          <p:sp>
+            <p:nvSpPr>
+              <p:cNvPr id="3" name="Объект 2"/>
+              <p:cNvSpPr>
+                <a:spLocks noGrp="1"/>
+              </p:cNvSpPr>
+              <p:nvPr>
+                <p:ph idx="1"/>
+              </p:nvPr>
+            </p:nvSpPr>
+            <p:spPr>
+              <a:xfrm>
+                <a:off x="295729" y="986972"/>
+                <a:ext cx="11600542" cy="4972684"/>
+              </a:xfrm>
+            </p:spPr>
+            <p:txBody>
+              <a:bodyPr>
+                <a:normAutofit fontScale="92500"/>
+              </a:bodyPr>
+              <a:lstStyle/>
+              <a:p>
+                <a:pPr marL="0" indent="0">
+                  <a:lnSpc>
+                    <a:spcPct val="100000"/>
+                  </a:lnSpc>
+                  <a:spcBef>
+                    <a:spcPts val="200"/>
+                  </a:spcBef>
+                  <a:buNone/>
+                </a:pPr>
+                <a:r>
+                  <a:rPr lang="ru-RU" sz="2400" dirty="0" smtClean="0"/>
+                  <a:t>Если два ВР X </a:t>
+                </a:r>
+                <a:r>
+                  <a:rPr lang="ru-RU" sz="2400" dirty="0"/>
+                  <a:t>и Y </a:t>
+                </a:r>
+                <a:r>
+                  <a:rPr lang="ru-RU" sz="2400" dirty="0" smtClean="0"/>
+                  <a:t>имеют стационарность разностей</a:t>
+                </a:r>
+                <a:r>
+                  <a:rPr lang="en-US" sz="2400" dirty="0" smtClean="0"/>
+                  <a:t> </a:t>
+                </a:r>
+                <a:r>
+                  <a:rPr lang="ru-RU" sz="2400" dirty="0" smtClean="0"/>
+                  <a:t> </a:t>
+                </a:r>
+                <a:r>
+                  <a:rPr lang="ru-RU" sz="2400" dirty="0"/>
+                  <a:t>I(1) и если существует θ , такое, что Y− </a:t>
+                </a:r>
+                <a:r>
+                  <a:rPr lang="ru-RU" sz="2400" dirty="0" err="1"/>
+                  <a:t>θX</a:t>
+                </a:r>
+                <a:r>
+                  <a:rPr lang="ru-RU" sz="2400" dirty="0"/>
+                  <a:t> равно I(0) , то X и Y </a:t>
+                </a:r>
+                <a:r>
+                  <a:rPr lang="ru-RU" sz="2400" dirty="0" err="1" smtClean="0"/>
+                  <a:t>коинтегрированы</a:t>
+                </a:r>
+                <a:r>
+                  <a:rPr lang="ru-RU" sz="2400" dirty="0" smtClean="0"/>
+                  <a:t>. </a:t>
+                </a:r>
+              </a:p>
+              <a:p>
+                <a:pPr>
+                  <a:lnSpc>
+                    <a:spcPct val="100000"/>
+                  </a:lnSpc>
+                  <a:spcBef>
+                    <a:spcPts val="200"/>
+                  </a:spcBef>
+                </a:pPr>
+                <a:r>
+                  <a:rPr lang="ru-RU" sz="2400" dirty="0" smtClean="0"/>
+                  <a:t>Если θ известна, </a:t>
+                </a:r>
+                <a:r>
+                  <a:rPr lang="ru-RU" sz="2400" dirty="0" err="1" smtClean="0"/>
+                  <a:t>коинтеграция</a:t>
+                </a:r>
+                <a:r>
+                  <a:rPr lang="ru-RU" sz="2400" dirty="0" smtClean="0"/>
+                  <a:t> – проверка </a:t>
+                </a:r>
+                <a:r>
+                  <a:rPr lang="ru-RU" sz="2400" dirty="0"/>
+                  <a:t>Y− </a:t>
+                </a:r>
+                <a:r>
+                  <a:rPr lang="ru-RU" sz="2400" dirty="0" err="1"/>
+                  <a:t>θX</a:t>
+                </a:r>
+                <a:r>
+                  <a:rPr lang="ru-RU" sz="2400" dirty="0"/>
+                  <a:t> </a:t>
+                </a:r>
+                <a:r>
+                  <a:rPr lang="ru-RU" sz="2400" dirty="0" smtClean="0"/>
+                  <a:t> на стационарность</a:t>
+                </a:r>
+              </a:p>
+              <a:p>
+                <a:pPr>
+                  <a:lnSpc>
+                    <a:spcPct val="100000"/>
+                  </a:lnSpc>
+                  <a:spcBef>
+                    <a:spcPts val="200"/>
+                  </a:spcBef>
+                </a:pPr>
+                <a:r>
+                  <a:rPr lang="ru-RU" sz="2400" dirty="0"/>
+                  <a:t>Если θ </a:t>
+                </a:r>
+                <a:r>
+                  <a:rPr lang="ru-RU" sz="2400" dirty="0" smtClean="0"/>
+                  <a:t>не известна, то можно оценить регрессией и проверить остатки </a:t>
+                </a:r>
+                <a:r>
+                  <a:rPr lang="ru-RU" sz="2400" dirty="0"/>
+                  <a:t>Y− </a:t>
+                </a:r>
+                <a:r>
+                  <a:rPr lang="ru-RU" sz="2400" dirty="0" err="1"/>
+                  <a:t>θX</a:t>
+                </a:r>
+                <a:r>
+                  <a:rPr lang="ru-RU" sz="2400" dirty="0" smtClean="0"/>
+                  <a:t>  на </a:t>
+                </a:r>
+                <a:r>
+                  <a:rPr lang="ru-RU" sz="2400" dirty="0"/>
+                  <a:t>стационарность </a:t>
+                </a:r>
+                <a:r>
+                  <a:rPr lang="ru-RU" sz="2400" dirty="0" smtClean="0"/>
+                  <a:t>(тест </a:t>
+                </a:r>
+                <a:r>
+                  <a:rPr lang="ru-RU" sz="2400" dirty="0" err="1"/>
+                  <a:t>Энгла</a:t>
+                </a:r>
+                <a:r>
+                  <a:rPr lang="ru-RU" sz="2400" dirty="0"/>
+                  <a:t>–</a:t>
+                </a:r>
+                <a:r>
+                  <a:rPr lang="ru-RU" sz="2400" dirty="0" err="1"/>
+                  <a:t>Грейнджера</a:t>
+                </a:r>
+                <a:r>
+                  <a:rPr lang="ru-RU" sz="2400" dirty="0"/>
+                  <a:t> (</a:t>
+                </a:r>
+                <a:r>
+                  <a:rPr lang="en-US" sz="2400" dirty="0"/>
+                  <a:t>Engle-Granger)</a:t>
+                </a:r>
+                <a:r>
+                  <a:rPr lang="ru-RU" sz="2400" dirty="0"/>
+                  <a:t>)</a:t>
+                </a:r>
+              </a:p>
+              <a:p>
+                <a:pPr>
+                  <a:lnSpc>
+                    <a:spcPct val="100000"/>
+                  </a:lnSpc>
+                  <a:spcBef>
+                    <a:spcPts val="200"/>
+                  </a:spcBef>
+                </a:pPr>
+                <a:r>
+                  <a:rPr lang="ru-RU" sz="2400" dirty="0" smtClean="0"/>
+                  <a:t>Также можно оценить </a:t>
+                </a:r>
+                <a:r>
+                  <a:rPr lang="ru-RU" sz="2400" dirty="0" err="1" smtClean="0"/>
+                  <a:t>коинтеграцию</a:t>
+                </a:r>
+                <a:r>
+                  <a:rPr lang="ru-RU" sz="2400" dirty="0" smtClean="0"/>
+                  <a:t> как добавку к </a:t>
+                </a:r>
+                <a:r>
+                  <a:rPr lang="en-US" sz="2400" dirty="0" smtClean="0"/>
+                  <a:t>VAR:</a:t>
+                </a:r>
+              </a:p>
+              <a:p>
+                <a:pPr marL="914400" lvl="2" indent="0">
+                  <a:lnSpc>
+                    <a:spcPct val="100000"/>
+                  </a:lnSpc>
+                  <a:spcBef>
+                    <a:spcPts val="200"/>
+                  </a:spcBef>
+                  <a:buNone/>
+                </a:pPr>
+                <a14:m>
+                  <m:oMathPara xmlns:m="http://schemas.openxmlformats.org/officeDocument/2006/math">
+                    <m:oMathParaPr>
+                      <m:jc m:val="centerGroup"/>
+                    </m:oMathParaPr>
+                    <m:oMath xmlns:m="http://schemas.openxmlformats.org/officeDocument/2006/math">
+                      <m:r>
+                        <m:rPr>
+                          <m:sty m:val="p"/>
+                        </m:rPr>
+                        <a:rPr lang="en-US" sz="1800" b="0" i="0" smtClean="0">
+                          <a:latin typeface="Cambria Math" panose="02040503050406030204" pitchFamily="18" charset="0"/>
+                        </a:rPr>
+                        <m:t>Δ</m:t>
+                      </m:r>
+                      <m:r>
+                        <a:rPr lang="en-US" sz="1800" b="0" i="1" smtClean="0">
+                          <a:latin typeface="Cambria Math" panose="02040503050406030204" pitchFamily="18" charset="0"/>
+                        </a:rPr>
+                        <m:t> </m:t>
+                      </m:r>
+                      <m:sSub>
+                        <m:sSubPr>
+                          <m:ctrlPr>
+                            <a:rPr lang="en-US" sz="1800" b="0" i="1" smtClean="0">
+                              <a:latin typeface="Cambria Math" panose="02040503050406030204" pitchFamily="18" charset="0"/>
+                            </a:rPr>
+                          </m:ctrlPr>
+                        </m:sSubPr>
+                        <m:e>
+                          <m:acc>
+                            <m:accPr>
+                              <m:chr m:val="̂"/>
+                              <m:ctrlPr>
+                                <a:rPr lang="en-US" sz="1800" b="0" i="1" smtClean="0">
+                                  <a:latin typeface="Cambria Math" panose="02040503050406030204" pitchFamily="18" charset="0"/>
+                                </a:rPr>
+                              </m:ctrlPr>
+                            </m:accPr>
+                            <m:e>
+                              <m:r>
+                                <a:rPr lang="en-US" sz="1800" b="0" i="1" smtClean="0">
+                                  <a:latin typeface="Cambria Math" panose="02040503050406030204" pitchFamily="18" charset="0"/>
+                                </a:rPr>
+                                <m:t>𝑌</m:t>
+                              </m:r>
+                            </m:e>
+                          </m:acc>
+                        </m:e>
+                        <m:sub>
+                          <m:r>
+                            <a:rPr lang="en-US" sz="1800" b="0" i="1" smtClean="0">
+                              <a:latin typeface="Cambria Math" panose="02040503050406030204" pitchFamily="18" charset="0"/>
+                            </a:rPr>
+                            <m:t>𝑛</m:t>
+                          </m:r>
+                        </m:sub>
+                      </m:sSub>
+                      <m:r>
+                        <a:rPr lang="en-US" sz="1800" b="0" i="1" smtClean="0">
+                          <a:latin typeface="Cambria Math" panose="02040503050406030204" pitchFamily="18" charset="0"/>
+                        </a:rPr>
+                        <m:t>=</m:t>
+                      </m:r>
+                      <m:r>
+                        <a:rPr lang="en-US" sz="1800" b="0" i="1" smtClean="0">
+                          <a:latin typeface="Cambria Math" panose="02040503050406030204" pitchFamily="18" charset="0"/>
+                        </a:rPr>
+                        <m:t>𝐵</m:t>
+                      </m:r>
+                      <m:sSub>
+                        <m:sSubPr>
+                          <m:ctrlPr>
+                            <a:rPr lang="en-US" sz="1800" b="0" i="1" smtClean="0">
+                              <a:latin typeface="Cambria Math" panose="02040503050406030204" pitchFamily="18" charset="0"/>
+                            </a:rPr>
+                          </m:ctrlPr>
+                        </m:sSubPr>
+                        <m:e>
+                          <m:r>
+                            <a:rPr lang="en-US" sz="1800" b="0" i="1" smtClean="0">
+                              <a:latin typeface="Cambria Math" panose="02040503050406030204" pitchFamily="18" charset="0"/>
+                            </a:rPr>
+                            <m:t>𝑌</m:t>
+                          </m:r>
+                        </m:e>
+                        <m:sub>
+                          <m:r>
+                            <a:rPr lang="en-US" sz="1800" b="0" i="1" smtClean="0">
+                              <a:latin typeface="Cambria Math" panose="02040503050406030204" pitchFamily="18" charset="0"/>
+                            </a:rPr>
+                            <m:t>𝑛</m:t>
+                          </m:r>
+                        </m:sub>
+                      </m:sSub>
+                      <m:r>
+                        <a:rPr lang="en-US" sz="1800" b="0" i="1" smtClean="0">
+                          <a:latin typeface="Cambria Math" panose="02040503050406030204" pitchFamily="18" charset="0"/>
+                        </a:rPr>
+                        <m:t>+</m:t>
+                      </m:r>
+                      <m:nary>
+                        <m:naryPr>
+                          <m:chr m:val="∑"/>
+                          <m:limLoc m:val="undOvr"/>
+                          <m:ctrlPr>
+                            <a:rPr lang="en-US" sz="1800" i="1">
+                              <a:latin typeface="Cambria Math" panose="02040503050406030204" pitchFamily="18" charset="0"/>
+                            </a:rPr>
+                          </m:ctrlPr>
+                        </m:naryPr>
+                        <m:sub>
+                          <m:r>
+                            <a:rPr lang="en-US" sz="1800" i="1">
+                              <a:latin typeface="Cambria Math" panose="02040503050406030204" pitchFamily="18" charset="0"/>
+                            </a:rPr>
+                            <m:t>𝑖</m:t>
+                          </m:r>
+                          <m:r>
+                            <a:rPr lang="en-US" sz="1800" i="1">
+                              <a:latin typeface="Cambria Math" panose="02040503050406030204" pitchFamily="18" charset="0"/>
+                            </a:rPr>
+                            <m:t>=0</m:t>
+                          </m:r>
+                        </m:sub>
+                        <m:sup>
+                          <m:r>
+                            <a:rPr lang="en-US" sz="1800" i="1">
+                              <a:latin typeface="Cambria Math" panose="02040503050406030204" pitchFamily="18" charset="0"/>
+                            </a:rPr>
+                            <m:t>𝑃</m:t>
+                          </m:r>
+                        </m:sup>
+                        <m:e>
+                          <m:sSub>
+                            <m:sSubPr>
+                              <m:ctrlPr>
+                                <a:rPr lang="en-US" sz="1800" i="1">
+                                  <a:latin typeface="Cambria Math" panose="02040503050406030204" pitchFamily="18" charset="0"/>
+                                </a:rPr>
+                              </m:ctrlPr>
+                            </m:sSubPr>
+                            <m:e>
+                              <m:r>
+                                <a:rPr lang="en-US" sz="1800" i="1">
+                                  <a:latin typeface="Cambria Math" panose="02040503050406030204" pitchFamily="18" charset="0"/>
+                                </a:rPr>
+                                <m:t>𝐴</m:t>
+                              </m:r>
+                            </m:e>
+                            <m:sub>
+                              <m:r>
+                                <a:rPr lang="en-US" sz="1800" i="1">
+                                  <a:latin typeface="Cambria Math" panose="02040503050406030204" pitchFamily="18" charset="0"/>
+                                </a:rPr>
+                                <m:t>𝑖</m:t>
+                              </m:r>
+                            </m:sub>
+                          </m:sSub>
+                          <m:r>
+                            <m:rPr>
+                              <m:sty m:val="p"/>
+                            </m:rPr>
+                            <a:rPr lang="en-US" sz="1800">
+                              <a:latin typeface="Cambria Math" panose="02040503050406030204" pitchFamily="18" charset="0"/>
+                            </a:rPr>
+                            <m:t>Δ</m:t>
+                          </m:r>
+                        </m:e>
+                      </m:nary>
+                      <m:sSub>
+                        <m:sSubPr>
+                          <m:ctrlPr>
+                            <a:rPr lang="en-US" sz="1800" i="1">
+                              <a:latin typeface="Cambria Math" panose="02040503050406030204" pitchFamily="18" charset="0"/>
+                            </a:rPr>
+                          </m:ctrlPr>
+                        </m:sSubPr>
+                        <m:e>
+                          <m:r>
+                            <a:rPr lang="en-US" sz="1800" i="1">
+                              <a:latin typeface="Cambria Math" panose="02040503050406030204" pitchFamily="18" charset="0"/>
+                            </a:rPr>
+                            <m:t>𝑌</m:t>
+                          </m:r>
+                        </m:e>
+                        <m:sub>
+                          <m:r>
+                            <a:rPr lang="en-US" sz="1800" i="1">
+                              <a:latin typeface="Cambria Math" panose="02040503050406030204" pitchFamily="18" charset="0"/>
+                            </a:rPr>
+                            <m:t>𝑛</m:t>
+                          </m:r>
+                          <m:r>
+                            <a:rPr lang="en-US" sz="1800" i="1">
+                              <a:latin typeface="Cambria Math" panose="02040503050406030204" pitchFamily="18" charset="0"/>
+                            </a:rPr>
+                            <m:t>−</m:t>
+                          </m:r>
+                          <m:r>
+                            <a:rPr lang="en-US" sz="1800" i="1">
+                              <a:latin typeface="Cambria Math" panose="02040503050406030204" pitchFamily="18" charset="0"/>
+                            </a:rPr>
+                            <m:t>𝑖</m:t>
+                          </m:r>
+                        </m:sub>
+                      </m:sSub>
+                    </m:oMath>
+                  </m:oMathPara>
+                </a14:m>
+                <a:endParaRPr lang="ru-RU" sz="1800" dirty="0" smtClean="0"/>
+              </a:p>
+              <a:p>
+                <a:pPr marL="457200" lvl="1" indent="0">
+                  <a:lnSpc>
+                    <a:spcPct val="100000"/>
+                  </a:lnSpc>
+                  <a:spcBef>
+                    <a:spcPts val="200"/>
+                  </a:spcBef>
+                  <a:buNone/>
+                </a:pPr>
+                <a:r>
+                  <a:rPr lang="ru-RU" dirty="0" smtClean="0"/>
+                  <a:t>где </a:t>
+                </a:r>
+                <a14:m>
+                  <m:oMath xmlns:m="http://schemas.openxmlformats.org/officeDocument/2006/math">
+                    <m:nary>
+                      <m:naryPr>
+                        <m:chr m:val="∑"/>
+                        <m:limLoc m:val="undOvr"/>
+                        <m:ctrlPr>
+                          <a:rPr lang="en-US" i="1">
+                            <a:latin typeface="Cambria Math" panose="02040503050406030204" pitchFamily="18" charset="0"/>
+                          </a:rPr>
+                        </m:ctrlPr>
+                      </m:naryPr>
+                      <m:sub>
+                        <m:r>
+                          <a:rPr lang="en-US" i="1">
+                            <a:latin typeface="Cambria Math" panose="02040503050406030204" pitchFamily="18" charset="0"/>
+                          </a:rPr>
+                          <m:t>𝑖</m:t>
+                        </m:r>
+                        <m:r>
+                          <a:rPr lang="en-US" i="1">
+                            <a:latin typeface="Cambria Math" panose="02040503050406030204" pitchFamily="18" charset="0"/>
+                          </a:rPr>
+                          <m:t>=0</m:t>
+                        </m:r>
+                      </m:sub>
+                      <m:sup>
+                        <m:r>
+                          <a:rPr lang="en-US" i="1">
+                            <a:latin typeface="Cambria Math" panose="02040503050406030204" pitchFamily="18" charset="0"/>
+                          </a:rPr>
+                          <m:t>𝑃</m:t>
+                        </m:r>
+                      </m:sup>
+                      <m:e>
+                        <m:sSub>
+                          <m:sSubPr>
+                            <m:ctrlPr>
+                              <a:rPr lang="en-US" i="1">
+                                <a:latin typeface="Cambria Math" panose="02040503050406030204" pitchFamily="18" charset="0"/>
+                              </a:rPr>
+                            </m:ctrlPr>
+                          </m:sSubPr>
+                          <m:e>
+                            <m:r>
+                              <a:rPr lang="en-US" i="1">
+                                <a:latin typeface="Cambria Math" panose="02040503050406030204" pitchFamily="18" charset="0"/>
+                              </a:rPr>
+                              <m:t>𝐴</m:t>
+                            </m:r>
+                          </m:e>
+                          <m:sub>
+                            <m:r>
+                              <a:rPr lang="en-US" i="1">
+                                <a:latin typeface="Cambria Math" panose="02040503050406030204" pitchFamily="18" charset="0"/>
+                              </a:rPr>
+                              <m:t>𝑖</m:t>
+                            </m:r>
+                          </m:sub>
+                        </m:sSub>
+                        <m:r>
+                          <m:rPr>
+                            <m:sty m:val="p"/>
+                          </m:rPr>
+                          <a:rPr lang="en-US">
+                            <a:latin typeface="Cambria Math" panose="02040503050406030204" pitchFamily="18" charset="0"/>
+                          </a:rPr>
+                          <m:t>Δ</m:t>
+                        </m:r>
+                      </m:e>
+                    </m:nary>
+                    <m:sSub>
+                      <m:sSubPr>
+                        <m:ctrlPr>
+                          <a:rPr lang="en-US" i="1">
+                            <a:latin typeface="Cambria Math" panose="02040503050406030204" pitchFamily="18" charset="0"/>
+                          </a:rPr>
+                        </m:ctrlPr>
+                      </m:sSubPr>
+                      <m:e>
+                        <m:r>
+                          <a:rPr lang="en-US" i="1">
+                            <a:latin typeface="Cambria Math" panose="02040503050406030204" pitchFamily="18" charset="0"/>
+                          </a:rPr>
+                          <m:t>𝑌</m:t>
+                        </m:r>
+                      </m:e>
+                      <m:sub>
+                        <m:r>
+                          <a:rPr lang="en-US" i="1">
+                            <a:latin typeface="Cambria Math" panose="02040503050406030204" pitchFamily="18" charset="0"/>
+                          </a:rPr>
+                          <m:t>𝑛</m:t>
+                        </m:r>
+                        <m:r>
+                          <a:rPr lang="en-US" i="1">
+                            <a:latin typeface="Cambria Math" panose="02040503050406030204" pitchFamily="18" charset="0"/>
+                          </a:rPr>
+                          <m:t>−</m:t>
+                        </m:r>
+                        <m:r>
+                          <a:rPr lang="en-US" i="1">
+                            <a:latin typeface="Cambria Math" panose="02040503050406030204" pitchFamily="18" charset="0"/>
+                          </a:rPr>
+                          <m:t>𝑖</m:t>
+                        </m:r>
+                      </m:sub>
+                    </m:sSub>
+                  </m:oMath>
+                </a14:m>
+                <a:r>
+                  <a:rPr lang="ru-RU" dirty="0" smtClean="0"/>
+                  <a:t> - </a:t>
+                </a:r>
+                <a:r>
+                  <a:rPr lang="en-US" dirty="0" smtClean="0"/>
+                  <a:t>VAR, </a:t>
+                </a:r>
+                <a14:m>
+                  <m:oMath xmlns:m="http://schemas.openxmlformats.org/officeDocument/2006/math">
+                    <m:r>
+                      <a:rPr lang="en-US" b="1" i="1">
+                        <a:latin typeface="Cambria Math" panose="02040503050406030204" pitchFamily="18" charset="0"/>
+                      </a:rPr>
+                      <m:t>𝑩</m:t>
+                    </m:r>
+                  </m:oMath>
+                </a14:m>
+                <a:r>
+                  <a:rPr lang="en-US" b="1" dirty="0" smtClean="0"/>
+                  <a:t> – </a:t>
+                </a:r>
+                <a:r>
+                  <a:rPr lang="ru-RU" b="1" dirty="0" smtClean="0"/>
+                  <a:t>матрица </a:t>
+                </a:r>
+                <a:r>
+                  <a:rPr lang="ru-RU" b="1" dirty="0" err="1" smtClean="0"/>
+                  <a:t>коинтеграции</a:t>
+                </a:r>
+                <a:r>
+                  <a:rPr lang="ru-RU" b="1" dirty="0" smtClean="0"/>
+                  <a:t> ранга </a:t>
+                </a:r>
+                <a:r>
+                  <a:rPr lang="en-US" b="1" dirty="0" smtClean="0"/>
+                  <a:t>r</a:t>
+                </a:r>
+                <a:r>
+                  <a:rPr lang="ru-RU" dirty="0" smtClean="0"/>
+                  <a:t>.</a:t>
+                </a:r>
+                <a:r>
+                  <a:rPr lang="en-US" dirty="0" smtClean="0"/>
+                  <a:t> </a:t>
+                </a:r>
+                <a:r>
+                  <a:rPr lang="ru-RU" dirty="0" smtClean="0"/>
+                  <a:t>Если </a:t>
+                </a:r>
+                <a14:m>
+                  <m:oMath xmlns:m="http://schemas.openxmlformats.org/officeDocument/2006/math">
+                    <m:r>
+                      <a:rPr lang="en-US" i="1" dirty="0" smtClean="0">
+                        <a:latin typeface="Cambria Math" panose="02040503050406030204" pitchFamily="18" charset="0"/>
+                      </a:rPr>
+                      <m:t>𝑟</m:t>
+                    </m:r>
+                    <m:r>
+                      <a:rPr lang="ru-RU" i="1" dirty="0" smtClean="0">
+                        <a:latin typeface="Cambria Math" panose="02040503050406030204" pitchFamily="18" charset="0"/>
+                      </a:rPr>
+                      <m:t>=0</m:t>
+                    </m:r>
+                    <m:r>
+                      <a:rPr lang="ru-RU" b="0" i="1" dirty="0" smtClean="0">
+                        <a:latin typeface="Cambria Math" panose="02040503050406030204" pitchFamily="18" charset="0"/>
+                      </a:rPr>
+                      <m:t>→</m:t>
+                    </m:r>
+                  </m:oMath>
+                </a14:m>
+                <a:r>
+                  <a:rPr lang="ru-RU" b="0" i="0" dirty="0" smtClean="0">
+                    <a:latin typeface="+mj-lt"/>
+                  </a:rPr>
+                  <a:t>нет </a:t>
+                </a:r>
+                <a:r>
+                  <a:rPr lang="ru-RU" b="0" i="0" dirty="0" err="1" smtClean="0">
+                    <a:latin typeface="+mj-lt"/>
+                  </a:rPr>
+                  <a:t>коинтеграций</a:t>
+                </a:r>
+                <a:r>
+                  <a:rPr lang="ru-RU" b="0" i="0" dirty="0" smtClean="0">
+                    <a:latin typeface="+mj-lt"/>
+                  </a:rPr>
+                  <a:t>, </a:t>
+                </a:r>
+                <a14:m>
+                  <m:oMath xmlns:m="http://schemas.openxmlformats.org/officeDocument/2006/math">
+                    <m:r>
+                      <a:rPr lang="en-US" i="1" dirty="0">
+                        <a:latin typeface="Cambria Math" panose="02040503050406030204" pitchFamily="18" charset="0"/>
+                      </a:rPr>
+                      <m:t>𝑟</m:t>
+                    </m:r>
+                    <m:r>
+                      <a:rPr lang="en-US" b="0" i="1" dirty="0" smtClean="0">
+                        <a:latin typeface="Cambria Math" panose="02040503050406030204" pitchFamily="18" charset="0"/>
+                      </a:rPr>
+                      <m:t>&lt;</m:t>
+                    </m:r>
+                    <m:r>
+                      <a:rPr lang="en-US" b="0" i="1" dirty="0" smtClean="0">
+                        <a:latin typeface="Cambria Math" panose="02040503050406030204" pitchFamily="18" charset="0"/>
+                      </a:rPr>
+                      <m:t>𝑚</m:t>
+                    </m:r>
+                  </m:oMath>
+                </a14:m>
+                <a:r>
+                  <a:rPr lang="en-US" dirty="0" smtClean="0"/>
+                  <a:t> </a:t>
+                </a:r>
+                <a:r>
+                  <a:rPr lang="ru-RU" dirty="0" smtClean="0"/>
+                  <a:t>(число ВР) – есть </a:t>
+                </a:r>
+                <a14:m>
+                  <m:oMath xmlns:m="http://schemas.openxmlformats.org/officeDocument/2006/math">
+                    <m:r>
+                      <a:rPr lang="en-US" i="1" dirty="0" smtClean="0">
+                        <a:latin typeface="Cambria Math" panose="02040503050406030204" pitchFamily="18" charset="0"/>
+                      </a:rPr>
+                      <m:t>𝑟</m:t>
+                    </m:r>
+                  </m:oMath>
+                </a14:m>
+                <a:r>
+                  <a:rPr lang="en-US" dirty="0" smtClean="0"/>
+                  <a:t> </a:t>
+                </a:r>
+                <a:r>
+                  <a:rPr lang="ru-RU" sz="2000" dirty="0" err="1" smtClean="0"/>
+                  <a:t>коинтеграций</a:t>
+                </a:r>
+                <a:r>
+                  <a:rPr lang="en-US" sz="2000" dirty="0" smtClean="0"/>
+                  <a:t>, </a:t>
+                </a:r>
+                <a14:m>
+                  <m:oMath xmlns:m="http://schemas.openxmlformats.org/officeDocument/2006/math">
+                    <m:r>
+                      <a:rPr lang="en-US" sz="2000" b="0" i="1" smtClean="0">
+                        <a:latin typeface="Cambria Math" panose="02040503050406030204" pitchFamily="18" charset="0"/>
+                      </a:rPr>
+                      <m:t>𝑟</m:t>
+                    </m:r>
+                    <m:r>
+                      <a:rPr lang="en-US" sz="2000" b="0" i="1" smtClean="0">
+                        <a:latin typeface="Cambria Math" panose="02040503050406030204" pitchFamily="18" charset="0"/>
+                      </a:rPr>
+                      <m:t>=</m:t>
+                    </m:r>
+                    <m:r>
+                      <a:rPr lang="en-US" sz="2000" b="0" i="1" smtClean="0">
+                        <a:latin typeface="Cambria Math" panose="02040503050406030204" pitchFamily="18" charset="0"/>
+                      </a:rPr>
+                      <m:t>𝑚</m:t>
+                    </m:r>
+                  </m:oMath>
+                </a14:m>
+                <a:r>
+                  <a:rPr lang="en-US" dirty="0" smtClean="0"/>
+                  <a:t> – </a:t>
+                </a:r>
+                <a:r>
+                  <a:rPr lang="ru-RU" dirty="0" smtClean="0"/>
+                  <a:t>все ВР стационарны (все и так I(0)) </a:t>
+                </a:r>
+              </a:p>
+              <a:p>
+                <a:pPr marL="457200" lvl="1" indent="0">
+                  <a:lnSpc>
+                    <a:spcPct val="100000"/>
+                  </a:lnSpc>
+                  <a:spcBef>
+                    <a:spcPts val="200"/>
+                  </a:spcBef>
+                  <a:buNone/>
+                </a:pPr>
+                <a:r>
+                  <a:rPr lang="ru-RU" dirty="0"/>
+                  <a:t>	</a:t>
+                </a:r>
+                <a:r>
+                  <a:rPr lang="ru-RU" i="1" dirty="0" smtClean="0"/>
+                  <a:t>проверка статистик на </a:t>
+                </a:r>
+                <a:r>
+                  <a:rPr lang="en-US" i="1" dirty="0" smtClean="0"/>
+                  <a:t>r 2 </a:t>
+                </a:r>
+                <a:r>
+                  <a:rPr lang="ru-RU" i="1" dirty="0" smtClean="0"/>
+                  <a:t>особыми способами!</a:t>
+                </a:r>
+              </a:p>
+              <a:p>
+                <a:pPr marL="457200" lvl="1" indent="0">
+                  <a:lnSpc>
+                    <a:spcPct val="100000"/>
+                  </a:lnSpc>
+                  <a:spcBef>
+                    <a:spcPts val="200"/>
+                  </a:spcBef>
+                  <a:buNone/>
+                </a:pPr>
+                <a:r>
+                  <a:rPr lang="ru-RU" dirty="0" smtClean="0"/>
+                  <a:t>Модель </a:t>
+                </a:r>
+                <a:r>
+                  <a:rPr lang="en-US" dirty="0" smtClean="0"/>
+                  <a:t>VAR </a:t>
+                </a:r>
+                <a:r>
+                  <a:rPr lang="ru-RU" dirty="0" smtClean="0"/>
+                  <a:t>для </a:t>
+                </a:r>
+                <a:r>
+                  <a:rPr lang="ru-RU" dirty="0" err="1" smtClean="0"/>
+                  <a:t>коинтегрированных</a:t>
+                </a:r>
+                <a:r>
+                  <a:rPr lang="ru-RU" dirty="0" smtClean="0"/>
+                  <a:t> ВР - </a:t>
+                </a:r>
+                <a:r>
+                  <a:rPr lang="es-ES" b="1" dirty="0"/>
+                  <a:t>vector error correction model (VECM)</a:t>
+                </a:r>
+                <a:endParaRPr lang="ru-RU" b="1" dirty="0" smtClean="0"/>
+              </a:p>
+              <a:p>
+                <a:pPr marL="457200" lvl="1" indent="0">
+                  <a:lnSpc>
+                    <a:spcPct val="100000"/>
+                  </a:lnSpc>
+                  <a:spcBef>
+                    <a:spcPts val="200"/>
+                  </a:spcBef>
+                  <a:buNone/>
+                </a:pPr>
+                <a:r>
+                  <a:rPr lang="ru-RU" dirty="0" smtClean="0"/>
+                  <a:t>Тест матрицы </a:t>
+                </a:r>
+                <a:r>
+                  <a:rPr lang="en-US" b="1" dirty="0"/>
+                  <a:t>B</a:t>
+                </a:r>
+                <a:r>
+                  <a:rPr lang="ru-RU" dirty="0" smtClean="0"/>
+                  <a:t> – </a:t>
+                </a:r>
+                <a:r>
+                  <a:rPr lang="ru-RU" b="1" dirty="0" smtClean="0"/>
+                  <a:t>тест </a:t>
+                </a:r>
+                <a:r>
+                  <a:rPr lang="ru-RU" b="1" dirty="0" err="1" smtClean="0"/>
+                  <a:t>Йохансена</a:t>
+                </a:r>
+                <a:r>
+                  <a:rPr lang="ru-RU" b="1" dirty="0" smtClean="0"/>
+                  <a:t>.</a:t>
+                </a:r>
+                <a:endParaRPr lang="en-US" b="1" dirty="0"/>
+              </a:p>
+              <a:p>
+                <a:pPr>
+                  <a:lnSpc>
+                    <a:spcPct val="100000"/>
+                  </a:lnSpc>
+                  <a:spcBef>
+                    <a:spcPts val="200"/>
+                  </a:spcBef>
+                </a:pPr>
+                <a:endParaRPr lang="ru-RU" sz="2400" dirty="0"/>
+              </a:p>
+            </p:txBody>
+          </p:sp>
+        </mc:Choice>
+        <mc:Fallback>
+          <p:sp>
+            <p:nvSpPr>
+              <p:cNvPr id="3" name="Объект 2"/>
+              <p:cNvSpPr>
+                <a:spLocks noGrp="1" noRot="1" noChangeAspect="1" noMove="1" noResize="1" noEditPoints="1" noAdjustHandles="1" noChangeArrowheads="1" noChangeShapeType="1" noTextEdit="1"/>
+              </p:cNvSpPr>
+              <p:nvPr>
+                <p:ph idx="1"/>
+              </p:nvPr>
+            </p:nvSpPr>
+            <p:spPr>
+              <a:xfrm>
+                <a:off x="295729" y="986972"/>
+                <a:ext cx="11600542" cy="4972684"/>
+              </a:xfrm>
+              <a:blipFill>
+                <a:blip r:embed="rId2"/>
+                <a:stretch>
+                  <a:fillRect l="-683" t="-858" r="-315"/>
+                </a:stretch>
+              </a:blipFill>
+            </p:spPr>
+            <p:txBody>
+              <a:bodyPr/>
+              <a:lstStyle/>
+              <a:p>
+                <a:r>
+                  <a:rPr lang="ru-RU">
+                    <a:noFill/>
+                  </a:rPr>
+                  <a:t> </a:t>
+                </a:r>
+              </a:p>
+            </p:txBody>
+          </p:sp>
+        </mc:Fallback>
+      </mc:AlternateContent>
+      <p:sp>
+        <p:nvSpPr>
+          <p:cNvPr id="4" name="Прямоугольник 3"/>
+          <p:cNvSpPr/>
+          <p:nvPr/>
+        </p:nvSpPr>
+        <p:spPr>
+          <a:xfrm>
+            <a:off x="7715704" y="6317873"/>
+            <a:ext cx="4379725" cy="261610"/>
+          </a:xfrm>
+          <a:prstGeom prst="rect">
+            <a:avLst/>
+          </a:prstGeom>
+        </p:spPr>
+        <p:txBody>
+          <a:bodyPr wrap="none">
+            <a:spAutoFit/>
+          </a:bodyPr>
+          <a:lstStyle/>
+          <a:p>
+            <a:r>
+              <a:rPr lang="en-US" sz="1100" dirty="0" smtClean="0"/>
+              <a:t>https://www.numberanalytics.com/blog/cointegration-basics-time-series</a:t>
+            </a:r>
+            <a:endParaRPr lang="ru-RU" sz="1100" dirty="0"/>
+          </a:p>
+        </p:txBody>
+      </p:sp>
+      <p:sp>
+        <p:nvSpPr>
+          <p:cNvPr id="6" name="Прямоугольник 5"/>
+          <p:cNvSpPr/>
+          <p:nvPr/>
+        </p:nvSpPr>
+        <p:spPr>
+          <a:xfrm>
+            <a:off x="3413124" y="6613076"/>
+            <a:ext cx="8848271" cy="276999"/>
+          </a:xfrm>
+          <a:prstGeom prst="rect">
+            <a:avLst/>
+          </a:prstGeom>
+        </p:spPr>
+        <p:txBody>
+          <a:bodyPr wrap="square">
+            <a:spAutoFit/>
+          </a:bodyPr>
+          <a:lstStyle/>
+          <a:p>
+            <a:r>
+              <a:rPr lang="ru-RU" sz="1200" dirty="0"/>
+              <a:t>https://eodhd.com/financial-academy/portfolio-performance-examples/benchmark-tracking-and-cointegration-analysis-with-python</a:t>
+            </a:r>
+          </a:p>
+        </p:txBody>
+      </p:sp>
+      <p:sp>
+        <p:nvSpPr>
+          <p:cNvPr id="7" name="Прямоугольник 6"/>
+          <p:cNvSpPr/>
+          <p:nvPr/>
+        </p:nvSpPr>
+        <p:spPr>
+          <a:xfrm>
+            <a:off x="8122360" y="6082766"/>
+            <a:ext cx="4069640" cy="276999"/>
+          </a:xfrm>
+          <a:prstGeom prst="rect">
+            <a:avLst/>
+          </a:prstGeom>
+        </p:spPr>
+        <p:txBody>
+          <a:bodyPr wrap="none">
+            <a:spAutoFit/>
+          </a:bodyPr>
+          <a:lstStyle/>
+          <a:p>
+            <a:r>
+              <a:rPr lang="ru-RU" sz="1200" dirty="0" smtClean="0"/>
+              <a:t>https://www.econometrics-with-r.org/16.3-cointegration.html</a:t>
+            </a:r>
+            <a:endParaRPr lang="ru-RU" sz="1200" dirty="0"/>
+          </a:p>
+        </p:txBody>
+      </p:sp>
+      <p:sp>
+        <p:nvSpPr>
+          <p:cNvPr id="8" name="Прямоугольник 7"/>
+          <p:cNvSpPr/>
+          <p:nvPr/>
+        </p:nvSpPr>
+        <p:spPr>
+          <a:xfrm>
+            <a:off x="461430" y="5954099"/>
+            <a:ext cx="1960601" cy="369332"/>
+          </a:xfrm>
+          <a:prstGeom prst="rect">
+            <a:avLst/>
+          </a:prstGeom>
+        </p:spPr>
+        <p:txBody>
+          <a:bodyPr wrap="none">
+            <a:spAutoFit/>
+          </a:bodyPr>
+          <a:lstStyle/>
+          <a:p>
+            <a:r>
+              <a:rPr lang="ru-RU" b="1" dirty="0" smtClean="0"/>
+              <a:t>Интуиция </a:t>
+            </a:r>
+            <a:r>
+              <a:rPr lang="es-ES" b="1" dirty="0" smtClean="0"/>
+              <a:t>VECM</a:t>
+            </a:r>
+            <a:r>
+              <a:rPr lang="ru-RU" b="1" dirty="0" smtClean="0"/>
+              <a:t> - </a:t>
+            </a:r>
+            <a:endParaRPr lang="ru-RU" dirty="0"/>
+          </a:p>
+        </p:txBody>
+      </p:sp>
+    </p:spTree>
+    <p:extLst>
+      <p:ext uri="{BB962C8B-B14F-4D97-AF65-F5344CB8AC3E}">
+        <p14:creationId xmlns:p14="http://schemas.microsoft.com/office/powerpoint/2010/main" val="3617524500"/>
+      </p:ext>
+    </p:extLst>
+  </p:cSld>
+  <p:clrMapOvr>
+    <a:masterClrMapping/>
+  </p:clrMapOvr>
+  <p:timing>
+    <p:tnLst>
+      <p:par>
+        <p:cTn id="1" dur="indefinite" restart="never" nodeType="tmRoot"/>
+      </p:par>
+    </p:tnLst>
+  </p:timing>
+</p:sld>
+</file>
+
+<file path=ppt/slides/slide9.xml><?xml version="1.0" encoding="utf-8"?>
+<p:sld xmlns:a="http://schemas.openxmlformats.org/drawingml/2006/main" xmlns:r="http://schemas.openxmlformats.org/officeDocument/2006/relationships" xmlns:p="http://schemas.openxmlformats.org/presentationml/2006/main" show="0">
+  <p:cSld>
+    <p:spTree>
+      <p:nvGrpSpPr>
+        <p:cNvPr id="1" name=""/>
+        <p:cNvGrpSpPr/>
+        <p:nvPr/>
+      </p:nvGrpSpPr>
+      <p:grpSpPr>
+        <a:xfrm>
+          <a:off x="0" y="0"/>
+          <a:ext cx="0" cy="0"/>
+          <a:chOff x="0" y="0"/>
+          <a:chExt cx="0" cy="0"/>
+        </a:xfrm>
+      </p:grpSpPr>
+      <p:sp>
+        <p:nvSpPr>
+          <p:cNvPr id="2" name="Заголовок 1"/>
+          <p:cNvSpPr>
+            <a:spLocks noGrp="1"/>
+          </p:cNvSpPr>
+          <p:nvPr>
+            <p:ph type="title"/>
+          </p:nvPr>
+        </p:nvSpPr>
+        <p:spPr/>
+        <p:txBody>
+          <a:bodyPr/>
+          <a:lstStyle/>
+          <a:p>
+            <a:r>
+              <a:rPr lang="ru-RU" dirty="0" smtClean="0"/>
+              <a:t>Типы многомерных ВР</a:t>
+            </a:r>
+            <a:endParaRPr lang="ru-RU" dirty="0"/>
+          </a:p>
+        </p:txBody>
+      </p:sp>
+      <p:graphicFrame>
+        <p:nvGraphicFramePr>
+          <p:cNvPr id="4" name="Объект 3"/>
+          <p:cNvGraphicFramePr>
+            <a:graphicFrameLocks noGrp="1"/>
+          </p:cNvGraphicFramePr>
+          <p:nvPr>
+            <p:ph idx="1"/>
+            <p:extLst>
+              <p:ext uri="{D42A27DB-BD31-4B8C-83A1-F6EECF244321}">
+                <p14:modId xmlns:p14="http://schemas.microsoft.com/office/powerpoint/2010/main" val="2486582924"/>
+              </p:ext>
+            </p:extLst>
+          </p:nvPr>
+        </p:nvGraphicFramePr>
+        <p:xfrm>
+          <a:off x="374649" y="1437483"/>
+          <a:ext cx="11198225" cy="2486025"/>
+        </p:xfrm>
+        <a:graphic>
+          <a:graphicData uri="http://schemas.openxmlformats.org/drawingml/2006/table">
+            <a:tbl>
+              <a:tblPr/>
+              <a:tblGrid>
+                <a:gridCol w="2435226">
+                  <a:extLst>
+                    <a:ext uri="{9D8B030D-6E8A-4147-A177-3AD203B41FA5}">
+                      <a16:colId xmlns:a16="http://schemas.microsoft.com/office/drawing/2014/main" val="1298172271"/>
+                    </a:ext>
+                  </a:extLst>
+                </a:gridCol>
+                <a:gridCol w="5038725">
+                  <a:extLst>
+                    <a:ext uri="{9D8B030D-6E8A-4147-A177-3AD203B41FA5}">
+                      <a16:colId xmlns:a16="http://schemas.microsoft.com/office/drawing/2014/main" val="2225433765"/>
+                    </a:ext>
+                  </a:extLst>
+                </a:gridCol>
+                <a:gridCol w="3724274">
+                  <a:extLst>
+                    <a:ext uri="{9D8B030D-6E8A-4147-A177-3AD203B41FA5}">
+                      <a16:colId xmlns:a16="http://schemas.microsoft.com/office/drawing/2014/main" val="3005667624"/>
+                    </a:ext>
+                  </a:extLst>
+                </a:gridCol>
+              </a:tblGrid>
+              <a:tr h="61520">
+                <a:tc>
+                  <a:txBody>
+                    <a:bodyPr/>
+                    <a:lstStyle/>
+                    <a:p>
+                      <a:pPr algn="l" fontAlgn="b"/>
+                      <a:r>
+                        <a:rPr lang="ru-RU" sz="2000" b="0" i="0" u="none" strike="noStrike" dirty="0">
+                          <a:solidFill>
+                            <a:srgbClr val="000000"/>
+                          </a:solidFill>
+                          <a:effectLst/>
+                          <a:latin typeface="Calibri" panose="020F0502020204030204" pitchFamily="34" charset="0"/>
+                        </a:rPr>
+                        <a:t>Тип</a:t>
+                      </a:r>
+                    </a:p>
+                  </a:txBody>
+                  <a:tcPr marL="9525" marR="9525" marT="9525" marB="0" anchor="b">
+                    <a:lnL w="12700" cap="flat" cmpd="sng" algn="ctr">
+                      <a:solidFill>
+                        <a:schemeClr val="tx1"/>
+                      </a:solidFill>
+                      <a:prstDash val="solid"/>
+                      <a:round/>
+                      <a:headEnd type="none" w="med" len="med"/>
+                      <a:tailEnd type="none" w="med" len="med"/>
+                    </a:lnL>
+                    <a:lnR w="12700" cap="flat" cmpd="sng" algn="ctr">
+                      <a:solidFill>
+                        <a:schemeClr val="tx1"/>
+                      </a:solidFill>
+                      <a:prstDash val="solid"/>
+                      <a:round/>
+                      <a:headEnd type="none" w="med" len="med"/>
+                      <a:tailEnd type="none" w="med" len="med"/>
+                    </a:lnR>
+                    <a:lnT w="12700" cap="flat" cmpd="sng" algn="ctr">
+                      <a:solidFill>
+                        <a:schemeClr val="tx1"/>
+                      </a:solidFill>
+                      <a:prstDash val="solid"/>
+                      <a:round/>
+                      <a:headEnd type="none" w="med" len="med"/>
+                      <a:tailEnd type="none" w="med" len="med"/>
+                    </a:lnT>
+                    <a:lnB w="12700" cap="flat" cmpd="sng" algn="ctr">
+                      <a:solidFill>
+                        <a:schemeClr val="tx1"/>
+                      </a:solidFill>
+                      <a:prstDash val="solid"/>
+                      <a:round/>
+                      <a:headEnd type="none" w="med" len="med"/>
+                      <a:tailEnd type="none" w="med" len="med"/>
+                    </a:lnB>
+                  </a:tcPr>
+                </a:tc>
+                <a:tc>
+                  <a:txBody>
+                    <a:bodyPr/>
+                    <a:lstStyle/>
+                    <a:p>
+                      <a:pPr algn="l" fontAlgn="b"/>
+                      <a:r>
+                        <a:rPr lang="ru-RU" sz="2000" b="0" i="0" u="none" strike="noStrike">
+                          <a:solidFill>
+                            <a:srgbClr val="000000"/>
+                          </a:solidFill>
+                          <a:effectLst/>
+                          <a:latin typeface="Calibri" panose="020F0502020204030204" pitchFamily="34" charset="0"/>
+                        </a:rPr>
+                        <a:t>Описание</a:t>
+                      </a:r>
+                    </a:p>
+                  </a:txBody>
+                  <a:tcPr marL="9525" marR="9525" marT="9525" marB="0" anchor="b">
+                    <a:lnL w="12700" cap="flat" cmpd="sng" algn="ctr">
+                      <a:solidFill>
+                        <a:schemeClr val="tx1"/>
+                      </a:solidFill>
+                      <a:prstDash val="solid"/>
+                      <a:round/>
+                      <a:headEnd type="none" w="med" len="med"/>
+                      <a:tailEnd type="none" w="med" len="med"/>
+                    </a:lnL>
+                    <a:lnR w="12700" cap="flat" cmpd="sng" algn="ctr">
+                      <a:solidFill>
+                        <a:schemeClr val="tx1"/>
+                      </a:solidFill>
+                      <a:prstDash val="solid"/>
+                      <a:round/>
+                      <a:headEnd type="none" w="med" len="med"/>
+                      <a:tailEnd type="none" w="med" len="med"/>
+                    </a:lnR>
+                    <a:lnT w="12700" cap="flat" cmpd="sng" algn="ctr">
+                      <a:solidFill>
+                        <a:schemeClr val="tx1"/>
+                      </a:solidFill>
+                      <a:prstDash val="solid"/>
+                      <a:round/>
+                      <a:headEnd type="none" w="med" len="med"/>
+                      <a:tailEnd type="none" w="med" len="med"/>
+                    </a:lnT>
+                    <a:lnB w="12700" cap="flat" cmpd="sng" algn="ctr">
+                      <a:solidFill>
+                        <a:schemeClr val="tx1"/>
+                      </a:solidFill>
+                      <a:prstDash val="solid"/>
+                      <a:round/>
+                      <a:headEnd type="none" w="med" len="med"/>
+                      <a:tailEnd type="none" w="med" len="med"/>
+                    </a:lnB>
+                  </a:tcPr>
+                </a:tc>
+                <a:tc>
+                  <a:txBody>
+                    <a:bodyPr/>
+                    <a:lstStyle/>
+                    <a:p>
+                      <a:pPr algn="l" fontAlgn="b"/>
+                      <a:r>
+                        <a:rPr lang="ru-RU" sz="2000" b="0" i="0" u="none" strike="noStrike">
+                          <a:solidFill>
+                            <a:srgbClr val="000000"/>
+                          </a:solidFill>
+                          <a:effectLst/>
+                          <a:latin typeface="Calibri" panose="020F0502020204030204" pitchFamily="34" charset="0"/>
+                        </a:rPr>
+                        <a:t>Пример</a:t>
+                      </a:r>
+                    </a:p>
+                  </a:txBody>
+                  <a:tcPr marL="9525" marR="9525" marT="9525" marB="0" anchor="b">
+                    <a:lnL w="12700" cap="flat" cmpd="sng" algn="ctr">
+                      <a:solidFill>
+                        <a:schemeClr val="tx1"/>
+                      </a:solidFill>
+                      <a:prstDash val="solid"/>
+                      <a:round/>
+                      <a:headEnd type="none" w="med" len="med"/>
+                      <a:tailEnd type="none" w="med" len="med"/>
+                    </a:lnL>
+                    <a:lnR w="12700" cap="flat" cmpd="sng" algn="ctr">
+                      <a:solidFill>
+                        <a:schemeClr val="tx1"/>
+                      </a:solidFill>
+                      <a:prstDash val="solid"/>
+                      <a:round/>
+                      <a:headEnd type="none" w="med" len="med"/>
+                      <a:tailEnd type="none" w="med" len="med"/>
+                    </a:lnR>
+                    <a:lnT w="12700" cap="flat" cmpd="sng" algn="ctr">
+                      <a:solidFill>
+                        <a:schemeClr val="tx1"/>
+                      </a:solidFill>
+                      <a:prstDash val="solid"/>
+                      <a:round/>
+                      <a:headEnd type="none" w="med" len="med"/>
+                      <a:tailEnd type="none" w="med" len="med"/>
+                    </a:lnT>
+                    <a:lnB w="12700" cap="flat" cmpd="sng" algn="ctr">
+                      <a:solidFill>
+                        <a:schemeClr val="tx1"/>
+                      </a:solidFill>
+                      <a:prstDash val="solid"/>
+                      <a:round/>
+                      <a:headEnd type="none" w="med" len="med"/>
+                      <a:tailEnd type="none" w="med" len="med"/>
+                    </a:lnB>
+                  </a:tcPr>
+                </a:tc>
+                <a:extLst>
+                  <a:ext uri="{0D108BD9-81ED-4DB2-BD59-A6C34878D82A}">
+                    <a16:rowId xmlns:a16="http://schemas.microsoft.com/office/drawing/2014/main" val="890436517"/>
+                  </a:ext>
+                </a:extLst>
+              </a:tr>
+              <a:tr h="121176">
+                <a:tc>
+                  <a:txBody>
+                    <a:bodyPr/>
+                    <a:lstStyle/>
+                    <a:p>
+                      <a:pPr algn="l" fontAlgn="b"/>
+                      <a:r>
+                        <a:rPr lang="ru-RU" sz="2000" b="0" i="0" u="none" strike="noStrike" dirty="0">
+                          <a:solidFill>
+                            <a:srgbClr val="000000"/>
+                          </a:solidFill>
+                          <a:effectLst/>
+                          <a:latin typeface="Calibri" panose="020F0502020204030204" pitchFamily="34" charset="0"/>
+                        </a:rPr>
+                        <a:t>Связанные ряды</a:t>
+                      </a:r>
+                    </a:p>
+                  </a:txBody>
+                  <a:tcPr marL="9525" marR="9525" marT="9525" marB="0" anchor="b">
+                    <a:lnL w="12700" cap="flat" cmpd="sng" algn="ctr">
+                      <a:solidFill>
+                        <a:schemeClr val="tx1"/>
+                      </a:solidFill>
+                      <a:prstDash val="solid"/>
+                      <a:round/>
+                      <a:headEnd type="none" w="med" len="med"/>
+                      <a:tailEnd type="none" w="med" len="med"/>
+                    </a:lnL>
+                    <a:lnR w="12700" cap="flat" cmpd="sng" algn="ctr">
+                      <a:solidFill>
+                        <a:schemeClr val="tx1"/>
+                      </a:solidFill>
+                      <a:prstDash val="solid"/>
+                      <a:round/>
+                      <a:headEnd type="none" w="med" len="med"/>
+                      <a:tailEnd type="none" w="med" len="med"/>
+                    </a:lnR>
+                    <a:lnT w="12700" cap="flat" cmpd="sng" algn="ctr">
+                      <a:solidFill>
+                        <a:schemeClr val="tx1"/>
+                      </a:solidFill>
+                      <a:prstDash val="solid"/>
+                      <a:round/>
+                      <a:headEnd type="none" w="med" len="med"/>
+                      <a:tailEnd type="none" w="med" len="med"/>
+                    </a:lnT>
+                    <a:lnB w="12700" cap="flat" cmpd="sng" algn="ctr">
+                      <a:solidFill>
+                        <a:schemeClr val="tx1"/>
+                      </a:solidFill>
+                      <a:prstDash val="solid"/>
+                      <a:round/>
+                      <a:headEnd type="none" w="med" len="med"/>
+                      <a:tailEnd type="none" w="med" len="med"/>
+                    </a:lnB>
+                  </a:tcPr>
+                </a:tc>
+                <a:tc>
+                  <a:txBody>
+                    <a:bodyPr/>
+                    <a:lstStyle/>
+                    <a:p>
+                      <a:pPr algn="l" fontAlgn="b"/>
+                      <a:r>
+                        <a:rPr lang="ru-RU" sz="2000" b="0" i="0" u="none" strike="noStrike" dirty="0">
+                          <a:solidFill>
+                            <a:srgbClr val="000000"/>
+                          </a:solidFill>
+                          <a:effectLst/>
+                          <a:latin typeface="Calibri" panose="020F0502020204030204" pitchFamily="34" charset="0"/>
+                        </a:rPr>
+                        <a:t>Переменные влияют друг на друга</a:t>
+                      </a:r>
+                    </a:p>
+                  </a:txBody>
+                  <a:tcPr marL="9525" marR="9525" marT="9525" marB="0" anchor="b">
+                    <a:lnL w="12700" cap="flat" cmpd="sng" algn="ctr">
+                      <a:solidFill>
+                        <a:schemeClr val="tx1"/>
+                      </a:solidFill>
+                      <a:prstDash val="solid"/>
+                      <a:round/>
+                      <a:headEnd type="none" w="med" len="med"/>
+                      <a:tailEnd type="none" w="med" len="med"/>
+                    </a:lnL>
+                    <a:lnR w="12700" cap="flat" cmpd="sng" algn="ctr">
+                      <a:solidFill>
+                        <a:schemeClr val="tx1"/>
+                      </a:solidFill>
+                      <a:prstDash val="solid"/>
+                      <a:round/>
+                      <a:headEnd type="none" w="med" len="med"/>
+                      <a:tailEnd type="none" w="med" len="med"/>
+                    </a:lnR>
+                    <a:lnT w="12700" cap="flat" cmpd="sng" algn="ctr">
+                      <a:solidFill>
+                        <a:schemeClr val="tx1"/>
+                      </a:solidFill>
+                      <a:prstDash val="solid"/>
+                      <a:round/>
+                      <a:headEnd type="none" w="med" len="med"/>
+                      <a:tailEnd type="none" w="med" len="med"/>
+                    </a:lnT>
+                    <a:lnB w="12700" cap="flat" cmpd="sng" algn="ctr">
+                      <a:solidFill>
+                        <a:schemeClr val="tx1"/>
+                      </a:solidFill>
+                      <a:prstDash val="solid"/>
+                      <a:round/>
+                      <a:headEnd type="none" w="med" len="med"/>
+                      <a:tailEnd type="none" w="med" len="med"/>
+                    </a:lnB>
+                  </a:tcPr>
+                </a:tc>
+                <a:tc>
+                  <a:txBody>
+                    <a:bodyPr/>
+                    <a:lstStyle/>
+                    <a:p>
+                      <a:pPr algn="l" fontAlgn="b"/>
+                      <a:r>
+                        <a:rPr lang="ru-RU" sz="2000" b="0" i="0" u="none" strike="noStrike">
+                          <a:solidFill>
+                            <a:srgbClr val="000000"/>
+                          </a:solidFill>
+                          <a:effectLst/>
+                          <a:latin typeface="Calibri" panose="020F0502020204030204" pitchFamily="34" charset="0"/>
+                        </a:rPr>
+                        <a:t>Температура и давление в реакторе</a:t>
+                      </a:r>
+                    </a:p>
+                  </a:txBody>
+                  <a:tcPr marL="9525" marR="9525" marT="9525" marB="0" anchor="b">
+                    <a:lnL w="12700" cap="flat" cmpd="sng" algn="ctr">
+                      <a:solidFill>
+                        <a:schemeClr val="tx1"/>
+                      </a:solidFill>
+                      <a:prstDash val="solid"/>
+                      <a:round/>
+                      <a:headEnd type="none" w="med" len="med"/>
+                      <a:tailEnd type="none" w="med" len="med"/>
+                    </a:lnL>
+                    <a:lnR w="12700" cap="flat" cmpd="sng" algn="ctr">
+                      <a:solidFill>
+                        <a:schemeClr val="tx1"/>
+                      </a:solidFill>
+                      <a:prstDash val="solid"/>
+                      <a:round/>
+                      <a:headEnd type="none" w="med" len="med"/>
+                      <a:tailEnd type="none" w="med" len="med"/>
+                    </a:lnR>
+                    <a:lnT w="12700" cap="flat" cmpd="sng" algn="ctr">
+                      <a:solidFill>
+                        <a:schemeClr val="tx1"/>
+                      </a:solidFill>
+                      <a:prstDash val="solid"/>
+                      <a:round/>
+                      <a:headEnd type="none" w="med" len="med"/>
+                      <a:tailEnd type="none" w="med" len="med"/>
+                    </a:lnT>
+                    <a:lnB w="12700" cap="flat" cmpd="sng" algn="ctr">
+                      <a:solidFill>
+                        <a:schemeClr val="tx1"/>
+                      </a:solidFill>
+                      <a:prstDash val="solid"/>
+                      <a:round/>
+                      <a:headEnd type="none" w="med" len="med"/>
+                      <a:tailEnd type="none" w="med" len="med"/>
+                    </a:lnB>
+                  </a:tcPr>
+                </a:tc>
+                <a:extLst>
+                  <a:ext uri="{0D108BD9-81ED-4DB2-BD59-A6C34878D82A}">
+                    <a16:rowId xmlns:a16="http://schemas.microsoft.com/office/drawing/2014/main" val="3894701474"/>
+                  </a:ext>
+                </a:extLst>
+              </a:tr>
+              <a:tr h="61520">
+                <a:tc>
+                  <a:txBody>
+                    <a:bodyPr/>
+                    <a:lstStyle/>
+                    <a:p>
+                      <a:pPr algn="l" fontAlgn="b"/>
+                      <a:r>
+                        <a:rPr lang="ru-RU" sz="2000" b="0" i="0" u="none" strike="noStrike" dirty="0">
+                          <a:solidFill>
+                            <a:srgbClr val="000000"/>
+                          </a:solidFill>
+                          <a:effectLst/>
+                          <a:latin typeface="Calibri" panose="020F0502020204030204" pitchFamily="34" charset="0"/>
+                        </a:rPr>
+                        <a:t>Многосерийные ряды</a:t>
+                      </a:r>
+                    </a:p>
+                  </a:txBody>
+                  <a:tcPr marL="9525" marR="9525" marT="9525" marB="0" anchor="b">
+                    <a:lnL w="12700" cap="flat" cmpd="sng" algn="ctr">
+                      <a:solidFill>
+                        <a:schemeClr val="tx1"/>
+                      </a:solidFill>
+                      <a:prstDash val="solid"/>
+                      <a:round/>
+                      <a:headEnd type="none" w="med" len="med"/>
+                      <a:tailEnd type="none" w="med" len="med"/>
+                    </a:lnL>
+                    <a:lnR w="12700" cap="flat" cmpd="sng" algn="ctr">
+                      <a:solidFill>
+                        <a:schemeClr val="tx1"/>
+                      </a:solidFill>
+                      <a:prstDash val="solid"/>
+                      <a:round/>
+                      <a:headEnd type="none" w="med" len="med"/>
+                      <a:tailEnd type="none" w="med" len="med"/>
+                    </a:lnR>
+                    <a:lnT w="12700" cap="flat" cmpd="sng" algn="ctr">
+                      <a:solidFill>
+                        <a:schemeClr val="tx1"/>
+                      </a:solidFill>
+                      <a:prstDash val="solid"/>
+                      <a:round/>
+                      <a:headEnd type="none" w="med" len="med"/>
+                      <a:tailEnd type="none" w="med" len="med"/>
+                    </a:lnT>
+                    <a:lnB w="12700" cap="flat" cmpd="sng" algn="ctr">
+                      <a:solidFill>
+                        <a:schemeClr val="tx1"/>
+                      </a:solidFill>
+                      <a:prstDash val="solid"/>
+                      <a:round/>
+                      <a:headEnd type="none" w="med" len="med"/>
+                      <a:tailEnd type="none" w="med" len="med"/>
+                    </a:lnB>
+                  </a:tcPr>
+                </a:tc>
+                <a:tc>
+                  <a:txBody>
+                    <a:bodyPr/>
+                    <a:lstStyle/>
+                    <a:p>
+                      <a:pPr algn="l" fontAlgn="b"/>
+                      <a:r>
+                        <a:rPr lang="ru-RU" sz="2000" b="0" i="0" u="none" strike="noStrike" dirty="0">
+                          <a:solidFill>
+                            <a:srgbClr val="000000"/>
+                          </a:solidFill>
+                          <a:effectLst/>
+                          <a:latin typeface="Calibri" panose="020F0502020204030204" pitchFamily="34" charset="0"/>
+                        </a:rPr>
+                        <a:t>Много независимых рядов (одномерных)</a:t>
+                      </a:r>
+                    </a:p>
+                  </a:txBody>
+                  <a:tcPr marL="9525" marR="9525" marT="9525" marB="0" anchor="b">
+                    <a:lnL w="12700" cap="flat" cmpd="sng" algn="ctr">
+                      <a:solidFill>
+                        <a:schemeClr val="tx1"/>
+                      </a:solidFill>
+                      <a:prstDash val="solid"/>
+                      <a:round/>
+                      <a:headEnd type="none" w="med" len="med"/>
+                      <a:tailEnd type="none" w="med" len="med"/>
+                    </a:lnL>
+                    <a:lnR w="12700" cap="flat" cmpd="sng" algn="ctr">
+                      <a:solidFill>
+                        <a:schemeClr val="tx1"/>
+                      </a:solidFill>
+                      <a:prstDash val="solid"/>
+                      <a:round/>
+                      <a:headEnd type="none" w="med" len="med"/>
+                      <a:tailEnd type="none" w="med" len="med"/>
+                    </a:lnR>
+                    <a:lnT w="12700" cap="flat" cmpd="sng" algn="ctr">
+                      <a:solidFill>
+                        <a:schemeClr val="tx1"/>
+                      </a:solidFill>
+                      <a:prstDash val="solid"/>
+                      <a:round/>
+                      <a:headEnd type="none" w="med" len="med"/>
+                      <a:tailEnd type="none" w="med" len="med"/>
+                    </a:lnT>
+                    <a:lnB w="12700" cap="flat" cmpd="sng" algn="ctr">
+                      <a:solidFill>
+                        <a:schemeClr val="tx1"/>
+                      </a:solidFill>
+                      <a:prstDash val="solid"/>
+                      <a:round/>
+                      <a:headEnd type="none" w="med" len="med"/>
+                      <a:tailEnd type="none" w="med" len="med"/>
+                    </a:lnB>
+                  </a:tcPr>
+                </a:tc>
+                <a:tc>
+                  <a:txBody>
+                    <a:bodyPr/>
+                    <a:lstStyle/>
+                    <a:p>
+                      <a:pPr algn="l" fontAlgn="b"/>
+                      <a:r>
+                        <a:rPr lang="ru-RU" sz="2000" b="0" i="0" u="none" strike="noStrike">
+                          <a:solidFill>
+                            <a:srgbClr val="000000"/>
+                          </a:solidFill>
+                          <a:effectLst/>
+                          <a:latin typeface="Calibri" panose="020F0502020204030204" pitchFamily="34" charset="0"/>
+                        </a:rPr>
+                        <a:t>Продажи по 100 магазинам</a:t>
+                      </a:r>
+                    </a:p>
+                  </a:txBody>
+                  <a:tcPr marL="9525" marR="9525" marT="9525" marB="0" anchor="b">
+                    <a:lnL w="12700" cap="flat" cmpd="sng" algn="ctr">
+                      <a:solidFill>
+                        <a:schemeClr val="tx1"/>
+                      </a:solidFill>
+                      <a:prstDash val="solid"/>
+                      <a:round/>
+                      <a:headEnd type="none" w="med" len="med"/>
+                      <a:tailEnd type="none" w="med" len="med"/>
+                    </a:lnL>
+                    <a:lnR w="12700" cap="flat" cmpd="sng" algn="ctr">
+                      <a:solidFill>
+                        <a:schemeClr val="tx1"/>
+                      </a:solidFill>
+                      <a:prstDash val="solid"/>
+                      <a:round/>
+                      <a:headEnd type="none" w="med" len="med"/>
+                      <a:tailEnd type="none" w="med" len="med"/>
+                    </a:lnR>
+                    <a:lnT w="12700" cap="flat" cmpd="sng" algn="ctr">
+                      <a:solidFill>
+                        <a:schemeClr val="tx1"/>
+                      </a:solidFill>
+                      <a:prstDash val="solid"/>
+                      <a:round/>
+                      <a:headEnd type="none" w="med" len="med"/>
+                      <a:tailEnd type="none" w="med" len="med"/>
+                    </a:lnT>
+                    <a:lnB w="12700" cap="flat" cmpd="sng" algn="ctr">
+                      <a:solidFill>
+                        <a:schemeClr val="tx1"/>
+                      </a:solidFill>
+                      <a:prstDash val="solid"/>
+                      <a:round/>
+                      <a:headEnd type="none" w="med" len="med"/>
+                      <a:tailEnd type="none" w="med" len="med"/>
+                    </a:lnB>
+                  </a:tcPr>
+                </a:tc>
+                <a:extLst>
+                  <a:ext uri="{0D108BD9-81ED-4DB2-BD59-A6C34878D82A}">
+                    <a16:rowId xmlns:a16="http://schemas.microsoft.com/office/drawing/2014/main" val="4181196808"/>
+                  </a:ext>
+                </a:extLst>
+              </a:tr>
+              <a:tr h="121176">
+                <a:tc>
+                  <a:txBody>
+                    <a:bodyPr/>
+                    <a:lstStyle/>
+                    <a:p>
+                      <a:pPr algn="l" fontAlgn="b"/>
+                      <a:r>
+                        <a:rPr lang="ru-RU" sz="2000" b="0" i="0" u="none" strike="noStrike" dirty="0">
+                          <a:solidFill>
+                            <a:srgbClr val="000000"/>
+                          </a:solidFill>
+                          <a:effectLst/>
+                          <a:latin typeface="Calibri" panose="020F0502020204030204" pitchFamily="34" charset="0"/>
+                        </a:rPr>
+                        <a:t>Пространственно-временные поля</a:t>
+                      </a:r>
+                    </a:p>
+                  </a:txBody>
+                  <a:tcPr marL="9525" marR="9525" marT="9525" marB="0" anchor="b">
+                    <a:lnL w="12700" cap="flat" cmpd="sng" algn="ctr">
+                      <a:solidFill>
+                        <a:schemeClr val="tx1"/>
+                      </a:solidFill>
+                      <a:prstDash val="solid"/>
+                      <a:round/>
+                      <a:headEnd type="none" w="med" len="med"/>
+                      <a:tailEnd type="none" w="med" len="med"/>
+                    </a:lnL>
+                    <a:lnR w="12700" cap="flat" cmpd="sng" algn="ctr">
+                      <a:solidFill>
+                        <a:schemeClr val="tx1"/>
+                      </a:solidFill>
+                      <a:prstDash val="solid"/>
+                      <a:round/>
+                      <a:headEnd type="none" w="med" len="med"/>
+                      <a:tailEnd type="none" w="med" len="med"/>
+                    </a:lnR>
+                    <a:lnT w="12700" cap="flat" cmpd="sng" algn="ctr">
+                      <a:solidFill>
+                        <a:schemeClr val="tx1"/>
+                      </a:solidFill>
+                      <a:prstDash val="solid"/>
+                      <a:round/>
+                      <a:headEnd type="none" w="med" len="med"/>
+                      <a:tailEnd type="none" w="med" len="med"/>
+                    </a:lnT>
+                    <a:lnB w="12700" cap="flat" cmpd="sng" algn="ctr">
+                      <a:solidFill>
+                        <a:schemeClr val="tx1"/>
+                      </a:solidFill>
+                      <a:prstDash val="solid"/>
+                      <a:round/>
+                      <a:headEnd type="none" w="med" len="med"/>
+                      <a:tailEnd type="none" w="med" len="med"/>
+                    </a:lnB>
+                  </a:tcPr>
+                </a:tc>
+                <a:tc>
+                  <a:txBody>
+                    <a:bodyPr/>
+                    <a:lstStyle/>
+                    <a:p>
+                      <a:pPr algn="l" fontAlgn="b"/>
+                      <a:r>
+                        <a:rPr lang="ru-RU" sz="2000" b="0" i="0" u="none" strike="noStrike" dirty="0">
+                          <a:solidFill>
+                            <a:srgbClr val="000000"/>
+                          </a:solidFill>
+                          <a:effectLst/>
+                          <a:latin typeface="Calibri" panose="020F0502020204030204" pitchFamily="34" charset="0"/>
+                        </a:rPr>
+                        <a:t>Данные на сетке (</a:t>
+                      </a:r>
+                      <a:r>
+                        <a:rPr lang="ru-RU" sz="2000" b="0" i="0" u="none" strike="noStrike" dirty="0" err="1">
+                          <a:solidFill>
+                            <a:srgbClr val="000000"/>
+                          </a:solidFill>
+                          <a:effectLst/>
+                          <a:latin typeface="Calibri" panose="020F0502020204030204" pitchFamily="34" charset="0"/>
+                        </a:rPr>
+                        <a:t>гео</a:t>
+                      </a:r>
+                      <a:r>
+                        <a:rPr lang="ru-RU" sz="2000" b="0" i="0" u="none" strike="noStrike" dirty="0">
+                          <a:solidFill>
+                            <a:srgbClr val="000000"/>
+                          </a:solidFill>
+                          <a:effectLst/>
+                          <a:latin typeface="Calibri" panose="020F0502020204030204" pitchFamily="34" charset="0"/>
+                        </a:rPr>
+                        <a:t>, датчики)</a:t>
+                      </a:r>
+                    </a:p>
+                  </a:txBody>
+                  <a:tcPr marL="9525" marR="9525" marT="9525" marB="0" anchor="b">
+                    <a:lnL w="12700" cap="flat" cmpd="sng" algn="ctr">
+                      <a:solidFill>
+                        <a:schemeClr val="tx1"/>
+                      </a:solidFill>
+                      <a:prstDash val="solid"/>
+                      <a:round/>
+                      <a:headEnd type="none" w="med" len="med"/>
+                      <a:tailEnd type="none" w="med" len="med"/>
+                    </a:lnL>
+                    <a:lnR w="12700" cap="flat" cmpd="sng" algn="ctr">
+                      <a:solidFill>
+                        <a:schemeClr val="tx1"/>
+                      </a:solidFill>
+                      <a:prstDash val="solid"/>
+                      <a:round/>
+                      <a:headEnd type="none" w="med" len="med"/>
+                      <a:tailEnd type="none" w="med" len="med"/>
+                    </a:lnR>
+                    <a:lnT w="12700" cap="flat" cmpd="sng" algn="ctr">
+                      <a:solidFill>
+                        <a:schemeClr val="tx1"/>
+                      </a:solidFill>
+                      <a:prstDash val="solid"/>
+                      <a:round/>
+                      <a:headEnd type="none" w="med" len="med"/>
+                      <a:tailEnd type="none" w="med" len="med"/>
+                    </a:lnT>
+                    <a:lnB w="12700" cap="flat" cmpd="sng" algn="ctr">
+                      <a:solidFill>
+                        <a:schemeClr val="tx1"/>
+                      </a:solidFill>
+                      <a:prstDash val="solid"/>
+                      <a:round/>
+                      <a:headEnd type="none" w="med" len="med"/>
+                      <a:tailEnd type="none" w="med" len="med"/>
+                    </a:lnB>
+                  </a:tcPr>
+                </a:tc>
+                <a:tc>
+                  <a:txBody>
+                    <a:bodyPr/>
+                    <a:lstStyle/>
+                    <a:p>
+                      <a:pPr algn="l" fontAlgn="b"/>
+                      <a:r>
+                        <a:rPr lang="ru-RU" sz="2000" b="0" i="0" u="none" strike="noStrike" dirty="0">
+                          <a:solidFill>
+                            <a:srgbClr val="000000"/>
+                          </a:solidFill>
+                          <a:effectLst/>
+                          <a:latin typeface="Calibri" panose="020F0502020204030204" pitchFamily="34" charset="0"/>
+                        </a:rPr>
+                        <a:t>Температура по датчикам в цеху</a:t>
+                      </a:r>
+                    </a:p>
+                  </a:txBody>
+                  <a:tcPr marL="9525" marR="9525" marT="9525" marB="0" anchor="b">
+                    <a:lnL w="12700" cap="flat" cmpd="sng" algn="ctr">
+                      <a:solidFill>
+                        <a:schemeClr val="tx1"/>
+                      </a:solidFill>
+                      <a:prstDash val="solid"/>
+                      <a:round/>
+                      <a:headEnd type="none" w="med" len="med"/>
+                      <a:tailEnd type="none" w="med" len="med"/>
+                    </a:lnL>
+                    <a:lnR w="12700" cap="flat" cmpd="sng" algn="ctr">
+                      <a:solidFill>
+                        <a:schemeClr val="tx1"/>
+                      </a:solidFill>
+                      <a:prstDash val="solid"/>
+                      <a:round/>
+                      <a:headEnd type="none" w="med" len="med"/>
+                      <a:tailEnd type="none" w="med" len="med"/>
+                    </a:lnR>
+                    <a:lnT w="12700" cap="flat" cmpd="sng" algn="ctr">
+                      <a:solidFill>
+                        <a:schemeClr val="tx1"/>
+                      </a:solidFill>
+                      <a:prstDash val="solid"/>
+                      <a:round/>
+                      <a:headEnd type="none" w="med" len="med"/>
+                      <a:tailEnd type="none" w="med" len="med"/>
+                    </a:lnT>
+                    <a:lnB w="12700" cap="flat" cmpd="sng" algn="ctr">
+                      <a:solidFill>
+                        <a:schemeClr val="tx1"/>
+                      </a:solidFill>
+                      <a:prstDash val="solid"/>
+                      <a:round/>
+                      <a:headEnd type="none" w="med" len="med"/>
+                      <a:tailEnd type="none" w="med" len="med"/>
+                    </a:lnB>
+                  </a:tcPr>
+                </a:tc>
+                <a:extLst>
+                  <a:ext uri="{0D108BD9-81ED-4DB2-BD59-A6C34878D82A}">
+                    <a16:rowId xmlns:a16="http://schemas.microsoft.com/office/drawing/2014/main" val="3793687255"/>
+                  </a:ext>
+                </a:extLst>
+              </a:tr>
+              <a:tr h="121176">
+                <a:tc>
+                  <a:txBody>
+                    <a:bodyPr/>
+                    <a:lstStyle/>
+                    <a:p>
+                      <a:pPr algn="l" fontAlgn="b"/>
+                      <a:r>
+                        <a:rPr lang="ru-RU" sz="2000" b="0" i="0" u="none" strike="noStrike">
+                          <a:solidFill>
+                            <a:srgbClr val="000000"/>
+                          </a:solidFill>
+                          <a:effectLst/>
+                          <a:latin typeface="Calibri" panose="020F0502020204030204" pitchFamily="34" charset="0"/>
+                        </a:rPr>
+                        <a:t>С иерархией</a:t>
+                      </a:r>
+                    </a:p>
+                  </a:txBody>
+                  <a:tcPr marL="9525" marR="9525" marT="9525" marB="0" anchor="b">
+                    <a:lnL w="12700" cap="flat" cmpd="sng" algn="ctr">
+                      <a:solidFill>
+                        <a:schemeClr val="tx1"/>
+                      </a:solidFill>
+                      <a:prstDash val="solid"/>
+                      <a:round/>
+                      <a:headEnd type="none" w="med" len="med"/>
+                      <a:tailEnd type="none" w="med" len="med"/>
+                    </a:lnL>
+                    <a:lnR w="12700" cap="flat" cmpd="sng" algn="ctr">
+                      <a:solidFill>
+                        <a:schemeClr val="tx1"/>
+                      </a:solidFill>
+                      <a:prstDash val="solid"/>
+                      <a:round/>
+                      <a:headEnd type="none" w="med" len="med"/>
+                      <a:tailEnd type="none" w="med" len="med"/>
+                    </a:lnR>
+                    <a:lnT w="12700" cap="flat" cmpd="sng" algn="ctr">
+                      <a:solidFill>
+                        <a:schemeClr val="tx1"/>
+                      </a:solidFill>
+                      <a:prstDash val="solid"/>
+                      <a:round/>
+                      <a:headEnd type="none" w="med" len="med"/>
+                      <a:tailEnd type="none" w="med" len="med"/>
+                    </a:lnT>
+                    <a:lnB w="12700" cap="flat" cmpd="sng" algn="ctr">
+                      <a:solidFill>
+                        <a:schemeClr val="tx1"/>
+                      </a:solidFill>
+                      <a:prstDash val="solid"/>
+                      <a:round/>
+                      <a:headEnd type="none" w="med" len="med"/>
+                      <a:tailEnd type="none" w="med" len="med"/>
+                    </a:lnB>
+                  </a:tcPr>
+                </a:tc>
+                <a:tc>
+                  <a:txBody>
+                    <a:bodyPr/>
+                    <a:lstStyle/>
+                    <a:p>
+                      <a:pPr algn="l" fontAlgn="b"/>
+                      <a:r>
+                        <a:rPr lang="ru-RU" sz="2000" b="0" i="0" u="none" strike="noStrike">
+                          <a:solidFill>
+                            <a:srgbClr val="000000"/>
+                          </a:solidFill>
+                          <a:effectLst/>
+                          <a:latin typeface="Calibri" panose="020F0502020204030204" pitchFamily="34" charset="0"/>
+                        </a:rPr>
+                        <a:t>Ряды связаны иерархически (регион → магазин)</a:t>
+                      </a:r>
+                    </a:p>
+                  </a:txBody>
+                  <a:tcPr marL="9525" marR="9525" marT="9525" marB="0" anchor="b">
+                    <a:lnL w="12700" cap="flat" cmpd="sng" algn="ctr">
+                      <a:solidFill>
+                        <a:schemeClr val="tx1"/>
+                      </a:solidFill>
+                      <a:prstDash val="solid"/>
+                      <a:round/>
+                      <a:headEnd type="none" w="med" len="med"/>
+                      <a:tailEnd type="none" w="med" len="med"/>
+                    </a:lnL>
+                    <a:lnR w="12700" cap="flat" cmpd="sng" algn="ctr">
+                      <a:solidFill>
+                        <a:schemeClr val="tx1"/>
+                      </a:solidFill>
+                      <a:prstDash val="solid"/>
+                      <a:round/>
+                      <a:headEnd type="none" w="med" len="med"/>
+                      <a:tailEnd type="none" w="med" len="med"/>
+                    </a:lnR>
+                    <a:lnT w="12700" cap="flat" cmpd="sng" algn="ctr">
+                      <a:solidFill>
+                        <a:schemeClr val="tx1"/>
+                      </a:solidFill>
+                      <a:prstDash val="solid"/>
+                      <a:round/>
+                      <a:headEnd type="none" w="med" len="med"/>
+                      <a:tailEnd type="none" w="med" len="med"/>
+                    </a:lnT>
+                    <a:lnB w="12700" cap="flat" cmpd="sng" algn="ctr">
+                      <a:solidFill>
+                        <a:schemeClr val="tx1"/>
+                      </a:solidFill>
+                      <a:prstDash val="solid"/>
+                      <a:round/>
+                      <a:headEnd type="none" w="med" len="med"/>
+                      <a:tailEnd type="none" w="med" len="med"/>
+                    </a:lnB>
+                  </a:tcPr>
+                </a:tc>
+                <a:tc>
+                  <a:txBody>
+                    <a:bodyPr/>
+                    <a:lstStyle/>
+                    <a:p>
+                      <a:pPr algn="l" fontAlgn="b"/>
+                      <a:r>
+                        <a:rPr lang="ru-RU" sz="2000" b="0" i="0" u="none" strike="noStrike" dirty="0">
+                          <a:solidFill>
+                            <a:srgbClr val="000000"/>
+                          </a:solidFill>
+                          <a:effectLst/>
+                          <a:latin typeface="Calibri" panose="020F0502020204030204" pitchFamily="34" charset="0"/>
+                        </a:rPr>
+                        <a:t>Общие продажи → по магазинам</a:t>
+                      </a:r>
+                    </a:p>
+                  </a:txBody>
+                  <a:tcPr marL="9525" marR="9525" marT="9525" marB="0" anchor="b">
+                    <a:lnL w="12700" cap="flat" cmpd="sng" algn="ctr">
+                      <a:solidFill>
+                        <a:schemeClr val="tx1"/>
+                      </a:solidFill>
+                      <a:prstDash val="solid"/>
+                      <a:round/>
+                      <a:headEnd type="none" w="med" len="med"/>
+                      <a:tailEnd type="none" w="med" len="med"/>
+                    </a:lnL>
+                    <a:lnR w="12700" cap="flat" cmpd="sng" algn="ctr">
+                      <a:solidFill>
+                        <a:schemeClr val="tx1"/>
+                      </a:solidFill>
+                      <a:prstDash val="solid"/>
+                      <a:round/>
+                      <a:headEnd type="none" w="med" len="med"/>
+                      <a:tailEnd type="none" w="med" len="med"/>
+                    </a:lnR>
+                    <a:lnT w="12700" cap="flat" cmpd="sng" algn="ctr">
+                      <a:solidFill>
+                        <a:schemeClr val="tx1"/>
+                      </a:solidFill>
+                      <a:prstDash val="solid"/>
+                      <a:round/>
+                      <a:headEnd type="none" w="med" len="med"/>
+                      <a:tailEnd type="none" w="med" len="med"/>
+                    </a:lnT>
+                    <a:lnB w="12700" cap="flat" cmpd="sng" algn="ctr">
+                      <a:solidFill>
+                        <a:schemeClr val="tx1"/>
+                      </a:solidFill>
+                      <a:prstDash val="solid"/>
+                      <a:round/>
+                      <a:headEnd type="none" w="med" len="med"/>
+                      <a:tailEnd type="none" w="med" len="med"/>
+                    </a:lnB>
+                  </a:tcPr>
+                </a:tc>
+                <a:extLst>
+                  <a:ext uri="{0D108BD9-81ED-4DB2-BD59-A6C34878D82A}">
+                    <a16:rowId xmlns:a16="http://schemas.microsoft.com/office/drawing/2014/main" val="314198523"/>
+                  </a:ext>
+                </a:extLst>
+              </a:tr>
+            </a:tbl>
+          </a:graphicData>
+        </a:graphic>
+      </p:graphicFrame>
+    </p:spTree>
+    <p:extLst>
+      <p:ext uri="{BB962C8B-B14F-4D97-AF65-F5344CB8AC3E}">
+        <p14:creationId xmlns:p14="http://schemas.microsoft.com/office/powerpoint/2010/main" val="1993176027"/>
+      </p:ext>
+    </p:extLst>
+  </p:cSld>
+  <p:clrMapOvr>
+    <a:masterClrMapping/>
+  </p:clrMapOvr>
+  <mc:AlternateContent xmlns:mc="http://schemas.openxmlformats.org/markup-compatibility/2006">
+    <mc:Choice xmlns:p14="http://schemas.microsoft.com/office/powerpoint/2010/main" Requires="p14">
+      <p:transition spd="slow" p14:dur="2000"/>
+    </mc:Choice>
+    <mc:Fallback>
+      <p:transition spd="slow"/>
+    </mc:Fallback>
+  </mc:AlternateContent>
   <p:timing>
     <p:tnLst>
       <p:par>
@@ -5241,4 +10144,265 @@
     </a:ext>
   </a:extLst>
 </a:theme>
+</file>
+
+<file path=ppt/theme/theme2.xml><?xml version="1.0" encoding="utf-8"?>
+<a:theme xmlns:a="http://schemas.openxmlformats.org/drawingml/2006/main" name="Тема Office">
+  <a:themeElements>
+    <a:clrScheme name="Стандартная">
+      <a:dk1>
+        <a:sysClr val="windowText" lastClr="000000"/>
+      </a:dk1>
+      <a:lt1>
+        <a:sysClr val="window" lastClr="FFFFFF"/>
+      </a:lt1>
+      <a:dk2>
+        <a:srgbClr val="44546A"/>
+      </a:dk2>
+      <a:lt2>
+        <a:srgbClr val="E7E6E6"/>
+      </a:lt2>
+      <a:accent1>
+        <a:srgbClr val="5B9BD5"/>
+      </a:accent1>
+      <a:accent2>
+        <a:srgbClr val="ED7D31"/>
+      </a:accent2>
+      <a:accent3>
+        <a:srgbClr val="A5A5A5"/>
+      </a:accent3>
+      <a:accent4>
+        <a:srgbClr val="FFC000"/>
+      </a:accent4>
+      <a:accent5>
+        <a:srgbClr val="4472C4"/>
+      </a:accent5>
+      <a:accent6>
+        <a:srgbClr val="70AD47"/>
+      </a:accent6>
+      <a:hlink>
+        <a:srgbClr val="0563C1"/>
+      </a:hlink>
+      <a:folHlink>
+        <a:srgbClr val="954F72"/>
+      </a:folHlink>
+    </a:clrScheme>
+    <a:fontScheme name="Стандартная">
+      <a:majorFont>
+        <a:latin typeface="Calibri Light" panose="020F0302020204030204"/>
+        <a:ea typeface=""/>
+        <a:cs typeface=""/>
+        <a:font script="Jpan" typeface="游ゴシック Light"/>
+        <a:font script="Hang" typeface="맑은 고딕"/>
+        <a:font script="Hans" typeface="等线 Light"/>
+        <a:font script="Hant" typeface="新細明體"/>
+        <a:font script="Arab" typeface="Times New Roman"/>
+        <a:font script="Hebr" typeface="Times New Roman"/>
+        <a:font script="Thai" typeface="Angsana New"/>
+        <a:font script="Ethi" typeface="Nyala"/>
+        <a:font script="Beng" typeface="Vrinda"/>
+        <a:font script="Gujr" typeface="Shruti"/>
+        <a:font script="Khmr" typeface="MoolBoran"/>
+        <a:font script="Knda" typeface="Tunga"/>
+        <a:font script="Guru" typeface="Raavi"/>
+        <a:font script="Cans" typeface="Euphemia"/>
+        <a:font script="Cher" typeface="Plantagenet Cherokee"/>
+        <a:font script="Yiii" typeface="Microsoft Yi Baiti"/>
+        <a:font script="Tibt" typeface="Microsoft Himalaya"/>
+        <a:font script="Thaa" typeface="MV Boli"/>
+        <a:font script="Deva" typeface="Mangal"/>
+        <a:font script="Telu" typeface="Gautami"/>
+        <a:font script="Taml" typeface="Latha"/>
+        <a:font script="Syrc" typeface="Estrangelo Edessa"/>
+        <a:font script="Orya" typeface="Kalinga"/>
+        <a:font script="Mlym" typeface="Kartika"/>
+        <a:font script="Laoo" typeface="DokChampa"/>
+        <a:font script="Sinh" typeface="Iskoola Pota"/>
+        <a:font script="Mong" typeface="Mongolian Baiti"/>
+        <a:font script="Viet" typeface="Times New Roman"/>
+        <a:font script="Uigh" typeface="Microsoft Uighur"/>
+        <a:font script="Geor" typeface="Sylfaen"/>
+      </a:majorFont>
+      <a:minorFont>
+        <a:latin typeface="Calibri" panose="020F0502020204030204"/>
+        <a:ea typeface=""/>
+        <a:cs typeface=""/>
+        <a:font script="Jpan" typeface="游ゴシック"/>
+        <a:font script="Hang" typeface="맑은 고딕"/>
+        <a:font script="Hans" typeface="等线"/>
+        <a:font script="Hant" typeface="新細明體"/>
+        <a:font script="Arab" typeface="Arial"/>
+        <a:font script="Hebr" typeface="Arial"/>
+        <a:font script="Thai" typeface="Cordia New"/>
+        <a:font script="Ethi" typeface="Nyala"/>
+        <a:font script="Beng" typeface="Vrinda"/>
+        <a:font script="Gujr" typeface="Shruti"/>
+        <a:font script="Khmr" typeface="DaunPenh"/>
+        <a:font script="Knda" typeface="Tunga"/>
+        <a:font script="Guru" typeface="Raavi"/>
+        <a:font script="Cans" typeface="Euphemia"/>
+        <a:font script="Cher" typeface="Plantagenet Cherokee"/>
+        <a:font script="Yiii" typeface="Microsoft Yi Baiti"/>
+        <a:font script="Tibt" typeface="Microsoft Himalaya"/>
+        <a:font script="Thaa" typeface="MV Boli"/>
+        <a:font script="Deva" typeface="Mangal"/>
+        <a:font script="Telu" typeface="Gautami"/>
+        <a:font script="Taml" typeface="Latha"/>
+        <a:font script="Syrc" typeface="Estrangelo Edessa"/>
+        <a:font script="Orya" typeface="Kalinga"/>
+        <a:font script="Mlym" typeface="Kartika"/>
+        <a:font script="Laoo" typeface="DokChampa"/>
+        <a:font script="Sinh" typeface="Iskoola Pota"/>
+        <a:font script="Mong" typeface="Mongolian Baiti"/>
+        <a:font script="Viet" typeface="Arial"/>
+        <a:font script="Uigh" typeface="Microsoft Uighur"/>
+        <a:font script="Geor" typeface="Sylfaen"/>
+      </a:minorFont>
+    </a:fontScheme>
+    <a:fmtScheme name="Стандартная">
+      <a:fillStyleLst>
+        <a:solidFill>
+          <a:schemeClr val="phClr"/>
+        </a:solidFill>
+        <a:gradFill rotWithShape="1">
+          <a:gsLst>
+            <a:gs pos="0">
+              <a:schemeClr val="phClr">
+                <a:lumMod val="110000"/>
+                <a:satMod val="105000"/>
+                <a:tint val="67000"/>
+              </a:schemeClr>
+            </a:gs>
+            <a:gs pos="50000">
+              <a:schemeClr val="phClr">
+                <a:lumMod val="105000"/>
+                <a:satMod val="103000"/>
+                <a:tint val="73000"/>
+              </a:schemeClr>
+            </a:gs>
+            <a:gs pos="100000">
+              <a:schemeClr val="phClr">
+                <a:lumMod val="105000"/>
+                <a:satMod val="109000"/>
+                <a:tint val="81000"/>
+              </a:schemeClr>
+            </a:gs>
+          </a:gsLst>
+          <a:lin ang="5400000" scaled="0"/>
+        </a:gradFill>
+        <a:gradFill rotWithShape="1">
+          <a:gsLst>
+            <a:gs pos="0">
+              <a:schemeClr val="phClr">
+                <a:satMod val="103000"/>
+                <a:lumMod val="102000"/>
+                <a:tint val="94000"/>
+              </a:schemeClr>
+            </a:gs>
+            <a:gs pos="50000">
+              <a:schemeClr val="phClr">
+                <a:satMod val="110000"/>
+                <a:lumMod val="100000"/>
+                <a:shade val="100000"/>
+              </a:schemeClr>
+            </a:gs>
+            <a:gs pos="100000">
+              <a:schemeClr val="phClr">
+                <a:lumMod val="99000"/>
+                <a:satMod val="120000"/>
+                <a:shade val="78000"/>
+              </a:schemeClr>
+            </a:gs>
+          </a:gsLst>
+          <a:lin ang="5400000" scaled="0"/>
+        </a:gradFill>
+      </a:fillStyleLst>
+      <a:lnStyleLst>
+        <a:ln w="6350" cap="flat" cmpd="sng" algn="ctr">
+          <a:solidFill>
+            <a:schemeClr val="phClr"/>
+          </a:solidFill>
+          <a:prstDash val="solid"/>
+          <a:miter lim="800000"/>
+        </a:ln>
+        <a:ln w="12700" cap="flat" cmpd="sng" algn="ctr">
+          <a:solidFill>
+            <a:schemeClr val="phClr"/>
+          </a:solidFill>
+          <a:prstDash val="solid"/>
+          <a:miter lim="800000"/>
+        </a:ln>
+        <a:ln w="19050" cap="flat" cmpd="sng" algn="ctr">
+          <a:solidFill>
+            <a:schemeClr val="phClr"/>
+          </a:solidFill>
+          <a:prstDash val="solid"/>
+          <a:miter lim="800000"/>
+        </a:ln>
+      </a:lnStyleLst>
+      <a:effectStyleLst>
+        <a:effectStyle>
+          <a:effectLst/>
+        </a:effectStyle>
+        <a:effectStyle>
+          <a:effectLst/>
+        </a:effectStyle>
+        <a:effectStyle>
+          <a:effectLst>
+            <a:outerShdw blurRad="57150" dist="19050" dir="5400000" algn="ctr" rotWithShape="0">
+              <a:srgbClr val="000000">
+                <a:alpha val="63000"/>
+              </a:srgbClr>
+            </a:outerShdw>
+          </a:effectLst>
+        </a:effectStyle>
+      </a:effectStyleLst>
+      <a:bgFillStyleLst>
+        <a:solidFill>
+          <a:schemeClr val="phClr"/>
+        </a:solidFill>
+        <a:solidFill>
+          <a:schemeClr val="phClr">
+            <a:tint val="95000"/>
+            <a:satMod val="170000"/>
+          </a:schemeClr>
+        </a:solidFill>
+        <a:gradFill rotWithShape="1">
+          <a:gsLst>
+            <a:gs pos="0">
+              <a:schemeClr val="phClr">
+                <a:tint val="93000"/>
+                <a:satMod val="150000"/>
+                <a:shade val="98000"/>
+                <a:lumMod val="102000"/>
+              </a:schemeClr>
+            </a:gs>
+            <a:gs pos="50000">
+              <a:schemeClr val="phClr">
+                <a:tint val="98000"/>
+                <a:satMod val="130000"/>
+                <a:shade val="90000"/>
+                <a:lumMod val="103000"/>
+              </a:schemeClr>
+            </a:gs>
+            <a:gs pos="100000">
+              <a:schemeClr val="phClr">
+                <a:shade val="63000"/>
+                <a:satMod val="120000"/>
+              </a:schemeClr>
+            </a:gs>
+          </a:gsLst>
+          <a:lin ang="5400000" scaled="0"/>
+        </a:gradFill>
+      </a:bgFillStyleLst>
+    </a:fmtScheme>
+  </a:themeElements>
+  <a:objectDefaults/>
+  <a:extraClrSchemeLst/>
+  <a:extLst>
+    <a:ext uri="{05A4C25C-085E-4340-85A3-A5531E510DB2}">
+      <thm15:themeFamily xmlns:thm15="http://schemas.microsoft.com/office/thememl/2012/main" name="Office Theme" id="{62F939B6-93AF-4DB8-9C6B-D6C7DFDC589F}" vid="{4A3C46E8-61CC-4603-A589-7422A47A8E4A}"/>
+    </a:ext>
+  </a:extLst>
+</a:theme>
 </file>
--- a/2025/LEC/06-1 многомерные ВР.pptx
+++ b/2025/LEC/06-1 многомерные ВР.pptx
@@ -596,6 +596,90 @@
     <p:extLst>
       <p:ext uri="{BB962C8B-B14F-4D97-AF65-F5344CB8AC3E}">
         <p14:creationId xmlns:p14="http://schemas.microsoft.com/office/powerpoint/2010/main" val="3920822745"/>
+      </p:ext>
+    </p:extLst>
+  </p:cSld>
+  <p:clrMapOvr>
+    <a:masterClrMapping/>
+  </p:clrMapOvr>
+</p:notes>
+</file>
+
+<file path=ppt/notesSlides/notesSlide2.xml><?xml version="1.0" encoding="utf-8"?>
+<p:notes xmlns:a="http://schemas.openxmlformats.org/drawingml/2006/main" xmlns:r="http://schemas.openxmlformats.org/officeDocument/2006/relationships" xmlns:p="http://schemas.openxmlformats.org/presentationml/2006/main">
+  <p:cSld>
+    <p:spTree>
+      <p:nvGrpSpPr>
+        <p:cNvPr id="1" name=""/>
+        <p:cNvGrpSpPr/>
+        <p:nvPr/>
+      </p:nvGrpSpPr>
+      <p:grpSpPr>
+        <a:xfrm>
+          <a:off x="0" y="0"/>
+          <a:ext cx="0" cy="0"/>
+          <a:chOff x="0" y="0"/>
+          <a:chExt cx="0" cy="0"/>
+        </a:xfrm>
+      </p:grpSpPr>
+      <p:sp>
+        <p:nvSpPr>
+          <p:cNvPr id="2" name="Образ слайда 1"/>
+          <p:cNvSpPr>
+            <a:spLocks noGrp="1" noRot="1" noChangeAspect="1"/>
+          </p:cNvSpPr>
+          <p:nvPr>
+            <p:ph type="sldImg"/>
+          </p:nvPr>
+        </p:nvSpPr>
+        <p:spPr/>
+      </p:sp>
+      <p:sp>
+        <p:nvSpPr>
+          <p:cNvPr id="3" name="Заметки 2"/>
+          <p:cNvSpPr>
+            <a:spLocks noGrp="1"/>
+          </p:cNvSpPr>
+          <p:nvPr>
+            <p:ph type="body" idx="1"/>
+          </p:nvPr>
+        </p:nvSpPr>
+        <p:spPr/>
+        <p:txBody>
+          <a:bodyPr/>
+          <a:lstStyle/>
+          <a:p>
+            <a:endParaRPr lang="ru-RU" dirty="0"/>
+          </a:p>
+        </p:txBody>
+      </p:sp>
+      <p:sp>
+        <p:nvSpPr>
+          <p:cNvPr id="4" name="Номер слайда 3"/>
+          <p:cNvSpPr>
+            <a:spLocks noGrp="1"/>
+          </p:cNvSpPr>
+          <p:nvPr>
+            <p:ph type="sldNum" sz="quarter" idx="10"/>
+          </p:nvPr>
+        </p:nvSpPr>
+        <p:spPr/>
+        <p:txBody>
+          <a:bodyPr/>
+          <a:lstStyle/>
+          <a:p>
+            <a:fld id="{E5904A68-FE9C-41D3-96AD-A1A68ED6C497}" type="slidenum">
+              <a:rPr lang="ru-RU" smtClean="0"/>
+              <a:t>8</a:t>
+            </a:fld>
+            <a:endParaRPr lang="ru-RU"/>
+          </a:p>
+        </p:txBody>
+      </p:sp>
+    </p:spTree>
+    <p:extLst>
+      <p:ext uri="{BB962C8B-B14F-4D97-AF65-F5344CB8AC3E}">
+        <p14:creationId xmlns:p14="http://schemas.microsoft.com/office/powerpoint/2010/main" val="4147477643"/>
       </p:ext>
     </p:extLst>
   </p:cSld>
@@ -4800,23 +4884,24 @@
             </p:nvSpPr>
             <p:spPr>
               <a:xfrm>
-                <a:off x="257175" y="704851"/>
-                <a:ext cx="11801475" cy="5876926"/>
+                <a:off x="142875" y="600076"/>
+                <a:ext cx="11801475" cy="6105524"/>
               </a:xfrm>
             </p:spPr>
             <p:txBody>
               <a:bodyPr>
-                <a:normAutofit/>
+                <a:normAutofit lnSpcReduction="10000"/>
               </a:bodyPr>
               <a:lstStyle/>
               <a:p>
-                <a:pPr>
+                <a:pPr marL="0" indent="0">
                   <a:lnSpc>
                     <a:spcPct val="100000"/>
                   </a:lnSpc>
                   <a:spcBef>
                     <a:spcPts val="0"/>
                   </a:spcBef>
+                  <a:buNone/>
                 </a:pPr>
                 <a:r>
                   <a:rPr lang="ru-RU" sz="2400" dirty="0" smtClean="0"/>
@@ -6834,9 +6919,36 @@
                 </a:r>
                 <a:r>
                   <a:rPr lang="en-US" sz="2400" i="1" dirty="0" smtClean="0"/>
-                  <a:t>VARIMA</a:t>
-                </a:r>
-                <a:endParaRPr lang="ru-RU" sz="2400" i="1" dirty="0"/>
+                  <a:t>VARMA</a:t>
+                </a:r>
+              </a:p>
+              <a:p>
+                <a:pPr marL="0" indent="0">
+                  <a:lnSpc>
+                    <a:spcPct val="100000"/>
+                  </a:lnSpc>
+                  <a:spcBef>
+                    <a:spcPts val="0"/>
+                  </a:spcBef>
+                  <a:buNone/>
+                </a:pPr>
+                <a:r>
+                  <a:rPr lang="ru-RU" sz="2400" i="1" dirty="0" smtClean="0"/>
+                  <a:t>	</a:t>
+                </a:r>
+                <a:r>
+                  <a:rPr lang="ru-RU" sz="2000" i="1" dirty="0" smtClean="0"/>
+                  <a:t>Если ВР не стационары, просто </a:t>
+                </a:r>
+                <a:r>
+                  <a:rPr lang="en-US" sz="2000" i="1" dirty="0" smtClean="0"/>
+                  <a:t>VARIMA </a:t>
+                </a:r>
+                <a:r>
+                  <a:rPr lang="ru-RU" sz="2000" i="1" dirty="0" smtClean="0"/>
+                  <a:t>может быть недостаточно! </a:t>
+                </a:r>
+                <a:endParaRPr lang="ru-RU" sz="2000" i="1" dirty="0"/>
               </a:p>
             </p:txBody>
           </p:sp>
@@ -6854,13 +6966,13 @@
             </p:nvSpPr>
             <p:spPr>
               <a:xfrm>
-                <a:off x="257175" y="704851"/>
-                <a:ext cx="11801475" cy="5876926"/>
+                <a:off x="142875" y="600076"/>
+                <a:ext cx="11801475" cy="6105524"/>
               </a:xfrm>
               <a:blipFill>
                 <a:blip r:embed="rId2"/>
                 <a:stretch>
-                  <a:fillRect l="-775" t="-830" b="-1141"/>
+                  <a:fillRect l="-775" t="-1397"/>
                 </a:stretch>
               </a:blipFill>
             </p:spPr>
@@ -6879,6 +6991,34 @@
           </p:sp>
         </mc:Fallback>
       </mc:AlternateContent>
+      <p:sp>
+        <p:nvSpPr>
+          <p:cNvPr id="4" name="Прямоугольник 3"/>
+          <p:cNvSpPr/>
+          <p:nvPr/>
+        </p:nvSpPr>
+        <p:spPr>
+          <a:xfrm>
+            <a:off x="4371974" y="6581777"/>
+            <a:ext cx="8277225" cy="246221"/>
+          </a:xfrm>
+          <a:prstGeom prst="rect">
+            <a:avLst/>
+          </a:prstGeom>
+        </p:spPr>
+        <p:txBody>
+          <a:bodyPr wrap="square">
+            <a:spAutoFit/>
+          </a:bodyPr>
+          <a:lstStyle/>
+          <a:p>
+            <a:r>
+              <a:rPr lang="ru-RU" sz="1000" dirty="0"/>
+              <a:t>https://github.com/phdinds-aim/time_series_handbook/blob/main/03_VectorAutoregressiveModels/03_VectorAutoregressiveMethods.ipynb</a:t>
+            </a:r>
+          </a:p>
+        </p:txBody>
+      </p:sp>
     </p:spTree>
     <p:extLst>
       <p:ext uri="{BB962C8B-B14F-4D97-AF65-F5344CB8AC3E}">
@@ -7348,11 +7488,12 @@
           </a:bodyPr>
           <a:lstStyle/>
           <a:p>
-            <a:r>
-              <a:rPr lang="ru-RU" dirty="0" err="1" smtClean="0"/>
+            <a:pPr algn="ctr"/>
+            <a:r>
+              <a:rPr lang="ru-RU" b="1" dirty="0" err="1" smtClean="0"/>
               <a:t>Коинтегрированность</a:t>
             </a:r>
-            <a:endParaRPr lang="ru-RU" dirty="0"/>
+            <a:endParaRPr lang="ru-RU" b="1" dirty="0"/>
           </a:p>
         </p:txBody>
       </p:sp>
@@ -7513,7 +7654,7 @@
           </p:cNvPicPr>
           <p:nvPr/>
         </p:nvPicPr>
-        <p:blipFill>
+        <p:blipFill rotWithShape="1">
           <a:blip r:embed="rId3" cstate="print">
             <a:extLst>
               <a:ext uri="{28A0092B-C50C-407E-A947-70E740481C1C}">
@@ -7521,15 +7662,13 @@
               </a:ext>
             </a:extLst>
           </a:blip>
-          <a:srcRect/>
-          <a:stretch>
-            <a:fillRect/>
-          </a:stretch>
+          <a:srcRect t="13564" b="9332"/>
+          <a:stretch/>
         </p:blipFill>
         <p:spPr bwMode="auto">
           <a:xfrm>
-            <a:off x="7283926" y="2876056"/>
-            <a:ext cx="4438195" cy="3170140"/>
+            <a:off x="7789506" y="3520077"/>
+            <a:ext cx="4254521" cy="2343150"/>
           </a:xfrm>
           <a:prstGeom prst="rect">
             <a:avLst/>
@@ -7777,6 +7916,45 @@
           </a:p>
         </p:txBody>
       </p:sp>
+      <p:pic>
+        <p:nvPicPr>
+          <p:cNvPr id="12" name="Picture 2" descr="https://www.econometrics-with-r.org/ITER_files/figure-html/unnamed-chunk-733-1.png"/>
+          <p:cNvPicPr>
+            <a:picLocks noChangeAspect="1" noChangeArrowheads="1"/>
+          </p:cNvPicPr>
+          <p:nvPr/>
+        </p:nvPicPr>
+        <p:blipFill rotWithShape="1">
+          <a:blip r:embed="rId3" cstate="print">
+            <a:extLst>
+              <a:ext uri="{28A0092B-C50C-407E-A947-70E740481C1C}">
+                <a14:useLocalDpi xmlns:a14="http://schemas.microsoft.com/office/drawing/2010/main" val="0"/>
+              </a:ext>
+            </a:extLst>
+          </a:blip>
+          <a:srcRect l="36205" t="5782" r="32452" b="89203"/>
+          <a:stretch/>
+        </p:blipFill>
+        <p:spPr bwMode="auto">
+          <a:xfrm>
+            <a:off x="8372474" y="3685579"/>
+            <a:ext cx="1333501" cy="152400"/>
+          </a:xfrm>
+          <a:prstGeom prst="rect">
+            <a:avLst/>
+          </a:prstGeom>
+          <a:noFill/>
+          <a:extLst>
+            <a:ext uri="{909E8E84-426E-40DD-AFC4-6F175D3DCCD1}">
+              <a14:hiddenFill xmlns:a14="http://schemas.microsoft.com/office/drawing/2010/main">
+                <a:solidFill>
+                  <a:srgbClr val="FFFFFF"/>
+                </a:solidFill>
+              </a14:hiddenFill>
+            </a:ext>
+          </a:extLst>
+        </p:spPr>
+      </p:pic>
     </p:spTree>
     <p:extLst>
       <p:ext uri="{BB962C8B-B14F-4D97-AF65-F5344CB8AC3E}">
@@ -7826,7 +8004,7 @@
         </p:nvSpPr>
         <p:spPr>
           <a:xfrm>
-            <a:off x="838200" y="365126"/>
+            <a:off x="838200" y="177643"/>
             <a:ext cx="10515600" cy="621846"/>
           </a:xfrm>
         </p:spPr>
@@ -7836,11 +8014,12 @@
           </a:bodyPr>
           <a:lstStyle/>
           <a:p>
-            <a:r>
-              <a:rPr lang="ru-RU" dirty="0" err="1" smtClean="0"/>
+            <a:pPr algn="ctr"/>
+            <a:r>
+              <a:rPr lang="ru-RU" b="1" dirty="0" err="1" smtClean="0"/>
               <a:t>Коинтегрированность</a:t>
             </a:r>
-            <a:endParaRPr lang="ru-RU" dirty="0"/>
+            <a:endParaRPr lang="ru-RU" b="1" dirty="0"/>
           </a:p>
         </p:txBody>
       </p:sp>
@@ -7858,13 +8037,13 @@
             </p:nvSpPr>
             <p:spPr>
               <a:xfrm>
-                <a:off x="295729" y="986972"/>
-                <a:ext cx="11600542" cy="4972684"/>
+                <a:off x="238352" y="691768"/>
+                <a:ext cx="11715296" cy="5518383"/>
               </a:xfrm>
             </p:spPr>
             <p:txBody>
               <a:bodyPr>
-                <a:normAutofit fontScale="92500"/>
+                <a:normAutofit/>
               </a:bodyPr>
               <a:lstStyle/>
               <a:p>
@@ -8602,29 +8781,33 @@
                 </a:pPr>
                 <a:r>
                   <a:rPr lang="ru-RU" dirty="0" smtClean="0"/>
-                  <a:t>Модель </a:t>
-                </a:r>
-                <a:r>
-                  <a:rPr lang="en-US" dirty="0" smtClean="0"/>
-                  <a:t>VAR </a:t>
-                </a:r>
-                <a:r>
-                  <a:rPr lang="ru-RU" dirty="0" smtClean="0"/>
-                  <a:t>для </a:t>
-                </a:r>
-                <a:r>
-                  <a:rPr lang="ru-RU" dirty="0" err="1" smtClean="0"/>
-                  <a:t>коинтегрированных</a:t>
-                </a:r>
-                <a:r>
-                  <a:rPr lang="ru-RU" dirty="0" smtClean="0"/>
-                  <a:t> ВР - </a:t>
-                </a:r>
-                <a:r>
-                  <a:rPr lang="es-ES" b="1" dirty="0"/>
-                  <a:t>vector error correction model (VECM)</a:t>
-                </a:r>
-                <a:endParaRPr lang="ru-RU" b="1" dirty="0" smtClean="0"/>
+                  <a:t>	Тест </a:t>
+                </a:r>
+                <a:r>
+                  <a:rPr lang="ru-RU" dirty="0"/>
+                  <a:t>матрицы </a:t>
+                </a:r>
+                <a:r>
+                  <a:rPr lang="en-US" b="1" dirty="0"/>
+                  <a:t>B</a:t>
+                </a:r>
+                <a:r>
+                  <a:rPr lang="ru-RU" dirty="0"/>
+                  <a:t> – </a:t>
+                </a:r>
+                <a:r>
+                  <a:rPr lang="ru-RU" b="1" dirty="0"/>
+                  <a:t>тест </a:t>
+                </a:r>
+                <a:r>
+                  <a:rPr lang="ru-RU" b="1" dirty="0" err="1"/>
+                  <a:t>Йохансена</a:t>
+                </a:r>
+                <a:r>
+                  <a:rPr lang="ru-RU" b="1" dirty="0"/>
+                  <a:t>.</a:t>
+                </a:r>
+                <a:endParaRPr lang="en-US" b="1" dirty="0"/>
               </a:p>
               <a:p>
                 <a:pPr marL="457200" lvl="1" indent="0">
@@ -8638,40 +8821,33 @@
                 </a:pPr>
                 <a:r>
                   <a:rPr lang="ru-RU" dirty="0" smtClean="0"/>
-                  <a:t>Тест матрицы </a:t>
-                </a:r>
-                <a:r>
-                  <a:rPr lang="en-US" b="1" dirty="0"/>
-                  <a:t>B</a:t>
+                  <a:t>Модель </a:t>
+                </a:r>
+                <a:r>
+                  <a:rPr lang="en-US" dirty="0" smtClean="0"/>
+                  <a:t>VAR </a:t>
                 </a:r>
                 <a:r>
                   <a:rPr lang="ru-RU" dirty="0" smtClean="0"/>
-                  <a:t> – </a:t>
-                </a:r>
-                <a:r>
-                  <a:rPr lang="ru-RU" b="1" dirty="0" smtClean="0"/>
-                  <a:t>тест </a:t>
-                </a:r>
-                <a:r>
-                  <a:rPr lang="ru-RU" b="1" dirty="0" err="1" smtClean="0"/>
-                  <a:t>Йохансена</a:t>
-                </a:r>
-                <a:r>
-                  <a:rPr lang="ru-RU" b="1" dirty="0" smtClean="0"/>
-                  <a:t>.</a:t>
-                </a:r>
-                <a:endParaRPr lang="en-US" b="1" dirty="0"/>
-              </a:p>
-              <a:p>
-                <a:pPr>
-                  <a:lnSpc>
-                    <a:spcPct val="100000"/>
-                  </a:lnSpc>
-                  <a:spcBef>
-                    <a:spcPts val="200"/>
-                  </a:spcBef>
-                </a:pPr>
-                <a:endParaRPr lang="ru-RU" sz="2400" dirty="0"/>
+                  <a:t>для </a:t>
+                </a:r>
+                <a:r>
+                  <a:rPr lang="ru-RU" dirty="0" err="1" smtClean="0"/>
+                  <a:t>коинтегрированных</a:t>
+                </a:r>
+                <a:r>
+                  <a:rPr lang="ru-RU" dirty="0" smtClean="0"/>
+                  <a:t> ВР - </a:t>
+                </a:r>
+                <a:r>
+                  <a:rPr lang="es-ES" b="1" dirty="0"/>
+                  <a:t>vector error correction model (VECM</a:t>
+                </a:r>
+                <a:r>
+                  <a:rPr lang="es-ES" b="1" dirty="0" smtClean="0"/>
+                  <a:t>)</a:t>
+                </a:r>
+                <a:endParaRPr lang="ru-RU" b="1" dirty="0" smtClean="0"/>
               </a:p>
             </p:txBody>
           </p:sp>
@@ -8689,13 +8865,13 @@
             </p:nvSpPr>
             <p:spPr>
               <a:xfrm>
-                <a:off x="295729" y="986972"/>
-                <a:ext cx="11600542" cy="4972684"/>
+                <a:off x="238352" y="691768"/>
+                <a:ext cx="11715296" cy="5518383"/>
               </a:xfrm>
               <a:blipFill>
-                <a:blip r:embed="rId2"/>
+                <a:blip r:embed="rId3"/>
                 <a:stretch>
-                  <a:fillRect l="-683" t="-858" r="-315"/>
+                  <a:fillRect l="-780" t="-883" r="-989" b="-1214"/>
                 </a:stretch>
               </a:blipFill>
             </p:spPr>
@@ -8808,8 +8984,8 @@
         </p:nvSpPr>
         <p:spPr>
           <a:xfrm>
-            <a:off x="461430" y="5954099"/>
-            <a:ext cx="1960601" cy="369332"/>
+            <a:off x="328080" y="6170950"/>
+            <a:ext cx="5125699" cy="369332"/>
           </a:xfrm>
           <a:prstGeom prst="rect">
             <a:avLst/>
@@ -8831,9 +9007,53 @@
             </a:r>
             <a:r>
               <a:rPr lang="ru-RU" b="1" dirty="0" smtClean="0"/>
-              <a:t> - </a:t>
+              <a:t> – это </a:t>
+            </a:r>
+            <a:r>
+              <a:rPr lang="en-US" b="1" dirty="0" smtClean="0"/>
+              <a:t>VARI</a:t>
+            </a:r>
+            <a:r>
+              <a:rPr lang="ru-RU" b="1" dirty="0" smtClean="0"/>
+              <a:t> </a:t>
+            </a:r>
+            <a:r>
+              <a:rPr lang="en-US" b="1" dirty="0" smtClean="0"/>
+              <a:t> + </a:t>
+            </a:r>
+            <a:r>
+              <a:rPr lang="ru-RU" b="1" dirty="0" smtClean="0"/>
+              <a:t>взаимные эффекты </a:t>
             </a:r>
             <a:endParaRPr lang="ru-RU" dirty="0"/>
+          </a:p>
+        </p:txBody>
+      </p:sp>
+      <p:sp>
+        <p:nvSpPr>
+          <p:cNvPr id="9" name="Прямоугольник 8"/>
+          <p:cNvSpPr/>
+          <p:nvPr/>
+        </p:nvSpPr>
+        <p:spPr>
+          <a:xfrm>
+            <a:off x="5257800" y="6505354"/>
+            <a:ext cx="6096000" cy="215444"/>
+          </a:xfrm>
+          <a:prstGeom prst="rect">
+            <a:avLst/>
+          </a:prstGeom>
+        </p:spPr>
+        <p:txBody>
+          <a:bodyPr>
+            <a:spAutoFit/>
+          </a:bodyPr>
+          <a:lstStyle/>
+          <a:p>
+            <a:r>
+              <a:rPr lang="ru-RU" sz="800" dirty="0"/>
+              <a:t>https://readmedium.com/unveiling-cointegration-johansen-test-explained-with-python-examples-db8385219f1f</a:t>
+            </a:r>
           </a:p>
         </p:txBody>
       </p:sp>

--- a/2025/LEC/06-1 многомерные ВР.pptx
+++ b/2025/LEC/06-1 многомерные ВР.pptx
@@ -207,7 +207,7 @@
           <a:p>
             <a:fld id="{0170C974-C971-49AB-9DB3-26D8F572511A}" type="datetimeFigureOut">
               <a:rPr lang="ru-RU" smtClean="0"/>
-              <a:t>07.08.2025</a:t>
+              <a:t>08.08.2025</a:t>
             </a:fld>
             <a:endParaRPr lang="ru-RU"/>
           </a:p>
@@ -271,38 +271,37 @@
           <a:p>
             <a:pPr lvl="0"/>
             <a:r>
-              <a:rPr lang="ru-RU" smtClean="0"/>
+              <a:rPr lang="ru-RU"/>
               <a:t>Образец текста</a:t>
             </a:r>
           </a:p>
           <a:p>
             <a:pPr lvl="1"/>
             <a:r>
-              <a:rPr lang="ru-RU" smtClean="0"/>
+              <a:rPr lang="ru-RU"/>
               <a:t>Второй уровень</a:t>
             </a:r>
           </a:p>
           <a:p>
             <a:pPr lvl="2"/>
             <a:r>
-              <a:rPr lang="ru-RU" smtClean="0"/>
+              <a:rPr lang="ru-RU"/>
               <a:t>Третий уровень</a:t>
             </a:r>
           </a:p>
           <a:p>
             <a:pPr lvl="3"/>
             <a:r>
-              <a:rPr lang="ru-RU" smtClean="0"/>
+              <a:rPr lang="ru-RU"/>
               <a:t>Четвертый уровень</a:t>
             </a:r>
           </a:p>
           <a:p>
             <a:pPr lvl="4"/>
             <a:r>
-              <a:rPr lang="ru-RU" smtClean="0"/>
+              <a:rPr lang="ru-RU"/>
               <a:t>Пятый уровень</a:t>
             </a:r>
-            <a:endParaRPr lang="ru-RU"/>
           </a:p>
         </p:txBody>
       </p:sp>
@@ -520,7 +519,7 @@
           <a:lstStyle/>
           <a:p>
             <a:r>
-              <a:rPr lang="ru-RU" sz="1200" b="0" i="0" kern="1200" dirty="0" smtClean="0">
+              <a:rPr lang="ru-RU" sz="1200" b="0" i="0" kern="1200" dirty="0">
                 <a:solidFill>
                   <a:schemeClr val="tx1"/>
                 </a:solidFill>
@@ -532,7 +531,7 @@
               <a:t>Brent−0.8⋅Бензин−0.7⋅Дизель∼</a:t>
             </a:r>
             <a:r>
-              <a:rPr lang="ru-RU" sz="1200" b="0" i="1" kern="1200" dirty="0" smtClean="0">
+              <a:rPr lang="ru-RU" sz="1200" b="0" i="1" kern="1200" dirty="0">
                 <a:solidFill>
                   <a:schemeClr val="tx1"/>
                 </a:solidFill>
@@ -544,7 +543,7 @@
               <a:t>I</a:t>
             </a:r>
             <a:r>
-              <a:rPr lang="ru-RU" sz="1200" b="0" i="0" kern="1200" dirty="0" smtClean="0">
+              <a:rPr lang="ru-RU" sz="1200" b="0" i="0" kern="1200" dirty="0">
                 <a:solidFill>
                   <a:schemeClr val="tx1"/>
                 </a:solidFill>
@@ -558,7 +557,7 @@
           </a:p>
           <a:p>
             <a:r>
-              <a:rPr lang="ru-RU" b="0" dirty="0" smtClean="0">
+              <a:rPr lang="ru-RU" b="0" dirty="0">
                 <a:effectLst/>
               </a:rPr>
               <a:t>Это означает: маржа между нефтью и продуктами стабильна — возможен арбитраж. </a:t>
@@ -731,10 +730,9 @@
           </a:lstStyle>
           <a:p>
             <a:r>
-              <a:rPr lang="ru-RU" smtClean="0"/>
+              <a:rPr lang="ru-RU"/>
               <a:t>Образец заголовка</a:t>
             </a:r>
-            <a:endParaRPr lang="ru-RU"/>
           </a:p>
         </p:txBody>
       </p:sp>
@@ -796,10 +794,9 @@
           </a:lstStyle>
           <a:p>
             <a:r>
-              <a:rPr lang="ru-RU" smtClean="0"/>
+              <a:rPr lang="ru-RU"/>
               <a:t>Образец подзаголовка</a:t>
             </a:r>
-            <a:endParaRPr lang="ru-RU"/>
           </a:p>
         </p:txBody>
       </p:sp>
@@ -820,7 +817,7 @@
           <a:p>
             <a:fld id="{E36C04D8-B49B-4D86-A6B2-820C9FC8BA05}" type="datetimeFigureOut">
               <a:rPr lang="ru-RU" smtClean="0"/>
-              <a:t>07.08.2025</a:t>
+              <a:t>08.08.2025</a:t>
             </a:fld>
             <a:endParaRPr lang="ru-RU"/>
           </a:p>
@@ -914,10 +911,9 @@
           <a:lstStyle/>
           <a:p>
             <a:r>
-              <a:rPr lang="ru-RU" smtClean="0"/>
+              <a:rPr lang="ru-RU"/>
               <a:t>Образец заголовка</a:t>
             </a:r>
-            <a:endParaRPr lang="ru-RU"/>
           </a:p>
         </p:txBody>
       </p:sp>
@@ -938,38 +934,37 @@
           <a:p>
             <a:pPr lvl="0"/>
             <a:r>
-              <a:rPr lang="ru-RU" smtClean="0"/>
+              <a:rPr lang="ru-RU"/>
               <a:t>Образец текста</a:t>
             </a:r>
           </a:p>
           <a:p>
             <a:pPr lvl="1"/>
             <a:r>
-              <a:rPr lang="ru-RU" smtClean="0"/>
+              <a:rPr lang="ru-RU"/>
               <a:t>Второй уровень</a:t>
             </a:r>
           </a:p>
           <a:p>
             <a:pPr lvl="2"/>
             <a:r>
-              <a:rPr lang="ru-RU" smtClean="0"/>
+              <a:rPr lang="ru-RU"/>
               <a:t>Третий уровень</a:t>
             </a:r>
           </a:p>
           <a:p>
             <a:pPr lvl="3"/>
             <a:r>
-              <a:rPr lang="ru-RU" smtClean="0"/>
+              <a:rPr lang="ru-RU"/>
               <a:t>Четвертый уровень</a:t>
             </a:r>
           </a:p>
           <a:p>
             <a:pPr lvl="4"/>
             <a:r>
-              <a:rPr lang="ru-RU" smtClean="0"/>
+              <a:rPr lang="ru-RU"/>
               <a:t>Пятый уровень</a:t>
             </a:r>
-            <a:endParaRPr lang="ru-RU"/>
           </a:p>
         </p:txBody>
       </p:sp>
@@ -990,7 +985,7 @@
           <a:p>
             <a:fld id="{E36C04D8-B49B-4D86-A6B2-820C9FC8BA05}" type="datetimeFigureOut">
               <a:rPr lang="ru-RU" smtClean="0"/>
-              <a:t>07.08.2025</a:t>
+              <a:t>08.08.2025</a:t>
             </a:fld>
             <a:endParaRPr lang="ru-RU"/>
           </a:p>
@@ -1089,10 +1084,9 @@
           <a:lstStyle/>
           <a:p>
             <a:r>
-              <a:rPr lang="ru-RU" smtClean="0"/>
+              <a:rPr lang="ru-RU"/>
               <a:t>Образец заголовка</a:t>
             </a:r>
-            <a:endParaRPr lang="ru-RU"/>
           </a:p>
         </p:txBody>
       </p:sp>
@@ -1118,38 +1112,37 @@
           <a:p>
             <a:pPr lvl="0"/>
             <a:r>
-              <a:rPr lang="ru-RU" smtClean="0"/>
+              <a:rPr lang="ru-RU"/>
               <a:t>Образец текста</a:t>
             </a:r>
           </a:p>
           <a:p>
             <a:pPr lvl="1"/>
             <a:r>
-              <a:rPr lang="ru-RU" smtClean="0"/>
+              <a:rPr lang="ru-RU"/>
               <a:t>Второй уровень</a:t>
             </a:r>
           </a:p>
           <a:p>
             <a:pPr lvl="2"/>
             <a:r>
-              <a:rPr lang="ru-RU" smtClean="0"/>
+              <a:rPr lang="ru-RU"/>
               <a:t>Третий уровень</a:t>
             </a:r>
           </a:p>
           <a:p>
             <a:pPr lvl="3"/>
             <a:r>
-              <a:rPr lang="ru-RU" smtClean="0"/>
+              <a:rPr lang="ru-RU"/>
               <a:t>Четвертый уровень</a:t>
             </a:r>
           </a:p>
           <a:p>
             <a:pPr lvl="4"/>
             <a:r>
-              <a:rPr lang="ru-RU" smtClean="0"/>
+              <a:rPr lang="ru-RU"/>
               <a:t>Пятый уровень</a:t>
             </a:r>
-            <a:endParaRPr lang="ru-RU"/>
           </a:p>
         </p:txBody>
       </p:sp>
@@ -1170,7 +1163,7 @@
           <a:p>
             <a:fld id="{E36C04D8-B49B-4D86-A6B2-820C9FC8BA05}" type="datetimeFigureOut">
               <a:rPr lang="ru-RU" smtClean="0"/>
-              <a:t>07.08.2025</a:t>
+              <a:t>08.08.2025</a:t>
             </a:fld>
             <a:endParaRPr lang="ru-RU"/>
           </a:p>
@@ -1264,10 +1257,9 @@
           <a:lstStyle/>
           <a:p>
             <a:r>
-              <a:rPr lang="ru-RU" smtClean="0"/>
+              <a:rPr lang="ru-RU"/>
               <a:t>Образец заголовка</a:t>
             </a:r>
-            <a:endParaRPr lang="ru-RU"/>
           </a:p>
         </p:txBody>
       </p:sp>
@@ -1288,38 +1280,37 @@
           <a:p>
             <a:pPr lvl="0"/>
             <a:r>
-              <a:rPr lang="ru-RU" smtClean="0"/>
+              <a:rPr lang="ru-RU"/>
               <a:t>Образец текста</a:t>
             </a:r>
           </a:p>
           <a:p>
             <a:pPr lvl="1"/>
             <a:r>
-              <a:rPr lang="ru-RU" smtClean="0"/>
+              <a:rPr lang="ru-RU"/>
               <a:t>Второй уровень</a:t>
             </a:r>
           </a:p>
           <a:p>
             <a:pPr lvl="2"/>
             <a:r>
-              <a:rPr lang="ru-RU" smtClean="0"/>
+              <a:rPr lang="ru-RU"/>
               <a:t>Третий уровень</a:t>
             </a:r>
           </a:p>
           <a:p>
             <a:pPr lvl="3"/>
             <a:r>
-              <a:rPr lang="ru-RU" smtClean="0"/>
+              <a:rPr lang="ru-RU"/>
               <a:t>Четвертый уровень</a:t>
             </a:r>
           </a:p>
           <a:p>
             <a:pPr lvl="4"/>
             <a:r>
-              <a:rPr lang="ru-RU" smtClean="0"/>
+              <a:rPr lang="ru-RU"/>
               <a:t>Пятый уровень</a:t>
             </a:r>
-            <a:endParaRPr lang="ru-RU"/>
           </a:p>
         </p:txBody>
       </p:sp>
@@ -1340,7 +1331,7 @@
           <a:p>
             <a:fld id="{E36C04D8-B49B-4D86-A6B2-820C9FC8BA05}" type="datetimeFigureOut">
               <a:rPr lang="ru-RU" smtClean="0"/>
-              <a:t>07.08.2025</a:t>
+              <a:t>08.08.2025</a:t>
             </a:fld>
             <a:endParaRPr lang="ru-RU"/>
           </a:p>
@@ -1443,10 +1434,9 @@
           </a:lstStyle>
           <a:p>
             <a:r>
-              <a:rPr lang="ru-RU" smtClean="0"/>
+              <a:rPr lang="ru-RU"/>
               <a:t>Образец заголовка</a:t>
             </a:r>
-            <a:endParaRPr lang="ru-RU"/>
           </a:p>
         </p:txBody>
       </p:sp>
@@ -1563,7 +1553,7 @@
           <a:p>
             <a:pPr lvl="0"/>
             <a:r>
-              <a:rPr lang="ru-RU" smtClean="0"/>
+              <a:rPr lang="ru-RU"/>
               <a:t>Образец текста</a:t>
             </a:r>
           </a:p>
@@ -1586,7 +1576,7 @@
           <a:p>
             <a:fld id="{E36C04D8-B49B-4D86-A6B2-820C9FC8BA05}" type="datetimeFigureOut">
               <a:rPr lang="ru-RU" smtClean="0"/>
-              <a:t>07.08.2025</a:t>
+              <a:t>08.08.2025</a:t>
             </a:fld>
             <a:endParaRPr lang="ru-RU"/>
           </a:p>
@@ -1680,10 +1670,9 @@
           <a:lstStyle/>
           <a:p>
             <a:r>
-              <a:rPr lang="ru-RU" smtClean="0"/>
+              <a:rPr lang="ru-RU"/>
               <a:t>Образец заголовка</a:t>
             </a:r>
-            <a:endParaRPr lang="ru-RU"/>
           </a:p>
         </p:txBody>
       </p:sp>
@@ -1709,38 +1698,37 @@
           <a:p>
             <a:pPr lvl="0"/>
             <a:r>
-              <a:rPr lang="ru-RU" smtClean="0"/>
+              <a:rPr lang="ru-RU"/>
               <a:t>Образец текста</a:t>
             </a:r>
           </a:p>
           <a:p>
             <a:pPr lvl="1"/>
             <a:r>
-              <a:rPr lang="ru-RU" smtClean="0"/>
+              <a:rPr lang="ru-RU"/>
               <a:t>Второй уровень</a:t>
             </a:r>
           </a:p>
           <a:p>
             <a:pPr lvl="2"/>
             <a:r>
-              <a:rPr lang="ru-RU" smtClean="0"/>
+              <a:rPr lang="ru-RU"/>
               <a:t>Третий уровень</a:t>
             </a:r>
           </a:p>
           <a:p>
             <a:pPr lvl="3"/>
             <a:r>
-              <a:rPr lang="ru-RU" smtClean="0"/>
+              <a:rPr lang="ru-RU"/>
               <a:t>Четвертый уровень</a:t>
             </a:r>
           </a:p>
           <a:p>
             <a:pPr lvl="4"/>
             <a:r>
-              <a:rPr lang="ru-RU" smtClean="0"/>
+              <a:rPr lang="ru-RU"/>
               <a:t>Пятый уровень</a:t>
             </a:r>
-            <a:endParaRPr lang="ru-RU"/>
           </a:p>
         </p:txBody>
       </p:sp>
@@ -1766,38 +1754,37 @@
           <a:p>
             <a:pPr lvl="0"/>
             <a:r>
-              <a:rPr lang="ru-RU" smtClean="0"/>
+              <a:rPr lang="ru-RU"/>
               <a:t>Образец текста</a:t>
             </a:r>
           </a:p>
           <a:p>
             <a:pPr lvl="1"/>
             <a:r>
-              <a:rPr lang="ru-RU" smtClean="0"/>
+              <a:rPr lang="ru-RU"/>
               <a:t>Второй уровень</a:t>
             </a:r>
           </a:p>
           <a:p>
             <a:pPr lvl="2"/>
             <a:r>
-              <a:rPr lang="ru-RU" smtClean="0"/>
+              <a:rPr lang="ru-RU"/>
               <a:t>Третий уровень</a:t>
             </a:r>
           </a:p>
           <a:p>
             <a:pPr lvl="3"/>
             <a:r>
-              <a:rPr lang="ru-RU" smtClean="0"/>
+              <a:rPr lang="ru-RU"/>
               <a:t>Четвертый уровень</a:t>
             </a:r>
           </a:p>
           <a:p>
             <a:pPr lvl="4"/>
             <a:r>
-              <a:rPr lang="ru-RU" smtClean="0"/>
+              <a:rPr lang="ru-RU"/>
               <a:t>Пятый уровень</a:t>
             </a:r>
-            <a:endParaRPr lang="ru-RU"/>
           </a:p>
         </p:txBody>
       </p:sp>
@@ -1818,7 +1805,7 @@
           <a:p>
             <a:fld id="{E36C04D8-B49B-4D86-A6B2-820C9FC8BA05}" type="datetimeFigureOut">
               <a:rPr lang="ru-RU" smtClean="0"/>
-              <a:t>07.08.2025</a:t>
+              <a:t>08.08.2025</a:t>
             </a:fld>
             <a:endParaRPr lang="ru-RU"/>
           </a:p>
@@ -1917,10 +1904,9 @@
           <a:lstStyle/>
           <a:p>
             <a:r>
-              <a:rPr lang="ru-RU" smtClean="0"/>
+              <a:rPr lang="ru-RU"/>
               <a:t>Образец заголовка</a:t>
             </a:r>
-            <a:endParaRPr lang="ru-RU"/>
           </a:p>
         </p:txBody>
       </p:sp>
@@ -1983,7 +1969,7 @@
           <a:p>
             <a:pPr lvl="0"/>
             <a:r>
-              <a:rPr lang="ru-RU" smtClean="0"/>
+              <a:rPr lang="ru-RU"/>
               <a:t>Образец текста</a:t>
             </a:r>
           </a:p>
@@ -2011,38 +1997,37 @@
           <a:p>
             <a:pPr lvl="0"/>
             <a:r>
-              <a:rPr lang="ru-RU" smtClean="0"/>
+              <a:rPr lang="ru-RU"/>
               <a:t>Образец текста</a:t>
             </a:r>
           </a:p>
           <a:p>
             <a:pPr lvl="1"/>
             <a:r>
-              <a:rPr lang="ru-RU" smtClean="0"/>
+              <a:rPr lang="ru-RU"/>
               <a:t>Второй уровень</a:t>
             </a:r>
           </a:p>
           <a:p>
             <a:pPr lvl="2"/>
             <a:r>
-              <a:rPr lang="ru-RU" smtClean="0"/>
+              <a:rPr lang="ru-RU"/>
               <a:t>Третий уровень</a:t>
             </a:r>
           </a:p>
           <a:p>
             <a:pPr lvl="3"/>
             <a:r>
-              <a:rPr lang="ru-RU" smtClean="0"/>
+              <a:rPr lang="ru-RU"/>
               <a:t>Четвертый уровень</a:t>
             </a:r>
           </a:p>
           <a:p>
             <a:pPr lvl="4"/>
             <a:r>
-              <a:rPr lang="ru-RU" smtClean="0"/>
+              <a:rPr lang="ru-RU"/>
               <a:t>Пятый уровень</a:t>
             </a:r>
-            <a:endParaRPr lang="ru-RU"/>
           </a:p>
         </p:txBody>
       </p:sp>
@@ -2105,7 +2090,7 @@
           <a:p>
             <a:pPr lvl="0"/>
             <a:r>
-              <a:rPr lang="ru-RU" smtClean="0"/>
+              <a:rPr lang="ru-RU"/>
               <a:t>Образец текста</a:t>
             </a:r>
           </a:p>
@@ -2133,38 +2118,37 @@
           <a:p>
             <a:pPr lvl="0"/>
             <a:r>
-              <a:rPr lang="ru-RU" smtClean="0"/>
+              <a:rPr lang="ru-RU"/>
               <a:t>Образец текста</a:t>
             </a:r>
           </a:p>
           <a:p>
             <a:pPr lvl="1"/>
             <a:r>
-              <a:rPr lang="ru-RU" smtClean="0"/>
+              <a:rPr lang="ru-RU"/>
               <a:t>Второй уровень</a:t>
             </a:r>
           </a:p>
           <a:p>
             <a:pPr lvl="2"/>
             <a:r>
-              <a:rPr lang="ru-RU" smtClean="0"/>
+              <a:rPr lang="ru-RU"/>
               <a:t>Третий уровень</a:t>
             </a:r>
           </a:p>
           <a:p>
             <a:pPr lvl="3"/>
             <a:r>
-              <a:rPr lang="ru-RU" smtClean="0"/>
+              <a:rPr lang="ru-RU"/>
               <a:t>Четвертый уровень</a:t>
             </a:r>
           </a:p>
           <a:p>
             <a:pPr lvl="4"/>
             <a:r>
-              <a:rPr lang="ru-RU" smtClean="0"/>
+              <a:rPr lang="ru-RU"/>
               <a:t>Пятый уровень</a:t>
             </a:r>
-            <a:endParaRPr lang="ru-RU"/>
           </a:p>
         </p:txBody>
       </p:sp>
@@ -2185,7 +2169,7 @@
           <a:p>
             <a:fld id="{E36C04D8-B49B-4D86-A6B2-820C9FC8BA05}" type="datetimeFigureOut">
               <a:rPr lang="ru-RU" smtClean="0"/>
-              <a:t>07.08.2025</a:t>
+              <a:t>08.08.2025</a:t>
             </a:fld>
             <a:endParaRPr lang="ru-RU"/>
           </a:p>
@@ -2279,10 +2263,9 @@
           <a:lstStyle/>
           <a:p>
             <a:r>
-              <a:rPr lang="ru-RU" smtClean="0"/>
+              <a:rPr lang="ru-RU"/>
               <a:t>Образец заголовка</a:t>
             </a:r>
-            <a:endParaRPr lang="ru-RU"/>
           </a:p>
         </p:txBody>
       </p:sp>
@@ -2303,7 +2286,7 @@
           <a:p>
             <a:fld id="{E36C04D8-B49B-4D86-A6B2-820C9FC8BA05}" type="datetimeFigureOut">
               <a:rPr lang="ru-RU" smtClean="0"/>
-              <a:t>07.08.2025</a:t>
+              <a:t>08.08.2025</a:t>
             </a:fld>
             <a:endParaRPr lang="ru-RU"/>
           </a:p>
@@ -2398,7 +2381,7 @@
           <a:p>
             <a:fld id="{E36C04D8-B49B-4D86-A6B2-820C9FC8BA05}" type="datetimeFigureOut">
               <a:rPr lang="ru-RU" smtClean="0"/>
-              <a:t>07.08.2025</a:t>
+              <a:t>08.08.2025</a:t>
             </a:fld>
             <a:endParaRPr lang="ru-RU"/>
           </a:p>
@@ -2501,10 +2484,9 @@
           </a:lstStyle>
           <a:p>
             <a:r>
-              <a:rPr lang="ru-RU" smtClean="0"/>
+              <a:rPr lang="ru-RU"/>
               <a:t>Образец заголовка</a:t>
             </a:r>
-            <a:endParaRPr lang="ru-RU"/>
           </a:p>
         </p:txBody>
       </p:sp>
@@ -2558,38 +2540,37 @@
           <a:p>
             <a:pPr lvl="0"/>
             <a:r>
-              <a:rPr lang="ru-RU" smtClean="0"/>
+              <a:rPr lang="ru-RU"/>
               <a:t>Образец текста</a:t>
             </a:r>
           </a:p>
           <a:p>
             <a:pPr lvl="1"/>
             <a:r>
-              <a:rPr lang="ru-RU" smtClean="0"/>
+              <a:rPr lang="ru-RU"/>
               <a:t>Второй уровень</a:t>
             </a:r>
           </a:p>
           <a:p>
             <a:pPr lvl="2"/>
             <a:r>
-              <a:rPr lang="ru-RU" smtClean="0"/>
+              <a:rPr lang="ru-RU"/>
               <a:t>Третий уровень</a:t>
             </a:r>
           </a:p>
           <a:p>
             <a:pPr lvl="3"/>
             <a:r>
-              <a:rPr lang="ru-RU" smtClean="0"/>
+              <a:rPr lang="ru-RU"/>
               <a:t>Четвертый уровень</a:t>
             </a:r>
           </a:p>
           <a:p>
             <a:pPr lvl="4"/>
             <a:r>
-              <a:rPr lang="ru-RU" smtClean="0"/>
+              <a:rPr lang="ru-RU"/>
               <a:t>Пятый уровень</a:t>
             </a:r>
-            <a:endParaRPr lang="ru-RU"/>
           </a:p>
         </p:txBody>
       </p:sp>
@@ -2652,7 +2633,7 @@
           <a:p>
             <a:pPr lvl="0"/>
             <a:r>
-              <a:rPr lang="ru-RU" smtClean="0"/>
+              <a:rPr lang="ru-RU"/>
               <a:t>Образец текста</a:t>
             </a:r>
           </a:p>
@@ -2675,7 +2656,7 @@
           <a:p>
             <a:fld id="{E36C04D8-B49B-4D86-A6B2-820C9FC8BA05}" type="datetimeFigureOut">
               <a:rPr lang="ru-RU" smtClean="0"/>
-              <a:t>07.08.2025</a:t>
+              <a:t>08.08.2025</a:t>
             </a:fld>
             <a:endParaRPr lang="ru-RU"/>
           </a:p>
@@ -2778,10 +2759,9 @@
           </a:lstStyle>
           <a:p>
             <a:r>
-              <a:rPr lang="ru-RU" smtClean="0"/>
+              <a:rPr lang="ru-RU"/>
               <a:t>Образец заголовка</a:t>
             </a:r>
-            <a:endParaRPr lang="ru-RU"/>
           </a:p>
         </p:txBody>
       </p:sp>
@@ -2905,7 +2885,7 @@
           <a:p>
             <a:pPr lvl="0"/>
             <a:r>
-              <a:rPr lang="ru-RU" smtClean="0"/>
+              <a:rPr lang="ru-RU"/>
               <a:t>Образец текста</a:t>
             </a:r>
           </a:p>
@@ -2928,7 +2908,7 @@
           <a:p>
             <a:fld id="{E36C04D8-B49B-4D86-A6B2-820C9FC8BA05}" type="datetimeFigureOut">
               <a:rPr lang="ru-RU" smtClean="0"/>
-              <a:t>07.08.2025</a:t>
+              <a:t>08.08.2025</a:t>
             </a:fld>
             <a:endParaRPr lang="ru-RU"/>
           </a:p>
@@ -3037,10 +3017,9 @@
           <a:lstStyle/>
           <a:p>
             <a:r>
-              <a:rPr lang="ru-RU" smtClean="0"/>
+              <a:rPr lang="ru-RU"/>
               <a:t>Образец заголовка</a:t>
             </a:r>
-            <a:endParaRPr lang="ru-RU"/>
           </a:p>
         </p:txBody>
       </p:sp>
@@ -3071,38 +3050,37 @@
           <a:p>
             <a:pPr lvl="0"/>
             <a:r>
-              <a:rPr lang="ru-RU" smtClean="0"/>
+              <a:rPr lang="ru-RU"/>
               <a:t>Образец текста</a:t>
             </a:r>
           </a:p>
           <a:p>
             <a:pPr lvl="1"/>
             <a:r>
-              <a:rPr lang="ru-RU" smtClean="0"/>
+              <a:rPr lang="ru-RU"/>
               <a:t>Второй уровень</a:t>
             </a:r>
           </a:p>
           <a:p>
             <a:pPr lvl="2"/>
             <a:r>
-              <a:rPr lang="ru-RU" smtClean="0"/>
+              <a:rPr lang="ru-RU"/>
               <a:t>Третий уровень</a:t>
             </a:r>
           </a:p>
           <a:p>
             <a:pPr lvl="3"/>
             <a:r>
-              <a:rPr lang="ru-RU" smtClean="0"/>
+              <a:rPr lang="ru-RU"/>
               <a:t>Четвертый уровень</a:t>
             </a:r>
           </a:p>
           <a:p>
             <a:pPr lvl="4"/>
             <a:r>
-              <a:rPr lang="ru-RU" smtClean="0"/>
+              <a:rPr lang="ru-RU"/>
               <a:t>Пятый уровень</a:t>
             </a:r>
-            <a:endParaRPr lang="ru-RU"/>
           </a:p>
         </p:txBody>
       </p:sp>
@@ -3141,7 +3119,7 @@
           <a:p>
             <a:fld id="{E36C04D8-B49B-4D86-A6B2-820C9FC8BA05}" type="datetimeFigureOut">
               <a:rPr lang="ru-RU" smtClean="0"/>
-              <a:t>07.08.2025</a:t>
+              <a:t>08.08.2025</a:t>
             </a:fld>
             <a:endParaRPr lang="ru-RU"/>
           </a:p>
@@ -3562,10 +3540,9 @@
           <a:lstStyle/>
           <a:p>
             <a:r>
-              <a:rPr lang="ru-RU" dirty="0" smtClean="0"/>
+              <a:rPr lang="ru-RU" dirty="0"/>
               <a:t>Многомерные временные ряды</a:t>
             </a:r>
-            <a:endParaRPr lang="ru-RU" dirty="0"/>
           </a:p>
         </p:txBody>
       </p:sp>
@@ -3598,13 +3575,6 @@
   <p:clrMapOvr>
     <a:masterClrMapping/>
   </p:clrMapOvr>
-  <p:timing>
-    <p:tnLst>
-      <p:par>
-        <p:cTn id="1" dur="indefinite" restart="never" nodeType="tmRoot"/>
-      </p:par>
-    </p:tnLst>
-  </p:timing>
 </p:sld>
 </file>
 
@@ -3670,34 +3640,34 @@
               <a:buNone/>
             </a:pPr>
             <a:r>
-              <a:rPr lang="ru-RU" b="1" dirty="0" smtClean="0"/>
+              <a:rPr lang="ru-RU" b="1" dirty="0"/>
               <a:t>Преимущества МВР:</a:t>
             </a:r>
-            <a:endParaRPr lang="ru-RU" dirty="0" smtClean="0"/>
-          </a:p>
-          <a:p>
-            <a:r>
-              <a:rPr lang="ru-RU" dirty="0" smtClean="0"/>
+            <a:endParaRPr lang="ru-RU" dirty="0"/>
+          </a:p>
+          <a:p>
+            <a:r>
+              <a:rPr lang="ru-RU" dirty="0"/>
               <a:t>Учет взаимосвязей между переменными </a:t>
             </a:r>
           </a:p>
           <a:p>
             <a:pPr lvl="1"/>
             <a:r>
-              <a:rPr lang="ru-RU" dirty="0" smtClean="0"/>
+              <a:rPr lang="ru-RU" dirty="0"/>
               <a:t>Анализ причинно-следственных связей</a:t>
             </a:r>
           </a:p>
           <a:p>
             <a:pPr lvl="1"/>
             <a:r>
-              <a:rPr lang="ru-RU" dirty="0" smtClean="0"/>
+              <a:rPr lang="ru-RU" dirty="0"/>
               <a:t>Обнаружение общих трендов и циклов</a:t>
             </a:r>
           </a:p>
           <a:p>
             <a:r>
-              <a:rPr lang="ru-RU" dirty="0" smtClean="0"/>
+              <a:rPr lang="ru-RU" dirty="0"/>
               <a:t>Возможность создания глобальных моделей – одна модель для группы ВР</a:t>
             </a:r>
           </a:p>
@@ -3706,28 +3676,28 @@
               <a:buNone/>
             </a:pPr>
             <a:r>
-              <a:rPr lang="ru-RU" b="1" dirty="0" smtClean="0"/>
+              <a:rPr lang="ru-RU" b="1" dirty="0"/>
               <a:t>Проблемы МВР:</a:t>
             </a:r>
-            <a:endParaRPr lang="ru-RU" dirty="0" smtClean="0"/>
-          </a:p>
-          <a:p>
-            <a:r>
-              <a:rPr lang="ru-RU" dirty="0" smtClean="0"/>
+            <a:endParaRPr lang="ru-RU" dirty="0"/>
+          </a:p>
+          <a:p>
+            <a:r>
+              <a:rPr lang="ru-RU" dirty="0"/>
               <a:t>Усложнение интерпретации</a:t>
             </a:r>
           </a:p>
           <a:p>
             <a:r>
-              <a:rPr lang="ru-RU" dirty="0" smtClean="0"/>
+              <a:rPr lang="ru-RU" dirty="0"/>
               <a:t>Усложнение подбора </a:t>
             </a:r>
             <a:r>
-              <a:rPr lang="ru-RU" dirty="0" err="1" smtClean="0"/>
+              <a:rPr lang="ru-RU" dirty="0" err="1"/>
               <a:t>гиперпараметров</a:t>
             </a:r>
             <a:r>
-              <a:rPr lang="ru-RU" dirty="0" smtClean="0"/>
+              <a:rPr lang="ru-RU" dirty="0"/>
               <a:t> глобальных моделей</a:t>
             </a:r>
           </a:p>
@@ -3746,21 +3716,6 @@
   <p:clrMapOvr>
     <a:masterClrMapping/>
   </p:clrMapOvr>
-  <mc:AlternateContent xmlns:mc="http://schemas.openxmlformats.org/markup-compatibility/2006">
-    <mc:Choice xmlns:p14="http://schemas.microsoft.com/office/powerpoint/2010/main" Requires="p14">
-      <p:transition spd="slow" p14:dur="2000"/>
-    </mc:Choice>
-    <mc:Fallback>
-      <p:transition spd="slow"/>
-    </mc:Fallback>
-  </mc:AlternateContent>
-  <p:timing>
-    <p:tnLst>
-      <p:par>
-        <p:cTn id="1" dur="indefinite" restart="never" nodeType="tmRoot"/>
-      </p:par>
-    </p:tnLst>
-  </p:timing>
 </p:sld>
 </file>
 
@@ -3802,10 +3757,9 @@
           <a:lstStyle/>
           <a:p>
             <a:r>
-              <a:rPr lang="ru-RU" dirty="0" smtClean="0"/>
+              <a:rPr lang="ru-RU" dirty="0"/>
               <a:t>Особенности предварительного анализа МВР</a:t>
             </a:r>
-            <a:endParaRPr lang="ru-RU" dirty="0"/>
           </a:p>
         </p:txBody>
       </p:sp>
@@ -3830,30 +3784,30 @@
           <a:lstStyle/>
           <a:p>
             <a:r>
-              <a:rPr lang="ru-RU" dirty="0" smtClean="0"/>
+              <a:rPr lang="ru-RU" dirty="0"/>
               <a:t>При МВР важно чтобы каждый ряд </a:t>
             </a:r>
             <a:r>
-              <a:rPr lang="ru-RU" dirty="0" err="1" smtClean="0"/>
+              <a:rPr lang="ru-RU" dirty="0" err="1"/>
               <a:t>небыл</a:t>
             </a:r>
             <a:r>
-              <a:rPr lang="ru-RU" dirty="0" smtClean="0"/>
+              <a:rPr lang="ru-RU" dirty="0"/>
               <a:t> сдвинутой копией другого. </a:t>
             </a:r>
           </a:p>
           <a:p>
             <a:pPr lvl="1"/>
             <a:r>
-              <a:rPr lang="ru-RU" smtClean="0"/>
+              <a:rPr lang="ru-RU"/>
               <a:t>Все </a:t>
             </a:r>
             <a:r>
-              <a:rPr lang="ru-RU" dirty="0" smtClean="0"/>
+              <a:rPr lang="ru-RU" dirty="0"/>
               <a:t>ВР должны быть </a:t>
             </a:r>
             <a:r>
-              <a:rPr lang="ru-RU" smtClean="0"/>
+              <a:rPr lang="ru-RU"/>
               <a:t>независимы.</a:t>
             </a:r>
           </a:p>
@@ -3872,21 +3826,6 @@
   <p:clrMapOvr>
     <a:masterClrMapping/>
   </p:clrMapOvr>
-  <mc:AlternateContent xmlns:mc="http://schemas.openxmlformats.org/markup-compatibility/2006">
-    <mc:Choice xmlns:p14="http://schemas.microsoft.com/office/powerpoint/2010/main" Requires="p14">
-      <p:transition spd="slow" p14:dur="2000"/>
-    </mc:Choice>
-    <mc:Fallback>
-      <p:transition spd="slow"/>
-    </mc:Fallback>
-  </mc:AlternateContent>
-  <p:timing>
-    <p:tnLst>
-      <p:par>
-        <p:cTn id="1" dur="indefinite" restart="never" nodeType="tmRoot"/>
-      </p:par>
-    </p:tnLst>
-  </p:timing>
 </p:sld>
 </file>
 
@@ -3930,10 +3869,9 @@
           <a:lstStyle/>
           <a:p>
             <a:r>
-              <a:rPr lang="ru-RU" dirty="0" smtClean="0"/>
+              <a:rPr lang="ru-RU" dirty="0"/>
               <a:t>Определение многомерных ВР</a:t>
             </a:r>
-            <a:endParaRPr lang="ru-RU" dirty="0"/>
           </a:p>
         </p:txBody>
       </p:sp>
@@ -3970,34 +3908,34 @@
               <a:buNone/>
             </a:pPr>
             <a:r>
-              <a:rPr lang="ru-RU" sz="2400" b="1" dirty="0" smtClean="0"/>
+              <a:rPr lang="ru-RU" sz="2400" b="1" dirty="0"/>
               <a:t>Многомерный временной ряд</a:t>
             </a:r>
             <a:r>
-              <a:rPr lang="en-US" sz="2400" b="1" dirty="0" smtClean="0"/>
+              <a:rPr lang="en-US" sz="2400" b="1" dirty="0"/>
               <a:t> </a:t>
             </a:r>
             <a:r>
-              <a:rPr lang="ru-RU" sz="2400" b="1" dirty="0" smtClean="0"/>
+              <a:rPr lang="ru-RU" sz="2400" b="1" dirty="0"/>
               <a:t>(МВР)</a:t>
             </a:r>
             <a:r>
-              <a:rPr lang="ru-RU" sz="2400" dirty="0" smtClean="0"/>
+              <a:rPr lang="ru-RU" sz="2400" dirty="0"/>
               <a:t> - это набор из одномерных временных рядов, наблюдаемых одновременно</a:t>
             </a:r>
             <a:r>
-              <a:rPr lang="en-US" sz="2400" dirty="0" smtClean="0"/>
+              <a:rPr lang="en-US" sz="2400" dirty="0"/>
               <a:t> </a:t>
             </a:r>
             <a:r>
-              <a:rPr lang="ru-RU" sz="2400" b="1" dirty="0" smtClean="0"/>
+              <a:rPr lang="ru-RU" sz="2400" b="1" dirty="0"/>
               <a:t>и имеющих общую информацию</a:t>
             </a:r>
             <a:r>
-              <a:rPr lang="en-US" sz="2400" b="1" dirty="0" smtClean="0"/>
+              <a:rPr lang="en-US" sz="2400" b="1" dirty="0"/>
               <a:t>!</a:t>
             </a:r>
-            <a:endParaRPr lang="ru-RU" altLang="ru-RU" sz="2400" b="1" dirty="0" smtClean="0"/>
+            <a:endParaRPr lang="ru-RU" altLang="ru-RU" sz="2400" b="1" dirty="0"/>
           </a:p>
           <a:p>
             <a:pPr eaLnBrk="0" fontAlgn="base" hangingPunct="0">
@@ -4012,12 +3950,8 @@
               </a:spcAft>
             </a:pPr>
             <a:r>
-              <a:rPr lang="ru-RU" altLang="ru-RU" sz="2400" dirty="0" smtClean="0"/>
-              <a:t>Экономические </a:t>
-            </a:r>
-            <a:r>
               <a:rPr lang="ru-RU" altLang="ru-RU" sz="2400" dirty="0"/>
-              <a:t>показатели: ВВП, инфляция, безработица </a:t>
+              <a:t>Экономические показатели: ВВП, инфляция, безработица </a:t>
             </a:r>
           </a:p>
           <a:p>
@@ -4151,13 +4085,6 @@
   <p:clrMapOvr>
     <a:masterClrMapping/>
   </p:clrMapOvr>
-  <p:timing>
-    <p:tnLst>
-      <p:par>
-        <p:cTn id="1" dur="indefinite" restart="never" nodeType="tmRoot"/>
-      </p:par>
-    </p:tnLst>
-  </p:timing>
 </p:sld>
 </file>
 
@@ -4200,10 +4127,9 @@
           <a:p>
             <a:pPr algn="ctr"/>
             <a:r>
-              <a:rPr lang="ru-RU" dirty="0" smtClean="0"/>
+              <a:rPr lang="ru-RU" dirty="0"/>
               <a:t>Типы ВР: Многомерные ВР</a:t>
             </a:r>
-            <a:endParaRPr lang="ru-RU" dirty="0"/>
           </a:p>
         </p:txBody>
       </p:sp>
@@ -4243,13 +4169,6 @@
   <p:clrMapOvr>
     <a:masterClrMapping/>
   </p:clrMapOvr>
-  <p:timing>
-    <p:tnLst>
-      <p:par>
-        <p:cTn id="1" dur="indefinite" restart="never" nodeType="tmRoot"/>
-      </p:par>
-    </p:tnLst>
-  </p:timing>
 </p:sld>
 </file>
 
@@ -4293,10 +4212,9 @@
           <a:lstStyle/>
           <a:p>
             <a:r>
-              <a:rPr lang="ru-RU" dirty="0" smtClean="0"/>
+              <a:rPr lang="ru-RU" dirty="0"/>
               <a:t>Определение многомерных ВР</a:t>
             </a:r>
-            <a:endParaRPr lang="ru-RU" dirty="0"/>
           </a:p>
         </p:txBody>
       </p:sp>
@@ -4404,13 +4322,7 @@
                         <a:rPr lang="ru-RU" sz="2000" u="none" strike="noStrike" dirty="0">
                           <a:effectLst/>
                         </a:rPr>
-                        <a:t>Одномерный ряд не улавливает влияние других </a:t>
-                      </a:r>
-                      <a:r>
-                        <a:rPr lang="ru-RU" sz="2000" u="none" strike="noStrike" dirty="0" smtClean="0">
-                          <a:effectLst/>
-                        </a:rPr>
-                        <a:t>связанных факторов</a:t>
+                        <a:t>Одномерный ряд не улавливает влияние других связанных факторов</a:t>
                       </a:r>
                       <a:endParaRPr lang="ru-RU" sz="2000" b="0" i="0" u="none" strike="noStrike" dirty="0">
                         <a:solidFill>
@@ -4430,13 +4342,13 @@
                     <a:p>
                       <a:pPr algn="ctr" fontAlgn="b"/>
                       <a:r>
-                        <a:rPr lang="ru-RU" sz="2000" u="none" strike="noStrike" dirty="0" smtClean="0">
+                        <a:rPr lang="ru-RU" sz="2000" u="none" strike="noStrike" dirty="0">
                           <a:effectLst/>
                         </a:rPr>
                         <a:t>Учет взаимного</a:t>
                       </a:r>
                       <a:r>
-                        <a:rPr lang="ru-RU" sz="2000" u="none" strike="noStrike" baseline="0" dirty="0" smtClean="0">
+                        <a:rPr lang="ru-RU" sz="2000" u="none" strike="noStrike" baseline="0" dirty="0">
                           <a:effectLst/>
                         </a:rPr>
                         <a:t> влияния ВР</a:t>
@@ -4466,7 +4378,7 @@
                     <a:p>
                       <a:pPr algn="ctr" fontAlgn="b"/>
                       <a:r>
-                        <a:rPr lang="ru-RU" sz="2000" b="0" i="0" u="none" strike="noStrike" dirty="0" smtClean="0">
+                        <a:rPr lang="ru-RU" sz="2000" b="0" i="0" u="none" strike="noStrike" dirty="0">
                           <a:solidFill>
                             <a:srgbClr val="000000"/>
                           </a:solidFill>
@@ -4475,13 +4387,6 @@
                         </a:rPr>
                         <a:t>Глобальные экзогенные факторы не учитываются</a:t>
                       </a:r>
-                      <a:endParaRPr lang="ru-RU" sz="2000" b="0" i="0" u="none" strike="noStrike" dirty="0">
-                        <a:solidFill>
-                          <a:srgbClr val="000000"/>
-                        </a:solidFill>
-                        <a:effectLst/>
-                        <a:latin typeface="Calibri" panose="020F0502020204030204" pitchFamily="34" charset="0"/>
-                      </a:endParaRPr>
                     </a:p>
                   </a:txBody>
                   <a:tcPr marL="9525" marR="9525" marT="9525" marB="0" anchor="ctr"/>
@@ -4493,7 +4398,7 @@
                     <a:p>
                       <a:pPr algn="ctr" fontAlgn="b"/>
                       <a:r>
-                        <a:rPr lang="ru-RU" sz="2000" b="0" i="0" u="none" strike="noStrike" dirty="0" smtClean="0">
+                        <a:rPr lang="ru-RU" sz="2000" b="0" i="0" u="none" strike="noStrike" dirty="0">
                           <a:solidFill>
                             <a:srgbClr val="000000"/>
                           </a:solidFill>
@@ -4502,13 +4407,6 @@
                         </a:rPr>
                         <a:t>учитываются</a:t>
                       </a:r>
-                      <a:endParaRPr lang="ru-RU" sz="2000" b="0" i="0" u="none" strike="noStrike" dirty="0">
-                        <a:solidFill>
-                          <a:srgbClr val="000000"/>
-                        </a:solidFill>
-                        <a:effectLst/>
-                        <a:latin typeface="Calibri" panose="020F0502020204030204" pitchFamily="34" charset="0"/>
-                      </a:endParaRPr>
                     </a:p>
                   </a:txBody>
                   <a:tcPr marL="9525" marR="9525" marT="9525" marB="0" anchor="ctr"/>
@@ -4530,16 +4428,10 @@
                         <a:rPr lang="ru-RU" sz="2000" u="none" strike="noStrike" dirty="0">
                           <a:effectLst/>
                         </a:rPr>
-                        <a:t>Нет оценки причинно-следственных </a:t>
+                        <a:t>Нет оценки причинно-следственных связей между</a:t>
                       </a:r>
                       <a:r>
-                        <a:rPr lang="ru-RU" sz="2000" u="none" strike="noStrike" dirty="0" smtClean="0">
-                          <a:effectLst/>
-                        </a:rPr>
-                        <a:t>связей между</a:t>
-                      </a:r>
-                      <a:r>
-                        <a:rPr lang="ru-RU" sz="2000" u="none" strike="noStrike" baseline="0" dirty="0" smtClean="0">
+                        <a:rPr lang="ru-RU" sz="2000" u="none" strike="noStrike" baseline="0" dirty="0">
                           <a:effectLst/>
                         </a:rPr>
                         <a:t> всеми связанным переменными</a:t>
@@ -4571,16 +4463,10 @@
                         <a:rPr lang="en-US" sz="2000" u="none" strike="noStrike" dirty="0">
                           <a:effectLst/>
                         </a:rPr>
-                        <a:t>Granger </a:t>
+                        <a:t>Granger causality</a:t>
                       </a:r>
                       <a:r>
-                        <a:rPr lang="en-US" sz="2000" u="none" strike="noStrike" dirty="0" smtClean="0">
-                          <a:effectLst/>
-                        </a:rPr>
-                        <a:t>causality</a:t>
-                      </a:r>
-                      <a:r>
-                        <a:rPr lang="ru-RU" sz="2000" u="none" strike="noStrike" dirty="0" smtClean="0">
+                        <a:rPr lang="ru-RU" sz="2000" u="none" strike="noStrike" dirty="0">
                           <a:effectLst/>
                         </a:rPr>
                         <a:t> </a:t>
@@ -4610,7 +4496,7 @@
                     <a:p>
                       <a:pPr algn="ctr" fontAlgn="b"/>
                       <a:r>
-                        <a:rPr lang="ru-RU" sz="2000" b="0" i="0" u="none" strike="noStrike" dirty="0" smtClean="0">
+                        <a:rPr lang="ru-RU" sz="2000" b="0" i="0" u="none" strike="noStrike" dirty="0">
                           <a:solidFill>
                             <a:srgbClr val="000000"/>
                           </a:solidFill>
@@ -4619,13 +4505,6 @@
                         </a:rPr>
                         <a:t>Прогноз нестабильности при шоках внешних факторов</a:t>
                       </a:r>
-                      <a:endParaRPr lang="ru-RU" sz="2000" b="0" i="0" u="none" strike="noStrike" dirty="0">
-                        <a:solidFill>
-                          <a:srgbClr val="000000"/>
-                        </a:solidFill>
-                        <a:effectLst/>
-                        <a:latin typeface="Calibri" panose="020F0502020204030204" pitchFamily="34" charset="0"/>
-                      </a:endParaRPr>
                     </a:p>
                   </a:txBody>
                   <a:tcPr marL="9525" marR="9525" marT="9525" marB="0" anchor="ctr"/>
@@ -4653,12 +4532,12 @@
                         <a:defRPr/>
                       </a:pPr>
                       <a:r>
-                        <a:rPr lang="ru-RU" sz="2000" u="none" strike="noStrike" dirty="0" smtClean="0">
+                        <a:rPr lang="ru-RU" sz="2000" u="none" strike="noStrike" dirty="0">
                           <a:effectLst/>
                         </a:rPr>
                         <a:t>МВР учитывает реакцию всей системы</a:t>
                       </a:r>
-                      <a:endParaRPr lang="ru-RU" sz="2000" b="0" i="0" u="none" strike="noStrike" dirty="0" smtClean="0">
+                      <a:endParaRPr lang="ru-RU" sz="2000" b="0" i="0" u="none" strike="noStrike" dirty="0">
                         <a:solidFill>
                           <a:srgbClr val="000000"/>
                         </a:solidFill>
@@ -4696,16 +4575,10 @@
                         <a:rPr lang="ru-RU" sz="2000" u="none" strike="noStrike" dirty="0">
                           <a:effectLst/>
                         </a:rPr>
-                        <a:t>Много похожих рядов (1000 </a:t>
+                        <a:t>Много похожих рядов (1000 датчиков температуры в техпроцессе) требуют</a:t>
                       </a:r>
                       <a:r>
-                        <a:rPr lang="ru-RU" sz="2000" u="none" strike="noStrike" dirty="0" smtClean="0">
-                          <a:effectLst/>
-                        </a:rPr>
-                        <a:t>датчиков температуры в техпроцессе) требуют</a:t>
-                      </a:r>
-                      <a:r>
-                        <a:rPr lang="ru-RU" sz="2000" u="none" strike="noStrike" baseline="0" dirty="0" smtClean="0">
+                        <a:rPr lang="ru-RU" sz="2000" u="none" strike="noStrike" baseline="0" dirty="0">
                           <a:effectLst/>
                         </a:rPr>
                         <a:t> настройки разных моделей</a:t>
@@ -4775,30 +4648,29 @@
           <a:lstStyle/>
           <a:p>
             <a:r>
-              <a:rPr lang="ru-RU" dirty="0" smtClean="0"/>
+              <a:rPr lang="ru-RU" dirty="0"/>
               <a:t>Если единичные ВР – это описание только соответствующей переменной,</a:t>
             </a:r>
           </a:p>
           <a:p>
             <a:pPr lvl="1"/>
             <a:r>
-              <a:rPr lang="ru-RU" dirty="0" smtClean="0"/>
+              <a:rPr lang="ru-RU" dirty="0"/>
               <a:t>ВР с экзогенными факторами – описание ВР и объясняющих его переменных</a:t>
             </a:r>
           </a:p>
           <a:p>
             <a:r>
-              <a:rPr lang="ru-RU" dirty="0" smtClean="0"/>
+              <a:rPr lang="ru-RU" dirty="0"/>
               <a:t>То многомерные ВР (МВР) – это описание системы</a:t>
             </a:r>
           </a:p>
           <a:p>
             <a:pPr lvl="1"/>
             <a:r>
-              <a:rPr lang="ru-RU" dirty="0" smtClean="0"/>
+              <a:rPr lang="ru-RU" dirty="0"/>
               <a:t>Включает как ВР, так и их связи – более полное описание</a:t>
             </a:r>
-            <a:endParaRPr lang="ru-RU" dirty="0"/>
           </a:p>
         </p:txBody>
       </p:sp>
@@ -4812,13 +4684,6 @@
   <p:clrMapOvr>
     <a:masterClrMapping/>
   </p:clrMapOvr>
-  <p:timing>
-    <p:tnLst>
-      <p:par>
-        <p:cTn id="1" dur="indefinite" restart="never" nodeType="tmRoot"/>
-      </p:par>
-    </p:tnLst>
-  </p:timing>
 </p:sld>
 </file>
 
@@ -4863,15 +4728,14 @@
           <a:p>
             <a:pPr algn="ctr"/>
             <a:r>
-              <a:rPr lang="ru-RU" dirty="0" smtClean="0"/>
+              <a:rPr lang="ru-RU" dirty="0"/>
               <a:t>Векторная авторегрессия</a:t>
             </a:r>
-            <a:endParaRPr lang="ru-RU" dirty="0"/>
           </a:p>
         </p:txBody>
       </p:sp>
-      <mc:AlternateContent xmlns:mc="http://schemas.openxmlformats.org/markup-compatibility/2006">
-        <mc:Choice xmlns:a14="http://schemas.microsoft.com/office/drawing/2010/main" Requires="a14">
+      <mc:AlternateContent xmlns:mc="http://schemas.openxmlformats.org/markup-compatibility/2006" xmlns:a14="http://schemas.microsoft.com/office/drawing/2010/main">
+        <mc:Choice Requires="a14">
           <p:sp>
             <p:nvSpPr>
               <p:cNvPr id="3" name="Объект 2"/>
@@ -4904,15 +4768,15 @@
                   <a:buNone/>
                 </a:pPr>
                 <a:r>
-                  <a:rPr lang="ru-RU" sz="2400" dirty="0" smtClean="0"/>
+                  <a:rPr lang="ru-RU" sz="2400" dirty="0"/>
                   <a:t>Если все ВР в МВР стационарны</a:t>
                 </a:r>
                 <a:r>
-                  <a:rPr lang="en-US" sz="2400" dirty="0" smtClean="0"/>
+                  <a:rPr lang="en-US" sz="2400" dirty="0"/>
                   <a:t> </a:t>
                 </a:r>
                 <a:r>
-                  <a:rPr lang="ru-RU" sz="2400" dirty="0" smtClean="0"/>
+                  <a:rPr lang="ru-RU" sz="2400" dirty="0"/>
                   <a:t>и не коррелируют, то для каждого ВР можно ввести </a:t>
                 </a:r>
               </a:p>
@@ -5332,13 +5196,7 @@
                                     <a:rPr lang="en-US" sz="2400" i="1">
                                       <a:latin typeface="Cambria Math" panose="02040503050406030204" pitchFamily="18" charset="0"/>
                                     </a:rPr>
-                                    <m:t>,</m:t>
-                                  </m:r>
-                                  <m:r>
-                                    <a:rPr lang="en-US" sz="2400" b="0" i="1" smtClean="0">
-                                      <a:latin typeface="Cambria Math" panose="02040503050406030204" pitchFamily="18" charset="0"/>
-                                    </a:rPr>
-                                    <m:t>2</m:t>
+                                    <m:t>,2</m:t>
                                   </m:r>
                                 </m:sub>
                               </m:sSub>
@@ -5369,13 +5227,7 @@
                                     <a:rPr lang="en-US" sz="2400" i="1">
                                       <a:latin typeface="Cambria Math" panose="02040503050406030204" pitchFamily="18" charset="0"/>
                                     </a:rPr>
-                                    <m:t>1</m:t>
-                                  </m:r>
-                                  <m:r>
-                                    <a:rPr lang="en-US" sz="2400" i="1">
-                                      <a:latin typeface="Cambria Math" panose="02040503050406030204" pitchFamily="18" charset="0"/>
-                                    </a:rPr>
-                                    <m:t>,</m:t>
+                                    <m:t>1,</m:t>
                                   </m:r>
                                   <m:r>
                                     <a:rPr lang="en-US" sz="2400" b="0" i="1" smtClean="0">
@@ -5443,13 +5295,7 @@
                                     <a:rPr lang="en-US" sz="2400" i="1">
                                       <a:latin typeface="Cambria Math" panose="02040503050406030204" pitchFamily="18" charset="0"/>
                                     </a:rPr>
-                                    <m:t>2</m:t>
-                                  </m:r>
-                                  <m:r>
-                                    <a:rPr lang="en-US" sz="2400" i="1">
-                                      <a:latin typeface="Cambria Math" panose="02040503050406030204" pitchFamily="18" charset="0"/>
-                                    </a:rPr>
-                                    <m:t>,</m:t>
+                                    <m:t>2,</m:t>
                                   </m:r>
                                   <m:r>
                                     <a:rPr lang="en-US" sz="2400" b="0" i="1" smtClean="0">
@@ -5662,13 +5508,7 @@
                                     <a:rPr lang="en-US" sz="2400" i="1">
                                       <a:latin typeface="Cambria Math" panose="02040503050406030204" pitchFamily="18" charset="0"/>
                                     </a:rPr>
-                                    <m:t>1</m:t>
-                                  </m:r>
-                                  <m:r>
-                                    <a:rPr lang="en-US" sz="2400" i="1">
-                                      <a:latin typeface="Cambria Math" panose="02040503050406030204" pitchFamily="18" charset="0"/>
-                                    </a:rPr>
-                                    <m:t>,</m:t>
+                                    <m:t>1,</m:t>
                                   </m:r>
                                   <m:r>
                                     <a:rPr lang="en-US" sz="2400" b="0" i="1" smtClean="0">
@@ -5742,13 +5582,7 @@
                                     <a:rPr lang="en-US" sz="2400" i="1">
                                       <a:latin typeface="Cambria Math" panose="02040503050406030204" pitchFamily="18" charset="0"/>
                                     </a:rPr>
-                                    <m:t>2</m:t>
-                                  </m:r>
-                                  <m:r>
-                                    <a:rPr lang="en-US" sz="2400" i="1">
-                                      <a:latin typeface="Cambria Math" panose="02040503050406030204" pitchFamily="18" charset="0"/>
-                                    </a:rPr>
-                                    <m:t>,</m:t>
+                                    <m:t>2,</m:t>
                                   </m:r>
                                   <m:r>
                                     <a:rPr lang="en-US" sz="2400" b="0" i="1" smtClean="0">
@@ -5802,7 +5636,7 @@
                     </m:oMath>
                   </m:oMathPara>
                 </a14:m>
-                <a:endParaRPr lang="en-US" sz="2400" dirty="0" smtClean="0"/>
+                <a:endParaRPr lang="en-US" sz="2400" dirty="0"/>
               </a:p>
               <a:p>
                 <a:pPr marL="0" indent="0">
@@ -5815,7 +5649,7 @@
                   <a:buNone/>
                 </a:pPr>
                 <a:r>
-                  <a:rPr lang="ru-RU" sz="2400" dirty="0" smtClean="0"/>
+                  <a:rPr lang="ru-RU" sz="2400" dirty="0"/>
                   <a:t>Где </a:t>
                 </a:r>
                 <a14:m>
@@ -5835,7 +5669,7 @@
                   </m:oMath>
                 </a14:m>
                 <a:r>
-                  <a:rPr lang="ru-RU" sz="2400" b="0" i="0" dirty="0" smtClean="0">
+                  <a:rPr lang="ru-RU" sz="2400" b="0" i="0" dirty="0">
                     <a:latin typeface="+mj-lt"/>
                   </a:rPr>
                   <a:t>число ВР.</a:t>
@@ -5852,7 +5686,7 @@
                   <a:buNone/>
                 </a:pPr>
                 <a:r>
-                  <a:rPr lang="ru-RU" sz="2400" dirty="0" smtClean="0">
+                  <a:rPr lang="ru-RU" sz="2400" dirty="0">
                     <a:latin typeface="+mj-lt"/>
                   </a:rPr>
                   <a:t>Или в матричной форме</a:t>
@@ -6209,7 +6043,7 @@
                     </m:oMath>
                   </m:oMathPara>
                 </a14:m>
-                <a:endParaRPr lang="en-US" sz="2400" dirty="0" smtClean="0"/>
+                <a:endParaRPr lang="en-US" sz="2400" dirty="0"/>
               </a:p>
               <a:p>
                 <a:pPr marL="0" indent="0">
@@ -6222,11 +6056,11 @@
                   <a:buNone/>
                 </a:pPr>
                 <a:r>
-                  <a:rPr lang="ru-RU" sz="2400" dirty="0" smtClean="0"/>
+                  <a:rPr lang="ru-RU" sz="2400" dirty="0"/>
                   <a:t>Где</a:t>
                 </a:r>
                 <a:r>
-                  <a:rPr lang="en-US" sz="2400" dirty="0" smtClean="0"/>
+                  <a:rPr lang="en-US" sz="2400" dirty="0"/>
                   <a:t> </a:t>
                 </a:r>
                 <a14:m>
@@ -6358,19 +6192,19 @@
                   </m:oMath>
                 </a14:m>
                 <a:r>
-                  <a:rPr lang="en-US" sz="2400" b="0" i="0" dirty="0" smtClean="0">
+                  <a:rPr lang="en-US" sz="2400" b="0" i="0" dirty="0">
                     <a:latin typeface="+mj-lt"/>
                   </a:rPr>
                   <a:t>- </a:t>
                 </a:r>
                 <a:r>
-                  <a:rPr lang="ru-RU" sz="2400" b="0" i="0" dirty="0" smtClean="0">
+                  <a:rPr lang="ru-RU" sz="2400" b="0" i="0" dirty="0">
                     <a:latin typeface="+mj-lt"/>
                   </a:rPr>
                   <a:t>вектор наблюдений в момент </a:t>
                 </a:r>
                 <a:r>
-                  <a:rPr lang="en-US" sz="2400" b="0" i="0" dirty="0" smtClean="0">
+                  <a:rPr lang="en-US" sz="2400" b="0" i="0" dirty="0">
                     <a:latin typeface="+mj-lt"/>
                   </a:rPr>
                   <a:t>n;</a:t>
@@ -6552,15 +6386,15 @@
                   </m:oMath>
                 </a14:m>
                 <a:r>
-                  <a:rPr lang="en-US" sz="2400" dirty="0" smtClean="0"/>
+                  <a:rPr lang="en-US" sz="2400" dirty="0"/>
                   <a:t> - </a:t>
                 </a:r>
                 <a:r>
-                  <a:rPr lang="ru-RU" sz="2400" dirty="0" smtClean="0"/>
+                  <a:rPr lang="ru-RU" sz="2400" dirty="0"/>
                   <a:t>вектор предсказаний в момент </a:t>
                 </a:r>
                 <a:r>
-                  <a:rPr lang="en-US" sz="2400" dirty="0" smtClean="0"/>
+                  <a:rPr lang="en-US" sz="2400" dirty="0"/>
                   <a:t>n+1, </a:t>
                 </a:r>
                 <a14:m>
@@ -6692,20 +6526,12 @@
                   </m:oMath>
                 </a14:m>
                 <a:r>
-                  <a:rPr lang="en-US" sz="2400" dirty="0" smtClean="0"/>
+                  <a:rPr lang="en-US" sz="2400" dirty="0"/>
                   <a:t> - </a:t>
                 </a:r>
                 <a:r>
-                  <a:rPr lang="ru-RU" sz="2400" dirty="0" smtClean="0"/>
-                  <a:t>вектор коэффициент</a:t>
-                </a:r>
-                <a:r>
                   <a:rPr lang="ru-RU" sz="2400" dirty="0"/>
-                  <a:t>ы</a:t>
-                </a:r>
-                <a:r>
-                  <a:rPr lang="ru-RU" sz="2400" dirty="0" smtClean="0"/>
-                  <a:t> авторегрессии </a:t>
+                  <a:t>вектор коэффициенты авторегрессии </a:t>
                 </a:r>
                 <a14:m>
                   <m:oMath xmlns:m="http://schemas.openxmlformats.org/officeDocument/2006/math">
@@ -6736,7 +6562,7 @@
                   <a:buNone/>
                 </a:pPr>
                 <a:r>
-                  <a:rPr lang="ru-RU" sz="2400" dirty="0" smtClean="0"/>
+                  <a:rPr lang="ru-RU" sz="2400" dirty="0"/>
                   <a:t>Модель </a:t>
                 </a:r>
                 <a14:m>
@@ -6890,18 +6716,17 @@
                   </m:oMath>
                 </a14:m>
                 <a:r>
-                  <a:rPr lang="ru-RU" sz="2400" dirty="0" smtClean="0"/>
+                  <a:rPr lang="ru-RU" sz="2400" dirty="0"/>
                   <a:t> - </a:t>
                 </a:r>
                 <a:r>
-                  <a:rPr lang="ru-RU" sz="2400" b="1" dirty="0" smtClean="0"/>
+                  <a:rPr lang="ru-RU" sz="2400" b="1" dirty="0"/>
                   <a:t>модель векторной авторегрессии - </a:t>
                 </a:r>
                 <a:r>
-                  <a:rPr lang="en-US" sz="2400" b="1" dirty="0" smtClean="0"/>
+                  <a:rPr lang="en-US" sz="2400" b="1" dirty="0"/>
                   <a:t>VAR</a:t>
                 </a:r>
-                <a:endParaRPr lang="en-US" sz="2400" b="1" dirty="0"/>
               </a:p>
               <a:p>
                 <a:pPr marL="0" indent="0">
@@ -6914,11 +6739,11 @@
                   <a:buNone/>
                 </a:pPr>
                 <a:r>
-                  <a:rPr lang="ru-RU" sz="2400" i="1" dirty="0" smtClean="0"/>
+                  <a:rPr lang="ru-RU" sz="2400" i="1" dirty="0"/>
                   <a:t>Иногда вводят и более полные модели </a:t>
                 </a:r>
                 <a:r>
-                  <a:rPr lang="en-US" sz="2400" i="1" dirty="0" smtClean="0"/>
+                  <a:rPr lang="en-US" sz="2400" i="1" dirty="0"/>
                   <a:t>VARMA</a:t>
                 </a:r>
               </a:p>
@@ -6933,27 +6758,26 @@
                   <a:buNone/>
                 </a:pPr>
                 <a:r>
-                  <a:rPr lang="ru-RU" sz="2400" i="1" dirty="0" smtClean="0"/>
+                  <a:rPr lang="ru-RU" sz="2400" i="1" dirty="0"/>
                   <a:t>	</a:t>
                 </a:r>
                 <a:r>
-                  <a:rPr lang="ru-RU" sz="2000" i="1" dirty="0" smtClean="0"/>
+                  <a:rPr lang="ru-RU" sz="2000" i="1" dirty="0"/>
                   <a:t>Если ВР не стационары, просто </a:t>
                 </a:r>
                 <a:r>
-                  <a:rPr lang="en-US" sz="2000" i="1" dirty="0" smtClean="0"/>
+                  <a:rPr lang="en-US" sz="2000" i="1" dirty="0"/>
                   <a:t>VARIMA </a:t>
                 </a:r>
                 <a:r>
-                  <a:rPr lang="ru-RU" sz="2000" i="1" dirty="0" smtClean="0"/>
+                  <a:rPr lang="ru-RU" sz="2000" i="1" dirty="0"/>
                   <a:t>может быть недостаточно! </a:t>
                 </a:r>
-                <a:endParaRPr lang="ru-RU" sz="2000" i="1" dirty="0"/>
               </a:p>
             </p:txBody>
           </p:sp>
         </mc:Choice>
-        <mc:Fallback>
+        <mc:Fallback xmlns="">
           <p:sp>
             <p:nvSpPr>
               <p:cNvPr id="3" name="Объект 2"/>
@@ -7029,13 +6853,6 @@
   <p:clrMapOvr>
     <a:masterClrMapping/>
   </p:clrMapOvr>
-  <p:timing>
-    <p:tnLst>
-      <p:par>
-        <p:cTn id="1" dur="indefinite" restart="never" nodeType="tmRoot"/>
-      </p:par>
-    </p:tnLst>
-  </p:timing>
 </p:sld>
 </file>
 
@@ -7080,15 +6897,14 @@
           <a:p>
             <a:pPr algn="ctr"/>
             <a:r>
-              <a:rPr lang="ru-RU" b="1" dirty="0" smtClean="0"/>
+              <a:rPr lang="ru-RU" b="1" dirty="0"/>
               <a:t>Типы связей в МВР</a:t>
             </a:r>
-            <a:endParaRPr lang="ru-RU" b="1" dirty="0"/>
           </a:p>
         </p:txBody>
       </p:sp>
-      <mc:AlternateContent xmlns:mc="http://schemas.openxmlformats.org/markup-compatibility/2006">
-        <mc:Choice xmlns:a14="http://schemas.microsoft.com/office/drawing/2010/main" Requires="a14">
+      <mc:AlternateContent xmlns:mc="http://schemas.openxmlformats.org/markup-compatibility/2006" xmlns:a14="http://schemas.microsoft.com/office/drawing/2010/main">
+        <mc:Choice Requires="a14">
           <p:sp>
             <p:nvSpPr>
               <p:cNvPr id="3" name="Объект 2"/>
@@ -7118,19 +6934,19 @@
                   <a:buNone/>
                 </a:pPr>
                 <a:r>
-                  <a:rPr lang="ru-RU" sz="2200" b="1" dirty="0" smtClean="0"/>
+                  <a:rPr lang="ru-RU" sz="2200" b="1" dirty="0"/>
                   <a:t>В МВР – </a:t>
                 </a:r>
                 <a:r>
-                  <a:rPr lang="ru-RU" sz="2200" dirty="0" smtClean="0"/>
+                  <a:rPr lang="ru-RU" sz="2200" dirty="0"/>
                   <a:t>отдельные</a:t>
                 </a:r>
                 <a:r>
-                  <a:rPr lang="ru-RU" sz="2200" b="1" dirty="0" smtClean="0"/>
+                  <a:rPr lang="ru-RU" sz="2200" b="1" dirty="0"/>
                   <a:t> </a:t>
                 </a:r>
                 <a:r>
-                  <a:rPr lang="ru-RU" sz="2200" dirty="0" smtClean="0"/>
+                  <a:rPr lang="ru-RU" sz="2200" dirty="0"/>
                   <a:t>ВР могут показать зависимость своих значений от других ВР в системе. То есть ВР связаны.</a:t>
                 </a:r>
               </a:p>
@@ -7141,11 +6957,11 @@
                   </a:lnSpc>
                 </a:pPr>
                 <a:r>
-                  <a:rPr lang="ru-RU" sz="2200" b="1" dirty="0" smtClean="0"/>
+                  <a:rPr lang="ru-RU" sz="2200" b="1" dirty="0"/>
                   <a:t>Корреляционная связь </a:t>
                 </a:r>
                 <a:r>
-                  <a:rPr lang="ru-RU" sz="2200" dirty="0" smtClean="0"/>
+                  <a:rPr lang="ru-RU" sz="2200" dirty="0"/>
                   <a:t>– ВР имеют линейную зависимость</a:t>
                 </a:r>
               </a:p>
@@ -7156,24 +6972,8 @@
                   </a:lnSpc>
                 </a:pPr>
                 <a:r>
-                  <a:rPr lang="ru-RU" sz="2200" dirty="0" smtClean="0"/>
-                  <a:t>Примеры: </a:t>
-                </a:r>
-                <a:r>
                   <a:rPr lang="ru-RU" sz="2200" dirty="0"/>
-                  <a:t>Температура и </a:t>
-                </a:r>
-                <a:r>
-                  <a:rPr lang="ru-RU" sz="2200" dirty="0" smtClean="0"/>
-                  <a:t>давление </a:t>
-                </a:r>
-                <a:r>
-                  <a:rPr lang="ru-RU" sz="2200" dirty="0"/>
-                  <a:t>в </a:t>
-                </a:r>
-                <a:r>
-                  <a:rPr lang="ru-RU" sz="2200" dirty="0" smtClean="0"/>
-                  <a:t>баке.</a:t>
+                  <a:t>Примеры: Температура и давление в баке.</a:t>
                 </a:r>
               </a:p>
               <a:p>
@@ -7190,25 +6990,19 @@
                   <a:rPr lang="ru-RU" sz="2000" dirty="0"/>
                   <a:t>– корреляция с лагом в сезон, </a:t>
                 </a:r>
-                <a:r>
-                  <a:rPr lang="ru-RU" sz="2000" dirty="0" smtClean="0"/>
-                  <a:t/>
-                </a:r>
                 <a:br>
-                  <a:rPr lang="ru-RU" sz="2000" dirty="0" smtClean="0"/>
+                  <a:rPr lang="ru-RU" sz="2000" dirty="0"/>
                 </a:br>
                 <a:r>
                   <a:rPr lang="ru-RU" sz="2100" dirty="0"/>
-                  <a:t>например, закупка сырья</a:t>
-                </a:r>
-                <a:r>
-                  <a:rPr lang="ru-RU" sz="2100" dirty="0"/>
-                  <a:t> </a:t>
+                  <a:t>например, закупка сырья </a:t>
                 </a:r>
                 <a14:m>
                   <m:oMath xmlns:m="http://schemas.openxmlformats.org/officeDocument/2006/math">
                     <m:r>
-                      <a:rPr lang="ru-RU" sz="2100"/>
+                      <a:rPr lang="ru-RU" sz="2100">
+                        <a:latin typeface="Cambria Math" panose="02040503050406030204" pitchFamily="18" charset="0"/>
+                      </a:rPr>
                       <m:t>↔</m:t>
                     </m:r>
                   </m:oMath>
@@ -7245,17 +7039,13 @@
                 </a:r>
                 <a:r>
                   <a:rPr lang="ru-RU" sz="2200" dirty="0"/>
-                  <a:t>Процентные ставки → </a:t>
-                </a:r>
-                <a:r>
-                  <a:rPr lang="ru-RU" sz="2200" dirty="0" smtClean="0"/>
-                  <a:t>инфляция, направление ветра → изменение в погоде </a:t>
+                  <a:t>Процентные ставки → инфляция, направление ветра → изменение в погоде </a:t>
                 </a:r>
                 <a:br>
-                  <a:rPr lang="ru-RU" sz="2200" dirty="0" smtClean="0"/>
+                  <a:rPr lang="ru-RU" sz="2200" dirty="0"/>
                 </a:br>
                 <a:r>
-                  <a:rPr lang="ru-RU" sz="2200" b="1" dirty="0" smtClean="0"/>
+                  <a:rPr lang="ru-RU" sz="2200" b="1" dirty="0"/>
                   <a:t>(но не наоборот!)</a:t>
                 </a:r>
               </a:p>
@@ -7266,10 +7056,9 @@
                   </a:lnSpc>
                 </a:pPr>
                 <a:r>
-                  <a:rPr lang="ru-RU" sz="2200" dirty="0" smtClean="0"/>
+                  <a:rPr lang="ru-RU" sz="2200" dirty="0"/>
                   <a:t>В отличии от сезонной корреляции ВР в казуальности связь причинная (только опережающая), а не симметричная (характеристика динамики ВР). Например перед дождем падает давление (но нет связи наоборот).</a:t>
                 </a:r>
-                <a:endParaRPr lang="ru-RU" sz="2200" dirty="0"/>
               </a:p>
               <a:p>
                 <a:pPr algn="just">
@@ -7278,31 +7067,23 @@
                   </a:lnSpc>
                 </a:pPr>
                 <a:r>
-                  <a:rPr lang="ru-RU" sz="2200" b="1" dirty="0" err="1" smtClean="0"/>
+                  <a:rPr lang="ru-RU" sz="2200" b="1" dirty="0" err="1"/>
                   <a:t>Коинтеграционная</a:t>
                 </a:r>
                 <a:r>
-                  <a:rPr lang="ru-RU" sz="2200" b="1" dirty="0" smtClean="0"/>
+                  <a:rPr lang="ru-RU" sz="2200" b="1" dirty="0"/>
                   <a:t> связь </a:t>
                 </a:r>
                 <a:r>
-                  <a:rPr lang="ru-RU" sz="2200" dirty="0" smtClean="0"/>
-                  <a:t>– </a:t>
-                </a:r>
-                <a:r>
                   <a:rPr lang="ru-RU" sz="2200" dirty="0"/>
-                  <a:t>Нестационарные ряды в долгосрочной перспективе "движутся вместе" — их линейная комбинация </a:t>
-                </a:r>
-                <a:r>
-                  <a:rPr lang="ru-RU" sz="2200" dirty="0" smtClean="0"/>
-                  <a:t>стационарна (</a:t>
-                </a:r>
-                <a:r>
-                  <a:rPr lang="ru-RU" sz="2200" dirty="0" err="1" smtClean="0"/>
+                  <a:t>– Нестационарные ряды в долгосрочной перспективе "движутся вместе" — их линейная комбинация стационарна (</a:t>
+                </a:r>
+                <a:r>
+                  <a:rPr lang="ru-RU" sz="2200" dirty="0" err="1"/>
                   <a:t>коинтеграция</a:t>
                 </a:r>
                 <a:r>
-                  <a:rPr lang="ru-RU" sz="2200" dirty="0" smtClean="0"/>
+                  <a:rPr lang="ru-RU" sz="2200" dirty="0"/>
                   <a:t> 1го порядка).</a:t>
                 </a:r>
               </a:p>
@@ -7313,7 +7094,7 @@
                   </a:lnSpc>
                 </a:pPr>
                 <a:r>
-                  <a:rPr lang="ru-RU" sz="2200" dirty="0" smtClean="0"/>
+                  <a:rPr lang="ru-RU" sz="2200" dirty="0"/>
                   <a:t>система не стационарных ВР до порядка дифференцирования </a:t>
                 </a:r>
                 <a14:m>
@@ -7333,16 +7114,12 @@
                   </m:oMath>
                 </a14:m>
                 <a:r>
-                  <a:rPr lang="en-US" sz="2200" dirty="0" smtClean="0"/>
+                  <a:rPr lang="en-US" sz="2200" dirty="0"/>
                   <a:t> </a:t>
                 </a:r>
                 <a:r>
-                  <a:rPr lang="ru-RU" sz="2200" dirty="0" smtClean="0"/>
-                  <a:t>ВР составляет линейную комбинацию, имеющую не стационарность </a:t>
-                </a:r>
-                <a:r>
                   <a:rPr lang="ru-RU" sz="2200" dirty="0"/>
-                  <a:t>ВР до порядка дифференцирования </a:t>
+                  <a:t>ВР составляет линейную комбинацию, имеющую не стационарность ВР до порядка дифференцирования </a:t>
                 </a:r>
                 <a14:m>
                   <m:oMath xmlns:m="http://schemas.openxmlformats.org/officeDocument/2006/math">
@@ -7366,7 +7143,7 @@
                     </m:r>
                   </m:oMath>
                 </a14:m>
-                <a:endParaRPr lang="en-US" sz="2200" dirty="0" smtClean="0"/>
+                <a:endParaRPr lang="en-US" sz="2200" dirty="0"/>
               </a:p>
               <a:p>
                 <a:pPr lvl="2">
@@ -7375,23 +7152,15 @@
                   </a:lnSpc>
                 </a:pPr>
                 <a:r>
-                  <a:rPr lang="ru-RU" sz="2200" dirty="0" smtClean="0"/>
-                  <a:t>Пример: </a:t>
-                </a:r>
-                <a:r>
                   <a:rPr lang="ru-RU" sz="2200" dirty="0"/>
-                  <a:t>Цены на сырую нефть и </a:t>
-                </a:r>
-                <a:r>
-                  <a:rPr lang="ru-RU" sz="2200" dirty="0" smtClean="0"/>
-                  <a:t>бензин (их разность (маржа) – стационарна)</a:t>
-                </a:r>
-                <a:endParaRPr lang="en-US" sz="2200" dirty="0" smtClean="0"/>
+                  <a:t>Пример: Цены на сырую нефть и бензин (их разность (маржа) – стационарна)</a:t>
+                </a:r>
+                <a:endParaRPr lang="en-US" sz="2200" dirty="0"/>
               </a:p>
             </p:txBody>
           </p:sp>
         </mc:Choice>
-        <mc:Fallback>
+        <mc:Fallback xmlns="">
           <p:sp>
             <p:nvSpPr>
               <p:cNvPr id="3" name="Объект 2"/>
@@ -7439,13 +7208,6 @@
   <p:clrMapOvr>
     <a:masterClrMapping/>
   </p:clrMapOvr>
-  <p:timing>
-    <p:tnLst>
-      <p:par>
-        <p:cTn id="1" dur="indefinite" restart="never" nodeType="tmRoot"/>
-      </p:par>
-    </p:tnLst>
-  </p:timing>
 </p:sld>
 </file>
 
@@ -7478,7 +7240,7 @@
         </p:nvSpPr>
         <p:spPr>
           <a:xfrm>
-            <a:off x="838200" y="365126"/>
+            <a:off x="838200" y="216188"/>
             <a:ext cx="10515600" cy="621846"/>
           </a:xfrm>
         </p:spPr>
@@ -7490,7 +7252,7 @@
           <a:p>
             <a:pPr algn="ctr"/>
             <a:r>
-              <a:rPr lang="ru-RU" b="1" dirty="0" err="1" smtClean="0"/>
+              <a:rPr lang="ru-RU" b="1" dirty="0" err="1"/>
               <a:t>Коинтегрированность</a:t>
             </a:r>
             <a:endParaRPr lang="ru-RU" b="1" dirty="0"/>
@@ -7509,7 +7271,7 @@
         </p:nvSpPr>
         <p:spPr>
           <a:xfrm>
-            <a:off x="295729" y="986972"/>
+            <a:off x="295729" y="745208"/>
             <a:ext cx="11600542" cy="4351338"/>
           </a:xfrm>
         </p:spPr>
@@ -7529,28 +7291,16 @@
               <a:buNone/>
             </a:pPr>
             <a:r>
-              <a:rPr lang="ru-RU" sz="2400" dirty="0" smtClean="0"/>
-              <a:t>Если два ВР X </a:t>
-            </a:r>
-            <a:r>
               <a:rPr lang="ru-RU" sz="2400" dirty="0"/>
-              <a:t>и Y </a:t>
-            </a:r>
-            <a:r>
-              <a:rPr lang="ru-RU" sz="2400" dirty="0" smtClean="0"/>
-              <a:t>имеют стационарность разностей</a:t>
-            </a:r>
-            <a:r>
-              <a:rPr lang="en-US" sz="2400" dirty="0" smtClean="0"/>
+              <a:t>Если два ВР X и Y имеют стационарность разностей</a:t>
+            </a:r>
+            <a:r>
+              <a:rPr lang="en-US" sz="2400" dirty="0"/>
               <a:t> </a:t>
             </a:r>
             <a:r>
-              <a:rPr lang="ru-RU" sz="2400" dirty="0" smtClean="0"/>
-              <a:t> </a:t>
-            </a:r>
-            <a:r>
               <a:rPr lang="ru-RU" sz="2400" dirty="0"/>
-              <a:t>I(1) и если существует θ , такое, что Y− </a:t>
+              <a:t> I(1) и если существует θ , такое, что Y− </a:t>
             </a:r>
             <a:r>
               <a:rPr lang="ru-RU" sz="2400" dirty="0" err="1"/>
@@ -7561,36 +7311,12 @@
               <a:t> равно I(0) , то X и Y </a:t>
             </a:r>
             <a:r>
-              <a:rPr lang="ru-RU" sz="2400" dirty="0" err="1" smtClean="0"/>
+              <a:rPr lang="ru-RU" sz="2400" dirty="0" err="1"/>
               <a:t>коинтегрированы</a:t>
             </a:r>
             <a:r>
-              <a:rPr lang="ru-RU" sz="2400" dirty="0" smtClean="0"/>
-              <a:t>. </a:t>
-            </a:r>
-            <a:r>
               <a:rPr lang="ru-RU" sz="2400" dirty="0"/>
-              <a:t>Иными словами, </a:t>
-            </a:r>
-            <a:r>
-              <a:rPr lang="ru-RU" sz="2400" dirty="0" smtClean="0"/>
-              <a:t>X </a:t>
-            </a:r>
-            <a:r>
-              <a:rPr lang="ru-RU" sz="2400" dirty="0"/>
-              <a:t>и Y имеют одинаковый или общий стохастический тренд </a:t>
-            </a:r>
-            <a:r>
-              <a:rPr lang="ru-RU" sz="2400" dirty="0" smtClean="0"/>
-              <a:t>этот </a:t>
-            </a:r>
-            <a:r>
-              <a:rPr lang="ru-RU" sz="2400" dirty="0"/>
-              <a:t>тренд можно устранить, взяв </a:t>
-            </a:r>
-            <a:r>
-              <a:rPr lang="ru-RU" sz="2400" dirty="0" smtClean="0"/>
-              <a:t>разницу ВР.</a:t>
+              <a:t>. Иными словами, X и Y имеют одинаковый или общий стохастический тренд этот тренд можно устранить, взяв разницу ВР.</a:t>
             </a:r>
           </a:p>
           <a:p>
@@ -7603,15 +7329,15 @@
               </a:spcBef>
             </a:pPr>
             <a:r>
-              <a:rPr lang="ru-RU" sz="2400" dirty="0" smtClean="0"/>
+              <a:rPr lang="ru-RU" sz="2400" dirty="0"/>
               <a:t>Технически </a:t>
             </a:r>
             <a:r>
-              <a:rPr lang="ru-RU" sz="2400" dirty="0" err="1" smtClean="0"/>
+              <a:rPr lang="ru-RU" sz="2400" dirty="0" err="1"/>
               <a:t>коинтеграция</a:t>
             </a:r>
             <a:r>
-              <a:rPr lang="ru-RU" sz="2400" dirty="0" smtClean="0"/>
+              <a:rPr lang="ru-RU" sz="2400" dirty="0"/>
               <a:t> может быть и выше 1 порядка. </a:t>
             </a:r>
           </a:p>
@@ -7625,11 +7351,11 @@
               </a:spcBef>
             </a:pPr>
             <a:r>
-              <a:rPr lang="ru-RU" sz="2400" dirty="0" err="1" smtClean="0"/>
+              <a:rPr lang="ru-RU" sz="2400" dirty="0" err="1"/>
               <a:t>Коинтеграция</a:t>
             </a:r>
             <a:r>
-              <a:rPr lang="ru-RU" sz="2400" dirty="0" smtClean="0"/>
+              <a:rPr lang="ru-RU" sz="2400" dirty="0"/>
               <a:t> может быть для нескольких рядов, не только для двух.</a:t>
             </a:r>
           </a:p>
@@ -7667,8 +7393,8 @@
         </p:blipFill>
         <p:spPr bwMode="auto">
           <a:xfrm>
-            <a:off x="7789506" y="3520077"/>
-            <a:ext cx="4254521" cy="2343150"/>
+            <a:off x="6610120" y="2855701"/>
+            <a:ext cx="5460848" cy="3007526"/>
           </a:xfrm>
           <a:prstGeom prst="rect">
             <a:avLst/>
@@ -7736,77 +7462,76 @@
           <a:lstStyle/>
           <a:p>
             <a:r>
-              <a:rPr lang="ru-RU" sz="2000" b="1" dirty="0" smtClean="0"/>
+              <a:rPr lang="ru-RU" sz="2000" b="1" dirty="0"/>
               <a:t>Интуиция</a:t>
             </a:r>
             <a:r>
-              <a:rPr lang="ru-RU" sz="2000" dirty="0" smtClean="0"/>
+              <a:rPr lang="ru-RU" sz="2000" dirty="0"/>
               <a:t>: если авторегрессия – это зависимость ВР </a:t>
             </a:r>
             <a:r>
-              <a:rPr lang="en-US" sz="2000" dirty="0" smtClean="0"/>
+              <a:rPr lang="en-US" sz="2000" dirty="0"/>
               <a:t>Y</a:t>
             </a:r>
             <a:r>
-              <a:rPr lang="ru-RU" sz="2000" dirty="0" smtClean="0"/>
+              <a:rPr lang="ru-RU" sz="2000" dirty="0"/>
               <a:t> от своих лагов, </a:t>
             </a:r>
             <a:br>
-              <a:rPr lang="ru-RU" sz="2000" dirty="0" smtClean="0"/>
+              <a:rPr lang="ru-RU" sz="2000" dirty="0"/>
             </a:br>
             <a:r>
-              <a:rPr lang="ru-RU" sz="2000" dirty="0" smtClean="0"/>
+              <a:rPr lang="ru-RU" sz="2000" dirty="0"/>
               <a:t>то </a:t>
             </a:r>
             <a:r>
-              <a:rPr lang="ru-RU" sz="2000" dirty="0" err="1" smtClean="0"/>
+              <a:rPr lang="ru-RU" sz="2000" dirty="0" err="1"/>
               <a:t>коинтеграция</a:t>
             </a:r>
             <a:r>
-              <a:rPr lang="ru-RU" sz="2000" dirty="0" smtClean="0"/>
+              <a:rPr lang="ru-RU" sz="2000" dirty="0"/>
               <a:t> – зависимость от ВР </a:t>
             </a:r>
             <a:r>
-              <a:rPr lang="en-US" sz="2000" dirty="0" smtClean="0"/>
+              <a:rPr lang="en-US" sz="2000" dirty="0"/>
               <a:t>Y </a:t>
             </a:r>
             <a:r>
-              <a:rPr lang="ru-RU" sz="2000" dirty="0" smtClean="0"/>
+              <a:rPr lang="ru-RU" sz="2000" dirty="0"/>
               <a:t>от лагов другого ВР</a:t>
             </a:r>
             <a:r>
-              <a:rPr lang="en-US" sz="2000" dirty="0" smtClean="0"/>
+              <a:rPr lang="en-US" sz="2000" dirty="0"/>
               <a:t> X</a:t>
             </a:r>
             <a:r>
-              <a:rPr lang="ru-RU" sz="2000" dirty="0" smtClean="0"/>
+              <a:rPr lang="ru-RU" sz="2000" dirty="0"/>
               <a:t>.</a:t>
             </a:r>
             <a:r>
-              <a:rPr lang="en-US" sz="2000" dirty="0" smtClean="0"/>
+              <a:rPr lang="en-US" sz="2000" dirty="0"/>
               <a:t> </a:t>
             </a:r>
             <a:r>
-              <a:rPr lang="ru-RU" sz="2000" dirty="0" smtClean="0"/>
+              <a:rPr lang="ru-RU" sz="2000" dirty="0"/>
               <a:t> Например если </a:t>
             </a:r>
             <a:r>
-              <a:rPr lang="en-US" sz="2000" dirty="0" smtClean="0"/>
+              <a:rPr lang="en-US" sz="2000" dirty="0"/>
               <a:t>e X </a:t>
             </a:r>
             <a:r>
-              <a:rPr lang="ru-RU" sz="2000" dirty="0" smtClean="0"/>
+              <a:rPr lang="ru-RU" sz="2000" dirty="0"/>
               <a:t>и </a:t>
             </a:r>
             <a:r>
-              <a:rPr lang="en-US" sz="2000" dirty="0" smtClean="0"/>
+              <a:rPr lang="en-US" sz="2000" dirty="0"/>
               <a:t>Y </a:t>
             </a:r>
             <a:r>
-              <a:rPr lang="ru-RU" sz="2000" dirty="0" smtClean="0"/>
+              <a:rPr lang="ru-RU" sz="2000" dirty="0"/>
               <a:t>совместный тренд. </a:t>
             </a:r>
-            <a:endParaRPr lang="ru-RU" sz="2000" dirty="0"/>
           </a:p>
         </p:txBody>
       </p:sp>
@@ -7826,8 +7551,8 @@
         </p:blipFill>
         <p:spPr>
           <a:xfrm>
-            <a:off x="838200" y="3071856"/>
-            <a:ext cx="3763247" cy="2441480"/>
+            <a:off x="838200" y="2783621"/>
+            <a:ext cx="4449896" cy="2886957"/>
           </a:xfrm>
           <a:prstGeom prst="rect">
             <a:avLst/>
@@ -7856,28 +7581,16 @@
           <a:lstStyle/>
           <a:p>
             <a:r>
-              <a:rPr lang="ru-RU" i="1" dirty="0" smtClean="0"/>
-              <a:t>Напр. Brent</a:t>
-            </a:r>
-            <a:r>
               <a:rPr lang="ru-RU" i="1" dirty="0"/>
-              <a:t>−0.8⋅Бензин−0.7⋅Дизель∼</a:t>
-            </a:r>
-            <a:r>
-              <a:rPr lang="ru-RU" i="1" dirty="0" smtClean="0"/>
-              <a:t>I(0)</a:t>
-            </a:r>
-            <a:r>
-              <a:rPr lang="en-US" i="1" dirty="0" smtClean="0"/>
+              <a:t>Напр. Brent−0.8⋅Бензин−0.7⋅Дизель∼I(0)</a:t>
+            </a:r>
+            <a:r>
+              <a:rPr lang="en-US" i="1" dirty="0"/>
               <a:t>-</a:t>
             </a:r>
             <a:r>
-              <a:rPr lang="ru-RU" i="1" dirty="0" smtClean="0"/>
-              <a:t> маржа </a:t>
-            </a:r>
-            <a:r>
               <a:rPr lang="ru-RU" i="1" dirty="0"/>
-              <a:t>между нефтью и продуктами стабильна — возможен арбитраж. </a:t>
+              <a:t> маржа между нефтью и продуктами стабильна — возможен арбитраж. </a:t>
             </a:r>
           </a:p>
         </p:txBody>
@@ -7890,7 +7603,7 @@
         </p:nvSpPr>
         <p:spPr>
           <a:xfrm>
-            <a:off x="4069640" y="3071856"/>
+            <a:off x="6498304" y="2657789"/>
             <a:ext cx="5081840" cy="338554"/>
           </a:xfrm>
           <a:prstGeom prst="rect">
@@ -7937,7 +7650,7 @@
         </p:blipFill>
         <p:spPr bwMode="auto">
           <a:xfrm>
-            <a:off x="8372474" y="3685579"/>
+            <a:off x="7281804" y="3194255"/>
             <a:ext cx="1333501" cy="152400"/>
           </a:xfrm>
           <a:prstGeom prst="rect">
@@ -7965,13 +7678,6 @@
   <p:clrMapOvr>
     <a:masterClrMapping/>
   </p:clrMapOvr>
-  <p:timing>
-    <p:tnLst>
-      <p:par>
-        <p:cTn id="1" dur="indefinite" restart="never" nodeType="tmRoot"/>
-      </p:par>
-    </p:tnLst>
-  </p:timing>
 </p:sld>
 </file>
 
@@ -8016,15 +7722,15 @@
           <a:p>
             <a:pPr algn="ctr"/>
             <a:r>
-              <a:rPr lang="ru-RU" b="1" dirty="0" err="1" smtClean="0"/>
+              <a:rPr lang="ru-RU" b="1" dirty="0" err="1"/>
               <a:t>Коинтегрированность</a:t>
             </a:r>
             <a:endParaRPr lang="ru-RU" b="1" dirty="0"/>
           </a:p>
         </p:txBody>
       </p:sp>
-      <mc:AlternateContent xmlns:mc="http://schemas.openxmlformats.org/markup-compatibility/2006">
-        <mc:Choice xmlns:a14="http://schemas.microsoft.com/office/drawing/2010/main" Requires="a14">
+      <mc:AlternateContent xmlns:mc="http://schemas.openxmlformats.org/markup-compatibility/2006" xmlns:a14="http://schemas.microsoft.com/office/drawing/2010/main">
+        <mc:Choice Requires="a14">
           <p:sp>
             <p:nvSpPr>
               <p:cNvPr id="3" name="Объект 2"/>
@@ -8057,28 +7763,16 @@
                   <a:buNone/>
                 </a:pPr>
                 <a:r>
-                  <a:rPr lang="ru-RU" sz="2400" dirty="0" smtClean="0"/>
-                  <a:t>Если два ВР X </a:t>
-                </a:r>
-                <a:r>
                   <a:rPr lang="ru-RU" sz="2400" dirty="0"/>
-                  <a:t>и Y </a:t>
-                </a:r>
-                <a:r>
-                  <a:rPr lang="ru-RU" sz="2400" dirty="0" smtClean="0"/>
-                  <a:t>имеют стационарность разностей</a:t>
-                </a:r>
-                <a:r>
-                  <a:rPr lang="en-US" sz="2400" dirty="0" smtClean="0"/>
+                  <a:t>Если два ВР X и Y имеют стационарность разностей</a:t>
+                </a:r>
+                <a:r>
+                  <a:rPr lang="en-US" sz="2400" dirty="0"/>
                   <a:t> </a:t>
                 </a:r>
                 <a:r>
-                  <a:rPr lang="ru-RU" sz="2400" dirty="0" smtClean="0"/>
-                  <a:t> </a:t>
-                </a:r>
-                <a:r>
                   <a:rPr lang="ru-RU" sz="2400" dirty="0"/>
-                  <a:t>I(1) и если существует θ , такое, что Y− </a:t>
+                  <a:t> I(1) и если существует θ , такое, что Y− </a:t>
                 </a:r>
                 <a:r>
                   <a:rPr lang="ru-RU" sz="2400" dirty="0" err="1"/>
@@ -8089,11 +7783,11 @@
                   <a:t> равно I(0) , то X и Y </a:t>
                 </a:r>
                 <a:r>
-                  <a:rPr lang="ru-RU" sz="2400" dirty="0" err="1" smtClean="0"/>
+                  <a:rPr lang="ru-RU" sz="2400" dirty="0" err="1"/>
                   <a:t>коинтегрированы</a:t>
                 </a:r>
                 <a:r>
-                  <a:rPr lang="ru-RU" sz="2400" dirty="0" smtClean="0"/>
+                  <a:rPr lang="ru-RU" sz="2400" dirty="0"/>
                   <a:t>. </a:t>
                 </a:r>
               </a:p>
@@ -8107,20 +7801,16 @@
                   </a:spcBef>
                 </a:pPr>
                 <a:r>
-                  <a:rPr lang="ru-RU" sz="2400" dirty="0" smtClean="0"/>
+                  <a:rPr lang="ru-RU" sz="2400" dirty="0"/>
                   <a:t>Если θ известна, </a:t>
                 </a:r>
                 <a:r>
-                  <a:rPr lang="ru-RU" sz="2400" dirty="0" err="1" smtClean="0"/>
+                  <a:rPr lang="ru-RU" sz="2400" dirty="0" err="1"/>
                   <a:t>коинтеграция</a:t>
                 </a:r>
                 <a:r>
-                  <a:rPr lang="ru-RU" sz="2400" dirty="0" smtClean="0"/>
-                  <a:t> – проверка </a:t>
-                </a:r>
-                <a:r>
                   <a:rPr lang="ru-RU" sz="2400" dirty="0"/>
-                  <a:t>Y− </a:t>
+                  <a:t> – проверка Y− </a:t>
                 </a:r>
                 <a:r>
                   <a:rPr lang="ru-RU" sz="2400" dirty="0" err="1"/>
@@ -8128,11 +7818,7 @@
                 </a:r>
                 <a:r>
                   <a:rPr lang="ru-RU" sz="2400" dirty="0"/>
-                  <a:t> </a:t>
-                </a:r>
-                <a:r>
-                  <a:rPr lang="ru-RU" sz="2400" dirty="0" smtClean="0"/>
-                  <a:t> на стационарность</a:t>
+                  <a:t>  на стационарность</a:t>
                 </a:r>
               </a:p>
               <a:p>
@@ -8146,31 +7832,15 @@
                 </a:pPr>
                 <a:r>
                   <a:rPr lang="ru-RU" sz="2400" dirty="0"/>
-                  <a:t>Если θ </a:t>
-                </a:r>
-                <a:r>
-                  <a:rPr lang="ru-RU" sz="2400" dirty="0" smtClean="0"/>
-                  <a:t>не известна, то можно оценить регрессией и проверить остатки </a:t>
-                </a:r>
-                <a:r>
-                  <a:rPr lang="ru-RU" sz="2400" dirty="0"/>
-                  <a:t>Y− </a:t>
+                  <a:t>Если θ не известна, то можно оценить регрессией и проверить остатки Y− </a:t>
                 </a:r>
                 <a:r>
                   <a:rPr lang="ru-RU" sz="2400" dirty="0" err="1"/>
                   <a:t>θX</a:t>
                 </a:r>
                 <a:r>
-                  <a:rPr lang="ru-RU" sz="2400" dirty="0" smtClean="0"/>
-                  <a:t>  на </a:t>
-                </a:r>
-                <a:r>
                   <a:rPr lang="ru-RU" sz="2400" dirty="0"/>
-                  <a:t>стационарность </a:t>
-                </a:r>
-                <a:r>
-                  <a:rPr lang="ru-RU" sz="2400" dirty="0" smtClean="0"/>
-                  <a:t>(тест </a:t>
+                  <a:t>  на стационарность (тест </a:t>
                 </a:r>
                 <a:r>
                   <a:rPr lang="ru-RU" sz="2400" dirty="0" err="1"/>
@@ -8207,19 +7877,19 @@
                   </a:spcBef>
                 </a:pPr>
                 <a:r>
-                  <a:rPr lang="ru-RU" sz="2400" dirty="0" smtClean="0"/>
+                  <a:rPr lang="ru-RU" sz="2400" dirty="0"/>
                   <a:t>Также можно оценить </a:t>
                 </a:r>
                 <a:r>
-                  <a:rPr lang="ru-RU" sz="2400" dirty="0" err="1" smtClean="0"/>
+                  <a:rPr lang="ru-RU" sz="2400" dirty="0" err="1"/>
                   <a:t>коинтеграцию</a:t>
                 </a:r>
                 <a:r>
-                  <a:rPr lang="ru-RU" sz="2400" dirty="0" smtClean="0"/>
+                  <a:rPr lang="ru-RU" sz="2400" dirty="0"/>
                   <a:t> как добавку к </a:t>
                 </a:r>
                 <a:r>
-                  <a:rPr lang="en-US" sz="2400" dirty="0" smtClean="0"/>
+                  <a:rPr lang="en-US" sz="2400" dirty="0"/>
                   <a:t>VAR:</a:t>
                 </a:r>
               </a:p>
@@ -8443,7 +8113,7 @@
                     </m:oMath>
                   </m:oMathPara>
                 </a14:m>
-                <a:endParaRPr lang="ru-RU" sz="1800" dirty="0" smtClean="0"/>
+                <a:endParaRPr lang="ru-RU" sz="1800" dirty="0"/>
               </a:p>
               <a:p>
                 <a:pPr marL="457200" lvl="1" indent="0">
@@ -8456,7 +8126,7 @@
                   <a:buNone/>
                 </a:pPr>
                 <a:r>
-                  <a:rPr lang="ru-RU" dirty="0" smtClean="0"/>
+                  <a:rPr lang="ru-RU" dirty="0"/>
                   <a:t>где </a:t>
                 </a:r>
                 <a14:m>
@@ -8570,11 +8240,11 @@
                   </m:oMath>
                 </a14:m>
                 <a:r>
-                  <a:rPr lang="ru-RU" dirty="0" smtClean="0"/>
+                  <a:rPr lang="ru-RU" dirty="0"/>
                   <a:t> - </a:t>
                 </a:r>
                 <a:r>
-                  <a:rPr lang="en-US" dirty="0" smtClean="0"/>
+                  <a:rPr lang="en-US" dirty="0"/>
                   <a:t>VAR, </a:t>
                 </a:r>
                 <a14:m>
@@ -8588,35 +8258,35 @@
                   </m:oMath>
                 </a14:m>
                 <a:r>
-                  <a:rPr lang="en-US" b="1" dirty="0" smtClean="0"/>
+                  <a:rPr lang="en-US" b="1" dirty="0"/>
                   <a:t> – </a:t>
                 </a:r>
                 <a:r>
-                  <a:rPr lang="ru-RU" b="1" dirty="0" smtClean="0"/>
+                  <a:rPr lang="ru-RU" b="1" dirty="0"/>
                   <a:t>матрица </a:t>
                 </a:r>
                 <a:r>
-                  <a:rPr lang="ru-RU" b="1" dirty="0" err="1" smtClean="0"/>
+                  <a:rPr lang="ru-RU" b="1" dirty="0" err="1"/>
                   <a:t>коинтеграции</a:t>
                 </a:r>
                 <a:r>
-                  <a:rPr lang="ru-RU" b="1" dirty="0" smtClean="0"/>
+                  <a:rPr lang="ru-RU" b="1" dirty="0"/>
                   <a:t> ранга </a:t>
                 </a:r>
                 <a:r>
-                  <a:rPr lang="en-US" b="1" dirty="0" smtClean="0"/>
+                  <a:rPr lang="en-US" b="1" dirty="0"/>
                   <a:t>r</a:t>
                 </a:r>
                 <a:r>
-                  <a:rPr lang="ru-RU" dirty="0" smtClean="0"/>
+                  <a:rPr lang="ru-RU" dirty="0"/>
                   <a:t>.</a:t>
                 </a:r>
                 <a:r>
-                  <a:rPr lang="en-US" dirty="0" smtClean="0"/>
+                  <a:rPr lang="en-US" dirty="0"/>
                   <a:t> </a:t>
                 </a:r>
                 <a:r>
-                  <a:rPr lang="ru-RU" dirty="0" smtClean="0"/>
+                  <a:rPr lang="ru-RU" dirty="0"/>
                   <a:t>Если </a:t>
                 </a:r>
                 <a14:m>
@@ -8642,19 +8312,19 @@
                   </m:oMath>
                 </a14:m>
                 <a:r>
-                  <a:rPr lang="ru-RU" b="0" i="0" dirty="0" smtClean="0">
+                  <a:rPr lang="ru-RU" b="0" i="0" dirty="0">
                     <a:latin typeface="+mj-lt"/>
                   </a:rPr>
                   <a:t>нет </a:t>
                 </a:r>
                 <a:r>
-                  <a:rPr lang="ru-RU" b="0" i="0" dirty="0" err="1" smtClean="0">
+                  <a:rPr lang="ru-RU" b="0" i="0" dirty="0" err="1">
                     <a:latin typeface="+mj-lt"/>
                   </a:rPr>
                   <a:t>коинтеграций</a:t>
                 </a:r>
                 <a:r>
-                  <a:rPr lang="ru-RU" b="0" i="0" dirty="0" smtClean="0">
+                  <a:rPr lang="ru-RU" b="0" i="0" dirty="0">
                     <a:latin typeface="+mj-lt"/>
                   </a:rPr>
                   <a:t>, </a:t>
@@ -8682,11 +8352,11 @@
                   </m:oMath>
                 </a14:m>
                 <a:r>
-                  <a:rPr lang="en-US" dirty="0" smtClean="0"/>
+                  <a:rPr lang="en-US" dirty="0"/>
                   <a:t> </a:t>
                 </a:r>
                 <a:r>
-                  <a:rPr lang="ru-RU" dirty="0" smtClean="0"/>
+                  <a:rPr lang="ru-RU" dirty="0"/>
                   <a:t>(число ВР) – есть </a:t>
                 </a:r>
                 <a14:m>
@@ -8700,15 +8370,15 @@
                   </m:oMath>
                 </a14:m>
                 <a:r>
-                  <a:rPr lang="en-US" dirty="0" smtClean="0"/>
+                  <a:rPr lang="en-US" dirty="0"/>
                   <a:t> </a:t>
                 </a:r>
                 <a:r>
-                  <a:rPr lang="ru-RU" sz="2000" dirty="0" err="1" smtClean="0"/>
+                  <a:rPr lang="ru-RU" sz="2000" dirty="0" err="1"/>
                   <a:t>коинтеграций</a:t>
                 </a:r>
                 <a:r>
-                  <a:rPr lang="en-US" sz="2000" dirty="0" smtClean="0"/>
+                  <a:rPr lang="en-US" sz="2000" dirty="0"/>
                   <a:t>, </a:t>
                 </a:r>
                 <a14:m>
@@ -8734,11 +8404,11 @@
                   </m:oMath>
                 </a14:m>
                 <a:r>
-                  <a:rPr lang="en-US" dirty="0" smtClean="0"/>
+                  <a:rPr lang="en-US" dirty="0"/>
                   <a:t> – </a:t>
                 </a:r>
                 <a:r>
-                  <a:rPr lang="ru-RU" dirty="0" smtClean="0"/>
+                  <a:rPr lang="ru-RU" dirty="0"/>
                   <a:t>все ВР стационарны (все и так I(0)) </a:t>
                 </a:r>
               </a:p>
@@ -8757,15 +8427,15 @@
                   <a:t>	</a:t>
                 </a:r>
                 <a:r>
-                  <a:rPr lang="ru-RU" i="1" dirty="0" smtClean="0"/>
+                  <a:rPr lang="ru-RU" i="1" dirty="0"/>
                   <a:t>проверка статистик на </a:t>
                 </a:r>
                 <a:r>
-                  <a:rPr lang="en-US" i="1" dirty="0" smtClean="0"/>
+                  <a:rPr lang="en-US" i="1" dirty="0"/>
                   <a:t>r 2 </a:t>
                 </a:r>
                 <a:r>
-                  <a:rPr lang="ru-RU" i="1" dirty="0" smtClean="0"/>
+                  <a:rPr lang="ru-RU" i="1" dirty="0"/>
                   <a:t>особыми способами!</a:t>
                 </a:r>
               </a:p>
@@ -8780,12 +8450,8 @@
                   <a:buNone/>
                 </a:pPr>
                 <a:r>
-                  <a:rPr lang="ru-RU" dirty="0" smtClean="0"/>
-                  <a:t>	Тест </a:t>
-                </a:r>
-                <a:r>
                   <a:rPr lang="ru-RU" dirty="0"/>
-                  <a:t>матрицы </a:t>
+                  <a:t>	Тест матрицы </a:t>
                 </a:r>
                 <a:r>
                   <a:rPr lang="en-US" b="1" dirty="0"/>
@@ -8820,39 +8486,35 @@
                   <a:buNone/>
                 </a:pPr>
                 <a:r>
-                  <a:rPr lang="ru-RU" dirty="0" smtClean="0"/>
+                  <a:rPr lang="ru-RU" dirty="0"/>
                   <a:t>Модель </a:t>
                 </a:r>
                 <a:r>
-                  <a:rPr lang="en-US" dirty="0" smtClean="0"/>
+                  <a:rPr lang="en-US" dirty="0"/>
                   <a:t>VAR </a:t>
                 </a:r>
                 <a:r>
-                  <a:rPr lang="ru-RU" dirty="0" smtClean="0"/>
+                  <a:rPr lang="ru-RU" dirty="0"/>
                   <a:t>для </a:t>
                 </a:r>
                 <a:r>
-                  <a:rPr lang="ru-RU" dirty="0" err="1" smtClean="0"/>
+                  <a:rPr lang="ru-RU" dirty="0" err="1"/>
                   <a:t>коинтегрированных</a:t>
                 </a:r>
                 <a:r>
-                  <a:rPr lang="ru-RU" dirty="0" smtClean="0"/>
+                  <a:rPr lang="ru-RU" dirty="0"/>
                   <a:t> ВР - </a:t>
                 </a:r>
                 <a:r>
                   <a:rPr lang="es-ES" b="1" dirty="0"/>
-                  <a:t>vector error correction model (VECM</a:t>
-                </a:r>
-                <a:r>
-                  <a:rPr lang="es-ES" b="1" dirty="0" smtClean="0"/>
-                  <a:t>)</a:t>
-                </a:r>
-                <a:endParaRPr lang="ru-RU" b="1" dirty="0" smtClean="0"/>
+                  <a:t>vector error correction model (VECM)</a:t>
+                </a:r>
+                <a:endParaRPr lang="ru-RU" b="1" dirty="0"/>
               </a:p>
             </p:txBody>
           </p:sp>
         </mc:Choice>
-        <mc:Fallback>
+        <mc:Fallback xmlns="">
           <p:sp>
             <p:nvSpPr>
               <p:cNvPr id="3" name="Объект 2"/>
@@ -8912,7 +8574,7 @@
           <a:lstStyle/>
           <a:p>
             <a:r>
-              <a:rPr lang="en-US" sz="1100" dirty="0" smtClean="0"/>
+              <a:rPr lang="en-US" sz="1100" dirty="0"/>
               <a:t>https://www.numberanalytics.com/blog/cointegration-basics-time-series</a:t>
             </a:r>
             <a:endParaRPr lang="ru-RU" sz="1100" dirty="0"/>
@@ -8955,7 +8617,7 @@
         </p:nvSpPr>
         <p:spPr>
           <a:xfrm>
-            <a:off x="8122360" y="6082766"/>
+            <a:off x="8122360" y="6147343"/>
             <a:ext cx="4069640" cy="276999"/>
           </a:xfrm>
           <a:prstGeom prst="rect">
@@ -8969,10 +8631,9 @@
           <a:lstStyle/>
           <a:p>
             <a:r>
-              <a:rPr lang="ru-RU" sz="1200" dirty="0" smtClean="0"/>
+              <a:rPr lang="ru-RU" sz="1200" dirty="0"/>
               <a:t>https://www.econometrics-with-r.org/16.3-cointegration.html</a:t>
             </a:r>
-            <a:endParaRPr lang="ru-RU" sz="1200" dirty="0"/>
           </a:p>
         </p:txBody>
       </p:sp>
@@ -8998,31 +8659,31 @@
           <a:lstStyle/>
           <a:p>
             <a:r>
-              <a:rPr lang="ru-RU" b="1" dirty="0" smtClean="0"/>
+              <a:rPr lang="ru-RU" b="1" dirty="0"/>
               <a:t>Интуиция </a:t>
             </a:r>
             <a:r>
-              <a:rPr lang="es-ES" b="1" dirty="0" smtClean="0"/>
+              <a:rPr lang="es-ES" b="1" dirty="0"/>
               <a:t>VECM</a:t>
             </a:r>
             <a:r>
-              <a:rPr lang="ru-RU" b="1" dirty="0" smtClean="0"/>
+              <a:rPr lang="ru-RU" b="1" dirty="0"/>
               <a:t> – это </a:t>
             </a:r>
             <a:r>
-              <a:rPr lang="en-US" b="1" dirty="0" smtClean="0"/>
+              <a:rPr lang="en-US" b="1" dirty="0"/>
               <a:t>VARI</a:t>
             </a:r>
             <a:r>
-              <a:rPr lang="ru-RU" b="1" dirty="0" smtClean="0"/>
+              <a:rPr lang="ru-RU" b="1" dirty="0"/>
               <a:t> </a:t>
             </a:r>
             <a:r>
-              <a:rPr lang="en-US" b="1" dirty="0" smtClean="0"/>
+              <a:rPr lang="en-US" b="1" dirty="0"/>
               <a:t> + </a:t>
             </a:r>
             <a:r>
-              <a:rPr lang="ru-RU" b="1" dirty="0" smtClean="0"/>
+              <a:rPr lang="ru-RU" b="1" dirty="0"/>
               <a:t>взаимные эффекты </a:t>
             </a:r>
             <a:endParaRPr lang="ru-RU" dirty="0"/>
@@ -9067,13 +8728,6 @@
   <p:clrMapOvr>
     <a:masterClrMapping/>
   </p:clrMapOvr>
-  <p:timing>
-    <p:tnLst>
-      <p:par>
-        <p:cTn id="1" dur="indefinite" restart="never" nodeType="tmRoot"/>
-      </p:par>
-    </p:tnLst>
-  </p:timing>
 </p:sld>
 </file>
 
@@ -9110,10 +8764,9 @@
           <a:lstStyle/>
           <a:p>
             <a:r>
-              <a:rPr lang="ru-RU" dirty="0" smtClean="0"/>
+              <a:rPr lang="ru-RU" dirty="0"/>
               <a:t>Типы многомерных ВР</a:t>
             </a:r>
-            <a:endParaRPr lang="ru-RU" dirty="0"/>
           </a:p>
         </p:txBody>
       </p:sp>
@@ -10087,21 +9740,6 @@
   <p:clrMapOvr>
     <a:masterClrMapping/>
   </p:clrMapOvr>
-  <mc:AlternateContent xmlns:mc="http://schemas.openxmlformats.org/markup-compatibility/2006">
-    <mc:Choice xmlns:p14="http://schemas.microsoft.com/office/powerpoint/2010/main" Requires="p14">
-      <p:transition spd="slow" p14:dur="2000"/>
-    </mc:Choice>
-    <mc:Fallback>
-      <p:transition spd="slow"/>
-    </mc:Fallback>
-  </mc:AlternateContent>
-  <p:timing>
-    <p:tnLst>
-      <p:par>
-        <p:cTn id="1" dur="indefinite" restart="never" nodeType="tmRoot"/>
-      </p:par>
-    </p:tnLst>
-  </p:timing>
 </p:sld>
 </file>
 

--- a/2025/LEC/06-1 многомерные ВР.pptx
+++ b/2025/LEC/06-1 многомерные ВР.pptx
@@ -5,7 +5,7 @@
     <p:sldMasterId id="2147483648" r:id="rId1"/>
   </p:sldMasterIdLst>
   <p:notesMasterIdLst>
-    <p:notesMasterId r:id="rId18"/>
+    <p:notesMasterId r:id="rId21"/>
   </p:notesMasterIdLst>
   <p:sldIdLst>
     <p:sldId id="256" r:id="rId2"/>
@@ -13,17 +13,20 @@
     <p:sldId id="260" r:id="rId4"/>
     <p:sldId id="261" r:id="rId5"/>
     <p:sldId id="265" r:id="rId6"/>
-    <p:sldId id="264" r:id="rId7"/>
-    <p:sldId id="268" r:id="rId8"/>
-    <p:sldId id="269" r:id="rId9"/>
-    <p:sldId id="271" r:id="rId10"/>
-    <p:sldId id="273" r:id="rId11"/>
-    <p:sldId id="266" r:id="rId12"/>
-    <p:sldId id="267" r:id="rId13"/>
-    <p:sldId id="272" r:id="rId14"/>
-    <p:sldId id="262" r:id="rId15"/>
-    <p:sldId id="259" r:id="rId16"/>
-    <p:sldId id="263" r:id="rId17"/>
+    <p:sldId id="276" r:id="rId7"/>
+    <p:sldId id="264" r:id="rId8"/>
+    <p:sldId id="268" r:id="rId9"/>
+    <p:sldId id="269" r:id="rId10"/>
+    <p:sldId id="271" r:id="rId11"/>
+    <p:sldId id="273" r:id="rId12"/>
+    <p:sldId id="266" r:id="rId13"/>
+    <p:sldId id="267" r:id="rId14"/>
+    <p:sldId id="272" r:id="rId15"/>
+    <p:sldId id="274" r:id="rId16"/>
+    <p:sldId id="275" r:id="rId17"/>
+    <p:sldId id="262" r:id="rId18"/>
+    <p:sldId id="259" r:id="rId19"/>
+    <p:sldId id="263" r:id="rId20"/>
   </p:sldIdLst>
   <p:sldSz cx="12192000" cy="6858000"/>
   <p:notesSz cx="6858000" cy="9144000"/>
@@ -544,7 +547,7 @@
           <a:p>
             <a:fld id="{E5904A68-FE9C-41D3-96AD-A1A68ED6C497}" type="slidenum">
               <a:rPr lang="ru-RU" smtClean="0"/>
-              <a:t>8</a:t>
+              <a:t>9</a:t>
             </a:fld>
             <a:endParaRPr lang="ru-RU"/>
           </a:p>
@@ -631,7 +634,7 @@
           <a:p>
             <a:fld id="{E5904A68-FE9C-41D3-96AD-A1A68ED6C497}" type="slidenum">
               <a:rPr lang="ru-RU" smtClean="0"/>
-              <a:t>10</a:t>
+              <a:t>11</a:t>
             </a:fld>
             <a:endParaRPr lang="ru-RU"/>
           </a:p>
@@ -761,7 +764,7 @@
           <a:p>
             <a:fld id="{E5904A68-FE9C-41D3-96AD-A1A68ED6C497}" type="slidenum">
               <a:rPr lang="ru-RU" smtClean="0"/>
-              <a:t>11</a:t>
+              <a:t>12</a:t>
             </a:fld>
             <a:endParaRPr lang="ru-RU"/>
           </a:p>
@@ -845,7 +848,7 @@
           <a:p>
             <a:fld id="{E5904A68-FE9C-41D3-96AD-A1A68ED6C497}" type="slidenum">
               <a:rPr lang="ru-RU" smtClean="0"/>
-              <a:t>12</a:t>
+              <a:t>13</a:t>
             </a:fld>
             <a:endParaRPr lang="ru-RU"/>
           </a:p>
@@ -929,7 +932,7 @@
           <a:p>
             <a:fld id="{E5904A68-FE9C-41D3-96AD-A1A68ED6C497}" type="slidenum">
               <a:rPr lang="ru-RU" smtClean="0"/>
-              <a:t>13</a:t>
+              <a:t>14</a:t>
             </a:fld>
             <a:endParaRPr lang="ru-RU"/>
           </a:p>
@@ -3843,6 +3846,392 @@
   <p:cSld>
     <p:spTree>
       <p:nvGrpSpPr>
+        <p:cNvPr id="1" name=""/>
+        <p:cNvGrpSpPr/>
+        <p:nvPr/>
+      </p:nvGrpSpPr>
+      <p:grpSpPr>
+        <a:xfrm>
+          <a:off x="0" y="0"/>
+          <a:ext cx="0" cy="0"/>
+          <a:chOff x="0" y="0"/>
+          <a:chExt cx="0" cy="0"/>
+        </a:xfrm>
+      </p:grpSpPr>
+      <p:sp>
+        <p:nvSpPr>
+          <p:cNvPr id="2" name="Заголовок 1">
+            <a:extLst>
+              <a:ext uri="{FF2B5EF4-FFF2-40B4-BE49-F238E27FC236}">
+                <a16:creationId xmlns:a16="http://schemas.microsoft.com/office/drawing/2014/main" id="{38E728CA-EF5A-F8A7-5C98-5AF82A78B222}"/>
+              </a:ext>
+            </a:extLst>
+          </p:cNvPr>
+          <p:cNvSpPr>
+            <a:spLocks noGrp="1"/>
+          </p:cNvSpPr>
+          <p:nvPr>
+            <p:ph type="title"/>
+          </p:nvPr>
+        </p:nvSpPr>
+        <p:spPr>
+          <a:xfrm>
+            <a:off x="838200" y="365125"/>
+            <a:ext cx="10515600" cy="424015"/>
+          </a:xfrm>
+        </p:spPr>
+        <p:txBody>
+          <a:bodyPr>
+            <a:normAutofit fontScale="90000"/>
+          </a:bodyPr>
+          <a:lstStyle/>
+          <a:p>
+            <a:r>
+              <a:rPr lang="en-US" b="1" dirty="0" err="1"/>
+              <a:t>Ка</a:t>
+            </a:r>
+            <a:r>
+              <a:rPr lang="ru-RU" b="1" dirty="0" err="1"/>
+              <a:t>зуальность</a:t>
+            </a:r>
+            <a:r>
+              <a:rPr lang="ru-RU" b="1" dirty="0"/>
+              <a:t> МВР</a:t>
+            </a:r>
+            <a:endParaRPr lang="ru-RU" dirty="0"/>
+          </a:p>
+        </p:txBody>
+      </p:sp>
+      <p:sp>
+        <p:nvSpPr>
+          <p:cNvPr id="3" name="Объект 2">
+            <a:extLst>
+              <a:ext uri="{FF2B5EF4-FFF2-40B4-BE49-F238E27FC236}">
+                <a16:creationId xmlns:a16="http://schemas.microsoft.com/office/drawing/2014/main" id="{3C199195-BD5C-8558-68D8-AABE8A3EEA31}"/>
+              </a:ext>
+            </a:extLst>
+          </p:cNvPr>
+          <p:cNvSpPr>
+            <a:spLocks noGrp="1"/>
+          </p:cNvSpPr>
+          <p:nvPr>
+            <p:ph idx="1"/>
+          </p:nvPr>
+        </p:nvSpPr>
+        <p:spPr>
+          <a:xfrm>
+            <a:off x="263047" y="964504"/>
+            <a:ext cx="11611627" cy="5528371"/>
+          </a:xfrm>
+        </p:spPr>
+        <p:txBody>
+          <a:bodyPr/>
+          <a:lstStyle/>
+          <a:p>
+            <a:r>
+              <a:rPr lang="ru-RU" sz="2200" dirty="0"/>
+              <a:t>Казуальность по Грейнджеру помогает выявлять </a:t>
+            </a:r>
+            <a:r>
+              <a:rPr lang="en-US" sz="2200" i="1" dirty="0" err="1"/>
+              <a:t>стати</a:t>
+            </a:r>
+            <a:r>
+              <a:rPr lang="ru-RU" sz="2200" i="1" dirty="0" err="1"/>
+              <a:t>стические</a:t>
+            </a:r>
+            <a:r>
+              <a:rPr lang="ru-RU" sz="2200" i="1" dirty="0"/>
+              <a:t> причинные связи</a:t>
+            </a:r>
+            <a:r>
+              <a:rPr lang="ru-RU" sz="2200" dirty="0"/>
+              <a:t>, но не доказывает их.</a:t>
+            </a:r>
+          </a:p>
+          <a:p>
+            <a:pPr marL="285750" indent="-285750"/>
+            <a:r>
+              <a:rPr lang="ru-RU" sz="2200" dirty="0"/>
+              <a:t>Всегда интерпретируйте результаты в контексте предметной области.</a:t>
+            </a:r>
+          </a:p>
+          <a:p>
+            <a:pPr marL="285750" indent="-285750"/>
+            <a:r>
+              <a:rPr lang="ru-RU" sz="2200" dirty="0"/>
+              <a:t>Совмещайте статистические тесты с экспертными знаниями.</a:t>
+            </a:r>
+          </a:p>
+          <a:p>
+            <a:pPr marL="285750" indent="-285750"/>
+            <a:r>
+              <a:rPr lang="ru-RU" sz="2200" dirty="0"/>
+              <a:t>Ложная казуальность возможна при:</a:t>
+            </a:r>
+          </a:p>
+          <a:p>
+            <a:pPr marL="742950" lvl="1" indent="-285750"/>
+            <a:r>
+              <a:rPr lang="ru-RU" sz="2200" dirty="0"/>
+              <a:t>Наличии скрытой (латентной) переменной, влияющей на оба ряда.</a:t>
+            </a:r>
+          </a:p>
+          <a:p>
+            <a:pPr marL="742950" lvl="1" indent="-285750"/>
+            <a:r>
+              <a:rPr lang="ru-RU" sz="2200" dirty="0"/>
+              <a:t>Неправильном выборе лага </a:t>
+            </a:r>
+            <a:r>
+              <a:rPr lang="en" sz="2200" i="1" dirty="0"/>
+              <a:t>p</a:t>
+            </a:r>
+            <a:r>
+              <a:rPr lang="en" sz="2200" dirty="0"/>
+              <a:t> .</a:t>
+            </a:r>
+          </a:p>
+          <a:p>
+            <a:pPr marL="742950" lvl="1" indent="-285750"/>
+            <a:r>
+              <a:rPr lang="ru-RU" sz="2200" dirty="0"/>
+              <a:t>Нестационарности рядов </a:t>
+            </a:r>
+            <a:endParaRPr lang="en-US" sz="2200" dirty="0"/>
+          </a:p>
+          <a:p>
+            <a:pPr marL="0" indent="0">
+              <a:buNone/>
+            </a:pPr>
+            <a:r>
+              <a:rPr lang="en-US" sz="2400" dirty="0" err="1"/>
+              <a:t>П</a:t>
+            </a:r>
+            <a:r>
+              <a:rPr lang="ru-RU" sz="2400" dirty="0" err="1"/>
+              <a:t>омимо</a:t>
+            </a:r>
+            <a:r>
+              <a:rPr lang="ru-RU" sz="2400" dirty="0"/>
+              <a:t> казуальности по Грейнджеру </a:t>
+            </a:r>
+            <a:r>
+              <a:rPr lang="ru-RU" sz="2400" dirty="0" err="1"/>
+              <a:t>казулальность</a:t>
+            </a:r>
+            <a:r>
+              <a:rPr lang="ru-RU" sz="2400" dirty="0"/>
+              <a:t> может быть более сложной, например условной, сезонной </a:t>
+            </a:r>
+            <a:br>
+              <a:rPr lang="ru-RU" sz="2400" dirty="0"/>
+            </a:br>
+            <a:r>
+              <a:rPr lang="ru-RU" sz="2400" dirty="0"/>
+              <a:t>или представлять собой граф (</a:t>
+            </a:r>
+            <a:r>
+              <a:rPr lang="en" sz="2400" dirty="0"/>
+              <a:t>causal discovery</a:t>
+            </a:r>
+            <a:r>
+              <a:rPr lang="ru-RU" sz="2400" dirty="0"/>
+              <a:t>)</a:t>
+            </a:r>
+          </a:p>
+        </p:txBody>
+      </p:sp>
+      <p:pic>
+        <p:nvPicPr>
+          <p:cNvPr id="4" name="Рисунок 3">
+            <a:extLst>
+              <a:ext uri="{FF2B5EF4-FFF2-40B4-BE49-F238E27FC236}">
+                <a16:creationId xmlns:a16="http://schemas.microsoft.com/office/drawing/2014/main" id="{E4B3B271-106F-3359-C16F-E315B67B2D39}"/>
+              </a:ext>
+            </a:extLst>
+          </p:cNvPr>
+          <p:cNvPicPr>
+            <a:picLocks noChangeAspect="1"/>
+          </p:cNvPicPr>
+          <p:nvPr/>
+        </p:nvPicPr>
+        <p:blipFill>
+          <a:blip r:embed="rId2"/>
+          <a:stretch>
+            <a:fillRect/>
+          </a:stretch>
+        </p:blipFill>
+        <p:spPr>
+          <a:xfrm>
+            <a:off x="7804759" y="4390302"/>
+            <a:ext cx="4069915" cy="2277937"/>
+          </a:xfrm>
+          <a:prstGeom prst="rect">
+            <a:avLst/>
+          </a:prstGeom>
+        </p:spPr>
+      </p:pic>
+      <p:sp>
+        <p:nvSpPr>
+          <p:cNvPr id="5" name="TextBox 4">
+            <a:extLst>
+              <a:ext uri="{FF2B5EF4-FFF2-40B4-BE49-F238E27FC236}">
+                <a16:creationId xmlns:a16="http://schemas.microsoft.com/office/drawing/2014/main" id="{ABAD593B-431E-13EF-F915-5CF3D7658901}"/>
+              </a:ext>
+            </a:extLst>
+          </p:cNvPr>
+          <p:cNvSpPr txBox="1"/>
+          <p:nvPr/>
+        </p:nvSpPr>
+        <p:spPr>
+          <a:xfrm>
+            <a:off x="2007365" y="6581001"/>
+            <a:ext cx="8177270" cy="276999"/>
+          </a:xfrm>
+          <a:prstGeom prst="rect">
+            <a:avLst/>
+          </a:prstGeom>
+          <a:noFill/>
+        </p:spPr>
+        <p:txBody>
+          <a:bodyPr wrap="square">
+            <a:spAutoFit/>
+          </a:bodyPr>
+          <a:lstStyle/>
+          <a:p>
+            <a:r>
+              <a:rPr lang="ru-RU" sz="1200" dirty="0" err="1"/>
+              <a:t>https</a:t>
+            </a:r>
+            <a:r>
+              <a:rPr lang="ru-RU" sz="1200" dirty="0"/>
+              <a:t>://</a:t>
+            </a:r>
+            <a:r>
+              <a:rPr lang="ru-RU" sz="1200" dirty="0" err="1"/>
+              <a:t>www.analyticsvidhya.com</a:t>
+            </a:r>
+            <a:r>
+              <a:rPr lang="ru-RU" sz="1200" dirty="0"/>
+              <a:t>/</a:t>
+            </a:r>
+            <a:r>
+              <a:rPr lang="ru-RU" sz="1200" dirty="0" err="1"/>
+              <a:t>blog</a:t>
+            </a:r>
+            <a:r>
+              <a:rPr lang="ru-RU" sz="1200" dirty="0"/>
+              <a:t>/2021/08/granger-causality-in-time-series-explained-using-chicken-and-egg-problem/</a:t>
+            </a:r>
+          </a:p>
+        </p:txBody>
+      </p:sp>
+      <p:sp>
+        <p:nvSpPr>
+          <p:cNvPr id="7" name="TextBox 6">
+            <a:extLst>
+              <a:ext uri="{FF2B5EF4-FFF2-40B4-BE49-F238E27FC236}">
+                <a16:creationId xmlns:a16="http://schemas.microsoft.com/office/drawing/2014/main" id="{535C2EE9-D502-5FF6-3127-D1A2545D4EAD}"/>
+              </a:ext>
+            </a:extLst>
+          </p:cNvPr>
+          <p:cNvSpPr txBox="1"/>
+          <p:nvPr/>
+        </p:nvSpPr>
+        <p:spPr>
+          <a:xfrm>
+            <a:off x="317326" y="6329685"/>
+            <a:ext cx="6093912" cy="338554"/>
+          </a:xfrm>
+          <a:prstGeom prst="rect">
+            <a:avLst/>
+          </a:prstGeom>
+          <a:noFill/>
+        </p:spPr>
+        <p:txBody>
+          <a:bodyPr wrap="square">
+            <a:spAutoFit/>
+          </a:bodyPr>
+          <a:lstStyle/>
+          <a:p>
+            <a:r>
+              <a:rPr lang="ru-RU" sz="1600" dirty="0" err="1"/>
+              <a:t>https</a:t>
+            </a:r>
+            <a:r>
+              <a:rPr lang="ru-RU" sz="1600" dirty="0"/>
+              <a:t>://</a:t>
+            </a:r>
+            <a:r>
+              <a:rPr lang="ru-RU" sz="1600" dirty="0" err="1"/>
+              <a:t>github.com</a:t>
+            </a:r>
+            <a:r>
+              <a:rPr lang="ru-RU" sz="1600" dirty="0"/>
+              <a:t>/</a:t>
+            </a:r>
+            <a:r>
+              <a:rPr lang="ru-RU" sz="1600" dirty="0" err="1"/>
+              <a:t>jakobrunge</a:t>
+            </a:r>
+            <a:r>
+              <a:rPr lang="ru-RU" sz="1600" dirty="0"/>
+              <a:t>/</a:t>
+            </a:r>
+            <a:r>
+              <a:rPr lang="ru-RU" sz="1600" dirty="0" err="1"/>
+              <a:t>tigramite</a:t>
+            </a:r>
+            <a:r>
+              <a:rPr lang="ru-RU" sz="1600" dirty="0"/>
+              <a:t>/</a:t>
+            </a:r>
+            <a:r>
+              <a:rPr lang="ru-RU" sz="1600" dirty="0" err="1"/>
+              <a:t>tree</a:t>
+            </a:r>
+            <a:r>
+              <a:rPr lang="ru-RU" sz="1600" dirty="0"/>
+              <a:t>/</a:t>
+            </a:r>
+            <a:r>
+              <a:rPr lang="ru-RU" sz="1600" dirty="0" err="1"/>
+              <a:t>master</a:t>
+            </a:r>
+            <a:r>
+              <a:rPr lang="ru-RU" sz="1600" dirty="0"/>
+              <a:t>/</a:t>
+            </a:r>
+            <a:r>
+              <a:rPr lang="ru-RU" sz="1600" dirty="0" err="1"/>
+              <a:t>tutorials</a:t>
+            </a:r>
+            <a:r>
+              <a:rPr lang="ru-RU" sz="1600" dirty="0"/>
+              <a:t>/</a:t>
+            </a:r>
+          </a:p>
+        </p:txBody>
+      </p:sp>
+    </p:spTree>
+    <p:extLst>
+      <p:ext uri="{BB962C8B-B14F-4D97-AF65-F5344CB8AC3E}">
+        <p14:creationId xmlns:p14="http://schemas.microsoft.com/office/powerpoint/2010/main" val="3615208541"/>
+      </p:ext>
+    </p:extLst>
+  </p:cSld>
+  <p:clrMapOvr>
+    <a:masterClrMapping/>
+  </p:clrMapOvr>
+</p:sld>
+</file>
+
+<file path=ppt/slides/slide11.xml><?xml version="1.0" encoding="utf-8"?>
+<p:sld xmlns:a="http://schemas.openxmlformats.org/drawingml/2006/main" xmlns:r="http://schemas.openxmlformats.org/officeDocument/2006/relationships" xmlns:p="http://schemas.openxmlformats.org/presentationml/2006/main">
+  <p:cSld>
+    <p:spTree>
+      <p:nvGrpSpPr>
         <p:cNvPr id="1" name="">
           <a:extLst>
             <a:ext uri="{FF2B5EF4-FFF2-40B4-BE49-F238E27FC236}">
@@ -4658,7 +5047,7 @@
 </p:sld>
 </file>
 
-<file path=ppt/slides/slide11.xml><?xml version="1.0" encoding="utf-8"?>
+<file path=ppt/slides/slide12.xml><?xml version="1.0" encoding="utf-8"?>
 <p:sld xmlns:a="http://schemas.openxmlformats.org/drawingml/2006/main" xmlns:r="http://schemas.openxmlformats.org/officeDocument/2006/relationships" xmlns:p="http://schemas.openxmlformats.org/presentationml/2006/main">
   <p:cSld>
     <p:spTree>
@@ -5128,7 +5517,7 @@
 </p:sld>
 </file>
 
-<file path=ppt/slides/slide12.xml><?xml version="1.0" encoding="utf-8"?>
+<file path=ppt/slides/slide13.xml><?xml version="1.0" encoding="utf-8"?>
 <p:sld xmlns:a="http://schemas.openxmlformats.org/drawingml/2006/main" xmlns:r="http://schemas.openxmlformats.org/officeDocument/2006/relationships" xmlns:p="http://schemas.openxmlformats.org/presentationml/2006/main">
   <p:cSld>
     <p:spTree>
@@ -6178,7 +6567,7 @@
 </p:sld>
 </file>
 
-<file path=ppt/slides/slide13.xml><?xml version="1.0" encoding="utf-8"?>
+<file path=ppt/slides/slide14.xml><?xml version="1.0" encoding="utf-8"?>
 <p:sld xmlns:a="http://schemas.openxmlformats.org/drawingml/2006/main" xmlns:r="http://schemas.openxmlformats.org/officeDocument/2006/relationships" xmlns:p="http://schemas.openxmlformats.org/presentationml/2006/main">
   <p:cSld>
     <p:spTree>
@@ -6241,14 +6630,14 @@
             <p:ph idx="1"/>
             <p:extLst>
               <p:ext uri="{D42A27DB-BD31-4B8C-83A1-F6EECF244321}">
-                <p14:modId xmlns:p14="http://schemas.microsoft.com/office/powerpoint/2010/main" val="1726975998"/>
+                <p14:modId xmlns:p14="http://schemas.microsoft.com/office/powerpoint/2010/main" val="3526744280"/>
               </p:ext>
             </p:extLst>
           </p:nvPr>
         </p:nvGraphicFramePr>
         <p:xfrm>
           <a:off x="838200" y="1825625"/>
-          <a:ext cx="10515597" cy="1854200"/>
+          <a:ext cx="10515597" cy="2397760"/>
         </p:xfrm>
         <a:graphic>
           <a:graphicData uri="http://schemas.openxmlformats.org/drawingml/2006/table">
@@ -6285,7 +6674,10 @@
                     <a:bodyPr/>
                     <a:lstStyle/>
                     <a:p>
-                      <a:endParaRPr lang="ru-RU"/>
+                      <a:r>
+                        <a:rPr lang="ru-RU" dirty="0"/>
+                        <a:t>Тип МВР</a:t>
+                      </a:r>
                     </a:p>
                   </a:txBody>
                   <a:tcPr/>
@@ -6295,7 +6687,10 @@
                     <a:bodyPr/>
                     <a:lstStyle/>
                     <a:p>
-                      <a:endParaRPr lang="ru-RU"/>
+                      <a:r>
+                        <a:rPr lang="ru-RU" dirty="0"/>
+                        <a:t>Тест на тип</a:t>
+                      </a:r>
                     </a:p>
                   </a:txBody>
                   <a:tcPr/>
@@ -6305,7 +6700,10 @@
                     <a:bodyPr/>
                     <a:lstStyle/>
                     <a:p>
-                      <a:endParaRPr lang="ru-RU"/>
+                      <a:r>
+                        <a:rPr lang="ru-RU" dirty="0"/>
+                        <a:t>метод</a:t>
+                      </a:r>
                     </a:p>
                   </a:txBody>
                   <a:tcPr/>
@@ -6494,7 +6892,10 @@
                         <a:rPr lang="en-US" dirty="0"/>
                         <a:t>SVAR</a:t>
                       </a:r>
-                      <a:endParaRPr lang="ru-RU" dirty="0"/>
+                      <a:r>
+                        <a:rPr lang="ru-RU" dirty="0"/>
+                        <a:t>, убрать/сделать экзогенными казуальные переменные</a:t>
+                      </a:r>
                     </a:p>
                   </a:txBody>
                   <a:tcPr/>
@@ -6603,7 +7004,186 @@
 </p:sld>
 </file>
 
-<file path=ppt/slides/slide14.xml><?xml version="1.0" encoding="utf-8"?>
+<file path=ppt/slides/slide15.xml><?xml version="1.0" encoding="utf-8"?>
+<p:sld xmlns:a="http://schemas.openxmlformats.org/drawingml/2006/main" xmlns:r="http://schemas.openxmlformats.org/officeDocument/2006/relationships" xmlns:p="http://schemas.openxmlformats.org/presentationml/2006/main">
+  <p:cSld>
+    <p:spTree>
+      <p:nvGrpSpPr>
+        <p:cNvPr id="1" name=""/>
+        <p:cNvGrpSpPr/>
+        <p:nvPr/>
+      </p:nvGrpSpPr>
+      <p:grpSpPr>
+        <a:xfrm>
+          <a:off x="0" y="0"/>
+          <a:ext cx="0" cy="0"/>
+          <a:chOff x="0" y="0"/>
+          <a:chExt cx="0" cy="0"/>
+        </a:xfrm>
+      </p:grpSpPr>
+      <p:sp>
+        <p:nvSpPr>
+          <p:cNvPr id="2" name="Заголовок 1">
+            <a:extLst>
+              <a:ext uri="{FF2B5EF4-FFF2-40B4-BE49-F238E27FC236}">
+                <a16:creationId xmlns:a16="http://schemas.microsoft.com/office/drawing/2014/main" id="{C22F2355-ECD2-CFE7-1326-3F7024B660E7}"/>
+              </a:ext>
+            </a:extLst>
+          </p:cNvPr>
+          <p:cNvSpPr>
+            <a:spLocks noGrp="1"/>
+          </p:cNvSpPr>
+          <p:nvPr>
+            <p:ph type="title"/>
+          </p:nvPr>
+        </p:nvSpPr>
+        <p:spPr/>
+        <p:txBody>
+          <a:bodyPr/>
+          <a:lstStyle/>
+          <a:p>
+            <a:r>
+              <a:rPr lang="ru-RU" dirty="0"/>
+              <a:t>Использование МО в МВР</a:t>
+            </a:r>
+          </a:p>
+        </p:txBody>
+      </p:sp>
+      <p:sp>
+        <p:nvSpPr>
+          <p:cNvPr id="3" name="Объект 2">
+            <a:extLst>
+              <a:ext uri="{FF2B5EF4-FFF2-40B4-BE49-F238E27FC236}">
+                <a16:creationId xmlns:a16="http://schemas.microsoft.com/office/drawing/2014/main" id="{DF9F0CCA-662F-AA58-2402-C436EA6BB4EE}"/>
+              </a:ext>
+            </a:extLst>
+          </p:cNvPr>
+          <p:cNvSpPr>
+            <a:spLocks noGrp="1"/>
+          </p:cNvSpPr>
+          <p:nvPr>
+            <p:ph idx="1"/>
+          </p:nvPr>
+        </p:nvSpPr>
+        <p:spPr/>
+        <p:txBody>
+          <a:bodyPr/>
+          <a:lstStyle/>
+          <a:p>
+            <a:r>
+              <a:rPr lang="ru-RU" dirty="0"/>
+              <a:t>Мл с </a:t>
+            </a:r>
+            <a:r>
+              <a:rPr lang="ru-RU"/>
+              <a:t>циклическими признаками</a:t>
+            </a:r>
+          </a:p>
+        </p:txBody>
+      </p:sp>
+    </p:spTree>
+    <p:extLst>
+      <p:ext uri="{BB962C8B-B14F-4D97-AF65-F5344CB8AC3E}">
+        <p14:creationId xmlns:p14="http://schemas.microsoft.com/office/powerpoint/2010/main" val="395841035"/>
+      </p:ext>
+    </p:extLst>
+  </p:cSld>
+  <p:clrMapOvr>
+    <a:masterClrMapping/>
+  </p:clrMapOvr>
+</p:sld>
+</file>
+
+<file path=ppt/slides/slide16.xml><?xml version="1.0" encoding="utf-8"?>
+<p:sld xmlns:a="http://schemas.openxmlformats.org/drawingml/2006/main" xmlns:r="http://schemas.openxmlformats.org/officeDocument/2006/relationships" xmlns:p="http://schemas.openxmlformats.org/presentationml/2006/main">
+  <p:cSld>
+    <p:spTree>
+      <p:nvGrpSpPr>
+        <p:cNvPr id="1" name="">
+          <a:extLst>
+            <a:ext uri="{FF2B5EF4-FFF2-40B4-BE49-F238E27FC236}">
+              <a16:creationId xmlns:a16="http://schemas.microsoft.com/office/drawing/2014/main" id="{5979C28D-AC9E-A12C-9800-272F83BC8F8D}"/>
+            </a:ext>
+          </a:extLst>
+        </p:cNvPr>
+        <p:cNvGrpSpPr/>
+        <p:nvPr/>
+      </p:nvGrpSpPr>
+      <p:grpSpPr>
+        <a:xfrm>
+          <a:off x="0" y="0"/>
+          <a:ext cx="0" cy="0"/>
+          <a:chOff x="0" y="0"/>
+          <a:chExt cx="0" cy="0"/>
+        </a:xfrm>
+      </p:grpSpPr>
+      <p:sp>
+        <p:nvSpPr>
+          <p:cNvPr id="2" name="Заголовок 1">
+            <a:extLst>
+              <a:ext uri="{FF2B5EF4-FFF2-40B4-BE49-F238E27FC236}">
+                <a16:creationId xmlns:a16="http://schemas.microsoft.com/office/drawing/2014/main" id="{5CE24EE3-0115-4096-7A8F-8ACBCDE4666B}"/>
+              </a:ext>
+            </a:extLst>
+          </p:cNvPr>
+          <p:cNvSpPr>
+            <a:spLocks noGrp="1"/>
+          </p:cNvSpPr>
+          <p:nvPr>
+            <p:ph type="title"/>
+          </p:nvPr>
+        </p:nvSpPr>
+        <p:spPr/>
+        <p:txBody>
+          <a:bodyPr/>
+          <a:lstStyle/>
+          <a:p>
+            <a:r>
+              <a:rPr lang="ru-RU" dirty="0"/>
+              <a:t>Особенности анализа сверх больших массивов ВР</a:t>
+            </a:r>
+          </a:p>
+        </p:txBody>
+      </p:sp>
+      <p:sp>
+        <p:nvSpPr>
+          <p:cNvPr id="3" name="Объект 2">
+            <a:extLst>
+              <a:ext uri="{FF2B5EF4-FFF2-40B4-BE49-F238E27FC236}">
+                <a16:creationId xmlns:a16="http://schemas.microsoft.com/office/drawing/2014/main" id="{1C8F7207-602B-1BF6-F43A-E6F1D44E2712}"/>
+              </a:ext>
+            </a:extLst>
+          </p:cNvPr>
+          <p:cNvSpPr>
+            <a:spLocks noGrp="1"/>
+          </p:cNvSpPr>
+          <p:nvPr>
+            <p:ph idx="1"/>
+          </p:nvPr>
+        </p:nvSpPr>
+        <p:spPr/>
+        <p:txBody>
+          <a:bodyPr/>
+          <a:lstStyle/>
+          <a:p>
+            <a:endParaRPr lang="ru-RU"/>
+          </a:p>
+        </p:txBody>
+      </p:sp>
+    </p:spTree>
+    <p:extLst>
+      <p:ext uri="{BB962C8B-B14F-4D97-AF65-F5344CB8AC3E}">
+        <p14:creationId xmlns:p14="http://schemas.microsoft.com/office/powerpoint/2010/main" val="1601725008"/>
+      </p:ext>
+    </p:extLst>
+  </p:cSld>
+  <p:clrMapOvr>
+    <a:masterClrMapping/>
+  </p:clrMapOvr>
+</p:sld>
+</file>
+
+<file path=ppt/slides/slide17.xml><?xml version="1.0" encoding="utf-8"?>
 <p:sld xmlns:a="http://schemas.openxmlformats.org/drawingml/2006/main" xmlns:r="http://schemas.openxmlformats.org/officeDocument/2006/relationships" xmlns:p="http://schemas.openxmlformats.org/presentationml/2006/main" show="0">
   <p:cSld>
     <p:spTree>
@@ -7615,7 +8195,7 @@
 </p:sld>
 </file>
 
-<file path=ppt/slides/slide15.xml><?xml version="1.0" encoding="utf-8"?>
+<file path=ppt/slides/slide18.xml><?xml version="1.0" encoding="utf-8"?>
 <p:sld xmlns:a="http://schemas.openxmlformats.org/drawingml/2006/main" xmlns:r="http://schemas.openxmlformats.org/officeDocument/2006/relationships" xmlns:p="http://schemas.openxmlformats.org/presentationml/2006/main" show="0">
   <p:cSld>
     <p:spTree>
@@ -7756,7 +8336,7 @@
 </p:sld>
 </file>
 
-<file path=ppt/slides/slide16.xml><?xml version="1.0" encoding="utf-8"?>
+<file path=ppt/slides/slide19.xml><?xml version="1.0" encoding="utf-8"?>
 <p:sld xmlns:a="http://schemas.openxmlformats.org/drawingml/2006/main" xmlns:r="http://schemas.openxmlformats.org/officeDocument/2006/relationships" xmlns:p="http://schemas.openxmlformats.org/presentationml/2006/main" show="0">
   <p:cSld>
     <p:spTree>
@@ -10966,6 +11546,91 @@
       </p:grpSpPr>
       <p:sp>
         <p:nvSpPr>
+          <p:cNvPr id="2" name="Заголовок 1">
+            <a:extLst>
+              <a:ext uri="{FF2B5EF4-FFF2-40B4-BE49-F238E27FC236}">
+                <a16:creationId xmlns:a16="http://schemas.microsoft.com/office/drawing/2014/main" id="{817F5B93-BBE2-5639-2576-44C519FB3E17}"/>
+              </a:ext>
+            </a:extLst>
+          </p:cNvPr>
+          <p:cNvSpPr>
+            <a:spLocks noGrp="1"/>
+          </p:cNvSpPr>
+          <p:nvPr>
+            <p:ph type="title"/>
+          </p:nvPr>
+        </p:nvSpPr>
+        <p:spPr>
+          <a:xfrm>
+            <a:off x="576197" y="365126"/>
+            <a:ext cx="10777603" cy="1087894"/>
+          </a:xfrm>
+        </p:spPr>
+        <p:txBody>
+          <a:bodyPr/>
+          <a:lstStyle/>
+          <a:p>
+            <a:endParaRPr lang="ru-RU" dirty="0"/>
+          </a:p>
+        </p:txBody>
+      </p:sp>
+      <p:sp>
+        <p:nvSpPr>
+          <p:cNvPr id="3" name="Объект 2">
+            <a:extLst>
+              <a:ext uri="{FF2B5EF4-FFF2-40B4-BE49-F238E27FC236}">
+                <a16:creationId xmlns:a16="http://schemas.microsoft.com/office/drawing/2014/main" id="{67468AA5-78CA-BF36-F58A-24F7705F2C92}"/>
+              </a:ext>
+            </a:extLst>
+          </p:cNvPr>
+          <p:cNvSpPr>
+            <a:spLocks noGrp="1"/>
+          </p:cNvSpPr>
+          <p:nvPr>
+            <p:ph idx="1"/>
+          </p:nvPr>
+        </p:nvSpPr>
+        <p:spPr/>
+        <p:txBody>
+          <a:bodyPr/>
+          <a:lstStyle/>
+          <a:p>
+            <a:endParaRPr lang="ru-RU"/>
+          </a:p>
+        </p:txBody>
+      </p:sp>
+    </p:spTree>
+    <p:extLst>
+      <p:ext uri="{BB962C8B-B14F-4D97-AF65-F5344CB8AC3E}">
+        <p14:creationId xmlns:p14="http://schemas.microsoft.com/office/powerpoint/2010/main" val="2127895072"/>
+      </p:ext>
+    </p:extLst>
+  </p:cSld>
+  <p:clrMapOvr>
+    <a:masterClrMapping/>
+  </p:clrMapOvr>
+</p:sld>
+</file>
+
+<file path=ppt/slides/slide7.xml><?xml version="1.0" encoding="utf-8"?>
+<p:sld xmlns:a="http://schemas.openxmlformats.org/drawingml/2006/main" xmlns:r="http://schemas.openxmlformats.org/officeDocument/2006/relationships" xmlns:p="http://schemas.openxmlformats.org/presentationml/2006/main">
+  <p:cSld>
+    <p:spTree>
+      <p:nvGrpSpPr>
+        <p:cNvPr id="1" name=""/>
+        <p:cNvGrpSpPr/>
+        <p:nvPr/>
+      </p:nvGrpSpPr>
+      <p:grpSpPr>
+        <a:xfrm>
+          <a:off x="0" y="0"/>
+          <a:ext cx="0" cy="0"/>
+          <a:chOff x="0" y="0"/>
+          <a:chExt cx="0" cy="0"/>
+        </a:xfrm>
+      </p:grpSpPr>
+      <p:sp>
+        <p:nvSpPr>
           <p:cNvPr id="2" name="Заголовок 1"/>
           <p:cNvSpPr>
             <a:spLocks noGrp="1"/>
@@ -11302,7 +11967,7 @@
 </p:sld>
 </file>
 
-<file path=ppt/slides/slide7.xml><?xml version="1.0" encoding="utf-8"?>
+<file path=ppt/slides/slide8.xml><?xml version="1.0" encoding="utf-8"?>
 <p:sld xmlns:a="http://schemas.openxmlformats.org/drawingml/2006/main" xmlns:r="http://schemas.openxmlformats.org/officeDocument/2006/relationships" xmlns:p="http://schemas.openxmlformats.org/presentationml/2006/main">
   <p:cSld>
     <p:bg>
@@ -11960,7 +12625,7 @@
 </p:sld>
 </file>
 
-<file path=ppt/slides/slide8.xml><?xml version="1.0" encoding="utf-8"?>
+<file path=ppt/slides/slide9.xml><?xml version="1.0" encoding="utf-8"?>
 <p:sld xmlns:a="http://schemas.openxmlformats.org/drawingml/2006/main" xmlns:r="http://schemas.openxmlformats.org/officeDocument/2006/relationships" xmlns:p="http://schemas.openxmlformats.org/presentationml/2006/main">
   <p:cSld>
     <p:spTree>
@@ -13456,392 +14121,6 @@
     <p:extLst>
       <p:ext uri="{BB962C8B-B14F-4D97-AF65-F5344CB8AC3E}">
         <p14:creationId xmlns:p14="http://schemas.microsoft.com/office/powerpoint/2010/main" val="824787256"/>
-      </p:ext>
-    </p:extLst>
-  </p:cSld>
-  <p:clrMapOvr>
-    <a:masterClrMapping/>
-  </p:clrMapOvr>
-</p:sld>
-</file>
-
-<file path=ppt/slides/slide9.xml><?xml version="1.0" encoding="utf-8"?>
-<p:sld xmlns:a="http://schemas.openxmlformats.org/drawingml/2006/main" xmlns:r="http://schemas.openxmlformats.org/officeDocument/2006/relationships" xmlns:p="http://schemas.openxmlformats.org/presentationml/2006/main">
-  <p:cSld>
-    <p:spTree>
-      <p:nvGrpSpPr>
-        <p:cNvPr id="1" name=""/>
-        <p:cNvGrpSpPr/>
-        <p:nvPr/>
-      </p:nvGrpSpPr>
-      <p:grpSpPr>
-        <a:xfrm>
-          <a:off x="0" y="0"/>
-          <a:ext cx="0" cy="0"/>
-          <a:chOff x="0" y="0"/>
-          <a:chExt cx="0" cy="0"/>
-        </a:xfrm>
-      </p:grpSpPr>
-      <p:sp>
-        <p:nvSpPr>
-          <p:cNvPr id="2" name="Заголовок 1">
-            <a:extLst>
-              <a:ext uri="{FF2B5EF4-FFF2-40B4-BE49-F238E27FC236}">
-                <a16:creationId xmlns:a16="http://schemas.microsoft.com/office/drawing/2014/main" id="{38E728CA-EF5A-F8A7-5C98-5AF82A78B222}"/>
-              </a:ext>
-            </a:extLst>
-          </p:cNvPr>
-          <p:cNvSpPr>
-            <a:spLocks noGrp="1"/>
-          </p:cNvSpPr>
-          <p:nvPr>
-            <p:ph type="title"/>
-          </p:nvPr>
-        </p:nvSpPr>
-        <p:spPr>
-          <a:xfrm>
-            <a:off x="838200" y="365125"/>
-            <a:ext cx="10515600" cy="424015"/>
-          </a:xfrm>
-        </p:spPr>
-        <p:txBody>
-          <a:bodyPr>
-            <a:normAutofit fontScale="90000"/>
-          </a:bodyPr>
-          <a:lstStyle/>
-          <a:p>
-            <a:r>
-              <a:rPr lang="en-US" b="1" dirty="0" err="1"/>
-              <a:t>Ка</a:t>
-            </a:r>
-            <a:r>
-              <a:rPr lang="ru-RU" b="1" dirty="0" err="1"/>
-              <a:t>зуальность</a:t>
-            </a:r>
-            <a:r>
-              <a:rPr lang="ru-RU" b="1" dirty="0"/>
-              <a:t> МВР</a:t>
-            </a:r>
-            <a:endParaRPr lang="ru-RU" dirty="0"/>
-          </a:p>
-        </p:txBody>
-      </p:sp>
-      <p:sp>
-        <p:nvSpPr>
-          <p:cNvPr id="3" name="Объект 2">
-            <a:extLst>
-              <a:ext uri="{FF2B5EF4-FFF2-40B4-BE49-F238E27FC236}">
-                <a16:creationId xmlns:a16="http://schemas.microsoft.com/office/drawing/2014/main" id="{3C199195-BD5C-8558-68D8-AABE8A3EEA31}"/>
-              </a:ext>
-            </a:extLst>
-          </p:cNvPr>
-          <p:cNvSpPr>
-            <a:spLocks noGrp="1"/>
-          </p:cNvSpPr>
-          <p:nvPr>
-            <p:ph idx="1"/>
-          </p:nvPr>
-        </p:nvSpPr>
-        <p:spPr>
-          <a:xfrm>
-            <a:off x="263047" y="964504"/>
-            <a:ext cx="11611627" cy="5528371"/>
-          </a:xfrm>
-        </p:spPr>
-        <p:txBody>
-          <a:bodyPr/>
-          <a:lstStyle/>
-          <a:p>
-            <a:r>
-              <a:rPr lang="ru-RU" sz="2200" dirty="0"/>
-              <a:t>Казуальность по Грейнджеру помогает выявлять </a:t>
-            </a:r>
-            <a:r>
-              <a:rPr lang="en-US" sz="2200" i="1" dirty="0" err="1"/>
-              <a:t>стати</a:t>
-            </a:r>
-            <a:r>
-              <a:rPr lang="ru-RU" sz="2200" i="1" dirty="0" err="1"/>
-              <a:t>стические</a:t>
-            </a:r>
-            <a:r>
-              <a:rPr lang="ru-RU" sz="2200" i="1" dirty="0"/>
-              <a:t> причинные связи</a:t>
-            </a:r>
-            <a:r>
-              <a:rPr lang="ru-RU" sz="2200" dirty="0"/>
-              <a:t>, но не доказывает их.</a:t>
-            </a:r>
-          </a:p>
-          <a:p>
-            <a:pPr marL="285750" indent="-285750"/>
-            <a:r>
-              <a:rPr lang="ru-RU" sz="2200" dirty="0"/>
-              <a:t>Всегда интерпретируйте результаты в контексте предметной области.</a:t>
-            </a:r>
-          </a:p>
-          <a:p>
-            <a:pPr marL="285750" indent="-285750"/>
-            <a:r>
-              <a:rPr lang="ru-RU" sz="2200" dirty="0"/>
-              <a:t>Совмещайте статистические тесты с экспертными знаниями.</a:t>
-            </a:r>
-          </a:p>
-          <a:p>
-            <a:pPr marL="285750" indent="-285750"/>
-            <a:r>
-              <a:rPr lang="ru-RU" sz="2200" dirty="0"/>
-              <a:t>Ложная казуальность возможна при:</a:t>
-            </a:r>
-          </a:p>
-          <a:p>
-            <a:pPr marL="742950" lvl="1" indent="-285750"/>
-            <a:r>
-              <a:rPr lang="ru-RU" sz="2200" dirty="0"/>
-              <a:t>Наличии скрытой (латентной) переменной, влияющей на оба ряда.</a:t>
-            </a:r>
-          </a:p>
-          <a:p>
-            <a:pPr marL="742950" lvl="1" indent="-285750"/>
-            <a:r>
-              <a:rPr lang="ru-RU" sz="2200" dirty="0"/>
-              <a:t>Неправильном выборе лага </a:t>
-            </a:r>
-            <a:r>
-              <a:rPr lang="en" sz="2200" i="1" dirty="0"/>
-              <a:t>p</a:t>
-            </a:r>
-            <a:r>
-              <a:rPr lang="en" sz="2200" dirty="0"/>
-              <a:t> .</a:t>
-            </a:r>
-          </a:p>
-          <a:p>
-            <a:pPr marL="742950" lvl="1" indent="-285750"/>
-            <a:r>
-              <a:rPr lang="ru-RU" sz="2200" dirty="0"/>
-              <a:t>Нестационарности рядов </a:t>
-            </a:r>
-            <a:endParaRPr lang="en-US" sz="2200" dirty="0"/>
-          </a:p>
-          <a:p>
-            <a:pPr marL="0" indent="0">
-              <a:buNone/>
-            </a:pPr>
-            <a:r>
-              <a:rPr lang="en-US" sz="2400" dirty="0" err="1"/>
-              <a:t>П</a:t>
-            </a:r>
-            <a:r>
-              <a:rPr lang="ru-RU" sz="2400" dirty="0" err="1"/>
-              <a:t>омимо</a:t>
-            </a:r>
-            <a:r>
-              <a:rPr lang="ru-RU" sz="2400" dirty="0"/>
-              <a:t> казуальности по Грейнджеру </a:t>
-            </a:r>
-            <a:r>
-              <a:rPr lang="ru-RU" sz="2400" dirty="0" err="1"/>
-              <a:t>казулальность</a:t>
-            </a:r>
-            <a:r>
-              <a:rPr lang="ru-RU" sz="2400" dirty="0"/>
-              <a:t> может быть более сложной, например условной, сезонной </a:t>
-            </a:r>
-            <a:br>
-              <a:rPr lang="ru-RU" sz="2400" dirty="0"/>
-            </a:br>
-            <a:r>
-              <a:rPr lang="ru-RU" sz="2400" dirty="0"/>
-              <a:t>или представлять собой граф (</a:t>
-            </a:r>
-            <a:r>
-              <a:rPr lang="en" sz="2400" dirty="0"/>
-              <a:t>causal discovery</a:t>
-            </a:r>
-            <a:r>
-              <a:rPr lang="ru-RU" sz="2400" dirty="0"/>
-              <a:t>)</a:t>
-            </a:r>
-          </a:p>
-        </p:txBody>
-      </p:sp>
-      <p:pic>
-        <p:nvPicPr>
-          <p:cNvPr id="4" name="Рисунок 3">
-            <a:extLst>
-              <a:ext uri="{FF2B5EF4-FFF2-40B4-BE49-F238E27FC236}">
-                <a16:creationId xmlns:a16="http://schemas.microsoft.com/office/drawing/2014/main" id="{E4B3B271-106F-3359-C16F-E315B67B2D39}"/>
-              </a:ext>
-            </a:extLst>
-          </p:cNvPr>
-          <p:cNvPicPr>
-            <a:picLocks noChangeAspect="1"/>
-          </p:cNvPicPr>
-          <p:nvPr/>
-        </p:nvPicPr>
-        <p:blipFill>
-          <a:blip r:embed="rId2"/>
-          <a:stretch>
-            <a:fillRect/>
-          </a:stretch>
-        </p:blipFill>
-        <p:spPr>
-          <a:xfrm>
-            <a:off x="7804759" y="4390302"/>
-            <a:ext cx="4069915" cy="2277937"/>
-          </a:xfrm>
-          <a:prstGeom prst="rect">
-            <a:avLst/>
-          </a:prstGeom>
-        </p:spPr>
-      </p:pic>
-      <p:sp>
-        <p:nvSpPr>
-          <p:cNvPr id="5" name="TextBox 4">
-            <a:extLst>
-              <a:ext uri="{FF2B5EF4-FFF2-40B4-BE49-F238E27FC236}">
-                <a16:creationId xmlns:a16="http://schemas.microsoft.com/office/drawing/2014/main" id="{ABAD593B-431E-13EF-F915-5CF3D7658901}"/>
-              </a:ext>
-            </a:extLst>
-          </p:cNvPr>
-          <p:cNvSpPr txBox="1"/>
-          <p:nvPr/>
-        </p:nvSpPr>
-        <p:spPr>
-          <a:xfrm>
-            <a:off x="2007365" y="6581001"/>
-            <a:ext cx="8177270" cy="276999"/>
-          </a:xfrm>
-          <a:prstGeom prst="rect">
-            <a:avLst/>
-          </a:prstGeom>
-          <a:noFill/>
-        </p:spPr>
-        <p:txBody>
-          <a:bodyPr wrap="square">
-            <a:spAutoFit/>
-          </a:bodyPr>
-          <a:lstStyle/>
-          <a:p>
-            <a:r>
-              <a:rPr lang="ru-RU" sz="1200" dirty="0" err="1"/>
-              <a:t>https</a:t>
-            </a:r>
-            <a:r>
-              <a:rPr lang="ru-RU" sz="1200" dirty="0"/>
-              <a:t>://</a:t>
-            </a:r>
-            <a:r>
-              <a:rPr lang="ru-RU" sz="1200" dirty="0" err="1"/>
-              <a:t>www.analyticsvidhya.com</a:t>
-            </a:r>
-            <a:r>
-              <a:rPr lang="ru-RU" sz="1200" dirty="0"/>
-              <a:t>/</a:t>
-            </a:r>
-            <a:r>
-              <a:rPr lang="ru-RU" sz="1200" dirty="0" err="1"/>
-              <a:t>blog</a:t>
-            </a:r>
-            <a:r>
-              <a:rPr lang="ru-RU" sz="1200" dirty="0"/>
-              <a:t>/2021/08/granger-causality-in-time-series-explained-using-chicken-and-egg-problem/</a:t>
-            </a:r>
-          </a:p>
-        </p:txBody>
-      </p:sp>
-      <p:sp>
-        <p:nvSpPr>
-          <p:cNvPr id="7" name="TextBox 6">
-            <a:extLst>
-              <a:ext uri="{FF2B5EF4-FFF2-40B4-BE49-F238E27FC236}">
-                <a16:creationId xmlns:a16="http://schemas.microsoft.com/office/drawing/2014/main" id="{535C2EE9-D502-5FF6-3127-D1A2545D4EAD}"/>
-              </a:ext>
-            </a:extLst>
-          </p:cNvPr>
-          <p:cNvSpPr txBox="1"/>
-          <p:nvPr/>
-        </p:nvSpPr>
-        <p:spPr>
-          <a:xfrm>
-            <a:off x="317326" y="6329685"/>
-            <a:ext cx="6093912" cy="338554"/>
-          </a:xfrm>
-          <a:prstGeom prst="rect">
-            <a:avLst/>
-          </a:prstGeom>
-          <a:noFill/>
-        </p:spPr>
-        <p:txBody>
-          <a:bodyPr wrap="square">
-            <a:spAutoFit/>
-          </a:bodyPr>
-          <a:lstStyle/>
-          <a:p>
-            <a:r>
-              <a:rPr lang="ru-RU" sz="1600" dirty="0" err="1"/>
-              <a:t>https</a:t>
-            </a:r>
-            <a:r>
-              <a:rPr lang="ru-RU" sz="1600" dirty="0"/>
-              <a:t>://</a:t>
-            </a:r>
-            <a:r>
-              <a:rPr lang="ru-RU" sz="1600" dirty="0" err="1"/>
-              <a:t>github.com</a:t>
-            </a:r>
-            <a:r>
-              <a:rPr lang="ru-RU" sz="1600" dirty="0"/>
-              <a:t>/</a:t>
-            </a:r>
-            <a:r>
-              <a:rPr lang="ru-RU" sz="1600" dirty="0" err="1"/>
-              <a:t>jakobrunge</a:t>
-            </a:r>
-            <a:r>
-              <a:rPr lang="ru-RU" sz="1600" dirty="0"/>
-              <a:t>/</a:t>
-            </a:r>
-            <a:r>
-              <a:rPr lang="ru-RU" sz="1600" dirty="0" err="1"/>
-              <a:t>tigramite</a:t>
-            </a:r>
-            <a:r>
-              <a:rPr lang="ru-RU" sz="1600" dirty="0"/>
-              <a:t>/</a:t>
-            </a:r>
-            <a:r>
-              <a:rPr lang="ru-RU" sz="1600" dirty="0" err="1"/>
-              <a:t>tree</a:t>
-            </a:r>
-            <a:r>
-              <a:rPr lang="ru-RU" sz="1600" dirty="0"/>
-              <a:t>/</a:t>
-            </a:r>
-            <a:r>
-              <a:rPr lang="ru-RU" sz="1600" dirty="0" err="1"/>
-              <a:t>master</a:t>
-            </a:r>
-            <a:r>
-              <a:rPr lang="ru-RU" sz="1600" dirty="0"/>
-              <a:t>/</a:t>
-            </a:r>
-            <a:r>
-              <a:rPr lang="ru-RU" sz="1600" dirty="0" err="1"/>
-              <a:t>tutorials</a:t>
-            </a:r>
-            <a:r>
-              <a:rPr lang="ru-RU" sz="1600" dirty="0"/>
-              <a:t>/</a:t>
-            </a:r>
-          </a:p>
-        </p:txBody>
-      </p:sp>
-    </p:spTree>
-    <p:extLst>
-      <p:ext uri="{BB962C8B-B14F-4D97-AF65-F5344CB8AC3E}">
-        <p14:creationId xmlns:p14="http://schemas.microsoft.com/office/powerpoint/2010/main" val="3615208541"/>
       </p:ext>
     </p:extLst>
   </p:cSld>

--- a/2025/LEC/06-1 многомерные ВР.pptx
+++ b/2025/LEC/06-1 многомерные ВР.pptx
@@ -5,15 +5,15 @@
     <p:sldMasterId id="2147483648" r:id="rId1"/>
   </p:sldMasterIdLst>
   <p:notesMasterIdLst>
-    <p:notesMasterId r:id="rId21"/>
+    <p:notesMasterId r:id="rId27"/>
   </p:notesMasterIdLst>
   <p:sldIdLst>
     <p:sldId id="256" r:id="rId2"/>
     <p:sldId id="258" r:id="rId3"/>
     <p:sldId id="260" r:id="rId4"/>
     <p:sldId id="261" r:id="rId5"/>
-    <p:sldId id="265" r:id="rId6"/>
-    <p:sldId id="276" r:id="rId7"/>
+    <p:sldId id="277" r:id="rId6"/>
+    <p:sldId id="265" r:id="rId7"/>
     <p:sldId id="264" r:id="rId8"/>
     <p:sldId id="268" r:id="rId9"/>
     <p:sldId id="269" r:id="rId10"/>
@@ -21,12 +21,18 @@
     <p:sldId id="273" r:id="rId12"/>
     <p:sldId id="266" r:id="rId13"/>
     <p:sldId id="267" r:id="rId14"/>
-    <p:sldId id="272" r:id="rId15"/>
-    <p:sldId id="274" r:id="rId16"/>
-    <p:sldId id="275" r:id="rId17"/>
-    <p:sldId id="262" r:id="rId18"/>
-    <p:sldId id="259" r:id="rId19"/>
-    <p:sldId id="263" r:id="rId20"/>
+    <p:sldId id="278" r:id="rId15"/>
+    <p:sldId id="279" r:id="rId16"/>
+    <p:sldId id="272" r:id="rId17"/>
+    <p:sldId id="274" r:id="rId18"/>
+    <p:sldId id="281" r:id="rId19"/>
+    <p:sldId id="280" r:id="rId20"/>
+    <p:sldId id="275" r:id="rId21"/>
+    <p:sldId id="282" r:id="rId22"/>
+    <p:sldId id="283" r:id="rId23"/>
+    <p:sldId id="262" r:id="rId24"/>
+    <p:sldId id="259" r:id="rId25"/>
+    <p:sldId id="263" r:id="rId26"/>
   </p:sldIdLst>
   <p:sldSz cx="12192000" cy="6858000"/>
   <p:notesSz cx="6858000" cy="9144000"/>
@@ -547,7 +553,7 @@
           <a:p>
             <a:fld id="{E5904A68-FE9C-41D3-96AD-A1A68ED6C497}" type="slidenum">
               <a:rPr lang="ru-RU" smtClean="0"/>
-              <a:t>9</a:t>
+              <a:t>4</a:t>
             </a:fld>
             <a:endParaRPr lang="ru-RU"/>
           </a:p>
@@ -556,7 +562,391 @@
     </p:spTree>
     <p:extLst>
       <p:ext uri="{BB962C8B-B14F-4D97-AF65-F5344CB8AC3E}">
-        <p14:creationId xmlns:p14="http://schemas.microsoft.com/office/powerpoint/2010/main" val="3745841755"/>
+        <p14:creationId xmlns:p14="http://schemas.microsoft.com/office/powerpoint/2010/main" val="2155719139"/>
+      </p:ext>
+    </p:extLst>
+  </p:cSld>
+  <p:clrMapOvr>
+    <a:masterClrMapping/>
+  </p:clrMapOvr>
+</p:notes>
+</file>
+
+<file path=ppt/notesSlides/notesSlide10.xml><?xml version="1.0" encoding="utf-8"?>
+<p:notes xmlns:a="http://schemas.openxmlformats.org/drawingml/2006/main" xmlns:r="http://schemas.openxmlformats.org/officeDocument/2006/relationships" xmlns:p="http://schemas.openxmlformats.org/presentationml/2006/main">
+  <p:cSld>
+    <p:spTree>
+      <p:nvGrpSpPr>
+        <p:cNvPr id="1" name=""/>
+        <p:cNvGrpSpPr/>
+        <p:nvPr/>
+      </p:nvGrpSpPr>
+      <p:grpSpPr>
+        <a:xfrm>
+          <a:off x="0" y="0"/>
+          <a:ext cx="0" cy="0"/>
+          <a:chOff x="0" y="0"/>
+          <a:chExt cx="0" cy="0"/>
+        </a:xfrm>
+      </p:grpSpPr>
+      <p:sp>
+        <p:nvSpPr>
+          <p:cNvPr id="2" name="Образ слайда 1"/>
+          <p:cNvSpPr>
+            <a:spLocks noGrp="1" noRot="1" noChangeAspect="1"/>
+          </p:cNvSpPr>
+          <p:nvPr>
+            <p:ph type="sldImg"/>
+          </p:nvPr>
+        </p:nvSpPr>
+        <p:spPr/>
+      </p:sp>
+      <p:sp>
+        <p:nvSpPr>
+          <p:cNvPr id="3" name="Заметки 2"/>
+          <p:cNvSpPr>
+            <a:spLocks noGrp="1"/>
+          </p:cNvSpPr>
+          <p:nvPr>
+            <p:ph type="body" idx="1"/>
+          </p:nvPr>
+        </p:nvSpPr>
+        <p:spPr/>
+        <p:txBody>
+          <a:bodyPr/>
+          <a:lstStyle/>
+          <a:p>
+            <a:endParaRPr lang="ru-RU" dirty="0"/>
+          </a:p>
+        </p:txBody>
+      </p:sp>
+      <p:sp>
+        <p:nvSpPr>
+          <p:cNvPr id="4" name="Номер слайда 3"/>
+          <p:cNvSpPr>
+            <a:spLocks noGrp="1"/>
+          </p:cNvSpPr>
+          <p:nvPr>
+            <p:ph type="sldNum" sz="quarter" idx="5"/>
+          </p:nvPr>
+        </p:nvSpPr>
+        <p:spPr/>
+        <p:txBody>
+          <a:bodyPr/>
+          <a:lstStyle/>
+          <a:p>
+            <a:fld id="{E5904A68-FE9C-41D3-96AD-A1A68ED6C497}" type="slidenum">
+              <a:rPr lang="ru-RU" smtClean="0"/>
+              <a:t>17</a:t>
+            </a:fld>
+            <a:endParaRPr lang="ru-RU"/>
+          </a:p>
+        </p:txBody>
+      </p:sp>
+    </p:spTree>
+    <p:extLst>
+      <p:ext uri="{BB962C8B-B14F-4D97-AF65-F5344CB8AC3E}">
+        <p14:creationId xmlns:p14="http://schemas.microsoft.com/office/powerpoint/2010/main" val="2137980218"/>
+      </p:ext>
+    </p:extLst>
+  </p:cSld>
+  <p:clrMapOvr>
+    <a:masterClrMapping/>
+  </p:clrMapOvr>
+</p:notes>
+</file>
+
+<file path=ppt/notesSlides/notesSlide11.xml><?xml version="1.0" encoding="utf-8"?>
+<p:notes xmlns:a="http://schemas.openxmlformats.org/drawingml/2006/main" xmlns:r="http://schemas.openxmlformats.org/officeDocument/2006/relationships" xmlns:p="http://schemas.openxmlformats.org/presentationml/2006/main">
+  <p:cSld>
+    <p:spTree>
+      <p:nvGrpSpPr>
+        <p:cNvPr id="1" name="">
+          <a:extLst>
+            <a:ext uri="{FF2B5EF4-FFF2-40B4-BE49-F238E27FC236}">
+              <a16:creationId xmlns:a16="http://schemas.microsoft.com/office/drawing/2014/main" id="{EC62BDB3-31A4-8296-3E31-220BBEB9BD81}"/>
+            </a:ext>
+          </a:extLst>
+        </p:cNvPr>
+        <p:cNvGrpSpPr/>
+        <p:nvPr/>
+      </p:nvGrpSpPr>
+      <p:grpSpPr>
+        <a:xfrm>
+          <a:off x="0" y="0"/>
+          <a:ext cx="0" cy="0"/>
+          <a:chOff x="0" y="0"/>
+          <a:chExt cx="0" cy="0"/>
+        </a:xfrm>
+      </p:grpSpPr>
+      <p:sp>
+        <p:nvSpPr>
+          <p:cNvPr id="2" name="Образ слайда 1">
+            <a:extLst>
+              <a:ext uri="{FF2B5EF4-FFF2-40B4-BE49-F238E27FC236}">
+                <a16:creationId xmlns:a16="http://schemas.microsoft.com/office/drawing/2014/main" id="{76218BB8-62AF-CD76-896C-E14F9D63C361}"/>
+              </a:ext>
+            </a:extLst>
+          </p:cNvPr>
+          <p:cNvSpPr>
+            <a:spLocks noGrp="1" noRot="1" noChangeAspect="1"/>
+          </p:cNvSpPr>
+          <p:nvPr>
+            <p:ph type="sldImg"/>
+          </p:nvPr>
+        </p:nvSpPr>
+        <p:spPr/>
+      </p:sp>
+      <p:sp>
+        <p:nvSpPr>
+          <p:cNvPr id="3" name="Заметки 2">
+            <a:extLst>
+              <a:ext uri="{FF2B5EF4-FFF2-40B4-BE49-F238E27FC236}">
+                <a16:creationId xmlns:a16="http://schemas.microsoft.com/office/drawing/2014/main" id="{053C8B66-CD44-3498-604C-1D83C23B9816}"/>
+              </a:ext>
+            </a:extLst>
+          </p:cNvPr>
+          <p:cNvSpPr>
+            <a:spLocks noGrp="1"/>
+          </p:cNvSpPr>
+          <p:nvPr>
+            <p:ph type="body" idx="1"/>
+          </p:nvPr>
+        </p:nvSpPr>
+        <p:spPr/>
+        <p:txBody>
+          <a:bodyPr/>
+          <a:lstStyle/>
+          <a:p>
+            <a:endParaRPr lang="ru-RU" dirty="0"/>
+          </a:p>
+        </p:txBody>
+      </p:sp>
+      <p:sp>
+        <p:nvSpPr>
+          <p:cNvPr id="4" name="Номер слайда 3">
+            <a:extLst>
+              <a:ext uri="{FF2B5EF4-FFF2-40B4-BE49-F238E27FC236}">
+                <a16:creationId xmlns:a16="http://schemas.microsoft.com/office/drawing/2014/main" id="{AEE75700-949C-EBF3-EBCC-2766C6B988C3}"/>
+              </a:ext>
+            </a:extLst>
+          </p:cNvPr>
+          <p:cNvSpPr>
+            <a:spLocks noGrp="1"/>
+          </p:cNvSpPr>
+          <p:nvPr>
+            <p:ph type="sldNum" sz="quarter" idx="5"/>
+          </p:nvPr>
+        </p:nvSpPr>
+        <p:spPr/>
+        <p:txBody>
+          <a:bodyPr/>
+          <a:lstStyle/>
+          <a:p>
+            <a:fld id="{E5904A68-FE9C-41D3-96AD-A1A68ED6C497}" type="slidenum">
+              <a:rPr lang="ru-RU" smtClean="0"/>
+              <a:t>18</a:t>
+            </a:fld>
+            <a:endParaRPr lang="ru-RU"/>
+          </a:p>
+        </p:txBody>
+      </p:sp>
+    </p:spTree>
+    <p:extLst>
+      <p:ext uri="{BB962C8B-B14F-4D97-AF65-F5344CB8AC3E}">
+        <p14:creationId xmlns:p14="http://schemas.microsoft.com/office/powerpoint/2010/main" val="3268943407"/>
+      </p:ext>
+    </p:extLst>
+  </p:cSld>
+  <p:clrMapOvr>
+    <a:masterClrMapping/>
+  </p:clrMapOvr>
+</p:notes>
+</file>
+
+<file path=ppt/notesSlides/notesSlide12.xml><?xml version="1.0" encoding="utf-8"?>
+<p:notes xmlns:a="http://schemas.openxmlformats.org/drawingml/2006/main" xmlns:r="http://schemas.openxmlformats.org/officeDocument/2006/relationships" xmlns:p="http://schemas.openxmlformats.org/presentationml/2006/main">
+  <p:cSld>
+    <p:spTree>
+      <p:nvGrpSpPr>
+        <p:cNvPr id="1" name=""/>
+        <p:cNvGrpSpPr/>
+        <p:nvPr/>
+      </p:nvGrpSpPr>
+      <p:grpSpPr>
+        <a:xfrm>
+          <a:off x="0" y="0"/>
+          <a:ext cx="0" cy="0"/>
+          <a:chOff x="0" y="0"/>
+          <a:chExt cx="0" cy="0"/>
+        </a:xfrm>
+      </p:grpSpPr>
+      <p:sp>
+        <p:nvSpPr>
+          <p:cNvPr id="2" name="Образ слайда 1"/>
+          <p:cNvSpPr>
+            <a:spLocks noGrp="1" noRot="1" noChangeAspect="1"/>
+          </p:cNvSpPr>
+          <p:nvPr>
+            <p:ph type="sldImg"/>
+          </p:nvPr>
+        </p:nvSpPr>
+        <p:spPr/>
+      </p:sp>
+      <p:sp>
+        <p:nvSpPr>
+          <p:cNvPr id="3" name="Заметки 2"/>
+          <p:cNvSpPr>
+            <a:spLocks noGrp="1"/>
+          </p:cNvSpPr>
+          <p:nvPr>
+            <p:ph type="body" idx="1"/>
+          </p:nvPr>
+        </p:nvSpPr>
+        <p:spPr/>
+        <p:txBody>
+          <a:bodyPr/>
+          <a:lstStyle/>
+          <a:p>
+            <a:endParaRPr lang="ru-RU" dirty="0"/>
+          </a:p>
+        </p:txBody>
+      </p:sp>
+      <p:sp>
+        <p:nvSpPr>
+          <p:cNvPr id="4" name="Номер слайда 3"/>
+          <p:cNvSpPr>
+            <a:spLocks noGrp="1"/>
+          </p:cNvSpPr>
+          <p:nvPr>
+            <p:ph type="sldNum" sz="quarter" idx="5"/>
+          </p:nvPr>
+        </p:nvSpPr>
+        <p:spPr/>
+        <p:txBody>
+          <a:bodyPr/>
+          <a:lstStyle/>
+          <a:p>
+            <a:fld id="{E5904A68-FE9C-41D3-96AD-A1A68ED6C497}" type="slidenum">
+              <a:rPr lang="ru-RU" smtClean="0"/>
+              <a:t>20</a:t>
+            </a:fld>
+            <a:endParaRPr lang="ru-RU"/>
+          </a:p>
+        </p:txBody>
+      </p:sp>
+    </p:spTree>
+    <p:extLst>
+      <p:ext uri="{BB962C8B-B14F-4D97-AF65-F5344CB8AC3E}">
+        <p14:creationId xmlns:p14="http://schemas.microsoft.com/office/powerpoint/2010/main" val="2197168848"/>
+      </p:ext>
+    </p:extLst>
+  </p:cSld>
+  <p:clrMapOvr>
+    <a:masterClrMapping/>
+  </p:clrMapOvr>
+</p:notes>
+</file>
+
+<file path=ppt/notesSlides/notesSlide13.xml><?xml version="1.0" encoding="utf-8"?>
+<p:notes xmlns:a="http://schemas.openxmlformats.org/drawingml/2006/main" xmlns:r="http://schemas.openxmlformats.org/officeDocument/2006/relationships" xmlns:p="http://schemas.openxmlformats.org/presentationml/2006/main">
+  <p:cSld>
+    <p:spTree>
+      <p:nvGrpSpPr>
+        <p:cNvPr id="1" name="">
+          <a:extLst>
+            <a:ext uri="{FF2B5EF4-FFF2-40B4-BE49-F238E27FC236}">
+              <a16:creationId xmlns:a16="http://schemas.microsoft.com/office/drawing/2014/main" id="{C493C040-80D8-F537-B491-54299D8F07D6}"/>
+            </a:ext>
+          </a:extLst>
+        </p:cNvPr>
+        <p:cNvGrpSpPr/>
+        <p:nvPr/>
+      </p:nvGrpSpPr>
+      <p:grpSpPr>
+        <a:xfrm>
+          <a:off x="0" y="0"/>
+          <a:ext cx="0" cy="0"/>
+          <a:chOff x="0" y="0"/>
+          <a:chExt cx="0" cy="0"/>
+        </a:xfrm>
+      </p:grpSpPr>
+      <p:sp>
+        <p:nvSpPr>
+          <p:cNvPr id="2" name="Образ слайда 1">
+            <a:extLst>
+              <a:ext uri="{FF2B5EF4-FFF2-40B4-BE49-F238E27FC236}">
+                <a16:creationId xmlns:a16="http://schemas.microsoft.com/office/drawing/2014/main" id="{A4FC9516-A172-D2C7-1645-B2B35D560236}"/>
+              </a:ext>
+            </a:extLst>
+          </p:cNvPr>
+          <p:cNvSpPr>
+            <a:spLocks noGrp="1" noRot="1" noChangeAspect="1"/>
+          </p:cNvSpPr>
+          <p:nvPr>
+            <p:ph type="sldImg"/>
+          </p:nvPr>
+        </p:nvSpPr>
+        <p:spPr/>
+      </p:sp>
+      <p:sp>
+        <p:nvSpPr>
+          <p:cNvPr id="3" name="Заметки 2">
+            <a:extLst>
+              <a:ext uri="{FF2B5EF4-FFF2-40B4-BE49-F238E27FC236}">
+                <a16:creationId xmlns:a16="http://schemas.microsoft.com/office/drawing/2014/main" id="{D551A84D-3E68-5321-66DB-C363217BA6BF}"/>
+              </a:ext>
+            </a:extLst>
+          </p:cNvPr>
+          <p:cNvSpPr>
+            <a:spLocks noGrp="1"/>
+          </p:cNvSpPr>
+          <p:nvPr>
+            <p:ph type="body" idx="1"/>
+          </p:nvPr>
+        </p:nvSpPr>
+        <p:spPr/>
+        <p:txBody>
+          <a:bodyPr/>
+          <a:lstStyle/>
+          <a:p>
+            <a:endParaRPr lang="ru-RU" dirty="0"/>
+          </a:p>
+        </p:txBody>
+      </p:sp>
+      <p:sp>
+        <p:nvSpPr>
+          <p:cNvPr id="4" name="Номер слайда 3">
+            <a:extLst>
+              <a:ext uri="{FF2B5EF4-FFF2-40B4-BE49-F238E27FC236}">
+                <a16:creationId xmlns:a16="http://schemas.microsoft.com/office/drawing/2014/main" id="{6BFDC032-D656-67AD-DDFC-9BA1BF21B501}"/>
+              </a:ext>
+            </a:extLst>
+          </p:cNvPr>
+          <p:cNvSpPr>
+            <a:spLocks noGrp="1"/>
+          </p:cNvSpPr>
+          <p:nvPr>
+            <p:ph type="sldNum" sz="quarter" idx="5"/>
+          </p:nvPr>
+        </p:nvSpPr>
+        <p:spPr/>
+        <p:txBody>
+          <a:bodyPr/>
+          <a:lstStyle/>
+          <a:p>
+            <a:fld id="{E5904A68-FE9C-41D3-96AD-A1A68ED6C497}" type="slidenum">
+              <a:rPr lang="ru-RU" smtClean="0"/>
+              <a:t>21</a:t>
+            </a:fld>
+            <a:endParaRPr lang="ru-RU"/>
+          </a:p>
+        </p:txBody>
+      </p:sp>
+    </p:spTree>
+    <p:extLst>
+      <p:ext uri="{BB962C8B-B14F-4D97-AF65-F5344CB8AC3E}">
+        <p14:creationId xmlns:p14="http://schemas.microsoft.com/office/powerpoint/2010/main" val="773937685"/>
       </p:ext>
     </p:extLst>
   </p:cSld>
@@ -612,9 +1002,6 @@
           <a:p>
             <a:endParaRPr lang="ru-RU" dirty="0"/>
           </a:p>
-          <a:p>
-            <a:endParaRPr lang="ru-RU" dirty="0"/>
-          </a:p>
         </p:txBody>
       </p:sp>
       <p:sp>
@@ -634,7 +1021,7 @@
           <a:p>
             <a:fld id="{E5904A68-FE9C-41D3-96AD-A1A68ED6C497}" type="slidenum">
               <a:rPr lang="ru-RU" smtClean="0"/>
-              <a:t>11</a:t>
+              <a:t>5</a:t>
             </a:fld>
             <a:endParaRPr lang="ru-RU"/>
           </a:p>
@@ -643,7 +1030,7 @@
     </p:spTree>
     <p:extLst>
       <p:ext uri="{BB962C8B-B14F-4D97-AF65-F5344CB8AC3E}">
-        <p14:creationId xmlns:p14="http://schemas.microsoft.com/office/powerpoint/2010/main" val="3042166307"/>
+        <p14:creationId xmlns:p14="http://schemas.microsoft.com/office/powerpoint/2010/main" val="1383585542"/>
       </p:ext>
     </p:extLst>
   </p:cSld>
@@ -697,52 +1084,6 @@
           <a:bodyPr/>
           <a:lstStyle/>
           <a:p>
-            <a:r>
-              <a:rPr lang="ru-RU" sz="1200" b="0" i="0" kern="1200" dirty="0">
-                <a:solidFill>
-                  <a:schemeClr val="tx1"/>
-                </a:solidFill>
-                <a:effectLst/>
-                <a:latin typeface="+mn-lt"/>
-                <a:ea typeface="+mn-ea"/>
-                <a:cs typeface="+mn-cs"/>
-              </a:rPr>
-              <a:t>Brent−0.8⋅Бензин−0.7⋅Дизель∼</a:t>
-            </a:r>
-            <a:r>
-              <a:rPr lang="ru-RU" sz="1200" b="0" i="1" kern="1200" dirty="0">
-                <a:solidFill>
-                  <a:schemeClr val="tx1"/>
-                </a:solidFill>
-                <a:effectLst/>
-                <a:latin typeface="+mn-lt"/>
-                <a:ea typeface="+mn-ea"/>
-                <a:cs typeface="+mn-cs"/>
-              </a:rPr>
-              <a:t>I</a:t>
-            </a:r>
-            <a:r>
-              <a:rPr lang="ru-RU" sz="1200" b="0" i="0" kern="1200" dirty="0">
-                <a:solidFill>
-                  <a:schemeClr val="tx1"/>
-                </a:solidFill>
-                <a:effectLst/>
-                <a:latin typeface="+mn-lt"/>
-                <a:ea typeface="+mn-ea"/>
-                <a:cs typeface="+mn-cs"/>
-              </a:rPr>
-              <a:t>(0)</a:t>
-            </a:r>
-          </a:p>
-          <a:p>
-            <a:r>
-              <a:rPr lang="ru-RU" b="0" dirty="0">
-                <a:effectLst/>
-              </a:rPr>
-              <a:t>Это означает: маржа между нефтью и продуктами стабильна — возможен арбитраж. </a:t>
-            </a:r>
-          </a:p>
-          <a:p>
             <a:endParaRPr lang="ru-RU" dirty="0"/>
           </a:p>
         </p:txBody>
@@ -754,7 +1095,7 @@
             <a:spLocks noGrp="1"/>
           </p:cNvSpPr>
           <p:nvPr>
-            <p:ph type="sldNum" sz="quarter" idx="10"/>
+            <p:ph type="sldNum" sz="quarter" idx="5"/>
           </p:nvPr>
         </p:nvSpPr>
         <p:spPr/>
@@ -764,7 +1105,7 @@
           <a:p>
             <a:fld id="{E5904A68-FE9C-41D3-96AD-A1A68ED6C497}" type="slidenum">
               <a:rPr lang="ru-RU" smtClean="0"/>
-              <a:t>12</a:t>
+              <a:t>9</a:t>
             </a:fld>
             <a:endParaRPr lang="ru-RU"/>
           </a:p>
@@ -773,7 +1114,7 @@
     </p:spTree>
     <p:extLst>
       <p:ext uri="{BB962C8B-B14F-4D97-AF65-F5344CB8AC3E}">
-        <p14:creationId xmlns:p14="http://schemas.microsoft.com/office/powerpoint/2010/main" val="3920822745"/>
+        <p14:creationId xmlns:p14="http://schemas.microsoft.com/office/powerpoint/2010/main" val="3745841755"/>
       </p:ext>
     </p:extLst>
   </p:cSld>
@@ -829,6 +1170,9 @@
           <a:p>
             <a:endParaRPr lang="ru-RU" dirty="0"/>
           </a:p>
+          <a:p>
+            <a:endParaRPr lang="ru-RU" dirty="0"/>
+          </a:p>
         </p:txBody>
       </p:sp>
       <p:sp>
@@ -838,7 +1182,7 @@
             <a:spLocks noGrp="1"/>
           </p:cNvSpPr>
           <p:nvPr>
-            <p:ph type="sldNum" sz="quarter" idx="10"/>
+            <p:ph type="sldNum" sz="quarter" idx="5"/>
           </p:nvPr>
         </p:nvSpPr>
         <p:spPr/>
@@ -848,7 +1192,7 @@
           <a:p>
             <a:fld id="{E5904A68-FE9C-41D3-96AD-A1A68ED6C497}" type="slidenum">
               <a:rPr lang="ru-RU" smtClean="0"/>
-              <a:t>13</a:t>
+              <a:t>11</a:t>
             </a:fld>
             <a:endParaRPr lang="ru-RU"/>
           </a:p>
@@ -857,7 +1201,7 @@
     </p:spTree>
     <p:extLst>
       <p:ext uri="{BB962C8B-B14F-4D97-AF65-F5344CB8AC3E}">
-        <p14:creationId xmlns:p14="http://schemas.microsoft.com/office/powerpoint/2010/main" val="4147477643"/>
+        <p14:creationId xmlns:p14="http://schemas.microsoft.com/office/powerpoint/2010/main" val="3042166307"/>
       </p:ext>
     </p:extLst>
   </p:cSld>
@@ -911,6 +1255,220 @@
           <a:bodyPr/>
           <a:lstStyle/>
           <a:p>
+            <a:r>
+              <a:rPr lang="ru-RU" sz="1200" b="0" i="0" kern="1200" dirty="0">
+                <a:solidFill>
+                  <a:schemeClr val="tx1"/>
+                </a:solidFill>
+                <a:effectLst/>
+                <a:latin typeface="+mn-lt"/>
+                <a:ea typeface="+mn-ea"/>
+                <a:cs typeface="+mn-cs"/>
+              </a:rPr>
+              <a:t>Brent−0.8⋅Бензин−0.7⋅Дизель∼</a:t>
+            </a:r>
+            <a:r>
+              <a:rPr lang="ru-RU" sz="1200" b="0" i="1" kern="1200" dirty="0">
+                <a:solidFill>
+                  <a:schemeClr val="tx1"/>
+                </a:solidFill>
+                <a:effectLst/>
+                <a:latin typeface="+mn-lt"/>
+                <a:ea typeface="+mn-ea"/>
+                <a:cs typeface="+mn-cs"/>
+              </a:rPr>
+              <a:t>I</a:t>
+            </a:r>
+            <a:r>
+              <a:rPr lang="ru-RU" sz="1200" b="0" i="0" kern="1200" dirty="0">
+                <a:solidFill>
+                  <a:schemeClr val="tx1"/>
+                </a:solidFill>
+                <a:effectLst/>
+                <a:latin typeface="+mn-lt"/>
+                <a:ea typeface="+mn-ea"/>
+                <a:cs typeface="+mn-cs"/>
+              </a:rPr>
+              <a:t>(0)</a:t>
+            </a:r>
+          </a:p>
+          <a:p>
+            <a:r>
+              <a:rPr lang="ru-RU" b="0" dirty="0">
+                <a:effectLst/>
+              </a:rPr>
+              <a:t>Это означает: маржа между нефтью и продуктами стабильна — возможен арбитраж. </a:t>
+            </a:r>
+          </a:p>
+          <a:p>
+            <a:endParaRPr lang="ru-RU" dirty="0"/>
+          </a:p>
+        </p:txBody>
+      </p:sp>
+      <p:sp>
+        <p:nvSpPr>
+          <p:cNvPr id="4" name="Номер слайда 3"/>
+          <p:cNvSpPr>
+            <a:spLocks noGrp="1"/>
+          </p:cNvSpPr>
+          <p:nvPr>
+            <p:ph type="sldNum" sz="quarter" idx="10"/>
+          </p:nvPr>
+        </p:nvSpPr>
+        <p:spPr/>
+        <p:txBody>
+          <a:bodyPr/>
+          <a:lstStyle/>
+          <a:p>
+            <a:fld id="{E5904A68-FE9C-41D3-96AD-A1A68ED6C497}" type="slidenum">
+              <a:rPr lang="ru-RU" smtClean="0"/>
+              <a:t>12</a:t>
+            </a:fld>
+            <a:endParaRPr lang="ru-RU"/>
+          </a:p>
+        </p:txBody>
+      </p:sp>
+    </p:spTree>
+    <p:extLst>
+      <p:ext uri="{BB962C8B-B14F-4D97-AF65-F5344CB8AC3E}">
+        <p14:creationId xmlns:p14="http://schemas.microsoft.com/office/powerpoint/2010/main" val="3920822745"/>
+      </p:ext>
+    </p:extLst>
+  </p:cSld>
+  <p:clrMapOvr>
+    <a:masterClrMapping/>
+  </p:clrMapOvr>
+</p:notes>
+</file>
+
+<file path=ppt/notesSlides/notesSlide6.xml><?xml version="1.0" encoding="utf-8"?>
+<p:notes xmlns:a="http://schemas.openxmlformats.org/drawingml/2006/main" xmlns:r="http://schemas.openxmlformats.org/officeDocument/2006/relationships" xmlns:p="http://schemas.openxmlformats.org/presentationml/2006/main">
+  <p:cSld>
+    <p:spTree>
+      <p:nvGrpSpPr>
+        <p:cNvPr id="1" name=""/>
+        <p:cNvGrpSpPr/>
+        <p:nvPr/>
+      </p:nvGrpSpPr>
+      <p:grpSpPr>
+        <a:xfrm>
+          <a:off x="0" y="0"/>
+          <a:ext cx="0" cy="0"/>
+          <a:chOff x="0" y="0"/>
+          <a:chExt cx="0" cy="0"/>
+        </a:xfrm>
+      </p:grpSpPr>
+      <p:sp>
+        <p:nvSpPr>
+          <p:cNvPr id="2" name="Образ слайда 1"/>
+          <p:cNvSpPr>
+            <a:spLocks noGrp="1" noRot="1" noChangeAspect="1"/>
+          </p:cNvSpPr>
+          <p:nvPr>
+            <p:ph type="sldImg"/>
+          </p:nvPr>
+        </p:nvSpPr>
+        <p:spPr/>
+      </p:sp>
+      <p:sp>
+        <p:nvSpPr>
+          <p:cNvPr id="3" name="Заметки 2"/>
+          <p:cNvSpPr>
+            <a:spLocks noGrp="1"/>
+          </p:cNvSpPr>
+          <p:nvPr>
+            <p:ph type="body" idx="1"/>
+          </p:nvPr>
+        </p:nvSpPr>
+        <p:spPr/>
+        <p:txBody>
+          <a:bodyPr/>
+          <a:lstStyle/>
+          <a:p>
+            <a:endParaRPr lang="ru-RU" dirty="0"/>
+          </a:p>
+        </p:txBody>
+      </p:sp>
+      <p:sp>
+        <p:nvSpPr>
+          <p:cNvPr id="4" name="Номер слайда 3"/>
+          <p:cNvSpPr>
+            <a:spLocks noGrp="1"/>
+          </p:cNvSpPr>
+          <p:nvPr>
+            <p:ph type="sldNum" sz="quarter" idx="10"/>
+          </p:nvPr>
+        </p:nvSpPr>
+        <p:spPr/>
+        <p:txBody>
+          <a:bodyPr/>
+          <a:lstStyle/>
+          <a:p>
+            <a:fld id="{E5904A68-FE9C-41D3-96AD-A1A68ED6C497}" type="slidenum">
+              <a:rPr lang="ru-RU" smtClean="0"/>
+              <a:t>13</a:t>
+            </a:fld>
+            <a:endParaRPr lang="ru-RU"/>
+          </a:p>
+        </p:txBody>
+      </p:sp>
+    </p:spTree>
+    <p:extLst>
+      <p:ext uri="{BB962C8B-B14F-4D97-AF65-F5344CB8AC3E}">
+        <p14:creationId xmlns:p14="http://schemas.microsoft.com/office/powerpoint/2010/main" val="4147477643"/>
+      </p:ext>
+    </p:extLst>
+  </p:cSld>
+  <p:clrMapOvr>
+    <a:masterClrMapping/>
+  </p:clrMapOvr>
+</p:notes>
+</file>
+
+<file path=ppt/notesSlides/notesSlide7.xml><?xml version="1.0" encoding="utf-8"?>
+<p:notes xmlns:a="http://schemas.openxmlformats.org/drawingml/2006/main" xmlns:r="http://schemas.openxmlformats.org/officeDocument/2006/relationships" xmlns:p="http://schemas.openxmlformats.org/presentationml/2006/main">
+  <p:cSld>
+    <p:spTree>
+      <p:nvGrpSpPr>
+        <p:cNvPr id="1" name=""/>
+        <p:cNvGrpSpPr/>
+        <p:nvPr/>
+      </p:nvGrpSpPr>
+      <p:grpSpPr>
+        <a:xfrm>
+          <a:off x="0" y="0"/>
+          <a:ext cx="0" cy="0"/>
+          <a:chOff x="0" y="0"/>
+          <a:chExt cx="0" cy="0"/>
+        </a:xfrm>
+      </p:grpSpPr>
+      <p:sp>
+        <p:nvSpPr>
+          <p:cNvPr id="2" name="Образ слайда 1"/>
+          <p:cNvSpPr>
+            <a:spLocks noGrp="1" noRot="1" noChangeAspect="1"/>
+          </p:cNvSpPr>
+          <p:nvPr>
+            <p:ph type="sldImg"/>
+          </p:nvPr>
+        </p:nvSpPr>
+        <p:spPr/>
+      </p:sp>
+      <p:sp>
+        <p:nvSpPr>
+          <p:cNvPr id="3" name="Заметки 2"/>
+          <p:cNvSpPr>
+            <a:spLocks noGrp="1"/>
+          </p:cNvSpPr>
+          <p:nvPr>
+            <p:ph type="body" idx="1"/>
+          </p:nvPr>
+        </p:nvSpPr>
+        <p:spPr/>
+        <p:txBody>
+          <a:bodyPr/>
+          <a:lstStyle/>
+          <a:p>
             <a:endParaRPr lang="ru-RU" dirty="0"/>
           </a:p>
         </p:txBody>
@@ -933,6 +1491,198 @@
             <a:fld id="{E5904A68-FE9C-41D3-96AD-A1A68ED6C497}" type="slidenum">
               <a:rPr lang="ru-RU" smtClean="0"/>
               <a:t>14</a:t>
+            </a:fld>
+            <a:endParaRPr lang="ru-RU"/>
+          </a:p>
+        </p:txBody>
+      </p:sp>
+    </p:spTree>
+    <p:extLst>
+      <p:ext uri="{BB962C8B-B14F-4D97-AF65-F5344CB8AC3E}">
+        <p14:creationId xmlns:p14="http://schemas.microsoft.com/office/powerpoint/2010/main" val="3851407767"/>
+      </p:ext>
+    </p:extLst>
+  </p:cSld>
+  <p:clrMapOvr>
+    <a:masterClrMapping/>
+  </p:clrMapOvr>
+</p:notes>
+</file>
+
+<file path=ppt/notesSlides/notesSlide8.xml><?xml version="1.0" encoding="utf-8"?>
+<p:notes xmlns:a="http://schemas.openxmlformats.org/drawingml/2006/main" xmlns:r="http://schemas.openxmlformats.org/officeDocument/2006/relationships" xmlns:p="http://schemas.openxmlformats.org/presentationml/2006/main">
+  <p:cSld>
+    <p:spTree>
+      <p:nvGrpSpPr>
+        <p:cNvPr id="1" name="">
+          <a:extLst>
+            <a:ext uri="{FF2B5EF4-FFF2-40B4-BE49-F238E27FC236}">
+              <a16:creationId xmlns:a16="http://schemas.microsoft.com/office/drawing/2014/main" id="{0873B72E-9476-A5AF-0146-713288F18C6E}"/>
+            </a:ext>
+          </a:extLst>
+        </p:cNvPr>
+        <p:cNvGrpSpPr/>
+        <p:nvPr/>
+      </p:nvGrpSpPr>
+      <p:grpSpPr>
+        <a:xfrm>
+          <a:off x="0" y="0"/>
+          <a:ext cx="0" cy="0"/>
+          <a:chOff x="0" y="0"/>
+          <a:chExt cx="0" cy="0"/>
+        </a:xfrm>
+      </p:grpSpPr>
+      <p:sp>
+        <p:nvSpPr>
+          <p:cNvPr id="2" name="Образ слайда 1">
+            <a:extLst>
+              <a:ext uri="{FF2B5EF4-FFF2-40B4-BE49-F238E27FC236}">
+                <a16:creationId xmlns:a16="http://schemas.microsoft.com/office/drawing/2014/main" id="{64138BA5-AA96-E4A0-62E6-D5F063F3EC6F}"/>
+              </a:ext>
+            </a:extLst>
+          </p:cNvPr>
+          <p:cNvSpPr>
+            <a:spLocks noGrp="1" noRot="1" noChangeAspect="1"/>
+          </p:cNvSpPr>
+          <p:nvPr>
+            <p:ph type="sldImg"/>
+          </p:nvPr>
+        </p:nvSpPr>
+        <p:spPr/>
+      </p:sp>
+      <p:sp>
+        <p:nvSpPr>
+          <p:cNvPr id="3" name="Заметки 2">
+            <a:extLst>
+              <a:ext uri="{FF2B5EF4-FFF2-40B4-BE49-F238E27FC236}">
+                <a16:creationId xmlns:a16="http://schemas.microsoft.com/office/drawing/2014/main" id="{7E5BEEC8-62B5-B979-5978-38DE0C678028}"/>
+              </a:ext>
+            </a:extLst>
+          </p:cNvPr>
+          <p:cNvSpPr>
+            <a:spLocks noGrp="1"/>
+          </p:cNvSpPr>
+          <p:nvPr>
+            <p:ph type="body" idx="1"/>
+          </p:nvPr>
+        </p:nvSpPr>
+        <p:spPr/>
+        <p:txBody>
+          <a:bodyPr/>
+          <a:lstStyle/>
+          <a:p>
+            <a:endParaRPr lang="ru-RU" dirty="0"/>
+          </a:p>
+        </p:txBody>
+      </p:sp>
+      <p:sp>
+        <p:nvSpPr>
+          <p:cNvPr id="4" name="Номер слайда 3">
+            <a:extLst>
+              <a:ext uri="{FF2B5EF4-FFF2-40B4-BE49-F238E27FC236}">
+                <a16:creationId xmlns:a16="http://schemas.microsoft.com/office/drawing/2014/main" id="{5D566DEA-77B3-70AF-AA80-C894C19F1950}"/>
+              </a:ext>
+            </a:extLst>
+          </p:cNvPr>
+          <p:cNvSpPr>
+            <a:spLocks noGrp="1"/>
+          </p:cNvSpPr>
+          <p:nvPr>
+            <p:ph type="sldNum" sz="quarter" idx="5"/>
+          </p:nvPr>
+        </p:nvSpPr>
+        <p:spPr/>
+        <p:txBody>
+          <a:bodyPr/>
+          <a:lstStyle/>
+          <a:p>
+            <a:fld id="{E5904A68-FE9C-41D3-96AD-A1A68ED6C497}" type="slidenum">
+              <a:rPr lang="ru-RU" smtClean="0"/>
+              <a:t>15</a:t>
+            </a:fld>
+            <a:endParaRPr lang="ru-RU"/>
+          </a:p>
+        </p:txBody>
+      </p:sp>
+    </p:spTree>
+    <p:extLst>
+      <p:ext uri="{BB962C8B-B14F-4D97-AF65-F5344CB8AC3E}">
+        <p14:creationId xmlns:p14="http://schemas.microsoft.com/office/powerpoint/2010/main" val="71297093"/>
+      </p:ext>
+    </p:extLst>
+  </p:cSld>
+  <p:clrMapOvr>
+    <a:masterClrMapping/>
+  </p:clrMapOvr>
+</p:notes>
+</file>
+
+<file path=ppt/notesSlides/notesSlide9.xml><?xml version="1.0" encoding="utf-8"?>
+<p:notes xmlns:a="http://schemas.openxmlformats.org/drawingml/2006/main" xmlns:r="http://schemas.openxmlformats.org/officeDocument/2006/relationships" xmlns:p="http://schemas.openxmlformats.org/presentationml/2006/main">
+  <p:cSld>
+    <p:spTree>
+      <p:nvGrpSpPr>
+        <p:cNvPr id="1" name=""/>
+        <p:cNvGrpSpPr/>
+        <p:nvPr/>
+      </p:nvGrpSpPr>
+      <p:grpSpPr>
+        <a:xfrm>
+          <a:off x="0" y="0"/>
+          <a:ext cx="0" cy="0"/>
+          <a:chOff x="0" y="0"/>
+          <a:chExt cx="0" cy="0"/>
+        </a:xfrm>
+      </p:grpSpPr>
+      <p:sp>
+        <p:nvSpPr>
+          <p:cNvPr id="2" name="Образ слайда 1"/>
+          <p:cNvSpPr>
+            <a:spLocks noGrp="1" noRot="1" noChangeAspect="1"/>
+          </p:cNvSpPr>
+          <p:nvPr>
+            <p:ph type="sldImg"/>
+          </p:nvPr>
+        </p:nvSpPr>
+        <p:spPr/>
+      </p:sp>
+      <p:sp>
+        <p:nvSpPr>
+          <p:cNvPr id="3" name="Заметки 2"/>
+          <p:cNvSpPr>
+            <a:spLocks noGrp="1"/>
+          </p:cNvSpPr>
+          <p:nvPr>
+            <p:ph type="body" idx="1"/>
+          </p:nvPr>
+        </p:nvSpPr>
+        <p:spPr/>
+        <p:txBody>
+          <a:bodyPr/>
+          <a:lstStyle/>
+          <a:p>
+            <a:endParaRPr lang="ru-RU" dirty="0"/>
+          </a:p>
+        </p:txBody>
+      </p:sp>
+      <p:sp>
+        <p:nvSpPr>
+          <p:cNvPr id="4" name="Номер слайда 3"/>
+          <p:cNvSpPr>
+            <a:spLocks noGrp="1"/>
+          </p:cNvSpPr>
+          <p:nvPr>
+            <p:ph type="sldNum" sz="quarter" idx="5"/>
+          </p:nvPr>
+        </p:nvSpPr>
+        <p:spPr/>
+        <p:txBody>
+          <a:bodyPr/>
+          <a:lstStyle/>
+          <a:p>
+            <a:fld id="{E5904A68-FE9C-41D3-96AD-A1A68ED6C497}" type="slidenum">
+              <a:rPr lang="ru-RU" smtClean="0"/>
+              <a:t>16</a:t>
             </a:fld>
             <a:endParaRPr lang="ru-RU"/>
           </a:p>
@@ -6589,6 +7339,1269 @@
           <p:cNvPr id="2" name="Заголовок 1">
             <a:extLst>
               <a:ext uri="{FF2B5EF4-FFF2-40B4-BE49-F238E27FC236}">
+                <a16:creationId xmlns:a16="http://schemas.microsoft.com/office/drawing/2014/main" id="{593223E7-A524-671B-448B-011E3889144B}"/>
+              </a:ext>
+            </a:extLst>
+          </p:cNvPr>
+          <p:cNvSpPr>
+            <a:spLocks noGrp="1"/>
+          </p:cNvSpPr>
+          <p:nvPr>
+            <p:ph type="title"/>
+          </p:nvPr>
+        </p:nvSpPr>
+        <p:spPr>
+          <a:xfrm>
+            <a:off x="400832" y="206679"/>
+            <a:ext cx="11461315" cy="707721"/>
+          </a:xfrm>
+        </p:spPr>
+        <p:txBody>
+          <a:bodyPr>
+            <a:normAutofit/>
+          </a:bodyPr>
+          <a:lstStyle/>
+          <a:p>
+            <a:r>
+              <a:rPr lang="ru-RU" b="1"/>
+              <a:t>Глобальные объясняющие факторы</a:t>
+            </a:r>
+            <a:endParaRPr lang="ru-RU" b="1" dirty="0"/>
+          </a:p>
+        </p:txBody>
+      </p:sp>
+      <p:sp>
+        <p:nvSpPr>
+          <p:cNvPr id="3" name="Объект 2">
+            <a:extLst>
+              <a:ext uri="{FF2B5EF4-FFF2-40B4-BE49-F238E27FC236}">
+                <a16:creationId xmlns:a16="http://schemas.microsoft.com/office/drawing/2014/main" id="{713A2CAC-5605-60BB-73D3-81454D6A546B}"/>
+              </a:ext>
+            </a:extLst>
+          </p:cNvPr>
+          <p:cNvSpPr>
+            <a:spLocks noGrp="1"/>
+          </p:cNvSpPr>
+          <p:nvPr>
+            <p:ph idx="1"/>
+          </p:nvPr>
+        </p:nvSpPr>
+        <p:spPr>
+          <a:xfrm>
+            <a:off x="329853" y="826718"/>
+            <a:ext cx="11532294" cy="5824603"/>
+          </a:xfrm>
+        </p:spPr>
+        <p:txBody>
+          <a:bodyPr>
+            <a:normAutofit/>
+          </a:bodyPr>
+          <a:lstStyle/>
+          <a:p>
+            <a:pPr marL="0" indent="0">
+              <a:buNone/>
+            </a:pPr>
+            <a:r>
+              <a:rPr lang="ru-RU" sz="2400" dirty="0"/>
+              <a:t>В ряде МВР могут присутствовать общие объясняющие переменные, напр.:</a:t>
+            </a:r>
+          </a:p>
+          <a:p>
+            <a:r>
+              <a:rPr lang="ru-RU" sz="2400" dirty="0"/>
+              <a:t>Все датчики температуры двигателя растут вместе при перегреве</a:t>
+            </a:r>
+          </a:p>
+          <a:p>
+            <a:r>
+              <a:rPr lang="ru-RU" sz="2400" dirty="0"/>
+              <a:t>Акции в одной отрасли движутся синхронно напр. в зависимости от курса валют</a:t>
+            </a:r>
+          </a:p>
+          <a:p>
+            <a:endParaRPr lang="ru-RU" dirty="0"/>
+          </a:p>
+        </p:txBody>
+      </p:sp>
+      <p:graphicFrame>
+        <p:nvGraphicFramePr>
+          <p:cNvPr id="4" name="Таблица 3">
+            <a:extLst>
+              <a:ext uri="{FF2B5EF4-FFF2-40B4-BE49-F238E27FC236}">
+                <a16:creationId xmlns:a16="http://schemas.microsoft.com/office/drawing/2014/main" id="{8F75D77D-75FE-80FB-E60C-E7FC165FC0C5}"/>
+              </a:ext>
+            </a:extLst>
+          </p:cNvPr>
+          <p:cNvGraphicFramePr>
+            <a:graphicFrameLocks noGrp="1"/>
+          </p:cNvGraphicFramePr>
+          <p:nvPr>
+            <p:extLst>
+              <p:ext uri="{D42A27DB-BD31-4B8C-83A1-F6EECF244321}">
+                <p14:modId xmlns:p14="http://schemas.microsoft.com/office/powerpoint/2010/main" val="1337670039"/>
+              </p:ext>
+            </p:extLst>
+          </p:nvPr>
+        </p:nvGraphicFramePr>
+        <p:xfrm>
+          <a:off x="329853" y="3429000"/>
+          <a:ext cx="11118935" cy="2953980"/>
+        </p:xfrm>
+        <a:graphic>
+          <a:graphicData uri="http://schemas.openxmlformats.org/drawingml/2006/table">
+            <a:tbl>
+              <a:tblPr/>
+              <a:tblGrid>
+                <a:gridCol w="5131495">
+                  <a:extLst>
+                    <a:ext uri="{9D8B030D-6E8A-4147-A177-3AD203B41FA5}">
+                      <a16:colId xmlns:a16="http://schemas.microsoft.com/office/drawing/2014/main" val="3559473103"/>
+                    </a:ext>
+                  </a:extLst>
+                </a:gridCol>
+                <a:gridCol w="5987440">
+                  <a:extLst>
+                    <a:ext uri="{9D8B030D-6E8A-4147-A177-3AD203B41FA5}">
+                      <a16:colId xmlns:a16="http://schemas.microsoft.com/office/drawing/2014/main" val="32182090"/>
+                    </a:ext>
+                  </a:extLst>
+                </a:gridCol>
+              </a:tblGrid>
+              <a:tr h="198752">
+                <a:tc>
+                  <a:txBody>
+                    <a:bodyPr/>
+                    <a:lstStyle/>
+                    <a:p>
+                      <a:pPr>
+                        <a:buNone/>
+                      </a:pPr>
+                      <a:r>
+                        <a:rPr lang="ru-RU" sz="2000" b="1" dirty="0">
+                          <a:solidFill>
+                            <a:srgbClr val="000000"/>
+                          </a:solidFill>
+                          <a:effectLst/>
+                          <a:latin typeface="+mn-lt"/>
+                        </a:rPr>
+                        <a:t>Сигнал</a:t>
+                      </a:r>
+                      <a:endParaRPr lang="ru-RU" sz="2000" dirty="0">
+                        <a:effectLst/>
+                        <a:latin typeface="+mn-lt"/>
+                      </a:endParaRPr>
+                    </a:p>
+                  </a:txBody>
+                  <a:tcPr marL="34209" marR="34209" marT="34209" marB="34209">
+                    <a:lnL w="9525" cap="flat" cmpd="sng" algn="ctr">
+                      <a:solidFill>
+                        <a:srgbClr val="000000"/>
+                      </a:solidFill>
+                      <a:prstDash val="solid"/>
+                      <a:round/>
+                      <a:headEnd type="none" w="med" len="med"/>
+                      <a:tailEnd type="none" w="med" len="med"/>
+                    </a:lnL>
+                    <a:lnR w="9525" cap="flat" cmpd="sng" algn="ctr">
+                      <a:solidFill>
+                        <a:srgbClr val="000000"/>
+                      </a:solidFill>
+                      <a:prstDash val="solid"/>
+                      <a:round/>
+                      <a:headEnd type="none" w="med" len="med"/>
+                      <a:tailEnd type="none" w="med" len="med"/>
+                    </a:lnR>
+                    <a:lnT w="9525" cap="flat" cmpd="sng" algn="ctr">
+                      <a:solidFill>
+                        <a:srgbClr val="000000"/>
+                      </a:solidFill>
+                      <a:prstDash val="solid"/>
+                      <a:round/>
+                      <a:headEnd type="none" w="med" len="med"/>
+                      <a:tailEnd type="none" w="med" len="med"/>
+                    </a:lnT>
+                    <a:lnB w="9525" cap="flat" cmpd="sng" algn="ctr">
+                      <a:solidFill>
+                        <a:srgbClr val="000000"/>
+                      </a:solidFill>
+                      <a:prstDash val="solid"/>
+                      <a:round/>
+                      <a:headEnd type="none" w="med" len="med"/>
+                      <a:tailEnd type="none" w="med" len="med"/>
+                    </a:lnB>
+                    <a:solidFill>
+                      <a:srgbClr val="B0B3B2"/>
+                    </a:solidFill>
+                  </a:tcPr>
+                </a:tc>
+                <a:tc>
+                  <a:txBody>
+                    <a:bodyPr/>
+                    <a:lstStyle/>
+                    <a:p>
+                      <a:pPr>
+                        <a:buNone/>
+                      </a:pPr>
+                      <a:r>
+                        <a:rPr lang="ru-RU" sz="2000" b="1">
+                          <a:solidFill>
+                            <a:srgbClr val="000000"/>
+                          </a:solidFill>
+                          <a:effectLst/>
+                          <a:latin typeface="+mn-lt"/>
+                        </a:rPr>
+                        <a:t>Интерпретация</a:t>
+                      </a:r>
+                      <a:endParaRPr lang="ru-RU" sz="2000">
+                        <a:effectLst/>
+                        <a:latin typeface="+mn-lt"/>
+                      </a:endParaRPr>
+                    </a:p>
+                  </a:txBody>
+                  <a:tcPr marL="34209" marR="34209" marT="34209" marB="34209">
+                    <a:lnL w="9525" cap="flat" cmpd="sng" algn="ctr">
+                      <a:solidFill>
+                        <a:srgbClr val="000000"/>
+                      </a:solidFill>
+                      <a:prstDash val="solid"/>
+                      <a:round/>
+                      <a:headEnd type="none" w="med" len="med"/>
+                      <a:tailEnd type="none" w="med" len="med"/>
+                    </a:lnL>
+                    <a:lnR w="9525" cap="flat" cmpd="sng" algn="ctr">
+                      <a:solidFill>
+                        <a:srgbClr val="000000"/>
+                      </a:solidFill>
+                      <a:prstDash val="solid"/>
+                      <a:round/>
+                      <a:headEnd type="none" w="med" len="med"/>
+                      <a:tailEnd type="none" w="med" len="med"/>
+                    </a:lnR>
+                    <a:lnT w="9525" cap="flat" cmpd="sng" algn="ctr">
+                      <a:solidFill>
+                        <a:srgbClr val="000000"/>
+                      </a:solidFill>
+                      <a:prstDash val="solid"/>
+                      <a:round/>
+                      <a:headEnd type="none" w="med" len="med"/>
+                      <a:tailEnd type="none" w="med" len="med"/>
+                    </a:lnT>
+                    <a:lnB w="9525" cap="flat" cmpd="sng" algn="ctr">
+                      <a:solidFill>
+                        <a:srgbClr val="000000"/>
+                      </a:solidFill>
+                      <a:prstDash val="solid"/>
+                      <a:round/>
+                      <a:headEnd type="none" w="med" len="med"/>
+                      <a:tailEnd type="none" w="med" len="med"/>
+                    </a:lnB>
+                    <a:solidFill>
+                      <a:srgbClr val="B0B3B2"/>
+                    </a:solidFill>
+                  </a:tcPr>
+                </a:tc>
+                <a:extLst>
+                  <a:ext uri="{0D108BD9-81ED-4DB2-BD59-A6C34878D82A}">
+                    <a16:rowId xmlns:a16="http://schemas.microsoft.com/office/drawing/2014/main" val="3369315891"/>
+                  </a:ext>
+                </a:extLst>
+              </a:tr>
+              <a:tr h="509842">
+                <a:tc>
+                  <a:txBody>
+                    <a:bodyPr/>
+                    <a:lstStyle/>
+                    <a:p>
+                      <a:pPr>
+                        <a:buNone/>
+                      </a:pPr>
+                      <a:r>
+                        <a:rPr lang="ru-RU" sz="2000" b="1" dirty="0">
+                          <a:solidFill>
+                            <a:srgbClr val="000000"/>
+                          </a:solidFill>
+                          <a:effectLst/>
+                          <a:latin typeface="+mn-lt"/>
+                        </a:rPr>
+                        <a:t>Высокая корреляция между переменными</a:t>
+                      </a:r>
+                      <a:endParaRPr lang="ru-RU" sz="2000" dirty="0">
+                        <a:effectLst/>
+                        <a:latin typeface="+mn-lt"/>
+                      </a:endParaRPr>
+                    </a:p>
+                  </a:txBody>
+                  <a:tcPr marL="34209" marR="34209" marT="34209" marB="34209">
+                    <a:lnL w="9525" cap="flat" cmpd="sng" algn="ctr">
+                      <a:solidFill>
+                        <a:srgbClr val="000000"/>
+                      </a:solidFill>
+                      <a:prstDash val="solid"/>
+                      <a:round/>
+                      <a:headEnd type="none" w="med" len="med"/>
+                      <a:tailEnd type="none" w="med" len="med"/>
+                    </a:lnL>
+                    <a:lnR w="9525" cap="flat" cmpd="sng" algn="ctr">
+                      <a:solidFill>
+                        <a:srgbClr val="000000"/>
+                      </a:solidFill>
+                      <a:prstDash val="solid"/>
+                      <a:round/>
+                      <a:headEnd type="none" w="med" len="med"/>
+                      <a:tailEnd type="none" w="med" len="med"/>
+                    </a:lnR>
+                    <a:lnT w="9525" cap="flat" cmpd="sng" algn="ctr">
+                      <a:solidFill>
+                        <a:srgbClr val="000000"/>
+                      </a:solidFill>
+                      <a:prstDash val="solid"/>
+                      <a:round/>
+                      <a:headEnd type="none" w="med" len="med"/>
+                      <a:tailEnd type="none" w="med" len="med"/>
+                    </a:lnT>
+                    <a:lnB w="9525" cap="flat" cmpd="sng" algn="ctr">
+                      <a:solidFill>
+                        <a:srgbClr val="000000"/>
+                      </a:solidFill>
+                      <a:prstDash val="solid"/>
+                      <a:round/>
+                      <a:headEnd type="none" w="med" len="med"/>
+                      <a:tailEnd type="none" w="med" len="med"/>
+                    </a:lnB>
+                    <a:solidFill>
+                      <a:srgbClr val="D4D4D4"/>
+                    </a:solidFill>
+                  </a:tcPr>
+                </a:tc>
+                <a:tc>
+                  <a:txBody>
+                    <a:bodyPr/>
+                    <a:lstStyle/>
+                    <a:p>
+                      <a:pPr>
+                        <a:buNone/>
+                      </a:pPr>
+                      <a:r>
+                        <a:rPr lang="ru-RU" sz="2000">
+                          <a:solidFill>
+                            <a:srgbClr val="000000"/>
+                          </a:solidFill>
+                          <a:effectLst/>
+                          <a:latin typeface="+mn-lt"/>
+                        </a:rPr>
+                        <a:t>Возможен общий фактор</a:t>
+                      </a:r>
+                      <a:endParaRPr lang="ru-RU" sz="2000">
+                        <a:effectLst/>
+                        <a:latin typeface="+mn-lt"/>
+                      </a:endParaRPr>
+                    </a:p>
+                  </a:txBody>
+                  <a:tcPr marL="34209" marR="34209" marT="34209" marB="34209">
+                    <a:lnL w="9525" cap="flat" cmpd="sng" algn="ctr">
+                      <a:solidFill>
+                        <a:srgbClr val="000000"/>
+                      </a:solidFill>
+                      <a:prstDash val="solid"/>
+                      <a:round/>
+                      <a:headEnd type="none" w="med" len="med"/>
+                      <a:tailEnd type="none" w="med" len="med"/>
+                    </a:lnL>
+                    <a:lnR w="9525" cap="flat" cmpd="sng" algn="ctr">
+                      <a:solidFill>
+                        <a:srgbClr val="000000"/>
+                      </a:solidFill>
+                      <a:prstDash val="solid"/>
+                      <a:round/>
+                      <a:headEnd type="none" w="med" len="med"/>
+                      <a:tailEnd type="none" w="med" len="med"/>
+                    </a:lnR>
+                    <a:lnT w="9525" cap="flat" cmpd="sng" algn="ctr">
+                      <a:solidFill>
+                        <a:srgbClr val="000000"/>
+                      </a:solidFill>
+                      <a:prstDash val="solid"/>
+                      <a:round/>
+                      <a:headEnd type="none" w="med" len="med"/>
+                      <a:tailEnd type="none" w="med" len="med"/>
+                    </a:lnT>
+                    <a:lnB w="9525" cap="flat" cmpd="sng" algn="ctr">
+                      <a:solidFill>
+                        <a:srgbClr val="000000"/>
+                      </a:solidFill>
+                      <a:prstDash val="solid"/>
+                      <a:round/>
+                      <a:headEnd type="none" w="med" len="med"/>
+                      <a:tailEnd type="none" w="med" len="med"/>
+                    </a:lnB>
+                    <a:noFill/>
+                  </a:tcPr>
+                </a:tc>
+                <a:extLst>
+                  <a:ext uri="{0D108BD9-81ED-4DB2-BD59-A6C34878D82A}">
+                    <a16:rowId xmlns:a16="http://schemas.microsoft.com/office/drawing/2014/main" val="3220808944"/>
+                  </a:ext>
+                </a:extLst>
+              </a:tr>
+              <a:tr h="665387">
+                <a:tc>
+                  <a:txBody>
+                    <a:bodyPr/>
+                    <a:lstStyle/>
+                    <a:p>
+                      <a:pPr>
+                        <a:buNone/>
+                      </a:pPr>
+                      <a:r>
+                        <a:rPr lang="ru-RU" sz="2000" b="1" dirty="0">
+                          <a:solidFill>
+                            <a:srgbClr val="000000"/>
+                          </a:solidFill>
+                          <a:effectLst/>
+                          <a:latin typeface="+mn-lt"/>
+                        </a:rPr>
+                        <a:t>Первая главная компонента объясняет &gt;70% дисперсии</a:t>
+                      </a:r>
+                      <a:endParaRPr lang="ru-RU" sz="2000" dirty="0">
+                        <a:effectLst/>
+                        <a:latin typeface="+mn-lt"/>
+                      </a:endParaRPr>
+                    </a:p>
+                  </a:txBody>
+                  <a:tcPr marL="34209" marR="34209" marT="34209" marB="34209">
+                    <a:lnL w="9525" cap="flat" cmpd="sng" algn="ctr">
+                      <a:solidFill>
+                        <a:srgbClr val="000000"/>
+                      </a:solidFill>
+                      <a:prstDash val="solid"/>
+                      <a:round/>
+                      <a:headEnd type="none" w="med" len="med"/>
+                      <a:tailEnd type="none" w="med" len="med"/>
+                    </a:lnL>
+                    <a:lnR w="9525" cap="flat" cmpd="sng" algn="ctr">
+                      <a:solidFill>
+                        <a:srgbClr val="000000"/>
+                      </a:solidFill>
+                      <a:prstDash val="solid"/>
+                      <a:round/>
+                      <a:headEnd type="none" w="med" len="med"/>
+                      <a:tailEnd type="none" w="med" len="med"/>
+                    </a:lnR>
+                    <a:lnT w="9525" cap="flat" cmpd="sng" algn="ctr">
+                      <a:solidFill>
+                        <a:srgbClr val="000000"/>
+                      </a:solidFill>
+                      <a:prstDash val="solid"/>
+                      <a:round/>
+                      <a:headEnd type="none" w="med" len="med"/>
+                      <a:tailEnd type="none" w="med" len="med"/>
+                    </a:lnT>
+                    <a:lnB w="9525" cap="flat" cmpd="sng" algn="ctr">
+                      <a:solidFill>
+                        <a:srgbClr val="000000"/>
+                      </a:solidFill>
+                      <a:prstDash val="solid"/>
+                      <a:round/>
+                      <a:headEnd type="none" w="med" len="med"/>
+                      <a:tailEnd type="none" w="med" len="med"/>
+                    </a:lnB>
+                    <a:solidFill>
+                      <a:srgbClr val="D4D4D4"/>
+                    </a:solidFill>
+                  </a:tcPr>
+                </a:tc>
+                <a:tc>
+                  <a:txBody>
+                    <a:bodyPr/>
+                    <a:lstStyle/>
+                    <a:p>
+                      <a:pPr>
+                        <a:buNone/>
+                      </a:pPr>
+                      <a:r>
+                        <a:rPr lang="en" sz="2000" dirty="0">
+                          <a:solidFill>
+                            <a:srgbClr val="000000"/>
+                          </a:solidFill>
+                          <a:effectLst/>
+                          <a:latin typeface="+mn-lt"/>
+                        </a:rPr>
+                        <a:t>PCA </a:t>
+                      </a:r>
+                      <a:r>
+                        <a:rPr lang="ru-RU" sz="2000" dirty="0">
+                          <a:solidFill>
+                            <a:srgbClr val="000000"/>
+                          </a:solidFill>
+                          <a:effectLst/>
+                          <a:latin typeface="+mn-lt"/>
+                        </a:rPr>
+                        <a:t>выделил доминирующий режим</a:t>
+                      </a:r>
+                      <a:endParaRPr lang="ru-RU" sz="2000" dirty="0">
+                        <a:effectLst/>
+                        <a:latin typeface="+mn-lt"/>
+                      </a:endParaRPr>
+                    </a:p>
+                  </a:txBody>
+                  <a:tcPr marL="34209" marR="34209" marT="34209" marB="34209">
+                    <a:lnL w="9525" cap="flat" cmpd="sng" algn="ctr">
+                      <a:solidFill>
+                        <a:srgbClr val="000000"/>
+                      </a:solidFill>
+                      <a:prstDash val="solid"/>
+                      <a:round/>
+                      <a:headEnd type="none" w="med" len="med"/>
+                      <a:tailEnd type="none" w="med" len="med"/>
+                    </a:lnL>
+                    <a:lnR w="9525" cap="flat" cmpd="sng" algn="ctr">
+                      <a:solidFill>
+                        <a:srgbClr val="000000"/>
+                      </a:solidFill>
+                      <a:prstDash val="solid"/>
+                      <a:round/>
+                      <a:headEnd type="none" w="med" len="med"/>
+                      <a:tailEnd type="none" w="med" len="med"/>
+                    </a:lnR>
+                    <a:lnT w="9525" cap="flat" cmpd="sng" algn="ctr">
+                      <a:solidFill>
+                        <a:srgbClr val="000000"/>
+                      </a:solidFill>
+                      <a:prstDash val="solid"/>
+                      <a:round/>
+                      <a:headEnd type="none" w="med" len="med"/>
+                      <a:tailEnd type="none" w="med" len="med"/>
+                    </a:lnT>
+                    <a:lnB w="9525" cap="flat" cmpd="sng" algn="ctr">
+                      <a:solidFill>
+                        <a:srgbClr val="000000"/>
+                      </a:solidFill>
+                      <a:prstDash val="solid"/>
+                      <a:round/>
+                      <a:headEnd type="none" w="med" len="med"/>
+                      <a:tailEnd type="none" w="med" len="med"/>
+                    </a:lnB>
+                    <a:noFill/>
+                  </a:tcPr>
+                </a:tc>
+                <a:extLst>
+                  <a:ext uri="{0D108BD9-81ED-4DB2-BD59-A6C34878D82A}">
+                    <a16:rowId xmlns:a16="http://schemas.microsoft.com/office/drawing/2014/main" val="1228036815"/>
+                  </a:ext>
+                </a:extLst>
+              </a:tr>
+              <a:tr h="509842">
+                <a:tc>
+                  <a:txBody>
+                    <a:bodyPr/>
+                    <a:lstStyle/>
+                    <a:p>
+                      <a:pPr>
+                        <a:buNone/>
+                      </a:pPr>
+                      <a:r>
+                        <a:rPr lang="en" sz="2000" b="1" dirty="0">
+                          <a:solidFill>
+                            <a:srgbClr val="000000"/>
+                          </a:solidFill>
+                          <a:effectLst/>
+                          <a:latin typeface="+mn-lt"/>
+                        </a:rPr>
+                        <a:t>Granger-</a:t>
+                      </a:r>
+                      <a:r>
+                        <a:rPr lang="ru-RU" sz="2000" b="1" dirty="0">
+                          <a:solidFill>
+                            <a:srgbClr val="000000"/>
+                          </a:solidFill>
+                          <a:effectLst/>
+                          <a:latin typeface="+mn-lt"/>
+                        </a:rPr>
+                        <a:t>тест показывает "всё вызывает всё"</a:t>
+                      </a:r>
+                      <a:endParaRPr lang="ru-RU" sz="2000" dirty="0">
+                        <a:effectLst/>
+                        <a:latin typeface="+mn-lt"/>
+                      </a:endParaRPr>
+                    </a:p>
+                  </a:txBody>
+                  <a:tcPr marL="34209" marR="34209" marT="34209" marB="34209">
+                    <a:lnL w="9525" cap="flat" cmpd="sng" algn="ctr">
+                      <a:solidFill>
+                        <a:srgbClr val="000000"/>
+                      </a:solidFill>
+                      <a:prstDash val="solid"/>
+                      <a:round/>
+                      <a:headEnd type="none" w="med" len="med"/>
+                      <a:tailEnd type="none" w="med" len="med"/>
+                    </a:lnL>
+                    <a:lnR w="9525" cap="flat" cmpd="sng" algn="ctr">
+                      <a:solidFill>
+                        <a:srgbClr val="000000"/>
+                      </a:solidFill>
+                      <a:prstDash val="solid"/>
+                      <a:round/>
+                      <a:headEnd type="none" w="med" len="med"/>
+                      <a:tailEnd type="none" w="med" len="med"/>
+                    </a:lnR>
+                    <a:lnT w="9525" cap="flat" cmpd="sng" algn="ctr">
+                      <a:solidFill>
+                        <a:srgbClr val="000000"/>
+                      </a:solidFill>
+                      <a:prstDash val="solid"/>
+                      <a:round/>
+                      <a:headEnd type="none" w="med" len="med"/>
+                      <a:tailEnd type="none" w="med" len="med"/>
+                    </a:lnT>
+                    <a:lnB w="9525" cap="flat" cmpd="sng" algn="ctr">
+                      <a:solidFill>
+                        <a:srgbClr val="000000"/>
+                      </a:solidFill>
+                      <a:prstDash val="solid"/>
+                      <a:round/>
+                      <a:headEnd type="none" w="med" len="med"/>
+                      <a:tailEnd type="none" w="med" len="med"/>
+                    </a:lnB>
+                    <a:solidFill>
+                      <a:srgbClr val="D4D4D4"/>
+                    </a:solidFill>
+                  </a:tcPr>
+                </a:tc>
+                <a:tc>
+                  <a:txBody>
+                    <a:bodyPr/>
+                    <a:lstStyle/>
+                    <a:p>
+                      <a:pPr>
+                        <a:buNone/>
+                      </a:pPr>
+                      <a:r>
+                        <a:rPr lang="ru-RU" sz="2000" dirty="0">
+                          <a:solidFill>
+                            <a:srgbClr val="000000"/>
+                          </a:solidFill>
+                          <a:effectLst/>
+                          <a:latin typeface="+mn-lt"/>
+                        </a:rPr>
+                        <a:t>Возможно, общий фактор влияет на всех</a:t>
+                      </a:r>
+                      <a:endParaRPr lang="ru-RU" sz="2000" dirty="0">
+                        <a:effectLst/>
+                        <a:latin typeface="+mn-lt"/>
+                      </a:endParaRPr>
+                    </a:p>
+                  </a:txBody>
+                  <a:tcPr marL="34209" marR="34209" marT="34209" marB="34209">
+                    <a:lnL w="9525" cap="flat" cmpd="sng" algn="ctr">
+                      <a:solidFill>
+                        <a:srgbClr val="000000"/>
+                      </a:solidFill>
+                      <a:prstDash val="solid"/>
+                      <a:round/>
+                      <a:headEnd type="none" w="med" len="med"/>
+                      <a:tailEnd type="none" w="med" len="med"/>
+                    </a:lnL>
+                    <a:lnR w="9525" cap="flat" cmpd="sng" algn="ctr">
+                      <a:solidFill>
+                        <a:srgbClr val="000000"/>
+                      </a:solidFill>
+                      <a:prstDash val="solid"/>
+                      <a:round/>
+                      <a:headEnd type="none" w="med" len="med"/>
+                      <a:tailEnd type="none" w="med" len="med"/>
+                    </a:lnR>
+                    <a:lnT w="9525" cap="flat" cmpd="sng" algn="ctr">
+                      <a:solidFill>
+                        <a:srgbClr val="000000"/>
+                      </a:solidFill>
+                      <a:prstDash val="solid"/>
+                      <a:round/>
+                      <a:headEnd type="none" w="med" len="med"/>
+                      <a:tailEnd type="none" w="med" len="med"/>
+                    </a:lnT>
+                    <a:lnB w="9525" cap="flat" cmpd="sng" algn="ctr">
+                      <a:solidFill>
+                        <a:srgbClr val="000000"/>
+                      </a:solidFill>
+                      <a:prstDash val="solid"/>
+                      <a:round/>
+                      <a:headEnd type="none" w="med" len="med"/>
+                      <a:tailEnd type="none" w="med" len="med"/>
+                    </a:lnB>
+                    <a:noFill/>
+                  </a:tcPr>
+                </a:tc>
+                <a:extLst>
+                  <a:ext uri="{0D108BD9-81ED-4DB2-BD59-A6C34878D82A}">
+                    <a16:rowId xmlns:a16="http://schemas.microsoft.com/office/drawing/2014/main" val="3384637492"/>
+                  </a:ext>
+                </a:extLst>
+              </a:tr>
+              <a:tr h="354297">
+                <a:tc>
+                  <a:txBody>
+                    <a:bodyPr/>
+                    <a:lstStyle/>
+                    <a:p>
+                      <a:pPr>
+                        <a:buNone/>
+                      </a:pPr>
+                      <a:r>
+                        <a:rPr lang="ru-RU" sz="2000" b="1">
+                          <a:solidFill>
+                            <a:srgbClr val="000000"/>
+                          </a:solidFill>
+                          <a:effectLst/>
+                          <a:latin typeface="+mn-lt"/>
+                        </a:rPr>
+                        <a:t>Остатки после </a:t>
+                      </a:r>
+                      <a:r>
+                        <a:rPr lang="en" sz="2000" b="1">
+                          <a:solidFill>
+                            <a:srgbClr val="000000"/>
+                          </a:solidFill>
+                          <a:effectLst/>
+                          <a:latin typeface="+mn-lt"/>
+                        </a:rPr>
+                        <a:t>VAR </a:t>
+                      </a:r>
+                      <a:r>
+                        <a:rPr lang="ru-RU" sz="2000" b="1">
+                          <a:solidFill>
+                            <a:srgbClr val="000000"/>
+                          </a:solidFill>
+                          <a:effectLst/>
+                          <a:latin typeface="+mn-lt"/>
+                        </a:rPr>
+                        <a:t>не </a:t>
+                      </a:r>
+                      <a:r>
+                        <a:rPr lang="en" sz="2000" b="1">
+                          <a:solidFill>
+                            <a:srgbClr val="000000"/>
+                          </a:solidFill>
+                          <a:effectLst/>
+                          <a:latin typeface="+mn-lt"/>
+                        </a:rPr>
+                        <a:t>i.i.d. (BDS </a:t>
+                      </a:r>
+                      <a:r>
+                        <a:rPr lang="ru-RU" sz="2000" b="1">
+                          <a:solidFill>
+                            <a:srgbClr val="000000"/>
+                          </a:solidFill>
+                          <a:effectLst/>
+                          <a:latin typeface="+mn-lt"/>
+                        </a:rPr>
+                        <a:t>значим)</a:t>
+                      </a:r>
+                      <a:endParaRPr lang="ru-RU" sz="2000">
+                        <a:effectLst/>
+                        <a:latin typeface="+mn-lt"/>
+                      </a:endParaRPr>
+                    </a:p>
+                  </a:txBody>
+                  <a:tcPr marL="34209" marR="34209" marT="34209" marB="34209">
+                    <a:lnL w="9525" cap="flat" cmpd="sng" algn="ctr">
+                      <a:solidFill>
+                        <a:srgbClr val="000000"/>
+                      </a:solidFill>
+                      <a:prstDash val="solid"/>
+                      <a:round/>
+                      <a:headEnd type="none" w="med" len="med"/>
+                      <a:tailEnd type="none" w="med" len="med"/>
+                    </a:lnL>
+                    <a:lnR w="9525" cap="flat" cmpd="sng" algn="ctr">
+                      <a:solidFill>
+                        <a:srgbClr val="000000"/>
+                      </a:solidFill>
+                      <a:prstDash val="solid"/>
+                      <a:round/>
+                      <a:headEnd type="none" w="med" len="med"/>
+                      <a:tailEnd type="none" w="med" len="med"/>
+                    </a:lnR>
+                    <a:lnT w="9525" cap="flat" cmpd="sng" algn="ctr">
+                      <a:solidFill>
+                        <a:srgbClr val="000000"/>
+                      </a:solidFill>
+                      <a:prstDash val="solid"/>
+                      <a:round/>
+                      <a:headEnd type="none" w="med" len="med"/>
+                      <a:tailEnd type="none" w="med" len="med"/>
+                    </a:lnT>
+                    <a:lnB w="9525" cap="flat" cmpd="sng" algn="ctr">
+                      <a:solidFill>
+                        <a:srgbClr val="000000"/>
+                      </a:solidFill>
+                      <a:prstDash val="solid"/>
+                      <a:round/>
+                      <a:headEnd type="none" w="med" len="med"/>
+                      <a:tailEnd type="none" w="med" len="med"/>
+                    </a:lnB>
+                    <a:solidFill>
+                      <a:srgbClr val="D4D4D4"/>
+                    </a:solidFill>
+                  </a:tcPr>
+                </a:tc>
+                <a:tc>
+                  <a:txBody>
+                    <a:bodyPr/>
+                    <a:lstStyle/>
+                    <a:p>
+                      <a:pPr>
+                        <a:buNone/>
+                      </a:pPr>
+                      <a:r>
+                        <a:rPr lang="ru-RU" sz="2000" dirty="0">
+                          <a:solidFill>
+                            <a:srgbClr val="000000"/>
+                          </a:solidFill>
+                          <a:effectLst/>
+                          <a:latin typeface="+mn-lt"/>
+                        </a:rPr>
+                        <a:t>Есть скрытая структура</a:t>
+                      </a:r>
+                      <a:endParaRPr lang="ru-RU" sz="2000" dirty="0">
+                        <a:effectLst/>
+                        <a:latin typeface="+mn-lt"/>
+                      </a:endParaRPr>
+                    </a:p>
+                  </a:txBody>
+                  <a:tcPr marL="34209" marR="34209" marT="34209" marB="34209">
+                    <a:lnL w="9525" cap="flat" cmpd="sng" algn="ctr">
+                      <a:solidFill>
+                        <a:srgbClr val="000000"/>
+                      </a:solidFill>
+                      <a:prstDash val="solid"/>
+                      <a:round/>
+                      <a:headEnd type="none" w="med" len="med"/>
+                      <a:tailEnd type="none" w="med" len="med"/>
+                    </a:lnL>
+                    <a:lnR w="9525" cap="flat" cmpd="sng" algn="ctr">
+                      <a:solidFill>
+                        <a:srgbClr val="000000"/>
+                      </a:solidFill>
+                      <a:prstDash val="solid"/>
+                      <a:round/>
+                      <a:headEnd type="none" w="med" len="med"/>
+                      <a:tailEnd type="none" w="med" len="med"/>
+                    </a:lnR>
+                    <a:lnT w="9525" cap="flat" cmpd="sng" algn="ctr">
+                      <a:solidFill>
+                        <a:srgbClr val="000000"/>
+                      </a:solidFill>
+                      <a:prstDash val="solid"/>
+                      <a:round/>
+                      <a:headEnd type="none" w="med" len="med"/>
+                      <a:tailEnd type="none" w="med" len="med"/>
+                    </a:lnT>
+                    <a:lnB w="9525" cap="flat" cmpd="sng" algn="ctr">
+                      <a:solidFill>
+                        <a:srgbClr val="000000"/>
+                      </a:solidFill>
+                      <a:prstDash val="solid"/>
+                      <a:round/>
+                      <a:headEnd type="none" w="med" len="med"/>
+                      <a:tailEnd type="none" w="med" len="med"/>
+                    </a:lnB>
+                    <a:noFill/>
+                  </a:tcPr>
+                </a:tc>
+                <a:extLst>
+                  <a:ext uri="{0D108BD9-81ED-4DB2-BD59-A6C34878D82A}">
+                    <a16:rowId xmlns:a16="http://schemas.microsoft.com/office/drawing/2014/main" val="3653274546"/>
+                  </a:ext>
+                </a:extLst>
+              </a:tr>
+              <a:tr h="509842">
+                <a:tc>
+                  <a:txBody>
+                    <a:bodyPr/>
+                    <a:lstStyle/>
+                    <a:p>
+                      <a:pPr>
+                        <a:buNone/>
+                      </a:pPr>
+                      <a:r>
+                        <a:rPr lang="ru-RU" sz="2000" b="1">
+                          <a:solidFill>
+                            <a:srgbClr val="000000"/>
+                          </a:solidFill>
+                          <a:effectLst/>
+                          <a:latin typeface="+mn-lt"/>
+                        </a:rPr>
+                        <a:t>Сезонность или тренд в остатках</a:t>
+                      </a:r>
+                      <a:endParaRPr lang="ru-RU" sz="2000">
+                        <a:effectLst/>
+                        <a:latin typeface="+mn-lt"/>
+                      </a:endParaRPr>
+                    </a:p>
+                  </a:txBody>
+                  <a:tcPr marL="34209" marR="34209" marT="34209" marB="34209">
+                    <a:lnL w="9525" cap="flat" cmpd="sng" algn="ctr">
+                      <a:solidFill>
+                        <a:srgbClr val="000000"/>
+                      </a:solidFill>
+                      <a:prstDash val="solid"/>
+                      <a:round/>
+                      <a:headEnd type="none" w="med" len="med"/>
+                      <a:tailEnd type="none" w="med" len="med"/>
+                    </a:lnL>
+                    <a:lnR w="9525" cap="flat" cmpd="sng" algn="ctr">
+                      <a:solidFill>
+                        <a:srgbClr val="000000"/>
+                      </a:solidFill>
+                      <a:prstDash val="solid"/>
+                      <a:round/>
+                      <a:headEnd type="none" w="med" len="med"/>
+                      <a:tailEnd type="none" w="med" len="med"/>
+                    </a:lnR>
+                    <a:lnT w="9525" cap="flat" cmpd="sng" algn="ctr">
+                      <a:solidFill>
+                        <a:srgbClr val="000000"/>
+                      </a:solidFill>
+                      <a:prstDash val="solid"/>
+                      <a:round/>
+                      <a:headEnd type="none" w="med" len="med"/>
+                      <a:tailEnd type="none" w="med" len="med"/>
+                    </a:lnT>
+                    <a:lnB w="9525" cap="flat" cmpd="sng" algn="ctr">
+                      <a:solidFill>
+                        <a:srgbClr val="000000"/>
+                      </a:solidFill>
+                      <a:prstDash val="solid"/>
+                      <a:round/>
+                      <a:headEnd type="none" w="med" len="med"/>
+                      <a:tailEnd type="none" w="med" len="med"/>
+                    </a:lnB>
+                    <a:solidFill>
+                      <a:srgbClr val="D4D4D4"/>
+                    </a:solidFill>
+                  </a:tcPr>
+                </a:tc>
+                <a:tc>
+                  <a:txBody>
+                    <a:bodyPr/>
+                    <a:lstStyle/>
+                    <a:p>
+                      <a:pPr>
+                        <a:buNone/>
+                      </a:pPr>
+                      <a:r>
+                        <a:rPr lang="ru-RU" sz="2000" dirty="0">
+                          <a:solidFill>
+                            <a:srgbClr val="000000"/>
+                          </a:solidFill>
+                          <a:effectLst/>
+                          <a:latin typeface="+mn-lt"/>
+                        </a:rPr>
+                        <a:t>Не учтён внешний фактор</a:t>
+                      </a:r>
+                      <a:endParaRPr lang="ru-RU" sz="2000" dirty="0">
+                        <a:effectLst/>
+                        <a:latin typeface="+mn-lt"/>
+                      </a:endParaRPr>
+                    </a:p>
+                  </a:txBody>
+                  <a:tcPr marL="34209" marR="34209" marT="34209" marB="34209">
+                    <a:lnL w="9525" cap="flat" cmpd="sng" algn="ctr">
+                      <a:solidFill>
+                        <a:srgbClr val="000000"/>
+                      </a:solidFill>
+                      <a:prstDash val="solid"/>
+                      <a:round/>
+                      <a:headEnd type="none" w="med" len="med"/>
+                      <a:tailEnd type="none" w="med" len="med"/>
+                    </a:lnL>
+                    <a:lnR w="9525" cap="flat" cmpd="sng" algn="ctr">
+                      <a:solidFill>
+                        <a:srgbClr val="000000"/>
+                      </a:solidFill>
+                      <a:prstDash val="solid"/>
+                      <a:round/>
+                      <a:headEnd type="none" w="med" len="med"/>
+                      <a:tailEnd type="none" w="med" len="med"/>
+                    </a:lnR>
+                    <a:lnT w="9525" cap="flat" cmpd="sng" algn="ctr">
+                      <a:solidFill>
+                        <a:srgbClr val="000000"/>
+                      </a:solidFill>
+                      <a:prstDash val="solid"/>
+                      <a:round/>
+                      <a:headEnd type="none" w="med" len="med"/>
+                      <a:tailEnd type="none" w="med" len="med"/>
+                    </a:lnT>
+                    <a:lnB w="9525" cap="flat" cmpd="sng" algn="ctr">
+                      <a:solidFill>
+                        <a:srgbClr val="000000"/>
+                      </a:solidFill>
+                      <a:prstDash val="solid"/>
+                      <a:round/>
+                      <a:headEnd type="none" w="med" len="med"/>
+                      <a:tailEnd type="none" w="med" len="med"/>
+                    </a:lnB>
+                    <a:noFill/>
+                  </a:tcPr>
+                </a:tc>
+                <a:extLst>
+                  <a:ext uri="{0D108BD9-81ED-4DB2-BD59-A6C34878D82A}">
+                    <a16:rowId xmlns:a16="http://schemas.microsoft.com/office/drawing/2014/main" val="1597988997"/>
+                  </a:ext>
+                </a:extLst>
+              </a:tr>
+            </a:tbl>
+          </a:graphicData>
+        </a:graphic>
+      </p:graphicFrame>
+    </p:spTree>
+    <p:extLst>
+      <p:ext uri="{BB962C8B-B14F-4D97-AF65-F5344CB8AC3E}">
+        <p14:creationId xmlns:p14="http://schemas.microsoft.com/office/powerpoint/2010/main" val="1007271149"/>
+      </p:ext>
+    </p:extLst>
+  </p:cSld>
+  <p:clrMapOvr>
+    <a:masterClrMapping/>
+  </p:clrMapOvr>
+</p:sld>
+</file>
+
+<file path=ppt/slides/slide15.xml><?xml version="1.0" encoding="utf-8"?>
+<p:sld xmlns:a="http://schemas.openxmlformats.org/drawingml/2006/main" xmlns:r="http://schemas.openxmlformats.org/officeDocument/2006/relationships" xmlns:p="http://schemas.openxmlformats.org/presentationml/2006/main">
+  <p:cSld>
+    <p:spTree>
+      <p:nvGrpSpPr>
+        <p:cNvPr id="1" name="">
+          <a:extLst>
+            <a:ext uri="{FF2B5EF4-FFF2-40B4-BE49-F238E27FC236}">
+              <a16:creationId xmlns:a16="http://schemas.microsoft.com/office/drawing/2014/main" id="{5018DCAB-041C-C16F-ED55-7E5C48E4052B}"/>
+            </a:ext>
+          </a:extLst>
+        </p:cNvPr>
+        <p:cNvGrpSpPr/>
+        <p:nvPr/>
+      </p:nvGrpSpPr>
+      <p:grpSpPr>
+        <a:xfrm>
+          <a:off x="0" y="0"/>
+          <a:ext cx="0" cy="0"/>
+          <a:chOff x="0" y="0"/>
+          <a:chExt cx="0" cy="0"/>
+        </a:xfrm>
+      </p:grpSpPr>
+      <p:sp>
+        <p:nvSpPr>
+          <p:cNvPr id="2" name="Заголовок 1">
+            <a:extLst>
+              <a:ext uri="{FF2B5EF4-FFF2-40B4-BE49-F238E27FC236}">
+                <a16:creationId xmlns:a16="http://schemas.microsoft.com/office/drawing/2014/main" id="{CD619ED7-4CF8-86DC-12FD-195160CD62FE}"/>
+              </a:ext>
+            </a:extLst>
+          </p:cNvPr>
+          <p:cNvSpPr>
+            <a:spLocks noGrp="1"/>
+          </p:cNvSpPr>
+          <p:nvPr>
+            <p:ph type="title"/>
+          </p:nvPr>
+        </p:nvSpPr>
+        <p:spPr>
+          <a:xfrm>
+            <a:off x="400832" y="206679"/>
+            <a:ext cx="11461315" cy="707721"/>
+          </a:xfrm>
+        </p:spPr>
+        <p:txBody>
+          <a:bodyPr>
+            <a:normAutofit/>
+          </a:bodyPr>
+          <a:lstStyle/>
+          <a:p>
+            <a:r>
+              <a:rPr lang="ru-RU" b="1" dirty="0"/>
+              <a:t>Глобальные объясняющие факторы</a:t>
+            </a:r>
+          </a:p>
+        </p:txBody>
+      </p:sp>
+      <p:sp>
+        <p:nvSpPr>
+          <p:cNvPr id="3" name="Объект 2">
+            <a:extLst>
+              <a:ext uri="{FF2B5EF4-FFF2-40B4-BE49-F238E27FC236}">
+                <a16:creationId xmlns:a16="http://schemas.microsoft.com/office/drawing/2014/main" id="{DCEB7F0C-22A6-2B63-9324-6BA1F1321842}"/>
+              </a:ext>
+            </a:extLst>
+          </p:cNvPr>
+          <p:cNvSpPr>
+            <a:spLocks noGrp="1"/>
+          </p:cNvSpPr>
+          <p:nvPr>
+            <p:ph idx="1"/>
+          </p:nvPr>
+        </p:nvSpPr>
+        <p:spPr>
+          <a:xfrm>
+            <a:off x="329853" y="826718"/>
+            <a:ext cx="11532294" cy="5824603"/>
+          </a:xfrm>
+        </p:spPr>
+        <p:txBody>
+          <a:bodyPr>
+            <a:normAutofit/>
+          </a:bodyPr>
+          <a:lstStyle/>
+          <a:p>
+            <a:pPr marL="0" indent="0">
+              <a:buNone/>
+            </a:pPr>
+            <a:r>
+              <a:rPr lang="ru-RU" sz="2400" dirty="0"/>
+              <a:t>В таких случаях нужно отделить их виляние от закономерностей внутри каждого ряда и других связей между переменными. Методы:</a:t>
+            </a:r>
+          </a:p>
+          <a:p>
+            <a:r>
+              <a:rPr lang="ru-RU" sz="2400" dirty="0"/>
+              <a:t>Вычитание скользящего среднего общей переменной (если подходит)</a:t>
+            </a:r>
+          </a:p>
+          <a:p>
+            <a:pPr lvl="1"/>
+            <a:r>
+              <a:rPr lang="ru-RU" dirty="0"/>
+              <a:t>Если переменные одной природы!</a:t>
+            </a:r>
+          </a:p>
+          <a:p>
+            <a:r>
+              <a:rPr lang="ru-RU" sz="2400" dirty="0"/>
+              <a:t>Вычитание регрессии одной переменной на другую</a:t>
+            </a:r>
+          </a:p>
+          <a:p>
+            <a:pPr lvl="1"/>
+            <a:r>
+              <a:rPr lang="ru-RU" dirty="0"/>
+              <a:t>Если связь линейная</a:t>
+            </a:r>
+          </a:p>
+          <a:p>
+            <a:r>
+              <a:rPr lang="ru-RU" sz="2400" dirty="0"/>
+              <a:t>Интерпретация переменной как экзогенного фактора</a:t>
+            </a:r>
+          </a:p>
+          <a:p>
+            <a:pPr lvl="1"/>
+            <a:r>
+              <a:rPr lang="ru-RU" dirty="0"/>
+              <a:t>Если модель правильно учтет переменную</a:t>
+            </a:r>
+          </a:p>
+          <a:p>
+            <a:r>
+              <a:rPr lang="ru-RU" sz="2400" dirty="0"/>
+              <a:t>Методы сжатия - восстановления размерности</a:t>
+            </a:r>
+          </a:p>
+          <a:p>
+            <a:pPr lvl="1"/>
+            <a:r>
+              <a:rPr lang="ru-RU" dirty="0"/>
+              <a:t>Напр. метод главных компонент (</a:t>
+            </a:r>
+            <a:r>
+              <a:rPr lang="en-US" dirty="0"/>
+              <a:t>PCA -&gt; </a:t>
+            </a:r>
+            <a:r>
+              <a:rPr lang="ru-RU" dirty="0"/>
+              <a:t>восстановление без 0-й компоненты </a:t>
+            </a:r>
+            <a:r>
+              <a:rPr lang="en-US" dirty="0"/>
+              <a:t>PCA)</a:t>
+            </a:r>
+            <a:endParaRPr lang="ru-RU" dirty="0"/>
+          </a:p>
+          <a:p>
+            <a:pPr lvl="1"/>
+            <a:r>
+              <a:rPr lang="ru-RU" dirty="0"/>
+              <a:t>Или метод </a:t>
+            </a:r>
+            <a:r>
+              <a:rPr lang="ru-RU" dirty="0" err="1"/>
+              <a:t>автоэнкодера</a:t>
+            </a:r>
+            <a:r>
+              <a:rPr lang="ru-RU" dirty="0"/>
+              <a:t> (зануление 0 компоненты скрытого пространства)</a:t>
+            </a:r>
+          </a:p>
+          <a:p>
+            <a:pPr lvl="1"/>
+            <a:r>
+              <a:rPr lang="ru-RU" dirty="0"/>
+              <a:t>0-я компонента – как правило общая тенденция</a:t>
+            </a:r>
+          </a:p>
+          <a:p>
+            <a:pPr lvl="1"/>
+            <a:r>
+              <a:rPr lang="ru-RU" dirty="0"/>
+              <a:t>Проверка: компонента влияет на остальные (казуальность, корреляция)</a:t>
+            </a:r>
+          </a:p>
+          <a:p>
+            <a:pPr marL="457200" lvl="1" indent="0">
+              <a:buNone/>
+            </a:pPr>
+            <a:endParaRPr lang="ru-RU" dirty="0"/>
+          </a:p>
+          <a:p>
+            <a:endParaRPr lang="ru-RU" dirty="0"/>
+          </a:p>
+        </p:txBody>
+      </p:sp>
+    </p:spTree>
+    <p:extLst>
+      <p:ext uri="{BB962C8B-B14F-4D97-AF65-F5344CB8AC3E}">
+        <p14:creationId xmlns:p14="http://schemas.microsoft.com/office/powerpoint/2010/main" val="1933017096"/>
+      </p:ext>
+    </p:extLst>
+  </p:cSld>
+  <p:clrMapOvr>
+    <a:masterClrMapping/>
+  </p:clrMapOvr>
+</p:sld>
+</file>
+
+<file path=ppt/slides/slide16.xml><?xml version="1.0" encoding="utf-8"?>
+<p:sld xmlns:a="http://schemas.openxmlformats.org/drawingml/2006/main" xmlns:r="http://schemas.openxmlformats.org/officeDocument/2006/relationships" xmlns:p="http://schemas.openxmlformats.org/presentationml/2006/main">
+  <p:cSld>
+    <p:spTree>
+      <p:nvGrpSpPr>
+        <p:cNvPr id="1" name=""/>
+        <p:cNvGrpSpPr/>
+        <p:nvPr/>
+      </p:nvGrpSpPr>
+      <p:grpSpPr>
+        <a:xfrm>
+          <a:off x="0" y="0"/>
+          <a:ext cx="0" cy="0"/>
+          <a:chOff x="0" y="0"/>
+          <a:chExt cx="0" cy="0"/>
+        </a:xfrm>
+      </p:grpSpPr>
+      <p:sp>
+        <p:nvSpPr>
+          <p:cNvPr id="2" name="Заголовок 1">
+            <a:extLst>
+              <a:ext uri="{FF2B5EF4-FFF2-40B4-BE49-F238E27FC236}">
                 <a16:creationId xmlns:a16="http://schemas.microsoft.com/office/drawing/2014/main" id="{C0B310A8-1639-074E-D1B0-CAC9C025B1F8}"/>
               </a:ext>
             </a:extLst>
@@ -6610,7 +8623,14 @@
           <a:bodyPr/>
           <a:lstStyle/>
           <a:p>
-            <a:endParaRPr lang="ru-RU" dirty="0"/>
+            <a:r>
+              <a:rPr lang="ru-RU" dirty="0" err="1"/>
+              <a:t>Сумматризация</a:t>
+            </a:r>
+            <a:r>
+              <a:rPr lang="ru-RU" dirty="0"/>
+              <a:t> тестов</a:t>
+            </a:r>
           </a:p>
         </p:txBody>
       </p:sp>
@@ -6630,14 +8650,14 @@
             <p:ph idx="1"/>
             <p:extLst>
               <p:ext uri="{D42A27DB-BD31-4B8C-83A1-F6EECF244321}">
-                <p14:modId xmlns:p14="http://schemas.microsoft.com/office/powerpoint/2010/main" val="3526744280"/>
+                <p14:modId xmlns:p14="http://schemas.microsoft.com/office/powerpoint/2010/main" val="1813698681"/>
               </p:ext>
             </p:extLst>
           </p:nvPr>
         </p:nvGraphicFramePr>
         <p:xfrm>
-          <a:off x="838200" y="1825625"/>
-          <a:ext cx="10515597" cy="2397760"/>
+          <a:off x="250521" y="1152396"/>
+          <a:ext cx="11448790" cy="5494020"/>
         </p:xfrm>
         <a:graphic>
           <a:graphicData uri="http://schemas.openxmlformats.org/drawingml/2006/table">
@@ -6646,36 +8666,43 @@
                 <a:tableStyleId>{5C22544A-7EE6-4342-B048-85BDC9FD1C3A}</a:tableStyleId>
               </a:tblPr>
               <a:tblGrid>
-                <a:gridCol w="3505199">
+                <a:gridCol w="2392471">
                   <a:extLst>
                     <a:ext uri="{9D8B030D-6E8A-4147-A177-3AD203B41FA5}">
                       <a16:colId xmlns:a16="http://schemas.microsoft.com/office/drawing/2014/main" val="1144837396"/>
                     </a:ext>
                   </a:extLst>
                 </a:gridCol>
-                <a:gridCol w="3505199">
+                <a:gridCol w="2071421">
                   <a:extLst>
                     <a:ext uri="{9D8B030D-6E8A-4147-A177-3AD203B41FA5}">
                       <a16:colId xmlns:a16="http://schemas.microsoft.com/office/drawing/2014/main" val="3680973962"/>
                     </a:ext>
                   </a:extLst>
                 </a:gridCol>
-                <a:gridCol w="3505199">
+                <a:gridCol w="2738573">
                   <a:extLst>
                     <a:ext uri="{9D8B030D-6E8A-4147-A177-3AD203B41FA5}">
                       <a16:colId xmlns:a16="http://schemas.microsoft.com/office/drawing/2014/main" val="4292674020"/>
                     </a:ext>
                   </a:extLst>
                 </a:gridCol>
+                <a:gridCol w="4246325">
+                  <a:extLst>
+                    <a:ext uri="{9D8B030D-6E8A-4147-A177-3AD203B41FA5}">
+                      <a16:colId xmlns:a16="http://schemas.microsoft.com/office/drawing/2014/main" val="1747132449"/>
+                    </a:ext>
+                  </a:extLst>
+                </a:gridCol>
               </a:tblGrid>
-              <a:tr h="370840">
+              <a:tr h="423284">
                 <a:tc>
                   <a:txBody>
                     <a:bodyPr/>
                     <a:lstStyle/>
                     <a:p>
                       <a:r>
-                        <a:rPr lang="ru-RU" dirty="0"/>
+                        <a:rPr lang="ru-RU" sz="2200" dirty="0"/>
                         <a:t>Тип МВР</a:t>
                       </a:r>
                     </a:p>
@@ -6688,7 +8715,7 @@
                     <a:lstStyle/>
                     <a:p>
                       <a:r>
-                        <a:rPr lang="ru-RU" dirty="0"/>
+                        <a:rPr lang="ru-RU" sz="2200" dirty="0"/>
                         <a:t>Тест на тип</a:t>
                       </a:r>
                     </a:p>
@@ -6701,8 +8728,21 @@
                     <a:lstStyle/>
                     <a:p>
                       <a:r>
-                        <a:rPr lang="ru-RU" dirty="0"/>
+                        <a:rPr lang="ru-RU" sz="2200" dirty="0"/>
                         <a:t>метод</a:t>
+                      </a:r>
+                    </a:p>
+                  </a:txBody>
+                  <a:tcPr/>
+                </a:tc>
+                <a:tc>
+                  <a:txBody>
+                    <a:bodyPr/>
+                    <a:lstStyle/>
+                    <a:p>
+                      <a:r>
+                        <a:rPr lang="ru-RU" sz="2200" dirty="0"/>
+                        <a:t>Дополнительные действия</a:t>
                       </a:r>
                     </a:p>
                   </a:txBody>
@@ -6721,7 +8761,7 @@
                     <a:lstStyle/>
                     <a:p>
                       <a:r>
-                        <a:rPr lang="ru-RU" dirty="0"/>
+                        <a:rPr lang="ru-RU" sz="2200" dirty="0"/>
                         <a:t>Стационарный ВР</a:t>
                       </a:r>
                     </a:p>
@@ -6734,14 +8774,14 @@
                     <a:lstStyle/>
                     <a:p>
                       <a:r>
-                        <a:rPr lang="ru-RU" dirty="0"/>
+                        <a:rPr lang="ru-RU" sz="2200" dirty="0"/>
                         <a:t>AD</a:t>
                       </a:r>
                       <a:r>
-                        <a:rPr lang="en-US" dirty="0"/>
+                        <a:rPr lang="en-US" sz="2200" dirty="0"/>
                         <a:t>F, KPSS</a:t>
                       </a:r>
-                      <a:endParaRPr lang="ru-RU" dirty="0"/>
+                      <a:endParaRPr lang="ru-RU" sz="2200" dirty="0"/>
                     </a:p>
                   </a:txBody>
                   <a:tcPr/>
@@ -6752,10 +8792,36 @@
                     <a:lstStyle/>
                     <a:p>
                       <a:r>
-                        <a:rPr lang="en-US" dirty="0"/>
+                        <a:rPr lang="en-US" sz="2200" dirty="0"/>
                         <a:t>VAR</a:t>
                       </a:r>
-                      <a:endParaRPr lang="ru-RU" dirty="0"/>
+                      <a:endParaRPr lang="ru-RU" sz="2200" dirty="0"/>
+                    </a:p>
+                  </a:txBody>
+                  <a:tcPr/>
+                </a:tc>
+                <a:tc>
+                  <a:txBody>
+                    <a:bodyPr/>
+                    <a:lstStyle/>
+                    <a:p>
+                      <a:r>
+                        <a:rPr lang="ru-RU" sz="2200" dirty="0"/>
+                        <a:t>Обработка каждого ВР отдельно (</a:t>
+                      </a:r>
+                      <a:r>
+                        <a:rPr lang="ru-RU" sz="2200" dirty="0" err="1"/>
+                        <a:t>диф</a:t>
+                      </a:r>
+                      <a:r>
+                        <a:rPr lang="ru-RU" sz="2200" dirty="0"/>
+                        <a:t>, лог, STL</a:t>
+                      </a:r>
+                      <a:r>
+                        <a:rPr lang="en-US" sz="2200" dirty="0"/>
+                        <a:t>)</a:t>
+                      </a:r>
+                      <a:endParaRPr lang="ru-RU" sz="2200" dirty="0"/>
                     </a:p>
                   </a:txBody>
                   <a:tcPr/>
@@ -6773,22 +8839,22 @@
                     <a:lstStyle/>
                     <a:p>
                       <a:r>
-                        <a:rPr lang="ru-RU" dirty="0"/>
+                        <a:rPr lang="ru-RU" sz="2200" dirty="0"/>
                         <a:t>корреляции</a:t>
                       </a:r>
                       <a:r>
-                        <a:rPr lang="en-US" dirty="0"/>
+                        <a:rPr lang="en-US" sz="2200" dirty="0"/>
                         <a:t> + </a:t>
                       </a:r>
                       <a:r>
-                        <a:rPr lang="en-US" dirty="0" err="1"/>
+                        <a:rPr lang="en-US" sz="2200" dirty="0" err="1"/>
                         <a:t>стац</a:t>
                       </a:r>
                       <a:r>
-                        <a:rPr lang="ru-RU" dirty="0" err="1"/>
+                        <a:rPr lang="ru-RU" sz="2200" dirty="0" err="1"/>
                         <a:t>ионарность</a:t>
                       </a:r>
-                      <a:endParaRPr lang="ru-RU" dirty="0"/>
+                      <a:endParaRPr lang="ru-RU" sz="2200" dirty="0"/>
                     </a:p>
                   </a:txBody>
                   <a:tcPr/>
@@ -6799,22 +8865,22 @@
                     <a:lstStyle/>
                     <a:p>
                       <a:r>
-                        <a:rPr lang="ru-RU" dirty="0"/>
+                        <a:rPr lang="ru-RU" sz="2200" dirty="0"/>
                         <a:t>Cross</a:t>
                       </a:r>
                       <a:r>
-                        <a:rPr lang="en-US" dirty="0"/>
+                        <a:rPr lang="en-US" sz="2200" dirty="0"/>
                         <a:t>-</a:t>
                       </a:r>
                       <a:r>
-                        <a:rPr lang="en-US" dirty="0" err="1"/>
-                        <a:t>cor</a:t>
+                        <a:rPr lang="en-US" sz="2200" dirty="0" err="1"/>
+                        <a:t>corr</a:t>
                       </a:r>
                       <a:r>
-                        <a:rPr lang="en-US" dirty="0"/>
+                        <a:rPr lang="en-US" sz="2200" dirty="0"/>
                         <a:t>, f-test</a:t>
                       </a:r>
-                      <a:endParaRPr lang="ru-RU" dirty="0"/>
+                      <a:endParaRPr lang="ru-RU" sz="2200" dirty="0"/>
                     </a:p>
                   </a:txBody>
                   <a:tcPr/>
@@ -6825,16 +8891,45 @@
                     <a:lstStyle/>
                     <a:p>
                       <a:r>
-                        <a:rPr lang="en-US" dirty="0"/>
+                        <a:rPr lang="en-US" sz="2200" dirty="0"/>
                         <a:t>VAR + </a:t>
                       </a:r>
                       <a:r>
-                        <a:rPr lang="ru-RU" dirty="0"/>
+                        <a:rPr lang="ru-RU" sz="2200" dirty="0"/>
                         <a:t>регуляризация</a:t>
                       </a:r>
                     </a:p>
                   </a:txBody>
                   <a:tcPr/>
+                </a:tc>
+                <a:tc>
+                  <a:txBody>
+                    <a:bodyPr/>
+                    <a:lstStyle/>
+                    <a:p>
+                      <a:br>
+                        <a:rPr lang="ru-RU" dirty="0">
+                          <a:effectLst/>
+                        </a:rPr>
+                      </a:br>
+                      <a:r>
+                        <a:rPr lang="ru-RU" dirty="0">
+                          <a:effectLst/>
+                        </a:rPr>
+                        <a:t>Раздельное моделирование, уменьшение размерности (PC</a:t>
+                      </a:r>
+                      <a:r>
+                        <a:rPr lang="en-US" dirty="0">
+                          <a:effectLst/>
+                        </a:rPr>
+                        <a:t>A)</a:t>
+                      </a:r>
+                      <a:endParaRPr lang="ru-RU" dirty="0">
+                        <a:effectLst/>
+                      </a:endParaRPr>
+                    </a:p>
+                  </a:txBody>
+                  <a:tcPr marL="95250" marR="95250" marT="95250" marB="95250" anchor="ctr"/>
                 </a:tc>
                 <a:extLst>
                   <a:ext uri="{0D108BD9-81ED-4DB2-BD59-A6C34878D82A}">
@@ -6849,22 +8944,22 @@
                     <a:lstStyle/>
                     <a:p>
                       <a:r>
-                        <a:rPr lang="ru-RU" dirty="0"/>
+                        <a:rPr lang="ru-RU" sz="2200" dirty="0"/>
                         <a:t>казуальность</a:t>
                       </a:r>
                       <a:r>
-                        <a:rPr lang="en-US" dirty="0"/>
+                        <a:rPr lang="en-US" sz="2200" dirty="0"/>
                         <a:t>+ </a:t>
                       </a:r>
                       <a:r>
-                        <a:rPr lang="en-US" dirty="0" err="1"/>
+                        <a:rPr lang="en-US" sz="2200" dirty="0" err="1"/>
                         <a:t>стац</a:t>
                       </a:r>
                       <a:r>
-                        <a:rPr lang="ru-RU" dirty="0" err="1"/>
+                        <a:rPr lang="ru-RU" sz="2200" dirty="0" err="1"/>
                         <a:t>ионарность</a:t>
                       </a:r>
-                      <a:endParaRPr lang="ru-RU" dirty="0"/>
+                      <a:endParaRPr lang="ru-RU" sz="2200" dirty="0"/>
                     </a:p>
                   </a:txBody>
                   <a:tcPr/>
@@ -6875,10 +8970,10 @@
                     <a:lstStyle/>
                     <a:p>
                       <a:r>
-                        <a:rPr lang="en-US" dirty="0"/>
+                        <a:rPr lang="en-US" sz="2200" dirty="0"/>
                         <a:t>Granger-test</a:t>
                       </a:r>
-                      <a:endParaRPr lang="ru-RU" dirty="0"/>
+                      <a:endParaRPr lang="ru-RU" sz="2200" dirty="0"/>
                     </a:p>
                   </a:txBody>
                   <a:tcPr/>
@@ -6889,12 +8984,25 @@
                     <a:lstStyle/>
                     <a:p>
                       <a:r>
-                        <a:rPr lang="en-US" dirty="0"/>
+                        <a:rPr lang="en-US" sz="2200" dirty="0"/>
                         <a:t>SVAR</a:t>
                       </a:r>
                       <a:r>
-                        <a:rPr lang="ru-RU" dirty="0"/>
-                        <a:t>, убрать/сделать экзогенными казуальные переменные</a:t>
+                        <a:rPr lang="ru-RU" sz="2200" dirty="0"/>
+                        <a:t>, </a:t>
+                      </a:r>
+                    </a:p>
+                  </a:txBody>
+                  <a:tcPr/>
+                </a:tc>
+                <a:tc>
+                  <a:txBody>
+                    <a:bodyPr/>
+                    <a:lstStyle/>
+                    <a:p>
+                      <a:r>
+                        <a:rPr lang="ru-RU" sz="2200" dirty="0"/>
+                        <a:t>убрать/сделать экзогенными казуальные переменные</a:t>
                       </a:r>
                     </a:p>
                   </a:txBody>
@@ -6913,22 +9021,22 @@
                     <a:lstStyle/>
                     <a:p>
                       <a:r>
-                        <a:rPr lang="en-US" dirty="0" err="1"/>
+                        <a:rPr lang="en-US" sz="2200" dirty="0" err="1"/>
                         <a:t>Ес</a:t>
                       </a:r>
                       <a:r>
-                        <a:rPr lang="ru-RU" dirty="0" err="1"/>
+                        <a:rPr lang="ru-RU" sz="2200" dirty="0" err="1"/>
                         <a:t>ть</a:t>
                       </a:r>
                       <a:r>
-                        <a:rPr lang="ru-RU" dirty="0"/>
+                        <a:rPr lang="ru-RU" sz="2200" dirty="0"/>
                         <a:t> </a:t>
                       </a:r>
                       <a:r>
-                        <a:rPr lang="ru-RU" dirty="0" err="1"/>
+                        <a:rPr lang="ru-RU" sz="2200" dirty="0" err="1"/>
                         <a:t>коинтеграции</a:t>
                       </a:r>
-                      <a:endParaRPr lang="ru-RU" dirty="0"/>
+                      <a:endParaRPr lang="ru-RU" sz="2200" dirty="0"/>
                     </a:p>
                   </a:txBody>
                   <a:tcPr/>
@@ -6939,12 +9047,100 @@
                     <a:lstStyle/>
                     <a:p>
                       <a:r>
-                        <a:rPr lang="en-US" dirty="0"/>
+                        <a:rPr lang="en-US" sz="2200" dirty="0"/>
                         <a:t>Johansen test</a:t>
                       </a:r>
                       <a:r>
-                        <a:rPr lang="ru-RU" dirty="0"/>
+                        <a:rPr lang="ru-RU" sz="2200" dirty="0"/>
                         <a:t> </a:t>
+                      </a:r>
+                      <a:r>
+                        <a:rPr lang="en" sz="2200" b="0" i="0" kern="1200" dirty="0">
+                          <a:solidFill>
+                            <a:schemeClr val="dk1"/>
+                          </a:solidFill>
+                          <a:effectLst/>
+                          <a:latin typeface="+mn-lt"/>
+                          <a:ea typeface="+mn-ea"/>
+                          <a:cs typeface="+mn-cs"/>
+                        </a:rPr>
+                        <a:t>Engle-Granger</a:t>
+                      </a:r>
+                      <a:endParaRPr lang="ru-RU" sz="2200" dirty="0"/>
+                    </a:p>
+                  </a:txBody>
+                  <a:tcPr/>
+                </a:tc>
+                <a:tc>
+                  <a:txBody>
+                    <a:bodyPr/>
+                    <a:lstStyle/>
+                    <a:p>
+                      <a:r>
+                        <a:rPr lang="ru-RU" sz="2200" dirty="0"/>
+                        <a:t>VEC</a:t>
+                      </a:r>
+                      <a:r>
+                        <a:rPr lang="en-US" sz="2200" dirty="0"/>
+                        <a:t>M</a:t>
+                      </a:r>
+                      <a:endParaRPr lang="ru-RU" sz="2200" dirty="0"/>
+                    </a:p>
+                  </a:txBody>
+                  <a:tcPr/>
+                </a:tc>
+                <a:tc>
+                  <a:txBody>
+                    <a:bodyPr/>
+                    <a:lstStyle/>
+                    <a:p>
+                      <a:r>
+                        <a:rPr lang="ru-RU" sz="1800" b="0" i="0" kern="1200" dirty="0" err="1">
+                          <a:solidFill>
+                            <a:schemeClr val="dk1"/>
+                          </a:solidFill>
+                          <a:effectLst/>
+                          <a:latin typeface="+mn-lt"/>
+                          <a:ea typeface="+mn-ea"/>
+                          <a:cs typeface="+mn-cs"/>
+                        </a:rPr>
+                        <a:t>Слоабая</a:t>
+                      </a:r>
+                      <a:r>
+                        <a:rPr lang="ru-RU" sz="1800" b="0" i="0" kern="1200" dirty="0">
+                          <a:solidFill>
+                            <a:schemeClr val="dk1"/>
+                          </a:solidFill>
+                          <a:effectLst/>
+                          <a:latin typeface="+mn-lt"/>
+                          <a:ea typeface="+mn-ea"/>
+                          <a:cs typeface="+mn-cs"/>
+                        </a:rPr>
+                        <a:t> </a:t>
+                      </a:r>
+                      <a:r>
+                        <a:rPr lang="ru-RU" sz="1800" b="0" i="0" kern="1200" dirty="0" err="1">
+                          <a:solidFill>
+                            <a:schemeClr val="dk1"/>
+                          </a:solidFill>
+                          <a:effectLst/>
+                          <a:latin typeface="+mn-lt"/>
+                          <a:ea typeface="+mn-ea"/>
+                          <a:cs typeface="+mn-cs"/>
+                        </a:rPr>
+                        <a:t>коинтеграция</a:t>
+                      </a:r>
+                      <a:r>
+                        <a:rPr lang="ru-RU" sz="1800" b="0" i="0" kern="1200" dirty="0">
+                          <a:solidFill>
+                            <a:schemeClr val="dk1"/>
+                          </a:solidFill>
+                          <a:effectLst/>
+                          <a:latin typeface="+mn-lt"/>
+                          <a:ea typeface="+mn-ea"/>
+                          <a:cs typeface="+mn-cs"/>
+                        </a:rPr>
+                        <a:t> → обычный </a:t>
                       </a:r>
                       <a:r>
                         <a:rPr lang="en" sz="1800" b="0" i="0" kern="1200" dirty="0">
@@ -6956,9 +9152,41 @@
                           <a:ea typeface="+mn-ea"/>
                           <a:cs typeface="+mn-cs"/>
                         </a:rPr>
-                        <a:t>Engle-Granger</a:t>
+                        <a:t>VAR </a:t>
                       </a:r>
-                      <a:endParaRPr lang="ru-RU" dirty="0"/>
+                      <a:r>
+                        <a:rPr lang="ru-RU" sz="1800" b="0" i="0" kern="1200" dirty="0">
+                          <a:solidFill>
+                            <a:schemeClr val="dk1"/>
+                          </a:solidFill>
+                          <a:effectLst/>
+                          <a:latin typeface="+mn-lt"/>
+                          <a:ea typeface="+mn-ea"/>
+                          <a:cs typeface="+mn-cs"/>
+                        </a:rPr>
+                        <a:t>в первых разностях.</a:t>
+                      </a:r>
+                      <a:endParaRPr lang="ru-RU" sz="2200" dirty="0"/>
+                    </a:p>
+                  </a:txBody>
+                  <a:tcPr/>
+                </a:tc>
+                <a:extLst>
+                  <a:ext uri="{0D108BD9-81ED-4DB2-BD59-A6C34878D82A}">
+                    <a16:rowId xmlns:a16="http://schemas.microsoft.com/office/drawing/2014/main" val="3220271657"/>
+                  </a:ext>
+                </a:extLst>
+              </a:tr>
+              <a:tr h="370840">
+                <a:tc>
+                  <a:txBody>
+                    <a:bodyPr/>
+                    <a:lstStyle/>
+                    <a:p>
+                      <a:r>
+                        <a:rPr lang="ru-RU" sz="2200" dirty="0"/>
+                        <a:t>Глобальный объясняющий фактор</a:t>
+                      </a:r>
                     </a:p>
                   </a:txBody>
                   <a:tcPr/>
@@ -6969,21 +9197,67 @@
                     <a:lstStyle/>
                     <a:p>
                       <a:r>
-                        <a:rPr lang="ru-RU" dirty="0"/>
-                        <a:t>VEC</a:t>
+                        <a:rPr lang="ru-RU" sz="2200" dirty="0"/>
+                        <a:t>Проверка первых компонент </a:t>
                       </a:r>
                       <a:r>
-                        <a:rPr lang="en-US" dirty="0"/>
-                        <a:t>M</a:t>
+                        <a:rPr lang="en-US" sz="2200" dirty="0"/>
+                        <a:t>PCA</a:t>
                       </a:r>
-                      <a:endParaRPr lang="ru-RU" dirty="0"/>
+                      <a:endParaRPr lang="ru-RU" sz="2200" dirty="0"/>
+                    </a:p>
+                  </a:txBody>
+                  <a:tcPr/>
+                </a:tc>
+                <a:tc>
+                  <a:txBody>
+                    <a:bodyPr/>
+                    <a:lstStyle/>
+                    <a:p>
+                      <a:r>
+                        <a:rPr lang="en-US" sz="2200" dirty="0"/>
+                        <a:t>VARX (</a:t>
+                      </a:r>
+                      <a:r>
+                        <a:rPr lang="en-US" sz="2200" dirty="0" err="1"/>
+                        <a:t>гло</a:t>
+                      </a:r>
+                      <a:r>
+                        <a:rPr lang="ru-RU" sz="2200" dirty="0"/>
+                        <a:t>бальный фактор-экзогенный)</a:t>
+                      </a:r>
+                    </a:p>
+                  </a:txBody>
+                  <a:tcPr/>
+                </a:tc>
+                <a:tc>
+                  <a:txBody>
+                    <a:bodyPr/>
+                    <a:lstStyle/>
+                    <a:p>
+                      <a:r>
+                        <a:rPr lang="ru-RU" sz="2200" dirty="0"/>
+                        <a:t>Устранить влияние фактора</a:t>
+                      </a:r>
+                    </a:p>
+                    <a:p>
+                      <a:r>
+                        <a:rPr lang="ru-RU" sz="2200" dirty="0"/>
+                        <a:t>Через регрессию и вычитание если известен?</a:t>
+                      </a:r>
+                    </a:p>
+                    <a:p>
+                      <a:r>
+                        <a:rPr lang="ru-RU" sz="2200" dirty="0"/>
+                        <a:t> через сжатие - восстановление размерности если неизвестен</a:t>
+                      </a:r>
                     </a:p>
                   </a:txBody>
                   <a:tcPr/>
                 </a:tc>
                 <a:extLst>
                   <a:ext uri="{0D108BD9-81ED-4DB2-BD59-A6C34878D82A}">
-                    <a16:rowId xmlns:a16="http://schemas.microsoft.com/office/drawing/2014/main" val="3220271657"/>
+                    <a16:rowId xmlns:a16="http://schemas.microsoft.com/office/drawing/2014/main" val="1107968156"/>
                   </a:ext>
                 </a:extLst>
               </a:tr>
@@ -7004,7 +9278,7 @@
 </p:sld>
 </file>
 
-<file path=ppt/slides/slide15.xml><?xml version="1.0" encoding="utf-8"?>
+<file path=ppt/slides/slide17.xml><?xml version="1.0" encoding="utf-8"?>
 <p:sld xmlns:a="http://schemas.openxmlformats.org/drawingml/2006/main" xmlns:r="http://schemas.openxmlformats.org/officeDocument/2006/relationships" xmlns:p="http://schemas.openxmlformats.org/presentationml/2006/main">
   <p:cSld>
     <p:spTree>
@@ -7037,11 +9311,19 @@
             <p:ph type="title"/>
           </p:nvPr>
         </p:nvSpPr>
-        <p:spPr/>
+        <p:spPr>
+          <a:xfrm>
+            <a:off x="325677" y="365125"/>
+            <a:ext cx="11028123" cy="611905"/>
+          </a:xfrm>
+        </p:spPr>
         <p:txBody>
-          <a:bodyPr/>
+          <a:bodyPr>
+            <a:normAutofit fontScale="90000"/>
+          </a:bodyPr>
           <a:lstStyle/>
           <a:p>
+            <a:pPr algn="ctr"/>
             <a:r>
               <a:rPr lang="ru-RU" dirty="0"/>
               <a:t>Использование МО в МВР</a:t>
@@ -7065,18 +9347,247 @@
             <p:ph idx="1"/>
           </p:nvPr>
         </p:nvSpPr>
-        <p:spPr/>
+        <p:spPr>
+          <a:xfrm>
+            <a:off x="162838" y="839244"/>
+            <a:ext cx="11703485" cy="6018756"/>
+          </a:xfrm>
+        </p:spPr>
         <p:txBody>
-          <a:bodyPr/>
+          <a:bodyPr>
+            <a:normAutofit/>
+          </a:bodyPr>
           <a:lstStyle/>
           <a:p>
-            <a:r>
-              <a:rPr lang="ru-RU" dirty="0"/>
-              <a:t>Мл с </a:t>
-            </a:r>
-            <a:r>
-              <a:rPr lang="ru-RU"/>
-              <a:t>циклическими признаками</a:t>
+            <a:pPr marL="0" indent="0">
+              <a:lnSpc>
+                <a:spcPct val="100000"/>
+              </a:lnSpc>
+              <a:spcBef>
+                <a:spcPts val="0"/>
+              </a:spcBef>
+              <a:buNone/>
+            </a:pPr>
+            <a:r>
+              <a:rPr lang="ru-RU" sz="2200" dirty="0"/>
+              <a:t>Многие реальные МВР — нелинейны, </a:t>
+            </a:r>
+            <a:r>
+              <a:rPr lang="ru-RU" sz="2200" dirty="0" err="1"/>
+              <a:t>нестационарны</a:t>
+            </a:r>
+            <a:r>
+              <a:rPr lang="ru-RU" sz="2200" dirty="0"/>
+              <a:t> и содержат сложные взаимодействия и достаточно большие объемы данных.</a:t>
+            </a:r>
+            <a:endParaRPr lang="en-US" sz="2200" dirty="0"/>
+          </a:p>
+          <a:p>
+            <a:pPr>
+              <a:lnSpc>
+                <a:spcPct val="100000"/>
+              </a:lnSpc>
+              <a:spcBef>
+                <a:spcPts val="0"/>
+              </a:spcBef>
+            </a:pPr>
+            <a:r>
+              <a:rPr lang="en-US" sz="2200" dirty="0" err="1"/>
+              <a:t>При</a:t>
+            </a:r>
+            <a:r>
+              <a:rPr lang="en-US" sz="2200" dirty="0"/>
+              <a:t> </a:t>
+            </a:r>
+            <a:r>
+              <a:rPr lang="ru-RU" sz="2200" dirty="0"/>
+              <a:t>этом часто в разы проще собрать единую модель для прогноза на основе всех ВР – глобальную прогнозную модель</a:t>
+            </a:r>
+            <a:endParaRPr lang="en-US" sz="2200" dirty="0"/>
+          </a:p>
+          <a:p>
+            <a:pPr marL="0" indent="0">
+              <a:lnSpc>
+                <a:spcPct val="100000"/>
+              </a:lnSpc>
+              <a:spcBef>
+                <a:spcPts val="600"/>
+              </a:spcBef>
+              <a:buNone/>
+            </a:pPr>
+            <a:r>
+              <a:rPr lang="ru-RU" sz="2200" b="1" dirty="0"/>
+              <a:t>Преимущества глобальных моделей: </a:t>
+            </a:r>
+          </a:p>
+          <a:p>
+            <a:pPr>
+              <a:lnSpc>
+                <a:spcPct val="100000"/>
+              </a:lnSpc>
+              <a:spcBef>
+                <a:spcPts val="0"/>
+              </a:spcBef>
+            </a:pPr>
+            <a:r>
+              <a:rPr lang="ru-RU" sz="2200" dirty="0"/>
+              <a:t>Проще поддерживать и отслеживать одну модель, чем несколько. </a:t>
+            </a:r>
+          </a:p>
+          <a:p>
+            <a:pPr>
+              <a:lnSpc>
+                <a:spcPct val="100000"/>
+              </a:lnSpc>
+              <a:spcBef>
+                <a:spcPts val="0"/>
+              </a:spcBef>
+            </a:pPr>
+            <a:r>
+              <a:rPr lang="ru-RU" sz="2200" dirty="0"/>
+              <a:t>Поскольку все временные ряды объединяются во время обучения, модель обладает более высокой способностью к обучению, даже если ряды короткие. </a:t>
+            </a:r>
+          </a:p>
+          <a:p>
+            <a:pPr>
+              <a:lnSpc>
+                <a:spcPct val="100000"/>
+              </a:lnSpc>
+              <a:spcBef>
+                <a:spcPts val="0"/>
+              </a:spcBef>
+            </a:pPr>
+            <a:r>
+              <a:rPr lang="ru-RU" sz="2200" dirty="0"/>
+              <a:t>Комбинируя несколько временных рядов, модель может отражать более общие закономерности. </a:t>
+            </a:r>
+          </a:p>
+          <a:p>
+            <a:pPr>
+              <a:lnSpc>
+                <a:spcPct val="100000"/>
+              </a:lnSpc>
+              <a:spcBef>
+                <a:spcPts val="0"/>
+              </a:spcBef>
+            </a:pPr>
+            <a:r>
+              <a:rPr lang="ru-RU" sz="2200" dirty="0"/>
+              <a:t>В модели можно добавлять дополнительные признаки, например </a:t>
+            </a:r>
+            <a:r>
+              <a:rPr lang="en-US" sz="2200" dirty="0"/>
+              <a:t>Granger-test</a:t>
+            </a:r>
+            <a:r>
+              <a:rPr lang="ru-RU" sz="2200" dirty="0"/>
+              <a:t>, </a:t>
+            </a:r>
+            <a:r>
+              <a:rPr lang="en-US" sz="2200" dirty="0"/>
+              <a:t>Johansen test</a:t>
+            </a:r>
+            <a:r>
+              <a:rPr lang="ru-RU" sz="2200" dirty="0"/>
+              <a:t> </a:t>
+            </a:r>
+          </a:p>
+          <a:p>
+            <a:pPr marL="0" indent="0">
+              <a:lnSpc>
+                <a:spcPct val="100000"/>
+              </a:lnSpc>
+              <a:spcBef>
+                <a:spcPts val="600"/>
+              </a:spcBef>
+              <a:buNone/>
+            </a:pPr>
+            <a:r>
+              <a:rPr lang="ru-RU" sz="2200" b="1" dirty="0"/>
+              <a:t>Ограничения глобальных моделей: </a:t>
+            </a:r>
+          </a:p>
+          <a:p>
+            <a:pPr>
+              <a:lnSpc>
+                <a:spcPct val="100000"/>
+              </a:lnSpc>
+              <a:spcBef>
+                <a:spcPts val="0"/>
+              </a:spcBef>
+            </a:pPr>
+            <a:r>
+              <a:rPr lang="ru-RU" sz="2200" dirty="0"/>
+              <a:t>Если ВР не соответствуют одной и той же внутренней динамике, модель может изучить закономерность, которая не отражает ни одну из них. </a:t>
+            </a:r>
+          </a:p>
+          <a:p>
+            <a:pPr>
+              <a:lnSpc>
+                <a:spcPct val="100000"/>
+              </a:lnSpc>
+              <a:spcBef>
+                <a:spcPts val="0"/>
+              </a:spcBef>
+            </a:pPr>
+            <a:r>
+              <a:rPr lang="ru-RU" sz="2200" dirty="0"/>
+              <a:t>ВР могут маскировать друг друга, поэтому модель может разную точность для разных моделей. </a:t>
+            </a:r>
+          </a:p>
+        </p:txBody>
+      </p:sp>
+      <p:sp>
+        <p:nvSpPr>
+          <p:cNvPr id="9" name="TextBox 8">
+            <a:extLst>
+              <a:ext uri="{FF2B5EF4-FFF2-40B4-BE49-F238E27FC236}">
+                <a16:creationId xmlns:a16="http://schemas.microsoft.com/office/drawing/2014/main" id="{96C86B62-A632-F341-B87F-A1546472B4B8}"/>
+              </a:ext>
+            </a:extLst>
+          </p:cNvPr>
+          <p:cNvSpPr txBox="1"/>
+          <p:nvPr/>
+        </p:nvSpPr>
+        <p:spPr>
+          <a:xfrm>
+            <a:off x="6416457" y="6492875"/>
+            <a:ext cx="6093912" cy="276999"/>
+          </a:xfrm>
+          <a:prstGeom prst="rect">
+            <a:avLst/>
+          </a:prstGeom>
+          <a:noFill/>
+        </p:spPr>
+        <p:txBody>
+          <a:bodyPr wrap="square">
+            <a:spAutoFit/>
+          </a:bodyPr>
+          <a:lstStyle/>
+          <a:p>
+            <a:r>
+              <a:rPr lang="ru-RU" sz="1200" dirty="0" err="1"/>
+              <a:t>https</a:t>
+            </a:r>
+            <a:r>
+              <a:rPr lang="ru-RU" sz="1200" dirty="0"/>
+              <a:t>://</a:t>
+            </a:r>
+            <a:r>
+              <a:rPr lang="ru-RU" sz="1200" dirty="0" err="1"/>
+              <a:t>cienciadedatos.net</a:t>
+            </a:r>
+            <a:r>
+              <a:rPr lang="ru-RU" sz="1200" dirty="0"/>
+              <a:t>/</a:t>
+            </a:r>
+            <a:r>
+              <a:rPr lang="ru-RU" sz="1200" dirty="0" err="1"/>
+              <a:t>documentos</a:t>
+            </a:r>
+            <a:r>
+              <a:rPr lang="ru-RU" sz="1200" dirty="0"/>
+              <a:t>/py44-multi-series-forecasting-skforecast</a:t>
             </a:r>
           </a:p>
         </p:txBody>
@@ -7094,8 +9605,1243 @@
 </p:sld>
 </file>
 
-<file path=ppt/slides/slide16.xml><?xml version="1.0" encoding="utf-8"?>
+<file path=ppt/slides/slide18.xml><?xml version="1.0" encoding="utf-8"?>
 <p:sld xmlns:a="http://schemas.openxmlformats.org/drawingml/2006/main" xmlns:r="http://schemas.openxmlformats.org/officeDocument/2006/relationships" xmlns:p="http://schemas.openxmlformats.org/presentationml/2006/main">
+  <p:cSld>
+    <p:spTree>
+      <p:nvGrpSpPr>
+        <p:cNvPr id="1" name="">
+          <a:extLst>
+            <a:ext uri="{FF2B5EF4-FFF2-40B4-BE49-F238E27FC236}">
+              <a16:creationId xmlns:a16="http://schemas.microsoft.com/office/drawing/2014/main" id="{C6ECDE8D-51B4-38BC-18EA-9CF99CF5CA3F}"/>
+            </a:ext>
+          </a:extLst>
+        </p:cNvPr>
+        <p:cNvGrpSpPr/>
+        <p:nvPr/>
+      </p:nvGrpSpPr>
+      <p:grpSpPr>
+        <a:xfrm>
+          <a:off x="0" y="0"/>
+          <a:ext cx="0" cy="0"/>
+          <a:chOff x="0" y="0"/>
+          <a:chExt cx="0" cy="0"/>
+        </a:xfrm>
+      </p:grpSpPr>
+      <p:sp>
+        <p:nvSpPr>
+          <p:cNvPr id="2" name="Заголовок 1">
+            <a:extLst>
+              <a:ext uri="{FF2B5EF4-FFF2-40B4-BE49-F238E27FC236}">
+                <a16:creationId xmlns:a16="http://schemas.microsoft.com/office/drawing/2014/main" id="{D4797A1F-0AE1-8AB3-30E6-F034904CE91B}"/>
+              </a:ext>
+            </a:extLst>
+          </p:cNvPr>
+          <p:cNvSpPr>
+            <a:spLocks noGrp="1"/>
+          </p:cNvSpPr>
+          <p:nvPr>
+            <p:ph type="title"/>
+          </p:nvPr>
+        </p:nvSpPr>
+        <p:spPr>
+          <a:xfrm>
+            <a:off x="325677" y="365125"/>
+            <a:ext cx="11028123" cy="611905"/>
+          </a:xfrm>
+        </p:spPr>
+        <p:txBody>
+          <a:bodyPr>
+            <a:normAutofit fontScale="90000"/>
+          </a:bodyPr>
+          <a:lstStyle/>
+          <a:p>
+            <a:pPr algn="ctr"/>
+            <a:r>
+              <a:rPr lang="ru-RU" dirty="0"/>
+              <a:t>Использование МО в МВР</a:t>
+            </a:r>
+          </a:p>
+        </p:txBody>
+      </p:sp>
+      <p:pic>
+        <p:nvPicPr>
+          <p:cNvPr id="7170" name="Picture 2" descr="No description has been provided for this image">
+            <a:extLst>
+              <a:ext uri="{FF2B5EF4-FFF2-40B4-BE49-F238E27FC236}">
+                <a16:creationId xmlns:a16="http://schemas.microsoft.com/office/drawing/2014/main" id="{0E5E7C2C-4768-BB16-3E5C-1DD0E64C04D1}"/>
+              </a:ext>
+            </a:extLst>
+          </p:cNvPr>
+          <p:cNvPicPr>
+            <a:picLocks noChangeAspect="1" noChangeArrowheads="1"/>
+          </p:cNvPicPr>
+          <p:nvPr/>
+        </p:nvPicPr>
+        <p:blipFill>
+          <a:blip r:embed="rId3">
+            <a:extLst>
+              <a:ext uri="{28A0092B-C50C-407E-A947-70E740481C1C}">
+                <a14:useLocalDpi xmlns:a14="http://schemas.microsoft.com/office/drawing/2010/main" val="0"/>
+              </a:ext>
+            </a:extLst>
+          </a:blip>
+          <a:srcRect/>
+          <a:stretch>
+            <a:fillRect/>
+          </a:stretch>
+        </p:blipFill>
+        <p:spPr bwMode="auto">
+          <a:xfrm>
+            <a:off x="294889" y="3581444"/>
+            <a:ext cx="7827588" cy="2999557"/>
+          </a:xfrm>
+          <a:prstGeom prst="rect">
+            <a:avLst/>
+          </a:prstGeom>
+          <a:noFill/>
+          <a:extLst>
+            <a:ext uri="{909E8E84-426E-40DD-AFC4-6F175D3DCCD1}">
+              <a14:hiddenFill xmlns:a14="http://schemas.microsoft.com/office/drawing/2010/main">
+                <a:solidFill>
+                  <a:srgbClr val="FFFFFF"/>
+                </a:solidFill>
+              </a14:hiddenFill>
+            </a:ext>
+          </a:extLst>
+        </p:spPr>
+      </p:pic>
+      <p:pic>
+        <p:nvPicPr>
+          <p:cNvPr id="7172" name="Picture 4" descr="No description has been provided for this image">
+            <a:extLst>
+              <a:ext uri="{FF2B5EF4-FFF2-40B4-BE49-F238E27FC236}">
+                <a16:creationId xmlns:a16="http://schemas.microsoft.com/office/drawing/2014/main" id="{64B845F8-1452-975A-2225-955872615B93}"/>
+              </a:ext>
+            </a:extLst>
+          </p:cNvPr>
+          <p:cNvPicPr>
+            <a:picLocks noChangeAspect="1" noChangeArrowheads="1"/>
+          </p:cNvPicPr>
+          <p:nvPr/>
+        </p:nvPicPr>
+        <p:blipFill rotWithShape="1">
+          <a:blip r:embed="rId4">
+            <a:extLst>
+              <a:ext uri="{28A0092B-C50C-407E-A947-70E740481C1C}">
+                <a14:useLocalDpi xmlns:a14="http://schemas.microsoft.com/office/drawing/2010/main" val="0"/>
+              </a:ext>
+            </a:extLst>
+          </a:blip>
+          <a:srcRect r="43605" b="55251"/>
+          <a:stretch>
+            <a:fillRect/>
+          </a:stretch>
+        </p:blipFill>
+        <p:spPr bwMode="auto">
+          <a:xfrm>
+            <a:off x="8331553" y="2141951"/>
+            <a:ext cx="3774634" cy="2365443"/>
+          </a:xfrm>
+          <a:prstGeom prst="rect">
+            <a:avLst/>
+          </a:prstGeom>
+          <a:noFill/>
+          <a:extLst>
+            <a:ext uri="{909E8E84-426E-40DD-AFC4-6F175D3DCCD1}">
+              <a14:hiddenFill xmlns:a14="http://schemas.microsoft.com/office/drawing/2010/main">
+                <a:solidFill>
+                  <a:srgbClr val="FFFFFF"/>
+                </a:solidFill>
+              </a14:hiddenFill>
+            </a:ext>
+          </a:extLst>
+        </p:spPr>
+      </p:pic>
+      <p:pic>
+        <p:nvPicPr>
+          <p:cNvPr id="4" name="Picture 4" descr="No description has been provided for this image">
+            <a:extLst>
+              <a:ext uri="{FF2B5EF4-FFF2-40B4-BE49-F238E27FC236}">
+                <a16:creationId xmlns:a16="http://schemas.microsoft.com/office/drawing/2014/main" id="{FE3EFD21-7CDD-3D5F-FB1F-A80930370F1F}"/>
+              </a:ext>
+            </a:extLst>
+          </p:cNvPr>
+          <p:cNvPicPr>
+            <a:picLocks noChangeAspect="1" noChangeArrowheads="1"/>
+          </p:cNvPicPr>
+          <p:nvPr/>
+        </p:nvPicPr>
+        <p:blipFill rotWithShape="1">
+          <a:blip r:embed="rId4">
+            <a:extLst>
+              <a:ext uri="{28A0092B-C50C-407E-A947-70E740481C1C}">
+                <a14:useLocalDpi xmlns:a14="http://schemas.microsoft.com/office/drawing/2010/main" val="0"/>
+              </a:ext>
+            </a:extLst>
+          </a:blip>
+          <a:srcRect l="527" t="53346" r="43078" b="1905"/>
+          <a:stretch>
+            <a:fillRect/>
+          </a:stretch>
+        </p:blipFill>
+        <p:spPr bwMode="auto">
+          <a:xfrm>
+            <a:off x="8567803" y="4577264"/>
+            <a:ext cx="3418452" cy="2142235"/>
+          </a:xfrm>
+          <a:prstGeom prst="rect">
+            <a:avLst/>
+          </a:prstGeom>
+          <a:noFill/>
+          <a:extLst>
+            <a:ext uri="{909E8E84-426E-40DD-AFC4-6F175D3DCCD1}">
+              <a14:hiddenFill xmlns:a14="http://schemas.microsoft.com/office/drawing/2010/main">
+                <a:solidFill>
+                  <a:srgbClr val="FFFFFF"/>
+                </a:solidFill>
+              </a14:hiddenFill>
+            </a:ext>
+          </a:extLst>
+        </p:spPr>
+      </p:pic>
+      <p:sp>
+        <p:nvSpPr>
+          <p:cNvPr id="6" name="TextBox 5">
+            <a:extLst>
+              <a:ext uri="{FF2B5EF4-FFF2-40B4-BE49-F238E27FC236}">
+                <a16:creationId xmlns:a16="http://schemas.microsoft.com/office/drawing/2014/main" id="{F4B73EB9-A521-0359-F076-60BA61308128}"/>
+              </a:ext>
+            </a:extLst>
+          </p:cNvPr>
+          <p:cNvSpPr txBox="1"/>
+          <p:nvPr/>
+        </p:nvSpPr>
+        <p:spPr>
+          <a:xfrm>
+            <a:off x="917532" y="6581001"/>
+            <a:ext cx="6093912" cy="276999"/>
+          </a:xfrm>
+          <a:prstGeom prst="rect">
+            <a:avLst/>
+          </a:prstGeom>
+          <a:noFill/>
+        </p:spPr>
+        <p:txBody>
+          <a:bodyPr wrap="square">
+            <a:spAutoFit/>
+          </a:bodyPr>
+          <a:lstStyle/>
+          <a:p>
+            <a:r>
+              <a:rPr lang="ru-RU" sz="1200" dirty="0" err="1"/>
+              <a:t>https</a:t>
+            </a:r>
+            <a:r>
+              <a:rPr lang="ru-RU" sz="1200" dirty="0"/>
+              <a:t>://</a:t>
+            </a:r>
+            <a:r>
+              <a:rPr lang="ru-RU" sz="1200" dirty="0" err="1"/>
+              <a:t>skforecast.org</a:t>
+            </a:r>
+            <a:r>
+              <a:rPr lang="ru-RU" sz="1200" dirty="0"/>
+              <a:t>/0.16.0/</a:t>
+            </a:r>
+            <a:r>
+              <a:rPr lang="ru-RU" sz="1200" dirty="0" err="1"/>
+              <a:t>user_guides</a:t>
+            </a:r>
+            <a:r>
+              <a:rPr lang="ru-RU" sz="1200" dirty="0"/>
+              <a:t>/</a:t>
+            </a:r>
+            <a:r>
+              <a:rPr lang="ru-RU" sz="1200" dirty="0" err="1"/>
+              <a:t>independent-multi-time-series-forecasting.html</a:t>
+            </a:r>
+            <a:endParaRPr lang="ru-RU" sz="1200" dirty="0"/>
+          </a:p>
+        </p:txBody>
+      </p:sp>
+      <p:sp>
+        <p:nvSpPr>
+          <p:cNvPr id="3" name="Объект 2">
+            <a:extLst>
+              <a:ext uri="{FF2B5EF4-FFF2-40B4-BE49-F238E27FC236}">
+                <a16:creationId xmlns:a16="http://schemas.microsoft.com/office/drawing/2014/main" id="{7C0D6A77-9C3F-3FB9-8C93-86B1F9EA5E41}"/>
+              </a:ext>
+            </a:extLst>
+          </p:cNvPr>
+          <p:cNvSpPr>
+            <a:spLocks noGrp="1"/>
+          </p:cNvSpPr>
+          <p:nvPr>
+            <p:ph idx="1"/>
+          </p:nvPr>
+        </p:nvSpPr>
+        <p:spPr>
+          <a:xfrm>
+            <a:off x="294889" y="977029"/>
+            <a:ext cx="11571434" cy="2361157"/>
+          </a:xfrm>
+        </p:spPr>
+        <p:txBody>
+          <a:bodyPr>
+            <a:normAutofit/>
+          </a:bodyPr>
+          <a:lstStyle/>
+          <a:p>
+            <a:pPr marL="0" indent="0">
+              <a:lnSpc>
+                <a:spcPct val="100000"/>
+              </a:lnSpc>
+              <a:spcBef>
+                <a:spcPts val="0"/>
+              </a:spcBef>
+              <a:buNone/>
+            </a:pPr>
+            <a:r>
+              <a:rPr lang="ru-RU" sz="2200" dirty="0"/>
+              <a:t>Независимое </a:t>
+            </a:r>
+            <a:r>
+              <a:rPr lang="en-US" sz="2200" dirty="0"/>
+              <a:t>ML </a:t>
+            </a:r>
+            <a:r>
+              <a:rPr lang="ru-RU" sz="2200" dirty="0"/>
+              <a:t>моделирование - Экономия на числе моделей</a:t>
+            </a:r>
+          </a:p>
+          <a:p>
+            <a:pPr marL="0" indent="0">
+              <a:lnSpc>
+                <a:spcPct val="100000"/>
+              </a:lnSpc>
+              <a:spcBef>
+                <a:spcPts val="0"/>
+              </a:spcBef>
+              <a:buNone/>
+            </a:pPr>
+            <a:endParaRPr lang="ru-RU" sz="2200" dirty="0"/>
+          </a:p>
+          <a:p>
+            <a:pPr>
+              <a:lnSpc>
+                <a:spcPct val="100000"/>
+              </a:lnSpc>
+              <a:spcBef>
+                <a:spcPts val="0"/>
+              </a:spcBef>
+            </a:pPr>
+            <a:r>
+              <a:rPr lang="ru-RU" sz="2200" dirty="0"/>
+              <a:t>Все ВР предсказываются одновременно и независимо </a:t>
+            </a:r>
+          </a:p>
+          <a:p>
+            <a:pPr>
+              <a:lnSpc>
+                <a:spcPct val="100000"/>
+              </a:lnSpc>
+              <a:spcBef>
+                <a:spcPts val="0"/>
+              </a:spcBef>
+            </a:pPr>
+            <a:r>
+              <a:rPr lang="ru-RU" sz="2200" dirty="0"/>
+              <a:t>Используется одна модель с разными вход</a:t>
+            </a:r>
+            <a:r>
+              <a:rPr lang="en-US" sz="2200" dirty="0" err="1"/>
+              <a:t>а</a:t>
+            </a:r>
+            <a:r>
+              <a:rPr lang="ru-RU" sz="2200" dirty="0"/>
+              <a:t>ми</a:t>
+            </a:r>
+          </a:p>
+        </p:txBody>
+      </p:sp>
+    </p:spTree>
+    <p:extLst>
+      <p:ext uri="{BB962C8B-B14F-4D97-AF65-F5344CB8AC3E}">
+        <p14:creationId xmlns:p14="http://schemas.microsoft.com/office/powerpoint/2010/main" val="1718813876"/>
+      </p:ext>
+    </p:extLst>
+  </p:cSld>
+  <p:clrMapOvr>
+    <a:masterClrMapping/>
+  </p:clrMapOvr>
+</p:sld>
+</file>
+
+<file path=ppt/slides/slide19.xml><?xml version="1.0" encoding="utf-8"?>
+<p:sld xmlns:a="http://schemas.openxmlformats.org/drawingml/2006/main" xmlns:r="http://schemas.openxmlformats.org/officeDocument/2006/relationships" xmlns:p="http://schemas.openxmlformats.org/presentationml/2006/main">
+  <p:cSld>
+    <p:spTree>
+      <p:nvGrpSpPr>
+        <p:cNvPr id="1" name="">
+          <a:extLst>
+            <a:ext uri="{FF2B5EF4-FFF2-40B4-BE49-F238E27FC236}">
+              <a16:creationId xmlns:a16="http://schemas.microsoft.com/office/drawing/2014/main" id="{0388E07F-4A80-3AAA-DD72-D48DC70E541C}"/>
+            </a:ext>
+          </a:extLst>
+        </p:cNvPr>
+        <p:cNvGrpSpPr/>
+        <p:nvPr/>
+      </p:nvGrpSpPr>
+      <p:grpSpPr>
+        <a:xfrm>
+          <a:off x="0" y="0"/>
+          <a:ext cx="0" cy="0"/>
+          <a:chOff x="0" y="0"/>
+          <a:chExt cx="0" cy="0"/>
+        </a:xfrm>
+      </p:grpSpPr>
+      <p:sp>
+        <p:nvSpPr>
+          <p:cNvPr id="2" name="Заголовок 1">
+            <a:extLst>
+              <a:ext uri="{FF2B5EF4-FFF2-40B4-BE49-F238E27FC236}">
+                <a16:creationId xmlns:a16="http://schemas.microsoft.com/office/drawing/2014/main" id="{353A7EB9-BF18-C31D-8BB8-100F3B722C77}"/>
+              </a:ext>
+            </a:extLst>
+          </p:cNvPr>
+          <p:cNvSpPr>
+            <a:spLocks noGrp="1"/>
+          </p:cNvSpPr>
+          <p:nvPr>
+            <p:ph type="title"/>
+          </p:nvPr>
+        </p:nvSpPr>
+        <p:spPr>
+          <a:xfrm>
+            <a:off x="325677" y="365125"/>
+            <a:ext cx="11028123" cy="611905"/>
+          </a:xfrm>
+        </p:spPr>
+        <p:txBody>
+          <a:bodyPr>
+            <a:normAutofit fontScale="90000"/>
+          </a:bodyPr>
+          <a:lstStyle/>
+          <a:p>
+            <a:pPr algn="ctr"/>
+            <a:r>
+              <a:rPr lang="ru-RU" dirty="0"/>
+              <a:t>Использование МО в МВР</a:t>
+            </a:r>
+          </a:p>
+        </p:txBody>
+      </p:sp>
+      <p:sp>
+        <p:nvSpPr>
+          <p:cNvPr id="6" name="TextBox 5">
+            <a:extLst>
+              <a:ext uri="{FF2B5EF4-FFF2-40B4-BE49-F238E27FC236}">
+                <a16:creationId xmlns:a16="http://schemas.microsoft.com/office/drawing/2014/main" id="{34718CDC-A096-2FD4-15B5-5DF511104DFC}"/>
+              </a:ext>
+            </a:extLst>
+          </p:cNvPr>
+          <p:cNvSpPr txBox="1"/>
+          <p:nvPr/>
+        </p:nvSpPr>
+        <p:spPr>
+          <a:xfrm>
+            <a:off x="917532" y="6581001"/>
+            <a:ext cx="8113734" cy="276999"/>
+          </a:xfrm>
+          <a:prstGeom prst="rect">
+            <a:avLst/>
+          </a:prstGeom>
+          <a:noFill/>
+        </p:spPr>
+        <p:txBody>
+          <a:bodyPr wrap="square">
+            <a:spAutoFit/>
+          </a:bodyPr>
+          <a:lstStyle/>
+          <a:p>
+            <a:r>
+              <a:rPr lang="ru-RU" sz="1200" dirty="0" err="1"/>
+              <a:t>https</a:t>
+            </a:r>
+            <a:r>
+              <a:rPr lang="ru-RU" sz="1200" dirty="0"/>
+              <a:t>://</a:t>
+            </a:r>
+            <a:r>
+              <a:rPr lang="ru-RU" sz="1200" dirty="0" err="1"/>
+              <a:t>skforecast.org</a:t>
+            </a:r>
+            <a:r>
+              <a:rPr lang="ru-RU" sz="1200" dirty="0"/>
+              <a:t>/0.16.0/</a:t>
+            </a:r>
+            <a:r>
+              <a:rPr lang="ru-RU" sz="1200" dirty="0" err="1"/>
+              <a:t>user_guides</a:t>
+            </a:r>
+            <a:r>
+              <a:rPr lang="ru-RU" sz="1200" dirty="0"/>
+              <a:t>/</a:t>
+            </a:r>
+            <a:r>
+              <a:rPr lang="en" sz="1200" dirty="0"/>
+              <a:t>dependent-multi-series-multivariate-forecasting</a:t>
+            </a:r>
+            <a:r>
+              <a:rPr lang="ru-RU" sz="1200" dirty="0"/>
+              <a:t>.</a:t>
+            </a:r>
+            <a:r>
+              <a:rPr lang="ru-RU" sz="1200" dirty="0" err="1"/>
+              <a:t>html</a:t>
+            </a:r>
+            <a:endParaRPr lang="ru-RU" sz="1200" dirty="0"/>
+          </a:p>
+        </p:txBody>
+      </p:sp>
+      <p:pic>
+        <p:nvPicPr>
+          <p:cNvPr id="7174" name="Picture 6" descr="No description has been provided for this image">
+            <a:extLst>
+              <a:ext uri="{FF2B5EF4-FFF2-40B4-BE49-F238E27FC236}">
+                <a16:creationId xmlns:a16="http://schemas.microsoft.com/office/drawing/2014/main" id="{57BFD057-BE3B-DAD3-9AE6-E8644B850F83}"/>
+              </a:ext>
+            </a:extLst>
+          </p:cNvPr>
+          <p:cNvPicPr>
+            <a:picLocks noChangeAspect="1" noChangeArrowheads="1"/>
+          </p:cNvPicPr>
+          <p:nvPr/>
+        </p:nvPicPr>
+        <p:blipFill>
+          <a:blip r:embed="rId2">
+            <a:extLst>
+              <a:ext uri="{28A0092B-C50C-407E-A947-70E740481C1C}">
+                <a14:useLocalDpi xmlns:a14="http://schemas.microsoft.com/office/drawing/2010/main" val="0"/>
+              </a:ext>
+            </a:extLst>
+          </a:blip>
+          <a:srcRect/>
+          <a:stretch>
+            <a:fillRect/>
+          </a:stretch>
+        </p:blipFill>
+        <p:spPr bwMode="auto">
+          <a:xfrm>
+            <a:off x="838200" y="2967589"/>
+            <a:ext cx="7202466" cy="3290813"/>
+          </a:xfrm>
+          <a:prstGeom prst="rect">
+            <a:avLst/>
+          </a:prstGeom>
+          <a:noFill/>
+          <a:extLst>
+            <a:ext uri="{909E8E84-426E-40DD-AFC4-6F175D3DCCD1}">
+              <a14:hiddenFill xmlns:a14="http://schemas.microsoft.com/office/drawing/2010/main">
+                <a:solidFill>
+                  <a:srgbClr val="FFFFFF"/>
+                </a:solidFill>
+              </a14:hiddenFill>
+            </a:ext>
+          </a:extLst>
+        </p:spPr>
+      </p:pic>
+      <p:sp>
+        <p:nvSpPr>
+          <p:cNvPr id="7" name="Объект 2">
+            <a:extLst>
+              <a:ext uri="{FF2B5EF4-FFF2-40B4-BE49-F238E27FC236}">
+                <a16:creationId xmlns:a16="http://schemas.microsoft.com/office/drawing/2014/main" id="{758AC149-2662-0B1C-4DBF-870DAB089E76}"/>
+              </a:ext>
+            </a:extLst>
+          </p:cNvPr>
+          <p:cNvSpPr txBox="1">
+            <a:spLocks/>
+          </p:cNvSpPr>
+          <p:nvPr/>
+        </p:nvSpPr>
+        <p:spPr>
+          <a:xfrm>
+            <a:off x="6070728" y="1002079"/>
+            <a:ext cx="6035459" cy="5515845"/>
+          </a:xfrm>
+          <a:prstGeom prst="rect">
+            <a:avLst/>
+          </a:prstGeom>
+        </p:spPr>
+        <p:txBody>
+          <a:bodyPr vert="horz" lIns="91440" tIns="45720" rIns="91440" bIns="45720" rtlCol="0">
+            <a:normAutofit/>
+          </a:bodyPr>
+          <a:lstStyle>
+            <a:lvl1pPr marL="228600" indent="-228600" algn="l" defTabSz="914400" rtl="0" eaLnBrk="1" latinLnBrk="0" hangingPunct="1">
+              <a:lnSpc>
+                <a:spcPct val="90000"/>
+              </a:lnSpc>
+              <a:spcBef>
+                <a:spcPts val="1000"/>
+              </a:spcBef>
+              <a:buFont typeface="Arial" panose="020B0604020202020204" pitchFamily="34" charset="0"/>
+              <a:buChar char="•"/>
+              <a:defRPr sz="2800" kern="1200">
+                <a:solidFill>
+                  <a:schemeClr val="tx1"/>
+                </a:solidFill>
+                <a:latin typeface="+mn-lt"/>
+                <a:ea typeface="+mn-ea"/>
+                <a:cs typeface="+mn-cs"/>
+              </a:defRPr>
+            </a:lvl1pPr>
+            <a:lvl2pPr marL="685800" indent="-228600" algn="l" defTabSz="914400" rtl="0" eaLnBrk="1" latinLnBrk="0" hangingPunct="1">
+              <a:lnSpc>
+                <a:spcPct val="90000"/>
+              </a:lnSpc>
+              <a:spcBef>
+                <a:spcPts val="500"/>
+              </a:spcBef>
+              <a:buFont typeface="Arial" panose="020B0604020202020204" pitchFamily="34" charset="0"/>
+              <a:buChar char="•"/>
+              <a:defRPr sz="2400" kern="1200">
+                <a:solidFill>
+                  <a:schemeClr val="tx1"/>
+                </a:solidFill>
+                <a:latin typeface="+mn-lt"/>
+                <a:ea typeface="+mn-ea"/>
+                <a:cs typeface="+mn-cs"/>
+              </a:defRPr>
+            </a:lvl2pPr>
+            <a:lvl3pPr marL="1143000" indent="-228600" algn="l" defTabSz="914400" rtl="0" eaLnBrk="1" latinLnBrk="0" hangingPunct="1">
+              <a:lnSpc>
+                <a:spcPct val="90000"/>
+              </a:lnSpc>
+              <a:spcBef>
+                <a:spcPts val="500"/>
+              </a:spcBef>
+              <a:buFont typeface="Arial" panose="020B0604020202020204" pitchFamily="34" charset="0"/>
+              <a:buChar char="•"/>
+              <a:defRPr sz="2000" kern="1200">
+                <a:solidFill>
+                  <a:schemeClr val="tx1"/>
+                </a:solidFill>
+                <a:latin typeface="+mn-lt"/>
+                <a:ea typeface="+mn-ea"/>
+                <a:cs typeface="+mn-cs"/>
+              </a:defRPr>
+            </a:lvl3pPr>
+            <a:lvl4pPr marL="1600200" indent="-228600" algn="l" defTabSz="914400" rtl="0" eaLnBrk="1" latinLnBrk="0" hangingPunct="1">
+              <a:lnSpc>
+                <a:spcPct val="90000"/>
+              </a:lnSpc>
+              <a:spcBef>
+                <a:spcPts val="500"/>
+              </a:spcBef>
+              <a:buFont typeface="Arial" panose="020B0604020202020204" pitchFamily="34" charset="0"/>
+              <a:buChar char="•"/>
+              <a:defRPr sz="1800" kern="1200">
+                <a:solidFill>
+                  <a:schemeClr val="tx1"/>
+                </a:solidFill>
+                <a:latin typeface="+mn-lt"/>
+                <a:ea typeface="+mn-ea"/>
+                <a:cs typeface="+mn-cs"/>
+              </a:defRPr>
+            </a:lvl4pPr>
+            <a:lvl5pPr marL="2057400" indent="-228600" algn="l" defTabSz="914400" rtl="0" eaLnBrk="1" latinLnBrk="0" hangingPunct="1">
+              <a:lnSpc>
+                <a:spcPct val="90000"/>
+              </a:lnSpc>
+              <a:spcBef>
+                <a:spcPts val="500"/>
+              </a:spcBef>
+              <a:buFont typeface="Arial" panose="020B0604020202020204" pitchFamily="34" charset="0"/>
+              <a:buChar char="•"/>
+              <a:defRPr sz="1800" kern="1200">
+                <a:solidFill>
+                  <a:schemeClr val="tx1"/>
+                </a:solidFill>
+                <a:latin typeface="+mn-lt"/>
+                <a:ea typeface="+mn-ea"/>
+                <a:cs typeface="+mn-cs"/>
+              </a:defRPr>
+            </a:lvl5pPr>
+            <a:lvl6pPr marL="2514600" indent="-228600" algn="l" defTabSz="914400" rtl="0" eaLnBrk="1" latinLnBrk="0" hangingPunct="1">
+              <a:lnSpc>
+                <a:spcPct val="90000"/>
+              </a:lnSpc>
+              <a:spcBef>
+                <a:spcPts val="500"/>
+              </a:spcBef>
+              <a:buFont typeface="Arial" panose="020B0604020202020204" pitchFamily="34" charset="0"/>
+              <a:buChar char="•"/>
+              <a:defRPr sz="1800" kern="1200">
+                <a:solidFill>
+                  <a:schemeClr val="tx1"/>
+                </a:solidFill>
+                <a:latin typeface="+mn-lt"/>
+                <a:ea typeface="+mn-ea"/>
+                <a:cs typeface="+mn-cs"/>
+              </a:defRPr>
+            </a:lvl6pPr>
+            <a:lvl7pPr marL="2971800" indent="-228600" algn="l" defTabSz="914400" rtl="0" eaLnBrk="1" latinLnBrk="0" hangingPunct="1">
+              <a:lnSpc>
+                <a:spcPct val="90000"/>
+              </a:lnSpc>
+              <a:spcBef>
+                <a:spcPts val="500"/>
+              </a:spcBef>
+              <a:buFont typeface="Arial" panose="020B0604020202020204" pitchFamily="34" charset="0"/>
+              <a:buChar char="•"/>
+              <a:defRPr sz="1800" kern="1200">
+                <a:solidFill>
+                  <a:schemeClr val="tx1"/>
+                </a:solidFill>
+                <a:latin typeface="+mn-lt"/>
+                <a:ea typeface="+mn-ea"/>
+                <a:cs typeface="+mn-cs"/>
+              </a:defRPr>
+            </a:lvl7pPr>
+            <a:lvl8pPr marL="3429000" indent="-228600" algn="l" defTabSz="914400" rtl="0" eaLnBrk="1" latinLnBrk="0" hangingPunct="1">
+              <a:lnSpc>
+                <a:spcPct val="90000"/>
+              </a:lnSpc>
+              <a:spcBef>
+                <a:spcPts val="500"/>
+              </a:spcBef>
+              <a:buFont typeface="Arial" panose="020B0604020202020204" pitchFamily="34" charset="0"/>
+              <a:buChar char="•"/>
+              <a:defRPr sz="1800" kern="1200">
+                <a:solidFill>
+                  <a:schemeClr val="tx1"/>
+                </a:solidFill>
+                <a:latin typeface="+mn-lt"/>
+                <a:ea typeface="+mn-ea"/>
+                <a:cs typeface="+mn-cs"/>
+              </a:defRPr>
+            </a:lvl8pPr>
+            <a:lvl9pPr marL="3886200" indent="-228600" algn="l" defTabSz="914400" rtl="0" eaLnBrk="1" latinLnBrk="0" hangingPunct="1">
+              <a:lnSpc>
+                <a:spcPct val="90000"/>
+              </a:lnSpc>
+              <a:spcBef>
+                <a:spcPts val="500"/>
+              </a:spcBef>
+              <a:buFont typeface="Arial" panose="020B0604020202020204" pitchFamily="34" charset="0"/>
+              <a:buChar char="•"/>
+              <a:defRPr sz="1800" kern="1200">
+                <a:solidFill>
+                  <a:schemeClr val="tx1"/>
+                </a:solidFill>
+                <a:latin typeface="+mn-lt"/>
+                <a:ea typeface="+mn-ea"/>
+                <a:cs typeface="+mn-cs"/>
+              </a:defRPr>
+            </a:lvl9pPr>
+          </a:lstStyle>
+          <a:p>
+            <a:pPr marL="0" indent="0">
+              <a:lnSpc>
+                <a:spcPct val="100000"/>
+              </a:lnSpc>
+              <a:spcBef>
+                <a:spcPts val="0"/>
+              </a:spcBef>
+              <a:buFont typeface="Arial" panose="020B0604020202020204" pitchFamily="34" charset="0"/>
+              <a:buNone/>
+            </a:pPr>
+            <a:endParaRPr lang="ru-RU" sz="2400" dirty="0"/>
+          </a:p>
+        </p:txBody>
+      </p:sp>
+      <p:sp>
+        <p:nvSpPr>
+          <p:cNvPr id="8" name="Объект 7">
+            <a:extLst>
+              <a:ext uri="{FF2B5EF4-FFF2-40B4-BE49-F238E27FC236}">
+                <a16:creationId xmlns:a16="http://schemas.microsoft.com/office/drawing/2014/main" id="{A72B7C35-8818-C2B8-3175-469FA347024F}"/>
+              </a:ext>
+            </a:extLst>
+          </p:cNvPr>
+          <p:cNvSpPr>
+            <a:spLocks noGrp="1"/>
+          </p:cNvSpPr>
+          <p:nvPr>
+            <p:ph idx="1"/>
+          </p:nvPr>
+        </p:nvSpPr>
+        <p:spPr>
+          <a:xfrm>
+            <a:off x="325677" y="977030"/>
+            <a:ext cx="11028123" cy="2155895"/>
+          </a:xfrm>
+        </p:spPr>
+        <p:txBody>
+          <a:bodyPr>
+            <a:normAutofit fontScale="92500" lnSpcReduction="20000"/>
+          </a:bodyPr>
+          <a:lstStyle/>
+          <a:p>
+            <a:pPr marL="0" indent="0">
+              <a:lnSpc>
+                <a:spcPct val="100000"/>
+              </a:lnSpc>
+              <a:spcBef>
+                <a:spcPts val="0"/>
+              </a:spcBef>
+              <a:buNone/>
+            </a:pPr>
+            <a:r>
+              <a:rPr lang="ru-RU" dirty="0"/>
+              <a:t>Зависимое моделирование</a:t>
+            </a:r>
+          </a:p>
+          <a:p>
+            <a:pPr>
+              <a:lnSpc>
+                <a:spcPct val="100000"/>
+              </a:lnSpc>
+              <a:spcBef>
+                <a:spcPts val="0"/>
+              </a:spcBef>
+            </a:pPr>
+            <a:r>
+              <a:rPr lang="ru-RU" dirty="0"/>
+              <a:t>Результат предсказания одной переменной – вход другой</a:t>
+            </a:r>
+          </a:p>
+          <a:p>
+            <a:pPr>
+              <a:lnSpc>
+                <a:spcPct val="100000"/>
+              </a:lnSpc>
+              <a:spcBef>
+                <a:spcPts val="0"/>
+              </a:spcBef>
+            </a:pPr>
+            <a:r>
+              <a:rPr lang="ru-RU" dirty="0"/>
+              <a:t>То есть каждая модель зависит как от предыдущих значений одного ВР так и другого ВР</a:t>
+            </a:r>
+          </a:p>
+          <a:p>
+            <a:pPr lvl="1">
+              <a:lnSpc>
+                <a:spcPct val="100000"/>
+              </a:lnSpc>
+              <a:spcBef>
+                <a:spcPts val="0"/>
+              </a:spcBef>
+            </a:pPr>
+            <a:r>
+              <a:rPr lang="ru-RU" dirty="0"/>
+              <a:t>Возможно потребуются разные модели для разных ВР</a:t>
+            </a:r>
+          </a:p>
+          <a:p>
+            <a:pPr>
+              <a:lnSpc>
+                <a:spcPct val="100000"/>
+              </a:lnSpc>
+              <a:spcBef>
+                <a:spcPts val="0"/>
+              </a:spcBef>
+            </a:pPr>
+            <a:r>
+              <a:rPr lang="ru-RU" dirty="0"/>
+              <a:t>Моделируется связи между переменными</a:t>
+            </a:r>
+          </a:p>
+          <a:p>
+            <a:endParaRPr lang="ru-RU" dirty="0"/>
+          </a:p>
+        </p:txBody>
+      </p:sp>
+    </p:spTree>
+    <p:extLst>
+      <p:ext uri="{BB962C8B-B14F-4D97-AF65-F5344CB8AC3E}">
+        <p14:creationId xmlns:p14="http://schemas.microsoft.com/office/powerpoint/2010/main" val="3466559472"/>
+      </p:ext>
+    </p:extLst>
+  </p:cSld>
+  <p:clrMapOvr>
+    <a:masterClrMapping/>
+  </p:clrMapOvr>
+</p:sld>
+</file>
+
+<file path=ppt/slides/slide2.xml><?xml version="1.0" encoding="utf-8"?>
+<p:sld xmlns:a="http://schemas.openxmlformats.org/drawingml/2006/main" xmlns:r="http://schemas.openxmlformats.org/officeDocument/2006/relationships" xmlns:p="http://schemas.openxmlformats.org/presentationml/2006/main">
+  <p:cSld>
+    <p:spTree>
+      <p:nvGrpSpPr>
+        <p:cNvPr id="1" name=""/>
+        <p:cNvGrpSpPr/>
+        <p:nvPr/>
+      </p:nvGrpSpPr>
+      <p:grpSpPr>
+        <a:xfrm>
+          <a:off x="0" y="0"/>
+          <a:ext cx="0" cy="0"/>
+          <a:chOff x="0" y="0"/>
+          <a:chExt cx="0" cy="0"/>
+        </a:xfrm>
+      </p:grpSpPr>
+      <p:sp>
+        <p:nvSpPr>
+          <p:cNvPr id="2" name="Заголовок 1"/>
+          <p:cNvSpPr>
+            <a:spLocks noGrp="1"/>
+          </p:cNvSpPr>
+          <p:nvPr>
+            <p:ph type="title"/>
+          </p:nvPr>
+        </p:nvSpPr>
+        <p:spPr>
+          <a:xfrm>
+            <a:off x="352425" y="365126"/>
+            <a:ext cx="11001375" cy="539750"/>
+          </a:xfrm>
+        </p:spPr>
+        <p:txBody>
+          <a:bodyPr>
+            <a:normAutofit fontScale="90000"/>
+          </a:bodyPr>
+          <a:lstStyle/>
+          <a:p>
+            <a:r>
+              <a:rPr lang="ru-RU" dirty="0"/>
+              <a:t>Определение многомерных ВР</a:t>
+            </a:r>
+          </a:p>
+        </p:txBody>
+      </p:sp>
+      <p:sp>
+        <p:nvSpPr>
+          <p:cNvPr id="3" name="Объект 2"/>
+          <p:cNvSpPr>
+            <a:spLocks noGrp="1"/>
+          </p:cNvSpPr>
+          <p:nvPr>
+            <p:ph idx="1"/>
+          </p:nvPr>
+        </p:nvSpPr>
+        <p:spPr>
+          <a:xfrm>
+            <a:off x="276224" y="904876"/>
+            <a:ext cx="11534775" cy="2762249"/>
+          </a:xfrm>
+        </p:spPr>
+        <p:txBody>
+          <a:bodyPr/>
+          <a:lstStyle/>
+          <a:p>
+            <a:pPr marL="0" indent="0" eaLnBrk="0" fontAlgn="base" hangingPunct="0">
+              <a:lnSpc>
+                <a:spcPct val="100000"/>
+              </a:lnSpc>
+              <a:spcBef>
+                <a:spcPts val="300"/>
+              </a:spcBef>
+              <a:spcAft>
+                <a:spcPct val="0"/>
+              </a:spcAft>
+              <a:buNone/>
+            </a:pPr>
+            <a:r>
+              <a:rPr lang="ru-RU" sz="2400" b="1" dirty="0"/>
+              <a:t>Многомерный временной ряд</a:t>
+            </a:r>
+            <a:r>
+              <a:rPr lang="en-US" sz="2400" b="1" dirty="0"/>
+              <a:t> </a:t>
+            </a:r>
+            <a:r>
+              <a:rPr lang="ru-RU" sz="2400" b="1" dirty="0"/>
+              <a:t>(МВР)</a:t>
+            </a:r>
+            <a:r>
+              <a:rPr lang="ru-RU" sz="2400" dirty="0"/>
+              <a:t> - это набор из одномерных временных рядов, наблюдаемых одновременно</a:t>
+            </a:r>
+            <a:r>
+              <a:rPr lang="en-US" sz="2400" dirty="0"/>
+              <a:t> </a:t>
+            </a:r>
+            <a:r>
+              <a:rPr lang="ru-RU" sz="2400" b="1" dirty="0"/>
+              <a:t>и имеющих общую информацию</a:t>
+            </a:r>
+            <a:r>
+              <a:rPr lang="en-US" sz="2400" b="1" dirty="0"/>
+              <a:t>!</a:t>
+            </a:r>
+            <a:endParaRPr lang="ru-RU" altLang="ru-RU" sz="2400" b="1" dirty="0"/>
+          </a:p>
+          <a:p>
+            <a:pPr eaLnBrk="0" fontAlgn="base" hangingPunct="0">
+              <a:lnSpc>
+                <a:spcPct val="100000"/>
+              </a:lnSpc>
+              <a:spcBef>
+                <a:spcPts val="600"/>
+              </a:spcBef>
+              <a:spcAft>
+                <a:spcPct val="0"/>
+              </a:spcAft>
+            </a:pPr>
+            <a:r>
+              <a:rPr lang="ru-RU" altLang="ru-RU" sz="2400" dirty="0"/>
+              <a:t>Экономические показатели: ВВП, инфляция, безработица </a:t>
+            </a:r>
+          </a:p>
+          <a:p>
+            <a:pPr eaLnBrk="0" fontAlgn="base" hangingPunct="0">
+              <a:lnSpc>
+                <a:spcPct val="100000"/>
+              </a:lnSpc>
+              <a:spcBef>
+                <a:spcPts val="600"/>
+              </a:spcBef>
+              <a:spcAft>
+                <a:spcPct val="0"/>
+              </a:spcAft>
+            </a:pPr>
+            <a:r>
+              <a:rPr lang="ru-RU" altLang="ru-RU" sz="2400" dirty="0"/>
+              <a:t>Финансовые данные: курсы валют, цены акций, процентные ставки </a:t>
+            </a:r>
+          </a:p>
+          <a:p>
+            <a:pPr eaLnBrk="0" fontAlgn="base" hangingPunct="0">
+              <a:lnSpc>
+                <a:spcPct val="100000"/>
+              </a:lnSpc>
+              <a:spcBef>
+                <a:spcPts val="600"/>
+              </a:spcBef>
+              <a:spcAft>
+                <a:spcPct val="0"/>
+              </a:spcAft>
+            </a:pPr>
+            <a:r>
+              <a:rPr lang="ru-RU" altLang="ru-RU" sz="2400" dirty="0" err="1"/>
+              <a:t>IoT</a:t>
+            </a:r>
+            <a:r>
+              <a:rPr lang="ru-RU" altLang="ru-RU" sz="2400" dirty="0"/>
+              <a:t> сенсоры: температура, влажность, давление, освещенность </a:t>
+            </a:r>
+          </a:p>
+          <a:p>
+            <a:pPr eaLnBrk="0" fontAlgn="base" hangingPunct="0">
+              <a:lnSpc>
+                <a:spcPct val="100000"/>
+              </a:lnSpc>
+              <a:spcBef>
+                <a:spcPts val="600"/>
+              </a:spcBef>
+              <a:spcAft>
+                <a:spcPct val="0"/>
+              </a:spcAft>
+            </a:pPr>
+            <a:r>
+              <a:rPr lang="ru-RU" altLang="ru-RU" sz="2400" dirty="0"/>
+              <a:t>Веб-аналитика: посещения, конверсия, время на сайте </a:t>
+            </a:r>
+            <a:endParaRPr lang="ru-RU" dirty="0"/>
+          </a:p>
+        </p:txBody>
+      </p:sp>
+      <p:sp>
+        <p:nvSpPr>
+          <p:cNvPr id="5" name="AutoShape 2" descr="Example of multivariate time series data. | Download Scientific Diagram"/>
+          <p:cNvSpPr>
+            <a:spLocks noChangeAspect="1" noChangeArrowheads="1"/>
+          </p:cNvSpPr>
+          <p:nvPr/>
+        </p:nvSpPr>
+        <p:spPr bwMode="auto">
+          <a:xfrm>
+            <a:off x="155575" y="-144463"/>
+            <a:ext cx="304800" cy="304801"/>
+          </a:xfrm>
+          <a:prstGeom prst="rect">
+            <a:avLst/>
+          </a:prstGeom>
+          <a:noFill/>
+          <a:extLst>
+            <a:ext uri="{909E8E84-426E-40DD-AFC4-6F175D3DCCD1}">
+              <a14:hiddenFill xmlns:a14="http://schemas.microsoft.com/office/drawing/2010/main">
+                <a:solidFill>
+                  <a:srgbClr val="FFFFFF"/>
+                </a:solidFill>
+              </a14:hiddenFill>
+            </a:ext>
+          </a:extLst>
+        </p:spPr>
+        <p:txBody>
+          <a:bodyPr vert="horz" wrap="square" lIns="91440" tIns="45720" rIns="91440" bIns="45720" numCol="1" anchor="t" anchorCtr="0" compatLnSpc="1">
+            <a:prstTxWarp prst="textNoShape">
+              <a:avLst/>
+            </a:prstTxWarp>
+          </a:bodyPr>
+          <a:lstStyle/>
+          <a:p>
+            <a:endParaRPr lang="ru-RU"/>
+          </a:p>
+        </p:txBody>
+      </p:sp>
+      <p:pic>
+        <p:nvPicPr>
+          <p:cNvPr id="7" name="Рисунок 6"/>
+          <p:cNvPicPr>
+            <a:picLocks noChangeAspect="1"/>
+          </p:cNvPicPr>
+          <p:nvPr/>
+        </p:nvPicPr>
+        <p:blipFill>
+          <a:blip r:embed="rId2"/>
+          <a:stretch>
+            <a:fillRect/>
+          </a:stretch>
+        </p:blipFill>
+        <p:spPr>
+          <a:xfrm>
+            <a:off x="460375" y="3639242"/>
+            <a:ext cx="6738937" cy="3051742"/>
+          </a:xfrm>
+          <a:prstGeom prst="rect">
+            <a:avLst/>
+          </a:prstGeom>
+        </p:spPr>
+      </p:pic>
+      <p:pic>
+        <p:nvPicPr>
+          <p:cNvPr id="5122" name="Picture 2" descr="No description has been provided for this image">
+            <a:extLst>
+              <a:ext uri="{FF2B5EF4-FFF2-40B4-BE49-F238E27FC236}">
+                <a16:creationId xmlns:a16="http://schemas.microsoft.com/office/drawing/2014/main" id="{1039210F-570B-FD20-177C-C930AFEA279B}"/>
+              </a:ext>
+            </a:extLst>
+          </p:cNvPr>
+          <p:cNvPicPr>
+            <a:picLocks noChangeAspect="1" noChangeArrowheads="1"/>
+          </p:cNvPicPr>
+          <p:nvPr/>
+        </p:nvPicPr>
+        <p:blipFill>
+          <a:blip r:embed="rId3">
+            <a:extLst>
+              <a:ext uri="{28A0092B-C50C-407E-A947-70E740481C1C}">
+                <a14:useLocalDpi xmlns:a14="http://schemas.microsoft.com/office/drawing/2010/main" val="0"/>
+              </a:ext>
+            </a:extLst>
+          </a:blip>
+          <a:srcRect/>
+          <a:stretch>
+            <a:fillRect/>
+          </a:stretch>
+        </p:blipFill>
+        <p:spPr bwMode="auto">
+          <a:xfrm>
+            <a:off x="7669309" y="3831235"/>
+            <a:ext cx="3963988" cy="2434028"/>
+          </a:xfrm>
+          <a:prstGeom prst="rect">
+            <a:avLst/>
+          </a:prstGeom>
+          <a:noFill/>
+          <a:extLst>
+            <a:ext uri="{909E8E84-426E-40DD-AFC4-6F175D3DCCD1}">
+              <a14:hiddenFill xmlns:a14="http://schemas.microsoft.com/office/drawing/2010/main">
+                <a:solidFill>
+                  <a:srgbClr val="FFFFFF"/>
+                </a:solidFill>
+              </a14:hiddenFill>
+            </a:ext>
+          </a:extLst>
+        </p:spPr>
+      </p:pic>
+      <p:sp>
+        <p:nvSpPr>
+          <p:cNvPr id="6" name="TextBox 5">
+            <a:extLst>
+              <a:ext uri="{FF2B5EF4-FFF2-40B4-BE49-F238E27FC236}">
+                <a16:creationId xmlns:a16="http://schemas.microsoft.com/office/drawing/2014/main" id="{FCF4246E-233A-D853-C1CB-04A5FF377416}"/>
+              </a:ext>
+            </a:extLst>
+          </p:cNvPr>
+          <p:cNvSpPr txBox="1"/>
+          <p:nvPr/>
+        </p:nvSpPr>
+        <p:spPr>
+          <a:xfrm>
+            <a:off x="6604347" y="6429374"/>
+            <a:ext cx="6093912" cy="261610"/>
+          </a:xfrm>
+          <a:prstGeom prst="rect">
+            <a:avLst/>
+          </a:prstGeom>
+          <a:noFill/>
+        </p:spPr>
+        <p:txBody>
+          <a:bodyPr wrap="square">
+            <a:spAutoFit/>
+          </a:bodyPr>
+          <a:lstStyle/>
+          <a:p>
+            <a:r>
+              <a:rPr lang="ru-RU" sz="1050" dirty="0" err="1"/>
+              <a:t>https</a:t>
+            </a:r>
+            <a:r>
+              <a:rPr lang="ru-RU" sz="1050" dirty="0"/>
+              <a:t>://</a:t>
+            </a:r>
+            <a:r>
+              <a:rPr lang="ru-RU" sz="1050" dirty="0" err="1"/>
+              <a:t>skforecast.org</a:t>
+            </a:r>
+            <a:r>
+              <a:rPr lang="ru-RU" sz="1050" dirty="0"/>
+              <a:t>/0.16.0/</a:t>
+            </a:r>
+            <a:r>
+              <a:rPr lang="ru-RU" sz="1050" dirty="0" err="1"/>
+              <a:t>user_guides</a:t>
+            </a:r>
+            <a:r>
+              <a:rPr lang="ru-RU" sz="1050" dirty="0"/>
+              <a:t>/</a:t>
+            </a:r>
+            <a:r>
+              <a:rPr lang="ru-RU" sz="1050" dirty="0" err="1"/>
+              <a:t>dependent-multi-series-multivariate-forecasting.html</a:t>
+            </a:r>
+            <a:endParaRPr lang="ru-RU" sz="1050" dirty="0"/>
+          </a:p>
+        </p:txBody>
+      </p:sp>
+    </p:spTree>
+    <p:extLst>
+      <p:ext uri="{BB962C8B-B14F-4D97-AF65-F5344CB8AC3E}">
+        <p14:creationId xmlns:p14="http://schemas.microsoft.com/office/powerpoint/2010/main" val="1884299463"/>
+      </p:ext>
+    </p:extLst>
+  </p:cSld>
+  <p:clrMapOvr>
+    <a:masterClrMapping/>
+  </p:clrMapOvr>
+</p:sld>
+</file>
+
+<file path=ppt/slides/slide20.xml><?xml version="1.0" encoding="utf-8"?>
+<p:sld xmlns:a="http://schemas.openxmlformats.org/drawingml/2006/main" xmlns:r="http://schemas.openxmlformats.org/officeDocument/2006/relationships" xmlns:p="http://schemas.openxmlformats.org/presentationml/2006/main" show="0">
   <p:cSld>
     <p:spTree>
       <p:nvGrpSpPr>
@@ -7133,13 +10879,20 @@
             <p:ph type="title"/>
           </p:nvPr>
         </p:nvSpPr>
-        <p:spPr/>
+        <p:spPr>
+          <a:xfrm>
+            <a:off x="275573" y="365126"/>
+            <a:ext cx="11078227" cy="315912"/>
+          </a:xfrm>
+        </p:spPr>
         <p:txBody>
-          <a:bodyPr/>
+          <a:bodyPr>
+            <a:normAutofit fontScale="90000"/>
+          </a:bodyPr>
           <a:lstStyle/>
           <a:p>
             <a:r>
-              <a:rPr lang="ru-RU" dirty="0"/>
+              <a:rPr lang="ru-RU" sz="3200" dirty="0"/>
               <a:t>Особенности анализа сверх больших массивов ВР</a:t>
             </a:r>
           </a:p>
@@ -7161,15 +10914,1371 @@
             <p:ph idx="1"/>
           </p:nvPr>
         </p:nvSpPr>
-        <p:spPr/>
+        <p:spPr>
+          <a:xfrm>
+            <a:off x="162838" y="789140"/>
+            <a:ext cx="11498893" cy="5703734"/>
+          </a:xfrm>
+        </p:spPr>
         <p:txBody>
           <a:bodyPr/>
           <a:lstStyle/>
           <a:p>
-            <a:endParaRPr lang="ru-RU"/>
+            <a:r>
+              <a:rPr lang="ru-RU" sz="1800" dirty="0"/>
+              <a:t>Под сверхбольшими массивами ВР мы понимаем:</a:t>
+            </a:r>
+          </a:p>
+          <a:p>
+            <a:r>
+              <a:rPr lang="ru-RU" sz="1800" dirty="0"/>
+              <a:t>Длительность: </a:t>
+            </a:r>
+            <a:r>
+              <a:rPr lang="en" sz="1800" i="1" dirty="0"/>
+              <a:t>T</a:t>
+            </a:r>
+            <a:r>
+              <a:rPr lang="en" sz="1800" dirty="0"/>
+              <a:t>&gt;106 </a:t>
+            </a:r>
+            <a:r>
+              <a:rPr lang="ru-RU" sz="1800" dirty="0"/>
+              <a:t>наблюдений (например, данные с датчиков с частотой 1 Гц за несколько лет).</a:t>
+            </a:r>
+          </a:p>
+          <a:p>
+            <a:r>
+              <a:rPr lang="ru-RU" sz="1800" dirty="0"/>
+              <a:t>Многомерность(Масштаб): </a:t>
+            </a:r>
+            <a:r>
+              <a:rPr lang="en" sz="1800" i="1" dirty="0"/>
+              <a:t>d</a:t>
+            </a:r>
+            <a:r>
+              <a:rPr lang="en" sz="1800" dirty="0"/>
+              <a:t>&gt;1000 </a:t>
+            </a:r>
+            <a:r>
+              <a:rPr lang="ru-RU" sz="1800" dirty="0"/>
+              <a:t>переменных (тысячи датчиков на производственной линии).</a:t>
+            </a:r>
+          </a:p>
+          <a:p>
+            <a:r>
+              <a:rPr lang="ru-RU" sz="1800" dirty="0"/>
+              <a:t>Горизонты прогноза:  достаточно большие</a:t>
+            </a:r>
+          </a:p>
+          <a:p>
+            <a:endParaRPr lang="ru-RU" sz="1800" dirty="0"/>
+          </a:p>
+          <a:p>
+            <a:br>
+              <a:rPr lang="ru-RU" dirty="0"/>
+            </a:br>
+            <a:endParaRPr lang="ru-RU" dirty="0"/>
           </a:p>
         </p:txBody>
       </p:sp>
+      <p:graphicFrame>
+        <p:nvGraphicFramePr>
+          <p:cNvPr id="4" name="Таблица 3">
+            <a:extLst>
+              <a:ext uri="{FF2B5EF4-FFF2-40B4-BE49-F238E27FC236}">
+                <a16:creationId xmlns:a16="http://schemas.microsoft.com/office/drawing/2014/main" id="{86D6C968-6FE2-1A66-74B7-A8697C4BB7F5}"/>
+              </a:ext>
+            </a:extLst>
+          </p:cNvPr>
+          <p:cNvGraphicFramePr>
+            <a:graphicFrameLocks noGrp="1"/>
+          </p:cNvGraphicFramePr>
+          <p:nvPr>
+            <p:extLst>
+              <p:ext uri="{D42A27DB-BD31-4B8C-83A1-F6EECF244321}">
+                <p14:modId xmlns:p14="http://schemas.microsoft.com/office/powerpoint/2010/main" val="801317620"/>
+              </p:ext>
+            </p:extLst>
+          </p:nvPr>
+        </p:nvGraphicFramePr>
+        <p:xfrm>
+          <a:off x="870037" y="2462271"/>
+          <a:ext cx="10451926" cy="1760112"/>
+        </p:xfrm>
+        <a:graphic>
+          <a:graphicData uri="http://schemas.openxmlformats.org/drawingml/2006/table">
+            <a:tbl>
+              <a:tblPr/>
+              <a:tblGrid>
+                <a:gridCol w="2834081">
+                  <a:extLst>
+                    <a:ext uri="{9D8B030D-6E8A-4147-A177-3AD203B41FA5}">
+                      <a16:colId xmlns:a16="http://schemas.microsoft.com/office/drawing/2014/main" val="2868848429"/>
+                    </a:ext>
+                  </a:extLst>
+                </a:gridCol>
+                <a:gridCol w="4140570">
+                  <a:extLst>
+                    <a:ext uri="{9D8B030D-6E8A-4147-A177-3AD203B41FA5}">
+                      <a16:colId xmlns:a16="http://schemas.microsoft.com/office/drawing/2014/main" val="3685004216"/>
+                    </a:ext>
+                  </a:extLst>
+                </a:gridCol>
+                <a:gridCol w="3477275">
+                  <a:extLst>
+                    <a:ext uri="{9D8B030D-6E8A-4147-A177-3AD203B41FA5}">
+                      <a16:colId xmlns:a16="http://schemas.microsoft.com/office/drawing/2014/main" val="2672242584"/>
+                    </a:ext>
+                  </a:extLst>
+                </a:gridCol>
+              </a:tblGrid>
+              <a:tr h="0">
+                <a:tc>
+                  <a:txBody>
+                    <a:bodyPr/>
+                    <a:lstStyle/>
+                    <a:p>
+                      <a:pPr>
+                        <a:buNone/>
+                      </a:pPr>
+                      <a:r>
+                        <a:rPr lang="ru-RU" sz="1500" b="1">
+                          <a:solidFill>
+                            <a:srgbClr val="000000"/>
+                          </a:solidFill>
+                          <a:effectLst/>
+                          <a:latin typeface="Helvetica Neue" panose="02000503000000020004" pitchFamily="2" charset="0"/>
+                        </a:rPr>
+                        <a:t>Проблема</a:t>
+                      </a:r>
+                      <a:endParaRPr lang="ru-RU" sz="1500">
+                        <a:effectLst/>
+                      </a:endParaRPr>
+                    </a:p>
+                  </a:txBody>
+                  <a:tcPr marL="32376" marR="32376" marT="32376" marB="32376">
+                    <a:lnL w="9525" cap="flat" cmpd="sng" algn="ctr">
+                      <a:solidFill>
+                        <a:srgbClr val="000000"/>
+                      </a:solidFill>
+                      <a:prstDash val="solid"/>
+                      <a:round/>
+                      <a:headEnd type="none" w="med" len="med"/>
+                      <a:tailEnd type="none" w="med" len="med"/>
+                    </a:lnL>
+                    <a:lnR w="9525" cap="flat" cmpd="sng" algn="ctr">
+                      <a:solidFill>
+                        <a:srgbClr val="000000"/>
+                      </a:solidFill>
+                      <a:prstDash val="solid"/>
+                      <a:round/>
+                      <a:headEnd type="none" w="med" len="med"/>
+                      <a:tailEnd type="none" w="med" len="med"/>
+                    </a:lnR>
+                    <a:lnT w="9525" cap="flat" cmpd="sng" algn="ctr">
+                      <a:solidFill>
+                        <a:srgbClr val="000000"/>
+                      </a:solidFill>
+                      <a:prstDash val="solid"/>
+                      <a:round/>
+                      <a:headEnd type="none" w="med" len="med"/>
+                      <a:tailEnd type="none" w="med" len="med"/>
+                    </a:lnT>
+                    <a:lnB w="9525" cap="flat" cmpd="sng" algn="ctr">
+                      <a:solidFill>
+                        <a:srgbClr val="000000"/>
+                      </a:solidFill>
+                      <a:prstDash val="solid"/>
+                      <a:round/>
+                      <a:headEnd type="none" w="med" len="med"/>
+                      <a:tailEnd type="none" w="med" len="med"/>
+                    </a:lnB>
+                    <a:solidFill>
+                      <a:srgbClr val="B0B3B2"/>
+                    </a:solidFill>
+                  </a:tcPr>
+                </a:tc>
+                <a:tc>
+                  <a:txBody>
+                    <a:bodyPr/>
+                    <a:lstStyle/>
+                    <a:p>
+                      <a:pPr>
+                        <a:buNone/>
+                      </a:pPr>
+                      <a:r>
+                        <a:rPr lang="ru-RU" sz="1500" b="1">
+                          <a:solidFill>
+                            <a:srgbClr val="000000"/>
+                          </a:solidFill>
+                          <a:effectLst/>
+                          <a:latin typeface="Helvetica Neue" panose="02000503000000020004" pitchFamily="2" charset="0"/>
+                        </a:rPr>
+                        <a:t>Причина</a:t>
+                      </a:r>
+                      <a:endParaRPr lang="ru-RU" sz="1500">
+                        <a:effectLst/>
+                      </a:endParaRPr>
+                    </a:p>
+                  </a:txBody>
+                  <a:tcPr marL="32376" marR="32376" marT="32376" marB="32376">
+                    <a:lnL w="9525" cap="flat" cmpd="sng" algn="ctr">
+                      <a:solidFill>
+                        <a:srgbClr val="000000"/>
+                      </a:solidFill>
+                      <a:prstDash val="solid"/>
+                      <a:round/>
+                      <a:headEnd type="none" w="med" len="med"/>
+                      <a:tailEnd type="none" w="med" len="med"/>
+                    </a:lnL>
+                    <a:lnR w="9525" cap="flat" cmpd="sng" algn="ctr">
+                      <a:solidFill>
+                        <a:srgbClr val="000000"/>
+                      </a:solidFill>
+                      <a:prstDash val="solid"/>
+                      <a:round/>
+                      <a:headEnd type="none" w="med" len="med"/>
+                      <a:tailEnd type="none" w="med" len="med"/>
+                    </a:lnR>
+                    <a:lnT w="9525" cap="flat" cmpd="sng" algn="ctr">
+                      <a:solidFill>
+                        <a:srgbClr val="000000"/>
+                      </a:solidFill>
+                      <a:prstDash val="solid"/>
+                      <a:round/>
+                      <a:headEnd type="none" w="med" len="med"/>
+                      <a:tailEnd type="none" w="med" len="med"/>
+                    </a:lnT>
+                    <a:lnB w="9525" cap="flat" cmpd="sng" algn="ctr">
+                      <a:solidFill>
+                        <a:srgbClr val="000000"/>
+                      </a:solidFill>
+                      <a:prstDash val="solid"/>
+                      <a:round/>
+                      <a:headEnd type="none" w="med" len="med"/>
+                      <a:tailEnd type="none" w="med" len="med"/>
+                    </a:lnB>
+                    <a:solidFill>
+                      <a:srgbClr val="B0B3B2"/>
+                    </a:solidFill>
+                  </a:tcPr>
+                </a:tc>
+                <a:tc>
+                  <a:txBody>
+                    <a:bodyPr/>
+                    <a:lstStyle/>
+                    <a:p>
+                      <a:pPr>
+                        <a:buNone/>
+                      </a:pPr>
+                      <a:r>
+                        <a:rPr lang="ru-RU" sz="1500" b="1">
+                          <a:solidFill>
+                            <a:srgbClr val="000000"/>
+                          </a:solidFill>
+                          <a:effectLst/>
+                          <a:latin typeface="Helvetica Neue" panose="02000503000000020004" pitchFamily="2" charset="0"/>
+                        </a:rPr>
+                        <a:t>Последствие</a:t>
+                      </a:r>
+                      <a:endParaRPr lang="ru-RU" sz="1500">
+                        <a:effectLst/>
+                      </a:endParaRPr>
+                    </a:p>
+                  </a:txBody>
+                  <a:tcPr marL="32376" marR="32376" marT="32376" marB="32376">
+                    <a:lnL w="9525" cap="flat" cmpd="sng" algn="ctr">
+                      <a:solidFill>
+                        <a:srgbClr val="000000"/>
+                      </a:solidFill>
+                      <a:prstDash val="solid"/>
+                      <a:round/>
+                      <a:headEnd type="none" w="med" len="med"/>
+                      <a:tailEnd type="none" w="med" len="med"/>
+                    </a:lnL>
+                    <a:lnR w="9525" cap="flat" cmpd="sng" algn="ctr">
+                      <a:solidFill>
+                        <a:srgbClr val="000000"/>
+                      </a:solidFill>
+                      <a:prstDash val="solid"/>
+                      <a:round/>
+                      <a:headEnd type="none" w="med" len="med"/>
+                      <a:tailEnd type="none" w="med" len="med"/>
+                    </a:lnR>
+                    <a:lnT w="9525" cap="flat" cmpd="sng" algn="ctr">
+                      <a:solidFill>
+                        <a:srgbClr val="000000"/>
+                      </a:solidFill>
+                      <a:prstDash val="solid"/>
+                      <a:round/>
+                      <a:headEnd type="none" w="med" len="med"/>
+                      <a:tailEnd type="none" w="med" len="med"/>
+                    </a:lnT>
+                    <a:lnB w="9525" cap="flat" cmpd="sng" algn="ctr">
+                      <a:solidFill>
+                        <a:srgbClr val="000000"/>
+                      </a:solidFill>
+                      <a:prstDash val="solid"/>
+                      <a:round/>
+                      <a:headEnd type="none" w="med" len="med"/>
+                      <a:tailEnd type="none" w="med" len="med"/>
+                    </a:lnB>
+                    <a:solidFill>
+                      <a:srgbClr val="B0B3B2"/>
+                    </a:solidFill>
+                  </a:tcPr>
+                </a:tc>
+                <a:extLst>
+                  <a:ext uri="{0D108BD9-81ED-4DB2-BD59-A6C34878D82A}">
+                    <a16:rowId xmlns:a16="http://schemas.microsoft.com/office/drawing/2014/main" val="3638039043"/>
+                  </a:ext>
+                </a:extLst>
+              </a:tr>
+              <a:tr h="0">
+                <a:tc>
+                  <a:txBody>
+                    <a:bodyPr/>
+                    <a:lstStyle/>
+                    <a:p>
+                      <a:pPr>
+                        <a:buNone/>
+                      </a:pPr>
+                      <a:r>
+                        <a:rPr lang="ru-RU" sz="1500" b="1">
+                          <a:solidFill>
+                            <a:srgbClr val="000000"/>
+                          </a:solidFill>
+                          <a:effectLst/>
+                          <a:latin typeface="Helvetica Neue" panose="02000503000000020004" pitchFamily="2" charset="0"/>
+                        </a:rPr>
+                        <a:t>Вычислительная сложность</a:t>
+                      </a:r>
+                      <a:endParaRPr lang="ru-RU" sz="1500">
+                        <a:effectLst/>
+                      </a:endParaRPr>
+                    </a:p>
+                  </a:txBody>
+                  <a:tcPr marL="32376" marR="32376" marT="32376" marB="32376">
+                    <a:lnL w="9525" cap="flat" cmpd="sng" algn="ctr">
+                      <a:solidFill>
+                        <a:srgbClr val="000000"/>
+                      </a:solidFill>
+                      <a:prstDash val="solid"/>
+                      <a:round/>
+                      <a:headEnd type="none" w="med" len="med"/>
+                      <a:tailEnd type="none" w="med" len="med"/>
+                    </a:lnL>
+                    <a:lnR w="9525" cap="flat" cmpd="sng" algn="ctr">
+                      <a:solidFill>
+                        <a:srgbClr val="000000"/>
+                      </a:solidFill>
+                      <a:prstDash val="solid"/>
+                      <a:round/>
+                      <a:headEnd type="none" w="med" len="med"/>
+                      <a:tailEnd type="none" w="med" len="med"/>
+                    </a:lnR>
+                    <a:lnT w="9525" cap="flat" cmpd="sng" algn="ctr">
+                      <a:solidFill>
+                        <a:srgbClr val="000000"/>
+                      </a:solidFill>
+                      <a:prstDash val="solid"/>
+                      <a:round/>
+                      <a:headEnd type="none" w="med" len="med"/>
+                      <a:tailEnd type="none" w="med" len="med"/>
+                    </a:lnT>
+                    <a:lnB w="9525" cap="flat" cmpd="sng" algn="ctr">
+                      <a:solidFill>
+                        <a:srgbClr val="000000"/>
+                      </a:solidFill>
+                      <a:prstDash val="solid"/>
+                      <a:round/>
+                      <a:headEnd type="none" w="med" len="med"/>
+                      <a:tailEnd type="none" w="med" len="med"/>
+                    </a:lnB>
+                    <a:solidFill>
+                      <a:srgbClr val="D4D4D4"/>
+                    </a:solidFill>
+                  </a:tcPr>
+                </a:tc>
+                <a:tc>
+                  <a:txBody>
+                    <a:bodyPr/>
+                    <a:lstStyle/>
+                    <a:p>
+                      <a:pPr>
+                        <a:buNone/>
+                      </a:pPr>
+                      <a:r>
+                        <a:rPr lang="en" sz="1500" dirty="0">
+                          <a:solidFill>
+                            <a:srgbClr val="000000"/>
+                          </a:solidFill>
+                          <a:effectLst/>
+                          <a:latin typeface="Helvetica Neue" panose="02000503000000020004" pitchFamily="2" charset="0"/>
+                        </a:rPr>
+                        <a:t>O(n³) </a:t>
+                      </a:r>
+                      <a:r>
+                        <a:rPr lang="ru-RU" sz="1500" dirty="0">
+                          <a:solidFill>
+                            <a:srgbClr val="000000"/>
+                          </a:solidFill>
+                          <a:effectLst/>
+                          <a:latin typeface="Helvetica Neue" panose="02000503000000020004" pitchFamily="2" charset="0"/>
+                        </a:rPr>
+                        <a:t>у </a:t>
+                      </a:r>
+                      <a:r>
+                        <a:rPr lang="en" sz="1500" dirty="0">
+                          <a:solidFill>
+                            <a:srgbClr val="000000"/>
+                          </a:solidFill>
+                          <a:effectLst/>
+                          <a:latin typeface="Helvetica Neue" panose="02000503000000020004" pitchFamily="2" charset="0"/>
+                        </a:rPr>
+                        <a:t>ARIMA/VAR, </a:t>
+                      </a:r>
+                      <a:endParaRPr lang="ru-RU" sz="1500" dirty="0">
+                        <a:effectLst/>
+                      </a:endParaRPr>
+                    </a:p>
+                  </a:txBody>
+                  <a:tcPr marL="32376" marR="32376" marT="32376" marB="32376">
+                    <a:lnL w="9525" cap="flat" cmpd="sng" algn="ctr">
+                      <a:solidFill>
+                        <a:srgbClr val="000000"/>
+                      </a:solidFill>
+                      <a:prstDash val="solid"/>
+                      <a:round/>
+                      <a:headEnd type="none" w="med" len="med"/>
+                      <a:tailEnd type="none" w="med" len="med"/>
+                    </a:lnL>
+                    <a:lnR w="9525" cap="flat" cmpd="sng" algn="ctr">
+                      <a:solidFill>
+                        <a:srgbClr val="000000"/>
+                      </a:solidFill>
+                      <a:prstDash val="solid"/>
+                      <a:round/>
+                      <a:headEnd type="none" w="med" len="med"/>
+                      <a:tailEnd type="none" w="med" len="med"/>
+                    </a:lnR>
+                    <a:lnT w="9525" cap="flat" cmpd="sng" algn="ctr">
+                      <a:solidFill>
+                        <a:srgbClr val="000000"/>
+                      </a:solidFill>
+                      <a:prstDash val="solid"/>
+                      <a:round/>
+                      <a:headEnd type="none" w="med" len="med"/>
+                      <a:tailEnd type="none" w="med" len="med"/>
+                    </a:lnT>
+                    <a:lnB w="9525" cap="flat" cmpd="sng" algn="ctr">
+                      <a:solidFill>
+                        <a:srgbClr val="000000"/>
+                      </a:solidFill>
+                      <a:prstDash val="solid"/>
+                      <a:round/>
+                      <a:headEnd type="none" w="med" len="med"/>
+                      <a:tailEnd type="none" w="med" len="med"/>
+                    </a:lnB>
+                    <a:noFill/>
+                  </a:tcPr>
+                </a:tc>
+                <a:tc>
+                  <a:txBody>
+                    <a:bodyPr/>
+                    <a:lstStyle/>
+                    <a:p>
+                      <a:pPr>
+                        <a:buNone/>
+                      </a:pPr>
+                      <a:r>
+                        <a:rPr lang="ru-RU" sz="1500">
+                          <a:solidFill>
+                            <a:srgbClr val="000000"/>
+                          </a:solidFill>
+                          <a:effectLst/>
+                          <a:latin typeface="Helvetica Neue" panose="02000503000000020004" pitchFamily="2" charset="0"/>
+                        </a:rPr>
+                        <a:t>Невозможно обучить на 1</a:t>
+                      </a:r>
+                      <a:r>
+                        <a:rPr lang="en" sz="1500">
+                          <a:solidFill>
+                            <a:srgbClr val="000000"/>
+                          </a:solidFill>
+                          <a:effectLst/>
+                          <a:latin typeface="Helvetica Neue" panose="02000503000000020004" pitchFamily="2" charset="0"/>
+                        </a:rPr>
+                        <a:t>M+ </a:t>
+                      </a:r>
+                      <a:r>
+                        <a:rPr lang="ru-RU" sz="1500">
+                          <a:solidFill>
+                            <a:srgbClr val="000000"/>
+                          </a:solidFill>
+                          <a:effectLst/>
+                          <a:latin typeface="Helvetica Neue" panose="02000503000000020004" pitchFamily="2" charset="0"/>
+                        </a:rPr>
+                        <a:t>точек</a:t>
+                      </a:r>
+                      <a:endParaRPr lang="ru-RU" sz="1500">
+                        <a:effectLst/>
+                      </a:endParaRPr>
+                    </a:p>
+                  </a:txBody>
+                  <a:tcPr marL="32376" marR="32376" marT="32376" marB="32376">
+                    <a:lnL w="9525" cap="flat" cmpd="sng" algn="ctr">
+                      <a:solidFill>
+                        <a:srgbClr val="000000"/>
+                      </a:solidFill>
+                      <a:prstDash val="solid"/>
+                      <a:round/>
+                      <a:headEnd type="none" w="med" len="med"/>
+                      <a:tailEnd type="none" w="med" len="med"/>
+                    </a:lnL>
+                    <a:lnR w="9525" cap="flat" cmpd="sng" algn="ctr">
+                      <a:solidFill>
+                        <a:srgbClr val="000000"/>
+                      </a:solidFill>
+                      <a:prstDash val="solid"/>
+                      <a:round/>
+                      <a:headEnd type="none" w="med" len="med"/>
+                      <a:tailEnd type="none" w="med" len="med"/>
+                    </a:lnR>
+                    <a:lnT w="9525" cap="flat" cmpd="sng" algn="ctr">
+                      <a:solidFill>
+                        <a:srgbClr val="000000"/>
+                      </a:solidFill>
+                      <a:prstDash val="solid"/>
+                      <a:round/>
+                      <a:headEnd type="none" w="med" len="med"/>
+                      <a:tailEnd type="none" w="med" len="med"/>
+                    </a:lnT>
+                    <a:lnB w="9525" cap="flat" cmpd="sng" algn="ctr">
+                      <a:solidFill>
+                        <a:srgbClr val="000000"/>
+                      </a:solidFill>
+                      <a:prstDash val="solid"/>
+                      <a:round/>
+                      <a:headEnd type="none" w="med" len="med"/>
+                      <a:tailEnd type="none" w="med" len="med"/>
+                    </a:lnB>
+                    <a:noFill/>
+                  </a:tcPr>
+                </a:tc>
+                <a:extLst>
+                  <a:ext uri="{0D108BD9-81ED-4DB2-BD59-A6C34878D82A}">
+                    <a16:rowId xmlns:a16="http://schemas.microsoft.com/office/drawing/2014/main" val="2419702017"/>
+                  </a:ext>
+                </a:extLst>
+              </a:tr>
+              <a:tr h="0">
+                <a:tc>
+                  <a:txBody>
+                    <a:bodyPr/>
+                    <a:lstStyle/>
+                    <a:p>
+                      <a:pPr>
+                        <a:buNone/>
+                      </a:pPr>
+                      <a:r>
+                        <a:rPr lang="ru-RU" sz="1500" b="1">
+                          <a:solidFill>
+                            <a:srgbClr val="000000"/>
+                          </a:solidFill>
+                          <a:effectLst/>
+                          <a:latin typeface="Helvetica Neue" panose="02000503000000020004" pitchFamily="2" charset="0"/>
+                        </a:rPr>
+                        <a:t>Память</a:t>
+                      </a:r>
+                      <a:endParaRPr lang="ru-RU" sz="1500">
+                        <a:effectLst/>
+                      </a:endParaRPr>
+                    </a:p>
+                  </a:txBody>
+                  <a:tcPr marL="32376" marR="32376" marT="32376" marB="32376">
+                    <a:lnL w="9525" cap="flat" cmpd="sng" algn="ctr">
+                      <a:solidFill>
+                        <a:srgbClr val="000000"/>
+                      </a:solidFill>
+                      <a:prstDash val="solid"/>
+                      <a:round/>
+                      <a:headEnd type="none" w="med" len="med"/>
+                      <a:tailEnd type="none" w="med" len="med"/>
+                    </a:lnL>
+                    <a:lnR w="9525" cap="flat" cmpd="sng" algn="ctr">
+                      <a:solidFill>
+                        <a:srgbClr val="000000"/>
+                      </a:solidFill>
+                      <a:prstDash val="solid"/>
+                      <a:round/>
+                      <a:headEnd type="none" w="med" len="med"/>
+                      <a:tailEnd type="none" w="med" len="med"/>
+                    </a:lnR>
+                    <a:lnT w="9525" cap="flat" cmpd="sng" algn="ctr">
+                      <a:solidFill>
+                        <a:srgbClr val="000000"/>
+                      </a:solidFill>
+                      <a:prstDash val="solid"/>
+                      <a:round/>
+                      <a:headEnd type="none" w="med" len="med"/>
+                      <a:tailEnd type="none" w="med" len="med"/>
+                    </a:lnT>
+                    <a:lnB w="9525" cap="flat" cmpd="sng" algn="ctr">
+                      <a:solidFill>
+                        <a:srgbClr val="000000"/>
+                      </a:solidFill>
+                      <a:prstDash val="solid"/>
+                      <a:round/>
+                      <a:headEnd type="none" w="med" len="med"/>
+                      <a:tailEnd type="none" w="med" len="med"/>
+                    </a:lnB>
+                    <a:solidFill>
+                      <a:srgbClr val="D4D4D4"/>
+                    </a:solidFill>
+                  </a:tcPr>
+                </a:tc>
+                <a:tc>
+                  <a:txBody>
+                    <a:bodyPr/>
+                    <a:lstStyle/>
+                    <a:p>
+                      <a:pPr>
+                        <a:buNone/>
+                      </a:pPr>
+                      <a:r>
+                        <a:rPr lang="ru-RU" sz="1500">
+                          <a:solidFill>
+                            <a:srgbClr val="000000"/>
+                          </a:solidFill>
+                          <a:effectLst/>
+                          <a:latin typeface="Helvetica Neue" panose="02000503000000020004" pitchFamily="2" charset="0"/>
+                        </a:rPr>
+                        <a:t>Хранение ковариационных матриц, лагов</a:t>
+                      </a:r>
+                      <a:endParaRPr lang="ru-RU" sz="1500">
+                        <a:effectLst/>
+                      </a:endParaRPr>
+                    </a:p>
+                  </a:txBody>
+                  <a:tcPr marL="32376" marR="32376" marT="32376" marB="32376">
+                    <a:lnL w="9525" cap="flat" cmpd="sng" algn="ctr">
+                      <a:solidFill>
+                        <a:srgbClr val="000000"/>
+                      </a:solidFill>
+                      <a:prstDash val="solid"/>
+                      <a:round/>
+                      <a:headEnd type="none" w="med" len="med"/>
+                      <a:tailEnd type="none" w="med" len="med"/>
+                    </a:lnL>
+                    <a:lnR w="9525" cap="flat" cmpd="sng" algn="ctr">
+                      <a:solidFill>
+                        <a:srgbClr val="000000"/>
+                      </a:solidFill>
+                      <a:prstDash val="solid"/>
+                      <a:round/>
+                      <a:headEnd type="none" w="med" len="med"/>
+                      <a:tailEnd type="none" w="med" len="med"/>
+                    </a:lnR>
+                    <a:lnT w="9525" cap="flat" cmpd="sng" algn="ctr">
+                      <a:solidFill>
+                        <a:srgbClr val="000000"/>
+                      </a:solidFill>
+                      <a:prstDash val="solid"/>
+                      <a:round/>
+                      <a:headEnd type="none" w="med" len="med"/>
+                      <a:tailEnd type="none" w="med" len="med"/>
+                    </a:lnT>
+                    <a:lnB w="9525" cap="flat" cmpd="sng" algn="ctr">
+                      <a:solidFill>
+                        <a:srgbClr val="000000"/>
+                      </a:solidFill>
+                      <a:prstDash val="solid"/>
+                      <a:round/>
+                      <a:headEnd type="none" w="med" len="med"/>
+                      <a:tailEnd type="none" w="med" len="med"/>
+                    </a:lnB>
+                    <a:noFill/>
+                  </a:tcPr>
+                </a:tc>
+                <a:tc>
+                  <a:txBody>
+                    <a:bodyPr/>
+                    <a:lstStyle/>
+                    <a:p>
+                      <a:pPr>
+                        <a:buNone/>
+                      </a:pPr>
+                      <a:r>
+                        <a:rPr lang="ru-RU" sz="1500">
+                          <a:solidFill>
+                            <a:srgbClr val="000000"/>
+                          </a:solidFill>
+                          <a:effectLst/>
+                          <a:latin typeface="Helvetica Neue" panose="02000503000000020004" pitchFamily="2" charset="0"/>
+                        </a:rPr>
+                        <a:t>Переполнение </a:t>
+                      </a:r>
+                      <a:r>
+                        <a:rPr lang="en" sz="1500">
+                          <a:solidFill>
+                            <a:srgbClr val="000000"/>
+                          </a:solidFill>
+                          <a:effectLst/>
+                          <a:latin typeface="Helvetica Neue" panose="02000503000000020004" pitchFamily="2" charset="0"/>
+                        </a:rPr>
+                        <a:t>RAM</a:t>
+                      </a:r>
+                      <a:endParaRPr lang="en" sz="1500">
+                        <a:effectLst/>
+                      </a:endParaRPr>
+                    </a:p>
+                  </a:txBody>
+                  <a:tcPr marL="32376" marR="32376" marT="32376" marB="32376">
+                    <a:lnL w="9525" cap="flat" cmpd="sng" algn="ctr">
+                      <a:solidFill>
+                        <a:srgbClr val="000000"/>
+                      </a:solidFill>
+                      <a:prstDash val="solid"/>
+                      <a:round/>
+                      <a:headEnd type="none" w="med" len="med"/>
+                      <a:tailEnd type="none" w="med" len="med"/>
+                    </a:lnL>
+                    <a:lnR w="9525" cap="flat" cmpd="sng" algn="ctr">
+                      <a:solidFill>
+                        <a:srgbClr val="000000"/>
+                      </a:solidFill>
+                      <a:prstDash val="solid"/>
+                      <a:round/>
+                      <a:headEnd type="none" w="med" len="med"/>
+                      <a:tailEnd type="none" w="med" len="med"/>
+                    </a:lnR>
+                    <a:lnT w="9525" cap="flat" cmpd="sng" algn="ctr">
+                      <a:solidFill>
+                        <a:srgbClr val="000000"/>
+                      </a:solidFill>
+                      <a:prstDash val="solid"/>
+                      <a:round/>
+                      <a:headEnd type="none" w="med" len="med"/>
+                      <a:tailEnd type="none" w="med" len="med"/>
+                    </a:lnT>
+                    <a:lnB w="9525" cap="flat" cmpd="sng" algn="ctr">
+                      <a:solidFill>
+                        <a:srgbClr val="000000"/>
+                      </a:solidFill>
+                      <a:prstDash val="solid"/>
+                      <a:round/>
+                      <a:headEnd type="none" w="med" len="med"/>
+                      <a:tailEnd type="none" w="med" len="med"/>
+                    </a:lnB>
+                    <a:noFill/>
+                  </a:tcPr>
+                </a:tc>
+                <a:extLst>
+                  <a:ext uri="{0D108BD9-81ED-4DB2-BD59-A6C34878D82A}">
+                    <a16:rowId xmlns:a16="http://schemas.microsoft.com/office/drawing/2014/main" val="1801047392"/>
+                  </a:ext>
+                </a:extLst>
+              </a:tr>
+              <a:tr h="0">
+                <a:tc>
+                  <a:txBody>
+                    <a:bodyPr/>
+                    <a:lstStyle/>
+                    <a:p>
+                      <a:pPr>
+                        <a:buNone/>
+                      </a:pPr>
+                      <a:r>
+                        <a:rPr lang="ru-RU" sz="1500" b="1">
+                          <a:solidFill>
+                            <a:srgbClr val="000000"/>
+                          </a:solidFill>
+                          <a:effectLst/>
+                          <a:latin typeface="Helvetica Neue" panose="02000503000000020004" pitchFamily="2" charset="0"/>
+                        </a:rPr>
+                        <a:t>Стационарность</a:t>
+                      </a:r>
+                      <a:endParaRPr lang="ru-RU" sz="1500">
+                        <a:effectLst/>
+                      </a:endParaRPr>
+                    </a:p>
+                  </a:txBody>
+                  <a:tcPr marL="32376" marR="32376" marT="32376" marB="32376">
+                    <a:lnL w="9525" cap="flat" cmpd="sng" algn="ctr">
+                      <a:solidFill>
+                        <a:srgbClr val="000000"/>
+                      </a:solidFill>
+                      <a:prstDash val="solid"/>
+                      <a:round/>
+                      <a:headEnd type="none" w="med" len="med"/>
+                      <a:tailEnd type="none" w="med" len="med"/>
+                    </a:lnL>
+                    <a:lnR w="9525" cap="flat" cmpd="sng" algn="ctr">
+                      <a:solidFill>
+                        <a:srgbClr val="000000"/>
+                      </a:solidFill>
+                      <a:prstDash val="solid"/>
+                      <a:round/>
+                      <a:headEnd type="none" w="med" len="med"/>
+                      <a:tailEnd type="none" w="med" len="med"/>
+                    </a:lnR>
+                    <a:lnT w="9525" cap="flat" cmpd="sng" algn="ctr">
+                      <a:solidFill>
+                        <a:srgbClr val="000000"/>
+                      </a:solidFill>
+                      <a:prstDash val="solid"/>
+                      <a:round/>
+                      <a:headEnd type="none" w="med" len="med"/>
+                      <a:tailEnd type="none" w="med" len="med"/>
+                    </a:lnT>
+                    <a:lnB w="9525" cap="flat" cmpd="sng" algn="ctr">
+                      <a:solidFill>
+                        <a:srgbClr val="000000"/>
+                      </a:solidFill>
+                      <a:prstDash val="solid"/>
+                      <a:round/>
+                      <a:headEnd type="none" w="med" len="med"/>
+                      <a:tailEnd type="none" w="med" len="med"/>
+                    </a:lnB>
+                    <a:solidFill>
+                      <a:srgbClr val="D4D4D4"/>
+                    </a:solidFill>
+                  </a:tcPr>
+                </a:tc>
+                <a:tc>
+                  <a:txBody>
+                    <a:bodyPr/>
+                    <a:lstStyle/>
+                    <a:p>
+                      <a:pPr>
+                        <a:buNone/>
+                      </a:pPr>
+                      <a:r>
+                        <a:rPr lang="ru-RU" sz="1500">
+                          <a:solidFill>
+                            <a:srgbClr val="000000"/>
+                          </a:solidFill>
+                          <a:effectLst/>
+                          <a:latin typeface="Helvetica Neue" panose="02000503000000020004" pitchFamily="2" charset="0"/>
+                        </a:rPr>
+                        <a:t>Долгие ряды почти всегда нестационарны</a:t>
+                      </a:r>
+                      <a:endParaRPr lang="ru-RU" sz="1500">
+                        <a:effectLst/>
+                      </a:endParaRPr>
+                    </a:p>
+                  </a:txBody>
+                  <a:tcPr marL="32376" marR="32376" marT="32376" marB="32376">
+                    <a:lnL w="9525" cap="flat" cmpd="sng" algn="ctr">
+                      <a:solidFill>
+                        <a:srgbClr val="000000"/>
+                      </a:solidFill>
+                      <a:prstDash val="solid"/>
+                      <a:round/>
+                      <a:headEnd type="none" w="med" len="med"/>
+                      <a:tailEnd type="none" w="med" len="med"/>
+                    </a:lnL>
+                    <a:lnR w="9525" cap="flat" cmpd="sng" algn="ctr">
+                      <a:solidFill>
+                        <a:srgbClr val="000000"/>
+                      </a:solidFill>
+                      <a:prstDash val="solid"/>
+                      <a:round/>
+                      <a:headEnd type="none" w="med" len="med"/>
+                      <a:tailEnd type="none" w="med" len="med"/>
+                    </a:lnR>
+                    <a:lnT w="9525" cap="flat" cmpd="sng" algn="ctr">
+                      <a:solidFill>
+                        <a:srgbClr val="000000"/>
+                      </a:solidFill>
+                      <a:prstDash val="solid"/>
+                      <a:round/>
+                      <a:headEnd type="none" w="med" len="med"/>
+                      <a:tailEnd type="none" w="med" len="med"/>
+                    </a:lnT>
+                    <a:lnB w="9525" cap="flat" cmpd="sng" algn="ctr">
+                      <a:solidFill>
+                        <a:srgbClr val="000000"/>
+                      </a:solidFill>
+                      <a:prstDash val="solid"/>
+                      <a:round/>
+                      <a:headEnd type="none" w="med" len="med"/>
+                      <a:tailEnd type="none" w="med" len="med"/>
+                    </a:lnB>
+                    <a:noFill/>
+                  </a:tcPr>
+                </a:tc>
+                <a:tc>
+                  <a:txBody>
+                    <a:bodyPr/>
+                    <a:lstStyle/>
+                    <a:p>
+                      <a:pPr>
+                        <a:buNone/>
+                      </a:pPr>
+                      <a:r>
+                        <a:rPr lang="ru-RU" sz="1500">
+                          <a:solidFill>
+                            <a:srgbClr val="000000"/>
+                          </a:solidFill>
+                          <a:effectLst/>
+                          <a:latin typeface="Helvetica Neue" panose="02000503000000020004" pitchFamily="2" charset="0"/>
+                        </a:rPr>
+                        <a:t>Модели дают смещённые прогнозы</a:t>
+                      </a:r>
+                      <a:endParaRPr lang="ru-RU" sz="1500">
+                        <a:effectLst/>
+                      </a:endParaRPr>
+                    </a:p>
+                  </a:txBody>
+                  <a:tcPr marL="32376" marR="32376" marT="32376" marB="32376">
+                    <a:lnL w="9525" cap="flat" cmpd="sng" algn="ctr">
+                      <a:solidFill>
+                        <a:srgbClr val="000000"/>
+                      </a:solidFill>
+                      <a:prstDash val="solid"/>
+                      <a:round/>
+                      <a:headEnd type="none" w="med" len="med"/>
+                      <a:tailEnd type="none" w="med" len="med"/>
+                    </a:lnL>
+                    <a:lnR w="9525" cap="flat" cmpd="sng" algn="ctr">
+                      <a:solidFill>
+                        <a:srgbClr val="000000"/>
+                      </a:solidFill>
+                      <a:prstDash val="solid"/>
+                      <a:round/>
+                      <a:headEnd type="none" w="med" len="med"/>
+                      <a:tailEnd type="none" w="med" len="med"/>
+                    </a:lnR>
+                    <a:lnT w="9525" cap="flat" cmpd="sng" algn="ctr">
+                      <a:solidFill>
+                        <a:srgbClr val="000000"/>
+                      </a:solidFill>
+                      <a:prstDash val="solid"/>
+                      <a:round/>
+                      <a:headEnd type="none" w="med" len="med"/>
+                      <a:tailEnd type="none" w="med" len="med"/>
+                    </a:lnT>
+                    <a:lnB w="9525" cap="flat" cmpd="sng" algn="ctr">
+                      <a:solidFill>
+                        <a:srgbClr val="000000"/>
+                      </a:solidFill>
+                      <a:prstDash val="solid"/>
+                      <a:round/>
+                      <a:headEnd type="none" w="med" len="med"/>
+                      <a:tailEnd type="none" w="med" len="med"/>
+                    </a:lnB>
+                    <a:noFill/>
+                  </a:tcPr>
+                </a:tc>
+                <a:extLst>
+                  <a:ext uri="{0D108BD9-81ED-4DB2-BD59-A6C34878D82A}">
+                    <a16:rowId xmlns:a16="http://schemas.microsoft.com/office/drawing/2014/main" val="2545524973"/>
+                  </a:ext>
+                </a:extLst>
+              </a:tr>
+              <a:tr h="0">
+                <a:tc>
+                  <a:txBody>
+                    <a:bodyPr/>
+                    <a:lstStyle/>
+                    <a:p>
+                      <a:pPr>
+                        <a:buNone/>
+                      </a:pPr>
+                      <a:r>
+                        <a:rPr lang="ru-RU" sz="1500" b="1">
+                          <a:solidFill>
+                            <a:srgbClr val="000000"/>
+                          </a:solidFill>
+                          <a:effectLst/>
+                          <a:latin typeface="Helvetica Neue" panose="02000503000000020004" pitchFamily="2" charset="0"/>
+                        </a:rPr>
+                        <a:t>Мультиколлинеарность</a:t>
+                      </a:r>
+                      <a:endParaRPr lang="ru-RU" sz="1500">
+                        <a:effectLst/>
+                      </a:endParaRPr>
+                    </a:p>
+                  </a:txBody>
+                  <a:tcPr marL="32376" marR="32376" marT="32376" marB="32376">
+                    <a:lnL w="9525" cap="flat" cmpd="sng" algn="ctr">
+                      <a:solidFill>
+                        <a:srgbClr val="000000"/>
+                      </a:solidFill>
+                      <a:prstDash val="solid"/>
+                      <a:round/>
+                      <a:headEnd type="none" w="med" len="med"/>
+                      <a:tailEnd type="none" w="med" len="med"/>
+                    </a:lnL>
+                    <a:lnR w="9525" cap="flat" cmpd="sng" algn="ctr">
+                      <a:solidFill>
+                        <a:srgbClr val="000000"/>
+                      </a:solidFill>
+                      <a:prstDash val="solid"/>
+                      <a:round/>
+                      <a:headEnd type="none" w="med" len="med"/>
+                      <a:tailEnd type="none" w="med" len="med"/>
+                    </a:lnR>
+                    <a:lnT w="9525" cap="flat" cmpd="sng" algn="ctr">
+                      <a:solidFill>
+                        <a:srgbClr val="000000"/>
+                      </a:solidFill>
+                      <a:prstDash val="solid"/>
+                      <a:round/>
+                      <a:headEnd type="none" w="med" len="med"/>
+                      <a:tailEnd type="none" w="med" len="med"/>
+                    </a:lnT>
+                    <a:lnB w="9525" cap="flat" cmpd="sng" algn="ctr">
+                      <a:solidFill>
+                        <a:srgbClr val="000000"/>
+                      </a:solidFill>
+                      <a:prstDash val="solid"/>
+                      <a:round/>
+                      <a:headEnd type="none" w="med" len="med"/>
+                      <a:tailEnd type="none" w="med" len="med"/>
+                    </a:lnB>
+                    <a:solidFill>
+                      <a:srgbClr val="D4D4D4"/>
+                    </a:solidFill>
+                  </a:tcPr>
+                </a:tc>
+                <a:tc>
+                  <a:txBody>
+                    <a:bodyPr/>
+                    <a:lstStyle/>
+                    <a:p>
+                      <a:pPr>
+                        <a:buNone/>
+                      </a:pPr>
+                      <a:r>
+                        <a:rPr lang="ru-RU" sz="1500" dirty="0">
+                          <a:solidFill>
+                            <a:srgbClr val="000000"/>
+                          </a:solidFill>
+                          <a:effectLst/>
+                          <a:latin typeface="Helvetica Neue" panose="02000503000000020004" pitchFamily="2" charset="0"/>
+                        </a:rPr>
+                        <a:t>Многие ВР коррелируют</a:t>
+                      </a:r>
+                      <a:endParaRPr lang="ru-RU" sz="1500" dirty="0">
+                        <a:effectLst/>
+                      </a:endParaRPr>
+                    </a:p>
+                  </a:txBody>
+                  <a:tcPr marL="32376" marR="32376" marT="32376" marB="32376">
+                    <a:lnL w="9525" cap="flat" cmpd="sng" algn="ctr">
+                      <a:solidFill>
+                        <a:srgbClr val="000000"/>
+                      </a:solidFill>
+                      <a:prstDash val="solid"/>
+                      <a:round/>
+                      <a:headEnd type="none" w="med" len="med"/>
+                      <a:tailEnd type="none" w="med" len="med"/>
+                    </a:lnL>
+                    <a:lnR w="9525" cap="flat" cmpd="sng" algn="ctr">
+                      <a:solidFill>
+                        <a:srgbClr val="000000"/>
+                      </a:solidFill>
+                      <a:prstDash val="solid"/>
+                      <a:round/>
+                      <a:headEnd type="none" w="med" len="med"/>
+                      <a:tailEnd type="none" w="med" len="med"/>
+                    </a:lnR>
+                    <a:lnT w="9525" cap="flat" cmpd="sng" algn="ctr">
+                      <a:solidFill>
+                        <a:srgbClr val="000000"/>
+                      </a:solidFill>
+                      <a:prstDash val="solid"/>
+                      <a:round/>
+                      <a:headEnd type="none" w="med" len="med"/>
+                      <a:tailEnd type="none" w="med" len="med"/>
+                    </a:lnT>
+                    <a:lnB w="9525" cap="flat" cmpd="sng" algn="ctr">
+                      <a:solidFill>
+                        <a:srgbClr val="000000"/>
+                      </a:solidFill>
+                      <a:prstDash val="solid"/>
+                      <a:round/>
+                      <a:headEnd type="none" w="med" len="med"/>
+                      <a:tailEnd type="none" w="med" len="med"/>
+                    </a:lnB>
+                    <a:noFill/>
+                  </a:tcPr>
+                </a:tc>
+                <a:tc>
+                  <a:txBody>
+                    <a:bodyPr/>
+                    <a:lstStyle/>
+                    <a:p>
+                      <a:pPr>
+                        <a:buNone/>
+                      </a:pPr>
+                      <a:r>
+                        <a:rPr lang="ru-RU" sz="1500">
+                          <a:solidFill>
+                            <a:srgbClr val="000000"/>
+                          </a:solidFill>
+                          <a:effectLst/>
+                          <a:latin typeface="Helvetica Neue" panose="02000503000000020004" pitchFamily="2" charset="0"/>
+                        </a:rPr>
+                        <a:t>Переменные мешают, а не помогают</a:t>
+                      </a:r>
+                      <a:endParaRPr lang="ru-RU" sz="1500">
+                        <a:effectLst/>
+                      </a:endParaRPr>
+                    </a:p>
+                  </a:txBody>
+                  <a:tcPr marL="32376" marR="32376" marT="32376" marB="32376">
+                    <a:lnL w="9525" cap="flat" cmpd="sng" algn="ctr">
+                      <a:solidFill>
+                        <a:srgbClr val="000000"/>
+                      </a:solidFill>
+                      <a:prstDash val="solid"/>
+                      <a:round/>
+                      <a:headEnd type="none" w="med" len="med"/>
+                      <a:tailEnd type="none" w="med" len="med"/>
+                    </a:lnL>
+                    <a:lnR w="9525" cap="flat" cmpd="sng" algn="ctr">
+                      <a:solidFill>
+                        <a:srgbClr val="000000"/>
+                      </a:solidFill>
+                      <a:prstDash val="solid"/>
+                      <a:round/>
+                      <a:headEnd type="none" w="med" len="med"/>
+                      <a:tailEnd type="none" w="med" len="med"/>
+                    </a:lnR>
+                    <a:lnT w="9525" cap="flat" cmpd="sng" algn="ctr">
+                      <a:solidFill>
+                        <a:srgbClr val="000000"/>
+                      </a:solidFill>
+                      <a:prstDash val="solid"/>
+                      <a:round/>
+                      <a:headEnd type="none" w="med" len="med"/>
+                      <a:tailEnd type="none" w="med" len="med"/>
+                    </a:lnT>
+                    <a:lnB w="9525" cap="flat" cmpd="sng" algn="ctr">
+                      <a:solidFill>
+                        <a:srgbClr val="000000"/>
+                      </a:solidFill>
+                      <a:prstDash val="solid"/>
+                      <a:round/>
+                      <a:headEnd type="none" w="med" len="med"/>
+                      <a:tailEnd type="none" w="med" len="med"/>
+                    </a:lnB>
+                    <a:noFill/>
+                  </a:tcPr>
+                </a:tc>
+                <a:extLst>
+                  <a:ext uri="{0D108BD9-81ED-4DB2-BD59-A6C34878D82A}">
+                    <a16:rowId xmlns:a16="http://schemas.microsoft.com/office/drawing/2014/main" val="3813296528"/>
+                  </a:ext>
+                </a:extLst>
+              </a:tr>
+              <a:tr h="0">
+                <a:tc>
+                  <a:txBody>
+                    <a:bodyPr/>
+                    <a:lstStyle/>
+                    <a:p>
+                      <a:pPr>
+                        <a:buNone/>
+                      </a:pPr>
+                      <a:r>
+                        <a:rPr lang="ru-RU" sz="1500" b="1">
+                          <a:solidFill>
+                            <a:srgbClr val="000000"/>
+                          </a:solidFill>
+                          <a:effectLst/>
+                          <a:latin typeface="Helvetica Neue" panose="02000503000000020004" pitchFamily="2" charset="0"/>
+                        </a:rPr>
+                        <a:t>Пропуски и шум</a:t>
+                      </a:r>
+                      <a:endParaRPr lang="ru-RU" sz="1500">
+                        <a:effectLst/>
+                      </a:endParaRPr>
+                    </a:p>
+                  </a:txBody>
+                  <a:tcPr marL="32376" marR="32376" marT="32376" marB="32376">
+                    <a:lnL w="9525" cap="flat" cmpd="sng" algn="ctr">
+                      <a:solidFill>
+                        <a:srgbClr val="000000"/>
+                      </a:solidFill>
+                      <a:prstDash val="solid"/>
+                      <a:round/>
+                      <a:headEnd type="none" w="med" len="med"/>
+                      <a:tailEnd type="none" w="med" len="med"/>
+                    </a:lnL>
+                    <a:lnR w="9525" cap="flat" cmpd="sng" algn="ctr">
+                      <a:solidFill>
+                        <a:srgbClr val="000000"/>
+                      </a:solidFill>
+                      <a:prstDash val="solid"/>
+                      <a:round/>
+                      <a:headEnd type="none" w="med" len="med"/>
+                      <a:tailEnd type="none" w="med" len="med"/>
+                    </a:lnR>
+                    <a:lnT w="9525" cap="flat" cmpd="sng" algn="ctr">
+                      <a:solidFill>
+                        <a:srgbClr val="000000"/>
+                      </a:solidFill>
+                      <a:prstDash val="solid"/>
+                      <a:round/>
+                      <a:headEnd type="none" w="med" len="med"/>
+                      <a:tailEnd type="none" w="med" len="med"/>
+                    </a:lnT>
+                    <a:lnB w="9525" cap="flat" cmpd="sng" algn="ctr">
+                      <a:solidFill>
+                        <a:srgbClr val="000000"/>
+                      </a:solidFill>
+                      <a:prstDash val="solid"/>
+                      <a:round/>
+                      <a:headEnd type="none" w="med" len="med"/>
+                      <a:tailEnd type="none" w="med" len="med"/>
+                    </a:lnB>
+                    <a:solidFill>
+                      <a:srgbClr val="D4D4D4"/>
+                    </a:solidFill>
+                  </a:tcPr>
+                </a:tc>
+                <a:tc>
+                  <a:txBody>
+                    <a:bodyPr/>
+                    <a:lstStyle/>
+                    <a:p>
+                      <a:pPr>
+                        <a:buNone/>
+                      </a:pPr>
+                      <a:r>
+                        <a:rPr lang="ru-RU" sz="1500" dirty="0">
+                          <a:solidFill>
+                            <a:srgbClr val="000000"/>
+                          </a:solidFill>
+                          <a:effectLst/>
+                          <a:latin typeface="Helvetica Neue" panose="02000503000000020004" pitchFamily="2" charset="0"/>
+                        </a:rPr>
+                        <a:t>Реальные данные «грязные»</a:t>
+                      </a:r>
+                      <a:endParaRPr lang="ru-RU" sz="1500" dirty="0">
+                        <a:effectLst/>
+                      </a:endParaRPr>
+                    </a:p>
+                  </a:txBody>
+                  <a:tcPr marL="32376" marR="32376" marT="32376" marB="32376">
+                    <a:lnL w="9525" cap="flat" cmpd="sng" algn="ctr">
+                      <a:solidFill>
+                        <a:srgbClr val="000000"/>
+                      </a:solidFill>
+                      <a:prstDash val="solid"/>
+                      <a:round/>
+                      <a:headEnd type="none" w="med" len="med"/>
+                      <a:tailEnd type="none" w="med" len="med"/>
+                    </a:lnL>
+                    <a:lnR w="9525" cap="flat" cmpd="sng" algn="ctr">
+                      <a:solidFill>
+                        <a:srgbClr val="000000"/>
+                      </a:solidFill>
+                      <a:prstDash val="solid"/>
+                      <a:round/>
+                      <a:headEnd type="none" w="med" len="med"/>
+                      <a:tailEnd type="none" w="med" len="med"/>
+                    </a:lnR>
+                    <a:lnT w="9525" cap="flat" cmpd="sng" algn="ctr">
+                      <a:solidFill>
+                        <a:srgbClr val="000000"/>
+                      </a:solidFill>
+                      <a:prstDash val="solid"/>
+                      <a:round/>
+                      <a:headEnd type="none" w="med" len="med"/>
+                      <a:tailEnd type="none" w="med" len="med"/>
+                    </a:lnT>
+                    <a:lnB w="9525" cap="flat" cmpd="sng" algn="ctr">
+                      <a:solidFill>
+                        <a:srgbClr val="000000"/>
+                      </a:solidFill>
+                      <a:prstDash val="solid"/>
+                      <a:round/>
+                      <a:headEnd type="none" w="med" len="med"/>
+                      <a:tailEnd type="none" w="med" len="med"/>
+                    </a:lnB>
+                    <a:noFill/>
+                  </a:tcPr>
+                </a:tc>
+                <a:tc>
+                  <a:txBody>
+                    <a:bodyPr/>
+                    <a:lstStyle/>
+                    <a:p>
+                      <a:pPr>
+                        <a:buNone/>
+                      </a:pPr>
+                      <a:r>
+                        <a:rPr lang="ru-RU" sz="1500" dirty="0">
+                          <a:solidFill>
+                            <a:srgbClr val="000000"/>
+                          </a:solidFill>
+                          <a:effectLst/>
+                          <a:latin typeface="Helvetica Neue" panose="02000503000000020004" pitchFamily="2" charset="0"/>
+                        </a:rPr>
+                        <a:t>Модели неустойчивы</a:t>
+                      </a:r>
+                      <a:endParaRPr lang="ru-RU" sz="1500" dirty="0">
+                        <a:effectLst/>
+                      </a:endParaRPr>
+                    </a:p>
+                  </a:txBody>
+                  <a:tcPr marL="32376" marR="32376" marT="32376" marB="32376">
+                    <a:lnL w="9525" cap="flat" cmpd="sng" algn="ctr">
+                      <a:solidFill>
+                        <a:srgbClr val="000000"/>
+                      </a:solidFill>
+                      <a:prstDash val="solid"/>
+                      <a:round/>
+                      <a:headEnd type="none" w="med" len="med"/>
+                      <a:tailEnd type="none" w="med" len="med"/>
+                    </a:lnL>
+                    <a:lnR w="9525" cap="flat" cmpd="sng" algn="ctr">
+                      <a:solidFill>
+                        <a:srgbClr val="000000"/>
+                      </a:solidFill>
+                      <a:prstDash val="solid"/>
+                      <a:round/>
+                      <a:headEnd type="none" w="med" len="med"/>
+                      <a:tailEnd type="none" w="med" len="med"/>
+                    </a:lnR>
+                    <a:lnT w="9525" cap="flat" cmpd="sng" algn="ctr">
+                      <a:solidFill>
+                        <a:srgbClr val="000000"/>
+                      </a:solidFill>
+                      <a:prstDash val="solid"/>
+                      <a:round/>
+                      <a:headEnd type="none" w="med" len="med"/>
+                      <a:tailEnd type="none" w="med" len="med"/>
+                    </a:lnT>
+                    <a:lnB w="9525" cap="flat" cmpd="sng" algn="ctr">
+                      <a:solidFill>
+                        <a:srgbClr val="000000"/>
+                      </a:solidFill>
+                      <a:prstDash val="solid"/>
+                      <a:round/>
+                      <a:headEnd type="none" w="med" len="med"/>
+                      <a:tailEnd type="none" w="med" len="med"/>
+                    </a:lnB>
+                    <a:noFill/>
+                  </a:tcPr>
+                </a:tc>
+                <a:extLst>
+                  <a:ext uri="{0D108BD9-81ED-4DB2-BD59-A6C34878D82A}">
+                    <a16:rowId xmlns:a16="http://schemas.microsoft.com/office/drawing/2014/main" val="86133994"/>
+                  </a:ext>
+                </a:extLst>
+              </a:tr>
+            </a:tbl>
+          </a:graphicData>
+        </a:graphic>
+      </p:graphicFrame>
     </p:spTree>
     <p:extLst>
       <p:ext uri="{BB962C8B-B14F-4D97-AF65-F5344CB8AC3E}">
@@ -7183,7 +12292,2854 @@
 </p:sld>
 </file>
 
-<file path=ppt/slides/slide17.xml><?xml version="1.0" encoding="utf-8"?>
+<file path=ppt/slides/slide21.xml><?xml version="1.0" encoding="utf-8"?>
+<p:sld xmlns:a="http://schemas.openxmlformats.org/drawingml/2006/main" xmlns:r="http://schemas.openxmlformats.org/officeDocument/2006/relationships" xmlns:p="http://schemas.openxmlformats.org/presentationml/2006/main" show="0">
+  <p:cSld>
+    <p:spTree>
+      <p:nvGrpSpPr>
+        <p:cNvPr id="1" name="">
+          <a:extLst>
+            <a:ext uri="{FF2B5EF4-FFF2-40B4-BE49-F238E27FC236}">
+              <a16:creationId xmlns:a16="http://schemas.microsoft.com/office/drawing/2014/main" id="{AD75F56E-71A5-6503-EB19-209346A85E2D}"/>
+            </a:ext>
+          </a:extLst>
+        </p:cNvPr>
+        <p:cNvGrpSpPr/>
+        <p:nvPr/>
+      </p:nvGrpSpPr>
+      <p:grpSpPr>
+        <a:xfrm>
+          <a:off x="0" y="0"/>
+          <a:ext cx="0" cy="0"/>
+          <a:chOff x="0" y="0"/>
+          <a:chExt cx="0" cy="0"/>
+        </a:xfrm>
+      </p:grpSpPr>
+      <p:sp>
+        <p:nvSpPr>
+          <p:cNvPr id="2" name="Заголовок 1">
+            <a:extLst>
+              <a:ext uri="{FF2B5EF4-FFF2-40B4-BE49-F238E27FC236}">
+                <a16:creationId xmlns:a16="http://schemas.microsoft.com/office/drawing/2014/main" id="{06569FBC-C037-C591-CED3-514814F6A517}"/>
+              </a:ext>
+            </a:extLst>
+          </p:cNvPr>
+          <p:cNvSpPr>
+            <a:spLocks noGrp="1"/>
+          </p:cNvSpPr>
+          <p:nvPr>
+            <p:ph type="title"/>
+          </p:nvPr>
+        </p:nvSpPr>
+        <p:spPr>
+          <a:xfrm>
+            <a:off x="275573" y="365126"/>
+            <a:ext cx="11078227" cy="315912"/>
+          </a:xfrm>
+        </p:spPr>
+        <p:txBody>
+          <a:bodyPr>
+            <a:normAutofit fontScale="90000"/>
+          </a:bodyPr>
+          <a:lstStyle/>
+          <a:p>
+            <a:r>
+              <a:rPr lang="ru-RU" sz="3200" dirty="0"/>
+              <a:t>Особенности анализа сверх больших массивов ВР</a:t>
+            </a:r>
+          </a:p>
+        </p:txBody>
+      </p:sp>
+      <p:sp>
+        <p:nvSpPr>
+          <p:cNvPr id="3" name="Объект 2">
+            <a:extLst>
+              <a:ext uri="{FF2B5EF4-FFF2-40B4-BE49-F238E27FC236}">
+                <a16:creationId xmlns:a16="http://schemas.microsoft.com/office/drawing/2014/main" id="{A574CC75-0A52-6803-AE1D-3980F6DC476B}"/>
+              </a:ext>
+            </a:extLst>
+          </p:cNvPr>
+          <p:cNvSpPr>
+            <a:spLocks noGrp="1"/>
+          </p:cNvSpPr>
+          <p:nvPr>
+            <p:ph idx="1"/>
+          </p:nvPr>
+        </p:nvSpPr>
+        <p:spPr>
+          <a:xfrm>
+            <a:off x="162838" y="789140"/>
+            <a:ext cx="11498893" cy="5703734"/>
+          </a:xfrm>
+        </p:spPr>
+        <p:txBody>
+          <a:bodyPr>
+            <a:normAutofit/>
+          </a:bodyPr>
+          <a:lstStyle/>
+          <a:p>
+            <a:r>
+              <a:rPr lang="ru-RU" dirty="0"/>
+              <a:t>Декомпозиция задачи</a:t>
+            </a:r>
+            <a:endParaRPr lang="ru-RU" b="1" dirty="0"/>
+          </a:p>
+          <a:p>
+            <a:r>
+              <a:rPr lang="ru-RU" dirty="0"/>
+              <a:t>По времени: Агрегация данных </a:t>
+            </a:r>
+          </a:p>
+          <a:p>
+            <a:r>
+              <a:rPr lang="ru-RU" dirty="0"/>
+              <a:t>По переменным: кластеризация</a:t>
+            </a:r>
+            <a:r>
+              <a:rPr lang="en" dirty="0"/>
+              <a:t>, PCA.</a:t>
+            </a:r>
+          </a:p>
+          <a:p>
+            <a:pPr lvl="1"/>
+            <a:r>
+              <a:rPr lang="ru-RU" dirty="0"/>
+              <a:t>Пример: вместо </a:t>
+            </a:r>
+            <a:r>
+              <a:rPr lang="en" dirty="0"/>
+              <a:t>VAR(1000) — 100 VAR(10) </a:t>
+            </a:r>
+            <a:r>
+              <a:rPr lang="ru-RU" dirty="0"/>
+              <a:t>на кластерах. </a:t>
+            </a:r>
+          </a:p>
+          <a:p>
+            <a:endParaRPr lang="ru-RU" sz="1800" dirty="0"/>
+          </a:p>
+          <a:p>
+            <a:br>
+              <a:rPr lang="ru-RU" dirty="0"/>
+            </a:br>
+            <a:endParaRPr lang="ru-RU" dirty="0"/>
+          </a:p>
+        </p:txBody>
+      </p:sp>
+    </p:spTree>
+    <p:extLst>
+      <p:ext uri="{BB962C8B-B14F-4D97-AF65-F5344CB8AC3E}">
+        <p14:creationId xmlns:p14="http://schemas.microsoft.com/office/powerpoint/2010/main" val="2950533641"/>
+      </p:ext>
+    </p:extLst>
+  </p:cSld>
+  <p:clrMapOvr>
+    <a:masterClrMapping/>
+  </p:clrMapOvr>
+</p:sld>
+</file>
+
+<file path=ppt/slides/slide22.xml><?xml version="1.0" encoding="utf-8"?>
+<p:sld xmlns:a="http://schemas.openxmlformats.org/drawingml/2006/main" xmlns:r="http://schemas.openxmlformats.org/officeDocument/2006/relationships" xmlns:p="http://schemas.openxmlformats.org/presentationml/2006/main" show="0">
+  <p:cSld>
+    <p:spTree>
+      <p:nvGrpSpPr>
+        <p:cNvPr id="1" name=""/>
+        <p:cNvGrpSpPr/>
+        <p:nvPr/>
+      </p:nvGrpSpPr>
+      <p:grpSpPr>
+        <a:xfrm>
+          <a:off x="0" y="0"/>
+          <a:ext cx="0" cy="0"/>
+          <a:chOff x="0" y="0"/>
+          <a:chExt cx="0" cy="0"/>
+        </a:xfrm>
+      </p:grpSpPr>
+      <p:sp>
+        <p:nvSpPr>
+          <p:cNvPr id="2" name="Заголовок 1">
+            <a:extLst>
+              <a:ext uri="{FF2B5EF4-FFF2-40B4-BE49-F238E27FC236}">
+                <a16:creationId xmlns:a16="http://schemas.microsoft.com/office/drawing/2014/main" id="{E03E863B-82FA-8A26-F3C1-29816B527E6E}"/>
+              </a:ext>
+            </a:extLst>
+          </p:cNvPr>
+          <p:cNvSpPr>
+            <a:spLocks noGrp="1"/>
+          </p:cNvSpPr>
+          <p:nvPr>
+            <p:ph type="title"/>
+          </p:nvPr>
+        </p:nvSpPr>
+        <p:spPr>
+          <a:xfrm>
+            <a:off x="300625" y="365125"/>
+            <a:ext cx="11053175" cy="624431"/>
+          </a:xfrm>
+        </p:spPr>
+        <p:txBody>
+          <a:bodyPr>
+            <a:normAutofit fontScale="90000"/>
+          </a:bodyPr>
+          <a:lstStyle/>
+          <a:p>
+            <a:r>
+              <a:rPr lang="ru-RU" dirty="0"/>
+              <a:t>Онлайн обучение</a:t>
+            </a:r>
+          </a:p>
+        </p:txBody>
+      </p:sp>
+      <p:graphicFrame>
+        <p:nvGraphicFramePr>
+          <p:cNvPr id="4" name="Объект 3">
+            <a:extLst>
+              <a:ext uri="{FF2B5EF4-FFF2-40B4-BE49-F238E27FC236}">
+                <a16:creationId xmlns:a16="http://schemas.microsoft.com/office/drawing/2014/main" id="{4418E6E2-362A-9003-6BD0-19B65E679BC7}"/>
+              </a:ext>
+            </a:extLst>
+          </p:cNvPr>
+          <p:cNvGraphicFramePr>
+            <a:graphicFrameLocks noGrp="1"/>
+          </p:cNvGraphicFramePr>
+          <p:nvPr>
+            <p:ph idx="1"/>
+            <p:extLst>
+              <p:ext uri="{D42A27DB-BD31-4B8C-83A1-F6EECF244321}">
+                <p14:modId xmlns:p14="http://schemas.microsoft.com/office/powerpoint/2010/main" val="3203120644"/>
+              </p:ext>
+            </p:extLst>
+          </p:nvPr>
+        </p:nvGraphicFramePr>
+        <p:xfrm>
+          <a:off x="543250" y="1367018"/>
+          <a:ext cx="4943475" cy="4770120"/>
+        </p:xfrm>
+        <a:graphic>
+          <a:graphicData uri="http://schemas.openxmlformats.org/drawingml/2006/table">
+            <a:tbl>
+              <a:tblPr/>
+              <a:tblGrid>
+                <a:gridCol w="1552575">
+                  <a:extLst>
+                    <a:ext uri="{9D8B030D-6E8A-4147-A177-3AD203B41FA5}">
+                      <a16:colId xmlns:a16="http://schemas.microsoft.com/office/drawing/2014/main" val="3745897110"/>
+                    </a:ext>
+                  </a:extLst>
+                </a:gridCol>
+                <a:gridCol w="1476375">
+                  <a:extLst>
+                    <a:ext uri="{9D8B030D-6E8A-4147-A177-3AD203B41FA5}">
+                      <a16:colId xmlns:a16="http://schemas.microsoft.com/office/drawing/2014/main" val="3457291006"/>
+                    </a:ext>
+                  </a:extLst>
+                </a:gridCol>
+                <a:gridCol w="1914525">
+                  <a:extLst>
+                    <a:ext uri="{9D8B030D-6E8A-4147-A177-3AD203B41FA5}">
+                      <a16:colId xmlns:a16="http://schemas.microsoft.com/office/drawing/2014/main" val="1305253127"/>
+                    </a:ext>
+                  </a:extLst>
+                </a:gridCol>
+              </a:tblGrid>
+              <a:tr h="104775">
+                <a:tc>
+                  <a:txBody>
+                    <a:bodyPr/>
+                    <a:lstStyle/>
+                    <a:p>
+                      <a:pPr>
+                        <a:buNone/>
+                      </a:pPr>
+                      <a:r>
+                        <a:rPr lang="ru-RU" b="1">
+                          <a:solidFill>
+                            <a:srgbClr val="000000"/>
+                          </a:solidFill>
+                          <a:effectLst/>
+                          <a:latin typeface="Helvetica Neue" panose="02000503000000020004" pitchFamily="2" charset="0"/>
+                        </a:rPr>
+                        <a:t>Модель</a:t>
+                      </a:r>
+                      <a:endParaRPr lang="ru-RU">
+                        <a:effectLst/>
+                      </a:endParaRPr>
+                    </a:p>
+                  </a:txBody>
+                  <a:tcPr marL="38100" marR="38100" marT="38100" marB="38100">
+                    <a:lnL w="9525" cap="flat" cmpd="sng" algn="ctr">
+                      <a:solidFill>
+                        <a:srgbClr val="000000"/>
+                      </a:solidFill>
+                      <a:prstDash val="solid"/>
+                      <a:round/>
+                      <a:headEnd type="none" w="med" len="med"/>
+                      <a:tailEnd type="none" w="med" len="med"/>
+                    </a:lnL>
+                    <a:lnR w="9525" cap="flat" cmpd="sng" algn="ctr">
+                      <a:solidFill>
+                        <a:srgbClr val="000000"/>
+                      </a:solidFill>
+                      <a:prstDash val="solid"/>
+                      <a:round/>
+                      <a:headEnd type="none" w="med" len="med"/>
+                      <a:tailEnd type="none" w="med" len="med"/>
+                    </a:lnR>
+                    <a:lnT w="9525" cap="flat" cmpd="sng" algn="ctr">
+                      <a:solidFill>
+                        <a:srgbClr val="000000"/>
+                      </a:solidFill>
+                      <a:prstDash val="solid"/>
+                      <a:round/>
+                      <a:headEnd type="none" w="med" len="med"/>
+                      <a:tailEnd type="none" w="med" len="med"/>
+                    </a:lnT>
+                    <a:lnB w="9525" cap="flat" cmpd="sng" algn="ctr">
+                      <a:solidFill>
+                        <a:srgbClr val="000000"/>
+                      </a:solidFill>
+                      <a:prstDash val="solid"/>
+                      <a:round/>
+                      <a:headEnd type="none" w="med" len="med"/>
+                      <a:tailEnd type="none" w="med" len="med"/>
+                    </a:lnB>
+                    <a:solidFill>
+                      <a:srgbClr val="B0B3B2"/>
+                    </a:solidFill>
+                  </a:tcPr>
+                </a:tc>
+                <a:tc>
+                  <a:txBody>
+                    <a:bodyPr/>
+                    <a:lstStyle/>
+                    <a:p>
+                      <a:pPr>
+                        <a:buNone/>
+                      </a:pPr>
+                      <a:r>
+                        <a:rPr lang="ru-RU" b="1">
+                          <a:solidFill>
+                            <a:srgbClr val="000000"/>
+                          </a:solidFill>
+                          <a:effectLst/>
+                          <a:latin typeface="Helvetica Neue" panose="02000503000000020004" pitchFamily="2" charset="0"/>
+                        </a:rPr>
+                        <a:t>Онлайновая версия</a:t>
+                      </a:r>
+                      <a:endParaRPr lang="ru-RU">
+                        <a:effectLst/>
+                      </a:endParaRPr>
+                    </a:p>
+                  </a:txBody>
+                  <a:tcPr marL="38100" marR="38100" marT="38100" marB="38100">
+                    <a:lnL w="9525" cap="flat" cmpd="sng" algn="ctr">
+                      <a:solidFill>
+                        <a:srgbClr val="000000"/>
+                      </a:solidFill>
+                      <a:prstDash val="solid"/>
+                      <a:round/>
+                      <a:headEnd type="none" w="med" len="med"/>
+                      <a:tailEnd type="none" w="med" len="med"/>
+                    </a:lnL>
+                    <a:lnR w="9525" cap="flat" cmpd="sng" algn="ctr">
+                      <a:solidFill>
+                        <a:srgbClr val="000000"/>
+                      </a:solidFill>
+                      <a:prstDash val="solid"/>
+                      <a:round/>
+                      <a:headEnd type="none" w="med" len="med"/>
+                      <a:tailEnd type="none" w="med" len="med"/>
+                    </a:lnR>
+                    <a:lnT w="9525" cap="flat" cmpd="sng" algn="ctr">
+                      <a:solidFill>
+                        <a:srgbClr val="000000"/>
+                      </a:solidFill>
+                      <a:prstDash val="solid"/>
+                      <a:round/>
+                      <a:headEnd type="none" w="med" len="med"/>
+                      <a:tailEnd type="none" w="med" len="med"/>
+                    </a:lnT>
+                    <a:lnB w="9525" cap="flat" cmpd="sng" algn="ctr">
+                      <a:solidFill>
+                        <a:srgbClr val="000000"/>
+                      </a:solidFill>
+                      <a:prstDash val="solid"/>
+                      <a:round/>
+                      <a:headEnd type="none" w="med" len="med"/>
+                      <a:tailEnd type="none" w="med" len="med"/>
+                    </a:lnB>
+                    <a:solidFill>
+                      <a:srgbClr val="B0B3B2"/>
+                    </a:solidFill>
+                  </a:tcPr>
+                </a:tc>
+                <a:tc>
+                  <a:txBody>
+                    <a:bodyPr/>
+                    <a:lstStyle/>
+                    <a:p>
+                      <a:pPr>
+                        <a:buNone/>
+                      </a:pPr>
+                      <a:r>
+                        <a:rPr lang="ru-RU" b="1">
+                          <a:solidFill>
+                            <a:srgbClr val="000000"/>
+                          </a:solidFill>
+                          <a:effectLst/>
+                          <a:latin typeface="Helvetica Neue" panose="02000503000000020004" pitchFamily="2" charset="0"/>
+                        </a:rPr>
+                        <a:t>Особенности</a:t>
+                      </a:r>
+                      <a:endParaRPr lang="ru-RU">
+                        <a:effectLst/>
+                      </a:endParaRPr>
+                    </a:p>
+                  </a:txBody>
+                  <a:tcPr marL="38100" marR="38100" marT="38100" marB="38100">
+                    <a:lnL w="9525" cap="flat" cmpd="sng" algn="ctr">
+                      <a:solidFill>
+                        <a:srgbClr val="000000"/>
+                      </a:solidFill>
+                      <a:prstDash val="solid"/>
+                      <a:round/>
+                      <a:headEnd type="none" w="med" len="med"/>
+                      <a:tailEnd type="none" w="med" len="med"/>
+                    </a:lnL>
+                    <a:lnR w="9525" cap="flat" cmpd="sng" algn="ctr">
+                      <a:solidFill>
+                        <a:srgbClr val="000000"/>
+                      </a:solidFill>
+                      <a:prstDash val="solid"/>
+                      <a:round/>
+                      <a:headEnd type="none" w="med" len="med"/>
+                      <a:tailEnd type="none" w="med" len="med"/>
+                    </a:lnR>
+                    <a:lnT w="9525" cap="flat" cmpd="sng" algn="ctr">
+                      <a:solidFill>
+                        <a:srgbClr val="000000"/>
+                      </a:solidFill>
+                      <a:prstDash val="solid"/>
+                      <a:round/>
+                      <a:headEnd type="none" w="med" len="med"/>
+                      <a:tailEnd type="none" w="med" len="med"/>
+                    </a:lnT>
+                    <a:lnB w="9525" cap="flat" cmpd="sng" algn="ctr">
+                      <a:solidFill>
+                        <a:srgbClr val="000000"/>
+                      </a:solidFill>
+                      <a:prstDash val="solid"/>
+                      <a:round/>
+                      <a:headEnd type="none" w="med" len="med"/>
+                      <a:tailEnd type="none" w="med" len="med"/>
+                    </a:lnB>
+                    <a:solidFill>
+                      <a:srgbClr val="B0B3B2"/>
+                    </a:solidFill>
+                  </a:tcPr>
+                </a:tc>
+                <a:extLst>
+                  <a:ext uri="{0D108BD9-81ED-4DB2-BD59-A6C34878D82A}">
+                    <a16:rowId xmlns:a16="http://schemas.microsoft.com/office/drawing/2014/main" val="2484045394"/>
+                  </a:ext>
+                </a:extLst>
+              </a:tr>
+              <a:tr h="114300">
+                <a:tc>
+                  <a:txBody>
+                    <a:bodyPr/>
+                    <a:lstStyle/>
+                    <a:p>
+                      <a:pPr>
+                        <a:buNone/>
+                      </a:pPr>
+                      <a:r>
+                        <a:rPr lang="ru-RU" b="1">
+                          <a:solidFill>
+                            <a:srgbClr val="000000"/>
+                          </a:solidFill>
+                          <a:effectLst/>
+                          <a:latin typeface="Helvetica Neue" panose="02000503000000020004" pitchFamily="2" charset="0"/>
+                        </a:rPr>
+                        <a:t>Линейная регрессия</a:t>
+                      </a:r>
+                      <a:endParaRPr lang="ru-RU">
+                        <a:effectLst/>
+                      </a:endParaRPr>
+                    </a:p>
+                  </a:txBody>
+                  <a:tcPr marL="38100" marR="38100" marT="38100" marB="38100">
+                    <a:lnL w="9525" cap="flat" cmpd="sng" algn="ctr">
+                      <a:solidFill>
+                        <a:srgbClr val="000000"/>
+                      </a:solidFill>
+                      <a:prstDash val="solid"/>
+                      <a:round/>
+                      <a:headEnd type="none" w="med" len="med"/>
+                      <a:tailEnd type="none" w="med" len="med"/>
+                    </a:lnL>
+                    <a:lnR w="9525" cap="flat" cmpd="sng" algn="ctr">
+                      <a:solidFill>
+                        <a:srgbClr val="000000"/>
+                      </a:solidFill>
+                      <a:prstDash val="solid"/>
+                      <a:round/>
+                      <a:headEnd type="none" w="med" len="med"/>
+                      <a:tailEnd type="none" w="med" len="med"/>
+                    </a:lnR>
+                    <a:lnT w="9525" cap="flat" cmpd="sng" algn="ctr">
+                      <a:solidFill>
+                        <a:srgbClr val="000000"/>
+                      </a:solidFill>
+                      <a:prstDash val="solid"/>
+                      <a:round/>
+                      <a:headEnd type="none" w="med" len="med"/>
+                      <a:tailEnd type="none" w="med" len="med"/>
+                    </a:lnT>
+                    <a:lnB w="9525" cap="flat" cmpd="sng" algn="ctr">
+                      <a:solidFill>
+                        <a:srgbClr val="000000"/>
+                      </a:solidFill>
+                      <a:prstDash val="solid"/>
+                      <a:round/>
+                      <a:headEnd type="none" w="med" len="med"/>
+                      <a:tailEnd type="none" w="med" len="med"/>
+                    </a:lnB>
+                    <a:solidFill>
+                      <a:srgbClr val="D4D4D4"/>
+                    </a:solidFill>
+                  </a:tcPr>
+                </a:tc>
+                <a:tc>
+                  <a:txBody>
+                    <a:bodyPr/>
+                    <a:lstStyle/>
+                    <a:p>
+                      <a:pPr>
+                        <a:buNone/>
+                      </a:pPr>
+                      <a:r>
+                        <a:rPr lang="en">
+                          <a:solidFill>
+                            <a:srgbClr val="000000"/>
+                          </a:solidFill>
+                          <a:effectLst/>
+                          <a:latin typeface="Helvetica Neue" panose="02000503000000020004" pitchFamily="2" charset="0"/>
+                        </a:rPr>
+                        <a:t>SGDRegressor (sklearn)</a:t>
+                      </a:r>
+                      <a:endParaRPr lang="en">
+                        <a:effectLst/>
+                      </a:endParaRPr>
+                    </a:p>
+                  </a:txBody>
+                  <a:tcPr marL="38100" marR="38100" marT="38100" marB="38100">
+                    <a:lnL w="9525" cap="flat" cmpd="sng" algn="ctr">
+                      <a:solidFill>
+                        <a:srgbClr val="000000"/>
+                      </a:solidFill>
+                      <a:prstDash val="solid"/>
+                      <a:round/>
+                      <a:headEnd type="none" w="med" len="med"/>
+                      <a:tailEnd type="none" w="med" len="med"/>
+                    </a:lnL>
+                    <a:lnR w="9525" cap="flat" cmpd="sng" algn="ctr">
+                      <a:solidFill>
+                        <a:srgbClr val="000000"/>
+                      </a:solidFill>
+                      <a:prstDash val="solid"/>
+                      <a:round/>
+                      <a:headEnd type="none" w="med" len="med"/>
+                      <a:tailEnd type="none" w="med" len="med"/>
+                    </a:lnR>
+                    <a:lnT w="9525" cap="flat" cmpd="sng" algn="ctr">
+                      <a:solidFill>
+                        <a:srgbClr val="000000"/>
+                      </a:solidFill>
+                      <a:prstDash val="solid"/>
+                      <a:round/>
+                      <a:headEnd type="none" w="med" len="med"/>
+                      <a:tailEnd type="none" w="med" len="med"/>
+                    </a:lnT>
+                    <a:lnB w="9525" cap="flat" cmpd="sng" algn="ctr">
+                      <a:solidFill>
+                        <a:srgbClr val="000000"/>
+                      </a:solidFill>
+                      <a:prstDash val="solid"/>
+                      <a:round/>
+                      <a:headEnd type="none" w="med" len="med"/>
+                      <a:tailEnd type="none" w="med" len="med"/>
+                    </a:lnB>
+                    <a:noFill/>
+                  </a:tcPr>
+                </a:tc>
+                <a:tc>
+                  <a:txBody>
+                    <a:bodyPr/>
+                    <a:lstStyle/>
+                    <a:p>
+                      <a:pPr>
+                        <a:buNone/>
+                      </a:pPr>
+                      <a:r>
+                        <a:rPr lang="ru-RU">
+                          <a:solidFill>
+                            <a:srgbClr val="000000"/>
+                          </a:solidFill>
+                          <a:effectLst/>
+                          <a:latin typeface="Helvetica Neue" panose="02000503000000020004" pitchFamily="2" charset="0"/>
+                        </a:rPr>
+                        <a:t>Обновление весов по одному примеру</a:t>
+                      </a:r>
+                      <a:endParaRPr lang="ru-RU">
+                        <a:effectLst/>
+                      </a:endParaRPr>
+                    </a:p>
+                  </a:txBody>
+                  <a:tcPr marL="38100" marR="38100" marT="38100" marB="38100">
+                    <a:lnL w="9525" cap="flat" cmpd="sng" algn="ctr">
+                      <a:solidFill>
+                        <a:srgbClr val="000000"/>
+                      </a:solidFill>
+                      <a:prstDash val="solid"/>
+                      <a:round/>
+                      <a:headEnd type="none" w="med" len="med"/>
+                      <a:tailEnd type="none" w="med" len="med"/>
+                    </a:lnL>
+                    <a:lnR w="9525" cap="flat" cmpd="sng" algn="ctr">
+                      <a:solidFill>
+                        <a:srgbClr val="000000"/>
+                      </a:solidFill>
+                      <a:prstDash val="solid"/>
+                      <a:round/>
+                      <a:headEnd type="none" w="med" len="med"/>
+                      <a:tailEnd type="none" w="med" len="med"/>
+                    </a:lnR>
+                    <a:lnT w="9525" cap="flat" cmpd="sng" algn="ctr">
+                      <a:solidFill>
+                        <a:srgbClr val="000000"/>
+                      </a:solidFill>
+                      <a:prstDash val="solid"/>
+                      <a:round/>
+                      <a:headEnd type="none" w="med" len="med"/>
+                      <a:tailEnd type="none" w="med" len="med"/>
+                    </a:lnT>
+                    <a:lnB w="9525" cap="flat" cmpd="sng" algn="ctr">
+                      <a:solidFill>
+                        <a:srgbClr val="000000"/>
+                      </a:solidFill>
+                      <a:prstDash val="solid"/>
+                      <a:round/>
+                      <a:headEnd type="none" w="med" len="med"/>
+                      <a:tailEnd type="none" w="med" len="med"/>
+                    </a:lnB>
+                    <a:noFill/>
+                  </a:tcPr>
+                </a:tc>
+                <a:extLst>
+                  <a:ext uri="{0D108BD9-81ED-4DB2-BD59-A6C34878D82A}">
+                    <a16:rowId xmlns:a16="http://schemas.microsoft.com/office/drawing/2014/main" val="2984170604"/>
+                  </a:ext>
+                </a:extLst>
+              </a:tr>
+              <a:tr h="104775">
+                <a:tc>
+                  <a:txBody>
+                    <a:bodyPr/>
+                    <a:lstStyle/>
+                    <a:p>
+                      <a:pPr>
+                        <a:buNone/>
+                      </a:pPr>
+                      <a:r>
+                        <a:rPr lang="en" b="1">
+                          <a:solidFill>
+                            <a:srgbClr val="000000"/>
+                          </a:solidFill>
+                          <a:effectLst/>
+                          <a:latin typeface="Helvetica Neue" panose="02000503000000020004" pitchFamily="2" charset="0"/>
+                        </a:rPr>
+                        <a:t>ARIMA</a:t>
+                      </a:r>
+                      <a:endParaRPr lang="en">
+                        <a:effectLst/>
+                      </a:endParaRPr>
+                    </a:p>
+                  </a:txBody>
+                  <a:tcPr marL="38100" marR="38100" marT="38100" marB="38100">
+                    <a:lnL w="9525" cap="flat" cmpd="sng" algn="ctr">
+                      <a:solidFill>
+                        <a:srgbClr val="000000"/>
+                      </a:solidFill>
+                      <a:prstDash val="solid"/>
+                      <a:round/>
+                      <a:headEnd type="none" w="med" len="med"/>
+                      <a:tailEnd type="none" w="med" len="med"/>
+                    </a:lnL>
+                    <a:lnR w="9525" cap="flat" cmpd="sng" algn="ctr">
+                      <a:solidFill>
+                        <a:srgbClr val="000000"/>
+                      </a:solidFill>
+                      <a:prstDash val="solid"/>
+                      <a:round/>
+                      <a:headEnd type="none" w="med" len="med"/>
+                      <a:tailEnd type="none" w="med" len="med"/>
+                    </a:lnR>
+                    <a:lnT w="9525" cap="flat" cmpd="sng" algn="ctr">
+                      <a:solidFill>
+                        <a:srgbClr val="000000"/>
+                      </a:solidFill>
+                      <a:prstDash val="solid"/>
+                      <a:round/>
+                      <a:headEnd type="none" w="med" len="med"/>
+                      <a:tailEnd type="none" w="med" len="med"/>
+                    </a:lnT>
+                    <a:lnB w="9525" cap="flat" cmpd="sng" algn="ctr">
+                      <a:solidFill>
+                        <a:srgbClr val="000000"/>
+                      </a:solidFill>
+                      <a:prstDash val="solid"/>
+                      <a:round/>
+                      <a:headEnd type="none" w="med" len="med"/>
+                      <a:tailEnd type="none" w="med" len="med"/>
+                    </a:lnB>
+                    <a:solidFill>
+                      <a:srgbClr val="D4D4D4"/>
+                    </a:solidFill>
+                  </a:tcPr>
+                </a:tc>
+                <a:tc>
+                  <a:txBody>
+                    <a:bodyPr/>
+                    <a:lstStyle/>
+                    <a:p>
+                      <a:pPr>
+                        <a:buNone/>
+                      </a:pPr>
+                      <a:r>
+                        <a:rPr lang="en">
+                          <a:solidFill>
+                            <a:srgbClr val="000000"/>
+                          </a:solidFill>
+                          <a:effectLst/>
+                          <a:latin typeface="Helvetica Neue" panose="02000503000000020004" pitchFamily="2" charset="0"/>
+                        </a:rPr>
+                        <a:t>SARIMAX </a:t>
+                      </a:r>
+                      <a:r>
+                        <a:rPr lang="ru-RU">
+                          <a:solidFill>
+                            <a:srgbClr val="000000"/>
+                          </a:solidFill>
+                          <a:effectLst/>
+                          <a:latin typeface="Helvetica Neue" panose="02000503000000020004" pitchFamily="2" charset="0"/>
+                        </a:rPr>
+                        <a:t>с онлайн-обновлением</a:t>
+                      </a:r>
+                      <a:endParaRPr lang="ru-RU">
+                        <a:effectLst/>
+                      </a:endParaRPr>
+                    </a:p>
+                  </a:txBody>
+                  <a:tcPr marL="38100" marR="38100" marT="38100" marB="38100">
+                    <a:lnL w="9525" cap="flat" cmpd="sng" algn="ctr">
+                      <a:solidFill>
+                        <a:srgbClr val="000000"/>
+                      </a:solidFill>
+                      <a:prstDash val="solid"/>
+                      <a:round/>
+                      <a:headEnd type="none" w="med" len="med"/>
+                      <a:tailEnd type="none" w="med" len="med"/>
+                    </a:lnL>
+                    <a:lnR w="9525" cap="flat" cmpd="sng" algn="ctr">
+                      <a:solidFill>
+                        <a:srgbClr val="000000"/>
+                      </a:solidFill>
+                      <a:prstDash val="solid"/>
+                      <a:round/>
+                      <a:headEnd type="none" w="med" len="med"/>
+                      <a:tailEnd type="none" w="med" len="med"/>
+                    </a:lnR>
+                    <a:lnT w="9525" cap="flat" cmpd="sng" algn="ctr">
+                      <a:solidFill>
+                        <a:srgbClr val="000000"/>
+                      </a:solidFill>
+                      <a:prstDash val="solid"/>
+                      <a:round/>
+                      <a:headEnd type="none" w="med" len="med"/>
+                      <a:tailEnd type="none" w="med" len="med"/>
+                    </a:lnT>
+                    <a:lnB w="9525" cap="flat" cmpd="sng" algn="ctr">
+                      <a:solidFill>
+                        <a:srgbClr val="000000"/>
+                      </a:solidFill>
+                      <a:prstDash val="solid"/>
+                      <a:round/>
+                      <a:headEnd type="none" w="med" len="med"/>
+                      <a:tailEnd type="none" w="med" len="med"/>
+                    </a:lnB>
+                    <a:noFill/>
+                  </a:tcPr>
+                </a:tc>
+                <a:tc>
+                  <a:txBody>
+                    <a:bodyPr/>
+                    <a:lstStyle/>
+                    <a:p>
+                      <a:pPr>
+                        <a:buNone/>
+                      </a:pPr>
+                      <a:r>
+                        <a:rPr lang="ru-RU">
+                          <a:solidFill>
+                            <a:srgbClr val="000000"/>
+                          </a:solidFill>
+                          <a:effectLst/>
+                          <a:latin typeface="Helvetica Neue" panose="02000503000000020004" pitchFamily="2" charset="0"/>
+                        </a:rPr>
+                        <a:t>Через </a:t>
+                      </a:r>
+                      <a:r>
+                        <a:rPr lang="en">
+                          <a:solidFill>
+                            <a:srgbClr val="000000"/>
+                          </a:solidFill>
+                          <a:effectLst/>
+                          <a:latin typeface="Helvetica Neue" panose="02000503000000020004" pitchFamily="2" charset="0"/>
+                        </a:rPr>
+                        <a:t>update() </a:t>
+                      </a:r>
+                      <a:r>
+                        <a:rPr lang="ru-RU">
+                          <a:solidFill>
+                            <a:srgbClr val="000000"/>
+                          </a:solidFill>
+                          <a:effectLst/>
+                          <a:latin typeface="Helvetica Neue" panose="02000503000000020004" pitchFamily="2" charset="0"/>
+                        </a:rPr>
+                        <a:t>в </a:t>
+                      </a:r>
+                      <a:r>
+                        <a:rPr lang="en">
+                          <a:solidFill>
+                            <a:srgbClr val="000000"/>
+                          </a:solidFill>
+                          <a:effectLst/>
+                          <a:latin typeface="Helvetica Neue" panose="02000503000000020004" pitchFamily="2" charset="0"/>
+                        </a:rPr>
+                        <a:t>statsmodels (</a:t>
+                      </a:r>
+                      <a:r>
+                        <a:rPr lang="ru-RU">
+                          <a:solidFill>
+                            <a:srgbClr val="000000"/>
+                          </a:solidFill>
+                          <a:effectLst/>
+                          <a:latin typeface="Helvetica Neue" panose="02000503000000020004" pitchFamily="2" charset="0"/>
+                        </a:rPr>
+                        <a:t>ограниченно)</a:t>
+                      </a:r>
+                      <a:endParaRPr lang="ru-RU">
+                        <a:effectLst/>
+                      </a:endParaRPr>
+                    </a:p>
+                  </a:txBody>
+                  <a:tcPr marL="38100" marR="38100" marT="38100" marB="38100">
+                    <a:lnL w="9525" cap="flat" cmpd="sng" algn="ctr">
+                      <a:solidFill>
+                        <a:srgbClr val="000000"/>
+                      </a:solidFill>
+                      <a:prstDash val="solid"/>
+                      <a:round/>
+                      <a:headEnd type="none" w="med" len="med"/>
+                      <a:tailEnd type="none" w="med" len="med"/>
+                    </a:lnL>
+                    <a:lnR w="9525" cap="flat" cmpd="sng" algn="ctr">
+                      <a:solidFill>
+                        <a:srgbClr val="000000"/>
+                      </a:solidFill>
+                      <a:prstDash val="solid"/>
+                      <a:round/>
+                      <a:headEnd type="none" w="med" len="med"/>
+                      <a:tailEnd type="none" w="med" len="med"/>
+                    </a:lnR>
+                    <a:lnT w="9525" cap="flat" cmpd="sng" algn="ctr">
+                      <a:solidFill>
+                        <a:srgbClr val="000000"/>
+                      </a:solidFill>
+                      <a:prstDash val="solid"/>
+                      <a:round/>
+                      <a:headEnd type="none" w="med" len="med"/>
+                      <a:tailEnd type="none" w="med" len="med"/>
+                    </a:lnT>
+                    <a:lnB w="9525" cap="flat" cmpd="sng" algn="ctr">
+                      <a:solidFill>
+                        <a:srgbClr val="000000"/>
+                      </a:solidFill>
+                      <a:prstDash val="solid"/>
+                      <a:round/>
+                      <a:headEnd type="none" w="med" len="med"/>
+                      <a:tailEnd type="none" w="med" len="med"/>
+                    </a:lnB>
+                    <a:noFill/>
+                  </a:tcPr>
+                </a:tc>
+                <a:extLst>
+                  <a:ext uri="{0D108BD9-81ED-4DB2-BD59-A6C34878D82A}">
+                    <a16:rowId xmlns:a16="http://schemas.microsoft.com/office/drawing/2014/main" val="2022906322"/>
+                  </a:ext>
+                </a:extLst>
+              </a:tr>
+              <a:tr h="104775">
+                <a:tc>
+                  <a:txBody>
+                    <a:bodyPr/>
+                    <a:lstStyle/>
+                    <a:p>
+                      <a:pPr>
+                        <a:buNone/>
+                      </a:pPr>
+                      <a:r>
+                        <a:rPr lang="ru-RU" b="1">
+                          <a:solidFill>
+                            <a:srgbClr val="000000"/>
+                          </a:solidFill>
+                          <a:effectLst/>
+                          <a:latin typeface="Helvetica Neue" panose="02000503000000020004" pitchFamily="2" charset="0"/>
+                        </a:rPr>
+                        <a:t>Экспоненциальное сглаживание</a:t>
+                      </a:r>
+                      <a:endParaRPr lang="ru-RU">
+                        <a:effectLst/>
+                      </a:endParaRPr>
+                    </a:p>
+                  </a:txBody>
+                  <a:tcPr marL="38100" marR="38100" marT="38100" marB="38100">
+                    <a:lnL w="9525" cap="flat" cmpd="sng" algn="ctr">
+                      <a:solidFill>
+                        <a:srgbClr val="000000"/>
+                      </a:solidFill>
+                      <a:prstDash val="solid"/>
+                      <a:round/>
+                      <a:headEnd type="none" w="med" len="med"/>
+                      <a:tailEnd type="none" w="med" len="med"/>
+                    </a:lnL>
+                    <a:lnR w="9525" cap="flat" cmpd="sng" algn="ctr">
+                      <a:solidFill>
+                        <a:srgbClr val="000000"/>
+                      </a:solidFill>
+                      <a:prstDash val="solid"/>
+                      <a:round/>
+                      <a:headEnd type="none" w="med" len="med"/>
+                      <a:tailEnd type="none" w="med" len="med"/>
+                    </a:lnR>
+                    <a:lnT w="9525" cap="flat" cmpd="sng" algn="ctr">
+                      <a:solidFill>
+                        <a:srgbClr val="000000"/>
+                      </a:solidFill>
+                      <a:prstDash val="solid"/>
+                      <a:round/>
+                      <a:headEnd type="none" w="med" len="med"/>
+                      <a:tailEnd type="none" w="med" len="med"/>
+                    </a:lnT>
+                    <a:lnB w="9525" cap="flat" cmpd="sng" algn="ctr">
+                      <a:solidFill>
+                        <a:srgbClr val="000000"/>
+                      </a:solidFill>
+                      <a:prstDash val="solid"/>
+                      <a:round/>
+                      <a:headEnd type="none" w="med" len="med"/>
+                      <a:tailEnd type="none" w="med" len="med"/>
+                    </a:lnB>
+                    <a:solidFill>
+                      <a:srgbClr val="D4D4D4"/>
+                    </a:solidFill>
+                  </a:tcPr>
+                </a:tc>
+                <a:tc>
+                  <a:txBody>
+                    <a:bodyPr/>
+                    <a:lstStyle/>
+                    <a:p>
+                      <a:pPr>
+                        <a:buNone/>
+                      </a:pPr>
+                      <a:r>
+                        <a:rPr lang="en">
+                          <a:solidFill>
+                            <a:srgbClr val="000000"/>
+                          </a:solidFill>
+                          <a:effectLst/>
+                          <a:latin typeface="Helvetica Neue" panose="02000503000000020004" pitchFamily="2" charset="0"/>
+                        </a:rPr>
+                        <a:t>Holt-Winters </a:t>
+                      </a:r>
+                      <a:r>
+                        <a:rPr lang="ru-RU">
+                          <a:solidFill>
+                            <a:srgbClr val="000000"/>
+                          </a:solidFill>
+                          <a:effectLst/>
+                          <a:latin typeface="Helvetica Neue" panose="02000503000000020004" pitchFamily="2" charset="0"/>
+                        </a:rPr>
+                        <a:t>с онлайн-шагом</a:t>
+                      </a:r>
+                      <a:endParaRPr lang="ru-RU">
+                        <a:effectLst/>
+                      </a:endParaRPr>
+                    </a:p>
+                  </a:txBody>
+                  <a:tcPr marL="38100" marR="38100" marT="38100" marB="38100">
+                    <a:lnL w="9525" cap="flat" cmpd="sng" algn="ctr">
+                      <a:solidFill>
+                        <a:srgbClr val="000000"/>
+                      </a:solidFill>
+                      <a:prstDash val="solid"/>
+                      <a:round/>
+                      <a:headEnd type="none" w="med" len="med"/>
+                      <a:tailEnd type="none" w="med" len="med"/>
+                    </a:lnL>
+                    <a:lnR w="9525" cap="flat" cmpd="sng" algn="ctr">
+                      <a:solidFill>
+                        <a:srgbClr val="000000"/>
+                      </a:solidFill>
+                      <a:prstDash val="solid"/>
+                      <a:round/>
+                      <a:headEnd type="none" w="med" len="med"/>
+                      <a:tailEnd type="none" w="med" len="med"/>
+                    </a:lnR>
+                    <a:lnT w="9525" cap="flat" cmpd="sng" algn="ctr">
+                      <a:solidFill>
+                        <a:srgbClr val="000000"/>
+                      </a:solidFill>
+                      <a:prstDash val="solid"/>
+                      <a:round/>
+                      <a:headEnd type="none" w="med" len="med"/>
+                      <a:tailEnd type="none" w="med" len="med"/>
+                    </a:lnT>
+                    <a:lnB w="9525" cap="flat" cmpd="sng" algn="ctr">
+                      <a:solidFill>
+                        <a:srgbClr val="000000"/>
+                      </a:solidFill>
+                      <a:prstDash val="solid"/>
+                      <a:round/>
+                      <a:headEnd type="none" w="med" len="med"/>
+                      <a:tailEnd type="none" w="med" len="med"/>
+                    </a:lnB>
+                    <a:noFill/>
+                  </a:tcPr>
+                </a:tc>
+                <a:tc>
+                  <a:txBody>
+                    <a:bodyPr/>
+                    <a:lstStyle/>
+                    <a:p>
+                      <a:pPr>
+                        <a:buNone/>
+                      </a:pPr>
+                      <a:r>
+                        <a:rPr lang="ru-RU">
+                          <a:solidFill>
+                            <a:srgbClr val="000000"/>
+                          </a:solidFill>
+                          <a:effectLst/>
+                          <a:latin typeface="Helvetica Neue" panose="02000503000000020004" pitchFamily="2" charset="0"/>
+                        </a:rPr>
+                        <a:t>Рекуррентное обновление параметров</a:t>
+                      </a:r>
+                      <a:endParaRPr lang="ru-RU">
+                        <a:effectLst/>
+                      </a:endParaRPr>
+                    </a:p>
+                  </a:txBody>
+                  <a:tcPr marL="38100" marR="38100" marT="38100" marB="38100">
+                    <a:lnL w="9525" cap="flat" cmpd="sng" algn="ctr">
+                      <a:solidFill>
+                        <a:srgbClr val="000000"/>
+                      </a:solidFill>
+                      <a:prstDash val="solid"/>
+                      <a:round/>
+                      <a:headEnd type="none" w="med" len="med"/>
+                      <a:tailEnd type="none" w="med" len="med"/>
+                    </a:lnL>
+                    <a:lnR w="9525" cap="flat" cmpd="sng" algn="ctr">
+                      <a:solidFill>
+                        <a:srgbClr val="000000"/>
+                      </a:solidFill>
+                      <a:prstDash val="solid"/>
+                      <a:round/>
+                      <a:headEnd type="none" w="med" len="med"/>
+                      <a:tailEnd type="none" w="med" len="med"/>
+                    </a:lnR>
+                    <a:lnT w="9525" cap="flat" cmpd="sng" algn="ctr">
+                      <a:solidFill>
+                        <a:srgbClr val="000000"/>
+                      </a:solidFill>
+                      <a:prstDash val="solid"/>
+                      <a:round/>
+                      <a:headEnd type="none" w="med" len="med"/>
+                      <a:tailEnd type="none" w="med" len="med"/>
+                    </a:lnT>
+                    <a:lnB w="9525" cap="flat" cmpd="sng" algn="ctr">
+                      <a:solidFill>
+                        <a:srgbClr val="000000"/>
+                      </a:solidFill>
+                      <a:prstDash val="solid"/>
+                      <a:round/>
+                      <a:headEnd type="none" w="med" len="med"/>
+                      <a:tailEnd type="none" w="med" len="med"/>
+                    </a:lnB>
+                    <a:noFill/>
+                  </a:tcPr>
+                </a:tc>
+                <a:extLst>
+                  <a:ext uri="{0D108BD9-81ED-4DB2-BD59-A6C34878D82A}">
+                    <a16:rowId xmlns:a16="http://schemas.microsoft.com/office/drawing/2014/main" val="1520562672"/>
+                  </a:ext>
+                </a:extLst>
+              </a:tr>
+              <a:tr h="104775">
+                <a:tc>
+                  <a:txBody>
+                    <a:bodyPr/>
+                    <a:lstStyle/>
+                    <a:p>
+                      <a:pPr>
+                        <a:buNone/>
+                      </a:pPr>
+                      <a:r>
+                        <a:rPr lang="en" b="1">
+                          <a:solidFill>
+                            <a:srgbClr val="000000"/>
+                          </a:solidFill>
+                          <a:effectLst/>
+                          <a:latin typeface="Helvetica Neue" panose="02000503000000020004" pitchFamily="2" charset="0"/>
+                        </a:rPr>
+                        <a:t>PCA</a:t>
+                      </a:r>
+                      <a:endParaRPr lang="en">
+                        <a:effectLst/>
+                      </a:endParaRPr>
+                    </a:p>
+                  </a:txBody>
+                  <a:tcPr marL="38100" marR="38100" marT="38100" marB="38100">
+                    <a:lnL w="9525" cap="flat" cmpd="sng" algn="ctr">
+                      <a:solidFill>
+                        <a:srgbClr val="000000"/>
+                      </a:solidFill>
+                      <a:prstDash val="solid"/>
+                      <a:round/>
+                      <a:headEnd type="none" w="med" len="med"/>
+                      <a:tailEnd type="none" w="med" len="med"/>
+                    </a:lnL>
+                    <a:lnR w="9525" cap="flat" cmpd="sng" algn="ctr">
+                      <a:solidFill>
+                        <a:srgbClr val="000000"/>
+                      </a:solidFill>
+                      <a:prstDash val="solid"/>
+                      <a:round/>
+                      <a:headEnd type="none" w="med" len="med"/>
+                      <a:tailEnd type="none" w="med" len="med"/>
+                    </a:lnR>
+                    <a:lnT w="9525" cap="flat" cmpd="sng" algn="ctr">
+                      <a:solidFill>
+                        <a:srgbClr val="000000"/>
+                      </a:solidFill>
+                      <a:prstDash val="solid"/>
+                      <a:round/>
+                      <a:headEnd type="none" w="med" len="med"/>
+                      <a:tailEnd type="none" w="med" len="med"/>
+                    </a:lnT>
+                    <a:lnB w="9525" cap="flat" cmpd="sng" algn="ctr">
+                      <a:solidFill>
+                        <a:srgbClr val="000000"/>
+                      </a:solidFill>
+                      <a:prstDash val="solid"/>
+                      <a:round/>
+                      <a:headEnd type="none" w="med" len="med"/>
+                      <a:tailEnd type="none" w="med" len="med"/>
+                    </a:lnB>
+                    <a:solidFill>
+                      <a:srgbClr val="D4D4D4"/>
+                    </a:solidFill>
+                  </a:tcPr>
+                </a:tc>
+                <a:tc>
+                  <a:txBody>
+                    <a:bodyPr/>
+                    <a:lstStyle/>
+                    <a:p>
+                      <a:pPr>
+                        <a:buNone/>
+                      </a:pPr>
+                      <a:r>
+                        <a:rPr lang="en">
+                          <a:solidFill>
+                            <a:srgbClr val="000000"/>
+                          </a:solidFill>
+                          <a:effectLst/>
+                          <a:latin typeface="Helvetica Neue" panose="02000503000000020004" pitchFamily="2" charset="0"/>
+                        </a:rPr>
+                        <a:t>IncrementalPCA</a:t>
+                      </a:r>
+                      <a:endParaRPr lang="en">
+                        <a:effectLst/>
+                      </a:endParaRPr>
+                    </a:p>
+                  </a:txBody>
+                  <a:tcPr marL="38100" marR="38100" marT="38100" marB="38100">
+                    <a:lnL w="9525" cap="flat" cmpd="sng" algn="ctr">
+                      <a:solidFill>
+                        <a:srgbClr val="000000"/>
+                      </a:solidFill>
+                      <a:prstDash val="solid"/>
+                      <a:round/>
+                      <a:headEnd type="none" w="med" len="med"/>
+                      <a:tailEnd type="none" w="med" len="med"/>
+                    </a:lnL>
+                    <a:lnR w="9525" cap="flat" cmpd="sng" algn="ctr">
+                      <a:solidFill>
+                        <a:srgbClr val="000000"/>
+                      </a:solidFill>
+                      <a:prstDash val="solid"/>
+                      <a:round/>
+                      <a:headEnd type="none" w="med" len="med"/>
+                      <a:tailEnd type="none" w="med" len="med"/>
+                    </a:lnR>
+                    <a:lnT w="9525" cap="flat" cmpd="sng" algn="ctr">
+                      <a:solidFill>
+                        <a:srgbClr val="000000"/>
+                      </a:solidFill>
+                      <a:prstDash val="solid"/>
+                      <a:round/>
+                      <a:headEnd type="none" w="med" len="med"/>
+                      <a:tailEnd type="none" w="med" len="med"/>
+                    </a:lnT>
+                    <a:lnB w="9525" cap="flat" cmpd="sng" algn="ctr">
+                      <a:solidFill>
+                        <a:srgbClr val="000000"/>
+                      </a:solidFill>
+                      <a:prstDash val="solid"/>
+                      <a:round/>
+                      <a:headEnd type="none" w="med" len="med"/>
+                      <a:tailEnd type="none" w="med" len="med"/>
+                    </a:lnB>
+                    <a:noFill/>
+                  </a:tcPr>
+                </a:tc>
+                <a:tc>
+                  <a:txBody>
+                    <a:bodyPr/>
+                    <a:lstStyle/>
+                    <a:p>
+                      <a:pPr>
+                        <a:buNone/>
+                      </a:pPr>
+                      <a:r>
+                        <a:rPr lang="ru-RU" dirty="0">
+                          <a:solidFill>
+                            <a:srgbClr val="000000"/>
+                          </a:solidFill>
+                          <a:effectLst/>
+                          <a:latin typeface="Helvetica Neue" panose="02000503000000020004" pitchFamily="2" charset="0"/>
+                        </a:rPr>
+                        <a:t>Постепенное обучение на </a:t>
+                      </a:r>
+                      <a:r>
+                        <a:rPr lang="ru-RU" dirty="0" err="1">
+                          <a:solidFill>
+                            <a:srgbClr val="000000"/>
+                          </a:solidFill>
+                          <a:effectLst/>
+                          <a:latin typeface="Helvetica Neue" panose="02000503000000020004" pitchFamily="2" charset="0"/>
+                        </a:rPr>
+                        <a:t>батчах</a:t>
+                      </a:r>
+                      <a:endParaRPr lang="ru-RU" dirty="0">
+                        <a:effectLst/>
+                      </a:endParaRPr>
+                    </a:p>
+                  </a:txBody>
+                  <a:tcPr marL="38100" marR="38100" marT="38100" marB="38100">
+                    <a:lnL w="9525" cap="flat" cmpd="sng" algn="ctr">
+                      <a:solidFill>
+                        <a:srgbClr val="000000"/>
+                      </a:solidFill>
+                      <a:prstDash val="solid"/>
+                      <a:round/>
+                      <a:headEnd type="none" w="med" len="med"/>
+                      <a:tailEnd type="none" w="med" len="med"/>
+                    </a:lnL>
+                    <a:lnR w="9525" cap="flat" cmpd="sng" algn="ctr">
+                      <a:solidFill>
+                        <a:srgbClr val="000000"/>
+                      </a:solidFill>
+                      <a:prstDash val="solid"/>
+                      <a:round/>
+                      <a:headEnd type="none" w="med" len="med"/>
+                      <a:tailEnd type="none" w="med" len="med"/>
+                    </a:lnR>
+                    <a:lnT w="9525" cap="flat" cmpd="sng" algn="ctr">
+                      <a:solidFill>
+                        <a:srgbClr val="000000"/>
+                      </a:solidFill>
+                      <a:prstDash val="solid"/>
+                      <a:round/>
+                      <a:headEnd type="none" w="med" len="med"/>
+                      <a:tailEnd type="none" w="med" len="med"/>
+                    </a:lnT>
+                    <a:lnB w="9525" cap="flat" cmpd="sng" algn="ctr">
+                      <a:solidFill>
+                        <a:srgbClr val="000000"/>
+                      </a:solidFill>
+                      <a:prstDash val="solid"/>
+                      <a:round/>
+                      <a:headEnd type="none" w="med" len="med"/>
+                      <a:tailEnd type="none" w="med" len="med"/>
+                    </a:lnB>
+                    <a:noFill/>
+                  </a:tcPr>
+                </a:tc>
+                <a:extLst>
+                  <a:ext uri="{0D108BD9-81ED-4DB2-BD59-A6C34878D82A}">
+                    <a16:rowId xmlns:a16="http://schemas.microsoft.com/office/drawing/2014/main" val="1769144903"/>
+                  </a:ext>
+                </a:extLst>
+              </a:tr>
+            </a:tbl>
+          </a:graphicData>
+        </a:graphic>
+      </p:graphicFrame>
+      <p:graphicFrame>
+        <p:nvGraphicFramePr>
+          <p:cNvPr id="5" name="Таблица 4">
+            <a:extLst>
+              <a:ext uri="{FF2B5EF4-FFF2-40B4-BE49-F238E27FC236}">
+                <a16:creationId xmlns:a16="http://schemas.microsoft.com/office/drawing/2014/main" id="{23281D89-5EB1-85C4-DC63-794DC1CC6763}"/>
+              </a:ext>
+            </a:extLst>
+          </p:cNvPr>
+          <p:cNvGraphicFramePr>
+            <a:graphicFrameLocks noGrp="1"/>
+          </p:cNvGraphicFramePr>
+          <p:nvPr>
+            <p:extLst>
+              <p:ext uri="{D42A27DB-BD31-4B8C-83A1-F6EECF244321}">
+                <p14:modId xmlns:p14="http://schemas.microsoft.com/office/powerpoint/2010/main" val="1834980162"/>
+              </p:ext>
+            </p:extLst>
+          </p:nvPr>
+        </p:nvGraphicFramePr>
+        <p:xfrm>
+          <a:off x="5701535" y="1367018"/>
+          <a:ext cx="2916371" cy="4657998"/>
+        </p:xfrm>
+        <a:graphic>
+          <a:graphicData uri="http://schemas.openxmlformats.org/drawingml/2006/table">
+            <a:tbl>
+              <a:tblPr/>
+              <a:tblGrid>
+                <a:gridCol w="756348">
+                  <a:extLst>
+                    <a:ext uri="{9D8B030D-6E8A-4147-A177-3AD203B41FA5}">
+                      <a16:colId xmlns:a16="http://schemas.microsoft.com/office/drawing/2014/main" val="3249602966"/>
+                    </a:ext>
+                  </a:extLst>
+                </a:gridCol>
+                <a:gridCol w="872186">
+                  <a:extLst>
+                    <a:ext uri="{9D8B030D-6E8A-4147-A177-3AD203B41FA5}">
+                      <a16:colId xmlns:a16="http://schemas.microsoft.com/office/drawing/2014/main" val="618606980"/>
+                    </a:ext>
+                  </a:extLst>
+                </a:gridCol>
+                <a:gridCol w="1287837">
+                  <a:extLst>
+                    <a:ext uri="{9D8B030D-6E8A-4147-A177-3AD203B41FA5}">
+                      <a16:colId xmlns:a16="http://schemas.microsoft.com/office/drawing/2014/main" val="3607487269"/>
+                    </a:ext>
+                  </a:extLst>
+                </a:gridCol>
+              </a:tblGrid>
+              <a:tr h="588484">
+                <a:tc>
+                  <a:txBody>
+                    <a:bodyPr/>
+                    <a:lstStyle/>
+                    <a:p>
+                      <a:pPr>
+                        <a:buNone/>
+                      </a:pPr>
+                      <a:r>
+                        <a:rPr lang="ru-RU" sz="1100" b="1">
+                          <a:solidFill>
+                            <a:srgbClr val="000000"/>
+                          </a:solidFill>
+                          <a:effectLst/>
+                          <a:latin typeface="Helvetica Neue" panose="02000503000000020004" pitchFamily="2" charset="0"/>
+                        </a:rPr>
+                        <a:t>Модель</a:t>
+                      </a:r>
+                      <a:endParaRPr lang="ru-RU" sz="1100">
+                        <a:effectLst/>
+                      </a:endParaRPr>
+                    </a:p>
+                  </a:txBody>
+                  <a:tcPr marL="23294" marR="23294" marT="23294" marB="23294">
+                    <a:lnL w="9525" cap="flat" cmpd="sng" algn="ctr">
+                      <a:solidFill>
+                        <a:srgbClr val="000000"/>
+                      </a:solidFill>
+                      <a:prstDash val="solid"/>
+                      <a:round/>
+                      <a:headEnd type="none" w="med" len="med"/>
+                      <a:tailEnd type="none" w="med" len="med"/>
+                    </a:lnL>
+                    <a:lnR w="9525" cap="flat" cmpd="sng" algn="ctr">
+                      <a:solidFill>
+                        <a:srgbClr val="000000"/>
+                      </a:solidFill>
+                      <a:prstDash val="solid"/>
+                      <a:round/>
+                      <a:headEnd type="none" w="med" len="med"/>
+                      <a:tailEnd type="none" w="med" len="med"/>
+                    </a:lnR>
+                    <a:lnT w="9525" cap="flat" cmpd="sng" algn="ctr">
+                      <a:solidFill>
+                        <a:srgbClr val="000000"/>
+                      </a:solidFill>
+                      <a:prstDash val="solid"/>
+                      <a:round/>
+                      <a:headEnd type="none" w="med" len="med"/>
+                      <a:tailEnd type="none" w="med" len="med"/>
+                    </a:lnT>
+                    <a:lnB w="9525" cap="flat" cmpd="sng" algn="ctr">
+                      <a:solidFill>
+                        <a:srgbClr val="000000"/>
+                      </a:solidFill>
+                      <a:prstDash val="solid"/>
+                      <a:round/>
+                      <a:headEnd type="none" w="med" len="med"/>
+                      <a:tailEnd type="none" w="med" len="med"/>
+                    </a:lnB>
+                    <a:solidFill>
+                      <a:srgbClr val="B0B3B2"/>
+                    </a:solidFill>
+                  </a:tcPr>
+                </a:tc>
+                <a:tc>
+                  <a:txBody>
+                    <a:bodyPr/>
+                    <a:lstStyle/>
+                    <a:p>
+                      <a:pPr>
+                        <a:buNone/>
+                      </a:pPr>
+                      <a:r>
+                        <a:rPr lang="ru-RU" sz="1100" b="1">
+                          <a:solidFill>
+                            <a:srgbClr val="000000"/>
+                          </a:solidFill>
+                          <a:effectLst/>
+                          <a:latin typeface="Helvetica Neue" panose="02000503000000020004" pitchFamily="2" charset="0"/>
+                        </a:rPr>
+                        <a:t>Масштабируемость</a:t>
+                      </a:r>
+                      <a:endParaRPr lang="ru-RU" sz="1100">
+                        <a:effectLst/>
+                      </a:endParaRPr>
+                    </a:p>
+                  </a:txBody>
+                  <a:tcPr marL="23294" marR="23294" marT="23294" marB="23294">
+                    <a:lnL w="9525" cap="flat" cmpd="sng" algn="ctr">
+                      <a:solidFill>
+                        <a:srgbClr val="000000"/>
+                      </a:solidFill>
+                      <a:prstDash val="solid"/>
+                      <a:round/>
+                      <a:headEnd type="none" w="med" len="med"/>
+                      <a:tailEnd type="none" w="med" len="med"/>
+                    </a:lnL>
+                    <a:lnR w="9525" cap="flat" cmpd="sng" algn="ctr">
+                      <a:solidFill>
+                        <a:srgbClr val="000000"/>
+                      </a:solidFill>
+                      <a:prstDash val="solid"/>
+                      <a:round/>
+                      <a:headEnd type="none" w="med" len="med"/>
+                      <a:tailEnd type="none" w="med" len="med"/>
+                    </a:lnR>
+                    <a:lnT w="9525" cap="flat" cmpd="sng" algn="ctr">
+                      <a:solidFill>
+                        <a:srgbClr val="000000"/>
+                      </a:solidFill>
+                      <a:prstDash val="solid"/>
+                      <a:round/>
+                      <a:headEnd type="none" w="med" len="med"/>
+                      <a:tailEnd type="none" w="med" len="med"/>
+                    </a:lnT>
+                    <a:lnB w="9525" cap="flat" cmpd="sng" algn="ctr">
+                      <a:solidFill>
+                        <a:srgbClr val="000000"/>
+                      </a:solidFill>
+                      <a:prstDash val="solid"/>
+                      <a:round/>
+                      <a:headEnd type="none" w="med" len="med"/>
+                      <a:tailEnd type="none" w="med" len="med"/>
+                    </a:lnB>
+                    <a:solidFill>
+                      <a:srgbClr val="B0B3B2"/>
+                    </a:solidFill>
+                  </a:tcPr>
+                </a:tc>
+                <a:tc>
+                  <a:txBody>
+                    <a:bodyPr/>
+                    <a:lstStyle/>
+                    <a:p>
+                      <a:pPr>
+                        <a:buNone/>
+                      </a:pPr>
+                      <a:r>
+                        <a:rPr lang="ru-RU" sz="1100" b="1">
+                          <a:solidFill>
+                            <a:srgbClr val="000000"/>
+                          </a:solidFill>
+                          <a:effectLst/>
+                          <a:latin typeface="Helvetica Neue" panose="02000503000000020004" pitchFamily="2" charset="0"/>
+                        </a:rPr>
+                        <a:t>Когда использовать</a:t>
+                      </a:r>
+                      <a:endParaRPr lang="ru-RU" sz="1100">
+                        <a:effectLst/>
+                      </a:endParaRPr>
+                    </a:p>
+                  </a:txBody>
+                  <a:tcPr marL="23294" marR="23294" marT="23294" marB="23294">
+                    <a:lnL w="9525" cap="flat" cmpd="sng" algn="ctr">
+                      <a:solidFill>
+                        <a:srgbClr val="000000"/>
+                      </a:solidFill>
+                      <a:prstDash val="solid"/>
+                      <a:round/>
+                      <a:headEnd type="none" w="med" len="med"/>
+                      <a:tailEnd type="none" w="med" len="med"/>
+                    </a:lnL>
+                    <a:lnR w="9525" cap="flat" cmpd="sng" algn="ctr">
+                      <a:solidFill>
+                        <a:srgbClr val="000000"/>
+                      </a:solidFill>
+                      <a:prstDash val="solid"/>
+                      <a:round/>
+                      <a:headEnd type="none" w="med" len="med"/>
+                      <a:tailEnd type="none" w="med" len="med"/>
+                    </a:lnR>
+                    <a:lnT w="9525" cap="flat" cmpd="sng" algn="ctr">
+                      <a:solidFill>
+                        <a:srgbClr val="000000"/>
+                      </a:solidFill>
+                      <a:prstDash val="solid"/>
+                      <a:round/>
+                      <a:headEnd type="none" w="med" len="med"/>
+                      <a:tailEnd type="none" w="med" len="med"/>
+                    </a:lnT>
+                    <a:lnB w="9525" cap="flat" cmpd="sng" algn="ctr">
+                      <a:solidFill>
+                        <a:srgbClr val="000000"/>
+                      </a:solidFill>
+                      <a:prstDash val="solid"/>
+                      <a:round/>
+                      <a:headEnd type="none" w="med" len="med"/>
+                      <a:tailEnd type="none" w="med" len="med"/>
+                    </a:lnB>
+                    <a:solidFill>
+                      <a:srgbClr val="B0B3B2"/>
+                    </a:solidFill>
+                  </a:tcPr>
+                </a:tc>
+                <a:extLst>
+                  <a:ext uri="{0D108BD9-81ED-4DB2-BD59-A6C34878D82A}">
+                    <a16:rowId xmlns:a16="http://schemas.microsoft.com/office/drawing/2014/main" val="409217052"/>
+                  </a:ext>
+                </a:extLst>
+              </a:tr>
+              <a:tr h="588484">
+                <a:tc>
+                  <a:txBody>
+                    <a:bodyPr/>
+                    <a:lstStyle/>
+                    <a:p>
+                      <a:pPr>
+                        <a:buNone/>
+                      </a:pPr>
+                      <a:r>
+                        <a:rPr lang="en" sz="1100" b="1">
+                          <a:solidFill>
+                            <a:srgbClr val="000000"/>
+                          </a:solidFill>
+                          <a:effectLst/>
+                          <a:latin typeface="Helvetica Neue" panose="02000503000000020004" pitchFamily="2" charset="0"/>
+                        </a:rPr>
+                        <a:t>ARIMA / SARIMA</a:t>
+                      </a:r>
+                      <a:endParaRPr lang="en" sz="1100">
+                        <a:effectLst/>
+                      </a:endParaRPr>
+                    </a:p>
+                  </a:txBody>
+                  <a:tcPr marL="23294" marR="23294" marT="23294" marB="23294">
+                    <a:lnL w="9525" cap="flat" cmpd="sng" algn="ctr">
+                      <a:solidFill>
+                        <a:srgbClr val="000000"/>
+                      </a:solidFill>
+                      <a:prstDash val="solid"/>
+                      <a:round/>
+                      <a:headEnd type="none" w="med" len="med"/>
+                      <a:tailEnd type="none" w="med" len="med"/>
+                    </a:lnL>
+                    <a:lnR w="9525" cap="flat" cmpd="sng" algn="ctr">
+                      <a:solidFill>
+                        <a:srgbClr val="000000"/>
+                      </a:solidFill>
+                      <a:prstDash val="solid"/>
+                      <a:round/>
+                      <a:headEnd type="none" w="med" len="med"/>
+                      <a:tailEnd type="none" w="med" len="med"/>
+                    </a:lnR>
+                    <a:lnT w="9525" cap="flat" cmpd="sng" algn="ctr">
+                      <a:solidFill>
+                        <a:srgbClr val="000000"/>
+                      </a:solidFill>
+                      <a:prstDash val="solid"/>
+                      <a:round/>
+                      <a:headEnd type="none" w="med" len="med"/>
+                      <a:tailEnd type="none" w="med" len="med"/>
+                    </a:lnT>
+                    <a:lnB w="9525" cap="flat" cmpd="sng" algn="ctr">
+                      <a:solidFill>
+                        <a:srgbClr val="000000"/>
+                      </a:solidFill>
+                      <a:prstDash val="solid"/>
+                      <a:round/>
+                      <a:headEnd type="none" w="med" len="med"/>
+                      <a:tailEnd type="none" w="med" len="med"/>
+                    </a:lnB>
+                    <a:solidFill>
+                      <a:srgbClr val="D4D4D4"/>
+                    </a:solidFill>
+                  </a:tcPr>
+                </a:tc>
+                <a:tc>
+                  <a:txBody>
+                    <a:bodyPr/>
+                    <a:lstStyle/>
+                    <a:p>
+                      <a:pPr>
+                        <a:buNone/>
+                      </a:pPr>
+                      <a:r>
+                        <a:rPr lang="ru-RU" sz="1100">
+                          <a:solidFill>
+                            <a:srgbClr val="000000"/>
+                          </a:solidFill>
+                          <a:effectLst/>
+                          <a:latin typeface="Helvetica Neue" panose="02000503000000020004" pitchFamily="2" charset="0"/>
+                        </a:rPr>
+                        <a:t>Низкая ( </a:t>
+                      </a:r>
+                      <a:r>
+                        <a:rPr lang="en" sz="1100">
+                          <a:solidFill>
+                            <a:srgbClr val="000000"/>
+                          </a:solidFill>
+                          <a:effectLst/>
+                          <a:latin typeface="Helvetica Neue" panose="02000503000000020004" pitchFamily="2" charset="0"/>
+                        </a:rPr>
+                        <a:t>O(n^2) )</a:t>
+                      </a:r>
+                      <a:endParaRPr lang="en" sz="1100">
+                        <a:effectLst/>
+                      </a:endParaRPr>
+                    </a:p>
+                  </a:txBody>
+                  <a:tcPr marL="23294" marR="23294" marT="23294" marB="23294">
+                    <a:lnL w="9525" cap="flat" cmpd="sng" algn="ctr">
+                      <a:solidFill>
+                        <a:srgbClr val="000000"/>
+                      </a:solidFill>
+                      <a:prstDash val="solid"/>
+                      <a:round/>
+                      <a:headEnd type="none" w="med" len="med"/>
+                      <a:tailEnd type="none" w="med" len="med"/>
+                    </a:lnL>
+                    <a:lnR w="9525" cap="flat" cmpd="sng" algn="ctr">
+                      <a:solidFill>
+                        <a:srgbClr val="000000"/>
+                      </a:solidFill>
+                      <a:prstDash val="solid"/>
+                      <a:round/>
+                      <a:headEnd type="none" w="med" len="med"/>
+                      <a:tailEnd type="none" w="med" len="med"/>
+                    </a:lnR>
+                    <a:lnT w="9525" cap="flat" cmpd="sng" algn="ctr">
+                      <a:solidFill>
+                        <a:srgbClr val="000000"/>
+                      </a:solidFill>
+                      <a:prstDash val="solid"/>
+                      <a:round/>
+                      <a:headEnd type="none" w="med" len="med"/>
+                      <a:tailEnd type="none" w="med" len="med"/>
+                    </a:lnT>
+                    <a:lnB w="9525" cap="flat" cmpd="sng" algn="ctr">
+                      <a:solidFill>
+                        <a:srgbClr val="000000"/>
+                      </a:solidFill>
+                      <a:prstDash val="solid"/>
+                      <a:round/>
+                      <a:headEnd type="none" w="med" len="med"/>
+                      <a:tailEnd type="none" w="med" len="med"/>
+                    </a:lnB>
+                    <a:noFill/>
+                  </a:tcPr>
+                </a:tc>
+                <a:tc>
+                  <a:txBody>
+                    <a:bodyPr/>
+                    <a:lstStyle/>
+                    <a:p>
+                      <a:pPr>
+                        <a:buNone/>
+                      </a:pPr>
+                      <a:r>
+                        <a:rPr lang="ru-RU" sz="1100">
+                          <a:solidFill>
+                            <a:srgbClr val="000000"/>
+                          </a:solidFill>
+                          <a:effectLst/>
+                          <a:latin typeface="Helvetica Neue" panose="02000503000000020004" pitchFamily="2" charset="0"/>
+                        </a:rPr>
+                        <a:t>Только на коротких сегментах</a:t>
+                      </a:r>
+                      <a:endParaRPr lang="ru-RU" sz="1100">
+                        <a:effectLst/>
+                      </a:endParaRPr>
+                    </a:p>
+                  </a:txBody>
+                  <a:tcPr marL="23294" marR="23294" marT="23294" marB="23294">
+                    <a:lnL w="9525" cap="flat" cmpd="sng" algn="ctr">
+                      <a:solidFill>
+                        <a:srgbClr val="000000"/>
+                      </a:solidFill>
+                      <a:prstDash val="solid"/>
+                      <a:round/>
+                      <a:headEnd type="none" w="med" len="med"/>
+                      <a:tailEnd type="none" w="med" len="med"/>
+                    </a:lnL>
+                    <a:lnR w="9525" cap="flat" cmpd="sng" algn="ctr">
+                      <a:solidFill>
+                        <a:srgbClr val="000000"/>
+                      </a:solidFill>
+                      <a:prstDash val="solid"/>
+                      <a:round/>
+                      <a:headEnd type="none" w="med" len="med"/>
+                      <a:tailEnd type="none" w="med" len="med"/>
+                    </a:lnR>
+                    <a:lnT w="9525" cap="flat" cmpd="sng" algn="ctr">
+                      <a:solidFill>
+                        <a:srgbClr val="000000"/>
+                      </a:solidFill>
+                      <a:prstDash val="solid"/>
+                      <a:round/>
+                      <a:headEnd type="none" w="med" len="med"/>
+                      <a:tailEnd type="none" w="med" len="med"/>
+                    </a:lnT>
+                    <a:lnB w="9525" cap="flat" cmpd="sng" algn="ctr">
+                      <a:solidFill>
+                        <a:srgbClr val="000000"/>
+                      </a:solidFill>
+                      <a:prstDash val="solid"/>
+                      <a:round/>
+                      <a:headEnd type="none" w="med" len="med"/>
+                      <a:tailEnd type="none" w="med" len="med"/>
+                    </a:lnB>
+                    <a:noFill/>
+                  </a:tcPr>
+                </a:tc>
+                <a:extLst>
+                  <a:ext uri="{0D108BD9-81ED-4DB2-BD59-A6C34878D82A}">
+                    <a16:rowId xmlns:a16="http://schemas.microsoft.com/office/drawing/2014/main" val="3317116029"/>
+                  </a:ext>
+                </a:extLst>
+              </a:tr>
+              <a:tr h="768021">
+                <a:tc>
+                  <a:txBody>
+                    <a:bodyPr/>
+                    <a:lstStyle/>
+                    <a:p>
+                      <a:pPr>
+                        <a:buNone/>
+                      </a:pPr>
+                      <a:r>
+                        <a:rPr lang="en" sz="1100" b="1">
+                          <a:solidFill>
+                            <a:srgbClr val="000000"/>
+                          </a:solidFill>
+                          <a:effectLst/>
+                          <a:latin typeface="Helvetica Neue" panose="02000503000000020004" pitchFamily="2" charset="0"/>
+                        </a:rPr>
+                        <a:t>VAR</a:t>
+                      </a:r>
+                      <a:endParaRPr lang="en" sz="1100">
+                        <a:effectLst/>
+                      </a:endParaRPr>
+                    </a:p>
+                  </a:txBody>
+                  <a:tcPr marL="23294" marR="23294" marT="23294" marB="23294">
+                    <a:lnL w="9525" cap="flat" cmpd="sng" algn="ctr">
+                      <a:solidFill>
+                        <a:srgbClr val="000000"/>
+                      </a:solidFill>
+                      <a:prstDash val="solid"/>
+                      <a:round/>
+                      <a:headEnd type="none" w="med" len="med"/>
+                      <a:tailEnd type="none" w="med" len="med"/>
+                    </a:lnL>
+                    <a:lnR w="9525" cap="flat" cmpd="sng" algn="ctr">
+                      <a:solidFill>
+                        <a:srgbClr val="000000"/>
+                      </a:solidFill>
+                      <a:prstDash val="solid"/>
+                      <a:round/>
+                      <a:headEnd type="none" w="med" len="med"/>
+                      <a:tailEnd type="none" w="med" len="med"/>
+                    </a:lnR>
+                    <a:lnT w="9525" cap="flat" cmpd="sng" algn="ctr">
+                      <a:solidFill>
+                        <a:srgbClr val="000000"/>
+                      </a:solidFill>
+                      <a:prstDash val="solid"/>
+                      <a:round/>
+                      <a:headEnd type="none" w="med" len="med"/>
+                      <a:tailEnd type="none" w="med" len="med"/>
+                    </a:lnT>
+                    <a:lnB w="9525" cap="flat" cmpd="sng" algn="ctr">
+                      <a:solidFill>
+                        <a:srgbClr val="000000"/>
+                      </a:solidFill>
+                      <a:prstDash val="solid"/>
+                      <a:round/>
+                      <a:headEnd type="none" w="med" len="med"/>
+                      <a:tailEnd type="none" w="med" len="med"/>
+                    </a:lnB>
+                    <a:solidFill>
+                      <a:srgbClr val="D4D4D4"/>
+                    </a:solidFill>
+                  </a:tcPr>
+                </a:tc>
+                <a:tc>
+                  <a:txBody>
+                    <a:bodyPr/>
+                    <a:lstStyle/>
+                    <a:p>
+                      <a:pPr>
+                        <a:buNone/>
+                      </a:pPr>
+                      <a:r>
+                        <a:rPr lang="ru-RU" sz="1100">
+                          <a:solidFill>
+                            <a:srgbClr val="000000"/>
+                          </a:solidFill>
+                          <a:effectLst/>
+                          <a:latin typeface="Helvetica Neue" panose="02000503000000020004" pitchFamily="2" charset="0"/>
+                        </a:rPr>
+                        <a:t>Очень низкая ( </a:t>
+                      </a:r>
+                      <a:r>
+                        <a:rPr lang="en" sz="1100">
+                          <a:solidFill>
+                            <a:srgbClr val="000000"/>
+                          </a:solidFill>
+                          <a:effectLst/>
+                          <a:latin typeface="Helvetica Neue" panose="02000503000000020004" pitchFamily="2" charset="0"/>
+                        </a:rPr>
+                        <a:t>O(d^2 n^2) )</a:t>
+                      </a:r>
+                      <a:endParaRPr lang="en" sz="1100">
+                        <a:effectLst/>
+                      </a:endParaRPr>
+                    </a:p>
+                  </a:txBody>
+                  <a:tcPr marL="23294" marR="23294" marT="23294" marB="23294">
+                    <a:lnL w="9525" cap="flat" cmpd="sng" algn="ctr">
+                      <a:solidFill>
+                        <a:srgbClr val="000000"/>
+                      </a:solidFill>
+                      <a:prstDash val="solid"/>
+                      <a:round/>
+                      <a:headEnd type="none" w="med" len="med"/>
+                      <a:tailEnd type="none" w="med" len="med"/>
+                    </a:lnL>
+                    <a:lnR w="9525" cap="flat" cmpd="sng" algn="ctr">
+                      <a:solidFill>
+                        <a:srgbClr val="000000"/>
+                      </a:solidFill>
+                      <a:prstDash val="solid"/>
+                      <a:round/>
+                      <a:headEnd type="none" w="med" len="med"/>
+                      <a:tailEnd type="none" w="med" len="med"/>
+                    </a:lnR>
+                    <a:lnT w="9525" cap="flat" cmpd="sng" algn="ctr">
+                      <a:solidFill>
+                        <a:srgbClr val="000000"/>
+                      </a:solidFill>
+                      <a:prstDash val="solid"/>
+                      <a:round/>
+                      <a:headEnd type="none" w="med" len="med"/>
+                      <a:tailEnd type="none" w="med" len="med"/>
+                    </a:lnT>
+                    <a:lnB w="9525" cap="flat" cmpd="sng" algn="ctr">
+                      <a:solidFill>
+                        <a:srgbClr val="000000"/>
+                      </a:solidFill>
+                      <a:prstDash val="solid"/>
+                      <a:round/>
+                      <a:headEnd type="none" w="med" len="med"/>
+                      <a:tailEnd type="none" w="med" len="med"/>
+                    </a:lnB>
+                    <a:noFill/>
+                  </a:tcPr>
+                </a:tc>
+                <a:tc>
+                  <a:txBody>
+                    <a:bodyPr/>
+                    <a:lstStyle/>
+                    <a:p>
+                      <a:pPr>
+                        <a:buNone/>
+                      </a:pPr>
+                      <a:r>
+                        <a:rPr lang="ru-RU" sz="1100">
+                          <a:solidFill>
+                            <a:srgbClr val="000000"/>
+                          </a:solidFill>
+                          <a:effectLst/>
+                          <a:latin typeface="Helvetica Neue" panose="02000503000000020004" pitchFamily="2" charset="0"/>
+                        </a:rPr>
+                        <a:t>При  </a:t>
+                      </a:r>
+                      <a:r>
+                        <a:rPr lang="en" sz="1100">
+                          <a:solidFill>
+                            <a:srgbClr val="000000"/>
+                          </a:solidFill>
+                          <a:effectLst/>
+                          <a:latin typeface="Helvetica Neue" panose="02000503000000020004" pitchFamily="2" charset="0"/>
+                        </a:rPr>
+                        <a:t>d &lt; 10  </a:t>
+                      </a:r>
+                      <a:r>
+                        <a:rPr lang="ru-RU" sz="1100">
+                          <a:solidFill>
+                            <a:srgbClr val="000000"/>
+                          </a:solidFill>
+                          <a:effectLst/>
+                          <a:latin typeface="Helvetica Neue" panose="02000503000000020004" pitchFamily="2" charset="0"/>
+                        </a:rPr>
+                        <a:t>и  </a:t>
+                      </a:r>
+                      <a:r>
+                        <a:rPr lang="en" sz="1100">
+                          <a:solidFill>
+                            <a:srgbClr val="000000"/>
+                          </a:solidFill>
+                          <a:effectLst/>
+                          <a:latin typeface="Helvetica Neue" panose="02000503000000020004" pitchFamily="2" charset="0"/>
+                        </a:rPr>
+                        <a:t>n &lt; 10^4</a:t>
+                      </a:r>
+                      <a:endParaRPr lang="en" sz="1100">
+                        <a:effectLst/>
+                      </a:endParaRPr>
+                    </a:p>
+                  </a:txBody>
+                  <a:tcPr marL="23294" marR="23294" marT="23294" marB="23294">
+                    <a:lnL w="9525" cap="flat" cmpd="sng" algn="ctr">
+                      <a:solidFill>
+                        <a:srgbClr val="000000"/>
+                      </a:solidFill>
+                      <a:prstDash val="solid"/>
+                      <a:round/>
+                      <a:headEnd type="none" w="med" len="med"/>
+                      <a:tailEnd type="none" w="med" len="med"/>
+                    </a:lnL>
+                    <a:lnR w="9525" cap="flat" cmpd="sng" algn="ctr">
+                      <a:solidFill>
+                        <a:srgbClr val="000000"/>
+                      </a:solidFill>
+                      <a:prstDash val="solid"/>
+                      <a:round/>
+                      <a:headEnd type="none" w="med" len="med"/>
+                      <a:tailEnd type="none" w="med" len="med"/>
+                    </a:lnR>
+                    <a:lnT w="9525" cap="flat" cmpd="sng" algn="ctr">
+                      <a:solidFill>
+                        <a:srgbClr val="000000"/>
+                      </a:solidFill>
+                      <a:prstDash val="solid"/>
+                      <a:round/>
+                      <a:headEnd type="none" w="med" len="med"/>
+                      <a:tailEnd type="none" w="med" len="med"/>
+                    </a:lnT>
+                    <a:lnB w="9525" cap="flat" cmpd="sng" algn="ctr">
+                      <a:solidFill>
+                        <a:srgbClr val="000000"/>
+                      </a:solidFill>
+                      <a:prstDash val="solid"/>
+                      <a:round/>
+                      <a:headEnd type="none" w="med" len="med"/>
+                      <a:tailEnd type="none" w="med" len="med"/>
+                    </a:lnB>
+                    <a:noFill/>
+                  </a:tcPr>
+                </a:tc>
+                <a:extLst>
+                  <a:ext uri="{0D108BD9-81ED-4DB2-BD59-A6C34878D82A}">
+                    <a16:rowId xmlns:a16="http://schemas.microsoft.com/office/drawing/2014/main" val="1281531838"/>
+                  </a:ext>
+                </a:extLst>
+              </a:tr>
+              <a:tr h="768021">
+                <a:tc>
+                  <a:txBody>
+                    <a:bodyPr/>
+                    <a:lstStyle/>
+                    <a:p>
+                      <a:pPr>
+                        <a:buNone/>
+                      </a:pPr>
+                      <a:r>
+                        <a:rPr lang="en" sz="1100" b="1">
+                          <a:solidFill>
+                            <a:srgbClr val="000000"/>
+                          </a:solidFill>
+                          <a:effectLst/>
+                          <a:latin typeface="Helvetica Neue" panose="02000503000000020004" pitchFamily="2" charset="0"/>
+                        </a:rPr>
+                        <a:t>Exponential Smoothing</a:t>
+                      </a:r>
+                      <a:endParaRPr lang="en" sz="1100">
+                        <a:effectLst/>
+                      </a:endParaRPr>
+                    </a:p>
+                  </a:txBody>
+                  <a:tcPr marL="23294" marR="23294" marT="23294" marB="23294">
+                    <a:lnL w="9525" cap="flat" cmpd="sng" algn="ctr">
+                      <a:solidFill>
+                        <a:srgbClr val="000000"/>
+                      </a:solidFill>
+                      <a:prstDash val="solid"/>
+                      <a:round/>
+                      <a:headEnd type="none" w="med" len="med"/>
+                      <a:tailEnd type="none" w="med" len="med"/>
+                    </a:lnL>
+                    <a:lnR w="9525" cap="flat" cmpd="sng" algn="ctr">
+                      <a:solidFill>
+                        <a:srgbClr val="000000"/>
+                      </a:solidFill>
+                      <a:prstDash val="solid"/>
+                      <a:round/>
+                      <a:headEnd type="none" w="med" len="med"/>
+                      <a:tailEnd type="none" w="med" len="med"/>
+                    </a:lnR>
+                    <a:lnT w="9525" cap="flat" cmpd="sng" algn="ctr">
+                      <a:solidFill>
+                        <a:srgbClr val="000000"/>
+                      </a:solidFill>
+                      <a:prstDash val="solid"/>
+                      <a:round/>
+                      <a:headEnd type="none" w="med" len="med"/>
+                      <a:tailEnd type="none" w="med" len="med"/>
+                    </a:lnT>
+                    <a:lnB w="9525" cap="flat" cmpd="sng" algn="ctr">
+                      <a:solidFill>
+                        <a:srgbClr val="000000"/>
+                      </a:solidFill>
+                      <a:prstDash val="solid"/>
+                      <a:round/>
+                      <a:headEnd type="none" w="med" len="med"/>
+                      <a:tailEnd type="none" w="med" len="med"/>
+                    </a:lnB>
+                    <a:solidFill>
+                      <a:srgbClr val="D4D4D4"/>
+                    </a:solidFill>
+                  </a:tcPr>
+                </a:tc>
+                <a:tc>
+                  <a:txBody>
+                    <a:bodyPr/>
+                    <a:lstStyle/>
+                    <a:p>
+                      <a:pPr>
+                        <a:buNone/>
+                      </a:pPr>
+                      <a:r>
+                        <a:rPr lang="ru-RU" sz="1100">
+                          <a:solidFill>
+                            <a:srgbClr val="000000"/>
+                          </a:solidFill>
+                          <a:effectLst/>
+                          <a:latin typeface="Helvetica Neue" panose="02000503000000020004" pitchFamily="2" charset="0"/>
+                        </a:rPr>
+                        <a:t>Высокая</a:t>
+                      </a:r>
+                      <a:endParaRPr lang="ru-RU" sz="1100">
+                        <a:effectLst/>
+                      </a:endParaRPr>
+                    </a:p>
+                  </a:txBody>
+                  <a:tcPr marL="23294" marR="23294" marT="23294" marB="23294">
+                    <a:lnL w="9525" cap="flat" cmpd="sng" algn="ctr">
+                      <a:solidFill>
+                        <a:srgbClr val="000000"/>
+                      </a:solidFill>
+                      <a:prstDash val="solid"/>
+                      <a:round/>
+                      <a:headEnd type="none" w="med" len="med"/>
+                      <a:tailEnd type="none" w="med" len="med"/>
+                    </a:lnL>
+                    <a:lnR w="9525" cap="flat" cmpd="sng" algn="ctr">
+                      <a:solidFill>
+                        <a:srgbClr val="000000"/>
+                      </a:solidFill>
+                      <a:prstDash val="solid"/>
+                      <a:round/>
+                      <a:headEnd type="none" w="med" len="med"/>
+                      <a:tailEnd type="none" w="med" len="med"/>
+                    </a:lnR>
+                    <a:lnT w="9525" cap="flat" cmpd="sng" algn="ctr">
+                      <a:solidFill>
+                        <a:srgbClr val="000000"/>
+                      </a:solidFill>
+                      <a:prstDash val="solid"/>
+                      <a:round/>
+                      <a:headEnd type="none" w="med" len="med"/>
+                      <a:tailEnd type="none" w="med" len="med"/>
+                    </a:lnT>
+                    <a:lnB w="9525" cap="flat" cmpd="sng" algn="ctr">
+                      <a:solidFill>
+                        <a:srgbClr val="000000"/>
+                      </a:solidFill>
+                      <a:prstDash val="solid"/>
+                      <a:round/>
+                      <a:headEnd type="none" w="med" len="med"/>
+                      <a:tailEnd type="none" w="med" len="med"/>
+                    </a:lnB>
+                    <a:noFill/>
+                  </a:tcPr>
+                </a:tc>
+                <a:tc>
+                  <a:txBody>
+                    <a:bodyPr/>
+                    <a:lstStyle/>
+                    <a:p>
+                      <a:pPr>
+                        <a:buNone/>
+                      </a:pPr>
+                      <a:r>
+                        <a:rPr lang="ru-RU" sz="1100">
+                          <a:solidFill>
+                            <a:srgbClr val="000000"/>
+                          </a:solidFill>
+                          <a:effectLst/>
+                          <a:latin typeface="Helvetica Neue" panose="02000503000000020004" pitchFamily="2" charset="0"/>
+                        </a:rPr>
+                        <a:t>Для быстрого </a:t>
+                      </a:r>
+                      <a:r>
+                        <a:rPr lang="en" sz="1100">
+                          <a:solidFill>
+                            <a:srgbClr val="000000"/>
+                          </a:solidFill>
+                          <a:effectLst/>
+                          <a:latin typeface="Helvetica Neue" panose="02000503000000020004" pitchFamily="2" charset="0"/>
+                        </a:rPr>
+                        <a:t>baseline'</a:t>
+                      </a:r>
+                      <a:r>
+                        <a:rPr lang="ru-RU" sz="1100">
+                          <a:solidFill>
+                            <a:srgbClr val="000000"/>
+                          </a:solidFill>
+                          <a:effectLst/>
+                          <a:latin typeface="Helvetica Neue" panose="02000503000000020004" pitchFamily="2" charset="0"/>
+                        </a:rPr>
+                        <a:t>а</a:t>
+                      </a:r>
+                      <a:endParaRPr lang="ru-RU" sz="1100">
+                        <a:effectLst/>
+                      </a:endParaRPr>
+                    </a:p>
+                  </a:txBody>
+                  <a:tcPr marL="23294" marR="23294" marT="23294" marB="23294">
+                    <a:lnL w="9525" cap="flat" cmpd="sng" algn="ctr">
+                      <a:solidFill>
+                        <a:srgbClr val="000000"/>
+                      </a:solidFill>
+                      <a:prstDash val="solid"/>
+                      <a:round/>
+                      <a:headEnd type="none" w="med" len="med"/>
+                      <a:tailEnd type="none" w="med" len="med"/>
+                    </a:lnL>
+                    <a:lnR w="9525" cap="flat" cmpd="sng" algn="ctr">
+                      <a:solidFill>
+                        <a:srgbClr val="000000"/>
+                      </a:solidFill>
+                      <a:prstDash val="solid"/>
+                      <a:round/>
+                      <a:headEnd type="none" w="med" len="med"/>
+                      <a:tailEnd type="none" w="med" len="med"/>
+                    </a:lnR>
+                    <a:lnT w="9525" cap="flat" cmpd="sng" algn="ctr">
+                      <a:solidFill>
+                        <a:srgbClr val="000000"/>
+                      </a:solidFill>
+                      <a:prstDash val="solid"/>
+                      <a:round/>
+                      <a:headEnd type="none" w="med" len="med"/>
+                      <a:tailEnd type="none" w="med" len="med"/>
+                    </a:lnT>
+                    <a:lnB w="9525" cap="flat" cmpd="sng" algn="ctr">
+                      <a:solidFill>
+                        <a:srgbClr val="000000"/>
+                      </a:solidFill>
+                      <a:prstDash val="solid"/>
+                      <a:round/>
+                      <a:headEnd type="none" w="med" len="med"/>
+                      <a:tailEnd type="none" w="med" len="med"/>
+                    </a:lnB>
+                    <a:noFill/>
+                  </a:tcPr>
+                </a:tc>
+                <a:extLst>
+                  <a:ext uri="{0D108BD9-81ED-4DB2-BD59-A6C34878D82A}">
+                    <a16:rowId xmlns:a16="http://schemas.microsoft.com/office/drawing/2014/main" val="2514922834"/>
+                  </a:ext>
+                </a:extLst>
+              </a:tr>
+              <a:tr h="768021">
+                <a:tc>
+                  <a:txBody>
+                    <a:bodyPr/>
+                    <a:lstStyle/>
+                    <a:p>
+                      <a:pPr>
+                        <a:buNone/>
+                      </a:pPr>
+                      <a:r>
+                        <a:rPr lang="en" sz="1100" b="1">
+                          <a:solidFill>
+                            <a:srgbClr val="000000"/>
+                          </a:solidFill>
+                          <a:effectLst/>
+                          <a:latin typeface="Helvetica Neue" panose="02000503000000020004" pitchFamily="2" charset="0"/>
+                        </a:rPr>
+                        <a:t>XGBoost / LightGBM</a:t>
+                      </a:r>
+                      <a:endParaRPr lang="en" sz="1100">
+                        <a:effectLst/>
+                      </a:endParaRPr>
+                    </a:p>
+                  </a:txBody>
+                  <a:tcPr marL="23294" marR="23294" marT="23294" marB="23294">
+                    <a:lnL w="9525" cap="flat" cmpd="sng" algn="ctr">
+                      <a:solidFill>
+                        <a:srgbClr val="000000"/>
+                      </a:solidFill>
+                      <a:prstDash val="solid"/>
+                      <a:round/>
+                      <a:headEnd type="none" w="med" len="med"/>
+                      <a:tailEnd type="none" w="med" len="med"/>
+                    </a:lnL>
+                    <a:lnR w="9525" cap="flat" cmpd="sng" algn="ctr">
+                      <a:solidFill>
+                        <a:srgbClr val="000000"/>
+                      </a:solidFill>
+                      <a:prstDash val="solid"/>
+                      <a:round/>
+                      <a:headEnd type="none" w="med" len="med"/>
+                      <a:tailEnd type="none" w="med" len="med"/>
+                    </a:lnR>
+                    <a:lnT w="9525" cap="flat" cmpd="sng" algn="ctr">
+                      <a:solidFill>
+                        <a:srgbClr val="000000"/>
+                      </a:solidFill>
+                      <a:prstDash val="solid"/>
+                      <a:round/>
+                      <a:headEnd type="none" w="med" len="med"/>
+                      <a:tailEnd type="none" w="med" len="med"/>
+                    </a:lnT>
+                    <a:lnB w="9525" cap="flat" cmpd="sng" algn="ctr">
+                      <a:solidFill>
+                        <a:srgbClr val="000000"/>
+                      </a:solidFill>
+                      <a:prstDash val="solid"/>
+                      <a:round/>
+                      <a:headEnd type="none" w="med" len="med"/>
+                      <a:tailEnd type="none" w="med" len="med"/>
+                    </a:lnB>
+                    <a:solidFill>
+                      <a:srgbClr val="D4D4D4"/>
+                    </a:solidFill>
+                  </a:tcPr>
+                </a:tc>
+                <a:tc>
+                  <a:txBody>
+                    <a:bodyPr/>
+                    <a:lstStyle/>
+                    <a:p>
+                      <a:pPr>
+                        <a:buNone/>
+                      </a:pPr>
+                      <a:r>
+                        <a:rPr lang="ru-RU" sz="1100">
+                          <a:solidFill>
+                            <a:srgbClr val="000000"/>
+                          </a:solidFill>
+                          <a:effectLst/>
+                          <a:latin typeface="Helvetica Neue" panose="02000503000000020004" pitchFamily="2" charset="0"/>
+                        </a:rPr>
+                        <a:t>Высокая</a:t>
+                      </a:r>
+                      <a:endParaRPr lang="ru-RU" sz="1100">
+                        <a:effectLst/>
+                      </a:endParaRPr>
+                    </a:p>
+                  </a:txBody>
+                  <a:tcPr marL="23294" marR="23294" marT="23294" marB="23294">
+                    <a:lnL w="9525" cap="flat" cmpd="sng" algn="ctr">
+                      <a:solidFill>
+                        <a:srgbClr val="000000"/>
+                      </a:solidFill>
+                      <a:prstDash val="solid"/>
+                      <a:round/>
+                      <a:headEnd type="none" w="med" len="med"/>
+                      <a:tailEnd type="none" w="med" len="med"/>
+                    </a:lnL>
+                    <a:lnR w="9525" cap="flat" cmpd="sng" algn="ctr">
+                      <a:solidFill>
+                        <a:srgbClr val="000000"/>
+                      </a:solidFill>
+                      <a:prstDash val="solid"/>
+                      <a:round/>
+                      <a:headEnd type="none" w="med" len="med"/>
+                      <a:tailEnd type="none" w="med" len="med"/>
+                    </a:lnR>
+                    <a:lnT w="9525" cap="flat" cmpd="sng" algn="ctr">
+                      <a:solidFill>
+                        <a:srgbClr val="000000"/>
+                      </a:solidFill>
+                      <a:prstDash val="solid"/>
+                      <a:round/>
+                      <a:headEnd type="none" w="med" len="med"/>
+                      <a:tailEnd type="none" w="med" len="med"/>
+                    </a:lnT>
+                    <a:lnB w="9525" cap="flat" cmpd="sng" algn="ctr">
+                      <a:solidFill>
+                        <a:srgbClr val="000000"/>
+                      </a:solidFill>
+                      <a:prstDash val="solid"/>
+                      <a:round/>
+                      <a:headEnd type="none" w="med" len="med"/>
+                      <a:tailEnd type="none" w="med" len="med"/>
+                    </a:lnB>
+                    <a:noFill/>
+                  </a:tcPr>
+                </a:tc>
+                <a:tc>
+                  <a:txBody>
+                    <a:bodyPr/>
+                    <a:lstStyle/>
+                    <a:p>
+                      <a:pPr>
+                        <a:buNone/>
+                      </a:pPr>
+                      <a:r>
+                        <a:rPr lang="ru-RU" sz="1100">
+                          <a:solidFill>
+                            <a:srgbClr val="000000"/>
+                          </a:solidFill>
+                          <a:effectLst/>
+                          <a:latin typeface="Helvetica Neue" panose="02000503000000020004" pitchFamily="2" charset="0"/>
+                        </a:rPr>
+                        <a:t>При правильной векторизации</a:t>
+                      </a:r>
+                      <a:endParaRPr lang="ru-RU" sz="1100">
+                        <a:effectLst/>
+                      </a:endParaRPr>
+                    </a:p>
+                  </a:txBody>
+                  <a:tcPr marL="23294" marR="23294" marT="23294" marB="23294">
+                    <a:lnL w="9525" cap="flat" cmpd="sng" algn="ctr">
+                      <a:solidFill>
+                        <a:srgbClr val="000000"/>
+                      </a:solidFill>
+                      <a:prstDash val="solid"/>
+                      <a:round/>
+                      <a:headEnd type="none" w="med" len="med"/>
+                      <a:tailEnd type="none" w="med" len="med"/>
+                    </a:lnL>
+                    <a:lnR w="9525" cap="flat" cmpd="sng" algn="ctr">
+                      <a:solidFill>
+                        <a:srgbClr val="000000"/>
+                      </a:solidFill>
+                      <a:prstDash val="solid"/>
+                      <a:round/>
+                      <a:headEnd type="none" w="med" len="med"/>
+                      <a:tailEnd type="none" w="med" len="med"/>
+                    </a:lnR>
+                    <a:lnT w="9525" cap="flat" cmpd="sng" algn="ctr">
+                      <a:solidFill>
+                        <a:srgbClr val="000000"/>
+                      </a:solidFill>
+                      <a:prstDash val="solid"/>
+                      <a:round/>
+                      <a:headEnd type="none" w="med" len="med"/>
+                      <a:tailEnd type="none" w="med" len="med"/>
+                    </a:lnT>
+                    <a:lnB w="9525" cap="flat" cmpd="sng" algn="ctr">
+                      <a:solidFill>
+                        <a:srgbClr val="000000"/>
+                      </a:solidFill>
+                      <a:prstDash val="solid"/>
+                      <a:round/>
+                      <a:headEnd type="none" w="med" len="med"/>
+                      <a:tailEnd type="none" w="med" len="med"/>
+                    </a:lnB>
+                    <a:noFill/>
+                  </a:tcPr>
+                </a:tc>
+                <a:extLst>
+                  <a:ext uri="{0D108BD9-81ED-4DB2-BD59-A6C34878D82A}">
+                    <a16:rowId xmlns:a16="http://schemas.microsoft.com/office/drawing/2014/main" val="1196268023"/>
+                  </a:ext>
+                </a:extLst>
+              </a:tr>
+              <a:tr h="408946">
+                <a:tc>
+                  <a:txBody>
+                    <a:bodyPr/>
+                    <a:lstStyle/>
+                    <a:p>
+                      <a:pPr>
+                        <a:buNone/>
+                      </a:pPr>
+                      <a:r>
+                        <a:rPr lang="en" sz="1100" b="1">
+                          <a:solidFill>
+                            <a:srgbClr val="000000"/>
+                          </a:solidFill>
+                          <a:effectLst/>
+                          <a:latin typeface="Helvetica Neue" panose="02000503000000020004" pitchFamily="2" charset="0"/>
+                        </a:rPr>
+                        <a:t>Random Forest</a:t>
+                      </a:r>
+                      <a:endParaRPr lang="en" sz="1100">
+                        <a:effectLst/>
+                      </a:endParaRPr>
+                    </a:p>
+                  </a:txBody>
+                  <a:tcPr marL="23294" marR="23294" marT="23294" marB="23294">
+                    <a:lnL w="9525" cap="flat" cmpd="sng" algn="ctr">
+                      <a:solidFill>
+                        <a:srgbClr val="000000"/>
+                      </a:solidFill>
+                      <a:prstDash val="solid"/>
+                      <a:round/>
+                      <a:headEnd type="none" w="med" len="med"/>
+                      <a:tailEnd type="none" w="med" len="med"/>
+                    </a:lnL>
+                    <a:lnR w="9525" cap="flat" cmpd="sng" algn="ctr">
+                      <a:solidFill>
+                        <a:srgbClr val="000000"/>
+                      </a:solidFill>
+                      <a:prstDash val="solid"/>
+                      <a:round/>
+                      <a:headEnd type="none" w="med" len="med"/>
+                      <a:tailEnd type="none" w="med" len="med"/>
+                    </a:lnR>
+                    <a:lnT w="9525" cap="flat" cmpd="sng" algn="ctr">
+                      <a:solidFill>
+                        <a:srgbClr val="000000"/>
+                      </a:solidFill>
+                      <a:prstDash val="solid"/>
+                      <a:round/>
+                      <a:headEnd type="none" w="med" len="med"/>
+                      <a:tailEnd type="none" w="med" len="med"/>
+                    </a:lnT>
+                    <a:lnB w="9525" cap="flat" cmpd="sng" algn="ctr">
+                      <a:solidFill>
+                        <a:srgbClr val="000000"/>
+                      </a:solidFill>
+                      <a:prstDash val="solid"/>
+                      <a:round/>
+                      <a:headEnd type="none" w="med" len="med"/>
+                      <a:tailEnd type="none" w="med" len="med"/>
+                    </a:lnB>
+                    <a:solidFill>
+                      <a:srgbClr val="D4D4D4"/>
+                    </a:solidFill>
+                  </a:tcPr>
+                </a:tc>
+                <a:tc>
+                  <a:txBody>
+                    <a:bodyPr/>
+                    <a:lstStyle/>
+                    <a:p>
+                      <a:pPr>
+                        <a:buNone/>
+                      </a:pPr>
+                      <a:r>
+                        <a:rPr lang="ru-RU" sz="1100">
+                          <a:solidFill>
+                            <a:srgbClr val="000000"/>
+                          </a:solidFill>
+                          <a:effectLst/>
+                          <a:latin typeface="Helvetica Neue" panose="02000503000000020004" pitchFamily="2" charset="0"/>
+                        </a:rPr>
+                        <a:t>Средняя</a:t>
+                      </a:r>
+                      <a:endParaRPr lang="ru-RU" sz="1100">
+                        <a:effectLst/>
+                      </a:endParaRPr>
+                    </a:p>
+                  </a:txBody>
+                  <a:tcPr marL="23294" marR="23294" marT="23294" marB="23294">
+                    <a:lnL w="9525" cap="flat" cmpd="sng" algn="ctr">
+                      <a:solidFill>
+                        <a:srgbClr val="000000"/>
+                      </a:solidFill>
+                      <a:prstDash val="solid"/>
+                      <a:round/>
+                      <a:headEnd type="none" w="med" len="med"/>
+                      <a:tailEnd type="none" w="med" len="med"/>
+                    </a:lnL>
+                    <a:lnR w="9525" cap="flat" cmpd="sng" algn="ctr">
+                      <a:solidFill>
+                        <a:srgbClr val="000000"/>
+                      </a:solidFill>
+                      <a:prstDash val="solid"/>
+                      <a:round/>
+                      <a:headEnd type="none" w="med" len="med"/>
+                      <a:tailEnd type="none" w="med" len="med"/>
+                    </a:lnR>
+                    <a:lnT w="9525" cap="flat" cmpd="sng" algn="ctr">
+                      <a:solidFill>
+                        <a:srgbClr val="000000"/>
+                      </a:solidFill>
+                      <a:prstDash val="solid"/>
+                      <a:round/>
+                      <a:headEnd type="none" w="med" len="med"/>
+                      <a:tailEnd type="none" w="med" len="med"/>
+                    </a:lnT>
+                    <a:lnB w="9525" cap="flat" cmpd="sng" algn="ctr">
+                      <a:solidFill>
+                        <a:srgbClr val="000000"/>
+                      </a:solidFill>
+                      <a:prstDash val="solid"/>
+                      <a:round/>
+                      <a:headEnd type="none" w="med" len="med"/>
+                      <a:tailEnd type="none" w="med" len="med"/>
+                    </a:lnB>
+                    <a:noFill/>
+                  </a:tcPr>
+                </a:tc>
+                <a:tc>
+                  <a:txBody>
+                    <a:bodyPr/>
+                    <a:lstStyle/>
+                    <a:p>
+                      <a:pPr>
+                        <a:buNone/>
+                      </a:pPr>
+                      <a:r>
+                        <a:rPr lang="ru-RU" sz="1100">
+                          <a:solidFill>
+                            <a:srgbClr val="000000"/>
+                          </a:solidFill>
+                          <a:effectLst/>
+                          <a:latin typeface="Helvetica Neue" panose="02000503000000020004" pitchFamily="2" charset="0"/>
+                        </a:rPr>
+                        <a:t>При малом числе лагов</a:t>
+                      </a:r>
+                      <a:endParaRPr lang="ru-RU" sz="1100">
+                        <a:effectLst/>
+                      </a:endParaRPr>
+                    </a:p>
+                  </a:txBody>
+                  <a:tcPr marL="23294" marR="23294" marT="23294" marB="23294">
+                    <a:lnL w="9525" cap="flat" cmpd="sng" algn="ctr">
+                      <a:solidFill>
+                        <a:srgbClr val="000000"/>
+                      </a:solidFill>
+                      <a:prstDash val="solid"/>
+                      <a:round/>
+                      <a:headEnd type="none" w="med" len="med"/>
+                      <a:tailEnd type="none" w="med" len="med"/>
+                    </a:lnL>
+                    <a:lnR w="9525" cap="flat" cmpd="sng" algn="ctr">
+                      <a:solidFill>
+                        <a:srgbClr val="000000"/>
+                      </a:solidFill>
+                      <a:prstDash val="solid"/>
+                      <a:round/>
+                      <a:headEnd type="none" w="med" len="med"/>
+                      <a:tailEnd type="none" w="med" len="med"/>
+                    </a:lnR>
+                    <a:lnT w="9525" cap="flat" cmpd="sng" algn="ctr">
+                      <a:solidFill>
+                        <a:srgbClr val="000000"/>
+                      </a:solidFill>
+                      <a:prstDash val="solid"/>
+                      <a:round/>
+                      <a:headEnd type="none" w="med" len="med"/>
+                      <a:tailEnd type="none" w="med" len="med"/>
+                    </a:lnT>
+                    <a:lnB w="9525" cap="flat" cmpd="sng" algn="ctr">
+                      <a:solidFill>
+                        <a:srgbClr val="000000"/>
+                      </a:solidFill>
+                      <a:prstDash val="solid"/>
+                      <a:round/>
+                      <a:headEnd type="none" w="med" len="med"/>
+                      <a:tailEnd type="none" w="med" len="med"/>
+                    </a:lnB>
+                    <a:noFill/>
+                  </a:tcPr>
+                </a:tc>
+                <a:extLst>
+                  <a:ext uri="{0D108BD9-81ED-4DB2-BD59-A6C34878D82A}">
+                    <a16:rowId xmlns:a16="http://schemas.microsoft.com/office/drawing/2014/main" val="3910438209"/>
+                  </a:ext>
+                </a:extLst>
+              </a:tr>
+              <a:tr h="768021">
+                <a:tc>
+                  <a:txBody>
+                    <a:bodyPr/>
+                    <a:lstStyle/>
+                    <a:p>
+                      <a:pPr>
+                        <a:buNone/>
+                      </a:pPr>
+                      <a:r>
+                        <a:rPr lang="en" sz="1100" b="1">
+                          <a:solidFill>
+                            <a:srgbClr val="000000"/>
+                          </a:solidFill>
+                          <a:effectLst/>
+                          <a:latin typeface="Helvetica Neue" panose="02000503000000020004" pitchFamily="2" charset="0"/>
+                        </a:rPr>
+                        <a:t>Ridge / Lasso</a:t>
+                      </a:r>
+                      <a:endParaRPr lang="en" sz="1100">
+                        <a:effectLst/>
+                      </a:endParaRPr>
+                    </a:p>
+                  </a:txBody>
+                  <a:tcPr marL="23294" marR="23294" marT="23294" marB="23294">
+                    <a:lnL w="9525" cap="flat" cmpd="sng" algn="ctr">
+                      <a:solidFill>
+                        <a:srgbClr val="000000"/>
+                      </a:solidFill>
+                      <a:prstDash val="solid"/>
+                      <a:round/>
+                      <a:headEnd type="none" w="med" len="med"/>
+                      <a:tailEnd type="none" w="med" len="med"/>
+                    </a:lnL>
+                    <a:lnR w="9525" cap="flat" cmpd="sng" algn="ctr">
+                      <a:solidFill>
+                        <a:srgbClr val="000000"/>
+                      </a:solidFill>
+                      <a:prstDash val="solid"/>
+                      <a:round/>
+                      <a:headEnd type="none" w="med" len="med"/>
+                      <a:tailEnd type="none" w="med" len="med"/>
+                    </a:lnR>
+                    <a:lnT w="9525" cap="flat" cmpd="sng" algn="ctr">
+                      <a:solidFill>
+                        <a:srgbClr val="000000"/>
+                      </a:solidFill>
+                      <a:prstDash val="solid"/>
+                      <a:round/>
+                      <a:headEnd type="none" w="med" len="med"/>
+                      <a:tailEnd type="none" w="med" len="med"/>
+                    </a:lnT>
+                    <a:lnB w="9525" cap="flat" cmpd="sng" algn="ctr">
+                      <a:solidFill>
+                        <a:srgbClr val="000000"/>
+                      </a:solidFill>
+                      <a:prstDash val="solid"/>
+                      <a:round/>
+                      <a:headEnd type="none" w="med" len="med"/>
+                      <a:tailEnd type="none" w="med" len="med"/>
+                    </a:lnB>
+                    <a:solidFill>
+                      <a:srgbClr val="D4D4D4"/>
+                    </a:solidFill>
+                  </a:tcPr>
+                </a:tc>
+                <a:tc>
+                  <a:txBody>
+                    <a:bodyPr/>
+                    <a:lstStyle/>
+                    <a:p>
+                      <a:pPr>
+                        <a:buNone/>
+                      </a:pPr>
+                      <a:r>
+                        <a:rPr lang="ru-RU" sz="1100">
+                          <a:solidFill>
+                            <a:srgbClr val="000000"/>
+                          </a:solidFill>
+                          <a:effectLst/>
+                          <a:latin typeface="Helvetica Neue" panose="02000503000000020004" pitchFamily="2" charset="0"/>
+                        </a:rPr>
+                        <a:t>Высокая</a:t>
+                      </a:r>
+                      <a:endParaRPr lang="ru-RU" sz="1100">
+                        <a:effectLst/>
+                      </a:endParaRPr>
+                    </a:p>
+                  </a:txBody>
+                  <a:tcPr marL="23294" marR="23294" marT="23294" marB="23294">
+                    <a:lnL w="9525" cap="flat" cmpd="sng" algn="ctr">
+                      <a:solidFill>
+                        <a:srgbClr val="000000"/>
+                      </a:solidFill>
+                      <a:prstDash val="solid"/>
+                      <a:round/>
+                      <a:headEnd type="none" w="med" len="med"/>
+                      <a:tailEnd type="none" w="med" len="med"/>
+                    </a:lnL>
+                    <a:lnR w="9525" cap="flat" cmpd="sng" algn="ctr">
+                      <a:solidFill>
+                        <a:srgbClr val="000000"/>
+                      </a:solidFill>
+                      <a:prstDash val="solid"/>
+                      <a:round/>
+                      <a:headEnd type="none" w="med" len="med"/>
+                      <a:tailEnd type="none" w="med" len="med"/>
+                    </a:lnR>
+                    <a:lnT w="9525" cap="flat" cmpd="sng" algn="ctr">
+                      <a:solidFill>
+                        <a:srgbClr val="000000"/>
+                      </a:solidFill>
+                      <a:prstDash val="solid"/>
+                      <a:round/>
+                      <a:headEnd type="none" w="med" len="med"/>
+                      <a:tailEnd type="none" w="med" len="med"/>
+                    </a:lnT>
+                    <a:lnB w="9525" cap="flat" cmpd="sng" algn="ctr">
+                      <a:solidFill>
+                        <a:srgbClr val="000000"/>
+                      </a:solidFill>
+                      <a:prstDash val="solid"/>
+                      <a:round/>
+                      <a:headEnd type="none" w="med" len="med"/>
+                      <a:tailEnd type="none" w="med" len="med"/>
+                    </a:lnB>
+                    <a:noFill/>
+                  </a:tcPr>
+                </a:tc>
+                <a:tc>
+                  <a:txBody>
+                    <a:bodyPr/>
+                    <a:lstStyle/>
+                    <a:p>
+                      <a:pPr>
+                        <a:buNone/>
+                      </a:pPr>
+                      <a:r>
+                        <a:rPr lang="ru-RU" sz="1100" dirty="0">
+                          <a:solidFill>
+                            <a:srgbClr val="000000"/>
+                          </a:solidFill>
+                          <a:effectLst/>
+                          <a:latin typeface="Helvetica Neue" panose="02000503000000020004" pitchFamily="2" charset="0"/>
+                        </a:rPr>
+                        <a:t>При регуляризации и отборе признаков</a:t>
+                      </a:r>
+                      <a:endParaRPr lang="ru-RU" sz="1100" dirty="0">
+                        <a:effectLst/>
+                      </a:endParaRPr>
+                    </a:p>
+                  </a:txBody>
+                  <a:tcPr marL="23294" marR="23294" marT="23294" marB="23294">
+                    <a:lnL w="9525" cap="flat" cmpd="sng" algn="ctr">
+                      <a:solidFill>
+                        <a:srgbClr val="000000"/>
+                      </a:solidFill>
+                      <a:prstDash val="solid"/>
+                      <a:round/>
+                      <a:headEnd type="none" w="med" len="med"/>
+                      <a:tailEnd type="none" w="med" len="med"/>
+                    </a:lnL>
+                    <a:lnR w="9525" cap="flat" cmpd="sng" algn="ctr">
+                      <a:solidFill>
+                        <a:srgbClr val="000000"/>
+                      </a:solidFill>
+                      <a:prstDash val="solid"/>
+                      <a:round/>
+                      <a:headEnd type="none" w="med" len="med"/>
+                      <a:tailEnd type="none" w="med" len="med"/>
+                    </a:lnR>
+                    <a:lnT w="9525" cap="flat" cmpd="sng" algn="ctr">
+                      <a:solidFill>
+                        <a:srgbClr val="000000"/>
+                      </a:solidFill>
+                      <a:prstDash val="solid"/>
+                      <a:round/>
+                      <a:headEnd type="none" w="med" len="med"/>
+                      <a:tailEnd type="none" w="med" len="med"/>
+                    </a:lnT>
+                    <a:lnB w="9525" cap="flat" cmpd="sng" algn="ctr">
+                      <a:solidFill>
+                        <a:srgbClr val="000000"/>
+                      </a:solidFill>
+                      <a:prstDash val="solid"/>
+                      <a:round/>
+                      <a:headEnd type="none" w="med" len="med"/>
+                      <a:tailEnd type="none" w="med" len="med"/>
+                    </a:lnB>
+                    <a:noFill/>
+                  </a:tcPr>
+                </a:tc>
+                <a:extLst>
+                  <a:ext uri="{0D108BD9-81ED-4DB2-BD59-A6C34878D82A}">
+                    <a16:rowId xmlns:a16="http://schemas.microsoft.com/office/drawing/2014/main" val="331252224"/>
+                  </a:ext>
+                </a:extLst>
+              </a:tr>
+            </a:tbl>
+          </a:graphicData>
+        </a:graphic>
+      </p:graphicFrame>
+    </p:spTree>
+    <p:extLst>
+      <p:ext uri="{BB962C8B-B14F-4D97-AF65-F5344CB8AC3E}">
+        <p14:creationId xmlns:p14="http://schemas.microsoft.com/office/powerpoint/2010/main" val="2276634575"/>
+      </p:ext>
+    </p:extLst>
+  </p:cSld>
+  <p:clrMapOvr>
+    <a:masterClrMapping/>
+  </p:clrMapOvr>
+</p:sld>
+</file>
+
+<file path=ppt/slides/slide23.xml><?xml version="1.0" encoding="utf-8"?>
 <p:sld xmlns:a="http://schemas.openxmlformats.org/drawingml/2006/main" xmlns:r="http://schemas.openxmlformats.org/officeDocument/2006/relationships" xmlns:p="http://schemas.openxmlformats.org/presentationml/2006/main" show="0">
   <p:cSld>
     <p:spTree>
@@ -8195,7 +16151,7 @@
 </p:sld>
 </file>
 
-<file path=ppt/slides/slide18.xml><?xml version="1.0" encoding="utf-8"?>
+<file path=ppt/slides/slide24.xml><?xml version="1.0" encoding="utf-8"?>
 <p:sld xmlns:a="http://schemas.openxmlformats.org/drawingml/2006/main" xmlns:r="http://schemas.openxmlformats.org/officeDocument/2006/relationships" xmlns:p="http://schemas.openxmlformats.org/presentationml/2006/main" show="0">
   <p:cSld>
     <p:spTree>
@@ -8336,7 +16292,7 @@
 </p:sld>
 </file>
 
-<file path=ppt/slides/slide19.xml><?xml version="1.0" encoding="utf-8"?>
+<file path=ppt/slides/slide25.xml><?xml version="1.0" encoding="utf-8"?>
 <p:sld xmlns:a="http://schemas.openxmlformats.org/drawingml/2006/main" xmlns:r="http://schemas.openxmlformats.org/officeDocument/2006/relationships" xmlns:p="http://schemas.openxmlformats.org/presentationml/2006/main" show="0">
   <p:cSld>
     <p:spTree>
@@ -8437,265 +16393,6 @@
     <p:extLst>
       <p:ext uri="{BB962C8B-B14F-4D97-AF65-F5344CB8AC3E}">
         <p14:creationId xmlns:p14="http://schemas.microsoft.com/office/powerpoint/2010/main" val="4081172957"/>
-      </p:ext>
-    </p:extLst>
-  </p:cSld>
-  <p:clrMapOvr>
-    <a:masterClrMapping/>
-  </p:clrMapOvr>
-</p:sld>
-</file>
-
-<file path=ppt/slides/slide2.xml><?xml version="1.0" encoding="utf-8"?>
-<p:sld xmlns:a="http://schemas.openxmlformats.org/drawingml/2006/main" xmlns:r="http://schemas.openxmlformats.org/officeDocument/2006/relationships" xmlns:p="http://schemas.openxmlformats.org/presentationml/2006/main">
-  <p:cSld>
-    <p:spTree>
-      <p:nvGrpSpPr>
-        <p:cNvPr id="1" name=""/>
-        <p:cNvGrpSpPr/>
-        <p:nvPr/>
-      </p:nvGrpSpPr>
-      <p:grpSpPr>
-        <a:xfrm>
-          <a:off x="0" y="0"/>
-          <a:ext cx="0" cy="0"/>
-          <a:chOff x="0" y="0"/>
-          <a:chExt cx="0" cy="0"/>
-        </a:xfrm>
-      </p:grpSpPr>
-      <p:sp>
-        <p:nvSpPr>
-          <p:cNvPr id="2" name="Заголовок 1"/>
-          <p:cNvSpPr>
-            <a:spLocks noGrp="1"/>
-          </p:cNvSpPr>
-          <p:nvPr>
-            <p:ph type="title"/>
-          </p:nvPr>
-        </p:nvSpPr>
-        <p:spPr>
-          <a:xfrm>
-            <a:off x="352425" y="365126"/>
-            <a:ext cx="11001375" cy="539750"/>
-          </a:xfrm>
-        </p:spPr>
-        <p:txBody>
-          <a:bodyPr>
-            <a:normAutofit fontScale="90000"/>
-          </a:bodyPr>
-          <a:lstStyle/>
-          <a:p>
-            <a:r>
-              <a:rPr lang="ru-RU" dirty="0"/>
-              <a:t>Определение многомерных ВР</a:t>
-            </a:r>
-          </a:p>
-        </p:txBody>
-      </p:sp>
-      <p:sp>
-        <p:nvSpPr>
-          <p:cNvPr id="3" name="Объект 2"/>
-          <p:cNvSpPr>
-            <a:spLocks noGrp="1"/>
-          </p:cNvSpPr>
-          <p:nvPr>
-            <p:ph idx="1"/>
-          </p:nvPr>
-        </p:nvSpPr>
-        <p:spPr>
-          <a:xfrm>
-            <a:off x="276224" y="904876"/>
-            <a:ext cx="11534775" cy="2762249"/>
-          </a:xfrm>
-        </p:spPr>
-        <p:txBody>
-          <a:bodyPr/>
-          <a:lstStyle/>
-          <a:p>
-            <a:pPr marL="0" indent="0" eaLnBrk="0" fontAlgn="base" hangingPunct="0">
-              <a:lnSpc>
-                <a:spcPct val="100000"/>
-              </a:lnSpc>
-              <a:spcBef>
-                <a:spcPts val="300"/>
-              </a:spcBef>
-              <a:spcAft>
-                <a:spcPct val="0"/>
-              </a:spcAft>
-              <a:buNone/>
-            </a:pPr>
-            <a:r>
-              <a:rPr lang="ru-RU" sz="2400" b="1" dirty="0"/>
-              <a:t>Многомерный временной ряд</a:t>
-            </a:r>
-            <a:r>
-              <a:rPr lang="en-US" sz="2400" b="1" dirty="0"/>
-              <a:t> </a:t>
-            </a:r>
-            <a:r>
-              <a:rPr lang="ru-RU" sz="2400" b="1" dirty="0"/>
-              <a:t>(МВР)</a:t>
-            </a:r>
-            <a:r>
-              <a:rPr lang="ru-RU" sz="2400" dirty="0"/>
-              <a:t> - это набор из одномерных временных рядов, наблюдаемых одновременно</a:t>
-            </a:r>
-            <a:r>
-              <a:rPr lang="en-US" sz="2400" dirty="0"/>
-              <a:t> </a:t>
-            </a:r>
-            <a:r>
-              <a:rPr lang="ru-RU" sz="2400" b="1" dirty="0"/>
-              <a:t>и имеющих общую информацию</a:t>
-            </a:r>
-            <a:r>
-              <a:rPr lang="en-US" sz="2400" b="1" dirty="0"/>
-              <a:t>!</a:t>
-            </a:r>
-            <a:endParaRPr lang="ru-RU" altLang="ru-RU" sz="2400" b="1" dirty="0"/>
-          </a:p>
-          <a:p>
-            <a:pPr eaLnBrk="0" fontAlgn="base" hangingPunct="0">
-              <a:lnSpc>
-                <a:spcPct val="100000"/>
-              </a:lnSpc>
-              <a:spcBef>
-                <a:spcPts val="600"/>
-              </a:spcBef>
-              <a:spcAft>
-                <a:spcPct val="0"/>
-              </a:spcAft>
-            </a:pPr>
-            <a:r>
-              <a:rPr lang="ru-RU" altLang="ru-RU" sz="2400" dirty="0"/>
-              <a:t>Экономические показатели: ВВП, инфляция, безработица </a:t>
-            </a:r>
-          </a:p>
-          <a:p>
-            <a:pPr eaLnBrk="0" fontAlgn="base" hangingPunct="0">
-              <a:lnSpc>
-                <a:spcPct val="100000"/>
-              </a:lnSpc>
-              <a:spcBef>
-                <a:spcPts val="600"/>
-              </a:spcBef>
-              <a:spcAft>
-                <a:spcPct val="0"/>
-              </a:spcAft>
-            </a:pPr>
-            <a:r>
-              <a:rPr lang="ru-RU" altLang="ru-RU" sz="2400" dirty="0"/>
-              <a:t>Финансовые данные: курсы валют, цены акций, процентные ставки </a:t>
-            </a:r>
-          </a:p>
-          <a:p>
-            <a:pPr eaLnBrk="0" fontAlgn="base" hangingPunct="0">
-              <a:lnSpc>
-                <a:spcPct val="100000"/>
-              </a:lnSpc>
-              <a:spcBef>
-                <a:spcPts val="600"/>
-              </a:spcBef>
-              <a:spcAft>
-                <a:spcPct val="0"/>
-              </a:spcAft>
-            </a:pPr>
-            <a:r>
-              <a:rPr lang="ru-RU" altLang="ru-RU" sz="2400" dirty="0" err="1"/>
-              <a:t>IoT</a:t>
-            </a:r>
-            <a:r>
-              <a:rPr lang="ru-RU" altLang="ru-RU" sz="2400" dirty="0"/>
-              <a:t> сенсоры: температура, влажность, давление, освещенность </a:t>
-            </a:r>
-          </a:p>
-          <a:p>
-            <a:pPr eaLnBrk="0" fontAlgn="base" hangingPunct="0">
-              <a:lnSpc>
-                <a:spcPct val="100000"/>
-              </a:lnSpc>
-              <a:spcBef>
-                <a:spcPts val="600"/>
-              </a:spcBef>
-              <a:spcAft>
-                <a:spcPct val="0"/>
-              </a:spcAft>
-            </a:pPr>
-            <a:r>
-              <a:rPr lang="ru-RU" altLang="ru-RU" sz="2400" dirty="0"/>
-              <a:t>Веб-аналитика: посещения, конверсия, время на сайте </a:t>
-            </a:r>
-            <a:endParaRPr lang="ru-RU" dirty="0"/>
-          </a:p>
-        </p:txBody>
-      </p:sp>
-      <p:sp>
-        <p:nvSpPr>
-          <p:cNvPr id="5" name="AutoShape 2" descr="Example of multivariate time series data. | Download Scientific Diagram"/>
-          <p:cNvSpPr>
-            <a:spLocks noChangeAspect="1" noChangeArrowheads="1"/>
-          </p:cNvSpPr>
-          <p:nvPr/>
-        </p:nvSpPr>
-        <p:spPr bwMode="auto">
-          <a:xfrm>
-            <a:off x="155575" y="-144463"/>
-            <a:ext cx="304800" cy="304801"/>
-          </a:xfrm>
-          <a:prstGeom prst="rect">
-            <a:avLst/>
-          </a:prstGeom>
-          <a:noFill/>
-          <a:extLst>
-            <a:ext uri="{909E8E84-426E-40DD-AFC4-6F175D3DCCD1}">
-              <a14:hiddenFill xmlns:a14="http://schemas.microsoft.com/office/drawing/2010/main">
-                <a:solidFill>
-                  <a:srgbClr val="FFFFFF"/>
-                </a:solidFill>
-              </a14:hiddenFill>
-            </a:ext>
-          </a:extLst>
-        </p:spPr>
-        <p:txBody>
-          <a:bodyPr vert="horz" wrap="square" lIns="91440" tIns="45720" rIns="91440" bIns="45720" numCol="1" anchor="t" anchorCtr="0" compatLnSpc="1">
-            <a:prstTxWarp prst="textNoShape">
-              <a:avLst/>
-            </a:prstTxWarp>
-          </a:bodyPr>
-          <a:lstStyle/>
-          <a:p>
-            <a:endParaRPr lang="ru-RU"/>
-          </a:p>
-        </p:txBody>
-      </p:sp>
-      <p:pic>
-        <p:nvPicPr>
-          <p:cNvPr id="7" name="Рисунок 6"/>
-          <p:cNvPicPr>
-            <a:picLocks noChangeAspect="1"/>
-          </p:cNvPicPr>
-          <p:nvPr/>
-        </p:nvPicPr>
-        <p:blipFill>
-          <a:blip r:embed="rId2"/>
-          <a:stretch>
-            <a:fillRect/>
-          </a:stretch>
-        </p:blipFill>
-        <p:spPr>
-          <a:xfrm>
-            <a:off x="1704975" y="3572895"/>
-            <a:ext cx="6738937" cy="3051742"/>
-          </a:xfrm>
-          <a:prstGeom prst="rect">
-            <a:avLst/>
-          </a:prstGeom>
-        </p:spPr>
-      </p:pic>
-    </p:spTree>
-    <p:extLst>
-      <p:ext uri="{BB962C8B-B14F-4D97-AF65-F5344CB8AC3E}">
-        <p14:creationId xmlns:p14="http://schemas.microsoft.com/office/powerpoint/2010/main" val="1884299463"/>
       </p:ext>
     </p:extLst>
   </p:cSld>
@@ -9305,6 +17002,678 @@
 </file>
 
 <file path=ppt/slides/slide5.xml><?xml version="1.0" encoding="utf-8"?>
+<p:sld xmlns:a="http://schemas.openxmlformats.org/drawingml/2006/main" xmlns:r="http://schemas.openxmlformats.org/officeDocument/2006/relationships" xmlns:p="http://schemas.openxmlformats.org/presentationml/2006/main">
+  <p:cSld>
+    <p:spTree>
+      <p:nvGrpSpPr>
+        <p:cNvPr id="1" name=""/>
+        <p:cNvGrpSpPr/>
+        <p:nvPr/>
+      </p:nvGrpSpPr>
+      <p:grpSpPr>
+        <a:xfrm>
+          <a:off x="0" y="0"/>
+          <a:ext cx="0" cy="0"/>
+          <a:chOff x="0" y="0"/>
+          <a:chExt cx="0" cy="0"/>
+        </a:xfrm>
+      </p:grpSpPr>
+      <p:sp>
+        <p:nvSpPr>
+          <p:cNvPr id="2" name="Заголовок 1">
+            <a:extLst>
+              <a:ext uri="{FF2B5EF4-FFF2-40B4-BE49-F238E27FC236}">
+                <a16:creationId xmlns:a16="http://schemas.microsoft.com/office/drawing/2014/main" id="{5EDB508A-0C0C-1FDF-642F-9604AF420D61}"/>
+              </a:ext>
+            </a:extLst>
+          </p:cNvPr>
+          <p:cNvSpPr>
+            <a:spLocks noGrp="1"/>
+          </p:cNvSpPr>
+          <p:nvPr>
+            <p:ph type="title"/>
+          </p:nvPr>
+        </p:nvSpPr>
+        <p:spPr>
+          <a:xfrm>
+            <a:off x="746343" y="177234"/>
+            <a:ext cx="11165910" cy="599379"/>
+          </a:xfrm>
+        </p:spPr>
+        <p:txBody>
+          <a:bodyPr>
+            <a:normAutofit fontScale="90000"/>
+          </a:bodyPr>
+          <a:lstStyle/>
+          <a:p>
+            <a:r>
+              <a:rPr lang="ru-RU" dirty="0"/>
+              <a:t>Требования и проблемы МВР</a:t>
+            </a:r>
+          </a:p>
+        </p:txBody>
+      </p:sp>
+      <p:graphicFrame>
+        <p:nvGraphicFramePr>
+          <p:cNvPr id="4" name="Объект 3">
+            <a:extLst>
+              <a:ext uri="{FF2B5EF4-FFF2-40B4-BE49-F238E27FC236}">
+                <a16:creationId xmlns:a16="http://schemas.microsoft.com/office/drawing/2014/main" id="{4C6D77A8-018D-4F69-E0AB-665CC72D36BE}"/>
+              </a:ext>
+            </a:extLst>
+          </p:cNvPr>
+          <p:cNvGraphicFramePr>
+            <a:graphicFrameLocks noGrp="1"/>
+          </p:cNvGraphicFramePr>
+          <p:nvPr>
+            <p:ph idx="1"/>
+            <p:extLst>
+              <p:ext uri="{D42A27DB-BD31-4B8C-83A1-F6EECF244321}">
+                <p14:modId xmlns:p14="http://schemas.microsoft.com/office/powerpoint/2010/main" val="2484640271"/>
+              </p:ext>
+            </p:extLst>
+          </p:nvPr>
+        </p:nvGraphicFramePr>
+        <p:xfrm>
+          <a:off x="187890" y="776613"/>
+          <a:ext cx="11724363" cy="5730240"/>
+        </p:xfrm>
+        <a:graphic>
+          <a:graphicData uri="http://schemas.openxmlformats.org/drawingml/2006/table">
+            <a:tbl>
+              <a:tblPr firstRow="1" bandRow="1">
+                <a:tableStyleId>{5C22544A-7EE6-4342-B048-85BDC9FD1C3A}</a:tableStyleId>
+              </a:tblPr>
+              <a:tblGrid>
+                <a:gridCol w="1891431">
+                  <a:extLst>
+                    <a:ext uri="{9D8B030D-6E8A-4147-A177-3AD203B41FA5}">
+                      <a16:colId xmlns:a16="http://schemas.microsoft.com/office/drawing/2014/main" val="2003674582"/>
+                    </a:ext>
+                  </a:extLst>
+                </a:gridCol>
+                <a:gridCol w="4008328">
+                  <a:extLst>
+                    <a:ext uri="{9D8B030D-6E8A-4147-A177-3AD203B41FA5}">
+                      <a16:colId xmlns:a16="http://schemas.microsoft.com/office/drawing/2014/main" val="3372195085"/>
+                    </a:ext>
+                  </a:extLst>
+                </a:gridCol>
+                <a:gridCol w="5824604">
+                  <a:extLst>
+                    <a:ext uri="{9D8B030D-6E8A-4147-A177-3AD203B41FA5}">
+                      <a16:colId xmlns:a16="http://schemas.microsoft.com/office/drawing/2014/main" val="2406795206"/>
+                    </a:ext>
+                  </a:extLst>
+                </a:gridCol>
+              </a:tblGrid>
+              <a:tr h="241170">
+                <a:tc>
+                  <a:txBody>
+                    <a:bodyPr/>
+                    <a:lstStyle/>
+                    <a:p>
+                      <a:endParaRPr lang="ru-RU" sz="2000" dirty="0"/>
+                    </a:p>
+                  </a:txBody>
+                  <a:tcPr/>
+                </a:tc>
+                <a:tc>
+                  <a:txBody>
+                    <a:bodyPr/>
+                    <a:lstStyle/>
+                    <a:p>
+                      <a:r>
+                        <a:rPr lang="ru-RU" sz="2000" dirty="0"/>
+                        <a:t>Проблемы</a:t>
+                      </a:r>
+                    </a:p>
+                  </a:txBody>
+                  <a:tcPr/>
+                </a:tc>
+                <a:tc>
+                  <a:txBody>
+                    <a:bodyPr/>
+                    <a:lstStyle/>
+                    <a:p>
+                      <a:r>
+                        <a:rPr lang="ru-RU" sz="2000" dirty="0"/>
+                        <a:t>Решения </a:t>
+                      </a:r>
+                    </a:p>
+                  </a:txBody>
+                  <a:tcPr/>
+                </a:tc>
+                <a:extLst>
+                  <a:ext uri="{0D108BD9-81ED-4DB2-BD59-A6C34878D82A}">
+                    <a16:rowId xmlns:a16="http://schemas.microsoft.com/office/drawing/2014/main" val="601287456"/>
+                  </a:ext>
+                </a:extLst>
+              </a:tr>
+              <a:tr h="805240">
+                <a:tc>
+                  <a:txBody>
+                    <a:bodyPr/>
+                    <a:lstStyle/>
+                    <a:p>
+                      <a:pPr marL="0" marR="0" lvl="0" indent="0" algn="l" defTabSz="914400" rtl="0" eaLnBrk="1" fontAlgn="auto" latinLnBrk="0" hangingPunct="1">
+                        <a:lnSpc>
+                          <a:spcPct val="100000"/>
+                        </a:lnSpc>
+                        <a:spcBef>
+                          <a:spcPts val="0"/>
+                        </a:spcBef>
+                        <a:spcAft>
+                          <a:spcPts val="0"/>
+                        </a:spcAft>
+                        <a:buClrTx/>
+                        <a:buSzTx/>
+                        <a:buFontTx/>
+                        <a:buNone/>
+                        <a:tabLst/>
+                        <a:defRPr/>
+                      </a:pPr>
+                      <a:r>
+                        <a:rPr lang="ru-RU" sz="2000" b="0" i="0" kern="1200" dirty="0">
+                          <a:solidFill>
+                            <a:schemeClr val="dk1"/>
+                          </a:solidFill>
+                          <a:effectLst/>
+                          <a:latin typeface="+mn-lt"/>
+                          <a:ea typeface="+mn-ea"/>
+                          <a:cs typeface="+mn-cs"/>
+                        </a:rPr>
+                        <a:t>Единая временная шкала и длина выборки</a:t>
+                      </a:r>
+                      <a:endParaRPr lang="ru-RU" sz="2000" b="1" i="0" kern="1200" dirty="0">
+                        <a:solidFill>
+                          <a:schemeClr val="dk1"/>
+                        </a:solidFill>
+                        <a:effectLst/>
+                        <a:latin typeface="+mn-lt"/>
+                        <a:ea typeface="+mn-ea"/>
+                        <a:cs typeface="+mn-cs"/>
+                      </a:endParaRPr>
+                    </a:p>
+                  </a:txBody>
+                  <a:tcPr/>
+                </a:tc>
+                <a:tc>
+                  <a:txBody>
+                    <a:bodyPr/>
+                    <a:lstStyle/>
+                    <a:p>
+                      <a:r>
+                        <a:rPr lang="ru-RU" sz="2000" b="0" i="0" kern="1200" dirty="0">
+                          <a:solidFill>
+                            <a:schemeClr val="dk1"/>
+                          </a:solidFill>
+                          <a:effectLst/>
+                          <a:latin typeface="+mn-lt"/>
+                          <a:ea typeface="+mn-ea"/>
+                          <a:cs typeface="+mn-cs"/>
+                        </a:rPr>
+                        <a:t>Разная частота (один датчик — 1 раз в секунду, другой — в минуту)</a:t>
+                      </a:r>
+                    </a:p>
+                    <a:p>
+                      <a:r>
+                        <a:rPr lang="ru-RU" sz="2000" b="0" i="0" kern="1200" dirty="0">
+                          <a:solidFill>
+                            <a:schemeClr val="dk1"/>
+                          </a:solidFill>
+                          <a:effectLst/>
+                          <a:latin typeface="+mn-lt"/>
+                          <a:ea typeface="+mn-ea"/>
+                          <a:cs typeface="+mn-cs"/>
+                        </a:rPr>
+                        <a:t>Сдвиги во времени (асинхронность)</a:t>
+                      </a:r>
+                    </a:p>
+                  </a:txBody>
+                  <a:tcPr/>
+                </a:tc>
+                <a:tc>
+                  <a:txBody>
+                    <a:bodyPr/>
+                    <a:lstStyle/>
+                    <a:p>
+                      <a:pPr marL="126000" indent="-126000">
+                        <a:buFont typeface="Arial" panose="020B0604020202020204" pitchFamily="34" charset="0"/>
+                        <a:buChar char="•"/>
+                      </a:pPr>
+                      <a:r>
+                        <a:rPr lang="ru-RU" sz="2000" dirty="0" err="1"/>
+                        <a:t>Ресемплинг</a:t>
+                      </a:r>
+                      <a:r>
+                        <a:rPr lang="ru-RU" sz="2000" dirty="0"/>
+                        <a:t> с большей частотой</a:t>
+                      </a:r>
+                    </a:p>
+                    <a:p>
+                      <a:pPr marL="126000" indent="-126000">
+                        <a:buFont typeface="Arial" panose="020B0604020202020204" pitchFamily="34" charset="0"/>
+                        <a:buChar char="•"/>
+                      </a:pPr>
+                      <a:r>
+                        <a:rPr lang="ru-RU" sz="2000" dirty="0"/>
+                        <a:t>Интерполяция с частотой </a:t>
+                      </a:r>
+                      <a:r>
+                        <a:rPr lang="en-US" sz="2000" dirty="0"/>
+                        <a:t>&lt;</a:t>
+                      </a:r>
+                      <a:r>
+                        <a:rPr lang="ru-RU" sz="2000" dirty="0"/>
+                        <a:t> наименьшей и </a:t>
+                      </a:r>
+                      <a:r>
+                        <a:rPr lang="ru-RU" sz="2000" dirty="0" err="1"/>
+                        <a:t>передискретизация</a:t>
+                      </a:r>
+                      <a:endParaRPr lang="ru-RU" sz="2000" dirty="0"/>
+                    </a:p>
+                    <a:p>
+                      <a:pPr marL="126000" indent="-126000">
+                        <a:buFont typeface="Arial" panose="020B0604020202020204" pitchFamily="34" charset="0"/>
+                        <a:buChar char="•"/>
+                      </a:pPr>
+                      <a:r>
+                        <a:rPr lang="ru-RU" sz="2000" dirty="0"/>
+                        <a:t>Агрегация (если есть иерархия)</a:t>
+                      </a:r>
+                    </a:p>
+                  </a:txBody>
+                  <a:tcPr/>
+                </a:tc>
+                <a:extLst>
+                  <a:ext uri="{0D108BD9-81ED-4DB2-BD59-A6C34878D82A}">
+                    <a16:rowId xmlns:a16="http://schemas.microsoft.com/office/drawing/2014/main" val="4258919944"/>
+                  </a:ext>
+                </a:extLst>
+              </a:tr>
+              <a:tr h="805240">
+                <a:tc>
+                  <a:txBody>
+                    <a:bodyPr/>
+                    <a:lstStyle/>
+                    <a:p>
+                      <a:r>
+                        <a:rPr lang="ru-RU" sz="2000" b="0" i="0" kern="1200" dirty="0">
+                          <a:solidFill>
+                            <a:schemeClr val="dk1"/>
+                          </a:solidFill>
+                          <a:effectLst/>
+                          <a:latin typeface="+mn-lt"/>
+                          <a:ea typeface="+mn-ea"/>
+                          <a:cs typeface="+mn-cs"/>
+                        </a:rPr>
+                        <a:t>Единый</a:t>
+                      </a:r>
+                      <a:r>
+                        <a:rPr lang="ru-RU" sz="2000" dirty="0"/>
+                        <a:t> временной масштаб</a:t>
+                      </a:r>
+                    </a:p>
+                  </a:txBody>
+                  <a:tcPr/>
+                </a:tc>
+                <a:tc>
+                  <a:txBody>
+                    <a:bodyPr/>
+                    <a:lstStyle/>
+                    <a:p>
+                      <a:r>
+                        <a:rPr lang="ru-RU" sz="2000" dirty="0"/>
+                        <a:t>Разные сезонности в рядах (где-то сутки, где то год)</a:t>
+                      </a:r>
+                    </a:p>
+                  </a:txBody>
+                  <a:tcPr/>
+                </a:tc>
+                <a:tc>
+                  <a:txBody>
+                    <a:bodyPr/>
+                    <a:lstStyle/>
+                    <a:p>
+                      <a:pPr marL="126000" indent="-126000">
+                        <a:buFont typeface="Arial" panose="020B0604020202020204" pitchFamily="34" charset="0"/>
+                        <a:buChar char="•"/>
+                      </a:pPr>
+                      <a:r>
+                        <a:rPr lang="ru-RU" sz="2000" dirty="0"/>
+                        <a:t>Разложение ВР. (STL</a:t>
+                      </a:r>
+                      <a:r>
+                        <a:rPr lang="en-US" sz="2000" dirty="0"/>
+                        <a:t>)</a:t>
+                      </a:r>
+                      <a:r>
+                        <a:rPr lang="ru-RU" sz="2000" dirty="0"/>
+                        <a:t>, </a:t>
+                      </a:r>
+                    </a:p>
+                    <a:p>
+                      <a:pPr marL="126000" indent="-126000">
+                        <a:buFont typeface="Arial" panose="020B0604020202020204" pitchFamily="34" charset="0"/>
+                        <a:buChar char="•"/>
+                      </a:pPr>
+                      <a:r>
+                        <a:rPr lang="ru-RU" sz="2000" dirty="0"/>
+                        <a:t>Разделение по группам, </a:t>
+                      </a:r>
+                    </a:p>
+                    <a:p>
+                      <a:pPr marL="126000" indent="-126000">
+                        <a:buFont typeface="Arial" panose="020B0604020202020204" pitchFamily="34" charset="0"/>
+                        <a:buChar char="•"/>
+                      </a:pPr>
+                      <a:r>
+                        <a:rPr lang="ru-RU" sz="2000" dirty="0"/>
+                        <a:t>добавление масштабов как экзогенных </a:t>
+                      </a:r>
+                      <a:br>
+                        <a:rPr lang="ru-RU" sz="2000" dirty="0"/>
+                      </a:br>
+                      <a:r>
+                        <a:rPr lang="ru-RU" sz="2000" dirty="0"/>
+                        <a:t>факторов к каждому ВР</a:t>
+                      </a:r>
+                    </a:p>
+                  </a:txBody>
+                  <a:tcPr/>
+                </a:tc>
+                <a:extLst>
+                  <a:ext uri="{0D108BD9-81ED-4DB2-BD59-A6C34878D82A}">
+                    <a16:rowId xmlns:a16="http://schemas.microsoft.com/office/drawing/2014/main" val="3867097848"/>
+                  </a:ext>
+                </a:extLst>
+              </a:tr>
+              <a:tr h="575798">
+                <a:tc>
+                  <a:txBody>
+                    <a:bodyPr/>
+                    <a:lstStyle/>
+                    <a:p>
+                      <a:r>
+                        <a:rPr lang="ru-RU" sz="2000" dirty="0"/>
+                        <a:t>Связи между рядами</a:t>
+                      </a:r>
+                    </a:p>
+                  </a:txBody>
+                  <a:tcPr/>
+                </a:tc>
+                <a:tc>
+                  <a:txBody>
+                    <a:bodyPr/>
+                    <a:lstStyle/>
+                    <a:p>
+                      <a:r>
+                        <a:rPr lang="ru-RU" sz="2000" dirty="0"/>
+                        <a:t>Неучет  связи приводит к ложным выводам, </a:t>
+                      </a:r>
+                      <a:r>
+                        <a:rPr lang="ru-RU" sz="1800" b="0" i="0" kern="1200" dirty="0" err="1">
+                          <a:solidFill>
+                            <a:schemeClr val="dk1"/>
+                          </a:solidFill>
+                          <a:effectLst/>
+                          <a:latin typeface="+mn-lt"/>
+                          <a:ea typeface="+mn-ea"/>
+                          <a:cs typeface="+mn-cs"/>
+                        </a:rPr>
+                        <a:t>Мультиколлинеарности</a:t>
+                      </a:r>
+                      <a:r>
+                        <a:rPr lang="ru-RU" sz="1800" b="0" i="0" kern="1200" dirty="0">
+                          <a:solidFill>
+                            <a:schemeClr val="dk1"/>
+                          </a:solidFill>
+                          <a:effectLst/>
+                          <a:latin typeface="+mn-lt"/>
+                          <a:ea typeface="+mn-ea"/>
+                          <a:cs typeface="+mn-cs"/>
+                        </a:rPr>
+                        <a:t>, снижению интерпретируемости</a:t>
+                      </a:r>
+                      <a:endParaRPr lang="ru-RU" sz="2000" dirty="0"/>
+                    </a:p>
+                  </a:txBody>
+                  <a:tcPr/>
+                </a:tc>
+                <a:tc>
+                  <a:txBody>
+                    <a:bodyPr/>
+                    <a:lstStyle/>
+                    <a:p>
+                      <a:pPr marL="126000" indent="-126000">
+                        <a:buFont typeface="Arial" panose="020B0604020202020204" pitchFamily="34" charset="0"/>
+                        <a:buChar char="•"/>
+                      </a:pPr>
+                      <a:r>
+                        <a:rPr lang="ru-RU" sz="2000" dirty="0"/>
+                        <a:t>Корреляция - регуляризация,</a:t>
+                      </a:r>
+                    </a:p>
+                    <a:p>
+                      <a:pPr marL="126000" indent="-126000">
+                        <a:buFont typeface="Arial" panose="020B0604020202020204" pitchFamily="34" charset="0"/>
+                        <a:buChar char="•"/>
+                      </a:pPr>
+                      <a:r>
+                        <a:rPr lang="ru-RU" sz="2000" dirty="0"/>
+                        <a:t>Казуальность – </a:t>
+                      </a:r>
+                      <a:r>
+                        <a:rPr lang="ru-RU" sz="2000" dirty="0" err="1"/>
+                        <a:t>вр</a:t>
+                      </a:r>
+                      <a:r>
+                        <a:rPr lang="ru-RU" sz="2000" dirty="0"/>
+                        <a:t> как </a:t>
+                      </a:r>
+                      <a:r>
+                        <a:rPr lang="ru-RU" sz="2000" dirty="0" err="1"/>
+                        <a:t>экзоген</a:t>
+                      </a:r>
+                      <a:r>
+                        <a:rPr lang="ru-RU" sz="2000" dirty="0"/>
+                        <a:t>. фактор, </a:t>
+                      </a:r>
+                    </a:p>
+                    <a:p>
+                      <a:pPr marL="126000" indent="-126000">
+                        <a:buFont typeface="Arial" panose="020B0604020202020204" pitchFamily="34" charset="0"/>
+                        <a:buChar char="•"/>
+                      </a:pPr>
+                      <a:r>
+                        <a:rPr lang="ru-RU" sz="2000" dirty="0" err="1"/>
+                        <a:t>Коинтеграция</a:t>
+                      </a:r>
+                      <a:r>
+                        <a:rPr lang="ru-RU" sz="2000" dirty="0"/>
+                        <a:t> – поиск ЛК</a:t>
+                      </a:r>
+                    </a:p>
+                  </a:txBody>
+                  <a:tcPr/>
+                </a:tc>
+                <a:extLst>
+                  <a:ext uri="{0D108BD9-81ED-4DB2-BD59-A6C34878D82A}">
+                    <a16:rowId xmlns:a16="http://schemas.microsoft.com/office/drawing/2014/main" val="3336157207"/>
+                  </a:ext>
+                </a:extLst>
+              </a:tr>
+              <a:tr h="575798">
+                <a:tc>
+                  <a:txBody>
+                    <a:bodyPr/>
+                    <a:lstStyle/>
+                    <a:p>
+                      <a:r>
+                        <a:rPr lang="ru-RU" sz="2000" dirty="0"/>
+                        <a:t>стационар.</a:t>
+                      </a:r>
+                    </a:p>
+                  </a:txBody>
+                  <a:tcPr/>
+                </a:tc>
+                <a:tc>
+                  <a:txBody>
+                    <a:bodyPr/>
+                    <a:lstStyle/>
+                    <a:p>
+                      <a:r>
+                        <a:rPr lang="ru-RU" sz="2000" dirty="0"/>
+                        <a:t>ВР могут сводится независимо или только как комбинация</a:t>
+                      </a:r>
+                    </a:p>
+                  </a:txBody>
+                  <a:tcPr/>
+                </a:tc>
+                <a:tc>
+                  <a:txBody>
+                    <a:bodyPr/>
+                    <a:lstStyle/>
+                    <a:p>
+                      <a:pPr marL="126000" indent="-126000">
+                        <a:buFont typeface="Arial" panose="020B0604020202020204" pitchFamily="34" charset="0"/>
+                        <a:buChar char="•"/>
+                      </a:pPr>
+                      <a:r>
+                        <a:rPr lang="en-US" sz="2000" dirty="0"/>
+                        <a:t>ADF, KPSS </a:t>
+                      </a:r>
+                      <a:r>
+                        <a:rPr lang="ru-RU" sz="2000" dirty="0"/>
+                        <a:t>для каждого </a:t>
+                      </a:r>
+                      <a:r>
+                        <a:rPr lang="ru-RU" sz="2000" dirty="0" err="1"/>
+                        <a:t>вр</a:t>
+                      </a:r>
+                      <a:endParaRPr lang="ru-RU" sz="2000" dirty="0"/>
+                    </a:p>
+                    <a:p>
+                      <a:pPr marL="126000" indent="-126000">
+                        <a:buFont typeface="Arial" panose="020B0604020202020204" pitchFamily="34" charset="0"/>
+                        <a:buChar char="•"/>
+                      </a:pPr>
+                      <a:r>
+                        <a:rPr lang="ru-RU" sz="2000" dirty="0" err="1"/>
+                        <a:t>Коинтеграция</a:t>
+                      </a:r>
+                      <a:r>
+                        <a:rPr lang="ru-RU" sz="2000" dirty="0"/>
+                        <a:t> если совместно</a:t>
+                      </a:r>
+                    </a:p>
+                  </a:txBody>
+                  <a:tcPr/>
+                </a:tc>
+                <a:extLst>
+                  <a:ext uri="{0D108BD9-81ED-4DB2-BD59-A6C34878D82A}">
+                    <a16:rowId xmlns:a16="http://schemas.microsoft.com/office/drawing/2014/main" val="2447713331"/>
+                  </a:ext>
+                </a:extLst>
+              </a:tr>
+              <a:tr h="575798">
+                <a:tc>
+                  <a:txBody>
+                    <a:bodyPr/>
+                    <a:lstStyle/>
+                    <a:p>
+                      <a:r>
+                        <a:rPr lang="ru-RU" sz="2000" dirty="0"/>
+                        <a:t>Глобальный объясняющий фактор</a:t>
+                      </a:r>
+                    </a:p>
+                  </a:txBody>
+                  <a:tcPr/>
+                </a:tc>
+                <a:tc>
+                  <a:txBody>
+                    <a:bodyPr/>
+                    <a:lstStyle/>
+                    <a:p>
+                      <a:r>
+                        <a:rPr lang="ru-RU" sz="2000" dirty="0"/>
+                        <a:t>Разделение влияния фактора от взаимных связей ВР</a:t>
+                      </a:r>
+                    </a:p>
+                  </a:txBody>
+                  <a:tcPr/>
+                </a:tc>
+                <a:tc>
+                  <a:txBody>
+                    <a:bodyPr/>
+                    <a:lstStyle/>
+                    <a:p>
+                      <a:pPr marL="126000" indent="-126000">
+                        <a:buFont typeface="Arial" panose="020B0604020202020204" pitchFamily="34" charset="0"/>
+                        <a:buChar char="•"/>
+                      </a:pPr>
+                      <a:r>
+                        <a:rPr lang="ru-RU" sz="2000" dirty="0"/>
+                        <a:t>Учет экзогенного фактора для каждого ВР</a:t>
+                      </a:r>
+                    </a:p>
+                    <a:p>
+                      <a:pPr marL="126000" indent="-126000">
+                        <a:buFont typeface="Arial" panose="020B0604020202020204" pitchFamily="34" charset="0"/>
+                        <a:buChar char="•"/>
+                      </a:pPr>
+                      <a:r>
+                        <a:rPr lang="ru-RU" sz="2000" dirty="0"/>
+                        <a:t>Снятие зависимости линейной регрессией</a:t>
+                      </a:r>
+                    </a:p>
+                    <a:p>
+                      <a:pPr marL="126000" indent="-126000">
+                        <a:buFont typeface="Arial" panose="020B0604020202020204" pitchFamily="34" charset="0"/>
+                        <a:buChar char="•"/>
+                      </a:pPr>
+                      <a:r>
+                        <a:rPr lang="ru-RU" sz="2000" dirty="0"/>
+                        <a:t>PCA</a:t>
+                      </a:r>
+                      <a:r>
+                        <a:rPr lang="en-US" sz="2000" dirty="0"/>
+                        <a:t> + </a:t>
+                      </a:r>
+                      <a:r>
+                        <a:rPr lang="ru-RU" sz="2000" dirty="0"/>
+                        <a:t>восстановление без главной компоненты</a:t>
+                      </a:r>
+                    </a:p>
+                  </a:txBody>
+                  <a:tcPr/>
+                </a:tc>
+                <a:extLst>
+                  <a:ext uri="{0D108BD9-81ED-4DB2-BD59-A6C34878D82A}">
+                    <a16:rowId xmlns:a16="http://schemas.microsoft.com/office/drawing/2014/main" val="247269211"/>
+                  </a:ext>
+                </a:extLst>
+              </a:tr>
+            </a:tbl>
+          </a:graphicData>
+        </a:graphic>
+      </p:graphicFrame>
+    </p:spTree>
+    <p:extLst>
+      <p:ext uri="{BB962C8B-B14F-4D97-AF65-F5344CB8AC3E}">
+        <p14:creationId xmlns:p14="http://schemas.microsoft.com/office/powerpoint/2010/main" val="538255811"/>
+      </p:ext>
+    </p:extLst>
+  </p:cSld>
+  <p:clrMapOvr>
+    <a:masterClrMapping/>
+  </p:clrMapOvr>
+</p:sld>
+</file>
+
+<file path=ppt/slides/slide6.xml><?xml version="1.0" encoding="utf-8"?>
 <p:sld xmlns:a="http://schemas.openxmlformats.org/drawingml/2006/main" xmlns:r="http://schemas.openxmlformats.org/officeDocument/2006/relationships" xmlns:p="http://schemas.openxmlformats.org/presentationml/2006/main">
   <p:cSld>
     <p:spTree>
@@ -11527,91 +19896,6 @@
 </p:sld>
 </file>
 
-<file path=ppt/slides/slide6.xml><?xml version="1.0" encoding="utf-8"?>
-<p:sld xmlns:a="http://schemas.openxmlformats.org/drawingml/2006/main" xmlns:r="http://schemas.openxmlformats.org/officeDocument/2006/relationships" xmlns:p="http://schemas.openxmlformats.org/presentationml/2006/main">
-  <p:cSld>
-    <p:spTree>
-      <p:nvGrpSpPr>
-        <p:cNvPr id="1" name=""/>
-        <p:cNvGrpSpPr/>
-        <p:nvPr/>
-      </p:nvGrpSpPr>
-      <p:grpSpPr>
-        <a:xfrm>
-          <a:off x="0" y="0"/>
-          <a:ext cx="0" cy="0"/>
-          <a:chOff x="0" y="0"/>
-          <a:chExt cx="0" cy="0"/>
-        </a:xfrm>
-      </p:grpSpPr>
-      <p:sp>
-        <p:nvSpPr>
-          <p:cNvPr id="2" name="Заголовок 1">
-            <a:extLst>
-              <a:ext uri="{FF2B5EF4-FFF2-40B4-BE49-F238E27FC236}">
-                <a16:creationId xmlns:a16="http://schemas.microsoft.com/office/drawing/2014/main" id="{817F5B93-BBE2-5639-2576-44C519FB3E17}"/>
-              </a:ext>
-            </a:extLst>
-          </p:cNvPr>
-          <p:cNvSpPr>
-            <a:spLocks noGrp="1"/>
-          </p:cNvSpPr>
-          <p:nvPr>
-            <p:ph type="title"/>
-          </p:nvPr>
-        </p:nvSpPr>
-        <p:spPr>
-          <a:xfrm>
-            <a:off x="576197" y="365126"/>
-            <a:ext cx="10777603" cy="1087894"/>
-          </a:xfrm>
-        </p:spPr>
-        <p:txBody>
-          <a:bodyPr/>
-          <a:lstStyle/>
-          <a:p>
-            <a:endParaRPr lang="ru-RU" dirty="0"/>
-          </a:p>
-        </p:txBody>
-      </p:sp>
-      <p:sp>
-        <p:nvSpPr>
-          <p:cNvPr id="3" name="Объект 2">
-            <a:extLst>
-              <a:ext uri="{FF2B5EF4-FFF2-40B4-BE49-F238E27FC236}">
-                <a16:creationId xmlns:a16="http://schemas.microsoft.com/office/drawing/2014/main" id="{67468AA5-78CA-BF36-F58A-24F7705F2C92}"/>
-              </a:ext>
-            </a:extLst>
-          </p:cNvPr>
-          <p:cNvSpPr>
-            <a:spLocks noGrp="1"/>
-          </p:cNvSpPr>
-          <p:nvPr>
-            <p:ph idx="1"/>
-          </p:nvPr>
-        </p:nvSpPr>
-        <p:spPr/>
-        <p:txBody>
-          <a:bodyPr/>
-          <a:lstStyle/>
-          <a:p>
-            <a:endParaRPr lang="ru-RU"/>
-          </a:p>
-        </p:txBody>
-      </p:sp>
-    </p:spTree>
-    <p:extLst>
-      <p:ext uri="{BB962C8B-B14F-4D97-AF65-F5344CB8AC3E}">
-        <p14:creationId xmlns:p14="http://schemas.microsoft.com/office/powerpoint/2010/main" val="2127895072"/>
-      </p:ext>
-    </p:extLst>
-  </p:cSld>
-  <p:clrMapOvr>
-    <a:masterClrMapping/>
-  </p:clrMapOvr>
-</p:sld>
-</file>
-
 <file path=ppt/slides/slide7.xml><?xml version="1.0" encoding="utf-8"?>
 <p:sld xmlns:a="http://schemas.openxmlformats.org/drawingml/2006/main" xmlns:r="http://schemas.openxmlformats.org/officeDocument/2006/relationships" xmlns:p="http://schemas.openxmlformats.org/presentationml/2006/main">
   <p:cSld>
@@ -11954,6 +20238,172 @@
           </p:sp>
         </mc:Fallback>
       </mc:AlternateContent>
+      <p:sp>
+        <p:nvSpPr>
+          <p:cNvPr id="5" name="TextBox 4">
+            <a:extLst>
+              <a:ext uri="{FF2B5EF4-FFF2-40B4-BE49-F238E27FC236}">
+                <a16:creationId xmlns:a16="http://schemas.microsoft.com/office/drawing/2014/main" id="{CDFF455B-0874-8488-85B2-7BA468BB902B}"/>
+              </a:ext>
+            </a:extLst>
+          </p:cNvPr>
+          <p:cNvSpPr txBox="1"/>
+          <p:nvPr/>
+        </p:nvSpPr>
+        <p:spPr>
+          <a:xfrm>
+            <a:off x="104775" y="6427113"/>
+            <a:ext cx="6093912" cy="430887"/>
+          </a:xfrm>
+          <a:prstGeom prst="rect">
+            <a:avLst/>
+          </a:prstGeom>
+          <a:noFill/>
+        </p:spPr>
+        <p:txBody>
+          <a:bodyPr wrap="square">
+            <a:spAutoFit/>
+          </a:bodyPr>
+          <a:lstStyle/>
+          <a:p>
+            <a:r>
+              <a:rPr lang="ru-RU" sz="1050" dirty="0" err="1"/>
+              <a:t>https</a:t>
+            </a:r>
+            <a:r>
+              <a:rPr lang="ru-RU" sz="1050" dirty="0"/>
+              <a:t>://</a:t>
+            </a:r>
+            <a:r>
+              <a:rPr lang="ru-RU" sz="1050" dirty="0" err="1"/>
+              <a:t>www.adb.org</a:t>
+            </a:r>
+            <a:r>
+              <a:rPr lang="ru-RU" sz="1050" dirty="0"/>
+              <a:t>/</a:t>
+            </a:r>
+            <a:r>
+              <a:rPr lang="ru-RU" sz="1050" dirty="0" err="1"/>
+              <a:t>sites</a:t>
+            </a:r>
+            <a:r>
+              <a:rPr lang="ru-RU" sz="1050" dirty="0"/>
+              <a:t>/</a:t>
+            </a:r>
+            <a:r>
+              <a:rPr lang="ru-RU" sz="1050" dirty="0" err="1"/>
+              <a:t>default</a:t>
+            </a:r>
+            <a:r>
+              <a:rPr lang="ru-RU" sz="1050" dirty="0"/>
+              <a:t>/</a:t>
+            </a:r>
+            <a:r>
+              <a:rPr lang="ru-RU" sz="1050" dirty="0" err="1"/>
+              <a:t>files</a:t>
+            </a:r>
+            <a:r>
+              <a:rPr lang="ru-RU" sz="1050" dirty="0"/>
+              <a:t>/</a:t>
+            </a:r>
+            <a:r>
+              <a:rPr lang="ru-RU" sz="1050" dirty="0" err="1"/>
+              <a:t>event</a:t>
+            </a:r>
+            <a:r>
+              <a:rPr lang="ru-RU" sz="1050" dirty="0"/>
+              <a:t>/978811/</a:t>
+            </a:r>
+            <a:r>
+              <a:rPr lang="ru-RU" sz="1050" dirty="0" err="1"/>
+              <a:t>files</a:t>
+            </a:r>
+            <a:r>
+              <a:rPr lang="ru-RU" sz="1050" dirty="0"/>
+              <a:t>/session45-dr-law-siong-hook-time-series-analysis-i-stationarity-and-cointegration-analysis-ii-var.pdf</a:t>
+            </a:r>
+          </a:p>
+        </p:txBody>
+      </p:sp>
+      <p:sp>
+        <p:nvSpPr>
+          <p:cNvPr id="7" name="TextBox 6">
+            <a:extLst>
+              <a:ext uri="{FF2B5EF4-FFF2-40B4-BE49-F238E27FC236}">
+                <a16:creationId xmlns:a16="http://schemas.microsoft.com/office/drawing/2014/main" id="{716DAEEB-BB71-C17F-EAB0-B9CB0742E9E9}"/>
+              </a:ext>
+            </a:extLst>
+          </p:cNvPr>
+          <p:cNvSpPr txBox="1"/>
+          <p:nvPr/>
+        </p:nvSpPr>
+        <p:spPr>
+          <a:xfrm>
+            <a:off x="6904972" y="6511751"/>
+            <a:ext cx="6093912" cy="261610"/>
+          </a:xfrm>
+          <a:prstGeom prst="rect">
+            <a:avLst/>
+          </a:prstGeom>
+          <a:noFill/>
+        </p:spPr>
+        <p:txBody>
+          <a:bodyPr wrap="square">
+            <a:spAutoFit/>
+          </a:bodyPr>
+          <a:lstStyle/>
+          <a:p>
+            <a:r>
+              <a:rPr lang="ru-RU" sz="1100" dirty="0" err="1"/>
+              <a:t>https</a:t>
+            </a:r>
+            <a:r>
+              <a:rPr lang="ru-RU" sz="1100" dirty="0"/>
+              <a:t>://</a:t>
+            </a:r>
+            <a:r>
+              <a:rPr lang="ru-RU" sz="1100" dirty="0" err="1"/>
+              <a:t>www.sciencedirect.com</a:t>
+            </a:r>
+            <a:r>
+              <a:rPr lang="ru-RU" sz="1100" dirty="0"/>
+              <a:t>/</a:t>
+            </a:r>
+            <a:r>
+              <a:rPr lang="ru-RU" sz="1100" dirty="0" err="1"/>
+              <a:t>science</a:t>
+            </a:r>
+            <a:r>
+              <a:rPr lang="ru-RU" sz="1100" dirty="0"/>
+              <a:t>/</a:t>
+            </a:r>
+            <a:r>
+              <a:rPr lang="ru-RU" sz="1100" dirty="0" err="1"/>
+              <a:t>article</a:t>
+            </a:r>
+            <a:r>
+              <a:rPr lang="ru-RU" sz="1100" dirty="0"/>
+              <a:t>/</a:t>
+            </a:r>
+            <a:r>
+              <a:rPr lang="ru-RU" sz="1100" dirty="0" err="1"/>
+              <a:t>abs</a:t>
+            </a:r>
+            <a:r>
+              <a:rPr lang="ru-RU" sz="1100" dirty="0"/>
+              <a:t>/</a:t>
+            </a:r>
+            <a:r>
+              <a:rPr lang="ru-RU" sz="1100" dirty="0" err="1"/>
+              <a:t>pii</a:t>
+            </a:r>
+            <a:r>
+              <a:rPr lang="ru-RU" sz="1100" dirty="0"/>
+              <a:t>/B9780128167977000084</a:t>
+            </a:r>
+          </a:p>
+        </p:txBody>
+      </p:sp>
     </p:spTree>
     <p:extLst>
       <p:ext uri="{BB962C8B-B14F-4D97-AF65-F5344CB8AC3E}">
@@ -12197,7 +20647,7 @@
         </p:blipFill>
         <p:spPr bwMode="auto">
           <a:xfrm>
-            <a:off x="86098" y="1754633"/>
+            <a:off x="-38633" y="1346388"/>
             <a:ext cx="6565806" cy="2387799"/>
           </a:xfrm>
           <a:prstGeom prst="rect">
@@ -12448,7 +20898,7 @@
         </p:blipFill>
         <p:spPr bwMode="auto">
           <a:xfrm>
-            <a:off x="6738002" y="2226556"/>
+            <a:off x="6827531" y="1671466"/>
             <a:ext cx="5061063" cy="1757534"/>
           </a:xfrm>
           <a:prstGeom prst="rect">

--- a/2025/LEC/06-1 многомерные ВР.pptx
+++ b/2025/LEC/06-1 многомерные ВР.pptx
@@ -5,7 +5,7 @@
     <p:sldMasterId id="2147483648" r:id="rId1"/>
   </p:sldMasterIdLst>
   <p:notesMasterIdLst>
-    <p:notesMasterId r:id="rId27"/>
+    <p:notesMasterId r:id="rId28"/>
   </p:notesMasterIdLst>
   <p:sldIdLst>
     <p:sldId id="256" r:id="rId2"/>
@@ -27,12 +27,13 @@
     <p:sldId id="274" r:id="rId18"/>
     <p:sldId id="281" r:id="rId19"/>
     <p:sldId id="280" r:id="rId20"/>
-    <p:sldId id="275" r:id="rId21"/>
-    <p:sldId id="282" r:id="rId22"/>
-    <p:sldId id="283" r:id="rId23"/>
-    <p:sldId id="262" r:id="rId24"/>
-    <p:sldId id="259" r:id="rId25"/>
-    <p:sldId id="263" r:id="rId26"/>
+    <p:sldId id="284" r:id="rId21"/>
+    <p:sldId id="275" r:id="rId22"/>
+    <p:sldId id="282" r:id="rId23"/>
+    <p:sldId id="283" r:id="rId24"/>
+    <p:sldId id="262" r:id="rId25"/>
+    <p:sldId id="259" r:id="rId26"/>
+    <p:sldId id="263" r:id="rId27"/>
   </p:sldIdLst>
   <p:sldSz cx="12192000" cy="6858000"/>
   <p:notesSz cx="6858000" cy="9144000"/>
@@ -221,7 +222,7 @@
           <a:p>
             <a:fld id="{0170C974-C971-49AB-9DB3-26D8F572511A}" type="datetimeFigureOut">
               <a:rPr lang="ru-RU" smtClean="0"/>
-              <a:t>08.08.2025</a:t>
+              <a:t>20.08.2025</a:t>
             </a:fld>
             <a:endParaRPr lang="ru-RU"/>
           </a:p>
@@ -829,7 +830,7 @@
           <a:p>
             <a:fld id="{E5904A68-FE9C-41D3-96AD-A1A68ED6C497}" type="slidenum">
               <a:rPr lang="ru-RU" smtClean="0"/>
-              <a:t>20</a:t>
+              <a:t>21</a:t>
             </a:fld>
             <a:endParaRPr lang="ru-RU"/>
           </a:p>
@@ -937,7 +938,7 @@
           <a:p>
             <a:fld id="{E5904A68-FE9C-41D3-96AD-A1A68ED6C497}" type="slidenum">
               <a:rPr lang="ru-RU" smtClean="0"/>
-              <a:t>21</a:t>
+              <a:t>22</a:t>
             </a:fld>
             <a:endParaRPr lang="ru-RU"/>
           </a:p>
@@ -1830,7 +1831,7 @@
           <a:p>
             <a:fld id="{E36C04D8-B49B-4D86-A6B2-820C9FC8BA05}" type="datetimeFigureOut">
               <a:rPr lang="ru-RU" smtClean="0"/>
-              <a:t>08.08.2025</a:t>
+              <a:t>20.08.2025</a:t>
             </a:fld>
             <a:endParaRPr lang="ru-RU"/>
           </a:p>
@@ -1998,7 +1999,7 @@
           <a:p>
             <a:fld id="{E36C04D8-B49B-4D86-A6B2-820C9FC8BA05}" type="datetimeFigureOut">
               <a:rPr lang="ru-RU" smtClean="0"/>
-              <a:t>08.08.2025</a:t>
+              <a:t>20.08.2025</a:t>
             </a:fld>
             <a:endParaRPr lang="ru-RU"/>
           </a:p>
@@ -2176,7 +2177,7 @@
           <a:p>
             <a:fld id="{E36C04D8-B49B-4D86-A6B2-820C9FC8BA05}" type="datetimeFigureOut">
               <a:rPr lang="ru-RU" smtClean="0"/>
-              <a:t>08.08.2025</a:t>
+              <a:t>20.08.2025</a:t>
             </a:fld>
             <a:endParaRPr lang="ru-RU"/>
           </a:p>
@@ -2344,7 +2345,7 @@
           <a:p>
             <a:fld id="{E36C04D8-B49B-4D86-A6B2-820C9FC8BA05}" type="datetimeFigureOut">
               <a:rPr lang="ru-RU" smtClean="0"/>
-              <a:t>08.08.2025</a:t>
+              <a:t>20.08.2025</a:t>
             </a:fld>
             <a:endParaRPr lang="ru-RU"/>
           </a:p>
@@ -2589,7 +2590,7 @@
           <a:p>
             <a:fld id="{E36C04D8-B49B-4D86-A6B2-820C9FC8BA05}" type="datetimeFigureOut">
               <a:rPr lang="ru-RU" smtClean="0"/>
-              <a:t>08.08.2025</a:t>
+              <a:t>20.08.2025</a:t>
             </a:fld>
             <a:endParaRPr lang="ru-RU"/>
           </a:p>
@@ -2818,7 +2819,7 @@
           <a:p>
             <a:fld id="{E36C04D8-B49B-4D86-A6B2-820C9FC8BA05}" type="datetimeFigureOut">
               <a:rPr lang="ru-RU" smtClean="0"/>
-              <a:t>08.08.2025</a:t>
+              <a:t>20.08.2025</a:t>
             </a:fld>
             <a:endParaRPr lang="ru-RU"/>
           </a:p>
@@ -3182,7 +3183,7 @@
           <a:p>
             <a:fld id="{E36C04D8-B49B-4D86-A6B2-820C9FC8BA05}" type="datetimeFigureOut">
               <a:rPr lang="ru-RU" smtClean="0"/>
-              <a:t>08.08.2025</a:t>
+              <a:t>20.08.2025</a:t>
             </a:fld>
             <a:endParaRPr lang="ru-RU"/>
           </a:p>
@@ -3299,7 +3300,7 @@
           <a:p>
             <a:fld id="{E36C04D8-B49B-4D86-A6B2-820C9FC8BA05}" type="datetimeFigureOut">
               <a:rPr lang="ru-RU" smtClean="0"/>
-              <a:t>08.08.2025</a:t>
+              <a:t>20.08.2025</a:t>
             </a:fld>
             <a:endParaRPr lang="ru-RU"/>
           </a:p>
@@ -3394,7 +3395,7 @@
           <a:p>
             <a:fld id="{E36C04D8-B49B-4D86-A6B2-820C9FC8BA05}" type="datetimeFigureOut">
               <a:rPr lang="ru-RU" smtClean="0"/>
-              <a:t>08.08.2025</a:t>
+              <a:t>20.08.2025</a:t>
             </a:fld>
             <a:endParaRPr lang="ru-RU"/>
           </a:p>
@@ -3669,7 +3670,7 @@
           <a:p>
             <a:fld id="{E36C04D8-B49B-4D86-A6B2-820C9FC8BA05}" type="datetimeFigureOut">
               <a:rPr lang="ru-RU" smtClean="0"/>
-              <a:t>08.08.2025</a:t>
+              <a:t>20.08.2025</a:t>
             </a:fld>
             <a:endParaRPr lang="ru-RU"/>
           </a:p>
@@ -3921,7 +3922,7 @@
           <a:p>
             <a:fld id="{E36C04D8-B49B-4D86-A6B2-820C9FC8BA05}" type="datetimeFigureOut">
               <a:rPr lang="ru-RU" smtClean="0"/>
-              <a:t>08.08.2025</a:t>
+              <a:t>20.08.2025</a:t>
             </a:fld>
             <a:endParaRPr lang="ru-RU"/>
           </a:p>
@@ -4132,7 +4133,7 @@
           <a:p>
             <a:fld id="{E36C04D8-B49B-4D86-A6B2-820C9FC8BA05}" type="datetimeFigureOut">
               <a:rPr lang="ru-RU" smtClean="0"/>
-              <a:t>08.08.2025</a:t>
+              <a:t>20.08.2025</a:t>
             </a:fld>
             <a:endParaRPr lang="ru-RU"/>
           </a:p>
@@ -5044,8 +5045,8 @@
           </a:p>
         </p:txBody>
       </p:sp>
-      <mc:AlternateContent xmlns:mc="http://schemas.openxmlformats.org/markup-compatibility/2006">
-        <mc:Choice xmlns:a14="http://schemas.microsoft.com/office/drawing/2010/main" Requires="a14">
+      <mc:AlternateContent xmlns:mc="http://schemas.openxmlformats.org/markup-compatibility/2006" xmlns:a14="http://schemas.microsoft.com/office/drawing/2010/main">
+        <mc:Choice Requires="a14">
           <p:sp>
             <p:nvSpPr>
               <p:cNvPr id="3" name="Объект 2">
@@ -5543,7 +5544,7 @@
             </p:txBody>
           </p:sp>
         </mc:Choice>
-        <mc:Fallback>
+        <mc:Fallback xmlns="">
           <p:sp>
             <p:nvSpPr>
               <p:cNvPr id="3" name="Объект 2">
@@ -6315,8 +6316,8 @@
           </a:p>
         </p:txBody>
       </p:sp>
-      <mc:AlternateContent xmlns:mc="http://schemas.openxmlformats.org/markup-compatibility/2006">
-        <mc:Choice xmlns:a14="http://schemas.microsoft.com/office/drawing/2010/main" Requires="a14">
+      <mc:AlternateContent xmlns:mc="http://schemas.openxmlformats.org/markup-compatibility/2006" xmlns:a14="http://schemas.microsoft.com/office/drawing/2010/main">
+        <mc:Choice Requires="a14">
           <p:sp>
             <p:nvSpPr>
               <p:cNvPr id="3" name="Объект 2"/>
@@ -7100,7 +7101,7 @@
             </p:txBody>
           </p:sp>
         </mc:Choice>
-        <mc:Fallback>
+        <mc:Fallback xmlns="">
           <p:sp>
             <p:nvSpPr>
               <p:cNvPr id="3" name="Объект 2"/>
@@ -7438,13 +7439,13 @@
           <p:nvPr>
             <p:extLst>
               <p:ext uri="{D42A27DB-BD31-4B8C-83A1-F6EECF244321}">
-                <p14:modId xmlns:p14="http://schemas.microsoft.com/office/powerpoint/2010/main" val="1337670039"/>
+                <p14:modId xmlns:p14="http://schemas.microsoft.com/office/powerpoint/2010/main" val="626297828"/>
               </p:ext>
             </p:extLst>
           </p:nvPr>
         </p:nvGraphicFramePr>
         <p:xfrm>
-          <a:off x="329853" y="3429000"/>
+          <a:off x="400832" y="2685422"/>
           <a:ext cx="11118935" cy="2953980"/>
         </p:xfrm>
         <a:graphic>
@@ -7473,7 +7474,7 @@
                     <a:bodyPr/>
                     <a:lstStyle/>
                     <a:p>
-                      <a:pPr>
+                      <a:pPr algn="ctr">
                         <a:buNone/>
                       </a:pPr>
                       <a:r>
@@ -7539,7 +7540,7 @@
                     <a:bodyPr/>
                     <a:lstStyle/>
                     <a:p>
-                      <a:pPr>
+                      <a:pPr algn="ctr">
                         <a:buNone/>
                       </a:pPr>
                       <a:r>
@@ -7612,7 +7613,7 @@
                     <a:bodyPr/>
                     <a:lstStyle/>
                     <a:p>
-                      <a:pPr>
+                      <a:pPr algn="ctr">
                         <a:buNone/>
                       </a:pPr>
                       <a:r>
@@ -7678,7 +7679,7 @@
                     <a:bodyPr/>
                     <a:lstStyle/>
                     <a:p>
-                      <a:pPr>
+                      <a:pPr algn="ctr">
                         <a:buNone/>
                       </a:pPr>
                       <a:r>
@@ -7749,7 +7750,7 @@
                     <a:bodyPr/>
                     <a:lstStyle/>
                     <a:p>
-                      <a:pPr>
+                      <a:pPr algn="ctr">
                         <a:buNone/>
                       </a:pPr>
                       <a:r>
@@ -7815,7 +7816,7 @@
                     <a:bodyPr/>
                     <a:lstStyle/>
                     <a:p>
-                      <a:pPr>
+                      <a:pPr algn="ctr">
                         <a:buNone/>
                       </a:pPr>
                       <a:r>
@@ -7896,7 +7897,7 @@
                     <a:bodyPr/>
                     <a:lstStyle/>
                     <a:p>
-                      <a:pPr>
+                      <a:pPr algn="ctr">
                         <a:buNone/>
                       </a:pPr>
                       <a:r>
@@ -7972,7 +7973,7 @@
                     <a:bodyPr/>
                     <a:lstStyle/>
                     <a:p>
-                      <a:pPr>
+                      <a:pPr algn="ctr">
                         <a:buNone/>
                       </a:pPr>
                       <a:r>
@@ -8043,7 +8044,7 @@
                     <a:bodyPr/>
                     <a:lstStyle/>
                     <a:p>
-                      <a:pPr>
+                      <a:pPr algn="ctr">
                         <a:buNone/>
                       </a:pPr>
                       <a:r>
@@ -8149,7 +8150,7 @@
                     <a:bodyPr/>
                     <a:lstStyle/>
                     <a:p>
-                      <a:pPr>
+                      <a:pPr algn="ctr">
                         <a:buNone/>
                       </a:pPr>
                       <a:r>
@@ -8220,7 +8221,7 @@
                     <a:bodyPr/>
                     <a:lstStyle/>
                     <a:p>
-                      <a:pPr>
+                      <a:pPr algn="ctr">
                         <a:buNone/>
                       </a:pPr>
                       <a:r>
@@ -8286,7 +8287,7 @@
                     <a:bodyPr/>
                     <a:lstStyle/>
                     <a:p>
-                      <a:pPr>
+                      <a:pPr algn="ctr">
                         <a:buNone/>
                       </a:pPr>
                       <a:r>
@@ -8623,12 +8624,13 @@
           <a:bodyPr/>
           <a:lstStyle/>
           <a:p>
-            <a:r>
-              <a:rPr lang="ru-RU" dirty="0" err="1"/>
+            <a:pPr algn="ctr"/>
+            <a:r>
+              <a:rPr lang="ru-RU" b="1" dirty="0" err="1"/>
               <a:t>Сумматризация</a:t>
             </a:r>
             <a:r>
-              <a:rPr lang="ru-RU" dirty="0"/>
+              <a:rPr lang="ru-RU" b="1" dirty="0"/>
               <a:t> тестов</a:t>
             </a:r>
           </a:p>
@@ -8650,14 +8652,14 @@
             <p:ph idx="1"/>
             <p:extLst>
               <p:ext uri="{D42A27DB-BD31-4B8C-83A1-F6EECF244321}">
-                <p14:modId xmlns:p14="http://schemas.microsoft.com/office/powerpoint/2010/main" val="1813698681"/>
+                <p14:modId xmlns:p14="http://schemas.microsoft.com/office/powerpoint/2010/main" val="1430488392"/>
               </p:ext>
             </p:extLst>
           </p:nvPr>
         </p:nvGraphicFramePr>
         <p:xfrm>
           <a:off x="250521" y="1152396"/>
-          <a:ext cx="11448790" cy="5494020"/>
+          <a:ext cx="11448790" cy="5280660"/>
         </p:xfrm>
         <a:graphic>
           <a:graphicData uri="http://schemas.openxmlformats.org/drawingml/2006/table">
@@ -8701,6 +8703,7 @@
                     <a:bodyPr/>
                     <a:lstStyle/>
                     <a:p>
+                      <a:pPr algn="ctr"/>
                       <a:r>
                         <a:rPr lang="ru-RU" sz="2200" dirty="0"/>
                         <a:t>Тип МВР</a:t>
@@ -8714,6 +8717,7 @@
                     <a:bodyPr/>
                     <a:lstStyle/>
                     <a:p>
+                      <a:pPr algn="ctr"/>
                       <a:r>
                         <a:rPr lang="ru-RU" sz="2200" dirty="0"/>
                         <a:t>Тест на тип</a:t>
@@ -8727,6 +8731,7 @@
                     <a:bodyPr/>
                     <a:lstStyle/>
                     <a:p>
+                      <a:pPr algn="ctr"/>
                       <a:r>
                         <a:rPr lang="ru-RU" sz="2200" dirty="0"/>
                         <a:t>метод</a:t>
@@ -8760,6 +8765,7 @@
                     <a:bodyPr/>
                     <a:lstStyle/>
                     <a:p>
+                      <a:pPr algn="ctr"/>
                       <a:r>
                         <a:rPr lang="ru-RU" sz="2200" dirty="0"/>
                         <a:t>Стационарный ВР</a:t>
@@ -8773,6 +8779,7 @@
                     <a:bodyPr/>
                     <a:lstStyle/>
                     <a:p>
+                      <a:pPr algn="ctr"/>
                       <a:r>
                         <a:rPr lang="ru-RU" sz="2200" dirty="0"/>
                         <a:t>AD</a:t>
@@ -8791,6 +8798,7 @@
                     <a:bodyPr/>
                     <a:lstStyle/>
                     <a:p>
+                      <a:pPr algn="ctr"/>
                       <a:r>
                         <a:rPr lang="en-US" sz="2200" dirty="0"/>
                         <a:t>VAR</a:t>
@@ -8838,6 +8846,7 @@
                     <a:bodyPr/>
                     <a:lstStyle/>
                     <a:p>
+                      <a:pPr algn="ctr"/>
                       <a:r>
                         <a:rPr lang="ru-RU" sz="2200" dirty="0"/>
                         <a:t>корреляции</a:t>
@@ -8864,6 +8873,7 @@
                     <a:bodyPr/>
                     <a:lstStyle/>
                     <a:p>
+                      <a:pPr algn="ctr"/>
                       <a:r>
                         <a:rPr lang="ru-RU" sz="2200" dirty="0"/>
                         <a:t>Cross</a:t>
@@ -8890,6 +8900,7 @@
                     <a:bodyPr/>
                     <a:lstStyle/>
                     <a:p>
+                      <a:pPr algn="ctr"/>
                       <a:r>
                         <a:rPr lang="en-US" sz="2200" dirty="0"/>
                         <a:t>VAR + </a:t>
@@ -8907,24 +8918,25 @@
                     <a:bodyPr/>
                     <a:lstStyle/>
                     <a:p>
-                      <a:br>
-                        <a:rPr lang="ru-RU" dirty="0">
+                      <a:r>
+                        <a:rPr lang="ru-RU" sz="2000" dirty="0" smtClean="0">
                           <a:effectLst/>
                         </a:rPr>
-                      </a:br>
+                        <a:t>Раздельное </a:t>
+                      </a:r>
                       <a:r>
-                        <a:rPr lang="ru-RU" dirty="0">
+                        <a:rPr lang="ru-RU" sz="2000" dirty="0">
                           <a:effectLst/>
                         </a:rPr>
-                        <a:t>Раздельное моделирование, уменьшение размерности (PC</a:t>
+                        <a:t>моделирование, уменьшение размерности (PC</a:t>
                       </a:r>
                       <a:r>
-                        <a:rPr lang="en-US" dirty="0">
+                        <a:rPr lang="en-US" sz="2000" dirty="0">
                           <a:effectLst/>
                         </a:rPr>
                         <a:t>A)</a:t>
                       </a:r>
-                      <a:endParaRPr lang="ru-RU" dirty="0">
+                      <a:endParaRPr lang="ru-RU" sz="2000" dirty="0">
                         <a:effectLst/>
                       </a:endParaRPr>
                     </a:p>
@@ -8943,6 +8955,7 @@
                     <a:bodyPr/>
                     <a:lstStyle/>
                     <a:p>
+                      <a:pPr algn="ctr"/>
                       <a:r>
                         <a:rPr lang="ru-RU" sz="2200" dirty="0"/>
                         <a:t>казуальность</a:t>
@@ -8969,6 +8982,7 @@
                     <a:bodyPr/>
                     <a:lstStyle/>
                     <a:p>
+                      <a:pPr algn="ctr"/>
                       <a:r>
                         <a:rPr lang="en-US" sz="2200" dirty="0"/>
                         <a:t>Granger-test</a:t>
@@ -8983,6 +8997,7 @@
                     <a:bodyPr/>
                     <a:lstStyle/>
                     <a:p>
+                      <a:pPr algn="ctr"/>
                       <a:r>
                         <a:rPr lang="en-US" sz="2200" dirty="0"/>
                         <a:t>SVAR</a:t>
@@ -9001,7 +9016,7 @@
                     <a:lstStyle/>
                     <a:p>
                       <a:r>
-                        <a:rPr lang="ru-RU" sz="2200" dirty="0"/>
+                        <a:rPr lang="ru-RU" sz="2000" dirty="0"/>
                         <a:t>убрать/сделать экзогенными казуальные переменные</a:t>
                       </a:r>
                     </a:p>
@@ -9020,6 +9035,7 @@
                     <a:bodyPr/>
                     <a:lstStyle/>
                     <a:p>
+                      <a:pPr algn="ctr"/>
                       <a:r>
                         <a:rPr lang="en-US" sz="2200" dirty="0" err="1"/>
                         <a:t>Ес</a:t>
@@ -9046,6 +9062,7 @@
                     <a:bodyPr/>
                     <a:lstStyle/>
                     <a:p>
+                      <a:pPr algn="ctr"/>
                       <a:r>
                         <a:rPr lang="en-US" sz="2200" dirty="0"/>
                         <a:t>Johansen test</a:t>
@@ -9076,6 +9093,7 @@
                     <a:bodyPr/>
                     <a:lstStyle/>
                     <a:p>
+                      <a:pPr algn="ctr"/>
                       <a:r>
                         <a:rPr lang="ru-RU" sz="2200" dirty="0"/>
                         <a:t>VEC</a:t>
@@ -9095,7 +9113,7 @@
                     <a:lstStyle/>
                     <a:p>
                       <a:r>
-                        <a:rPr lang="ru-RU" sz="1800" b="0" i="0" kern="1200" dirty="0" err="1">
+                        <a:rPr lang="ru-RU" sz="2000" b="0" i="0" kern="1200" dirty="0" err="1">
                           <a:solidFill>
                             <a:schemeClr val="dk1"/>
                           </a:solidFill>
@@ -9107,7 +9125,7 @@
                         <a:t>Слоабая</a:t>
                       </a:r>
                       <a:r>
-                        <a:rPr lang="ru-RU" sz="1800" b="0" i="0" kern="1200" dirty="0">
+                        <a:rPr lang="ru-RU" sz="2000" b="0" i="0" kern="1200" dirty="0">
                           <a:solidFill>
                             <a:schemeClr val="dk1"/>
                           </a:solidFill>
@@ -9119,7 +9137,7 @@
                         <a:t> </a:t>
                       </a:r>
                       <a:r>
-                        <a:rPr lang="ru-RU" sz="1800" b="0" i="0" kern="1200" dirty="0" err="1">
+                        <a:rPr lang="ru-RU" sz="2000" b="0" i="0" kern="1200" dirty="0" err="1">
                           <a:solidFill>
                             <a:schemeClr val="dk1"/>
                           </a:solidFill>
@@ -9131,7 +9149,7 @@
                         <a:t>коинтеграция</a:t>
                       </a:r>
                       <a:r>
-                        <a:rPr lang="ru-RU" sz="1800" b="0" i="0" kern="1200" dirty="0">
+                        <a:rPr lang="ru-RU" sz="2000" b="0" i="0" kern="1200" dirty="0">
                           <a:solidFill>
                             <a:schemeClr val="dk1"/>
                           </a:solidFill>
@@ -9143,7 +9161,7 @@
                         <a:t> → обычный </a:t>
                       </a:r>
                       <a:r>
-                        <a:rPr lang="en" sz="1800" b="0" i="0" kern="1200" dirty="0">
+                        <a:rPr lang="en" sz="2000" b="0" i="0" kern="1200" dirty="0">
                           <a:solidFill>
                             <a:schemeClr val="dk1"/>
                           </a:solidFill>
@@ -9155,7 +9173,7 @@
                         <a:t>VAR </a:t>
                       </a:r>
                       <a:r>
-                        <a:rPr lang="ru-RU" sz="1800" b="0" i="0" kern="1200" dirty="0">
+                        <a:rPr lang="ru-RU" sz="2000" b="0" i="0" kern="1200" dirty="0">
                           <a:solidFill>
                             <a:schemeClr val="dk1"/>
                           </a:solidFill>
@@ -9166,7 +9184,7 @@
                         </a:rPr>
                         <a:t>в первых разностях.</a:t>
                       </a:r>
-                      <a:endParaRPr lang="ru-RU" sz="2200" dirty="0"/>
+                      <a:endParaRPr lang="ru-RU" sz="2000" dirty="0"/>
                     </a:p>
                   </a:txBody>
                   <a:tcPr/>
@@ -9183,6 +9201,7 @@
                     <a:bodyPr/>
                     <a:lstStyle/>
                     <a:p>
+                      <a:pPr algn="ctr"/>
                       <a:r>
                         <a:rPr lang="ru-RU" sz="2200" dirty="0"/>
                         <a:t>Глобальный объясняющий фактор</a:t>
@@ -9196,6 +9215,7 @@
                     <a:bodyPr/>
                     <a:lstStyle/>
                     <a:p>
+                      <a:pPr algn="ctr"/>
                       <a:r>
                         <a:rPr lang="ru-RU" sz="2200" dirty="0"/>
                         <a:t>Проверка первых компонент </a:t>
@@ -9214,6 +9234,7 @@
                     <a:bodyPr/>
                     <a:lstStyle/>
                     <a:p>
+                      <a:pPr algn="ctr"/>
                       <a:r>
                         <a:rPr lang="en-US" sz="2200" dirty="0"/>
                         <a:t>VARX (</a:t>
@@ -9679,7 +9700,7 @@
           <p:nvPr/>
         </p:nvPicPr>
         <p:blipFill>
-          <a:blip r:embed="rId3">
+          <a:blip r:embed="rId3" cstate="print">
             <a:extLst>
               <a:ext uri="{28A0092B-C50C-407E-A947-70E740481C1C}">
                 <a14:useLocalDpi xmlns:a14="http://schemas.microsoft.com/office/drawing/2010/main" val="0"/>
@@ -9726,7 +9747,7 @@
           <p:nvPr/>
         </p:nvPicPr>
         <p:blipFill rotWithShape="1">
-          <a:blip r:embed="rId4">
+          <a:blip r:embed="rId4" cstate="print">
             <a:extLst>
               <a:ext uri="{28A0092B-C50C-407E-A947-70E740481C1C}">
                 <a14:useLocalDpi xmlns:a14="http://schemas.microsoft.com/office/drawing/2010/main" val="0"/>
@@ -9773,7 +9794,7 @@
           <p:nvPr/>
         </p:nvPicPr>
         <p:blipFill rotWithShape="1">
-          <a:blip r:embed="rId4">
+          <a:blip r:embed="rId5" cstate="print">
             <a:extLst>
               <a:ext uri="{28A0092B-C50C-407E-A947-70E740481C1C}">
                 <a14:useLocalDpi xmlns:a14="http://schemas.microsoft.com/office/drawing/2010/main" val="0"/>
@@ -10120,7 +10141,7 @@
           <p:nvPr/>
         </p:nvPicPr>
         <p:blipFill>
-          <a:blip r:embed="rId2">
+          <a:blip r:embed="rId2" cstate="print">
             <a:extLst>
               <a:ext uri="{28A0092B-C50C-407E-A947-70E740481C1C}">
                 <a14:useLocalDpi xmlns:a14="http://schemas.microsoft.com/office/drawing/2010/main" val="0"/>
@@ -10841,6 +10862,142 @@
 </file>
 
 <file path=ppt/slides/slide20.xml><?xml version="1.0" encoding="utf-8"?>
+<p:sld xmlns:a="http://schemas.openxmlformats.org/drawingml/2006/main" xmlns:r="http://schemas.openxmlformats.org/officeDocument/2006/relationships" xmlns:p="http://schemas.openxmlformats.org/presentationml/2006/main">
+  <p:cSld>
+    <p:spTree>
+      <p:nvGrpSpPr>
+        <p:cNvPr id="1" name=""/>
+        <p:cNvGrpSpPr/>
+        <p:nvPr/>
+      </p:nvGrpSpPr>
+      <p:grpSpPr>
+        <a:xfrm>
+          <a:off x="0" y="0"/>
+          <a:ext cx="0" cy="0"/>
+          <a:chOff x="0" y="0"/>
+          <a:chExt cx="0" cy="0"/>
+        </a:xfrm>
+      </p:grpSpPr>
+      <p:sp>
+        <p:nvSpPr>
+          <p:cNvPr id="2" name="Заголовок 1"/>
+          <p:cNvSpPr>
+            <a:spLocks noGrp="1"/>
+          </p:cNvSpPr>
+          <p:nvPr>
+            <p:ph type="title"/>
+          </p:nvPr>
+        </p:nvSpPr>
+        <p:spPr>
+          <a:xfrm>
+            <a:off x="311499" y="365126"/>
+            <a:ext cx="11042301" cy="679904"/>
+          </a:xfrm>
+        </p:spPr>
+        <p:txBody>
+          <a:bodyPr>
+            <a:normAutofit fontScale="90000"/>
+          </a:bodyPr>
+          <a:lstStyle/>
+          <a:p>
+            <a:pPr algn="ctr"/>
+            <a:r>
+              <a:rPr lang="ru-RU" dirty="0" smtClean="0"/>
+              <a:t>Вопросы для самоконтроля</a:t>
+            </a:r>
+            <a:endParaRPr lang="ru-RU" dirty="0"/>
+          </a:p>
+        </p:txBody>
+      </p:sp>
+      <p:sp>
+        <p:nvSpPr>
+          <p:cNvPr id="3" name="Объект 2"/>
+          <p:cNvSpPr>
+            <a:spLocks noGrp="1"/>
+          </p:cNvSpPr>
+          <p:nvPr>
+            <p:ph idx="1"/>
+          </p:nvPr>
+        </p:nvSpPr>
+        <p:spPr>
+          <a:xfrm>
+            <a:off x="311498" y="1045030"/>
+            <a:ext cx="11465169" cy="5406012"/>
+          </a:xfrm>
+        </p:spPr>
+        <p:txBody>
+          <a:bodyPr/>
+          <a:lstStyle/>
+          <a:p>
+            <a:pPr lvl="0"/>
+            <a:r>
+              <a:rPr lang="ru-RU" dirty="0"/>
+              <a:t>Объясните особенности анализ многомерных ВР. В каких случаях такой подход будет предпочтительней, приведите примеры. В каких случаях предпочтительно использовать одномерные ВР? </a:t>
+            </a:r>
+          </a:p>
+          <a:p>
+            <a:r>
+              <a:rPr lang="ru-RU" dirty="0" smtClean="0"/>
+              <a:t>Объясните основные типы связей во ВР. Приведите примеры задач. </a:t>
+            </a:r>
+            <a:br>
+              <a:rPr lang="ru-RU" dirty="0" smtClean="0"/>
+            </a:br>
+            <a:r>
+              <a:rPr lang="ru-RU" dirty="0" smtClean="0"/>
+              <a:t>Как обрабатывать эти типы связей, и как </a:t>
+            </a:r>
+            <a:r>
+              <a:rPr lang="ru-RU" dirty="0" err="1" smtClean="0"/>
+              <a:t>неучет</a:t>
+            </a:r>
+            <a:r>
+              <a:rPr lang="ru-RU" dirty="0" smtClean="0"/>
+              <a:t> их скажется на надежности работы системы анализа ВР.</a:t>
+            </a:r>
+          </a:p>
+          <a:p>
+            <a:r>
+              <a:rPr lang="ru-RU" dirty="0" smtClean="0"/>
+              <a:t>Объясните какие задачи МВР требуют использования методом машинного обучения. Как реализовать соответствующий </a:t>
+            </a:r>
+            <a:r>
+              <a:rPr lang="ru-RU" dirty="0" err="1" smtClean="0"/>
+              <a:t>пайплайн</a:t>
+            </a:r>
+            <a:r>
+              <a:rPr lang="ru-RU" dirty="0" smtClean="0"/>
+              <a:t>. Почему не всегда достаточно статистических методов. </a:t>
+            </a:r>
+          </a:p>
+          <a:p>
+            <a:r>
+              <a:rPr lang="ru-RU" dirty="0" smtClean="0"/>
+              <a:t>Проанализируйте особенности МВР с точки зрения мониторинга работы моделей. Приведите примеры задач. </a:t>
+            </a:r>
+          </a:p>
+          <a:p>
+            <a:endParaRPr lang="ru-RU" dirty="0" smtClean="0"/>
+          </a:p>
+          <a:p>
+            <a:endParaRPr lang="ru-RU" dirty="0"/>
+          </a:p>
+        </p:txBody>
+      </p:sp>
+    </p:spTree>
+    <p:extLst>
+      <p:ext uri="{BB962C8B-B14F-4D97-AF65-F5344CB8AC3E}">
+        <p14:creationId xmlns:p14="http://schemas.microsoft.com/office/powerpoint/2010/main" val="3292593348"/>
+      </p:ext>
+    </p:extLst>
+  </p:cSld>
+  <p:clrMapOvr>
+    <a:masterClrMapping/>
+  </p:clrMapOvr>
+</p:sld>
+</file>
+
+<file path=ppt/slides/slide21.xml><?xml version="1.0" encoding="utf-8"?>
 <p:sld xmlns:a="http://schemas.openxmlformats.org/drawingml/2006/main" xmlns:r="http://schemas.openxmlformats.org/officeDocument/2006/relationships" xmlns:p="http://schemas.openxmlformats.org/presentationml/2006/main" show="0">
   <p:cSld>
     <p:spTree>
@@ -10975,6 +11132,10 @@
             <a:endParaRPr lang="ru-RU" sz="1800" dirty="0"/>
           </a:p>
           <a:p>
+            <a:r>
+              <a:rPr lang="ru-RU" dirty="0"/>
+              <a:t/>
+            </a:r>
             <a:br>
               <a:rPr lang="ru-RU" dirty="0"/>
             </a:br>
@@ -12289,10 +12450,18 @@
   <p:clrMapOvr>
     <a:masterClrMapping/>
   </p:clrMapOvr>
+  <mc:AlternateContent xmlns:mc="http://schemas.openxmlformats.org/markup-compatibility/2006">
+    <mc:Choice xmlns:p14="http://schemas.microsoft.com/office/powerpoint/2010/main" Requires="p14">
+      <p:transition spd="slow" p14:dur="2000"/>
+    </mc:Choice>
+    <mc:Fallback>
+      <p:transition spd="slow"/>
+    </mc:Fallback>
+  </mc:AlternateContent>
 </p:sld>
 </file>
 
-<file path=ppt/slides/slide21.xml><?xml version="1.0" encoding="utf-8"?>
+<file path=ppt/slides/slide22.xml><?xml version="1.0" encoding="utf-8"?>
 <p:sld xmlns:a="http://schemas.openxmlformats.org/drawingml/2006/main" xmlns:r="http://schemas.openxmlformats.org/officeDocument/2006/relationships" xmlns:p="http://schemas.openxmlformats.org/presentationml/2006/main" show="0">
   <p:cSld>
     <p:spTree>
@@ -12419,6 +12588,10 @@
             <a:endParaRPr lang="ru-RU" sz="1800" dirty="0"/>
           </a:p>
           <a:p>
+            <a:r>
+              <a:rPr lang="ru-RU" dirty="0"/>
+              <a:t/>
+            </a:r>
             <a:br>
               <a:rPr lang="ru-RU" dirty="0"/>
             </a:br>
@@ -12436,10 +12609,18 @@
   <p:clrMapOvr>
     <a:masterClrMapping/>
   </p:clrMapOvr>
+  <mc:AlternateContent xmlns:mc="http://schemas.openxmlformats.org/markup-compatibility/2006">
+    <mc:Choice xmlns:p14="http://schemas.microsoft.com/office/powerpoint/2010/main" Requires="p14">
+      <p:transition spd="slow" p14:dur="2000"/>
+    </mc:Choice>
+    <mc:Fallback>
+      <p:transition spd="slow"/>
+    </mc:Fallback>
+  </mc:AlternateContent>
 </p:sld>
 </file>
 
-<file path=ppt/slides/slide22.xml><?xml version="1.0" encoding="utf-8"?>
+<file path=ppt/slides/slide23.xml><?xml version="1.0" encoding="utf-8"?>
 <p:sld xmlns:a="http://schemas.openxmlformats.org/drawingml/2006/main" xmlns:r="http://schemas.openxmlformats.org/officeDocument/2006/relationships" xmlns:p="http://schemas.openxmlformats.org/presentationml/2006/main" show="0">
   <p:cSld>
     <p:spTree>
@@ -15136,10 +15317,18 @@
   <p:clrMapOvr>
     <a:masterClrMapping/>
   </p:clrMapOvr>
+  <mc:AlternateContent xmlns:mc="http://schemas.openxmlformats.org/markup-compatibility/2006">
+    <mc:Choice xmlns:p14="http://schemas.microsoft.com/office/powerpoint/2010/main" Requires="p14">
+      <p:transition spd="slow" p14:dur="2000"/>
+    </mc:Choice>
+    <mc:Fallback>
+      <p:transition spd="slow"/>
+    </mc:Fallback>
+  </mc:AlternateContent>
 </p:sld>
 </file>
 
-<file path=ppt/slides/slide23.xml><?xml version="1.0" encoding="utf-8"?>
+<file path=ppt/slides/slide24.xml><?xml version="1.0" encoding="utf-8"?>
 <p:sld xmlns:a="http://schemas.openxmlformats.org/drawingml/2006/main" xmlns:r="http://schemas.openxmlformats.org/officeDocument/2006/relationships" xmlns:p="http://schemas.openxmlformats.org/presentationml/2006/main" show="0">
   <p:cSld>
     <p:spTree>
@@ -16148,10 +16337,18 @@
   <p:clrMapOvr>
     <a:masterClrMapping/>
   </p:clrMapOvr>
+  <mc:AlternateContent xmlns:mc="http://schemas.openxmlformats.org/markup-compatibility/2006">
+    <mc:Choice xmlns:p14="http://schemas.microsoft.com/office/powerpoint/2010/main" Requires="p14">
+      <p:transition spd="slow" p14:dur="2000"/>
+    </mc:Choice>
+    <mc:Fallback>
+      <p:transition spd="slow"/>
+    </mc:Fallback>
+  </mc:AlternateContent>
 </p:sld>
 </file>
 
-<file path=ppt/slides/slide24.xml><?xml version="1.0" encoding="utf-8"?>
+<file path=ppt/slides/slide25.xml><?xml version="1.0" encoding="utf-8"?>
 <p:sld xmlns:a="http://schemas.openxmlformats.org/drawingml/2006/main" xmlns:r="http://schemas.openxmlformats.org/officeDocument/2006/relationships" xmlns:p="http://schemas.openxmlformats.org/presentationml/2006/main" show="0">
   <p:cSld>
     <p:spTree>
@@ -16289,10 +16486,18 @@
   <p:clrMapOvr>
     <a:masterClrMapping/>
   </p:clrMapOvr>
+  <mc:AlternateContent xmlns:mc="http://schemas.openxmlformats.org/markup-compatibility/2006">
+    <mc:Choice xmlns:p14="http://schemas.microsoft.com/office/powerpoint/2010/main" Requires="p14">
+      <p:transition spd="slow" p14:dur="2000"/>
+    </mc:Choice>
+    <mc:Fallback>
+      <p:transition spd="slow"/>
+    </mc:Fallback>
+  </mc:AlternateContent>
 </p:sld>
 </file>
 
-<file path=ppt/slides/slide25.xml><?xml version="1.0" encoding="utf-8"?>
+<file path=ppt/slides/slide26.xml><?xml version="1.0" encoding="utf-8"?>
 <p:sld xmlns:a="http://schemas.openxmlformats.org/drawingml/2006/main" xmlns:r="http://schemas.openxmlformats.org/officeDocument/2006/relationships" xmlns:p="http://schemas.openxmlformats.org/presentationml/2006/main" show="0">
   <p:cSld>
     <p:spTree>
@@ -16399,6 +16604,14 @@
   <p:clrMapOvr>
     <a:masterClrMapping/>
   </p:clrMapOvr>
+  <mc:AlternateContent xmlns:mc="http://schemas.openxmlformats.org/markup-compatibility/2006">
+    <mc:Choice xmlns:p14="http://schemas.microsoft.com/office/powerpoint/2010/main" Requires="p14">
+      <p:transition spd="slow" p14:dur="2000"/>
+    </mc:Choice>
+    <mc:Fallback>
+      <p:transition spd="slow"/>
+    </mc:Fallback>
+  </mc:AlternateContent>
 </p:sld>
 </file>
 
@@ -16525,6 +16738,7 @@
           </a:bodyPr>
           <a:lstStyle/>
           <a:p>
+            <a:pPr algn="ctr"/>
             <a:r>
               <a:rPr lang="ru-RU" dirty="0"/>
               <a:t>Определение многомерных ВР</a:t>
@@ -16541,14 +16755,14 @@
           <p:nvPr>
             <p:extLst>
               <p:ext uri="{D42A27DB-BD31-4B8C-83A1-F6EECF244321}">
-                <p14:modId xmlns:p14="http://schemas.microsoft.com/office/powerpoint/2010/main" val="788697473"/>
+                <p14:modId xmlns:p14="http://schemas.microsoft.com/office/powerpoint/2010/main" val="1931072586"/>
               </p:ext>
             </p:extLst>
           </p:nvPr>
         </p:nvGraphicFramePr>
         <p:xfrm>
           <a:off x="142875" y="987425"/>
-          <a:ext cx="11553825" cy="3105150"/>
+          <a:ext cx="11553825" cy="3409950"/>
         </p:xfrm>
         <a:graphic>
           <a:graphicData uri="http://schemas.openxmlformats.org/drawingml/2006/table">
@@ -16557,14 +16771,14 @@
                 <a:tableStyleId>{5940675A-B579-460E-94D1-54222C63F5DA}</a:tableStyleId>
               </a:tblPr>
               <a:tblGrid>
-                <a:gridCol w="5772151">
+                <a:gridCol w="6609617">
                   <a:extLst>
                     <a:ext uri="{9D8B030D-6E8A-4147-A177-3AD203B41FA5}">
                       <a16:colId xmlns:a16="http://schemas.microsoft.com/office/drawing/2014/main" val="1609488883"/>
                     </a:ext>
                   </a:extLst>
                 </a:gridCol>
-                <a:gridCol w="5781674">
+                <a:gridCol w="4944208">
                   <a:extLst>
                     <a:ext uri="{9D8B030D-6E8A-4147-A177-3AD203B41FA5}">
                       <a16:colId xmlns:a16="http://schemas.microsoft.com/office/drawing/2014/main" val="499434099"/>
@@ -16572,7 +16786,7 @@
                   </a:extLst>
                 </a:gridCol>
               </a:tblGrid>
-              <a:tr h="193665">
+              <a:tr h="156006">
                 <a:tc>
                   <a:txBody>
                     <a:bodyPr/>
@@ -16580,12 +16794,12 @@
                     <a:p>
                       <a:pPr algn="ctr" fontAlgn="b"/>
                       <a:r>
-                        <a:rPr lang="ru-RU" sz="2000" u="none" strike="noStrike" dirty="0">
+                        <a:rPr lang="ru-RU" sz="2200" b="1" u="none" strike="noStrike" dirty="0">
                           <a:effectLst/>
                         </a:rPr>
                         <a:t>Проблема</a:t>
                       </a:r>
-                      <a:endParaRPr lang="ru-RU" sz="2000" b="0" i="0" u="none" strike="noStrike" dirty="0">
+                      <a:endParaRPr lang="ru-RU" sz="2200" b="1" i="0" u="none" strike="noStrike" dirty="0">
                         <a:solidFill>
                           <a:srgbClr val="000000"/>
                         </a:solidFill>
@@ -16603,12 +16817,12 @@
                     <a:p>
                       <a:pPr algn="ctr" fontAlgn="b"/>
                       <a:r>
-                        <a:rPr lang="ru-RU" sz="2000" u="none" strike="noStrike">
+                        <a:rPr lang="ru-RU" sz="2200" b="1" u="none" strike="noStrike" dirty="0">
                           <a:effectLst/>
                         </a:rPr>
                         <a:t>Решение с помощью МВР</a:t>
                       </a:r>
-                      <a:endParaRPr lang="ru-RU" sz="2000" b="0" i="0" u="none" strike="noStrike">
+                      <a:endParaRPr lang="ru-RU" sz="2200" b="1" i="0" u="none" strike="noStrike" dirty="0">
                         <a:solidFill>
                           <a:srgbClr val="000000"/>
                         </a:solidFill>
@@ -16625,7 +16839,7 @@
                   </a:ext>
                 </a:extLst>
               </a:tr>
-              <a:tr h="307213">
+              <a:tr h="307702">
                 <a:tc>
                   <a:txBody>
                     <a:bodyPr/>
@@ -16633,12 +16847,12 @@
                     <a:p>
                       <a:pPr algn="ctr" fontAlgn="b"/>
                       <a:r>
-                        <a:rPr lang="ru-RU" sz="2000" u="none" strike="noStrike" dirty="0">
+                        <a:rPr lang="ru-RU" sz="2200" u="none" strike="noStrike" dirty="0">
                           <a:effectLst/>
                         </a:rPr>
                         <a:t>Одномерный ряд не улавливает влияние других связанных факторов</a:t>
                       </a:r>
-                      <a:endParaRPr lang="ru-RU" sz="2000" b="0" i="0" u="none" strike="noStrike" dirty="0">
+                      <a:endParaRPr lang="ru-RU" sz="2200" b="0" i="0" u="none" strike="noStrike" dirty="0">
                         <a:solidFill>
                           <a:srgbClr val="000000"/>
                         </a:solidFill>
@@ -16656,18 +16870,18 @@
                     <a:p>
                       <a:pPr algn="ctr" fontAlgn="b"/>
                       <a:r>
-                        <a:rPr lang="ru-RU" sz="2000" u="none" strike="noStrike" dirty="0">
+                        <a:rPr lang="ru-RU" sz="2200" u="none" strike="noStrike" dirty="0">
                           <a:effectLst/>
                         </a:rPr>
                         <a:t>Учет взаимного</a:t>
                       </a:r>
                       <a:r>
-                        <a:rPr lang="ru-RU" sz="2000" u="none" strike="noStrike" baseline="0" dirty="0">
+                        <a:rPr lang="ru-RU" sz="2200" u="none" strike="noStrike" baseline="0" dirty="0">
                           <a:effectLst/>
                         </a:rPr>
                         <a:t> влияния ВР</a:t>
                       </a:r>
-                      <a:endParaRPr lang="ru-RU" sz="2000" b="0" i="0" u="none" strike="noStrike" dirty="0">
+                      <a:endParaRPr lang="ru-RU" sz="2200" b="0" i="0" u="none" strike="noStrike" dirty="0">
                         <a:solidFill>
                           <a:srgbClr val="000000"/>
                         </a:solidFill>
@@ -16684,7 +16898,7 @@
                   </a:ext>
                 </a:extLst>
               </a:tr>
-              <a:tr h="155581">
+              <a:tr h="307702">
                 <a:tc>
                   <a:txBody>
                     <a:bodyPr/>
@@ -16692,7 +16906,7 @@
                     <a:p>
                       <a:pPr algn="ctr" fontAlgn="b"/>
                       <a:r>
-                        <a:rPr lang="ru-RU" sz="2000" b="0" i="0" u="none" strike="noStrike" dirty="0">
+                        <a:rPr lang="ru-RU" sz="2200" b="0" i="0" u="none" strike="noStrike" dirty="0">
                           <a:solidFill>
                             <a:srgbClr val="000000"/>
                           </a:solidFill>
@@ -16712,7 +16926,7 @@
                     <a:p>
                       <a:pPr algn="ctr" fontAlgn="b"/>
                       <a:r>
-                        <a:rPr lang="ru-RU" sz="2000" b="0" i="0" u="none" strike="noStrike" dirty="0">
+                        <a:rPr lang="ru-RU" sz="2200" b="0" i="0" u="none" strike="noStrike" dirty="0">
                           <a:solidFill>
                             <a:srgbClr val="000000"/>
                           </a:solidFill>
@@ -16731,7 +16945,7 @@
                   </a:ext>
                 </a:extLst>
               </a:tr>
-              <a:tr h="381462">
+              <a:tr h="307702">
                 <a:tc>
                   <a:txBody>
                     <a:bodyPr/>
@@ -16739,18 +16953,18 @@
                     <a:p>
                       <a:pPr algn="ctr" fontAlgn="b"/>
                       <a:r>
-                        <a:rPr lang="ru-RU" sz="2000" u="none" strike="noStrike" dirty="0">
+                        <a:rPr lang="ru-RU" sz="2200" u="none" strike="noStrike" dirty="0">
                           <a:effectLst/>
                         </a:rPr>
                         <a:t>Нет оценки причинно-следственных связей между</a:t>
                       </a:r>
                       <a:r>
-                        <a:rPr lang="ru-RU" sz="2000" u="none" strike="noStrike" baseline="0" dirty="0">
+                        <a:rPr lang="ru-RU" sz="2200" u="none" strike="noStrike" baseline="0" dirty="0">
                           <a:effectLst/>
                         </a:rPr>
                         <a:t> всеми связанным переменными</a:t>
                       </a:r>
-                      <a:endParaRPr lang="ru-RU" sz="2000" b="0" i="0" u="none" strike="noStrike" dirty="0">
+                      <a:endParaRPr lang="ru-RU" sz="2200" b="0" i="0" u="none" strike="noStrike" dirty="0">
                         <a:solidFill>
                           <a:srgbClr val="000000"/>
                         </a:solidFill>
@@ -16768,24 +16982,24 @@
                     <a:p>
                       <a:pPr algn="ctr" fontAlgn="b"/>
                       <a:r>
-                        <a:rPr lang="ru-RU" sz="2000" u="none" strike="noStrike" dirty="0">
+                        <a:rPr lang="ru-RU" sz="2200" u="none" strike="noStrike" dirty="0">
                           <a:effectLst/>
                         </a:rPr>
                         <a:t>Используем </a:t>
                       </a:r>
                       <a:r>
-                        <a:rPr lang="en-US" sz="2000" u="none" strike="noStrike" dirty="0">
+                        <a:rPr lang="en-US" sz="2200" u="none" strike="noStrike" dirty="0">
                           <a:effectLst/>
                         </a:rPr>
                         <a:t>Granger causality</a:t>
                       </a:r>
                       <a:r>
-                        <a:rPr lang="ru-RU" sz="2000" u="none" strike="noStrike" dirty="0">
+                        <a:rPr lang="ru-RU" sz="2200" u="none" strike="noStrike" dirty="0">
                           <a:effectLst/>
                         </a:rPr>
                         <a:t> </a:t>
                       </a:r>
-                      <a:endParaRPr lang="en-US" sz="2000" b="0" i="0" u="none" strike="noStrike" dirty="0">
+                      <a:endParaRPr lang="en-US" sz="2200" b="0" i="0" u="none" strike="noStrike" dirty="0">
                         <a:solidFill>
                           <a:srgbClr val="000000"/>
                         </a:solidFill>
@@ -16802,7 +17016,7 @@
                   </a:ext>
                 </a:extLst>
               </a:tr>
-              <a:tr h="381462">
+              <a:tr h="307702">
                 <a:tc>
                   <a:txBody>
                     <a:bodyPr/>
@@ -16810,7 +17024,7 @@
                     <a:p>
                       <a:pPr algn="ctr" fontAlgn="b"/>
                       <a:r>
-                        <a:rPr lang="ru-RU" sz="2000" b="0" i="0" u="none" strike="noStrike" dirty="0">
+                        <a:rPr lang="ru-RU" sz="2200" b="0" i="0" u="none" strike="noStrike" dirty="0">
                           <a:solidFill>
                             <a:srgbClr val="000000"/>
                           </a:solidFill>
@@ -16846,12 +17060,12 @@
                         <a:defRPr/>
                       </a:pPr>
                       <a:r>
-                        <a:rPr lang="ru-RU" sz="2000" u="none" strike="noStrike" dirty="0">
+                        <a:rPr lang="ru-RU" sz="2200" u="none" strike="noStrike" dirty="0">
                           <a:effectLst/>
                         </a:rPr>
                         <a:t>МВР учитывает реакцию всей системы</a:t>
                       </a:r>
-                      <a:endParaRPr lang="ru-RU" sz="2000" b="0" i="0" u="none" strike="noStrike" dirty="0">
+                      <a:endParaRPr lang="ru-RU" sz="2200" b="0" i="0" u="none" strike="noStrike" dirty="0">
                         <a:solidFill>
                           <a:srgbClr val="000000"/>
                         </a:solidFill>
@@ -16861,7 +17075,7 @@
                     </a:p>
                     <a:p>
                       <a:pPr algn="ctr" fontAlgn="b"/>
-                      <a:endParaRPr lang="en-US" sz="2000" b="0" i="0" u="none" strike="noStrike" dirty="0">
+                      <a:endParaRPr lang="en-US" sz="2200" b="0" i="0" u="none" strike="noStrike" dirty="0">
                         <a:solidFill>
                           <a:srgbClr val="000000"/>
                         </a:solidFill>
@@ -16878,7 +17092,7 @@
                   </a:ext>
                 </a:extLst>
               </a:tr>
-              <a:tr h="381462">
+              <a:tr h="459398">
                 <a:tc>
                   <a:txBody>
                     <a:bodyPr/>
@@ -16886,18 +17100,18 @@
                     <a:p>
                       <a:pPr algn="ctr" fontAlgn="b"/>
                       <a:r>
-                        <a:rPr lang="ru-RU" sz="2000" u="none" strike="noStrike" dirty="0">
+                        <a:rPr lang="ru-RU" sz="2200" u="none" strike="noStrike" dirty="0">
                           <a:effectLst/>
                         </a:rPr>
                         <a:t>Много похожих рядов (1000 датчиков температуры в техпроцессе) требуют</a:t>
                       </a:r>
                       <a:r>
-                        <a:rPr lang="ru-RU" sz="2000" u="none" strike="noStrike" baseline="0" dirty="0">
+                        <a:rPr lang="ru-RU" sz="2200" u="none" strike="noStrike" baseline="0" dirty="0">
                           <a:effectLst/>
                         </a:rPr>
                         <a:t> настройки разных моделей</a:t>
                       </a:r>
-                      <a:endParaRPr lang="ru-RU" sz="2000" b="0" i="0" u="none" strike="noStrike" dirty="0">
+                      <a:endParaRPr lang="ru-RU" sz="2200" b="0" i="0" u="none" strike="noStrike" dirty="0">
                         <a:solidFill>
                           <a:srgbClr val="000000"/>
                         </a:solidFill>
@@ -16915,12 +17129,12 @@
                     <a:p>
                       <a:pPr algn="ctr" fontAlgn="b"/>
                       <a:r>
-                        <a:rPr lang="ru-RU" sz="2000" u="none" strike="noStrike" dirty="0">
+                        <a:rPr lang="ru-RU" sz="2200" u="none" strike="noStrike" dirty="0">
                           <a:effectLst/>
                         </a:rPr>
                         <a:t>Глобальные модели + динамические факторы</a:t>
                       </a:r>
-                      <a:endParaRPr lang="ru-RU" sz="2000" b="0" i="0" u="none" strike="noStrike" dirty="0">
+                      <a:endParaRPr lang="ru-RU" sz="2200" b="0" i="0" u="none" strike="noStrike" dirty="0">
                         <a:solidFill>
                           <a:srgbClr val="000000"/>
                         </a:solidFill>
@@ -16953,7 +17167,7 @@
         </p:nvSpPr>
         <p:spPr>
           <a:xfrm>
-            <a:off x="352425" y="4267199"/>
+            <a:off x="352425" y="4479924"/>
             <a:ext cx="11344275" cy="2295526"/>
           </a:xfrm>
         </p:spPr>
@@ -17046,6 +17260,7 @@
           </a:bodyPr>
           <a:lstStyle/>
           <a:p>
+            <a:pPr algn="ctr"/>
             <a:r>
               <a:rPr lang="ru-RU" dirty="0"/>
               <a:t>Требования и проблемы МВР</a:t>
@@ -17069,14 +17284,14 @@
             <p:ph idx="1"/>
             <p:extLst>
               <p:ext uri="{D42A27DB-BD31-4B8C-83A1-F6EECF244321}">
-                <p14:modId xmlns:p14="http://schemas.microsoft.com/office/powerpoint/2010/main" val="2484640271"/>
+                <p14:modId xmlns:p14="http://schemas.microsoft.com/office/powerpoint/2010/main" val="3926223313"/>
               </p:ext>
             </p:extLst>
           </p:nvPr>
         </p:nvGraphicFramePr>
         <p:xfrm>
           <a:off x="187890" y="776613"/>
-          <a:ext cx="11724363" cy="5730240"/>
+          <a:ext cx="11724363" cy="5791200"/>
         </p:xfrm>
         <a:graphic>
           <a:graphicData uri="http://schemas.openxmlformats.org/drawingml/2006/table">
@@ -17113,6 +17328,7 @@
                     <a:bodyPr/>
                     <a:lstStyle/>
                     <a:p>
+                      <a:pPr algn="ctr"/>
                       <a:endParaRPr lang="ru-RU" sz="2000" dirty="0"/>
                     </a:p>
                   </a:txBody>
@@ -17123,8 +17339,9 @@
                     <a:bodyPr/>
                     <a:lstStyle/>
                     <a:p>
+                      <a:pPr algn="ctr"/>
                       <a:r>
-                        <a:rPr lang="ru-RU" sz="2000" dirty="0"/>
+                        <a:rPr lang="ru-RU" sz="2400" b="1" dirty="0"/>
                         <a:t>Проблемы</a:t>
                       </a:r>
                     </a:p>
@@ -17136,8 +17353,9 @@
                     <a:bodyPr/>
                     <a:lstStyle/>
                     <a:p>
+                      <a:pPr algn="ctr"/>
                       <a:r>
-                        <a:rPr lang="ru-RU" sz="2000" dirty="0"/>
+                        <a:rPr lang="ru-RU" sz="2400" b="1" dirty="0"/>
                         <a:t>Решения </a:t>
                       </a:r>
                     </a:p>
@@ -17156,7 +17374,7 @@
                     <a:bodyPr/>
                     <a:lstStyle/>
                     <a:p>
-                      <a:pPr marL="0" marR="0" lvl="0" indent="0" algn="l" defTabSz="914400" rtl="0" eaLnBrk="1" fontAlgn="auto" latinLnBrk="0" hangingPunct="1">
+                      <a:pPr marL="0" marR="0" lvl="0" indent="0" algn="ctr" defTabSz="914400" rtl="0" eaLnBrk="1" fontAlgn="auto" latinLnBrk="0" hangingPunct="1">
                         <a:lnSpc>
                           <a:spcPct val="100000"/>
                         </a:lnSpc>
@@ -17203,6 +17421,7 @@
                     <a:bodyPr/>
                     <a:lstStyle/>
                     <a:p>
+                      <a:pPr algn="ctr"/>
                       <a:r>
                         <a:rPr lang="ru-RU" sz="2000" b="0" i="0" kern="1200" dirty="0">
                           <a:solidFill>
@@ -17217,6 +17436,7 @@
                       </a:r>
                     </a:p>
                     <a:p>
+                      <a:pPr algn="ctr"/>
                       <a:r>
                         <a:rPr lang="ru-RU" sz="2000" b="0" i="0" kern="1200" dirty="0">
                           <a:solidFill>
@@ -17238,7 +17458,7 @@
                     <a:bodyPr/>
                     <a:lstStyle/>
                     <a:p>
-                      <a:pPr marL="126000" indent="-126000">
+                      <a:pPr marL="126000" indent="-126000" algn="l">
                         <a:buFont typeface="Arial" panose="020B0604020202020204" pitchFamily="34" charset="0"/>
                         <a:buChar char="•"/>
                       </a:pPr>
@@ -17252,7 +17472,7 @@
                       </a:r>
                     </a:p>
                     <a:p>
-                      <a:pPr marL="126000" indent="-126000">
+                      <a:pPr marL="126000" indent="-126000" algn="l">
                         <a:buFont typeface="Arial" panose="020B0604020202020204" pitchFamily="34" charset="0"/>
                         <a:buChar char="•"/>
                       </a:pPr>
@@ -17275,7 +17495,7 @@
                       <a:endParaRPr lang="ru-RU" sz="2000" dirty="0"/>
                     </a:p>
                     <a:p>
-                      <a:pPr marL="126000" indent="-126000">
+                      <a:pPr marL="126000" indent="-126000" algn="l">
                         <a:buFont typeface="Arial" panose="020B0604020202020204" pitchFamily="34" charset="0"/>
                         <a:buChar char="•"/>
                       </a:pPr>
@@ -17299,6 +17519,7 @@
                     <a:bodyPr/>
                     <a:lstStyle/>
                     <a:p>
+                      <a:pPr algn="ctr"/>
                       <a:r>
                         <a:rPr lang="ru-RU" sz="2000" b="0" i="0" kern="1200" dirty="0">
                           <a:solidFill>
@@ -17324,6 +17545,7 @@
                     <a:bodyPr/>
                     <a:lstStyle/>
                     <a:p>
+                      <a:pPr algn="ctr"/>
                       <a:r>
                         <a:rPr lang="ru-RU" sz="2000" dirty="0"/>
                         <a:t>Разные сезонности в рядах (где-то сутки, где то год)</a:t>
@@ -17337,7 +17559,7 @@
                     <a:bodyPr/>
                     <a:lstStyle/>
                     <a:p>
-                      <a:pPr marL="126000" indent="-126000">
+                      <a:pPr marL="126000" indent="-126000" algn="l">
                         <a:buFont typeface="Arial" panose="020B0604020202020204" pitchFamily="34" charset="0"/>
                         <a:buChar char="•"/>
                       </a:pPr>
@@ -17355,7 +17577,7 @@
                       </a:r>
                     </a:p>
                     <a:p>
-                      <a:pPr marL="126000" indent="-126000">
+                      <a:pPr marL="126000" indent="-126000" algn="l">
                         <a:buFont typeface="Arial" panose="020B0604020202020204" pitchFamily="34" charset="0"/>
                         <a:buChar char="•"/>
                       </a:pPr>
@@ -17365,7 +17587,7 @@
                       </a:r>
                     </a:p>
                     <a:p>
-                      <a:pPr marL="126000" indent="-126000">
+                      <a:pPr marL="126000" indent="-126000" algn="l">
                         <a:buFont typeface="Arial" panose="020B0604020202020204" pitchFamily="34" charset="0"/>
                         <a:buChar char="•"/>
                       </a:pPr>
@@ -17396,6 +17618,7 @@
                     <a:bodyPr/>
                     <a:lstStyle/>
                     <a:p>
+                      <a:pPr algn="ctr"/>
                       <a:r>
                         <a:rPr lang="ru-RU" sz="2000" dirty="0"/>
                         <a:t>Связи между рядами</a:t>
@@ -17409,6 +17632,7 @@
                     <a:bodyPr/>
                     <a:lstStyle/>
                     <a:p>
+                      <a:pPr algn="ctr"/>
                       <a:r>
                         <a:rPr lang="ru-RU" sz="2000" dirty="0"/>
                         <a:t>Неучет  связи приводит к ложным выводам, </a:t>
@@ -17447,7 +17671,7 @@
                     <a:bodyPr/>
                     <a:lstStyle/>
                     <a:p>
-                      <a:pPr marL="126000" indent="-126000">
+                      <a:pPr marL="126000" indent="-126000" algn="l">
                         <a:buFont typeface="Arial" panose="020B0604020202020204" pitchFamily="34" charset="0"/>
                         <a:buChar char="•"/>
                       </a:pPr>
@@ -17457,7 +17681,7 @@
                       </a:r>
                     </a:p>
                     <a:p>
-                      <a:pPr marL="126000" indent="-126000">
+                      <a:pPr marL="126000" indent="-126000" algn="l">
                         <a:buFont typeface="Arial" panose="020B0604020202020204" pitchFamily="34" charset="0"/>
                         <a:buChar char="•"/>
                       </a:pPr>
@@ -17483,7 +17707,7 @@
                       </a:r>
                     </a:p>
                     <a:p>
-                      <a:pPr marL="126000" indent="-126000">
+                      <a:pPr marL="126000" indent="-126000" algn="l">
                         <a:buFont typeface="Arial" panose="020B0604020202020204" pitchFamily="34" charset="0"/>
                         <a:buChar char="•"/>
                       </a:pPr>
@@ -17511,6 +17735,7 @@
                     <a:bodyPr/>
                     <a:lstStyle/>
                     <a:p>
+                      <a:pPr algn="ctr"/>
                       <a:r>
                         <a:rPr lang="ru-RU" sz="2000" dirty="0"/>
                         <a:t>стационар.</a:t>
@@ -17524,6 +17749,7 @@
                     <a:bodyPr/>
                     <a:lstStyle/>
                     <a:p>
+                      <a:pPr algn="ctr"/>
                       <a:r>
                         <a:rPr lang="ru-RU" sz="2000" dirty="0"/>
                         <a:t>ВР могут сводится независимо или только как комбинация</a:t>
@@ -17537,7 +17763,7 @@
                     <a:bodyPr/>
                     <a:lstStyle/>
                     <a:p>
-                      <a:pPr marL="126000" indent="-126000">
+                      <a:pPr marL="126000" indent="-126000" algn="l">
                         <a:buFont typeface="Arial" panose="020B0604020202020204" pitchFamily="34" charset="0"/>
                         <a:buChar char="•"/>
                       </a:pPr>
@@ -17556,7 +17782,7 @@
                       <a:endParaRPr lang="ru-RU" sz="2000" dirty="0"/>
                     </a:p>
                     <a:p>
-                      <a:pPr marL="126000" indent="-126000">
+                      <a:pPr marL="126000" indent="-126000" algn="l">
                         <a:buFont typeface="Arial" panose="020B0604020202020204" pitchFamily="34" charset="0"/>
                         <a:buChar char="•"/>
                       </a:pPr>
@@ -17584,6 +17810,7 @@
                     <a:bodyPr/>
                     <a:lstStyle/>
                     <a:p>
+                      <a:pPr algn="ctr"/>
                       <a:r>
                         <a:rPr lang="ru-RU" sz="2000" dirty="0"/>
                         <a:t>Глобальный объясняющий фактор</a:t>
@@ -17597,6 +17824,7 @@
                     <a:bodyPr/>
                     <a:lstStyle/>
                     <a:p>
+                      <a:pPr algn="ctr"/>
                       <a:r>
                         <a:rPr lang="ru-RU" sz="2000" dirty="0"/>
                         <a:t>Разделение влияния фактора от взаимных связей ВР</a:t>
@@ -17610,7 +17838,7 @@
                     <a:bodyPr/>
                     <a:lstStyle/>
                     <a:p>
-                      <a:pPr marL="126000" indent="-126000">
+                      <a:pPr marL="126000" indent="-126000" algn="l">
                         <a:buFont typeface="Arial" panose="020B0604020202020204" pitchFamily="34" charset="0"/>
                         <a:buChar char="•"/>
                       </a:pPr>
@@ -17620,7 +17848,7 @@
                       </a:r>
                     </a:p>
                     <a:p>
-                      <a:pPr marL="126000" indent="-126000">
+                      <a:pPr marL="126000" indent="-126000" algn="l">
                         <a:buFont typeface="Arial" panose="020B0604020202020204" pitchFamily="34" charset="0"/>
                         <a:buChar char="•"/>
                       </a:pPr>
@@ -17630,7 +17858,7 @@
                       </a:r>
                     </a:p>
                     <a:p>
-                      <a:pPr marL="126000" indent="-126000">
+                      <a:pPr marL="126000" indent="-126000" algn="l">
                         <a:buFont typeface="Arial" panose="020B0604020202020204" pitchFamily="34" charset="0"/>
                         <a:buChar char="•"/>
                       </a:pPr>
@@ -17720,8 +17948,8 @@
           </a:p>
         </p:txBody>
       </p:sp>
-      <mc:AlternateContent xmlns:mc="http://schemas.openxmlformats.org/markup-compatibility/2006">
-        <mc:Choice xmlns:a14="http://schemas.microsoft.com/office/drawing/2010/main" Requires="a14">
+      <mc:AlternateContent xmlns:mc="http://schemas.openxmlformats.org/markup-compatibility/2006" xmlns:a14="http://schemas.microsoft.com/office/drawing/2010/main">
+        <mc:Choice Requires="a14">
           <p:sp>
             <p:nvSpPr>
               <p:cNvPr id="3" name="Объект 2"/>
@@ -19817,7 +20045,7 @@
             </p:txBody>
           </p:sp>
         </mc:Choice>
-        <mc:Fallback>
+        <mc:Fallback xmlns="">
           <p:sp>
             <p:nvSpPr>
               <p:cNvPr id="3" name="Объект 2"/>
@@ -20450,7 +20678,7 @@
                 <a16:creationId xmlns:a16="http://schemas.microsoft.com/office/drawing/2014/main" id="{1A95671B-3CC6-4792-9114-B74FAEA224E6}"/>
               </a:ext>
               <a:ext uri="{C183D7F6-B498-43B3-948B-1728B52AA6E4}">
-                <adec:decorative xmlns:adec="http://schemas.microsoft.com/office/drawing/2017/decorative" val="1"/>
+                <adec:decorative xmlns:adec="http://schemas.microsoft.com/office/drawing/2017/decorative" xmlns="" val="1"/>
               </a:ext>
             </a:extLst>
           </p:cNvPr>
@@ -20587,7 +20815,7 @@
           <p:nvPr/>
         </p:nvPicPr>
         <p:blipFill>
-          <a:blip r:embed="rId2">
+          <a:blip r:embed="rId2" cstate="print">
             <a:extLst>
               <a:ext uri="{28A0092B-C50C-407E-A947-70E740481C1C}">
                 <a14:useLocalDpi xmlns:a14="http://schemas.microsoft.com/office/drawing/2010/main" val="0"/>
@@ -20633,7 +20861,7 @@
           <p:nvPr/>
         </p:nvPicPr>
         <p:blipFill>
-          <a:blip r:embed="rId3">
+          <a:blip r:embed="rId3" cstate="print">
             <a:extLst>
               <a:ext uri="{28A0092B-C50C-407E-A947-70E740481C1C}">
                 <a14:useLocalDpi xmlns:a14="http://schemas.microsoft.com/office/drawing/2010/main" val="0"/>
@@ -20884,7 +21112,7 @@
           <p:nvPr/>
         </p:nvPicPr>
         <p:blipFill>
-          <a:blip r:embed="rId4">
+          <a:blip r:embed="rId4" cstate="print">
             <a:extLst>
               <a:ext uri="{28A0092B-C50C-407E-A947-70E740481C1C}">
                 <a14:useLocalDpi xmlns:a14="http://schemas.microsoft.com/office/drawing/2010/main" val="0"/>
@@ -21136,8 +21364,8 @@
           </a:p>
         </p:txBody>
       </p:sp>
-      <mc:AlternateContent xmlns:mc="http://schemas.openxmlformats.org/markup-compatibility/2006">
-        <mc:Choice xmlns:a14="http://schemas.microsoft.com/office/drawing/2010/main" Requires="a14">
+      <mc:AlternateContent xmlns:mc="http://schemas.openxmlformats.org/markup-compatibility/2006" xmlns:a14="http://schemas.microsoft.com/office/drawing/2010/main">
+        <mc:Choice Requires="a14">
           <p:sp>
             <p:nvSpPr>
               <p:cNvPr id="3" name="Объект 2">
@@ -21603,7 +21831,7 @@
                     <m:sSub>
                       <m:sSubPr>
                         <m:ctrlPr>
-                          <a:rPr lang="en-US" sz="2200" b="0" i="0" smtClean="0">
+                          <a:rPr lang="en-US" sz="2200" b="0" i="1" smtClean="0">
                             <a:latin typeface="Cambria Math" panose="02040503050406030204" pitchFamily="18" charset="0"/>
                           </a:rPr>
                         </m:ctrlPr>
@@ -21730,7 +21958,7 @@
                         <m:d>
                           <m:dPr>
                             <m:ctrlPr>
-                              <a:rPr lang="en-US" sz="2200" b="0" i="0" smtClean="0">
+                              <a:rPr lang="en-US" sz="2200" b="0" i="1" smtClean="0">
                                 <a:latin typeface="Cambria Math" panose="02040503050406030204" pitchFamily="18" charset="0"/>
                               </a:rPr>
                             </m:ctrlPr>
@@ -21916,7 +22144,7 @@
             </p:txBody>
           </p:sp>
         </mc:Choice>
-        <mc:Fallback>
+        <mc:Fallback xmlns="">
           <p:sp>
             <p:nvSpPr>
               <p:cNvPr id="3" name="Объект 2">
